--- a/IUEA_Teaching_Plan/decks/CML3112_Week15_Design_Infrastructure.pptx
+++ b/IUEA_Teaching_Plan/decks/CML3112_Week15_Design_Infrastructure.pptx
@@ -2,36 +2,36 @@
 <file path=ppt/presentation.xml><?xml version="1.0" encoding="utf-8"?>
 <p:presentation xmlns:p="http://schemas.openxmlformats.org/presentationml/2006/main">
   <p:sldMasterIdLst>
-    <p:sldMasterId xmlns:r="http://schemas.openxmlformats.org/officeDocument/2006/relationships" id="2147483648" r:id="R106c87bd453e43f3"/>
+    <p:sldMasterId xmlns:r="http://schemas.openxmlformats.org/officeDocument/2006/relationships" id="2147483648" r:id="R38006fe1c9ef4e61"/>
   </p:sldMasterIdLst>
   <p:notesMasterIdLst>
-    <p:notesMasterId xmlns:r="http://schemas.openxmlformats.org/officeDocument/2006/relationships" r:id="R844d9eee50c6414e"/>
+    <p:notesMasterId xmlns:r="http://schemas.openxmlformats.org/officeDocument/2006/relationships" r:id="R1a086a7e71774fe6"/>
   </p:notesMasterIdLst>
   <p:sldIdLst>
-    <p:sldId xmlns:r="http://schemas.openxmlformats.org/officeDocument/2006/relationships" id="256" r:id="Rd6fb26a507434a91"/>
-    <p:sldId xmlns:r="http://schemas.openxmlformats.org/officeDocument/2006/relationships" id="257" r:id="R280e681280ea4d94"/>
-    <p:sldId xmlns:r="http://schemas.openxmlformats.org/officeDocument/2006/relationships" id="258" r:id="Rc971f6739f3e46b4"/>
-    <p:sldId xmlns:r="http://schemas.openxmlformats.org/officeDocument/2006/relationships" id="259" r:id="R4a1008ab33ee4d27"/>
-    <p:sldId xmlns:r="http://schemas.openxmlformats.org/officeDocument/2006/relationships" id="260" r:id="Ra4f6f03acf6a448c"/>
-    <p:sldId xmlns:r="http://schemas.openxmlformats.org/officeDocument/2006/relationships" id="261" r:id="R5907dfb1cd004320"/>
-    <p:sldId xmlns:r="http://schemas.openxmlformats.org/officeDocument/2006/relationships" id="262" r:id="R0b05b328e89b4e46"/>
-    <p:sldId xmlns:r="http://schemas.openxmlformats.org/officeDocument/2006/relationships" id="263" r:id="R2be1b68b06194130"/>
-    <p:sldId xmlns:r="http://schemas.openxmlformats.org/officeDocument/2006/relationships" id="264" r:id="R9cf007c153f541ee"/>
-    <p:sldId xmlns:r="http://schemas.openxmlformats.org/officeDocument/2006/relationships" id="265" r:id="R85453be9c2df4ba9"/>
-    <p:sldId xmlns:r="http://schemas.openxmlformats.org/officeDocument/2006/relationships" id="266" r:id="R0231abaf74424752"/>
-    <p:sldId xmlns:r="http://schemas.openxmlformats.org/officeDocument/2006/relationships" id="267" r:id="R6b178a1718704268"/>
-    <p:sldId xmlns:r="http://schemas.openxmlformats.org/officeDocument/2006/relationships" id="268" r:id="R24a14d229ce74f55"/>
-    <p:sldId xmlns:r="http://schemas.openxmlformats.org/officeDocument/2006/relationships" id="269" r:id="R994e0a0cc0cb4a0a"/>
-    <p:sldId xmlns:r="http://schemas.openxmlformats.org/officeDocument/2006/relationships" id="270" r:id="R3d698c60c9d1433e"/>
-    <p:sldId xmlns:r="http://schemas.openxmlformats.org/officeDocument/2006/relationships" id="271" r:id="R33f1755348fd490d"/>
-    <p:sldId xmlns:r="http://schemas.openxmlformats.org/officeDocument/2006/relationships" id="272" r:id="R3e014610ca0041cc"/>
-    <p:sldId xmlns:r="http://schemas.openxmlformats.org/officeDocument/2006/relationships" id="273" r:id="Rb55a40da292d426b"/>
-    <p:sldId xmlns:r="http://schemas.openxmlformats.org/officeDocument/2006/relationships" id="274" r:id="R262c9b939273490c"/>
-    <p:sldId xmlns:r="http://schemas.openxmlformats.org/officeDocument/2006/relationships" id="275" r:id="R3fe19d7c1a3e41c9"/>
-    <p:sldId xmlns:r="http://schemas.openxmlformats.org/officeDocument/2006/relationships" id="276" r:id="Rf3141a4983e241a0"/>
-    <p:sldId xmlns:r="http://schemas.openxmlformats.org/officeDocument/2006/relationships" id="277" r:id="R20a770a7d65544fb"/>
-    <p:sldId xmlns:r="http://schemas.openxmlformats.org/officeDocument/2006/relationships" id="278" r:id="R91f5e078c07d4acf"/>
-    <p:sldId xmlns:r="http://schemas.openxmlformats.org/officeDocument/2006/relationships" id="279" r:id="Ra59bc062905740fc"/>
+    <p:sldId xmlns:r="http://schemas.openxmlformats.org/officeDocument/2006/relationships" id="256" r:id="R3a399bb4c4e74789"/>
+    <p:sldId xmlns:r="http://schemas.openxmlformats.org/officeDocument/2006/relationships" id="257" r:id="R098226f278704ad3"/>
+    <p:sldId xmlns:r="http://schemas.openxmlformats.org/officeDocument/2006/relationships" id="258" r:id="R944e04c9125f4a90"/>
+    <p:sldId xmlns:r="http://schemas.openxmlformats.org/officeDocument/2006/relationships" id="259" r:id="R9da8a0e31fca4f57"/>
+    <p:sldId xmlns:r="http://schemas.openxmlformats.org/officeDocument/2006/relationships" id="260" r:id="Red3e48e863304145"/>
+    <p:sldId xmlns:r="http://schemas.openxmlformats.org/officeDocument/2006/relationships" id="261" r:id="R0f6da96b98764285"/>
+    <p:sldId xmlns:r="http://schemas.openxmlformats.org/officeDocument/2006/relationships" id="262" r:id="R67c8b6b65dcc4e3f"/>
+    <p:sldId xmlns:r="http://schemas.openxmlformats.org/officeDocument/2006/relationships" id="263" r:id="R6d62bc38583b457e"/>
+    <p:sldId xmlns:r="http://schemas.openxmlformats.org/officeDocument/2006/relationships" id="264" r:id="R9d6ec0a231544d4c"/>
+    <p:sldId xmlns:r="http://schemas.openxmlformats.org/officeDocument/2006/relationships" id="265" r:id="R7625bfe833b04584"/>
+    <p:sldId xmlns:r="http://schemas.openxmlformats.org/officeDocument/2006/relationships" id="266" r:id="R479e830122dd4b74"/>
+    <p:sldId xmlns:r="http://schemas.openxmlformats.org/officeDocument/2006/relationships" id="267" r:id="R3874137705d34da0"/>
+    <p:sldId xmlns:r="http://schemas.openxmlformats.org/officeDocument/2006/relationships" id="268" r:id="Re500d5fa40ff40f9"/>
+    <p:sldId xmlns:r="http://schemas.openxmlformats.org/officeDocument/2006/relationships" id="269" r:id="Ree17c12a7a5b4cda"/>
+    <p:sldId xmlns:r="http://schemas.openxmlformats.org/officeDocument/2006/relationships" id="270" r:id="R4215f171f1d34ff3"/>
+    <p:sldId xmlns:r="http://schemas.openxmlformats.org/officeDocument/2006/relationships" id="271" r:id="Re160778f2e8149e0"/>
+    <p:sldId xmlns:r="http://schemas.openxmlformats.org/officeDocument/2006/relationships" id="272" r:id="Rb16996f501e24a35"/>
+    <p:sldId xmlns:r="http://schemas.openxmlformats.org/officeDocument/2006/relationships" id="273" r:id="Ra7bcfb2030514624"/>
+    <p:sldId xmlns:r="http://schemas.openxmlformats.org/officeDocument/2006/relationships" id="274" r:id="Rf25ee9f2077d4ff7"/>
+    <p:sldId xmlns:r="http://schemas.openxmlformats.org/officeDocument/2006/relationships" id="275" r:id="R6408fdc3ed684ad5"/>
+    <p:sldId xmlns:r="http://schemas.openxmlformats.org/officeDocument/2006/relationships" id="276" r:id="Reaf3fbc673534872"/>
+    <p:sldId xmlns:r="http://schemas.openxmlformats.org/officeDocument/2006/relationships" id="277" r:id="R71d6567625f44f2f"/>
+    <p:sldId xmlns:r="http://schemas.openxmlformats.org/officeDocument/2006/relationships" id="278" r:id="R75a0271b6b944478"/>
+    <p:sldId xmlns:r="http://schemas.openxmlformats.org/officeDocument/2006/relationships" id="279" r:id="Raf5e43af0ce04c19"/>
   </p:sldIdLst>
   <p:sldSz cx="12191695" cy="6858000"/>
   <p:notesSz cx="6858000" cy="9144000"/>
@@ -485,7 +485,7 @@
           </a:p>
           <a:p xmlns:a="http://schemas.openxmlformats.org/drawingml/2006/main">
             <a:r>
-              <a:t>Build on the preceding week. Explain why this example is needed before running it.</a:t>
+              <a:t>Previous slide: the preceding week.</a:t>
             </a:r>
           </a:p>
           <a:p xmlns:a="http://schemas.openxmlformats.org/drawingml/2006/main">
@@ -510,26 +510,6 @@
           </a:p>
           <a:p xmlns:a="http://schemas.openxmlformats.org/drawingml/2006/main">
             <a:r>
-              <a:t>LECTURER DETAIL</a:t>
-            </a:r>
-          </a:p>
-          <a:p xmlns:a="http://schemas.openxmlformats.org/drawingml/2006/main">
-            <a:r>
-              <a:t>TEACHING PURPOSE</a:t>
-            </a:r>
-          </a:p>
-          <a:p xmlns:a="http://schemas.openxmlformats.org/drawingml/2006/main">
-            <a:r>
-              <a:t>Presenting the project and individual contribution</a:t>
-            </a:r>
-          </a:p>
-          <a:p xmlns:a="http://schemas.openxmlformats.org/drawingml/2006/main">
-            <a:r>
-              <a:t/>
-            </a:r>
-          </a:p>
-          <a:p xmlns:a="http://schemas.openxmlformats.org/drawingml/2006/main">
-            <a:r>
               <a:t>LECTURER CUE</a:t>
             </a:r>
           </a:p>
@@ -545,12 +525,12 @@
           </a:p>
           <a:p xmlns:a="http://schemas.openxmlformats.org/drawingml/2006/main">
             <a:r>
-              <a:t>PROJECT UPLOAD SET</a:t>
-            </a:r>
-          </a:p>
-          <a:p xmlns:a="http://schemas.openxmlformats.org/drawingml/2006/main">
-            <a:r>
-              <a:t>For the DA_PROJECT or ML_PROJECT, submit the completed project .ipynb together with one readable DOCX or selectable-text PDF report. This differs from the single-notebook test packet. The current public project guide defines the evidence and rubric; do not substitute weekly practice for the project.</a:t>
+              <a:t>TEACHING MODE</a:t>
+            </a:r>
+          </a:p>
+          <a:p xmlns:a="http://schemas.openxmlformats.org/drawingml/2006/main">
+            <a:r>
+              <a:t>Demonstrate first. Read each new symbol aloud, trace the values and compare the shown output. Learners repeat worked examples individually after class.</a:t>
             </a:r>
           </a:p>
           <a:p xmlns:a="http://schemas.openxmlformats.org/drawingml/2006/main">
@@ -565,37 +545,22 @@
           </a:p>
           <a:p xmlns:a="http://schemas.openxmlformats.org/drawingml/2006/main">
             <a:r>
-              <a:t>Today’s learning. Move on after a learner can explain the current example or required action.</a:t>
-            </a:r>
-          </a:p>
-          <a:p xmlns:a="http://schemas.openxmlformats.org/drawingml/2006/main">
-            <a:r>
-              <a:t/>
-            </a:r>
-          </a:p>
-          <a:p xmlns:a="http://schemas.openxmlformats.org/drawingml/2006/main">
-            <a:r>
-              <a:t>TEACHING MODE</a:t>
-            </a:r>
-          </a:p>
-          <a:p xmlns:a="http://schemas.openxmlformats.org/drawingml/2006/main">
-            <a:r>
-              <a:t>Demonstrate the example directly. Explain each new name, symbol and output. Use the revision example for an individual check after class; no live partner activity is required.</a:t>
-            </a:r>
-          </a:p>
-          <a:p xmlns:a="http://schemas.openxmlformats.org/drawingml/2006/main">
-            <a:r>
-              <a:t/>
-            </a:r>
-          </a:p>
-          <a:p xmlns:a="http://schemas.openxmlformats.org/drawingml/2006/main">
-            <a:r>
-              <a:t>NEXT</a:t>
-            </a:r>
-          </a:p>
-          <a:p xmlns:a="http://schemas.openxmlformats.org/drawingml/2006/main">
-            <a:r>
               <a:t>Today’s learning.</a:t>
+            </a:r>
+          </a:p>
+          <a:p xmlns:a="http://schemas.openxmlformats.org/drawingml/2006/main">
+            <a:r>
+              <a:t/>
+            </a:r>
+          </a:p>
+          <a:p xmlns:a="http://schemas.openxmlformats.org/drawingml/2006/main">
+            <a:r>
+              <a:t>REFERENCES</a:t>
+            </a:r>
+          </a:p>
+          <a:p xmlns:a="http://schemas.openxmlformats.org/drawingml/2006/main">
+            <a:r>
+              <a:t/>
             </a:r>
           </a:p>
         </p:txBody>
@@ -685,7 +650,7 @@
           </a:p>
           <a:p xmlns:a="http://schemas.openxmlformats.org/drawingml/2006/main">
             <a:r>
-              <a:t>Build on Your evidence. Explain why this example is needed before running it.</a:t>
+              <a:t>Previous slide: Your evidence.</a:t>
             </a:r>
           </a:p>
           <a:p xmlns:a="http://schemas.openxmlformats.org/drawingml/2006/main">
@@ -740,41 +705,6 @@
           </a:p>
           <a:p xmlns:a="http://schemas.openxmlformats.org/drawingml/2006/main">
             <a:r>
-              <a:t>LECTURER DETAIL</a:t>
-            </a:r>
-          </a:p>
-          <a:p xmlns:a="http://schemas.openxmlformats.org/drawingml/2006/main">
-            <a:r>
-              <a:t>TEACHING PURPOSE</a:t>
-            </a:r>
-          </a:p>
-          <a:p xmlns:a="http://schemas.openxmlformats.org/drawingml/2006/main">
-            <a:r>
-              <a:t>Engineering ML project</a:t>
-            </a:r>
-          </a:p>
-          <a:p xmlns:a="http://schemas.openxmlformats.org/drawingml/2006/main">
-            <a:r>
-              <a:t/>
-            </a:r>
-          </a:p>
-          <a:p xmlns:a="http://schemas.openxmlformats.org/drawingml/2006/main">
-            <a:r>
-              <a:t>CONNECT</a:t>
-            </a:r>
-          </a:p>
-          <a:p xmlns:a="http://schemas.openxmlformats.org/drawingml/2006/main">
-            <a:r>
-              <a:t>Build on the preceding slide: Your evidence.</a:t>
-            </a:r>
-          </a:p>
-          <a:p xmlns:a="http://schemas.openxmlformats.org/drawingml/2006/main">
-            <a:r>
-              <a:t/>
-            </a:r>
-          </a:p>
-          <a:p xmlns:a="http://schemas.openxmlformats.org/drawingml/2006/main">
-            <a:r>
               <a:t>LECTURER CUE</a:t>
             </a:r>
           </a:p>
@@ -795,72 +725,12 @@
           </a:p>
           <a:p xmlns:a="http://schemas.openxmlformats.org/drawingml/2006/main">
             <a:r>
-              <a:t>EXPLAIN IN ORDINARY WORDS</a:t>
-            </a:r>
-          </a:p>
-          <a:p xmlns:a="http://schemas.openxmlformats.org/drawingml/2006/main">
-            <a:r>
-              <a:t>A function is a named set of instructions. def defines it; a call runs it with inputs. Parameters are input names, arguments are supplied values, and return sends the result back.</a:t>
-            </a:r>
-          </a:p>
-          <a:p xmlns:a="http://schemas.openxmlformats.org/drawingml/2006/main">
-            <a:r>
-              <a:t/>
-            </a:r>
-          </a:p>
-          <a:p xmlns:a="http://schemas.openxmlformats.org/drawingml/2006/main">
-            <a:r>
-              <a:t>CHECK AND EXPECTED ANSWER</a:t>
-            </a:r>
-          </a:p>
-          <a:p xmlns:a="http://schemas.openxmlformats.org/drawingml/2006/main">
-            <a:r>
-              <a:t>Does print(8) return the number 8 to the caller? No; it displays 8 and returns None. A function needing a numeric result should return it.</a:t>
-            </a:r>
-          </a:p>
-          <a:p xmlns:a="http://schemas.openxmlformats.org/drawingml/2006/main">
-            <a:r>
-              <a:t/>
-            </a:r>
-          </a:p>
-          <a:p xmlns:a="http://schemas.openxmlformats.org/drawingml/2006/main">
-            <a:r>
-              <a:t>IF LEARNERS ARE STUCK</a:t>
-            </a:r>
-          </a:p>
-          <a:p xmlns:a="http://schemas.openxmlformats.org/drawingml/2006/main">
-            <a:r>
-              <a:t>Trace one call: bind input names, run the indented body, reach return, then put the returned result back into the calling expression.</a:t>
-            </a:r>
-          </a:p>
-          <a:p xmlns:a="http://schemas.openxmlformats.org/drawingml/2006/main">
-            <a:r>
-              <a:t/>
-            </a:r>
-          </a:p>
-          <a:p xmlns:a="http://schemas.openxmlformats.org/drawingml/2006/main">
-            <a:r>
-              <a:t>ASSIGNMENT HANDOVER</a:t>
-            </a:r>
-          </a:p>
-          <a:p xmlns:a="http://schemas.openxmlformats.org/drawingml/2006/main">
-            <a:r>
-              <a:t>Open the matching public student guide and show the exact starter filename, required outputs and upload set. Ask one learner to repeat what to submit and where. IUEA Student Registration Number is required freeform text; learners enter their own number. A saved repository is not a submitted form. Read the live deadline and keep the submission confirmation. Do not release an assessment that is still awaiting grading validation.</a:t>
-            </a:r>
-          </a:p>
-          <a:p xmlns:a="http://schemas.openxmlformats.org/drawingml/2006/main">
-            <a:r>
-              <a:t/>
-            </a:r>
-          </a:p>
-          <a:p xmlns:a="http://schemas.openxmlformats.org/drawingml/2006/main">
-            <a:r>
-              <a:t>PROJECT UPLOAD SET</a:t>
-            </a:r>
-          </a:p>
-          <a:p xmlns:a="http://schemas.openxmlformats.org/drawingml/2006/main">
-            <a:r>
-              <a:t>For the DA_PROJECT or ML_PROJECT, submit the completed project .ipynb together with one readable DOCX or selectable-text PDF report. This differs from the single-notebook test packet. The current public project guide defines the evidence and rubric; do not substitute weekly practice for the project.</a:t>
+              <a:t>TEACHING MODE</a:t>
+            </a:r>
+          </a:p>
+          <a:p xmlns:a="http://schemas.openxmlformats.org/drawingml/2006/main">
+            <a:r>
+              <a:t>Demonstrate first. Read each new symbol aloud, trace the values and compare the shown output. Learners repeat worked examples individually after class.</a:t>
             </a:r>
           </a:p>
           <a:p xmlns:a="http://schemas.openxmlformats.org/drawingml/2006/main">
@@ -875,37 +745,22 @@
           </a:p>
           <a:p xmlns:a="http://schemas.openxmlformats.org/drawingml/2006/main">
             <a:r>
-              <a:t>Engineering ML project continued. Move on after a learner can explain the current example or required action.</a:t>
-            </a:r>
-          </a:p>
-          <a:p xmlns:a="http://schemas.openxmlformats.org/drawingml/2006/main">
-            <a:r>
-              <a:t/>
-            </a:r>
-          </a:p>
-          <a:p xmlns:a="http://schemas.openxmlformats.org/drawingml/2006/main">
-            <a:r>
-              <a:t>TEACHING MODE</a:t>
-            </a:r>
-          </a:p>
-          <a:p xmlns:a="http://schemas.openxmlformats.org/drawingml/2006/main">
-            <a:r>
-              <a:t>Demonstrate the example directly. Explain each new name, symbol and output. Use the revision example for an individual check after class; no live partner activity is required.</a:t>
-            </a:r>
-          </a:p>
-          <a:p xmlns:a="http://schemas.openxmlformats.org/drawingml/2006/main">
-            <a:r>
-              <a:t/>
-            </a:r>
-          </a:p>
-          <a:p xmlns:a="http://schemas.openxmlformats.org/drawingml/2006/main">
-            <a:r>
-              <a:t>NEXT</a:t>
-            </a:r>
-          </a:p>
-          <a:p xmlns:a="http://schemas.openxmlformats.org/drawingml/2006/main">
-            <a:r>
               <a:t>Engineering ML project continued.</a:t>
+            </a:r>
+          </a:p>
+          <a:p xmlns:a="http://schemas.openxmlformats.org/drawingml/2006/main">
+            <a:r>
+              <a:t/>
+            </a:r>
+          </a:p>
+          <a:p xmlns:a="http://schemas.openxmlformats.org/drawingml/2006/main">
+            <a:r>
+              <a:t>REFERENCES</a:t>
+            </a:r>
+          </a:p>
+          <a:p xmlns:a="http://schemas.openxmlformats.org/drawingml/2006/main">
+            <a:r>
+              <a:t/>
             </a:r>
           </a:p>
         </p:txBody>
@@ -995,7 +850,7 @@
           </a:p>
           <a:p xmlns:a="http://schemas.openxmlformats.org/drawingml/2006/main">
             <a:r>
-              <a:t>Build on Engineering ML project. Explain why this example is needed before running it.</a:t>
+              <a:t>Previous slide: Engineering ML project.</a:t>
             </a:r>
           </a:p>
           <a:p xmlns:a="http://schemas.openxmlformats.org/drawingml/2006/main">
@@ -1050,41 +905,6 @@
           </a:p>
           <a:p xmlns:a="http://schemas.openxmlformats.org/drawingml/2006/main">
             <a:r>
-              <a:t>LECTURER DETAIL</a:t>
-            </a:r>
-          </a:p>
-          <a:p xmlns:a="http://schemas.openxmlformats.org/drawingml/2006/main">
-            <a:r>
-              <a:t>TEACHING PURPOSE</a:t>
-            </a:r>
-          </a:p>
-          <a:p xmlns:a="http://schemas.openxmlformats.org/drawingml/2006/main">
-            <a:r>
-              <a:t>Engineering ML project continued</a:t>
-            </a:r>
-          </a:p>
-          <a:p xmlns:a="http://schemas.openxmlformats.org/drawingml/2006/main">
-            <a:r>
-              <a:t/>
-            </a:r>
-          </a:p>
-          <a:p xmlns:a="http://schemas.openxmlformats.org/drawingml/2006/main">
-            <a:r>
-              <a:t>CONNECT</a:t>
-            </a:r>
-          </a:p>
-          <a:p xmlns:a="http://schemas.openxmlformats.org/drawingml/2006/main">
-            <a:r>
-              <a:t>Build on the preceding slide: Engineering ML project.</a:t>
-            </a:r>
-          </a:p>
-          <a:p xmlns:a="http://schemas.openxmlformats.org/drawingml/2006/main">
-            <a:r>
-              <a:t/>
-            </a:r>
-          </a:p>
-          <a:p xmlns:a="http://schemas.openxmlformats.org/drawingml/2006/main">
-            <a:r>
               <a:t>LECTURER CUE</a:t>
             </a:r>
           </a:p>
@@ -1105,72 +925,12 @@
           </a:p>
           <a:p xmlns:a="http://schemas.openxmlformats.org/drawingml/2006/main">
             <a:r>
-              <a:t>EXPLAIN IN ORDINARY WORDS</a:t>
-            </a:r>
-          </a:p>
-          <a:p xmlns:a="http://schemas.openxmlformats.org/drawingml/2006/main">
-            <a:r>
-              <a:t>A cleaning decision needs evidence, a stated rule and a before/after check. Similar rows may be genuine repeated events. Reconciliation compares totals built under the same definitions.</a:t>
-            </a:r>
-          </a:p>
-          <a:p xmlns:a="http://schemas.openxmlformats.org/drawingml/2006/main">
-            <a:r>
-              <a:t/>
-            </a:r>
-          </a:p>
-          <a:p xmlns:a="http://schemas.openxmlformats.org/drawingml/2006/main">
-            <a:r>
-              <a:t>CHECK AND EXPECTED ANSWER</a:t>
-            </a:r>
-          </a:p>
-          <a:p xmlns:a="http://schemas.openxmlformats.org/drawingml/2006/main">
-            <a:r>
-              <a:t>May we delete every repeated amount? No. Check the row identifier and the table grain first.</a:t>
-            </a:r>
-          </a:p>
-          <a:p xmlns:a="http://schemas.openxmlformats.org/drawingml/2006/main">
-            <a:r>
-              <a:t/>
-            </a:r>
-          </a:p>
-          <a:p xmlns:a="http://schemas.openxmlformats.org/drawingml/2006/main">
-            <a:r>
-              <a:t>IF LEARNERS ARE STUCK</a:t>
-            </a:r>
-          </a:p>
-          <a:p xmlns:a="http://schemas.openxmlformats.org/drawingml/2006/main">
-            <a:r>
-              <a:t>Keep raw data, record counts before and after each action, then explain any remaining difference instead of forcing totals to agree.</a:t>
-            </a:r>
-          </a:p>
-          <a:p xmlns:a="http://schemas.openxmlformats.org/drawingml/2006/main">
-            <a:r>
-              <a:t/>
-            </a:r>
-          </a:p>
-          <a:p xmlns:a="http://schemas.openxmlformats.org/drawingml/2006/main">
-            <a:r>
-              <a:t>ASSIGNMENT HANDOVER</a:t>
-            </a:r>
-          </a:p>
-          <a:p xmlns:a="http://schemas.openxmlformats.org/drawingml/2006/main">
-            <a:r>
-              <a:t>Open the matching public student guide and show the exact starter filename, required outputs and upload set. Ask one learner to repeat what to submit and where. IUEA Student Registration Number is required freeform text; learners enter their own number. A saved repository is not a submitted form. Read the live deadline and keep the submission confirmation. Do not release an assessment that is still awaiting grading validation.</a:t>
-            </a:r>
-          </a:p>
-          <a:p xmlns:a="http://schemas.openxmlformats.org/drawingml/2006/main">
-            <a:r>
-              <a:t/>
-            </a:r>
-          </a:p>
-          <a:p xmlns:a="http://schemas.openxmlformats.org/drawingml/2006/main">
-            <a:r>
-              <a:t>PROJECT UPLOAD SET</a:t>
-            </a:r>
-          </a:p>
-          <a:p xmlns:a="http://schemas.openxmlformats.org/drawingml/2006/main">
-            <a:r>
-              <a:t>For the DA_PROJECT or ML_PROJECT, submit the completed project .ipynb together with one readable DOCX or selectable-text PDF report. This differs from the single-notebook test packet. The current public project guide defines the evidence and rubric; do not substitute weekly practice for the project.</a:t>
+              <a:t>TEACHING MODE</a:t>
+            </a:r>
+          </a:p>
+          <a:p xmlns:a="http://schemas.openxmlformats.org/drawingml/2006/main">
+            <a:r>
+              <a:t>Demonstrate first. Read each new symbol aloud, trace the values and compare the shown output. Learners repeat worked examples individually after class.</a:t>
             </a:r>
           </a:p>
           <a:p xmlns:a="http://schemas.openxmlformats.org/drawingml/2006/main">
@@ -1185,37 +945,22 @@
           </a:p>
           <a:p xmlns:a="http://schemas.openxmlformats.org/drawingml/2006/main">
             <a:r>
-              <a:t>Engineering ML project continued. Move on after a learner can explain the current example or required action.</a:t>
-            </a:r>
-          </a:p>
-          <a:p xmlns:a="http://schemas.openxmlformats.org/drawingml/2006/main">
-            <a:r>
-              <a:t/>
-            </a:r>
-          </a:p>
-          <a:p xmlns:a="http://schemas.openxmlformats.org/drawingml/2006/main">
-            <a:r>
-              <a:t>TEACHING MODE</a:t>
-            </a:r>
-          </a:p>
-          <a:p xmlns:a="http://schemas.openxmlformats.org/drawingml/2006/main">
-            <a:r>
-              <a:t>Demonstrate the example directly. Explain each new name, symbol and output. Use the revision example for an individual check after class; no live partner activity is required.</a:t>
-            </a:r>
-          </a:p>
-          <a:p xmlns:a="http://schemas.openxmlformats.org/drawingml/2006/main">
-            <a:r>
-              <a:t/>
-            </a:r>
-          </a:p>
-          <a:p xmlns:a="http://schemas.openxmlformats.org/drawingml/2006/main">
-            <a:r>
-              <a:t>NEXT</a:t>
-            </a:r>
-          </a:p>
-          <a:p xmlns:a="http://schemas.openxmlformats.org/drawingml/2006/main">
-            <a:r>
               <a:t>Engineering ML project continued.</a:t>
+            </a:r>
+          </a:p>
+          <a:p xmlns:a="http://schemas.openxmlformats.org/drawingml/2006/main">
+            <a:r>
+              <a:t/>
+            </a:r>
+          </a:p>
+          <a:p xmlns:a="http://schemas.openxmlformats.org/drawingml/2006/main">
+            <a:r>
+              <a:t>REFERENCES</a:t>
+            </a:r>
+          </a:p>
+          <a:p xmlns:a="http://schemas.openxmlformats.org/drawingml/2006/main">
+            <a:r>
+              <a:t/>
             </a:r>
           </a:p>
         </p:txBody>
@@ -1305,7 +1050,7 @@
           </a:p>
           <a:p xmlns:a="http://schemas.openxmlformats.org/drawingml/2006/main">
             <a:r>
-              <a:t>Build on Engineering ML project continued. Explain why this example is needed before running it.</a:t>
+              <a:t>Previous slide: Engineering ML project continued.</a:t>
             </a:r>
           </a:p>
           <a:p xmlns:a="http://schemas.openxmlformats.org/drawingml/2006/main">
@@ -1360,41 +1105,6 @@
           </a:p>
           <a:p xmlns:a="http://schemas.openxmlformats.org/drawingml/2006/main">
             <a:r>
-              <a:t>LECTURER DETAIL</a:t>
-            </a:r>
-          </a:p>
-          <a:p xmlns:a="http://schemas.openxmlformats.org/drawingml/2006/main">
-            <a:r>
-              <a:t>TEACHING PURPOSE</a:t>
-            </a:r>
-          </a:p>
-          <a:p xmlns:a="http://schemas.openxmlformats.org/drawingml/2006/main">
-            <a:r>
-              <a:t>Engineering ML project continued</a:t>
-            </a:r>
-          </a:p>
-          <a:p xmlns:a="http://schemas.openxmlformats.org/drawingml/2006/main">
-            <a:r>
-              <a:t/>
-            </a:r>
-          </a:p>
-          <a:p xmlns:a="http://schemas.openxmlformats.org/drawingml/2006/main">
-            <a:r>
-              <a:t>CONNECT</a:t>
-            </a:r>
-          </a:p>
-          <a:p xmlns:a="http://schemas.openxmlformats.org/drawingml/2006/main">
-            <a:r>
-              <a:t>Build on the preceding slide: Engineering ML project continued.</a:t>
-            </a:r>
-          </a:p>
-          <a:p xmlns:a="http://schemas.openxmlformats.org/drawingml/2006/main">
-            <a:r>
-              <a:t/>
-            </a:r>
-          </a:p>
-          <a:p xmlns:a="http://schemas.openxmlformats.org/drawingml/2006/main">
-            <a:r>
               <a:t>LECTURER CUE</a:t>
             </a:r>
           </a:p>
@@ -1415,72 +1125,12 @@
           </a:p>
           <a:p xmlns:a="http://schemas.openxmlformats.org/drawingml/2006/main">
             <a:r>
-              <a:t>EXPLAIN IN ORDINARY WORDS</a:t>
-            </a:r>
-          </a:p>
-          <a:p xmlns:a="http://schemas.openxmlformats.org/drawingml/2006/main">
-            <a:r>
-              <a:t>A value is a piece of information. A variable is a name referring to a value. In length_m = 5, Python evaluates the right side and binds that result to the name on the left.</a:t>
-            </a:r>
-          </a:p>
-          <a:p xmlns:a="http://schemas.openxmlformats.org/drawingml/2006/main">
-            <a:r>
-              <a:t/>
-            </a:r>
-          </a:p>
-          <a:p xmlns:a="http://schemas.openxmlformats.org/drawingml/2006/main">
-            <a:r>
-              <a:t>CHECK AND EXPECTED ANSWER</a:t>
-            </a:r>
-          </a:p>
-          <a:p xmlns:a="http://schemas.openxmlformats.org/drawingml/2006/main">
-            <a:r>
-              <a:t>After x=3 then x=5, what does print(x) display? 5. The earlier value is not added automatically.</a:t>
-            </a:r>
-          </a:p>
-          <a:p xmlns:a="http://schemas.openxmlformats.org/drawingml/2006/main">
-            <a:r>
-              <a:t/>
-            </a:r>
-          </a:p>
-          <a:p xmlns:a="http://schemas.openxmlformats.org/drawingml/2006/main">
-            <a:r>
-              <a:t>IF LEARNERS ARE STUCK</a:t>
-            </a:r>
-          </a:p>
-          <a:p xmlns:a="http://schemas.openxmlformats.org/drawingml/2006/main">
-            <a:r>
-              <a:t>Write the name on a card and the current value beside it. Distinguish number 3 from quoted text "3".</a:t>
-            </a:r>
-          </a:p>
-          <a:p xmlns:a="http://schemas.openxmlformats.org/drawingml/2006/main">
-            <a:r>
-              <a:t/>
-            </a:r>
-          </a:p>
-          <a:p xmlns:a="http://schemas.openxmlformats.org/drawingml/2006/main">
-            <a:r>
-              <a:t>ASSIGNMENT HANDOVER</a:t>
-            </a:r>
-          </a:p>
-          <a:p xmlns:a="http://schemas.openxmlformats.org/drawingml/2006/main">
-            <a:r>
-              <a:t>Open the matching public student guide and show the exact starter filename, required outputs and upload set. Ask one learner to repeat what to submit and where. IUEA Student Registration Number is required freeform text; learners enter their own number. A saved repository is not a submitted form. Read the live deadline and keep the submission confirmation. Do not release an assessment that is still awaiting grading validation.</a:t>
-            </a:r>
-          </a:p>
-          <a:p xmlns:a="http://schemas.openxmlformats.org/drawingml/2006/main">
-            <a:r>
-              <a:t/>
-            </a:r>
-          </a:p>
-          <a:p xmlns:a="http://schemas.openxmlformats.org/drawingml/2006/main">
-            <a:r>
-              <a:t>PROJECT UPLOAD SET</a:t>
-            </a:r>
-          </a:p>
-          <a:p xmlns:a="http://schemas.openxmlformats.org/drawingml/2006/main">
-            <a:r>
-              <a:t>For the DA_PROJECT or ML_PROJECT, submit the completed project .ipynb together with one readable DOCX or selectable-text PDF report. This differs from the single-notebook test packet. The current public project guide defines the evidence and rubric; do not substitute weekly practice for the project.</a:t>
+              <a:t>TEACHING MODE</a:t>
+            </a:r>
+          </a:p>
+          <a:p xmlns:a="http://schemas.openxmlformats.org/drawingml/2006/main">
+            <a:r>
+              <a:t>Demonstrate first. Read each new symbol aloud, trace the values and compare the shown output. Learners repeat worked examples individually after class.</a:t>
             </a:r>
           </a:p>
           <a:p xmlns:a="http://schemas.openxmlformats.org/drawingml/2006/main">
@@ -1495,37 +1145,22 @@
           </a:p>
           <a:p xmlns:a="http://schemas.openxmlformats.org/drawingml/2006/main">
             <a:r>
-              <a:t>Engineering ML project continued. Move on after a learner can explain the current example or required action.</a:t>
-            </a:r>
-          </a:p>
-          <a:p xmlns:a="http://schemas.openxmlformats.org/drawingml/2006/main">
-            <a:r>
-              <a:t/>
-            </a:r>
-          </a:p>
-          <a:p xmlns:a="http://schemas.openxmlformats.org/drawingml/2006/main">
-            <a:r>
-              <a:t>TEACHING MODE</a:t>
-            </a:r>
-          </a:p>
-          <a:p xmlns:a="http://schemas.openxmlformats.org/drawingml/2006/main">
-            <a:r>
-              <a:t>Demonstrate the example directly. Explain each new name, symbol and output. Use the revision example for an individual check after class; no live partner activity is required.</a:t>
-            </a:r>
-          </a:p>
-          <a:p xmlns:a="http://schemas.openxmlformats.org/drawingml/2006/main">
-            <a:r>
-              <a:t/>
-            </a:r>
-          </a:p>
-          <a:p xmlns:a="http://schemas.openxmlformats.org/drawingml/2006/main">
-            <a:r>
-              <a:t>NEXT</a:t>
-            </a:r>
-          </a:p>
-          <a:p xmlns:a="http://schemas.openxmlformats.org/drawingml/2006/main">
-            <a:r>
               <a:t>Engineering ML project continued.</a:t>
+            </a:r>
+          </a:p>
+          <a:p xmlns:a="http://schemas.openxmlformats.org/drawingml/2006/main">
+            <a:r>
+              <a:t/>
+            </a:r>
+          </a:p>
+          <a:p xmlns:a="http://schemas.openxmlformats.org/drawingml/2006/main">
+            <a:r>
+              <a:t>REFERENCES</a:t>
+            </a:r>
+          </a:p>
+          <a:p xmlns:a="http://schemas.openxmlformats.org/drawingml/2006/main">
+            <a:r>
+              <a:t/>
             </a:r>
           </a:p>
         </p:txBody>
@@ -1615,7 +1250,7 @@
           </a:p>
           <a:p xmlns:a="http://schemas.openxmlformats.org/drawingml/2006/main">
             <a:r>
-              <a:t>Build on Engineering ML project continued. Explain why this example is needed before running it.</a:t>
+              <a:t>Previous slide: Engineering ML project continued.</a:t>
             </a:r>
           </a:p>
           <a:p xmlns:a="http://schemas.openxmlformats.org/drawingml/2006/main">
@@ -1670,41 +1305,6 @@
           </a:p>
           <a:p xmlns:a="http://schemas.openxmlformats.org/drawingml/2006/main">
             <a:r>
-              <a:t>LECTURER DETAIL</a:t>
-            </a:r>
-          </a:p>
-          <a:p xmlns:a="http://schemas.openxmlformats.org/drawingml/2006/main">
-            <a:r>
-              <a:t>TEACHING PURPOSE</a:t>
-            </a:r>
-          </a:p>
-          <a:p xmlns:a="http://schemas.openxmlformats.org/drawingml/2006/main">
-            <a:r>
-              <a:t>Engineering ML project continued</a:t>
-            </a:r>
-          </a:p>
-          <a:p xmlns:a="http://schemas.openxmlformats.org/drawingml/2006/main">
-            <a:r>
-              <a:t/>
-            </a:r>
-          </a:p>
-          <a:p xmlns:a="http://schemas.openxmlformats.org/drawingml/2006/main">
-            <a:r>
-              <a:t>CONNECT</a:t>
-            </a:r>
-          </a:p>
-          <a:p xmlns:a="http://schemas.openxmlformats.org/drawingml/2006/main">
-            <a:r>
-              <a:t>Build on the preceding slide: Engineering ML project continued.</a:t>
-            </a:r>
-          </a:p>
-          <a:p xmlns:a="http://schemas.openxmlformats.org/drawingml/2006/main">
-            <a:r>
-              <a:t/>
-            </a:r>
-          </a:p>
-          <a:p xmlns:a="http://schemas.openxmlformats.org/drawingml/2006/main">
-            <a:r>
               <a:t>LECTURER CUE</a:t>
             </a:r>
           </a:p>
@@ -1725,72 +1325,12 @@
           </a:p>
           <a:p xmlns:a="http://schemas.openxmlformats.org/drawingml/2006/main">
             <a:r>
-              <a:t>EXPLAIN IN ORDINARY WORDS</a:t>
-            </a:r>
-          </a:p>
-          <a:p xmlns:a="http://schemas.openxmlformats.org/drawingml/2006/main">
-            <a:r>
-              <a:t>Missing means not recorded, not automatically zero. Decide why it is missing and document the rule. Fitted fill values must come from training data when evaluating a model.</a:t>
-            </a:r>
-          </a:p>
-          <a:p xmlns:a="http://schemas.openxmlformats.org/drawingml/2006/main">
-            <a:r>
-              <a:t/>
-            </a:r>
-          </a:p>
-          <a:p xmlns:a="http://schemas.openxmlformats.org/drawingml/2006/main">
-            <a:r>
-              <a:t>CHECK AND EXPECTED ANSWER</a:t>
-            </a:r>
-          </a:p>
-          <a:p xmlns:a="http://schemas.openxmlformats.org/drawingml/2006/main">
-            <a:r>
-              <a:t>Is an unrecorded energy reading evidence of zero consumption? No.</a:t>
-            </a:r>
-          </a:p>
-          <a:p xmlns:a="http://schemas.openxmlformats.org/drawingml/2006/main">
-            <a:r>
-              <a:t/>
-            </a:r>
-          </a:p>
-          <a:p xmlns:a="http://schemas.openxmlformats.org/drawingml/2006/main">
-            <a:r>
-              <a:t>IF LEARNERS ARE STUCK</a:t>
-            </a:r>
-          </a:p>
-          <a:p xmlns:a="http://schemas.openxmlformats.org/drawingml/2006/main">
-            <a:r>
-              <a:t>Use three rows: a recorded zero, a recorded positive value and a blank. Explain their different meanings before cleaning.</a:t>
-            </a:r>
-          </a:p>
-          <a:p xmlns:a="http://schemas.openxmlformats.org/drawingml/2006/main">
-            <a:r>
-              <a:t/>
-            </a:r>
-          </a:p>
-          <a:p xmlns:a="http://schemas.openxmlformats.org/drawingml/2006/main">
-            <a:r>
-              <a:t>ASSIGNMENT HANDOVER</a:t>
-            </a:r>
-          </a:p>
-          <a:p xmlns:a="http://schemas.openxmlformats.org/drawingml/2006/main">
-            <a:r>
-              <a:t>Open the matching public student guide and show the exact starter filename, required outputs and upload set. Ask one learner to repeat what to submit and where. IUEA Student Registration Number is required freeform text; learners enter their own number. A saved repository is not a submitted form. Read the live deadline and keep the submission confirmation. Do not release an assessment that is still awaiting grading validation.</a:t>
-            </a:r>
-          </a:p>
-          <a:p xmlns:a="http://schemas.openxmlformats.org/drawingml/2006/main">
-            <a:r>
-              <a:t/>
-            </a:r>
-          </a:p>
-          <a:p xmlns:a="http://schemas.openxmlformats.org/drawingml/2006/main">
-            <a:r>
-              <a:t>PROJECT UPLOAD SET</a:t>
-            </a:r>
-          </a:p>
-          <a:p xmlns:a="http://schemas.openxmlformats.org/drawingml/2006/main">
-            <a:r>
-              <a:t>For the DA_PROJECT or ML_PROJECT, submit the completed project .ipynb together with one readable DOCX or selectable-text PDF report. This differs from the single-notebook test packet. The current public project guide defines the evidence and rubric; do not substitute weekly practice for the project.</a:t>
+              <a:t>TEACHING MODE</a:t>
+            </a:r>
+          </a:p>
+          <a:p xmlns:a="http://schemas.openxmlformats.org/drawingml/2006/main">
+            <a:r>
+              <a:t>Demonstrate first. Read each new symbol aloud, trace the values and compare the shown output. Learners repeat worked examples individually after class.</a:t>
             </a:r>
           </a:p>
           <a:p xmlns:a="http://schemas.openxmlformats.org/drawingml/2006/main">
@@ -1805,37 +1345,22 @@
           </a:p>
           <a:p xmlns:a="http://schemas.openxmlformats.org/drawingml/2006/main">
             <a:r>
-              <a:t>Engineering ML project continued. Move on after a learner can explain the current example or required action.</a:t>
-            </a:r>
-          </a:p>
-          <a:p xmlns:a="http://schemas.openxmlformats.org/drawingml/2006/main">
-            <a:r>
-              <a:t/>
-            </a:r>
-          </a:p>
-          <a:p xmlns:a="http://schemas.openxmlformats.org/drawingml/2006/main">
-            <a:r>
-              <a:t>TEACHING MODE</a:t>
-            </a:r>
-          </a:p>
-          <a:p xmlns:a="http://schemas.openxmlformats.org/drawingml/2006/main">
-            <a:r>
-              <a:t>Demonstrate the example directly. Explain each new name, symbol and output. Use the revision example for an individual check after class; no live partner activity is required.</a:t>
-            </a:r>
-          </a:p>
-          <a:p xmlns:a="http://schemas.openxmlformats.org/drawingml/2006/main">
-            <a:r>
-              <a:t/>
-            </a:r>
-          </a:p>
-          <a:p xmlns:a="http://schemas.openxmlformats.org/drawingml/2006/main">
-            <a:r>
-              <a:t>NEXT</a:t>
-            </a:r>
-          </a:p>
-          <a:p xmlns:a="http://schemas.openxmlformats.org/drawingml/2006/main">
-            <a:r>
               <a:t>Engineering ML project continued.</a:t>
+            </a:r>
+          </a:p>
+          <a:p xmlns:a="http://schemas.openxmlformats.org/drawingml/2006/main">
+            <a:r>
+              <a:t/>
+            </a:r>
+          </a:p>
+          <a:p xmlns:a="http://schemas.openxmlformats.org/drawingml/2006/main">
+            <a:r>
+              <a:t>REFERENCES</a:t>
+            </a:r>
+          </a:p>
+          <a:p xmlns:a="http://schemas.openxmlformats.org/drawingml/2006/main">
+            <a:r>
+              <a:t/>
             </a:r>
           </a:p>
         </p:txBody>
@@ -1925,7 +1450,7 @@
           </a:p>
           <a:p xmlns:a="http://schemas.openxmlformats.org/drawingml/2006/main">
             <a:r>
-              <a:t>Build on Engineering ML project continued. Explain why this example is needed before running it.</a:t>
+              <a:t>Previous slide: Engineering ML project continued.</a:t>
             </a:r>
           </a:p>
           <a:p xmlns:a="http://schemas.openxmlformats.org/drawingml/2006/main">
@@ -1980,41 +1505,6 @@
           </a:p>
           <a:p xmlns:a="http://schemas.openxmlformats.org/drawingml/2006/main">
             <a:r>
-              <a:t>LECTURER DETAIL</a:t>
-            </a:r>
-          </a:p>
-          <a:p xmlns:a="http://schemas.openxmlformats.org/drawingml/2006/main">
-            <a:r>
-              <a:t>TEACHING PURPOSE</a:t>
-            </a:r>
-          </a:p>
-          <a:p xmlns:a="http://schemas.openxmlformats.org/drawingml/2006/main">
-            <a:r>
-              <a:t>Engineering ML project continued</a:t>
-            </a:r>
-          </a:p>
-          <a:p xmlns:a="http://schemas.openxmlformats.org/drawingml/2006/main">
-            <a:r>
-              <a:t/>
-            </a:r>
-          </a:p>
-          <a:p xmlns:a="http://schemas.openxmlformats.org/drawingml/2006/main">
-            <a:r>
-              <a:t>CONNECT</a:t>
-            </a:r>
-          </a:p>
-          <a:p xmlns:a="http://schemas.openxmlformats.org/drawingml/2006/main">
-            <a:r>
-              <a:t>Build on the preceding slide: Engineering ML project continued.</a:t>
-            </a:r>
-          </a:p>
-          <a:p xmlns:a="http://schemas.openxmlformats.org/drawingml/2006/main">
-            <a:r>
-              <a:t/>
-            </a:r>
-          </a:p>
-          <a:p xmlns:a="http://schemas.openxmlformats.org/drawingml/2006/main">
-            <a:r>
               <a:t>LECTURER CUE</a:t>
             </a:r>
           </a:p>
@@ -2035,72 +1525,12 @@
           </a:p>
           <a:p xmlns:a="http://schemas.openxmlformats.org/drawingml/2006/main">
             <a:r>
-              <a:t>EXPLAIN IN ORDINARY WORDS</a:t>
-            </a:r>
-          </a:p>
-          <a:p xmlns:a="http://schemas.openxmlformats.org/drawingml/2006/main">
-            <a:r>
-              <a:t>A function is a named set of instructions. def defines it; a call runs it with inputs. Parameters are input names, arguments are supplied values, and return sends the result back.</a:t>
-            </a:r>
-          </a:p>
-          <a:p xmlns:a="http://schemas.openxmlformats.org/drawingml/2006/main">
-            <a:r>
-              <a:t/>
-            </a:r>
-          </a:p>
-          <a:p xmlns:a="http://schemas.openxmlformats.org/drawingml/2006/main">
-            <a:r>
-              <a:t>CHECK AND EXPECTED ANSWER</a:t>
-            </a:r>
-          </a:p>
-          <a:p xmlns:a="http://schemas.openxmlformats.org/drawingml/2006/main">
-            <a:r>
-              <a:t>Does print(8) return the number 8 to the caller? No; it displays 8 and returns None. A function needing a numeric result should return it.</a:t>
-            </a:r>
-          </a:p>
-          <a:p xmlns:a="http://schemas.openxmlformats.org/drawingml/2006/main">
-            <a:r>
-              <a:t/>
-            </a:r>
-          </a:p>
-          <a:p xmlns:a="http://schemas.openxmlformats.org/drawingml/2006/main">
-            <a:r>
-              <a:t>IF LEARNERS ARE STUCK</a:t>
-            </a:r>
-          </a:p>
-          <a:p xmlns:a="http://schemas.openxmlformats.org/drawingml/2006/main">
-            <a:r>
-              <a:t>Trace one call: bind input names, run the indented body, reach return, then put the returned result back into the calling expression.</a:t>
-            </a:r>
-          </a:p>
-          <a:p xmlns:a="http://schemas.openxmlformats.org/drawingml/2006/main">
-            <a:r>
-              <a:t/>
-            </a:r>
-          </a:p>
-          <a:p xmlns:a="http://schemas.openxmlformats.org/drawingml/2006/main">
-            <a:r>
-              <a:t>ASSIGNMENT HANDOVER</a:t>
-            </a:r>
-          </a:p>
-          <a:p xmlns:a="http://schemas.openxmlformats.org/drawingml/2006/main">
-            <a:r>
-              <a:t>Open the matching public student guide and show the exact starter filename, required outputs and upload set. Ask one learner to repeat what to submit and where. IUEA Student Registration Number is required freeform text; learners enter their own number. A saved repository is not a submitted form. Read the live deadline and keep the submission confirmation. Do not release an assessment that is still awaiting grading validation.</a:t>
-            </a:r>
-          </a:p>
-          <a:p xmlns:a="http://schemas.openxmlformats.org/drawingml/2006/main">
-            <a:r>
-              <a:t/>
-            </a:r>
-          </a:p>
-          <a:p xmlns:a="http://schemas.openxmlformats.org/drawingml/2006/main">
-            <a:r>
-              <a:t>PROJECT UPLOAD SET</a:t>
-            </a:r>
-          </a:p>
-          <a:p xmlns:a="http://schemas.openxmlformats.org/drawingml/2006/main">
-            <a:r>
-              <a:t>For the DA_PROJECT or ML_PROJECT, submit the completed project .ipynb together with one readable DOCX or selectable-text PDF report. This differs from the single-notebook test packet. The current public project guide defines the evidence and rubric; do not substitute weekly practice for the project.</a:t>
+              <a:t>TEACHING MODE</a:t>
+            </a:r>
+          </a:p>
+          <a:p xmlns:a="http://schemas.openxmlformats.org/drawingml/2006/main">
+            <a:r>
+              <a:t>Demonstrate first. Read each new symbol aloud, trace the values and compare the shown output. Learners repeat worked examples individually after class.</a:t>
             </a:r>
           </a:p>
           <a:p xmlns:a="http://schemas.openxmlformats.org/drawingml/2006/main">
@@ -2115,37 +1545,22 @@
           </a:p>
           <a:p xmlns:a="http://schemas.openxmlformats.org/drawingml/2006/main">
             <a:r>
-              <a:t>Engineering ML project continued. Move on after a learner can explain the current example or required action.</a:t>
-            </a:r>
-          </a:p>
-          <a:p xmlns:a="http://schemas.openxmlformats.org/drawingml/2006/main">
-            <a:r>
-              <a:t/>
-            </a:r>
-          </a:p>
-          <a:p xmlns:a="http://schemas.openxmlformats.org/drawingml/2006/main">
-            <a:r>
-              <a:t>TEACHING MODE</a:t>
-            </a:r>
-          </a:p>
-          <a:p xmlns:a="http://schemas.openxmlformats.org/drawingml/2006/main">
-            <a:r>
-              <a:t>Demonstrate the example directly. Explain each new name, symbol and output. Use the revision example for an individual check after class; no live partner activity is required.</a:t>
-            </a:r>
-          </a:p>
-          <a:p xmlns:a="http://schemas.openxmlformats.org/drawingml/2006/main">
-            <a:r>
-              <a:t/>
-            </a:r>
-          </a:p>
-          <a:p xmlns:a="http://schemas.openxmlformats.org/drawingml/2006/main">
-            <a:r>
-              <a:t>NEXT</a:t>
-            </a:r>
-          </a:p>
-          <a:p xmlns:a="http://schemas.openxmlformats.org/drawingml/2006/main">
-            <a:r>
               <a:t>Engineering ML project continued.</a:t>
+            </a:r>
+          </a:p>
+          <a:p xmlns:a="http://schemas.openxmlformats.org/drawingml/2006/main">
+            <a:r>
+              <a:t/>
+            </a:r>
+          </a:p>
+          <a:p xmlns:a="http://schemas.openxmlformats.org/drawingml/2006/main">
+            <a:r>
+              <a:t>REFERENCES</a:t>
+            </a:r>
+          </a:p>
+          <a:p xmlns:a="http://schemas.openxmlformats.org/drawingml/2006/main">
+            <a:r>
+              <a:t/>
             </a:r>
           </a:p>
         </p:txBody>
@@ -2235,7 +1650,7 @@
           </a:p>
           <a:p xmlns:a="http://schemas.openxmlformats.org/drawingml/2006/main">
             <a:r>
-              <a:t>Build on Engineering ML project continued. Explain why this example is needed before running it.</a:t>
+              <a:t>Previous slide: Engineering ML project continued.</a:t>
             </a:r>
           </a:p>
           <a:p xmlns:a="http://schemas.openxmlformats.org/drawingml/2006/main">
@@ -2280,41 +1695,6 @@
           </a:p>
           <a:p xmlns:a="http://schemas.openxmlformats.org/drawingml/2006/main">
             <a:r>
-              <a:t>LECTURER DETAIL</a:t>
-            </a:r>
-          </a:p>
-          <a:p xmlns:a="http://schemas.openxmlformats.org/drawingml/2006/main">
-            <a:r>
-              <a:t>TEACHING PURPOSE</a:t>
-            </a:r>
-          </a:p>
-          <a:p xmlns:a="http://schemas.openxmlformats.org/drawingml/2006/main">
-            <a:r>
-              <a:t>Engineering ML project continued</a:t>
-            </a:r>
-          </a:p>
-          <a:p xmlns:a="http://schemas.openxmlformats.org/drawingml/2006/main">
-            <a:r>
-              <a:t/>
-            </a:r>
-          </a:p>
-          <a:p xmlns:a="http://schemas.openxmlformats.org/drawingml/2006/main">
-            <a:r>
-              <a:t>CONNECT</a:t>
-            </a:r>
-          </a:p>
-          <a:p xmlns:a="http://schemas.openxmlformats.org/drawingml/2006/main">
-            <a:r>
-              <a:t>Build on the preceding slide: Engineering ML project continued.</a:t>
-            </a:r>
-          </a:p>
-          <a:p xmlns:a="http://schemas.openxmlformats.org/drawingml/2006/main">
-            <a:r>
-              <a:t/>
-            </a:r>
-          </a:p>
-          <a:p xmlns:a="http://schemas.openxmlformats.org/drawingml/2006/main">
-            <a:r>
               <a:t>LECTURER CUE</a:t>
             </a:r>
           </a:p>
@@ -2335,72 +1715,12 @@
           </a:p>
           <a:p xmlns:a="http://schemas.openxmlformats.org/drawingml/2006/main">
             <a:r>
-              <a:t>EXPLAIN IN ORDINARY WORDS</a:t>
-            </a:r>
-          </a:p>
-          <a:p xmlns:a="http://schemas.openxmlformats.org/drawingml/2006/main">
-            <a:r>
-              <a:t>Cross-validation repeats training and validation on different partitions. Each fold gets a newly fitted model and preprocessing. Variation across fold scores shows sensitivity to the partition.</a:t>
-            </a:r>
-          </a:p>
-          <a:p xmlns:a="http://schemas.openxmlformats.org/drawingml/2006/main">
-            <a:r>
-              <a:t/>
-            </a:r>
-          </a:p>
-          <a:p xmlns:a="http://schemas.openxmlformats.org/drawingml/2006/main">
-            <a:r>
-              <a:t>CHECK AND EXPECTED ANSWER</a:t>
-            </a:r>
-          </a:p>
-          <a:p xmlns:a="http://schemas.openxmlformats.org/drawingml/2006/main">
-            <a:r>
-              <a:t>May preprocessing learn from all rows before the folds? No, that would give each validation fold information from outside its training portion.</a:t>
-            </a:r>
-          </a:p>
-          <a:p xmlns:a="http://schemas.openxmlformats.org/drawingml/2006/main">
-            <a:r>
-              <a:t/>
-            </a:r>
-          </a:p>
-          <a:p xmlns:a="http://schemas.openxmlformats.org/drawingml/2006/main">
-            <a:r>
-              <a:t>IF LEARNERS ARE STUCK</a:t>
-            </a:r>
-          </a:p>
-          <a:p xmlns:a="http://schemas.openxmlformats.org/drawingml/2006/main">
-            <a:r>
-              <a:t>Draw three small partitions and label who learns and who is evaluated. Fold spread is not automatically a confidence interval.</a:t>
-            </a:r>
-          </a:p>
-          <a:p xmlns:a="http://schemas.openxmlformats.org/drawingml/2006/main">
-            <a:r>
-              <a:t/>
-            </a:r>
-          </a:p>
-          <a:p xmlns:a="http://schemas.openxmlformats.org/drawingml/2006/main">
-            <a:r>
-              <a:t>ASSIGNMENT HANDOVER</a:t>
-            </a:r>
-          </a:p>
-          <a:p xmlns:a="http://schemas.openxmlformats.org/drawingml/2006/main">
-            <a:r>
-              <a:t>Open the matching public student guide and show the exact starter filename, required outputs and upload set. Ask one learner to repeat what to submit and where. IUEA Student Registration Number is required freeform text; learners enter their own number. A saved repository is not a submitted form. Read the live deadline and keep the submission confirmation. Do not release an assessment that is still awaiting grading validation.</a:t>
-            </a:r>
-          </a:p>
-          <a:p xmlns:a="http://schemas.openxmlformats.org/drawingml/2006/main">
-            <a:r>
-              <a:t/>
-            </a:r>
-          </a:p>
-          <a:p xmlns:a="http://schemas.openxmlformats.org/drawingml/2006/main">
-            <a:r>
-              <a:t>PROJECT UPLOAD SET</a:t>
-            </a:r>
-          </a:p>
-          <a:p xmlns:a="http://schemas.openxmlformats.org/drawingml/2006/main">
-            <a:r>
-              <a:t>For the DA_PROJECT or ML_PROJECT, submit the completed project .ipynb together with one readable DOCX or selectable-text PDF report. This differs from the single-notebook test packet. The current public project guide defines the evidence and rubric; do not substitute weekly practice for the project.</a:t>
+              <a:t>TEACHING MODE</a:t>
+            </a:r>
+          </a:p>
+          <a:p xmlns:a="http://schemas.openxmlformats.org/drawingml/2006/main">
+            <a:r>
+              <a:t>Demonstrate first. Read each new symbol aloud, trace the values and compare the shown output. Learners repeat worked examples individually after class.</a:t>
             </a:r>
           </a:p>
           <a:p xmlns:a="http://schemas.openxmlformats.org/drawingml/2006/main">
@@ -2415,37 +1735,22 @@
           </a:p>
           <a:p xmlns:a="http://schemas.openxmlformats.org/drawingml/2006/main">
             <a:r>
-              <a:t>Engineering ML project continued. Move on after a learner can explain the current example or required action.</a:t>
-            </a:r>
-          </a:p>
-          <a:p xmlns:a="http://schemas.openxmlformats.org/drawingml/2006/main">
-            <a:r>
-              <a:t/>
-            </a:r>
-          </a:p>
-          <a:p xmlns:a="http://schemas.openxmlformats.org/drawingml/2006/main">
-            <a:r>
-              <a:t>TEACHING MODE</a:t>
-            </a:r>
-          </a:p>
-          <a:p xmlns:a="http://schemas.openxmlformats.org/drawingml/2006/main">
-            <a:r>
-              <a:t>Demonstrate the example directly. Explain each new name, symbol and output. Use the revision example for an individual check after class; no live partner activity is required.</a:t>
-            </a:r>
-          </a:p>
-          <a:p xmlns:a="http://schemas.openxmlformats.org/drawingml/2006/main">
-            <a:r>
-              <a:t/>
-            </a:r>
-          </a:p>
-          <a:p xmlns:a="http://schemas.openxmlformats.org/drawingml/2006/main">
-            <a:r>
-              <a:t>NEXT</a:t>
-            </a:r>
-          </a:p>
-          <a:p xmlns:a="http://schemas.openxmlformats.org/drawingml/2006/main">
-            <a:r>
               <a:t>Engineering ML project continued.</a:t>
+            </a:r>
+          </a:p>
+          <a:p xmlns:a="http://schemas.openxmlformats.org/drawingml/2006/main">
+            <a:r>
+              <a:t/>
+            </a:r>
+          </a:p>
+          <a:p xmlns:a="http://schemas.openxmlformats.org/drawingml/2006/main">
+            <a:r>
+              <a:t>REFERENCES</a:t>
+            </a:r>
+          </a:p>
+          <a:p xmlns:a="http://schemas.openxmlformats.org/drawingml/2006/main">
+            <a:r>
+              <a:t/>
             </a:r>
           </a:p>
         </p:txBody>
@@ -2535,7 +1840,7 @@
           </a:p>
           <a:p xmlns:a="http://schemas.openxmlformats.org/drawingml/2006/main">
             <a:r>
-              <a:t>Build on Engineering ML project continued. Explain why this example is needed before running it.</a:t>
+              <a:t>Previous slide: Engineering ML project continued.</a:t>
             </a:r>
           </a:p>
           <a:p xmlns:a="http://schemas.openxmlformats.org/drawingml/2006/main">
@@ -2590,41 +1895,6 @@
           </a:p>
           <a:p xmlns:a="http://schemas.openxmlformats.org/drawingml/2006/main">
             <a:r>
-              <a:t>LECTURER DETAIL</a:t>
-            </a:r>
-          </a:p>
-          <a:p xmlns:a="http://schemas.openxmlformats.org/drawingml/2006/main">
-            <a:r>
-              <a:t>TEACHING PURPOSE</a:t>
-            </a:r>
-          </a:p>
-          <a:p xmlns:a="http://schemas.openxmlformats.org/drawingml/2006/main">
-            <a:r>
-              <a:t>Engineering ML project continued</a:t>
-            </a:r>
-          </a:p>
-          <a:p xmlns:a="http://schemas.openxmlformats.org/drawingml/2006/main">
-            <a:r>
-              <a:t/>
-            </a:r>
-          </a:p>
-          <a:p xmlns:a="http://schemas.openxmlformats.org/drawingml/2006/main">
-            <a:r>
-              <a:t>CONNECT</a:t>
-            </a:r>
-          </a:p>
-          <a:p xmlns:a="http://schemas.openxmlformats.org/drawingml/2006/main">
-            <a:r>
-              <a:t>Build on the preceding slide: Engineering ML project continued.</a:t>
-            </a:r>
-          </a:p>
-          <a:p xmlns:a="http://schemas.openxmlformats.org/drawingml/2006/main">
-            <a:r>
-              <a:t/>
-            </a:r>
-          </a:p>
-          <a:p xmlns:a="http://schemas.openxmlformats.org/drawingml/2006/main">
-            <a:r>
               <a:t>LECTURER CUE</a:t>
             </a:r>
           </a:p>
@@ -2645,67 +1915,12 @@
           </a:p>
           <a:p xmlns:a="http://schemas.openxmlformats.org/drawingml/2006/main">
             <a:r>
-              <a:t>EXPLAIN IN ORDINARY WORDS</a:t>
-            </a:r>
-          </a:p>
-          <a:p xmlns:a="http://schemas.openxmlformats.org/drawingml/2006/main">
-            <a:r>
-              <a:t>A repository is the project folder and recorded history. A commit records a chosen change; uploading or pushing shares it. A README tells someone else how to run the work.</a:t>
-            </a:r>
-          </a:p>
-          <a:p xmlns:a="http://schemas.openxmlformats.org/drawingml/2006/main">
-            <a:r>
-              <a:t/>
-            </a:r>
-          </a:p>
-          <a:p xmlns:a="http://schemas.openxmlformats.org/drawingml/2006/main">
-            <a:r>
-              <a:t>CHECK AND EXPECTED ANSWER</a:t>
-            </a:r>
-          </a:p>
-          <a:p xmlns:a="http://schemas.openxmlformats.org/drawingml/2006/main">
-            <a:r>
-              <a:t>Does saving to GitHub hand in the assignment? No; submission requires the correct form and its confirmation.</a:t>
-            </a:r>
-          </a:p>
-          <a:p xmlns:a="http://schemas.openxmlformats.org/drawingml/2006/main">
-            <a:r>
-              <a:t/>
-            </a:r>
-          </a:p>
-          <a:p xmlns:a="http://schemas.openxmlformats.org/drawingml/2006/main">
-            <a:r>
-              <a:t>IF LEARNERS ARE STUCK</a:t>
-            </a:r>
-          </a:p>
-          <a:p xmlns:a="http://schemas.openxmlformats.org/drawingml/2006/main">
-            <a:r>
-              <a:t/>
-            </a:r>
-          </a:p>
-          <a:p xmlns:a="http://schemas.openxmlformats.org/drawingml/2006/main">
-            <a:r>
-              <a:t>ASSIGNMENT HANDOVER</a:t>
-            </a:r>
-          </a:p>
-          <a:p xmlns:a="http://schemas.openxmlformats.org/drawingml/2006/main">
-            <a:r>
-              <a:t>Open the matching public student guide and show the exact starter filename, required outputs and upload set. Ask one learner to repeat what to submit and where. IUEA Student Registration Number is required freeform text; learners enter their own number. A saved repository is not a submitted form. Read the live deadline and keep the submission confirmation. Do not release an assessment that is still awaiting grading validation.</a:t>
-            </a:r>
-          </a:p>
-          <a:p xmlns:a="http://schemas.openxmlformats.org/drawingml/2006/main">
-            <a:r>
-              <a:t/>
-            </a:r>
-          </a:p>
-          <a:p xmlns:a="http://schemas.openxmlformats.org/drawingml/2006/main">
-            <a:r>
-              <a:t>PROJECT UPLOAD SET</a:t>
-            </a:r>
-          </a:p>
-          <a:p xmlns:a="http://schemas.openxmlformats.org/drawingml/2006/main">
-            <a:r>
-              <a:t>For the DA_PROJECT or ML_PROJECT, submit the completed project .ipynb together with one readable DOCX or selectable-text PDF report. This differs from the single-notebook test packet. The current public project guide defines the evidence and rubric; do not substitute weekly practice for the project.</a:t>
+              <a:t>TEACHING MODE</a:t>
+            </a:r>
+          </a:p>
+          <a:p xmlns:a="http://schemas.openxmlformats.org/drawingml/2006/main">
+            <a:r>
+              <a:t>Demonstrate first. Read each new symbol aloud, trace the values and compare the shown output. Learners repeat worked examples individually after class.</a:t>
             </a:r>
           </a:p>
           <a:p xmlns:a="http://schemas.openxmlformats.org/drawingml/2006/main">
@@ -2720,37 +1935,22 @@
           </a:p>
           <a:p xmlns:a="http://schemas.openxmlformats.org/drawingml/2006/main">
             <a:r>
-              <a:t>Engineering ML project continued. Move on after a learner can explain the current example or required action.</a:t>
-            </a:r>
-          </a:p>
-          <a:p xmlns:a="http://schemas.openxmlformats.org/drawingml/2006/main">
-            <a:r>
-              <a:t/>
-            </a:r>
-          </a:p>
-          <a:p xmlns:a="http://schemas.openxmlformats.org/drawingml/2006/main">
-            <a:r>
-              <a:t>TEACHING MODE</a:t>
-            </a:r>
-          </a:p>
-          <a:p xmlns:a="http://schemas.openxmlformats.org/drawingml/2006/main">
-            <a:r>
-              <a:t>Demonstrate the example directly. Explain each new name, symbol and output. Use the revision example for an individual check after class; no live partner activity is required.</a:t>
-            </a:r>
-          </a:p>
-          <a:p xmlns:a="http://schemas.openxmlformats.org/drawingml/2006/main">
-            <a:r>
-              <a:t/>
-            </a:r>
-          </a:p>
-          <a:p xmlns:a="http://schemas.openxmlformats.org/drawingml/2006/main">
-            <a:r>
-              <a:t>NEXT</a:t>
-            </a:r>
-          </a:p>
-          <a:p xmlns:a="http://schemas.openxmlformats.org/drawingml/2006/main">
-            <a:r>
               <a:t>Engineering ML project continued.</a:t>
+            </a:r>
+          </a:p>
+          <a:p xmlns:a="http://schemas.openxmlformats.org/drawingml/2006/main">
+            <a:r>
+              <a:t/>
+            </a:r>
+          </a:p>
+          <a:p xmlns:a="http://schemas.openxmlformats.org/drawingml/2006/main">
+            <a:r>
+              <a:t>REFERENCES</a:t>
+            </a:r>
+          </a:p>
+          <a:p xmlns:a="http://schemas.openxmlformats.org/drawingml/2006/main">
+            <a:r>
+              <a:t/>
             </a:r>
           </a:p>
         </p:txBody>
@@ -2840,7 +2040,7 @@
           </a:p>
           <a:p xmlns:a="http://schemas.openxmlformats.org/drawingml/2006/main">
             <a:r>
-              <a:t>Build on Engineering ML project continued. Explain why this example is needed before running it.</a:t>
+              <a:t>Previous slide: Engineering ML project continued.</a:t>
             </a:r>
           </a:p>
           <a:p xmlns:a="http://schemas.openxmlformats.org/drawingml/2006/main">
@@ -2885,41 +2085,6 @@
           </a:p>
           <a:p xmlns:a="http://schemas.openxmlformats.org/drawingml/2006/main">
             <a:r>
-              <a:t>LECTURER DETAIL</a:t>
-            </a:r>
-          </a:p>
-          <a:p xmlns:a="http://schemas.openxmlformats.org/drawingml/2006/main">
-            <a:r>
-              <a:t>TEACHING PURPOSE</a:t>
-            </a:r>
-          </a:p>
-          <a:p xmlns:a="http://schemas.openxmlformats.org/drawingml/2006/main">
-            <a:r>
-              <a:t>Engineering ML project continued</a:t>
-            </a:r>
-          </a:p>
-          <a:p xmlns:a="http://schemas.openxmlformats.org/drawingml/2006/main">
-            <a:r>
-              <a:t/>
-            </a:r>
-          </a:p>
-          <a:p xmlns:a="http://schemas.openxmlformats.org/drawingml/2006/main">
-            <a:r>
-              <a:t>CONNECT</a:t>
-            </a:r>
-          </a:p>
-          <a:p xmlns:a="http://schemas.openxmlformats.org/drawingml/2006/main">
-            <a:r>
-              <a:t>Build on the preceding slide: Engineering ML project continued.</a:t>
-            </a:r>
-          </a:p>
-          <a:p xmlns:a="http://schemas.openxmlformats.org/drawingml/2006/main">
-            <a:r>
-              <a:t/>
-            </a:r>
-          </a:p>
-          <a:p xmlns:a="http://schemas.openxmlformats.org/drawingml/2006/main">
-            <a:r>
               <a:t>LECTURER CUE</a:t>
             </a:r>
           </a:p>
@@ -2940,27 +2105,12 @@
           </a:p>
           <a:p xmlns:a="http://schemas.openxmlformats.org/drawingml/2006/main">
             <a:r>
-              <a:t>ASSIGNMENT HANDOVER</a:t>
-            </a:r>
-          </a:p>
-          <a:p xmlns:a="http://schemas.openxmlformats.org/drawingml/2006/main">
-            <a:r>
-              <a:t>Open the matching public student guide and show the exact starter filename, required outputs and upload set. Ask one learner to repeat what to submit and where. IUEA Student Registration Number is required freeform text; learners enter their own number. A saved repository is not a submitted form. Read the live deadline and keep the submission confirmation. Do not release an assessment that is still awaiting grading validation.</a:t>
-            </a:r>
-          </a:p>
-          <a:p xmlns:a="http://schemas.openxmlformats.org/drawingml/2006/main">
-            <a:r>
-              <a:t/>
-            </a:r>
-          </a:p>
-          <a:p xmlns:a="http://schemas.openxmlformats.org/drawingml/2006/main">
-            <a:r>
-              <a:t>PROJECT UPLOAD SET</a:t>
-            </a:r>
-          </a:p>
-          <a:p xmlns:a="http://schemas.openxmlformats.org/drawingml/2006/main">
-            <a:r>
-              <a:t>For the DA_PROJECT or ML_PROJECT, submit the completed project .ipynb together with one readable DOCX or selectable-text PDF report. This differs from the single-notebook test packet. The current public project guide defines the evidence and rubric; do not substitute weekly practice for the project.</a:t>
+              <a:t>TEACHING MODE</a:t>
+            </a:r>
+          </a:p>
+          <a:p xmlns:a="http://schemas.openxmlformats.org/drawingml/2006/main">
+            <a:r>
+              <a:t>Demonstrate first. Read each new symbol aloud, trace the values and compare the shown output. Learners repeat worked examples individually after class.</a:t>
             </a:r>
           </a:p>
           <a:p xmlns:a="http://schemas.openxmlformats.org/drawingml/2006/main">
@@ -2975,37 +2125,22 @@
           </a:p>
           <a:p xmlns:a="http://schemas.openxmlformats.org/drawingml/2006/main">
             <a:r>
-              <a:t>Engineering ML project submission. Move on after a learner can explain the current example or required action.</a:t>
-            </a:r>
-          </a:p>
-          <a:p xmlns:a="http://schemas.openxmlformats.org/drawingml/2006/main">
-            <a:r>
-              <a:t/>
-            </a:r>
-          </a:p>
-          <a:p xmlns:a="http://schemas.openxmlformats.org/drawingml/2006/main">
-            <a:r>
-              <a:t>TEACHING MODE</a:t>
-            </a:r>
-          </a:p>
-          <a:p xmlns:a="http://schemas.openxmlformats.org/drawingml/2006/main">
-            <a:r>
-              <a:t>Demonstrate the example directly. Explain each new name, symbol and output. Use the revision example for an individual check after class; no live partner activity is required.</a:t>
-            </a:r>
-          </a:p>
-          <a:p xmlns:a="http://schemas.openxmlformats.org/drawingml/2006/main">
-            <a:r>
-              <a:t/>
-            </a:r>
-          </a:p>
-          <a:p xmlns:a="http://schemas.openxmlformats.org/drawingml/2006/main">
-            <a:r>
-              <a:t>NEXT</a:t>
-            </a:r>
-          </a:p>
-          <a:p xmlns:a="http://schemas.openxmlformats.org/drawingml/2006/main">
-            <a:r>
               <a:t>Engineering ML project submission.</a:t>
+            </a:r>
+          </a:p>
+          <a:p xmlns:a="http://schemas.openxmlformats.org/drawingml/2006/main">
+            <a:r>
+              <a:t/>
+            </a:r>
+          </a:p>
+          <a:p xmlns:a="http://schemas.openxmlformats.org/drawingml/2006/main">
+            <a:r>
+              <a:t>REFERENCES</a:t>
+            </a:r>
+          </a:p>
+          <a:p xmlns:a="http://schemas.openxmlformats.org/drawingml/2006/main">
+            <a:r>
+              <a:t/>
             </a:r>
           </a:p>
         </p:txBody>
@@ -3095,7 +2230,7 @@
           </a:p>
           <a:p xmlns:a="http://schemas.openxmlformats.org/drawingml/2006/main">
             <a:r>
-              <a:t>Build on Engineering ML project continued. Explain why this example is needed before running it.</a:t>
+              <a:t>Previous slide: Engineering ML project continued.</a:t>
             </a:r>
           </a:p>
           <a:p xmlns:a="http://schemas.openxmlformats.org/drawingml/2006/main">
@@ -3150,41 +2285,6 @@
           </a:p>
           <a:p xmlns:a="http://schemas.openxmlformats.org/drawingml/2006/main">
             <a:r>
-              <a:t>LECTURER DETAIL</a:t>
-            </a:r>
-          </a:p>
-          <a:p xmlns:a="http://schemas.openxmlformats.org/drawingml/2006/main">
-            <a:r>
-              <a:t>TEACHING PURPOSE</a:t>
-            </a:r>
-          </a:p>
-          <a:p xmlns:a="http://schemas.openxmlformats.org/drawingml/2006/main">
-            <a:r>
-              <a:t>Engineering ML project submission</a:t>
-            </a:r>
-          </a:p>
-          <a:p xmlns:a="http://schemas.openxmlformats.org/drawingml/2006/main">
-            <a:r>
-              <a:t/>
-            </a:r>
-          </a:p>
-          <a:p xmlns:a="http://schemas.openxmlformats.org/drawingml/2006/main">
-            <a:r>
-              <a:t>CONNECT</a:t>
-            </a:r>
-          </a:p>
-          <a:p xmlns:a="http://schemas.openxmlformats.org/drawingml/2006/main">
-            <a:r>
-              <a:t>Build on the preceding slide: Engineering ML project continued.</a:t>
-            </a:r>
-          </a:p>
-          <a:p xmlns:a="http://schemas.openxmlformats.org/drawingml/2006/main">
-            <a:r>
-              <a:t/>
-            </a:r>
-          </a:p>
-          <a:p xmlns:a="http://schemas.openxmlformats.org/drawingml/2006/main">
-            <a:r>
               <a:t>LECTURER CUE</a:t>
             </a:r>
           </a:p>
@@ -3200,27 +2300,12 @@
           </a:p>
           <a:p xmlns:a="http://schemas.openxmlformats.org/drawingml/2006/main">
             <a:r>
-              <a:t>ASSIGNMENT HANDOVER</a:t>
-            </a:r>
-          </a:p>
-          <a:p xmlns:a="http://schemas.openxmlformats.org/drawingml/2006/main">
-            <a:r>
-              <a:t>Open the matching public student guide and show the exact starter filename, required outputs and upload set. Ask one learner to repeat what to submit and where. IUEA Student Registration Number is required freeform text; learners enter their own number. A saved repository is not a submitted form. Read the live deadline and keep the submission confirmation. Do not release an assessment that is still awaiting grading validation.</a:t>
-            </a:r>
-          </a:p>
-          <a:p xmlns:a="http://schemas.openxmlformats.org/drawingml/2006/main">
-            <a:r>
-              <a:t/>
-            </a:r>
-          </a:p>
-          <a:p xmlns:a="http://schemas.openxmlformats.org/drawingml/2006/main">
-            <a:r>
-              <a:t>PROJECT UPLOAD SET</a:t>
-            </a:r>
-          </a:p>
-          <a:p xmlns:a="http://schemas.openxmlformats.org/drawingml/2006/main">
-            <a:r>
-              <a:t>For the DA_PROJECT or ML_PROJECT, submit the completed project .ipynb together with one readable DOCX or selectable-text PDF report. This differs from the single-notebook test packet. The current public project guide defines the evidence and rubric; do not substitute weekly practice for the project.</a:t>
+              <a:t>TEACHING MODE</a:t>
+            </a:r>
+          </a:p>
+          <a:p xmlns:a="http://schemas.openxmlformats.org/drawingml/2006/main">
+            <a:r>
+              <a:t>Demonstrate first. Read each new symbol aloud, trace the values and compare the shown output. Learners repeat worked examples individually after class.</a:t>
             </a:r>
           </a:p>
           <a:p xmlns:a="http://schemas.openxmlformats.org/drawingml/2006/main">
@@ -3235,37 +2320,22 @@
           </a:p>
           <a:p xmlns:a="http://schemas.openxmlformats.org/drawingml/2006/main">
             <a:r>
-              <a:t>Presentation evidence (35 marks). Move on after a learner can explain the current example or required action.</a:t>
-            </a:r>
-          </a:p>
-          <a:p xmlns:a="http://schemas.openxmlformats.org/drawingml/2006/main">
-            <a:r>
-              <a:t/>
-            </a:r>
-          </a:p>
-          <a:p xmlns:a="http://schemas.openxmlformats.org/drawingml/2006/main">
-            <a:r>
-              <a:t>TEACHING MODE</a:t>
-            </a:r>
-          </a:p>
-          <a:p xmlns:a="http://schemas.openxmlformats.org/drawingml/2006/main">
-            <a:r>
-              <a:t>Demonstrate the example directly. Explain each new name, symbol and output. Use the revision example for an individual check after class; no live partner activity is required.</a:t>
-            </a:r>
-          </a:p>
-          <a:p xmlns:a="http://schemas.openxmlformats.org/drawingml/2006/main">
-            <a:r>
-              <a:t/>
-            </a:r>
-          </a:p>
-          <a:p xmlns:a="http://schemas.openxmlformats.org/drawingml/2006/main">
-            <a:r>
-              <a:t>NEXT</a:t>
-            </a:r>
-          </a:p>
-          <a:p xmlns:a="http://schemas.openxmlformats.org/drawingml/2006/main">
-            <a:r>
               <a:t>Presentation evidence (35 marks).</a:t>
+            </a:r>
+          </a:p>
+          <a:p xmlns:a="http://schemas.openxmlformats.org/drawingml/2006/main">
+            <a:r>
+              <a:t/>
+            </a:r>
+          </a:p>
+          <a:p xmlns:a="http://schemas.openxmlformats.org/drawingml/2006/main">
+            <a:r>
+              <a:t>REFERENCES</a:t>
+            </a:r>
+          </a:p>
+          <a:p xmlns:a="http://schemas.openxmlformats.org/drawingml/2006/main">
+            <a:r>
+              <a:t/>
             </a:r>
           </a:p>
         </p:txBody>
@@ -3355,7 +2425,7 @@
           </a:p>
           <a:p xmlns:a="http://schemas.openxmlformats.org/drawingml/2006/main">
             <a:r>
-              <a:t>Build on Engineering ML project submission. Explain why this example is needed before running it.</a:t>
+              <a:t>Previous slide: Engineering ML project submission.</a:t>
             </a:r>
           </a:p>
           <a:p xmlns:a="http://schemas.openxmlformats.org/drawingml/2006/main">
@@ -3390,41 +2460,6 @@
           </a:p>
           <a:p xmlns:a="http://schemas.openxmlformats.org/drawingml/2006/main">
             <a:r>
-              <a:t>LECTURER DETAIL</a:t>
-            </a:r>
-          </a:p>
-          <a:p xmlns:a="http://schemas.openxmlformats.org/drawingml/2006/main">
-            <a:r>
-              <a:t>TEACHING PURPOSE</a:t>
-            </a:r>
-          </a:p>
-          <a:p xmlns:a="http://schemas.openxmlformats.org/drawingml/2006/main">
-            <a:r>
-              <a:t>Presentation evidence (35 marks)</a:t>
-            </a:r>
-          </a:p>
-          <a:p xmlns:a="http://schemas.openxmlformats.org/drawingml/2006/main">
-            <a:r>
-              <a:t/>
-            </a:r>
-          </a:p>
-          <a:p xmlns:a="http://schemas.openxmlformats.org/drawingml/2006/main">
-            <a:r>
-              <a:t>CONNECT</a:t>
-            </a:r>
-          </a:p>
-          <a:p xmlns:a="http://schemas.openxmlformats.org/drawingml/2006/main">
-            <a:r>
-              <a:t>Build on the preceding slide: Engineering ML project submission.</a:t>
-            </a:r>
-          </a:p>
-          <a:p xmlns:a="http://schemas.openxmlformats.org/drawingml/2006/main">
-            <a:r>
-              <a:t/>
-            </a:r>
-          </a:p>
-          <a:p xmlns:a="http://schemas.openxmlformats.org/drawingml/2006/main">
-            <a:r>
               <a:t>LECTURER CUE</a:t>
             </a:r>
           </a:p>
@@ -3440,57 +2475,12 @@
           </a:p>
           <a:p xmlns:a="http://schemas.openxmlformats.org/drawingml/2006/main">
             <a:r>
-              <a:t>EXPLAIN IN ORDINARY WORDS</a:t>
-            </a:r>
-          </a:p>
-          <a:p xmlns:a="http://schemas.openxmlformats.org/drawingml/2006/main">
-            <a:r>
-              <a:t>An observation describes the data. A finding answers a defined question with evidence. A recommendation adds an action, its justification and limits.</a:t>
-            </a:r>
-          </a:p>
-          <a:p xmlns:a="http://schemas.openxmlformats.org/drawingml/2006/main">
-            <a:r>
-              <a:t/>
-            </a:r>
-          </a:p>
-          <a:p xmlns:a="http://schemas.openxmlformats.org/drawingml/2006/main">
-            <a:r>
-              <a:t>CHECK AND EXPECTED ANSWER</a:t>
-            </a:r>
-          </a:p>
-          <a:p xmlns:a="http://schemas.openxmlformats.org/drawingml/2006/main">
-            <a:r>
-              <a:t>Does a difference between two groups prove one caused the other? No. Other differences or selection may explain it.</a:t>
-            </a:r>
-          </a:p>
-          <a:p xmlns:a="http://schemas.openxmlformats.org/drawingml/2006/main">
-            <a:r>
-              <a:t/>
-            </a:r>
-          </a:p>
-          <a:p xmlns:a="http://schemas.openxmlformats.org/drawingml/2006/main">
-            <a:r>
-              <a:t>IF LEARNERS ARE STUCK</a:t>
-            </a:r>
-          </a:p>
-          <a:p xmlns:a="http://schemas.openxmlformats.org/drawingml/2006/main">
-            <a:r>
-              <a:t>Ask for the population, time period, number and comparison. Then ask what additional evidence could change the recommendation.</a:t>
-            </a:r>
-          </a:p>
-          <a:p xmlns:a="http://schemas.openxmlformats.org/drawingml/2006/main">
-            <a:r>
-              <a:t/>
-            </a:r>
-          </a:p>
-          <a:p xmlns:a="http://schemas.openxmlformats.org/drawingml/2006/main">
-            <a:r>
-              <a:t>ASSIGNMENT HANDOVER</a:t>
-            </a:r>
-          </a:p>
-          <a:p xmlns:a="http://schemas.openxmlformats.org/drawingml/2006/main">
-            <a:r>
-              <a:t>Open the matching public student guide and show the exact starter filename, required outputs and upload set. Ask one learner to repeat what to submit and where. IUEA Student Registration Number is required freeform text; learners enter their own number. A saved repository is not a submitted form. Read the live deadline and keep the submission confirmation. Do not release an assessment that is still awaiting grading validation.</a:t>
+              <a:t>TEACHING MODE</a:t>
+            </a:r>
+          </a:p>
+          <a:p xmlns:a="http://schemas.openxmlformats.org/drawingml/2006/main">
+            <a:r>
+              <a:t>Demonstrate first. Read each new symbol aloud, trace the values and compare the shown output. Learners repeat worked examples individually after class.</a:t>
             </a:r>
           </a:p>
           <a:p xmlns:a="http://schemas.openxmlformats.org/drawingml/2006/main">
@@ -3505,37 +2495,22 @@
           </a:p>
           <a:p xmlns:a="http://schemas.openxmlformats.org/drawingml/2006/main">
             <a:r>
-              <a:t>Individual written defence (40 marks). Move on after a learner can explain the current example or required action.</a:t>
-            </a:r>
-          </a:p>
-          <a:p xmlns:a="http://schemas.openxmlformats.org/drawingml/2006/main">
-            <a:r>
-              <a:t/>
-            </a:r>
-          </a:p>
-          <a:p xmlns:a="http://schemas.openxmlformats.org/drawingml/2006/main">
-            <a:r>
-              <a:t>TEACHING MODE</a:t>
-            </a:r>
-          </a:p>
-          <a:p xmlns:a="http://schemas.openxmlformats.org/drawingml/2006/main">
-            <a:r>
-              <a:t>Demonstrate the example directly. Explain each new name, symbol and output. Use the revision example for an individual check after class; no live partner activity is required.</a:t>
-            </a:r>
-          </a:p>
-          <a:p xmlns:a="http://schemas.openxmlformats.org/drawingml/2006/main">
-            <a:r>
-              <a:t/>
-            </a:r>
-          </a:p>
-          <a:p xmlns:a="http://schemas.openxmlformats.org/drawingml/2006/main">
-            <a:r>
-              <a:t>NEXT</a:t>
-            </a:r>
-          </a:p>
-          <a:p xmlns:a="http://schemas.openxmlformats.org/drawingml/2006/main">
-            <a:r>
               <a:t>Individual written defence (40 marks).</a:t>
+            </a:r>
+          </a:p>
+          <a:p xmlns:a="http://schemas.openxmlformats.org/drawingml/2006/main">
+            <a:r>
+              <a:t/>
+            </a:r>
+          </a:p>
+          <a:p xmlns:a="http://schemas.openxmlformats.org/drawingml/2006/main">
+            <a:r>
+              <a:t>REFERENCES</a:t>
+            </a:r>
+          </a:p>
+          <a:p xmlns:a="http://schemas.openxmlformats.org/drawingml/2006/main">
+            <a:r>
+              <a:t/>
             </a:r>
           </a:p>
         </p:txBody>
@@ -3625,7 +2600,7 @@
           </a:p>
           <a:p xmlns:a="http://schemas.openxmlformats.org/drawingml/2006/main">
             <a:r>
-              <a:t>Build on Presenting the project and individual contribution. Explain why this example is needed before running it.</a:t>
+              <a:t>Previous slide: Presenting the project and individual contribution.</a:t>
             </a:r>
           </a:p>
           <a:p xmlns:a="http://schemas.openxmlformats.org/drawingml/2006/main">
@@ -3660,41 +2635,6 @@
           </a:p>
           <a:p xmlns:a="http://schemas.openxmlformats.org/drawingml/2006/main">
             <a:r>
-              <a:t>LECTURER DETAIL</a:t>
-            </a:r>
-          </a:p>
-          <a:p xmlns:a="http://schemas.openxmlformats.org/drawingml/2006/main">
-            <a:r>
-              <a:t>TEACHING PURPOSE</a:t>
-            </a:r>
-          </a:p>
-          <a:p xmlns:a="http://schemas.openxmlformats.org/drawingml/2006/main">
-            <a:r>
-              <a:t>Today’s learning</a:t>
-            </a:r>
-          </a:p>
-          <a:p xmlns:a="http://schemas.openxmlformats.org/drawingml/2006/main">
-            <a:r>
-              <a:t/>
-            </a:r>
-          </a:p>
-          <a:p xmlns:a="http://schemas.openxmlformats.org/drawingml/2006/main">
-            <a:r>
-              <a:t>CONNECT</a:t>
-            </a:r>
-          </a:p>
-          <a:p xmlns:a="http://schemas.openxmlformats.org/drawingml/2006/main">
-            <a:r>
-              <a:t>Build on the preceding slide: Presenting the project and individual contribution.</a:t>
-            </a:r>
-          </a:p>
-          <a:p xmlns:a="http://schemas.openxmlformats.org/drawingml/2006/main">
-            <a:r>
-              <a:t/>
-            </a:r>
-          </a:p>
-          <a:p xmlns:a="http://schemas.openxmlformats.org/drawingml/2006/main">
-            <a:r>
               <a:t>LECTURER CUE</a:t>
             </a:r>
           </a:p>
@@ -3710,42 +2650,12 @@
           </a:p>
           <a:p xmlns:a="http://schemas.openxmlformats.org/drawingml/2006/main">
             <a:r>
-              <a:t>EXPLAIN IN ORDINARY WORDS</a:t>
-            </a:r>
-          </a:p>
-          <a:p xmlns:a="http://schemas.openxmlformats.org/drawingml/2006/main">
-            <a:r>
-              <a:t>An observation describes the data. A finding answers a defined question with evidence. A recommendation adds an action, its justification and limits.</a:t>
-            </a:r>
-          </a:p>
-          <a:p xmlns:a="http://schemas.openxmlformats.org/drawingml/2006/main">
-            <a:r>
-              <a:t/>
-            </a:r>
-          </a:p>
-          <a:p xmlns:a="http://schemas.openxmlformats.org/drawingml/2006/main">
-            <a:r>
-              <a:t>CHECK AND EXPECTED ANSWER</a:t>
-            </a:r>
-          </a:p>
-          <a:p xmlns:a="http://schemas.openxmlformats.org/drawingml/2006/main">
-            <a:r>
-              <a:t>Does a difference between two groups prove one caused the other? No. Other differences or selection may explain it.</a:t>
-            </a:r>
-          </a:p>
-          <a:p xmlns:a="http://schemas.openxmlformats.org/drawingml/2006/main">
-            <a:r>
-              <a:t/>
-            </a:r>
-          </a:p>
-          <a:p xmlns:a="http://schemas.openxmlformats.org/drawingml/2006/main">
-            <a:r>
-              <a:t>IF LEARNERS ARE STUCK</a:t>
-            </a:r>
-          </a:p>
-          <a:p xmlns:a="http://schemas.openxmlformats.org/drawingml/2006/main">
-            <a:r>
-              <a:t>Ask for the population, time period, number and comparison. Then ask what additional evidence could change the recommendation.</a:t>
+              <a:t>TEACHING MODE</a:t>
+            </a:r>
+          </a:p>
+          <a:p xmlns:a="http://schemas.openxmlformats.org/drawingml/2006/main">
+            <a:r>
+              <a:t>Demonstrate first. Read each new symbol aloud, trace the values and compare the shown output. Learners repeat worked examples individually after class.</a:t>
             </a:r>
           </a:p>
           <a:p xmlns:a="http://schemas.openxmlformats.org/drawingml/2006/main">
@@ -3760,37 +2670,22 @@
           </a:p>
           <a:p xmlns:a="http://schemas.openxmlformats.org/drawingml/2006/main">
             <a:r>
-              <a:t>Recall and a first attempt. Move on after a learner can explain the current example or required action.</a:t>
-            </a:r>
-          </a:p>
-          <a:p xmlns:a="http://schemas.openxmlformats.org/drawingml/2006/main">
-            <a:r>
-              <a:t/>
-            </a:r>
-          </a:p>
-          <a:p xmlns:a="http://schemas.openxmlformats.org/drawingml/2006/main">
-            <a:r>
-              <a:t>TEACHING MODE</a:t>
-            </a:r>
-          </a:p>
-          <a:p xmlns:a="http://schemas.openxmlformats.org/drawingml/2006/main">
-            <a:r>
-              <a:t>Demonstrate the example directly. Explain each new name, symbol and output. Use the revision example for an individual check after class; no live partner activity is required.</a:t>
-            </a:r>
-          </a:p>
-          <a:p xmlns:a="http://schemas.openxmlformats.org/drawingml/2006/main">
-            <a:r>
-              <a:t/>
-            </a:r>
-          </a:p>
-          <a:p xmlns:a="http://schemas.openxmlformats.org/drawingml/2006/main">
-            <a:r>
-              <a:t>NEXT</a:t>
-            </a:r>
-          </a:p>
-          <a:p xmlns:a="http://schemas.openxmlformats.org/drawingml/2006/main">
-            <a:r>
               <a:t>Connection to the previous lesson.</a:t>
+            </a:r>
+          </a:p>
+          <a:p xmlns:a="http://schemas.openxmlformats.org/drawingml/2006/main">
+            <a:r>
+              <a:t/>
+            </a:r>
+          </a:p>
+          <a:p xmlns:a="http://schemas.openxmlformats.org/drawingml/2006/main">
+            <a:r>
+              <a:t>REFERENCES</a:t>
+            </a:r>
+          </a:p>
+          <a:p xmlns:a="http://schemas.openxmlformats.org/drawingml/2006/main">
+            <a:r>
+              <a:t/>
             </a:r>
           </a:p>
         </p:txBody>
@@ -3880,7 +2775,7 @@
           </a:p>
           <a:p xmlns:a="http://schemas.openxmlformats.org/drawingml/2006/main">
             <a:r>
-              <a:t>Build on Presentation evidence (35 marks). Explain why this example is needed before running it.</a:t>
+              <a:t>Previous slide: Presentation evidence (35 marks).</a:t>
             </a:r>
           </a:p>
           <a:p xmlns:a="http://schemas.openxmlformats.org/drawingml/2006/main">
@@ -3915,41 +2810,6 @@
           </a:p>
           <a:p xmlns:a="http://schemas.openxmlformats.org/drawingml/2006/main">
             <a:r>
-              <a:t>LECTURER DETAIL</a:t>
-            </a:r>
-          </a:p>
-          <a:p xmlns:a="http://schemas.openxmlformats.org/drawingml/2006/main">
-            <a:r>
-              <a:t>TEACHING PURPOSE</a:t>
-            </a:r>
-          </a:p>
-          <a:p xmlns:a="http://schemas.openxmlformats.org/drawingml/2006/main">
-            <a:r>
-              <a:t>Individual written defence (40 marks)</a:t>
-            </a:r>
-          </a:p>
-          <a:p xmlns:a="http://schemas.openxmlformats.org/drawingml/2006/main">
-            <a:r>
-              <a:t/>
-            </a:r>
-          </a:p>
-          <a:p xmlns:a="http://schemas.openxmlformats.org/drawingml/2006/main">
-            <a:r>
-              <a:t>CONNECT</a:t>
-            </a:r>
-          </a:p>
-          <a:p xmlns:a="http://schemas.openxmlformats.org/drawingml/2006/main">
-            <a:r>
-              <a:t>Build on the preceding slide: Presentation evidence (35 marks).</a:t>
-            </a:r>
-          </a:p>
-          <a:p xmlns:a="http://schemas.openxmlformats.org/drawingml/2006/main">
-            <a:r>
-              <a:t/>
-            </a:r>
-          </a:p>
-          <a:p xmlns:a="http://schemas.openxmlformats.org/drawingml/2006/main">
-            <a:r>
               <a:t>LECTURER CUE</a:t>
             </a:r>
           </a:p>
@@ -3965,42 +2825,12 @@
           </a:p>
           <a:p xmlns:a="http://schemas.openxmlformats.org/drawingml/2006/main">
             <a:r>
-              <a:t>EXPLAIN IN ORDINARY WORDS</a:t>
-            </a:r>
-          </a:p>
-          <a:p xmlns:a="http://schemas.openxmlformats.org/drawingml/2006/main">
-            <a:r>
-              <a:t>A notebook contains code cells and explanatory text cells. The runtime remembers values from cells that actually ran, which may differ from their visual order.</a:t>
-            </a:r>
-          </a:p>
-          <a:p xmlns:a="http://schemas.openxmlformats.org/drawingml/2006/main">
-            <a:r>
-              <a:t/>
-            </a:r>
-          </a:p>
-          <a:p xmlns:a="http://schemas.openxmlformats.org/drawingml/2006/main">
-            <a:r>
-              <a:t>CHECK AND EXPECTED ANSWER</a:t>
-            </a:r>
-          </a:p>
-          <a:p xmlns:a="http://schemas.openxmlformats.org/drawingml/2006/main">
-            <a:r>
-              <a:t>Does editing a cell update a value already stored in memory? No; the cell must run.</a:t>
-            </a:r>
-          </a:p>
-          <a:p xmlns:a="http://schemas.openxmlformats.org/drawingml/2006/main">
-            <a:r>
-              <a:t/>
-            </a:r>
-          </a:p>
-          <a:p xmlns:a="http://schemas.openxmlformats.org/drawingml/2006/main">
-            <a:r>
-              <a:t>IF LEARNERS ARE STUCK</a:t>
-            </a:r>
-          </a:p>
-          <a:p xmlns:a="http://schemas.openxmlformats.org/drawingml/2006/main">
-            <a:r>
-              <a:t>Outside an assessment restriction, restart and run from the top after loading data. Fix the first error before later cells; save the successful notebook.</a:t>
+              <a:t>TEACHING MODE</a:t>
+            </a:r>
+          </a:p>
+          <a:p xmlns:a="http://schemas.openxmlformats.org/drawingml/2006/main">
+            <a:r>
+              <a:t>Demonstrate first. Read each new symbol aloud, trace the values and compare the shown output. Learners repeat worked examples individually after class.</a:t>
             </a:r>
           </a:p>
           <a:p xmlns:a="http://schemas.openxmlformats.org/drawingml/2006/main">
@@ -4015,37 +2845,22 @@
           </a:p>
           <a:p xmlns:a="http://schemas.openxmlformats.org/drawingml/2006/main">
             <a:r>
-              <a:t>Reflection (20 marks). Move on after a learner can explain the current example or required action.</a:t>
-            </a:r>
-          </a:p>
-          <a:p xmlns:a="http://schemas.openxmlformats.org/drawingml/2006/main">
-            <a:r>
-              <a:t/>
-            </a:r>
-          </a:p>
-          <a:p xmlns:a="http://schemas.openxmlformats.org/drawingml/2006/main">
-            <a:r>
-              <a:t>TEACHING MODE</a:t>
-            </a:r>
-          </a:p>
-          <a:p xmlns:a="http://schemas.openxmlformats.org/drawingml/2006/main">
-            <a:r>
-              <a:t>Demonstrate the example directly. Explain each new name, symbol and output. Use the revision example for an individual check after class; no live partner activity is required.</a:t>
-            </a:r>
-          </a:p>
-          <a:p xmlns:a="http://schemas.openxmlformats.org/drawingml/2006/main">
-            <a:r>
-              <a:t/>
-            </a:r>
-          </a:p>
-          <a:p xmlns:a="http://schemas.openxmlformats.org/drawingml/2006/main">
-            <a:r>
-              <a:t>NEXT</a:t>
-            </a:r>
-          </a:p>
-          <a:p xmlns:a="http://schemas.openxmlformats.org/drawingml/2006/main">
-            <a:r>
               <a:t>Reflection (20 marks).</a:t>
+            </a:r>
+          </a:p>
+          <a:p xmlns:a="http://schemas.openxmlformats.org/drawingml/2006/main">
+            <a:r>
+              <a:t/>
+            </a:r>
+          </a:p>
+          <a:p xmlns:a="http://schemas.openxmlformats.org/drawingml/2006/main">
+            <a:r>
+              <a:t>REFERENCES</a:t>
+            </a:r>
+          </a:p>
+          <a:p xmlns:a="http://schemas.openxmlformats.org/drawingml/2006/main">
+            <a:r>
+              <a:t/>
             </a:r>
           </a:p>
         </p:txBody>
@@ -4135,7 +2950,7 @@
           </a:p>
           <a:p xmlns:a="http://schemas.openxmlformats.org/drawingml/2006/main">
             <a:r>
-              <a:t>Build on Individual written defence (40 marks). Explain why this example is needed before running it.</a:t>
+              <a:t>Previous slide: Individual written defence (40 marks).</a:t>
             </a:r>
           </a:p>
           <a:p xmlns:a="http://schemas.openxmlformats.org/drawingml/2006/main">
@@ -4180,41 +2995,6 @@
           </a:p>
           <a:p xmlns:a="http://schemas.openxmlformats.org/drawingml/2006/main">
             <a:r>
-              <a:t>LECTURER DETAIL</a:t>
-            </a:r>
-          </a:p>
-          <a:p xmlns:a="http://schemas.openxmlformats.org/drawingml/2006/main">
-            <a:r>
-              <a:t>TEACHING PURPOSE</a:t>
-            </a:r>
-          </a:p>
-          <a:p xmlns:a="http://schemas.openxmlformats.org/drawingml/2006/main">
-            <a:r>
-              <a:t>Reflection (20 marks)</a:t>
-            </a:r>
-          </a:p>
-          <a:p xmlns:a="http://schemas.openxmlformats.org/drawingml/2006/main">
-            <a:r>
-              <a:t/>
-            </a:r>
-          </a:p>
-          <a:p xmlns:a="http://schemas.openxmlformats.org/drawingml/2006/main">
-            <a:r>
-              <a:t>CONNECT</a:t>
-            </a:r>
-          </a:p>
-          <a:p xmlns:a="http://schemas.openxmlformats.org/drawingml/2006/main">
-            <a:r>
-              <a:t>Build on the preceding slide: Individual written defence (40 marks).</a:t>
-            </a:r>
-          </a:p>
-          <a:p xmlns:a="http://schemas.openxmlformats.org/drawingml/2006/main">
-            <a:r>
-              <a:t/>
-            </a:r>
-          </a:p>
-          <a:p xmlns:a="http://schemas.openxmlformats.org/drawingml/2006/main">
-            <a:r>
               <a:t>LECTURER CUE</a:t>
             </a:r>
           </a:p>
@@ -4230,42 +3010,42 @@
           </a:p>
           <a:p xmlns:a="http://schemas.openxmlformats.org/drawingml/2006/main">
             <a:r>
+              <a:t>TEACHING MODE</a:t>
+            </a:r>
+          </a:p>
+          <a:p xmlns:a="http://schemas.openxmlformats.org/drawingml/2006/main">
+            <a:r>
+              <a:t>Demonstrate first. Read each new symbol aloud, trace the values and compare the shown output. Learners repeat worked examples individually after class.</a:t>
+            </a:r>
+          </a:p>
+          <a:p xmlns:a="http://schemas.openxmlformats.org/drawingml/2006/main">
+            <a:r>
+              <a:t/>
+            </a:r>
+          </a:p>
+          <a:p xmlns:a="http://schemas.openxmlformats.org/drawingml/2006/main">
+            <a:r>
               <a:t>NEXT</a:t>
             </a:r>
           </a:p>
           <a:p xmlns:a="http://schemas.openxmlformats.org/drawingml/2006/main">
             <a:r>
-              <a:t>AI-use declaration (5 marks). Move on after a learner can explain the current example or required action.</a:t>
-            </a:r>
-          </a:p>
-          <a:p xmlns:a="http://schemas.openxmlformats.org/drawingml/2006/main">
-            <a:r>
-              <a:t/>
-            </a:r>
-          </a:p>
-          <a:p xmlns:a="http://schemas.openxmlformats.org/drawingml/2006/main">
-            <a:r>
-              <a:t>TEACHING MODE</a:t>
-            </a:r>
-          </a:p>
-          <a:p xmlns:a="http://schemas.openxmlformats.org/drawingml/2006/main">
-            <a:r>
-              <a:t>Demonstrate the example directly. Explain each new name, symbol and output. Use the revision example for an individual check after class; no live partner activity is required.</a:t>
-            </a:r>
-          </a:p>
-          <a:p xmlns:a="http://schemas.openxmlformats.org/drawingml/2006/main">
-            <a:r>
-              <a:t/>
-            </a:r>
-          </a:p>
-          <a:p xmlns:a="http://schemas.openxmlformats.org/drawingml/2006/main">
-            <a:r>
-              <a:t>NEXT</a:t>
-            </a:r>
-          </a:p>
-          <a:p xmlns:a="http://schemas.openxmlformats.org/drawingml/2006/main">
-            <a:r>
               <a:t>AI-use declaration (5 marks).</a:t>
+            </a:r>
+          </a:p>
+          <a:p xmlns:a="http://schemas.openxmlformats.org/drawingml/2006/main">
+            <a:r>
+              <a:t/>
+            </a:r>
+          </a:p>
+          <a:p xmlns:a="http://schemas.openxmlformats.org/drawingml/2006/main">
+            <a:r>
+              <a:t>REFERENCES</a:t>
+            </a:r>
+          </a:p>
+          <a:p xmlns:a="http://schemas.openxmlformats.org/drawingml/2006/main">
+            <a:r>
+              <a:t/>
             </a:r>
           </a:p>
         </p:txBody>
@@ -4355,7 +3135,7 @@
           </a:p>
           <a:p xmlns:a="http://schemas.openxmlformats.org/drawingml/2006/main">
             <a:r>
-              <a:t>Build on Reflection (20 marks). Explain why this example is needed before running it.</a:t>
+              <a:t>Previous slide: Reflection (20 marks).</a:t>
             </a:r>
           </a:p>
           <a:p xmlns:a="http://schemas.openxmlformats.org/drawingml/2006/main">
@@ -4380,41 +3160,6 @@
           </a:p>
           <a:p xmlns:a="http://schemas.openxmlformats.org/drawingml/2006/main">
             <a:r>
-              <a:t>LECTURER DETAIL</a:t>
-            </a:r>
-          </a:p>
-          <a:p xmlns:a="http://schemas.openxmlformats.org/drawingml/2006/main">
-            <a:r>
-              <a:t>TEACHING PURPOSE</a:t>
-            </a:r>
-          </a:p>
-          <a:p xmlns:a="http://schemas.openxmlformats.org/drawingml/2006/main">
-            <a:r>
-              <a:t>AI-use declaration (5 marks)</a:t>
-            </a:r>
-          </a:p>
-          <a:p xmlns:a="http://schemas.openxmlformats.org/drawingml/2006/main">
-            <a:r>
-              <a:t/>
-            </a:r>
-          </a:p>
-          <a:p xmlns:a="http://schemas.openxmlformats.org/drawingml/2006/main">
-            <a:r>
-              <a:t>CONNECT</a:t>
-            </a:r>
-          </a:p>
-          <a:p xmlns:a="http://schemas.openxmlformats.org/drawingml/2006/main">
-            <a:r>
-              <a:t>Build on the preceding slide: Reflection (20 marks).</a:t>
-            </a:r>
-          </a:p>
-          <a:p xmlns:a="http://schemas.openxmlformats.org/drawingml/2006/main">
-            <a:r>
-              <a:t/>
-            </a:r>
-          </a:p>
-          <a:p xmlns:a="http://schemas.openxmlformats.org/drawingml/2006/main">
-            <a:r>
               <a:t>LECTURER CUE</a:t>
             </a:r>
           </a:p>
@@ -4430,37 +3175,12 @@
           </a:p>
           <a:p xmlns:a="http://schemas.openxmlformats.org/drawingml/2006/main">
             <a:r>
-              <a:t>EXPLAIN IN ORDINARY WORDS</a:t>
-            </a:r>
-          </a:p>
-          <a:p xmlns:a="http://schemas.openxmlformats.org/drawingml/2006/main">
-            <a:r>
-              <a:t>A repository is the project folder and recorded history. A commit records a chosen change; uploading or pushing shares it. A README tells someone else how to run the work.</a:t>
-            </a:r>
-          </a:p>
-          <a:p xmlns:a="http://schemas.openxmlformats.org/drawingml/2006/main">
-            <a:r>
-              <a:t/>
-            </a:r>
-          </a:p>
-          <a:p xmlns:a="http://schemas.openxmlformats.org/drawingml/2006/main">
-            <a:r>
-              <a:t>CHECK AND EXPECTED ANSWER</a:t>
-            </a:r>
-          </a:p>
-          <a:p xmlns:a="http://schemas.openxmlformats.org/drawingml/2006/main">
-            <a:r>
-              <a:t>Does saving to GitHub hand in the assignment? No; submission requires the correct form and its confirmation.</a:t>
-            </a:r>
-          </a:p>
-          <a:p xmlns:a="http://schemas.openxmlformats.org/drawingml/2006/main">
-            <a:r>
-              <a:t/>
-            </a:r>
-          </a:p>
-          <a:p xmlns:a="http://schemas.openxmlformats.org/drawingml/2006/main">
-            <a:r>
-              <a:t>IF LEARNERS ARE STUCK</a:t>
+              <a:t>TEACHING MODE</a:t>
+            </a:r>
+          </a:p>
+          <a:p xmlns:a="http://schemas.openxmlformats.org/drawingml/2006/main">
+            <a:r>
+              <a:t>Demonstrate first. Read each new symbol aloud, trace the values and compare the shown output. Learners repeat worked examples individually after class.</a:t>
             </a:r>
           </a:p>
           <a:p xmlns:a="http://schemas.openxmlformats.org/drawingml/2006/main">
@@ -4475,37 +3195,22 @@
           </a:p>
           <a:p xmlns:a="http://schemas.openxmlformats.org/drawingml/2006/main">
             <a:r>
-              <a:t>Presentation and individual reflection submission. Move on after a learner can explain the current example or required action.</a:t>
-            </a:r>
-          </a:p>
-          <a:p xmlns:a="http://schemas.openxmlformats.org/drawingml/2006/main">
-            <a:r>
-              <a:t/>
-            </a:r>
-          </a:p>
-          <a:p xmlns:a="http://schemas.openxmlformats.org/drawingml/2006/main">
-            <a:r>
-              <a:t>TEACHING MODE</a:t>
-            </a:r>
-          </a:p>
-          <a:p xmlns:a="http://schemas.openxmlformats.org/drawingml/2006/main">
-            <a:r>
-              <a:t>Demonstrate the example directly. Explain each new name, symbol and output. Use the revision example for an individual check after class; no live partner activity is required.</a:t>
-            </a:r>
-          </a:p>
-          <a:p xmlns:a="http://schemas.openxmlformats.org/drawingml/2006/main">
-            <a:r>
-              <a:t/>
-            </a:r>
-          </a:p>
-          <a:p xmlns:a="http://schemas.openxmlformats.org/drawingml/2006/main">
-            <a:r>
-              <a:t>NEXT</a:t>
-            </a:r>
-          </a:p>
-          <a:p xmlns:a="http://schemas.openxmlformats.org/drawingml/2006/main">
-            <a:r>
               <a:t>Presentation and individual reflection submission.</a:t>
+            </a:r>
+          </a:p>
+          <a:p xmlns:a="http://schemas.openxmlformats.org/drawingml/2006/main">
+            <a:r>
+              <a:t/>
+            </a:r>
+          </a:p>
+          <a:p xmlns:a="http://schemas.openxmlformats.org/drawingml/2006/main">
+            <a:r>
+              <a:t>REFERENCES</a:t>
+            </a:r>
+          </a:p>
+          <a:p xmlns:a="http://schemas.openxmlformats.org/drawingml/2006/main">
+            <a:r>
+              <a:t/>
             </a:r>
           </a:p>
         </p:txBody>
@@ -4595,7 +3300,7 @@
           </a:p>
           <a:p xmlns:a="http://schemas.openxmlformats.org/drawingml/2006/main">
             <a:r>
-              <a:t>Build on AI-use declaration (5 marks). Explain why this example is needed before running it.</a:t>
+              <a:t>Previous slide: AI-use declaration (5 marks).</a:t>
             </a:r>
           </a:p>
           <a:p xmlns:a="http://schemas.openxmlformats.org/drawingml/2006/main">
@@ -4650,41 +3355,6 @@
           </a:p>
           <a:p xmlns:a="http://schemas.openxmlformats.org/drawingml/2006/main">
             <a:r>
-              <a:t>LECTURER DETAIL</a:t>
-            </a:r>
-          </a:p>
-          <a:p xmlns:a="http://schemas.openxmlformats.org/drawingml/2006/main">
-            <a:r>
-              <a:t>TEACHING PURPOSE</a:t>
-            </a:r>
-          </a:p>
-          <a:p xmlns:a="http://schemas.openxmlformats.org/drawingml/2006/main">
-            <a:r>
-              <a:t>Presentation and individual reflection submission</a:t>
-            </a:r>
-          </a:p>
-          <a:p xmlns:a="http://schemas.openxmlformats.org/drawingml/2006/main">
-            <a:r>
-              <a:t/>
-            </a:r>
-          </a:p>
-          <a:p xmlns:a="http://schemas.openxmlformats.org/drawingml/2006/main">
-            <a:r>
-              <a:t>CONNECT</a:t>
-            </a:r>
-          </a:p>
-          <a:p xmlns:a="http://schemas.openxmlformats.org/drawingml/2006/main">
-            <a:r>
-              <a:t>Build on the preceding slide: AI-use declaration (5 marks).</a:t>
-            </a:r>
-          </a:p>
-          <a:p xmlns:a="http://schemas.openxmlformats.org/drawingml/2006/main">
-            <a:r>
-              <a:t/>
-            </a:r>
-          </a:p>
-          <a:p xmlns:a="http://schemas.openxmlformats.org/drawingml/2006/main">
-            <a:r>
               <a:t>LECTURER CUE</a:t>
             </a:r>
           </a:p>
@@ -4700,12 +3370,12 @@
           </a:p>
           <a:p xmlns:a="http://schemas.openxmlformats.org/drawingml/2006/main">
             <a:r>
-              <a:t>ASSIGNMENT HANDOVER</a:t>
-            </a:r>
-          </a:p>
-          <a:p xmlns:a="http://schemas.openxmlformats.org/drawingml/2006/main">
-            <a:r>
-              <a:t>Open the matching public student guide and show the exact starter filename, required outputs and upload set. Ask one learner to repeat what to submit and where. IUEA Student Registration Number is required freeform text; learners enter their own number. A saved repository is not a submitted form. Read the live deadline and keep the submission confirmation. Do not release an assessment that is still awaiting grading validation.</a:t>
+              <a:t>TEACHING MODE</a:t>
+            </a:r>
+          </a:p>
+          <a:p xmlns:a="http://schemas.openxmlformats.org/drawingml/2006/main">
+            <a:r>
+              <a:t>Demonstrate first. Read each new symbol aloud, trace the values and compare the shown output. Learners repeat worked examples individually after class.</a:t>
             </a:r>
           </a:p>
           <a:p xmlns:a="http://schemas.openxmlformats.org/drawingml/2006/main">
@@ -4720,37 +3390,22 @@
           </a:p>
           <a:p xmlns:a="http://schemas.openxmlformats.org/drawingml/2006/main">
             <a:r>
-              <a:t>Before you leave. Move on after a learner can explain the current example or required action.</a:t>
-            </a:r>
-          </a:p>
-          <a:p xmlns:a="http://schemas.openxmlformats.org/drawingml/2006/main">
-            <a:r>
-              <a:t/>
-            </a:r>
-          </a:p>
-          <a:p xmlns:a="http://schemas.openxmlformats.org/drawingml/2006/main">
-            <a:r>
-              <a:t>TEACHING MODE</a:t>
-            </a:r>
-          </a:p>
-          <a:p xmlns:a="http://schemas.openxmlformats.org/drawingml/2006/main">
-            <a:r>
-              <a:t>Demonstrate the example directly. Explain each new name, symbol and output. Use the revision example for an individual check after class; no live partner activity is required.</a:t>
-            </a:r>
-          </a:p>
-          <a:p xmlns:a="http://schemas.openxmlformats.org/drawingml/2006/main">
-            <a:r>
-              <a:t/>
-            </a:r>
-          </a:p>
-          <a:p xmlns:a="http://schemas.openxmlformats.org/drawingml/2006/main">
-            <a:r>
-              <a:t>NEXT</a:t>
-            </a:r>
-          </a:p>
-          <a:p xmlns:a="http://schemas.openxmlformats.org/drawingml/2006/main">
-            <a:r>
               <a:t>Before you leave.</a:t>
+            </a:r>
+          </a:p>
+          <a:p xmlns:a="http://schemas.openxmlformats.org/drawingml/2006/main">
+            <a:r>
+              <a:t/>
+            </a:r>
+          </a:p>
+          <a:p xmlns:a="http://schemas.openxmlformats.org/drawingml/2006/main">
+            <a:r>
+              <a:t>REFERENCES</a:t>
+            </a:r>
+          </a:p>
+          <a:p xmlns:a="http://schemas.openxmlformats.org/drawingml/2006/main">
+            <a:r>
+              <a:t/>
             </a:r>
           </a:p>
         </p:txBody>
@@ -4840,7 +3495,7 @@
           </a:p>
           <a:p xmlns:a="http://schemas.openxmlformats.org/drawingml/2006/main">
             <a:r>
-              <a:t>Build on Presentation and individual reflection submission. Explain why this example is needed before running it.</a:t>
+              <a:t>Previous slide: Presentation and individual reflection submission.</a:t>
             </a:r>
           </a:p>
           <a:p xmlns:a="http://schemas.openxmlformats.org/drawingml/2006/main">
@@ -4875,41 +3530,6 @@
           </a:p>
           <a:p xmlns:a="http://schemas.openxmlformats.org/drawingml/2006/main">
             <a:r>
-              <a:t>LECTURER DETAIL</a:t>
-            </a:r>
-          </a:p>
-          <a:p xmlns:a="http://schemas.openxmlformats.org/drawingml/2006/main">
-            <a:r>
-              <a:t>TEACHING PURPOSE</a:t>
-            </a:r>
-          </a:p>
-          <a:p xmlns:a="http://schemas.openxmlformats.org/drawingml/2006/main">
-            <a:r>
-              <a:t>Before you leave</a:t>
-            </a:r>
-          </a:p>
-          <a:p xmlns:a="http://schemas.openxmlformats.org/drawingml/2006/main">
-            <a:r>
-              <a:t/>
-            </a:r>
-          </a:p>
-          <a:p xmlns:a="http://schemas.openxmlformats.org/drawingml/2006/main">
-            <a:r>
-              <a:t>CONNECT</a:t>
-            </a:r>
-          </a:p>
-          <a:p xmlns:a="http://schemas.openxmlformats.org/drawingml/2006/main">
-            <a:r>
-              <a:t>Build on the preceding slide: Presentation and individual reflection submission.</a:t>
-            </a:r>
-          </a:p>
-          <a:p xmlns:a="http://schemas.openxmlformats.org/drawingml/2006/main">
-            <a:r>
-              <a:t/>
-            </a:r>
-          </a:p>
-          <a:p xmlns:a="http://schemas.openxmlformats.org/drawingml/2006/main">
-            <a:r>
               <a:t>LECTURER CUE</a:t>
             </a:r>
           </a:p>
@@ -4925,57 +3545,12 @@
           </a:p>
           <a:p xmlns:a="http://schemas.openxmlformats.org/drawingml/2006/main">
             <a:r>
-              <a:t>EXPLAIN IN ORDINARY WORDS</a:t>
-            </a:r>
-          </a:p>
-          <a:p xmlns:a="http://schemas.openxmlformats.org/drawingml/2006/main">
-            <a:r>
-              <a:t>An observation describes the data. A finding answers a defined question with evidence. A recommendation adds an action, its justification and limits.</a:t>
-            </a:r>
-          </a:p>
-          <a:p xmlns:a="http://schemas.openxmlformats.org/drawingml/2006/main">
-            <a:r>
-              <a:t/>
-            </a:r>
-          </a:p>
-          <a:p xmlns:a="http://schemas.openxmlformats.org/drawingml/2006/main">
-            <a:r>
-              <a:t>CHECK AND EXPECTED ANSWER</a:t>
-            </a:r>
-          </a:p>
-          <a:p xmlns:a="http://schemas.openxmlformats.org/drawingml/2006/main">
-            <a:r>
-              <a:t>Does a difference between two groups prove one caused the other? No. Other differences or selection may explain it.</a:t>
-            </a:r>
-          </a:p>
-          <a:p xmlns:a="http://schemas.openxmlformats.org/drawingml/2006/main">
-            <a:r>
-              <a:t/>
-            </a:r>
-          </a:p>
-          <a:p xmlns:a="http://schemas.openxmlformats.org/drawingml/2006/main">
-            <a:r>
-              <a:t>IF LEARNERS ARE STUCK</a:t>
-            </a:r>
-          </a:p>
-          <a:p xmlns:a="http://schemas.openxmlformats.org/drawingml/2006/main">
-            <a:r>
-              <a:t>Ask for the population, time period, number and comparison. Then ask what additional evidence could change the recommendation.</a:t>
-            </a:r>
-          </a:p>
-          <a:p xmlns:a="http://schemas.openxmlformats.org/drawingml/2006/main">
-            <a:r>
-              <a:t/>
-            </a:r>
-          </a:p>
-          <a:p xmlns:a="http://schemas.openxmlformats.org/drawingml/2006/main">
-            <a:r>
               <a:t>TEACHING MODE</a:t>
             </a:r>
           </a:p>
           <a:p xmlns:a="http://schemas.openxmlformats.org/drawingml/2006/main">
             <a:r>
-              <a:t>Demonstrate the example directly. Explain each new name, symbol and output. Use the revision example for an individual check after class; no live partner activity is required.</a:t>
+              <a:t>Demonstrate first. Read each new symbol aloud, trace the values and compare the shown output. Learners repeat worked examples individually after class.</a:t>
             </a:r>
           </a:p>
           <a:p xmlns:a="http://schemas.openxmlformats.org/drawingml/2006/main">
@@ -4991,6 +3566,21 @@
           <a:p xmlns:a="http://schemas.openxmlformats.org/drawingml/2006/main">
             <a:r>
               <a:t>independent revision and the issued task.</a:t>
+            </a:r>
+          </a:p>
+          <a:p xmlns:a="http://schemas.openxmlformats.org/drawingml/2006/main">
+            <a:r>
+              <a:t/>
+            </a:r>
+          </a:p>
+          <a:p xmlns:a="http://schemas.openxmlformats.org/drawingml/2006/main">
+            <a:r>
+              <a:t>REFERENCES</a:t>
+            </a:r>
+          </a:p>
+          <a:p xmlns:a="http://schemas.openxmlformats.org/drawingml/2006/main">
+            <a:r>
+              <a:t/>
             </a:r>
           </a:p>
         </p:txBody>
@@ -5080,7 +3670,7 @@
           </a:p>
           <a:p xmlns:a="http://schemas.openxmlformats.org/drawingml/2006/main">
             <a:r>
-              <a:t>Build on Today’s learning. Explain why this example is needed before running it.</a:t>
+              <a:t>Previous slide: Today’s learning.</a:t>
             </a:r>
           </a:p>
           <a:p xmlns:a="http://schemas.openxmlformats.org/drawingml/2006/main">
@@ -5105,87 +3695,27 @@
           </a:p>
           <a:p xmlns:a="http://schemas.openxmlformats.org/drawingml/2006/main">
             <a:r>
-              <a:t>LECTURER DETAIL</a:t>
-            </a:r>
-          </a:p>
-          <a:p xmlns:a="http://schemas.openxmlformats.org/drawingml/2006/main">
-            <a:r>
-              <a:t>TEACHING PURPOSE</a:t>
-            </a:r>
-          </a:p>
-          <a:p xmlns:a="http://schemas.openxmlformats.org/drawingml/2006/main">
-            <a:r>
-              <a:t>Recall and a first attempt</a:t>
-            </a:r>
-          </a:p>
-          <a:p xmlns:a="http://schemas.openxmlformats.org/drawingml/2006/main">
-            <a:r>
-              <a:t/>
-            </a:r>
-          </a:p>
-          <a:p xmlns:a="http://schemas.openxmlformats.org/drawingml/2006/main">
-            <a:r>
-              <a:t>CONNECT</a:t>
-            </a:r>
-          </a:p>
-          <a:p xmlns:a="http://schemas.openxmlformats.org/drawingml/2006/main">
-            <a:r>
-              <a:t>Build on the preceding slide: Today’s learning.</a:t>
-            </a:r>
-          </a:p>
-          <a:p xmlns:a="http://schemas.openxmlformats.org/drawingml/2006/main">
-            <a:r>
-              <a:t/>
-            </a:r>
-          </a:p>
-          <a:p xmlns:a="http://schemas.openxmlformats.org/drawingml/2006/main">
-            <a:r>
               <a:t>LECTURER CUE</a:t>
             </a:r>
           </a:p>
           <a:p xmlns:a="http://schemas.openxmlformats.org/drawingml/2006/main">
             <a:r>
-              <a:t/>
-            </a:r>
-          </a:p>
-          <a:p xmlns:a="http://schemas.openxmlformats.org/drawingml/2006/main">
-            <a:r>
-              <a:t>EXPLAIN IN ORDINARY WORDS</a:t>
-            </a:r>
-          </a:p>
-          <a:p xmlns:a="http://schemas.openxmlformats.org/drawingml/2006/main">
-            <a:r>
-              <a:t>Name the positive class first. Actual is what happened; predicted is the model decision. Precision asks how many predicted positives were right. Recall asks how many actual positives were found.</a:t>
-            </a:r>
-          </a:p>
-          <a:p xmlns:a="http://schemas.openxmlformats.org/drawingml/2006/main">
-            <a:r>
-              <a:t/>
-            </a:r>
-          </a:p>
-          <a:p xmlns:a="http://schemas.openxmlformats.org/drawingml/2006/main">
-            <a:r>
-              <a:t>CHECK AND EXPECTED ANSWER</a:t>
-            </a:r>
-          </a:p>
-          <a:p xmlns:a="http://schemas.openxmlformats.org/drawingml/2006/main">
-            <a:r>
-              <a:t>With TP=2, FP=1, FN=2: precision=2/3 and recall=2/4. A missed actual positive is a false negative.</a:t>
-            </a:r>
-          </a:p>
-          <a:p xmlns:a="http://schemas.openxmlformats.org/drawingml/2006/main">
-            <a:r>
-              <a:t/>
-            </a:r>
-          </a:p>
-          <a:p xmlns:a="http://schemas.openxmlformats.org/drawingml/2006/main">
-            <a:r>
-              <a:t>IF LEARNERS ARE STUCK</a:t>
-            </a:r>
-          </a:p>
-          <a:p xmlns:a="http://schemas.openxmlformats.org/drawingml/2006/main">
-            <a:r>
-              <a:t>Draw actual/predicted headings. Place one case at a time before calculating a fraction. Explain the task rule for a zero denominator.</a:t>
+              <a:t>Explain the definitions before running or tracing the example. Point to the line or table row that produces each result.</a:t>
+            </a:r>
+          </a:p>
+          <a:p xmlns:a="http://schemas.openxmlformats.org/drawingml/2006/main">
+            <a:r>
+              <a:t/>
+            </a:r>
+          </a:p>
+          <a:p xmlns:a="http://schemas.openxmlformats.org/drawingml/2006/main">
+            <a:r>
+              <a:t>TEACHING MODE</a:t>
+            </a:r>
+          </a:p>
+          <a:p xmlns:a="http://schemas.openxmlformats.org/drawingml/2006/main">
+            <a:r>
+              <a:t>Demonstrate first. Read each new symbol aloud, trace the values and compare the shown output. Learners repeat worked examples individually after class.</a:t>
             </a:r>
           </a:p>
           <a:p xmlns:a="http://schemas.openxmlformats.org/drawingml/2006/main">
@@ -5200,37 +3730,22 @@
           </a:p>
           <a:p xmlns:a="http://schemas.openxmlformats.org/drawingml/2006/main">
             <a:r>
-              <a:t>A presentation connects a claim to evidence. Move on after a learner can explain the current example or required action.</a:t>
-            </a:r>
-          </a:p>
-          <a:p xmlns:a="http://schemas.openxmlformats.org/drawingml/2006/main">
-            <a:r>
-              <a:t/>
-            </a:r>
-          </a:p>
-          <a:p xmlns:a="http://schemas.openxmlformats.org/drawingml/2006/main">
-            <a:r>
-              <a:t>TEACHING MODE</a:t>
-            </a:r>
-          </a:p>
-          <a:p xmlns:a="http://schemas.openxmlformats.org/drawingml/2006/main">
-            <a:r>
-              <a:t>Demonstrate the example directly. Explain each new name, symbol and output. Use the revision example for an individual check after class; no live partner activity is required.</a:t>
-            </a:r>
-          </a:p>
-          <a:p xmlns:a="http://schemas.openxmlformats.org/drawingml/2006/main">
-            <a:r>
-              <a:t/>
-            </a:r>
-          </a:p>
-          <a:p xmlns:a="http://schemas.openxmlformats.org/drawingml/2006/main">
-            <a:r>
-              <a:t>NEXT</a:t>
-            </a:r>
-          </a:p>
-          <a:p xmlns:a="http://schemas.openxmlformats.org/drawingml/2006/main">
-            <a:r>
               <a:t>A presentation connects a claim to evidence.</a:t>
+            </a:r>
+          </a:p>
+          <a:p xmlns:a="http://schemas.openxmlformats.org/drawingml/2006/main">
+            <a:r>
+              <a:t/>
+            </a:r>
+          </a:p>
+          <a:p xmlns:a="http://schemas.openxmlformats.org/drawingml/2006/main">
+            <a:r>
+              <a:t>REFERENCES</a:t>
+            </a:r>
+          </a:p>
+          <a:p xmlns:a="http://schemas.openxmlformats.org/drawingml/2006/main">
+            <a:r>
+              <a:t/>
             </a:r>
           </a:p>
         </p:txBody>
@@ -5320,7 +3835,7 @@
           </a:p>
           <a:p xmlns:a="http://schemas.openxmlformats.org/drawingml/2006/main">
             <a:r>
-              <a:t>Build on Connection to the previous lesson. Explain why this example is needed before running it.</a:t>
+              <a:t>Previous slide: Connection to the previous lesson.</a:t>
             </a:r>
           </a:p>
           <a:p xmlns:a="http://schemas.openxmlformats.org/drawingml/2006/main">
@@ -5340,6 +3855,11 @@
           </a:p>
           <a:p xmlns:a="http://schemas.openxmlformats.org/drawingml/2006/main">
             <a:r>
+              <a:t/>
+            </a:r>
+          </a:p>
+          <a:p xmlns:a="http://schemas.openxmlformats.org/drawingml/2006/main">
+            <a:r>
               <a:t>Defence and reflection: A defence explains why you made a choice. A reflection explains what you learned and would improve. Describe your own contribution with specific evidence.</a:t>
             </a:r>
           </a:p>
@@ -5350,97 +3870,27 @@
           </a:p>
           <a:p xmlns:a="http://schemas.openxmlformats.org/drawingml/2006/main">
             <a:r>
-              <a:t>LECTURER DETAIL</a:t>
-            </a:r>
-          </a:p>
-          <a:p xmlns:a="http://schemas.openxmlformats.org/drawingml/2006/main">
-            <a:r>
-              <a:t>TEACHING PURPOSE</a:t>
-            </a:r>
-          </a:p>
-          <a:p xmlns:a="http://schemas.openxmlformats.org/drawingml/2006/main">
-            <a:r>
-              <a:t>A presentation connects a claim to evidence</a:t>
-            </a:r>
-          </a:p>
-          <a:p xmlns:a="http://schemas.openxmlformats.org/drawingml/2006/main">
-            <a:r>
-              <a:t/>
-            </a:r>
-          </a:p>
-          <a:p xmlns:a="http://schemas.openxmlformats.org/drawingml/2006/main">
-            <a:r>
-              <a:t>CONNECT</a:t>
-            </a:r>
-          </a:p>
-          <a:p xmlns:a="http://schemas.openxmlformats.org/drawingml/2006/main">
-            <a:r>
-              <a:t>Build on the preceding slide: Recall and a first attempt.</a:t>
-            </a:r>
-          </a:p>
-          <a:p xmlns:a="http://schemas.openxmlformats.org/drawingml/2006/main">
-            <a:r>
-              <a:t/>
-            </a:r>
-          </a:p>
-          <a:p xmlns:a="http://schemas.openxmlformats.org/drawingml/2006/main">
-            <a:r>
-              <a:t>EXPLAIN IN ORDINARY WORDS</a:t>
-            </a:r>
-          </a:p>
-          <a:p xmlns:a="http://schemas.openxmlformats.org/drawingml/2006/main">
-            <a:r>
-              <a:t>An observation describes the data. A finding answers a defined question with evidence. A recommendation adds an action, its justification and limits.</a:t>
-            </a:r>
-          </a:p>
-          <a:p xmlns:a="http://schemas.openxmlformats.org/drawingml/2006/main">
-            <a:r>
-              <a:t/>
-            </a:r>
-          </a:p>
-          <a:p xmlns:a="http://schemas.openxmlformats.org/drawingml/2006/main">
-            <a:r>
-              <a:t>CHECK AND EXPECTED ANSWER</a:t>
-            </a:r>
-          </a:p>
-          <a:p xmlns:a="http://schemas.openxmlformats.org/drawingml/2006/main">
-            <a:r>
-              <a:t>Does a difference between two groups prove one caused the other? No. Other differences or selection may explain it.</a:t>
-            </a:r>
-          </a:p>
-          <a:p xmlns:a="http://schemas.openxmlformats.org/drawingml/2006/main">
-            <a:r>
-              <a:t/>
-            </a:r>
-          </a:p>
-          <a:p xmlns:a="http://schemas.openxmlformats.org/drawingml/2006/main">
-            <a:r>
-              <a:t>IF LEARNERS ARE STUCK</a:t>
-            </a:r>
-          </a:p>
-          <a:p xmlns:a="http://schemas.openxmlformats.org/drawingml/2006/main">
-            <a:r>
-              <a:t>Ask for the population, time period, number and comparison. Then ask what additional evidence could change the recommendation.</a:t>
-            </a:r>
-          </a:p>
-          <a:p xmlns:a="http://schemas.openxmlformats.org/drawingml/2006/main">
-            <a:r>
-              <a:t/>
-            </a:r>
-          </a:p>
-          <a:p xmlns:a="http://schemas.openxmlformats.org/drawingml/2006/main">
-            <a:r>
-              <a:t>POINT TO THE DEFINITION</a:t>
-            </a:r>
-          </a:p>
-          <a:p xmlns:a="http://schemas.openxmlformats.org/drawingml/2006/main">
-            <a:r>
-              <a:t>Finding and limitation: A finding states what the evidence shows. A limitation states where that evidence is incomplete or may not apply. Point to the relevant chart, metric or record.</a:t>
-            </a:r>
-          </a:p>
-          <a:p xmlns:a="http://schemas.openxmlformats.org/drawingml/2006/main">
-            <a:r>
-              <a:t>Defence and reflection: A defence explains why you made a choice. A reflection explains what you learned and would improve. Describe your own contribution with specific evidence.</a:t>
+              <a:t>LECTURER CUE</a:t>
+            </a:r>
+          </a:p>
+          <a:p xmlns:a="http://schemas.openxmlformats.org/drawingml/2006/main">
+            <a:r>
+              <a:t>Explain the definitions before running or tracing the example. Point to the line or table row that produces each result.</a:t>
+            </a:r>
+          </a:p>
+          <a:p xmlns:a="http://schemas.openxmlformats.org/drawingml/2006/main">
+            <a:r>
+              <a:t/>
+            </a:r>
+          </a:p>
+          <a:p xmlns:a="http://schemas.openxmlformats.org/drawingml/2006/main">
+            <a:r>
+              <a:t>TEACHING MODE</a:t>
+            </a:r>
+          </a:p>
+          <a:p xmlns:a="http://schemas.openxmlformats.org/drawingml/2006/main">
+            <a:r>
+              <a:t>Demonstrate first. Read each new symbol aloud, trace the values and compare the shown output. Learners repeat worked examples individually after class.</a:t>
             </a:r>
           </a:p>
           <a:p xmlns:a="http://schemas.openxmlformats.org/drawingml/2006/main">
@@ -5455,37 +3905,22 @@
           </a:p>
           <a:p xmlns:a="http://schemas.openxmlformats.org/drawingml/2006/main">
             <a:r>
-              <a:t>A six-minute presentation. Move on after a learner can explain the current example or required action.</a:t>
-            </a:r>
-          </a:p>
-          <a:p xmlns:a="http://schemas.openxmlformats.org/drawingml/2006/main">
-            <a:r>
-              <a:t/>
-            </a:r>
-          </a:p>
-          <a:p xmlns:a="http://schemas.openxmlformats.org/drawingml/2006/main">
-            <a:r>
-              <a:t>TEACHING MODE</a:t>
-            </a:r>
-          </a:p>
-          <a:p xmlns:a="http://schemas.openxmlformats.org/drawingml/2006/main">
-            <a:r>
-              <a:t>Demonstrate the example directly. Explain each new name, symbol and output. Use the revision example for an individual check after class; no live partner activity is required.</a:t>
-            </a:r>
-          </a:p>
-          <a:p xmlns:a="http://schemas.openxmlformats.org/drawingml/2006/main">
-            <a:r>
-              <a:t/>
-            </a:r>
-          </a:p>
-          <a:p xmlns:a="http://schemas.openxmlformats.org/drawingml/2006/main">
-            <a:r>
-              <a:t>NEXT</a:t>
-            </a:r>
-          </a:p>
-          <a:p xmlns:a="http://schemas.openxmlformats.org/drawingml/2006/main">
-            <a:r>
               <a:t>A six-minute presentation.</a:t>
+            </a:r>
+          </a:p>
+          <a:p xmlns:a="http://schemas.openxmlformats.org/drawingml/2006/main">
+            <a:r>
+              <a:t/>
+            </a:r>
+          </a:p>
+          <a:p xmlns:a="http://schemas.openxmlformats.org/drawingml/2006/main">
+            <a:r>
+              <a:t>REFERENCES</a:t>
+            </a:r>
+          </a:p>
+          <a:p xmlns:a="http://schemas.openxmlformats.org/drawingml/2006/main">
+            <a:r>
+              <a:t/>
             </a:r>
           </a:p>
         </p:txBody>
@@ -5575,7 +4010,7 @@
           </a:p>
           <a:p xmlns:a="http://schemas.openxmlformats.org/drawingml/2006/main">
             <a:r>
-              <a:t>Build on A presentation connects a claim to evidence. Explain why this example is needed before running it.</a:t>
+              <a:t>Previous slide: A presentation connects a claim to evidence.</a:t>
             </a:r>
           </a:p>
           <a:p xmlns:a="http://schemas.openxmlformats.org/drawingml/2006/main">
@@ -5620,41 +4055,6 @@
           </a:p>
           <a:p xmlns:a="http://schemas.openxmlformats.org/drawingml/2006/main">
             <a:r>
-              <a:t>LECTURER DETAIL</a:t>
-            </a:r>
-          </a:p>
-          <a:p xmlns:a="http://schemas.openxmlformats.org/drawingml/2006/main">
-            <a:r>
-              <a:t>TEACHING PURPOSE</a:t>
-            </a:r>
-          </a:p>
-          <a:p xmlns:a="http://schemas.openxmlformats.org/drawingml/2006/main">
-            <a:r>
-              <a:t>A six-minute presentation</a:t>
-            </a:r>
-          </a:p>
-          <a:p xmlns:a="http://schemas.openxmlformats.org/drawingml/2006/main">
-            <a:r>
-              <a:t/>
-            </a:r>
-          </a:p>
-          <a:p xmlns:a="http://schemas.openxmlformats.org/drawingml/2006/main">
-            <a:r>
-              <a:t>CONNECT</a:t>
-            </a:r>
-          </a:p>
-          <a:p xmlns:a="http://schemas.openxmlformats.org/drawingml/2006/main">
-            <a:r>
-              <a:t>Build on the preceding slide: A presentation connects a claim to evidence.</a:t>
-            </a:r>
-          </a:p>
-          <a:p xmlns:a="http://schemas.openxmlformats.org/drawingml/2006/main">
-            <a:r>
-              <a:t/>
-            </a:r>
-          </a:p>
-          <a:p xmlns:a="http://schemas.openxmlformats.org/drawingml/2006/main">
-            <a:r>
               <a:t>LECTURER CUE</a:t>
             </a:r>
           </a:p>
@@ -5670,42 +4070,12 @@
           </a:p>
           <a:p xmlns:a="http://schemas.openxmlformats.org/drawingml/2006/main">
             <a:r>
-              <a:t>EXPLAIN IN ORDINARY WORDS</a:t>
-            </a:r>
-          </a:p>
-          <a:p xmlns:a="http://schemas.openxmlformats.org/drawingml/2006/main">
-            <a:r>
-              <a:t>An observation describes the data. A finding answers a defined question with evidence. A recommendation adds an action, its justification and limits.</a:t>
-            </a:r>
-          </a:p>
-          <a:p xmlns:a="http://schemas.openxmlformats.org/drawingml/2006/main">
-            <a:r>
-              <a:t/>
-            </a:r>
-          </a:p>
-          <a:p xmlns:a="http://schemas.openxmlformats.org/drawingml/2006/main">
-            <a:r>
-              <a:t>CHECK AND EXPECTED ANSWER</a:t>
-            </a:r>
-          </a:p>
-          <a:p xmlns:a="http://schemas.openxmlformats.org/drawingml/2006/main">
-            <a:r>
-              <a:t>Does a difference between two groups prove one caused the other? No. Other differences or selection may explain it.</a:t>
-            </a:r>
-          </a:p>
-          <a:p xmlns:a="http://schemas.openxmlformats.org/drawingml/2006/main">
-            <a:r>
-              <a:t/>
-            </a:r>
-          </a:p>
-          <a:p xmlns:a="http://schemas.openxmlformats.org/drawingml/2006/main">
-            <a:r>
-              <a:t>IF LEARNERS ARE STUCK</a:t>
-            </a:r>
-          </a:p>
-          <a:p xmlns:a="http://schemas.openxmlformats.org/drawingml/2006/main">
-            <a:r>
-              <a:t>Ask for the population, time period, number and comparison. Then ask what additional evidence could change the recommendation.</a:t>
+              <a:t>TEACHING MODE</a:t>
+            </a:r>
+          </a:p>
+          <a:p xmlns:a="http://schemas.openxmlformats.org/drawingml/2006/main">
+            <a:r>
+              <a:t>Demonstrate first. Read each new symbol aloud, trace the values and compare the shown output. Learners repeat worked examples individually after class.</a:t>
             </a:r>
           </a:p>
           <a:p xmlns:a="http://schemas.openxmlformats.org/drawingml/2006/main">
@@ -5720,37 +4090,22 @@
           </a:p>
           <a:p xmlns:a="http://schemas.openxmlformats.org/drawingml/2006/main">
             <a:r>
-              <a:t>Make the evidence readable. Move on after a learner can explain the current example or required action.</a:t>
-            </a:r>
-          </a:p>
-          <a:p xmlns:a="http://schemas.openxmlformats.org/drawingml/2006/main">
-            <a:r>
-              <a:t/>
-            </a:r>
-          </a:p>
-          <a:p xmlns:a="http://schemas.openxmlformats.org/drawingml/2006/main">
-            <a:r>
-              <a:t>TEACHING MODE</a:t>
-            </a:r>
-          </a:p>
-          <a:p xmlns:a="http://schemas.openxmlformats.org/drawingml/2006/main">
-            <a:r>
-              <a:t>Demonstrate the example directly. Explain each new name, symbol and output. Use the revision example for an individual check after class; no live partner activity is required.</a:t>
-            </a:r>
-          </a:p>
-          <a:p xmlns:a="http://schemas.openxmlformats.org/drawingml/2006/main">
-            <a:r>
-              <a:t/>
-            </a:r>
-          </a:p>
-          <a:p xmlns:a="http://schemas.openxmlformats.org/drawingml/2006/main">
-            <a:r>
-              <a:t>NEXT</a:t>
-            </a:r>
-          </a:p>
-          <a:p xmlns:a="http://schemas.openxmlformats.org/drawingml/2006/main">
-            <a:r>
               <a:t>Make the evidence readable.</a:t>
+            </a:r>
+          </a:p>
+          <a:p xmlns:a="http://schemas.openxmlformats.org/drawingml/2006/main">
+            <a:r>
+              <a:t/>
+            </a:r>
+          </a:p>
+          <a:p xmlns:a="http://schemas.openxmlformats.org/drawingml/2006/main">
+            <a:r>
+              <a:t>REFERENCES</a:t>
+            </a:r>
+          </a:p>
+          <a:p xmlns:a="http://schemas.openxmlformats.org/drawingml/2006/main">
+            <a:r>
+              <a:t/>
             </a:r>
           </a:p>
         </p:txBody>
@@ -5840,7 +4195,7 @@
           </a:p>
           <a:p xmlns:a="http://schemas.openxmlformats.org/drawingml/2006/main">
             <a:r>
-              <a:t>Build on A six-minute presentation. Explain why this example is needed before running it.</a:t>
+              <a:t>Previous slide: A six-minute presentation.</a:t>
             </a:r>
           </a:p>
           <a:p xmlns:a="http://schemas.openxmlformats.org/drawingml/2006/main">
@@ -5885,41 +4240,6 @@
           </a:p>
           <a:p xmlns:a="http://schemas.openxmlformats.org/drawingml/2006/main">
             <a:r>
-              <a:t>LECTURER DETAIL</a:t>
-            </a:r>
-          </a:p>
-          <a:p xmlns:a="http://schemas.openxmlformats.org/drawingml/2006/main">
-            <a:r>
-              <a:t>TEACHING PURPOSE</a:t>
-            </a:r>
-          </a:p>
-          <a:p xmlns:a="http://schemas.openxmlformats.org/drawingml/2006/main">
-            <a:r>
-              <a:t>Make the evidence readable</a:t>
-            </a:r>
-          </a:p>
-          <a:p xmlns:a="http://schemas.openxmlformats.org/drawingml/2006/main">
-            <a:r>
-              <a:t/>
-            </a:r>
-          </a:p>
-          <a:p xmlns:a="http://schemas.openxmlformats.org/drawingml/2006/main">
-            <a:r>
-              <a:t>CONNECT</a:t>
-            </a:r>
-          </a:p>
-          <a:p xmlns:a="http://schemas.openxmlformats.org/drawingml/2006/main">
-            <a:r>
-              <a:t>Build on the preceding slide: A six-minute presentation.</a:t>
-            </a:r>
-          </a:p>
-          <a:p xmlns:a="http://schemas.openxmlformats.org/drawingml/2006/main">
-            <a:r>
-              <a:t/>
-            </a:r>
-          </a:p>
-          <a:p xmlns:a="http://schemas.openxmlformats.org/drawingml/2006/main">
-            <a:r>
               <a:t>LECTURER CUE</a:t>
             </a:r>
           </a:p>
@@ -5935,57 +4255,12 @@
           </a:p>
           <a:p xmlns:a="http://schemas.openxmlformats.org/drawingml/2006/main">
             <a:r>
-              <a:t>EXPLAIN IN ORDINARY WORDS</a:t>
-            </a:r>
-          </a:p>
-          <a:p xmlns:a="http://schemas.openxmlformats.org/drawingml/2006/main">
-            <a:r>
-              <a:t>An observation describes the data. A finding answers a defined question with evidence. A recommendation adds an action, its justification and limits.</a:t>
-            </a:r>
-          </a:p>
-          <a:p xmlns:a="http://schemas.openxmlformats.org/drawingml/2006/main">
-            <a:r>
-              <a:t/>
-            </a:r>
-          </a:p>
-          <a:p xmlns:a="http://schemas.openxmlformats.org/drawingml/2006/main">
-            <a:r>
-              <a:t>CHECK AND EXPECTED ANSWER</a:t>
-            </a:r>
-          </a:p>
-          <a:p xmlns:a="http://schemas.openxmlformats.org/drawingml/2006/main">
-            <a:r>
-              <a:t>Does a difference between two groups prove one caused the other? No. Other differences or selection may explain it.</a:t>
-            </a:r>
-          </a:p>
-          <a:p xmlns:a="http://schemas.openxmlformats.org/drawingml/2006/main">
-            <a:r>
-              <a:t/>
-            </a:r>
-          </a:p>
-          <a:p xmlns:a="http://schemas.openxmlformats.org/drawingml/2006/main">
-            <a:r>
-              <a:t>IF LEARNERS ARE STUCK</a:t>
-            </a:r>
-          </a:p>
-          <a:p xmlns:a="http://schemas.openxmlformats.org/drawingml/2006/main">
-            <a:r>
-              <a:t>Ask for the population, time period, number and comparison. Then ask what additional evidence could change the recommendation.</a:t>
-            </a:r>
-          </a:p>
-          <a:p xmlns:a="http://schemas.openxmlformats.org/drawingml/2006/main">
-            <a:r>
-              <a:t/>
-            </a:r>
-          </a:p>
-          <a:p xmlns:a="http://schemas.openxmlformats.org/drawingml/2006/main">
-            <a:r>
-              <a:t>ASSIGNMENT HANDOVER</a:t>
-            </a:r>
-          </a:p>
-          <a:p xmlns:a="http://schemas.openxmlformats.org/drawingml/2006/main">
-            <a:r>
-              <a:t>Open the matching public student guide and show the exact starter filename, required outputs and upload set. Ask one learner to repeat what to submit and where. IUEA Student Registration Number is required freeform text; learners enter their own number. A saved repository is not a submitted form. Read the live deadline and keep the submission confirmation. Do not release an assessment that is still awaiting grading validation.</a:t>
+              <a:t>TEACHING MODE</a:t>
+            </a:r>
+          </a:p>
+          <a:p xmlns:a="http://schemas.openxmlformats.org/drawingml/2006/main">
+            <a:r>
+              <a:t>Demonstrate first. Read each new symbol aloud, trace the values and compare the shown output. Learners repeat worked examples individually after class.</a:t>
             </a:r>
           </a:p>
           <a:p xmlns:a="http://schemas.openxmlformats.org/drawingml/2006/main">
@@ -6000,37 +4275,22 @@
           </a:p>
           <a:p xmlns:a="http://schemas.openxmlformats.org/drawingml/2006/main">
             <a:r>
-              <a:t>Explain the limits honestly. Move on after a learner can explain the current example or required action.</a:t>
-            </a:r>
-          </a:p>
-          <a:p xmlns:a="http://schemas.openxmlformats.org/drawingml/2006/main">
-            <a:r>
-              <a:t/>
-            </a:r>
-          </a:p>
-          <a:p xmlns:a="http://schemas.openxmlformats.org/drawingml/2006/main">
-            <a:r>
-              <a:t>TEACHING MODE</a:t>
-            </a:r>
-          </a:p>
-          <a:p xmlns:a="http://schemas.openxmlformats.org/drawingml/2006/main">
-            <a:r>
-              <a:t>Demonstrate the example directly. Explain each new name, symbol and output. Use the revision example for an individual check after class; no live partner activity is required.</a:t>
-            </a:r>
-          </a:p>
-          <a:p xmlns:a="http://schemas.openxmlformats.org/drawingml/2006/main">
-            <a:r>
-              <a:t/>
-            </a:r>
-          </a:p>
-          <a:p xmlns:a="http://schemas.openxmlformats.org/drawingml/2006/main">
-            <a:r>
-              <a:t>NEXT</a:t>
-            </a:r>
-          </a:p>
-          <a:p xmlns:a="http://schemas.openxmlformats.org/drawingml/2006/main">
-            <a:r>
               <a:t>Explain the limits honestly.</a:t>
+            </a:r>
+          </a:p>
+          <a:p xmlns:a="http://schemas.openxmlformats.org/drawingml/2006/main">
+            <a:r>
+              <a:t/>
+            </a:r>
+          </a:p>
+          <a:p xmlns:a="http://schemas.openxmlformats.org/drawingml/2006/main">
+            <a:r>
+              <a:t>REFERENCES</a:t>
+            </a:r>
+          </a:p>
+          <a:p xmlns:a="http://schemas.openxmlformats.org/drawingml/2006/main">
+            <a:r>
+              <a:t/>
             </a:r>
           </a:p>
         </p:txBody>
@@ -6120,7 +4380,7 @@
           </a:p>
           <a:p xmlns:a="http://schemas.openxmlformats.org/drawingml/2006/main">
             <a:r>
-              <a:t>Build on Make the evidence readable. Explain why this example is needed before running it.</a:t>
+              <a:t>Previous slide: Make the evidence readable.</a:t>
             </a:r>
           </a:p>
           <a:p xmlns:a="http://schemas.openxmlformats.org/drawingml/2006/main">
@@ -6165,41 +4425,6 @@
           </a:p>
           <a:p xmlns:a="http://schemas.openxmlformats.org/drawingml/2006/main">
             <a:r>
-              <a:t>LECTURER DETAIL</a:t>
-            </a:r>
-          </a:p>
-          <a:p xmlns:a="http://schemas.openxmlformats.org/drawingml/2006/main">
-            <a:r>
-              <a:t>TEACHING PURPOSE</a:t>
-            </a:r>
-          </a:p>
-          <a:p xmlns:a="http://schemas.openxmlformats.org/drawingml/2006/main">
-            <a:r>
-              <a:t>Explain the limits honestly</a:t>
-            </a:r>
-          </a:p>
-          <a:p xmlns:a="http://schemas.openxmlformats.org/drawingml/2006/main">
-            <a:r>
-              <a:t/>
-            </a:r>
-          </a:p>
-          <a:p xmlns:a="http://schemas.openxmlformats.org/drawingml/2006/main">
-            <a:r>
-              <a:t>CONNECT</a:t>
-            </a:r>
-          </a:p>
-          <a:p xmlns:a="http://schemas.openxmlformats.org/drawingml/2006/main">
-            <a:r>
-              <a:t>Build on the preceding slide: Make the evidence readable.</a:t>
-            </a:r>
-          </a:p>
-          <a:p xmlns:a="http://schemas.openxmlformats.org/drawingml/2006/main">
-            <a:r>
-              <a:t/>
-            </a:r>
-          </a:p>
-          <a:p xmlns:a="http://schemas.openxmlformats.org/drawingml/2006/main">
-            <a:r>
               <a:t>LECTURER CUE</a:t>
             </a:r>
           </a:p>
@@ -6215,42 +4440,12 @@
           </a:p>
           <a:p xmlns:a="http://schemas.openxmlformats.org/drawingml/2006/main">
             <a:r>
-              <a:t>EXPLAIN IN ORDINARY WORDS</a:t>
-            </a:r>
-          </a:p>
-          <a:p xmlns:a="http://schemas.openxmlformats.org/drawingml/2006/main">
-            <a:r>
-              <a:t>An observation describes the data. A finding answers a defined question with evidence. A recommendation adds an action, its justification and limits.</a:t>
-            </a:r>
-          </a:p>
-          <a:p xmlns:a="http://schemas.openxmlformats.org/drawingml/2006/main">
-            <a:r>
-              <a:t/>
-            </a:r>
-          </a:p>
-          <a:p xmlns:a="http://schemas.openxmlformats.org/drawingml/2006/main">
-            <a:r>
-              <a:t>CHECK AND EXPECTED ANSWER</a:t>
-            </a:r>
-          </a:p>
-          <a:p xmlns:a="http://schemas.openxmlformats.org/drawingml/2006/main">
-            <a:r>
-              <a:t>Does a difference between two groups prove one caused the other? No. Other differences or selection may explain it.</a:t>
-            </a:r>
-          </a:p>
-          <a:p xmlns:a="http://schemas.openxmlformats.org/drawingml/2006/main">
-            <a:r>
-              <a:t/>
-            </a:r>
-          </a:p>
-          <a:p xmlns:a="http://schemas.openxmlformats.org/drawingml/2006/main">
-            <a:r>
-              <a:t>IF LEARNERS ARE STUCK</a:t>
-            </a:r>
-          </a:p>
-          <a:p xmlns:a="http://schemas.openxmlformats.org/drawingml/2006/main">
-            <a:r>
-              <a:t>Ask for the population, time period, number and comparison. Then ask what additional evidence could change the recommendation.</a:t>
+              <a:t>TEACHING MODE</a:t>
+            </a:r>
+          </a:p>
+          <a:p xmlns:a="http://schemas.openxmlformats.org/drawingml/2006/main">
+            <a:r>
+              <a:t>Demonstrate first. Read each new symbol aloud, trace the values and compare the shown output. Learners repeat worked examples individually after class.</a:t>
             </a:r>
           </a:p>
           <a:p xmlns:a="http://schemas.openxmlformats.org/drawingml/2006/main">
@@ -6265,37 +4460,22 @@
           </a:p>
           <a:p xmlns:a="http://schemas.openxmlformats.org/drawingml/2006/main">
             <a:r>
-              <a:t>You are explaining to a colleague. Move on after a learner can explain the current example or required action.</a:t>
-            </a:r>
-          </a:p>
-          <a:p xmlns:a="http://schemas.openxmlformats.org/drawingml/2006/main">
-            <a:r>
-              <a:t/>
-            </a:r>
-          </a:p>
-          <a:p xmlns:a="http://schemas.openxmlformats.org/drawingml/2006/main">
-            <a:r>
-              <a:t>TEACHING MODE</a:t>
-            </a:r>
-          </a:p>
-          <a:p xmlns:a="http://schemas.openxmlformats.org/drawingml/2006/main">
-            <a:r>
-              <a:t>Demonstrate the example directly. Explain each new name, symbol and output. Use the revision example for an individual check after class; no live partner activity is required.</a:t>
-            </a:r>
-          </a:p>
-          <a:p xmlns:a="http://schemas.openxmlformats.org/drawingml/2006/main">
-            <a:r>
-              <a:t/>
-            </a:r>
-          </a:p>
-          <a:p xmlns:a="http://schemas.openxmlformats.org/drawingml/2006/main">
-            <a:r>
-              <a:t>NEXT</a:t>
-            </a:r>
-          </a:p>
-          <a:p xmlns:a="http://schemas.openxmlformats.org/drawingml/2006/main">
-            <a:r>
               <a:t>Preparation checkpoint.</a:t>
+            </a:r>
+          </a:p>
+          <a:p xmlns:a="http://schemas.openxmlformats.org/drawingml/2006/main">
+            <a:r>
+              <a:t/>
+            </a:r>
+          </a:p>
+          <a:p xmlns:a="http://schemas.openxmlformats.org/drawingml/2006/main">
+            <a:r>
+              <a:t>REFERENCES</a:t>
+            </a:r>
+          </a:p>
+          <a:p xmlns:a="http://schemas.openxmlformats.org/drawingml/2006/main">
+            <a:r>
+              <a:t/>
             </a:r>
           </a:p>
         </p:txBody>
@@ -6385,7 +4565,7 @@
           </a:p>
           <a:p xmlns:a="http://schemas.openxmlformats.org/drawingml/2006/main">
             <a:r>
-              <a:t>Build on Explain the limits honestly. Explain why this example is needed before running it.</a:t>
+              <a:t>Previous slide: Explain the limits honestly.</a:t>
             </a:r>
           </a:p>
           <a:p xmlns:a="http://schemas.openxmlformats.org/drawingml/2006/main">
@@ -6410,41 +4590,6 @@
           </a:p>
           <a:p xmlns:a="http://schemas.openxmlformats.org/drawingml/2006/main">
             <a:r>
-              <a:t>LECTURER DETAIL</a:t>
-            </a:r>
-          </a:p>
-          <a:p xmlns:a="http://schemas.openxmlformats.org/drawingml/2006/main">
-            <a:r>
-              <a:t>TEACHING PURPOSE</a:t>
-            </a:r>
-          </a:p>
-          <a:p xmlns:a="http://schemas.openxmlformats.org/drawingml/2006/main">
-            <a:r>
-              <a:t>Preparation checkpoint</a:t>
-            </a:r>
-          </a:p>
-          <a:p xmlns:a="http://schemas.openxmlformats.org/drawingml/2006/main">
-            <a:r>
-              <a:t/>
-            </a:r>
-          </a:p>
-          <a:p xmlns:a="http://schemas.openxmlformats.org/drawingml/2006/main">
-            <a:r>
-              <a:t>CONNECT</a:t>
-            </a:r>
-          </a:p>
-          <a:p xmlns:a="http://schemas.openxmlformats.org/drawingml/2006/main">
-            <a:r>
-              <a:t>Build on the preceding slide: What the activity shows.</a:t>
-            </a:r>
-          </a:p>
-          <a:p xmlns:a="http://schemas.openxmlformats.org/drawingml/2006/main">
-            <a:r>
-              <a:t/>
-            </a:r>
-          </a:p>
-          <a:p xmlns:a="http://schemas.openxmlformats.org/drawingml/2006/main">
-            <a:r>
               <a:t>LECTURER CUE</a:t>
             </a:r>
           </a:p>
@@ -6460,42 +4605,12 @@
           </a:p>
           <a:p xmlns:a="http://schemas.openxmlformats.org/drawingml/2006/main">
             <a:r>
-              <a:t>EXPLAIN IN ORDINARY WORDS</a:t>
-            </a:r>
-          </a:p>
-          <a:p xmlns:a="http://schemas.openxmlformats.org/drawingml/2006/main">
-            <a:r>
-              <a:t>An observation describes the data. A finding answers a defined question with evidence. A recommendation adds an action, its justification and limits.</a:t>
-            </a:r>
-          </a:p>
-          <a:p xmlns:a="http://schemas.openxmlformats.org/drawingml/2006/main">
-            <a:r>
-              <a:t/>
-            </a:r>
-          </a:p>
-          <a:p xmlns:a="http://schemas.openxmlformats.org/drawingml/2006/main">
-            <a:r>
-              <a:t>CHECK AND EXPECTED ANSWER</a:t>
-            </a:r>
-          </a:p>
-          <a:p xmlns:a="http://schemas.openxmlformats.org/drawingml/2006/main">
-            <a:r>
-              <a:t>Does a difference between two groups prove one caused the other? No. Other differences or selection may explain it.</a:t>
-            </a:r>
-          </a:p>
-          <a:p xmlns:a="http://schemas.openxmlformats.org/drawingml/2006/main">
-            <a:r>
-              <a:t/>
-            </a:r>
-          </a:p>
-          <a:p xmlns:a="http://schemas.openxmlformats.org/drawingml/2006/main">
-            <a:r>
-              <a:t>IF LEARNERS ARE STUCK</a:t>
-            </a:r>
-          </a:p>
-          <a:p xmlns:a="http://schemas.openxmlformats.org/drawingml/2006/main">
-            <a:r>
-              <a:t>Ask for the population, time period, number and comparison. Then ask what additional evidence could change the recommendation.</a:t>
+              <a:t>TEACHING MODE</a:t>
+            </a:r>
+          </a:p>
+          <a:p xmlns:a="http://schemas.openxmlformats.org/drawingml/2006/main">
+            <a:r>
+              <a:t>Demonstrate first. Read each new symbol aloud, trace the values and compare the shown output. Learners repeat worked examples individually after class.</a:t>
             </a:r>
           </a:p>
           <a:p xmlns:a="http://schemas.openxmlformats.org/drawingml/2006/main">
@@ -6510,37 +4625,22 @@
           </a:p>
           <a:p xmlns:a="http://schemas.openxmlformats.org/drawingml/2006/main">
             <a:r>
-              <a:t>Your evidence. Move on after a learner can explain the current example or required action.</a:t>
-            </a:r>
-          </a:p>
-          <a:p xmlns:a="http://schemas.openxmlformats.org/drawingml/2006/main">
-            <a:r>
-              <a:t/>
-            </a:r>
-          </a:p>
-          <a:p xmlns:a="http://schemas.openxmlformats.org/drawingml/2006/main">
-            <a:r>
-              <a:t>TEACHING MODE</a:t>
-            </a:r>
-          </a:p>
-          <a:p xmlns:a="http://schemas.openxmlformats.org/drawingml/2006/main">
-            <a:r>
-              <a:t>Demonstrate the example directly. Explain each new name, symbol and output. Use the revision example for an individual check after class; no live partner activity is required.</a:t>
-            </a:r>
-          </a:p>
-          <a:p xmlns:a="http://schemas.openxmlformats.org/drawingml/2006/main">
-            <a:r>
-              <a:t/>
-            </a:r>
-          </a:p>
-          <a:p xmlns:a="http://schemas.openxmlformats.org/drawingml/2006/main">
-            <a:r>
-              <a:t>NEXT</a:t>
-            </a:r>
-          </a:p>
-          <a:p xmlns:a="http://schemas.openxmlformats.org/drawingml/2006/main">
-            <a:r>
               <a:t>Your evidence.</a:t>
+            </a:r>
+          </a:p>
+          <a:p xmlns:a="http://schemas.openxmlformats.org/drawingml/2006/main">
+            <a:r>
+              <a:t/>
+            </a:r>
+          </a:p>
+          <a:p xmlns:a="http://schemas.openxmlformats.org/drawingml/2006/main">
+            <a:r>
+              <a:t>REFERENCES</a:t>
+            </a:r>
+          </a:p>
+          <a:p xmlns:a="http://schemas.openxmlformats.org/drawingml/2006/main">
+            <a:r>
+              <a:t/>
             </a:r>
           </a:p>
         </p:txBody>
@@ -6630,7 +4730,7 @@
           </a:p>
           <a:p xmlns:a="http://schemas.openxmlformats.org/drawingml/2006/main">
             <a:r>
-              <a:t>Build on Preparation checkpoint. Explain why this example is needed before running it.</a:t>
+              <a:t>Previous slide: Preparation checkpoint.</a:t>
             </a:r>
           </a:p>
           <a:p xmlns:a="http://schemas.openxmlformats.org/drawingml/2006/main">
@@ -6675,41 +4775,6 @@
           </a:p>
           <a:p xmlns:a="http://schemas.openxmlformats.org/drawingml/2006/main">
             <a:r>
-              <a:t>LECTURER DETAIL</a:t>
-            </a:r>
-          </a:p>
-          <a:p xmlns:a="http://schemas.openxmlformats.org/drawingml/2006/main">
-            <a:r>
-              <a:t>TEACHING PURPOSE</a:t>
-            </a:r>
-          </a:p>
-          <a:p xmlns:a="http://schemas.openxmlformats.org/drawingml/2006/main">
-            <a:r>
-              <a:t>Your evidence</a:t>
-            </a:r>
-          </a:p>
-          <a:p xmlns:a="http://schemas.openxmlformats.org/drawingml/2006/main">
-            <a:r>
-              <a:t/>
-            </a:r>
-          </a:p>
-          <a:p xmlns:a="http://schemas.openxmlformats.org/drawingml/2006/main">
-            <a:r>
-              <a:t>CONNECT</a:t>
-            </a:r>
-          </a:p>
-          <a:p xmlns:a="http://schemas.openxmlformats.org/drawingml/2006/main">
-            <a:r>
-              <a:t>Build on the preceding slide: Preparation checkpoint.</a:t>
-            </a:r>
-          </a:p>
-          <a:p xmlns:a="http://schemas.openxmlformats.org/drawingml/2006/main">
-            <a:r>
-              <a:t/>
-            </a:r>
-          </a:p>
-          <a:p xmlns:a="http://schemas.openxmlformats.org/drawingml/2006/main">
-            <a:r>
               <a:t>LECTURER CUE</a:t>
             </a:r>
           </a:p>
@@ -6725,72 +4790,12 @@
           </a:p>
           <a:p xmlns:a="http://schemas.openxmlformats.org/drawingml/2006/main">
             <a:r>
-              <a:t>EXPLAIN IN ORDINARY WORDS</a:t>
-            </a:r>
-          </a:p>
-          <a:p xmlns:a="http://schemas.openxmlformats.org/drawingml/2006/main">
-            <a:r>
-              <a:t>An observation describes the data. A finding answers a defined question with evidence. A recommendation adds an action, its justification and limits.</a:t>
-            </a:r>
-          </a:p>
-          <a:p xmlns:a="http://schemas.openxmlformats.org/drawingml/2006/main">
-            <a:r>
-              <a:t/>
-            </a:r>
-          </a:p>
-          <a:p xmlns:a="http://schemas.openxmlformats.org/drawingml/2006/main">
-            <a:r>
-              <a:t>CHECK AND EXPECTED ANSWER</a:t>
-            </a:r>
-          </a:p>
-          <a:p xmlns:a="http://schemas.openxmlformats.org/drawingml/2006/main">
-            <a:r>
-              <a:t>Does a difference between two groups prove one caused the other? No. Other differences or selection may explain it.</a:t>
-            </a:r>
-          </a:p>
-          <a:p xmlns:a="http://schemas.openxmlformats.org/drawingml/2006/main">
-            <a:r>
-              <a:t/>
-            </a:r>
-          </a:p>
-          <a:p xmlns:a="http://schemas.openxmlformats.org/drawingml/2006/main">
-            <a:r>
-              <a:t>IF LEARNERS ARE STUCK</a:t>
-            </a:r>
-          </a:p>
-          <a:p xmlns:a="http://schemas.openxmlformats.org/drawingml/2006/main">
-            <a:r>
-              <a:t>Ask for the population, time period, number and comparison. Then ask what additional evidence could change the recommendation.</a:t>
-            </a:r>
-          </a:p>
-          <a:p xmlns:a="http://schemas.openxmlformats.org/drawingml/2006/main">
-            <a:r>
-              <a:t/>
-            </a:r>
-          </a:p>
-          <a:p xmlns:a="http://schemas.openxmlformats.org/drawingml/2006/main">
-            <a:r>
-              <a:t>ASSIGNMENT HANDOVER</a:t>
-            </a:r>
-          </a:p>
-          <a:p xmlns:a="http://schemas.openxmlformats.org/drawingml/2006/main">
-            <a:r>
-              <a:t>Open the matching public student guide and show the exact starter filename, required outputs and upload set. Ask one learner to repeat what to submit and where. IUEA Student Registration Number is required freeform text; learners enter their own number. A saved repository is not a submitted form. Read the live deadline and keep the submission confirmation. Do not release an assessment that is still awaiting grading validation.</a:t>
-            </a:r>
-          </a:p>
-          <a:p xmlns:a="http://schemas.openxmlformats.org/drawingml/2006/main">
-            <a:r>
-              <a:t/>
-            </a:r>
-          </a:p>
-          <a:p xmlns:a="http://schemas.openxmlformats.org/drawingml/2006/main">
-            <a:r>
-              <a:t>PROJECT UPLOAD SET</a:t>
-            </a:r>
-          </a:p>
-          <a:p xmlns:a="http://schemas.openxmlformats.org/drawingml/2006/main">
-            <a:r>
-              <a:t>For the DA_PROJECT or ML_PROJECT, submit the completed project .ipynb together with one readable DOCX or selectable-text PDF report. This differs from the single-notebook test packet. The current public project guide defines the evidence and rubric; do not substitute weekly practice for the project.</a:t>
+              <a:t>TEACHING MODE</a:t>
+            </a:r>
+          </a:p>
+          <a:p xmlns:a="http://schemas.openxmlformats.org/drawingml/2006/main">
+            <a:r>
+              <a:t>Demonstrate first. Read each new symbol aloud, trace the values and compare the shown output. Learners repeat worked examples individually after class.</a:t>
             </a:r>
           </a:p>
           <a:p xmlns:a="http://schemas.openxmlformats.org/drawingml/2006/main">
@@ -6805,37 +4810,22 @@
           </a:p>
           <a:p xmlns:a="http://schemas.openxmlformats.org/drawingml/2006/main">
             <a:r>
-              <a:t>Engineering ML project. Move on after a learner can explain the current example or required action.</a:t>
-            </a:r>
-          </a:p>
-          <a:p xmlns:a="http://schemas.openxmlformats.org/drawingml/2006/main">
-            <a:r>
-              <a:t/>
-            </a:r>
-          </a:p>
-          <a:p xmlns:a="http://schemas.openxmlformats.org/drawingml/2006/main">
-            <a:r>
-              <a:t>TEACHING MODE</a:t>
-            </a:r>
-          </a:p>
-          <a:p xmlns:a="http://schemas.openxmlformats.org/drawingml/2006/main">
-            <a:r>
-              <a:t>Demonstrate the example directly. Explain each new name, symbol and output. Use the revision example for an individual check after class; no live partner activity is required.</a:t>
-            </a:r>
-          </a:p>
-          <a:p xmlns:a="http://schemas.openxmlformats.org/drawingml/2006/main">
-            <a:r>
-              <a:t/>
-            </a:r>
-          </a:p>
-          <a:p xmlns:a="http://schemas.openxmlformats.org/drawingml/2006/main">
-            <a:r>
-              <a:t>NEXT</a:t>
-            </a:r>
-          </a:p>
-          <a:p xmlns:a="http://schemas.openxmlformats.org/drawingml/2006/main">
-            <a:r>
               <a:t>Engineering ML project.</a:t>
+            </a:r>
+          </a:p>
+          <a:p xmlns:a="http://schemas.openxmlformats.org/drawingml/2006/main">
+            <a:r>
+              <a:t/>
+            </a:r>
+          </a:p>
+          <a:p xmlns:a="http://schemas.openxmlformats.org/drawingml/2006/main">
+            <a:r>
+              <a:t>REFERENCES</a:t>
+            </a:r>
+          </a:p>
+          <a:p xmlns:a="http://schemas.openxmlformats.org/drawingml/2006/main">
+            <a:r>
+              <a:t/>
             </a:r>
           </a:p>
         </p:txBody>
@@ -6882,7 +4872,7 @@
           <p:cNvPr id="4" name="Accent rule">
             <a:extLst xmlns:a="http://schemas.openxmlformats.org/drawingml/2006/main">
               <a:ext uri="{FF2B5EF4-FFF2-40B4-BE49-F238E27FC236}">
-                <a16:creationId xmlns:a16="http://schemas.microsoft.com/office/drawing/2014/main" id="{B3B65DCF-8E7C-41C4-836A-A1684FC85EE2}"/>
+                <a16:creationId xmlns:a16="http://schemas.microsoft.com/office/drawing/2014/main" id="{DA0B7973-F052-463A-B633-F3CAB4A7B11A}"/>
               </a:ext>
             </a:extLst>
           </p:cNvPr>
@@ -6913,7 +4903,7 @@
           <p:cNvPr id="2" name="Title">
             <a:extLst xmlns:a="http://schemas.openxmlformats.org/drawingml/2006/main">
               <a:ext uri="{FF2B5EF4-FFF2-40B4-BE49-F238E27FC236}">
-                <a16:creationId xmlns:a16="http://schemas.microsoft.com/office/drawing/2014/main" id="{C13A1CD8-4D11-4356-8901-61A06F085509}"/>
+                <a16:creationId xmlns:a16="http://schemas.microsoft.com/office/drawing/2014/main" id="{12E6AA1E-6B32-4AD4-875A-4636148A8FB5}"/>
               </a:ext>
             </a:extLst>
           </p:cNvPr>
@@ -7060,7 +5050,7 @@
           <p:cNvPr id="3" name="Subtitle">
             <a:extLst xmlns:a="http://schemas.openxmlformats.org/drawingml/2006/main">
               <a:ext uri="{FF2B5EF4-FFF2-40B4-BE49-F238E27FC236}">
-                <a16:creationId xmlns:a16="http://schemas.microsoft.com/office/drawing/2014/main" id="{E5C24B2F-6BE1-49DD-820D-634D6A634329}"/>
+                <a16:creationId xmlns:a16="http://schemas.microsoft.com/office/drawing/2014/main" id="{B0985B20-9074-440D-A979-EBE8B75D3D64}"/>
               </a:ext>
             </a:extLst>
           </p:cNvPr>
@@ -7224,7 +5214,7 @@
           <p:cNvPr id="3" name="Accent rule">
             <a:extLst xmlns:a="http://schemas.openxmlformats.org/drawingml/2006/main">
               <a:ext uri="{FF2B5EF4-FFF2-40B4-BE49-F238E27FC236}">
-                <a16:creationId xmlns:a16="http://schemas.microsoft.com/office/drawing/2014/main" id="{A50F9172-669E-4F2A-B12C-7F729C37EE49}"/>
+                <a16:creationId xmlns:a16="http://schemas.microsoft.com/office/drawing/2014/main" id="{8B1A1CBA-EDBF-451D-934A-8B9BC090D31D}"/>
               </a:ext>
             </a:extLst>
           </p:cNvPr>
@@ -7255,7 +5245,7 @@
           <p:cNvPr id="2" name="Section title">
             <a:extLst xmlns:a="http://schemas.openxmlformats.org/drawingml/2006/main">
               <a:ext uri="{FF2B5EF4-FFF2-40B4-BE49-F238E27FC236}">
-                <a16:creationId xmlns:a16="http://schemas.microsoft.com/office/drawing/2014/main" id="{9B1F1D60-193A-491A-9570-2959BED882E4}"/>
+                <a16:creationId xmlns:a16="http://schemas.microsoft.com/office/drawing/2014/main" id="{F1B83608-D96C-41B6-9A0B-333BDC8437A7}"/>
               </a:ext>
             </a:extLst>
           </p:cNvPr>
@@ -7419,7 +5409,7 @@
           <p:cNvPr id="4" name="Accent rule">
             <a:extLst xmlns:a="http://schemas.openxmlformats.org/drawingml/2006/main">
               <a:ext uri="{FF2B5EF4-FFF2-40B4-BE49-F238E27FC236}">
-                <a16:creationId xmlns:a16="http://schemas.microsoft.com/office/drawing/2014/main" id="{8E7D344E-2045-4D4D-8CB9-F8328EF1CFD3}"/>
+                <a16:creationId xmlns:a16="http://schemas.microsoft.com/office/drawing/2014/main" id="{D4253E35-F73E-4D5A-91A6-9908C3E82FD1}"/>
               </a:ext>
             </a:extLst>
           </p:cNvPr>
@@ -7450,7 +5440,7 @@
           <p:cNvPr id="2" name="Title">
             <a:extLst xmlns:a="http://schemas.openxmlformats.org/drawingml/2006/main">
               <a:ext uri="{FF2B5EF4-FFF2-40B4-BE49-F238E27FC236}">
-                <a16:creationId xmlns:a16="http://schemas.microsoft.com/office/drawing/2014/main" id="{ABA43CB3-E95E-406C-95B1-193705BC3EF1}"/>
+                <a16:creationId xmlns:a16="http://schemas.microsoft.com/office/drawing/2014/main" id="{2D9C5F76-0726-4BF9-BA77-80155FCA8FA3}"/>
               </a:ext>
             </a:extLst>
           </p:cNvPr>
@@ -7597,7 +5587,7 @@
           <p:cNvPr id="3" name="Body">
             <a:extLst xmlns:a="http://schemas.openxmlformats.org/drawingml/2006/main">
               <a:ext uri="{FF2B5EF4-FFF2-40B4-BE49-F238E27FC236}">
-                <a16:creationId xmlns:a16="http://schemas.microsoft.com/office/drawing/2014/main" id="{2F491BF5-5237-4F21-AC0C-7B77B612B05D}"/>
+                <a16:creationId xmlns:a16="http://schemas.microsoft.com/office/drawing/2014/main" id="{A77A407B-A495-4024-863F-D70FD0273FD4}"/>
               </a:ext>
             </a:extLst>
           </p:cNvPr>
@@ -7761,7 +5751,7 @@
           <p:cNvPr id="5" name="Accent rule">
             <a:extLst xmlns:a="http://schemas.openxmlformats.org/drawingml/2006/main">
               <a:ext uri="{FF2B5EF4-FFF2-40B4-BE49-F238E27FC236}">
-                <a16:creationId xmlns:a16="http://schemas.microsoft.com/office/drawing/2014/main" id="{688DEAA1-8483-4B07-BE52-5A72BFF89582}"/>
+                <a16:creationId xmlns:a16="http://schemas.microsoft.com/office/drawing/2014/main" id="{0491CA9A-B2D6-4F4B-97BA-72D37E369E01}"/>
               </a:ext>
             </a:extLst>
           </p:cNvPr>
@@ -7792,7 +5782,7 @@
           <p:cNvPr id="2" name="Title">
             <a:extLst xmlns:a="http://schemas.openxmlformats.org/drawingml/2006/main">
               <a:ext uri="{FF2B5EF4-FFF2-40B4-BE49-F238E27FC236}">
-                <a16:creationId xmlns:a16="http://schemas.microsoft.com/office/drawing/2014/main" id="{D59A841E-0FAE-4AB8-A98F-C2E7BF31826C}"/>
+                <a16:creationId xmlns:a16="http://schemas.microsoft.com/office/drawing/2014/main" id="{884B48CE-9428-4FEF-A8DA-4DEC4BE02788}"/>
               </a:ext>
             </a:extLst>
           </p:cNvPr>
@@ -7939,7 +5929,7 @@
           <p:cNvPr id="3" name="Left column">
             <a:extLst xmlns:a="http://schemas.openxmlformats.org/drawingml/2006/main">
               <a:ext uri="{FF2B5EF4-FFF2-40B4-BE49-F238E27FC236}">
-                <a16:creationId xmlns:a16="http://schemas.microsoft.com/office/drawing/2014/main" id="{C081F0EB-AA9C-47B5-A4DD-6CA08AA41026}"/>
+                <a16:creationId xmlns:a16="http://schemas.microsoft.com/office/drawing/2014/main" id="{420BF8DB-5676-476F-A8EF-8C2D43988DB7}"/>
               </a:ext>
             </a:extLst>
           </p:cNvPr>
@@ -8086,7 +6076,7 @@
           <p:cNvPr id="4" name="Right column">
             <a:extLst xmlns:a="http://schemas.openxmlformats.org/drawingml/2006/main">
               <a:ext uri="{FF2B5EF4-FFF2-40B4-BE49-F238E27FC236}">
-                <a16:creationId xmlns:a16="http://schemas.microsoft.com/office/drawing/2014/main" id="{CFDE513B-7D96-4483-9BDA-FF5475A4E020}"/>
+                <a16:creationId xmlns:a16="http://schemas.microsoft.com/office/drawing/2014/main" id="{D51D5887-3225-4136-8A3C-454CDB687015}"/>
               </a:ext>
             </a:extLst>
           </p:cNvPr>
@@ -8250,7 +6240,7 @@
           <p:cNvPr id="4" name="Accent rule">
             <a:extLst xmlns:a="http://schemas.openxmlformats.org/drawingml/2006/main">
               <a:ext uri="{FF2B5EF4-FFF2-40B4-BE49-F238E27FC236}">
-                <a16:creationId xmlns:a16="http://schemas.microsoft.com/office/drawing/2014/main" id="{A070892A-6FEB-4F31-97E8-C35A0FD5FA42}"/>
+                <a16:creationId xmlns:a16="http://schemas.microsoft.com/office/drawing/2014/main" id="{03BF7EAD-B992-4532-9278-7FBB5A8BA939}"/>
               </a:ext>
             </a:extLst>
           </p:cNvPr>
@@ -8281,7 +6271,7 @@
           <p:cNvPr id="2" name="Title">
             <a:extLst xmlns:a="http://schemas.openxmlformats.org/drawingml/2006/main">
               <a:ext uri="{FF2B5EF4-FFF2-40B4-BE49-F238E27FC236}">
-                <a16:creationId xmlns:a16="http://schemas.microsoft.com/office/drawing/2014/main" id="{7E0FE808-B8DC-4A2F-BBB8-C720587FA30A}"/>
+                <a16:creationId xmlns:a16="http://schemas.microsoft.com/office/drawing/2014/main" id="{E4040E9F-81E3-45D9-B713-FD368D8A78AD}"/>
               </a:ext>
             </a:extLst>
           </p:cNvPr>
@@ -8428,7 +6418,7 @@
           <p:cNvPr id="3" name="Left column">
             <a:extLst xmlns:a="http://schemas.openxmlformats.org/drawingml/2006/main">
               <a:ext uri="{FF2B5EF4-FFF2-40B4-BE49-F238E27FC236}">
-                <a16:creationId xmlns:a16="http://schemas.microsoft.com/office/drawing/2014/main" id="{8968E940-B64A-4C12-9BA0-BE95F4B10C78}"/>
+                <a16:creationId xmlns:a16="http://schemas.microsoft.com/office/drawing/2014/main" id="{7012423E-2BBF-4594-A073-D0E54EDC304A}"/>
               </a:ext>
             </a:extLst>
           </p:cNvPr>
@@ -8613,12 +6603,12 @@
   </p:cSld>
   <p:clrMap bg1="lt1" tx1="dk1" bg2="lt2" tx2="dk2" accent1="accent1" accent2="accent2" accent3="accent3" accent4="accent4" accent5="accent5" accent6="accent6" hlink="hlink" folHlink="folHlink"/>
   <p:sldLayoutIdLst>
-    <p:sldLayoutId xmlns:r="http://schemas.openxmlformats.org/officeDocument/2006/relationships" id="2147483649" r:id="R8e313cce363d41cf"/>
-    <p:sldLayoutId xmlns:r="http://schemas.openxmlformats.org/officeDocument/2006/relationships" id="2147483650" r:id="R79c4e74630444162"/>
-    <p:sldLayoutId xmlns:r="http://schemas.openxmlformats.org/officeDocument/2006/relationships" id="2147483651" r:id="R414f90279acb4c49"/>
-    <p:sldLayoutId xmlns:r="http://schemas.openxmlformats.org/officeDocument/2006/relationships" id="2147483652" r:id="R0cd035443145426f"/>
-    <p:sldLayoutId xmlns:r="http://schemas.openxmlformats.org/officeDocument/2006/relationships" id="2147483653" r:id="Rfbc397f0b5ec4cc0"/>
-    <p:sldLayoutId xmlns:r="http://schemas.openxmlformats.org/officeDocument/2006/relationships" id="2147483654" r:id="Rb5c234fde58b4d25"/>
+    <p:sldLayoutId xmlns:r="http://schemas.openxmlformats.org/officeDocument/2006/relationships" id="2147483649" r:id="Rca0d5364348e468a"/>
+    <p:sldLayoutId xmlns:r="http://schemas.openxmlformats.org/officeDocument/2006/relationships" id="2147483650" r:id="Rc2e7d0a091384774"/>
+    <p:sldLayoutId xmlns:r="http://schemas.openxmlformats.org/officeDocument/2006/relationships" id="2147483651" r:id="R52c25af82c1c4a40"/>
+    <p:sldLayoutId xmlns:r="http://schemas.openxmlformats.org/officeDocument/2006/relationships" id="2147483652" r:id="R46a0f84f8eee4842"/>
+    <p:sldLayoutId xmlns:r="http://schemas.openxmlformats.org/officeDocument/2006/relationships" id="2147483653" r:id="R18451d4b7a2b47d1"/>
+    <p:sldLayoutId xmlns:r="http://schemas.openxmlformats.org/officeDocument/2006/relationships" id="2147483654" r:id="R63691ba0beac4e59"/>
   </p:sldLayoutIdLst>
   <p:txStyles>
     <p:titleStyle>
@@ -9173,7 +7163,7 @@
           <p:nvPr/>
         </p:nvPicPr>
         <p:blipFill>
-          <a:blip xmlns:r="http://schemas.openxmlformats.org/officeDocument/2006/relationships" xmlns:a="http://schemas.openxmlformats.org/drawingml/2006/main" r:embed="R4a36764bccdc4024"/>
+          <a:blip xmlns:r="http://schemas.openxmlformats.org/officeDocument/2006/relationships" xmlns:a="http://schemas.openxmlformats.org/drawingml/2006/main" r:embed="R3235d6eae77942a5"/>
           <a:stretch xmlns:a="http://schemas.openxmlformats.org/drawingml/2006/main"/>
         </p:blipFill>
         <p:spPr>
@@ -9191,7 +7181,7 @@
           <p:cNvPr id="2" name="">
             <a:extLst xmlns:a="http://schemas.openxmlformats.org/drawingml/2006/main">
               <a:ext uri="{FF2B5EF4-FFF2-40B4-BE49-F238E27FC236}">
-                <a16:creationId xmlns:a16="http://schemas.microsoft.com/office/drawing/2014/main" id="{0986E70A-E761-469C-8FB5-9CF648A935B2}"/>
+                <a16:creationId xmlns:a16="http://schemas.microsoft.com/office/drawing/2014/main" id="{5E47F855-374C-4AD4-8715-CEADF3385C64}"/>
               </a:ext>
             </a:extLst>
           </p:cNvPr>
@@ -9221,7 +7211,7 @@
           <p:cNvPr id="3" name="">
             <a:extLst xmlns:a="http://schemas.openxmlformats.org/drawingml/2006/main">
               <a:ext uri="{FF2B5EF4-FFF2-40B4-BE49-F238E27FC236}">
-                <a16:creationId xmlns:a16="http://schemas.microsoft.com/office/drawing/2014/main" id="{ACEBEEF9-5C76-4A6B-B8C0-4A65CC2F038A}"/>
+                <a16:creationId xmlns:a16="http://schemas.microsoft.com/office/drawing/2014/main" id="{D87C1DCF-C19B-4CEB-8E92-25240EDDDE21}"/>
               </a:ext>
             </a:extLst>
           </p:cNvPr>
@@ -9278,7 +7268,7 @@
           <p:cNvPr id="4" name="">
             <a:extLst xmlns:a="http://schemas.openxmlformats.org/drawingml/2006/main">
               <a:ext uri="{FF2B5EF4-FFF2-40B4-BE49-F238E27FC236}">
-                <a16:creationId xmlns:a16="http://schemas.microsoft.com/office/drawing/2014/main" id="{0118057B-7B00-4296-93A7-FCC266ABA634}"/>
+                <a16:creationId xmlns:a16="http://schemas.microsoft.com/office/drawing/2014/main" id="{C922502D-F190-4F7B-A6C0-9531EADA3790}"/>
               </a:ext>
             </a:extLst>
           </p:cNvPr>
@@ -9335,7 +7325,7 @@
           <p:cNvPr id="5" name="">
             <a:extLst xmlns:a="http://schemas.openxmlformats.org/drawingml/2006/main">
               <a:ext uri="{FF2B5EF4-FFF2-40B4-BE49-F238E27FC236}">
-                <a16:creationId xmlns:a16="http://schemas.microsoft.com/office/drawing/2014/main" id="{EEEB49A2-C82B-43C4-A500-EE6A8ADA51D2}"/>
+                <a16:creationId xmlns:a16="http://schemas.microsoft.com/office/drawing/2014/main" id="{C7E49E96-7E65-484C-B15B-11F71E551990}"/>
               </a:ext>
             </a:extLst>
           </p:cNvPr>
@@ -9392,7 +7382,7 @@
           <p:cNvPr id="6" name="">
             <a:extLst xmlns:a="http://schemas.openxmlformats.org/drawingml/2006/main">
               <a:ext uri="{FF2B5EF4-FFF2-40B4-BE49-F238E27FC236}">
-                <a16:creationId xmlns:a16="http://schemas.microsoft.com/office/drawing/2014/main" id="{1C78DA28-E6EF-473B-BD9B-8F74F699FBBC}"/>
+                <a16:creationId xmlns:a16="http://schemas.microsoft.com/office/drawing/2014/main" id="{20AAD859-0179-4353-9FDC-D0A2025B4C0F}"/>
               </a:ext>
             </a:extLst>
           </p:cNvPr>
@@ -9470,7 +7460,7 @@
     </p:spTree>
     <p:extLst>
       <p:ext uri="{BB962C8B-B14F-4D97-AF65-F5344CB8AC3E}">
-        <p14:creationId xmlns:p14="http://schemas.microsoft.com/office/powerpoint/2010/main" val="874475286"/>
+        <p14:creationId xmlns:p14="http://schemas.microsoft.com/office/powerpoint/2010/main" val="5848062"/>
       </p:ext>
     </p:extLst>
   </p:cSld>
@@ -9501,7 +7491,7 @@
           <p:cNvPr id="13" name="">
             <a:extLst xmlns:a="http://schemas.openxmlformats.org/drawingml/2006/main">
               <a:ext uri="{FF2B5EF4-FFF2-40B4-BE49-F238E27FC236}">
-                <a16:creationId xmlns:a16="http://schemas.microsoft.com/office/drawing/2014/main" id="{388584A7-295D-41BC-B2DA-4FC628A2D72E}"/>
+                <a16:creationId xmlns:a16="http://schemas.microsoft.com/office/drawing/2014/main" id="{156B8BEC-4CEC-4CEC-AAE3-2F4556E6FC5B}"/>
               </a:ext>
             </a:extLst>
           </p:cNvPr>
@@ -9531,7 +7521,7 @@
           <p:cNvPr id="2" name="">
             <a:extLst xmlns:a="http://schemas.openxmlformats.org/drawingml/2006/main">
               <a:ext uri="{FF2B5EF4-FFF2-40B4-BE49-F238E27FC236}">
-                <a16:creationId xmlns:a16="http://schemas.microsoft.com/office/drawing/2014/main" id="{378A0DCF-D904-4C1A-A1A8-FFA002E7F4D9}"/>
+                <a16:creationId xmlns:a16="http://schemas.microsoft.com/office/drawing/2014/main" id="{735B06C1-9F8A-4C2B-B85B-BEE98222F48B}"/>
               </a:ext>
             </a:extLst>
           </p:cNvPr>
@@ -9588,7 +7578,7 @@
           <p:cNvPr id="3" name="">
             <a:extLst xmlns:a="http://schemas.openxmlformats.org/drawingml/2006/main">
               <a:ext uri="{FF2B5EF4-FFF2-40B4-BE49-F238E27FC236}">
-                <a16:creationId xmlns:a16="http://schemas.microsoft.com/office/drawing/2014/main" id="{F0A5667A-7A5D-48F9-A89F-AE0B10390F37}"/>
+                <a16:creationId xmlns:a16="http://schemas.microsoft.com/office/drawing/2014/main" id="{C668A62C-99A9-4BE4-B1A9-CB8FA63276B2}"/>
               </a:ext>
             </a:extLst>
           </p:cNvPr>
@@ -9645,7 +7635,7 @@
           <p:cNvPr id="4" name="">
             <a:extLst xmlns:a="http://schemas.openxmlformats.org/drawingml/2006/main">
               <a:ext uri="{FF2B5EF4-FFF2-40B4-BE49-F238E27FC236}">
-                <a16:creationId xmlns:a16="http://schemas.microsoft.com/office/drawing/2014/main" id="{DBBA86A2-5DBB-4E85-B8A0-EB59BEF30364}"/>
+                <a16:creationId xmlns:a16="http://schemas.microsoft.com/office/drawing/2014/main" id="{B2026255-E18F-4807-9D4B-0EA588227FA2}"/>
               </a:ext>
             </a:extLst>
           </p:cNvPr>
@@ -9702,7 +7692,7 @@
           <p:cNvPr id="5" name="">
             <a:extLst xmlns:a="http://schemas.openxmlformats.org/drawingml/2006/main">
               <a:ext uri="{FF2B5EF4-FFF2-40B4-BE49-F238E27FC236}">
-                <a16:creationId xmlns:a16="http://schemas.microsoft.com/office/drawing/2014/main" id="{DC5C9038-EC63-449E-B2E4-D002DE27FD65}"/>
+                <a16:creationId xmlns:a16="http://schemas.microsoft.com/office/drawing/2014/main" id="{2C649049-05F2-48D2-9C9B-810D0621F88A}"/>
               </a:ext>
             </a:extLst>
           </p:cNvPr>
@@ -9759,7 +7749,7 @@
           <p:cNvPr id="6" name="">
             <a:extLst xmlns:a="http://schemas.openxmlformats.org/drawingml/2006/main">
               <a:ext uri="{FF2B5EF4-FFF2-40B4-BE49-F238E27FC236}">
-                <a16:creationId xmlns:a16="http://schemas.microsoft.com/office/drawing/2014/main" id="{AE515048-B18B-4067-A2C3-D8FC53502995}"/>
+                <a16:creationId xmlns:a16="http://schemas.microsoft.com/office/drawing/2014/main" id="{5BF86A4D-5991-4174-A100-CFB95CD3F8D7}"/>
               </a:ext>
             </a:extLst>
           </p:cNvPr>
@@ -9816,7 +7806,7 @@
           <p:cNvPr id="7" name="">
             <a:extLst xmlns:a="http://schemas.openxmlformats.org/drawingml/2006/main">
               <a:ext uri="{FF2B5EF4-FFF2-40B4-BE49-F238E27FC236}">
-                <a16:creationId xmlns:a16="http://schemas.microsoft.com/office/drawing/2014/main" id="{097CA450-16DC-46F6-9DBD-D4ECA9449C79}"/>
+                <a16:creationId xmlns:a16="http://schemas.microsoft.com/office/drawing/2014/main" id="{A34F6E7E-0DD2-47B6-BD55-EC9DACAB5CB2}"/>
               </a:ext>
             </a:extLst>
           </p:cNvPr>
@@ -9873,7 +7863,7 @@
           <p:cNvPr id="8" name="">
             <a:extLst xmlns:a="http://schemas.openxmlformats.org/drawingml/2006/main">
               <a:ext uri="{FF2B5EF4-FFF2-40B4-BE49-F238E27FC236}">
-                <a16:creationId xmlns:a16="http://schemas.microsoft.com/office/drawing/2014/main" id="{47149581-ABDD-4363-8814-330B310B367D}"/>
+                <a16:creationId xmlns:a16="http://schemas.microsoft.com/office/drawing/2014/main" id="{5F156560-D3F0-41D7-B2E7-F5849CF3A6D7}"/>
               </a:ext>
             </a:extLst>
           </p:cNvPr>
@@ -9930,7 +7920,7 @@
           <p:cNvPr id="9" name="">
             <a:extLst xmlns:a="http://schemas.openxmlformats.org/drawingml/2006/main">
               <a:ext uri="{FF2B5EF4-FFF2-40B4-BE49-F238E27FC236}">
-                <a16:creationId xmlns:a16="http://schemas.microsoft.com/office/drawing/2014/main" id="{4656177B-A6B0-42FA-95FB-20A587CCA518}"/>
+                <a16:creationId xmlns:a16="http://schemas.microsoft.com/office/drawing/2014/main" id="{CE3554A6-EAA1-4D8B-BB3A-5984D10B0E28}"/>
               </a:ext>
             </a:extLst>
           </p:cNvPr>
@@ -9987,7 +7977,7 @@
           <p:cNvPr id="10" name="">
             <a:extLst xmlns:a="http://schemas.openxmlformats.org/drawingml/2006/main">
               <a:ext uri="{FF2B5EF4-FFF2-40B4-BE49-F238E27FC236}">
-                <a16:creationId xmlns:a16="http://schemas.microsoft.com/office/drawing/2014/main" id="{E0E361E3-E88A-47E2-9C36-7D184F108B10}"/>
+                <a16:creationId xmlns:a16="http://schemas.microsoft.com/office/drawing/2014/main" id="{724AF166-2BFB-462F-99D6-A6FDE74BF245}"/>
               </a:ext>
             </a:extLst>
           </p:cNvPr>
@@ -10044,7 +8034,7 @@
           <p:cNvPr id="11" name="">
             <a:extLst xmlns:a="http://schemas.openxmlformats.org/drawingml/2006/main">
               <a:ext uri="{FF2B5EF4-FFF2-40B4-BE49-F238E27FC236}">
-                <a16:creationId xmlns:a16="http://schemas.microsoft.com/office/drawing/2014/main" id="{1A69A66C-7AC6-45D1-B3D9-968A142C9D0D}"/>
+                <a16:creationId xmlns:a16="http://schemas.microsoft.com/office/drawing/2014/main" id="{99A260EA-2310-427B-9B04-34C85425C3C8}"/>
               </a:ext>
             </a:extLst>
           </p:cNvPr>
@@ -10101,7 +8091,7 @@
           <p:cNvPr id="12" name="">
             <a:extLst xmlns:a="http://schemas.openxmlformats.org/drawingml/2006/main">
               <a:ext uri="{FF2B5EF4-FFF2-40B4-BE49-F238E27FC236}">
-                <a16:creationId xmlns:a16="http://schemas.microsoft.com/office/drawing/2014/main" id="{FDC101B4-29C2-44FF-87EB-D775F597CC42}"/>
+                <a16:creationId xmlns:a16="http://schemas.microsoft.com/office/drawing/2014/main" id="{7ABFC45E-4B7B-4025-A51A-BBB1F512846F}"/>
               </a:ext>
             </a:extLst>
           </p:cNvPr>
@@ -10156,7 +8146,7 @@
     </p:spTree>
     <p:extLst>
       <p:ext uri="{BB962C8B-B14F-4D97-AF65-F5344CB8AC3E}">
-        <p14:creationId xmlns:p14="http://schemas.microsoft.com/office/powerpoint/2010/main" val="1445485074"/>
+        <p14:creationId xmlns:p14="http://schemas.microsoft.com/office/powerpoint/2010/main" val="65387259"/>
       </p:ext>
     </p:extLst>
   </p:cSld>
@@ -10187,7 +8177,7 @@
           <p:cNvPr id="13" name="">
             <a:extLst xmlns:a="http://schemas.openxmlformats.org/drawingml/2006/main">
               <a:ext uri="{FF2B5EF4-FFF2-40B4-BE49-F238E27FC236}">
-                <a16:creationId xmlns:a16="http://schemas.microsoft.com/office/drawing/2014/main" id="{3B929BD1-A10E-4CF2-A980-E0269BBD87CB}"/>
+                <a16:creationId xmlns:a16="http://schemas.microsoft.com/office/drawing/2014/main" id="{4FF8B4C8-1FB8-4D0D-846B-B05420C25750}"/>
               </a:ext>
             </a:extLst>
           </p:cNvPr>
@@ -10217,7 +8207,7 @@
           <p:cNvPr id="2" name="">
             <a:extLst xmlns:a="http://schemas.openxmlformats.org/drawingml/2006/main">
               <a:ext uri="{FF2B5EF4-FFF2-40B4-BE49-F238E27FC236}">
-                <a16:creationId xmlns:a16="http://schemas.microsoft.com/office/drawing/2014/main" id="{6CE0EDD7-16B8-4EB6-ACB8-BFA22F171A55}"/>
+                <a16:creationId xmlns:a16="http://schemas.microsoft.com/office/drawing/2014/main" id="{03A73760-159A-4C7E-84A2-24CB5E4D5FF7}"/>
               </a:ext>
             </a:extLst>
           </p:cNvPr>
@@ -10274,7 +8264,7 @@
           <p:cNvPr id="3" name="">
             <a:extLst xmlns:a="http://schemas.openxmlformats.org/drawingml/2006/main">
               <a:ext uri="{FF2B5EF4-FFF2-40B4-BE49-F238E27FC236}">
-                <a16:creationId xmlns:a16="http://schemas.microsoft.com/office/drawing/2014/main" id="{5EA3207D-D569-4402-9B2F-788FE6AB93A9}"/>
+                <a16:creationId xmlns:a16="http://schemas.microsoft.com/office/drawing/2014/main" id="{72D83A53-8961-4D1B-B77B-730A1463A76E}"/>
               </a:ext>
             </a:extLst>
           </p:cNvPr>
@@ -10331,7 +8321,7 @@
           <p:cNvPr id="4" name="">
             <a:extLst xmlns:a="http://schemas.openxmlformats.org/drawingml/2006/main">
               <a:ext uri="{FF2B5EF4-FFF2-40B4-BE49-F238E27FC236}">
-                <a16:creationId xmlns:a16="http://schemas.microsoft.com/office/drawing/2014/main" id="{848C0AEB-FECC-40BD-B208-BE38E8C45693}"/>
+                <a16:creationId xmlns:a16="http://schemas.microsoft.com/office/drawing/2014/main" id="{DE9AACB5-19E2-426E-97AD-634B3E270C56}"/>
               </a:ext>
             </a:extLst>
           </p:cNvPr>
@@ -10388,7 +8378,7 @@
           <p:cNvPr id="5" name="">
             <a:extLst xmlns:a="http://schemas.openxmlformats.org/drawingml/2006/main">
               <a:ext uri="{FF2B5EF4-FFF2-40B4-BE49-F238E27FC236}">
-                <a16:creationId xmlns:a16="http://schemas.microsoft.com/office/drawing/2014/main" id="{2993321B-1348-4F92-939A-86EC08346FC1}"/>
+                <a16:creationId xmlns:a16="http://schemas.microsoft.com/office/drawing/2014/main" id="{7DF54186-60E0-4B9F-953A-4AD2E3DC9A3E}"/>
               </a:ext>
             </a:extLst>
           </p:cNvPr>
@@ -10445,7 +8435,7 @@
           <p:cNvPr id="6" name="">
             <a:extLst xmlns:a="http://schemas.openxmlformats.org/drawingml/2006/main">
               <a:ext uri="{FF2B5EF4-FFF2-40B4-BE49-F238E27FC236}">
-                <a16:creationId xmlns:a16="http://schemas.microsoft.com/office/drawing/2014/main" id="{48DDC645-CF06-45B9-8FFF-1093CD33090A}"/>
+                <a16:creationId xmlns:a16="http://schemas.microsoft.com/office/drawing/2014/main" id="{37F8F298-05D3-45D4-9457-AC82C5560CEB}"/>
               </a:ext>
             </a:extLst>
           </p:cNvPr>
@@ -10502,7 +8492,7 @@
           <p:cNvPr id="7" name="">
             <a:extLst xmlns:a="http://schemas.openxmlformats.org/drawingml/2006/main">
               <a:ext uri="{FF2B5EF4-FFF2-40B4-BE49-F238E27FC236}">
-                <a16:creationId xmlns:a16="http://schemas.microsoft.com/office/drawing/2014/main" id="{AF02F6A0-6997-46F9-92B2-0B6520B6E952}"/>
+                <a16:creationId xmlns:a16="http://schemas.microsoft.com/office/drawing/2014/main" id="{4AD8A5CA-1679-431D-BE35-53826F233658}"/>
               </a:ext>
             </a:extLst>
           </p:cNvPr>
@@ -10559,7 +8549,7 @@
           <p:cNvPr id="8" name="">
             <a:extLst xmlns:a="http://schemas.openxmlformats.org/drawingml/2006/main">
               <a:ext uri="{FF2B5EF4-FFF2-40B4-BE49-F238E27FC236}">
-                <a16:creationId xmlns:a16="http://schemas.microsoft.com/office/drawing/2014/main" id="{C10B963E-FC9B-4800-9966-C66A2803672F}"/>
+                <a16:creationId xmlns:a16="http://schemas.microsoft.com/office/drawing/2014/main" id="{5BD218EA-0C6F-4C5A-9F20-236E67106FE5}"/>
               </a:ext>
             </a:extLst>
           </p:cNvPr>
@@ -10616,7 +8606,7 @@
           <p:cNvPr id="9" name="">
             <a:extLst xmlns:a="http://schemas.openxmlformats.org/drawingml/2006/main">
               <a:ext uri="{FF2B5EF4-FFF2-40B4-BE49-F238E27FC236}">
-                <a16:creationId xmlns:a16="http://schemas.microsoft.com/office/drawing/2014/main" id="{3E57DA3A-D5F1-4FEE-829F-A70A5E08DDB6}"/>
+                <a16:creationId xmlns:a16="http://schemas.microsoft.com/office/drawing/2014/main" id="{B0003AF6-58FF-4FD0-A8C5-8594FF4C7F28}"/>
               </a:ext>
             </a:extLst>
           </p:cNvPr>
@@ -10673,7 +8663,7 @@
           <p:cNvPr id="10" name="">
             <a:extLst xmlns:a="http://schemas.openxmlformats.org/drawingml/2006/main">
               <a:ext uri="{FF2B5EF4-FFF2-40B4-BE49-F238E27FC236}">
-                <a16:creationId xmlns:a16="http://schemas.microsoft.com/office/drawing/2014/main" id="{E5CCABFD-634C-42A5-BFA0-85437AFE9516}"/>
+                <a16:creationId xmlns:a16="http://schemas.microsoft.com/office/drawing/2014/main" id="{795BA51A-A411-4199-B316-DF067834E58D}"/>
               </a:ext>
             </a:extLst>
           </p:cNvPr>
@@ -10730,7 +8720,7 @@
           <p:cNvPr id="11" name="">
             <a:extLst xmlns:a="http://schemas.openxmlformats.org/drawingml/2006/main">
               <a:ext uri="{FF2B5EF4-FFF2-40B4-BE49-F238E27FC236}">
-                <a16:creationId xmlns:a16="http://schemas.microsoft.com/office/drawing/2014/main" id="{2539E565-BC2D-46CA-B49D-B8AF1AA34942}"/>
+                <a16:creationId xmlns:a16="http://schemas.microsoft.com/office/drawing/2014/main" id="{834818BE-9946-4888-969A-B3700FA02DE1}"/>
               </a:ext>
             </a:extLst>
           </p:cNvPr>
@@ -10787,7 +8777,7 @@
           <p:cNvPr id="12" name="">
             <a:extLst xmlns:a="http://schemas.openxmlformats.org/drawingml/2006/main">
               <a:ext uri="{FF2B5EF4-FFF2-40B4-BE49-F238E27FC236}">
-                <a16:creationId xmlns:a16="http://schemas.microsoft.com/office/drawing/2014/main" id="{8CADABEA-A012-488F-9636-D1DA1257928A}"/>
+                <a16:creationId xmlns:a16="http://schemas.microsoft.com/office/drawing/2014/main" id="{92FB17C2-F2EE-4336-871A-54531EB199D8}"/>
               </a:ext>
             </a:extLst>
           </p:cNvPr>
@@ -10842,7 +8832,7 @@
     </p:spTree>
     <p:extLst>
       <p:ext uri="{BB962C8B-B14F-4D97-AF65-F5344CB8AC3E}">
-        <p14:creationId xmlns:p14="http://schemas.microsoft.com/office/powerpoint/2010/main" val="16288900"/>
+        <p14:creationId xmlns:p14="http://schemas.microsoft.com/office/powerpoint/2010/main" val="1405863058"/>
       </p:ext>
     </p:extLst>
   </p:cSld>
@@ -10873,7 +8863,7 @@
           <p:cNvPr id="13" name="">
             <a:extLst xmlns:a="http://schemas.openxmlformats.org/drawingml/2006/main">
               <a:ext uri="{FF2B5EF4-FFF2-40B4-BE49-F238E27FC236}">
-                <a16:creationId xmlns:a16="http://schemas.microsoft.com/office/drawing/2014/main" id="{0DF3800F-7526-45F7-B265-90B95FD317FE}"/>
+                <a16:creationId xmlns:a16="http://schemas.microsoft.com/office/drawing/2014/main" id="{AC1DD1C1-C038-4F8D-84EF-86D91FAEB46A}"/>
               </a:ext>
             </a:extLst>
           </p:cNvPr>
@@ -10903,7 +8893,7 @@
           <p:cNvPr id="2" name="">
             <a:extLst xmlns:a="http://schemas.openxmlformats.org/drawingml/2006/main">
               <a:ext uri="{FF2B5EF4-FFF2-40B4-BE49-F238E27FC236}">
-                <a16:creationId xmlns:a16="http://schemas.microsoft.com/office/drawing/2014/main" id="{5F365BEC-E08D-418A-A1D5-9CB8D4088332}"/>
+                <a16:creationId xmlns:a16="http://schemas.microsoft.com/office/drawing/2014/main" id="{2B3BF250-87AD-491A-A5B8-BDC706731725}"/>
               </a:ext>
             </a:extLst>
           </p:cNvPr>
@@ -10960,7 +8950,7 @@
           <p:cNvPr id="3" name="">
             <a:extLst xmlns:a="http://schemas.openxmlformats.org/drawingml/2006/main">
               <a:ext uri="{FF2B5EF4-FFF2-40B4-BE49-F238E27FC236}">
-                <a16:creationId xmlns:a16="http://schemas.microsoft.com/office/drawing/2014/main" id="{A6DA7F5C-5AD0-4029-872C-DC84A6A87273}"/>
+                <a16:creationId xmlns:a16="http://schemas.microsoft.com/office/drawing/2014/main" id="{E507143F-46B7-4304-A28E-1035ADFB0AA5}"/>
               </a:ext>
             </a:extLst>
           </p:cNvPr>
@@ -11017,7 +9007,7 @@
           <p:cNvPr id="4" name="">
             <a:extLst xmlns:a="http://schemas.openxmlformats.org/drawingml/2006/main">
               <a:ext uri="{FF2B5EF4-FFF2-40B4-BE49-F238E27FC236}">
-                <a16:creationId xmlns:a16="http://schemas.microsoft.com/office/drawing/2014/main" id="{52237DEF-92DB-4208-BB6D-BAFDA225BD88}"/>
+                <a16:creationId xmlns:a16="http://schemas.microsoft.com/office/drawing/2014/main" id="{EC7C4813-003C-4B88-8752-767839C04982}"/>
               </a:ext>
             </a:extLst>
           </p:cNvPr>
@@ -11074,7 +9064,7 @@
           <p:cNvPr id="5" name="">
             <a:extLst xmlns:a="http://schemas.openxmlformats.org/drawingml/2006/main">
               <a:ext uri="{FF2B5EF4-FFF2-40B4-BE49-F238E27FC236}">
-                <a16:creationId xmlns:a16="http://schemas.microsoft.com/office/drawing/2014/main" id="{A7672FAB-1A1D-433B-AC2A-A9A630C696A6}"/>
+                <a16:creationId xmlns:a16="http://schemas.microsoft.com/office/drawing/2014/main" id="{DA13120A-C769-46E6-BCAD-18E0B472FFBB}"/>
               </a:ext>
             </a:extLst>
           </p:cNvPr>
@@ -11131,7 +9121,7 @@
           <p:cNvPr id="6" name="">
             <a:extLst xmlns:a="http://schemas.openxmlformats.org/drawingml/2006/main">
               <a:ext uri="{FF2B5EF4-FFF2-40B4-BE49-F238E27FC236}">
-                <a16:creationId xmlns:a16="http://schemas.microsoft.com/office/drawing/2014/main" id="{0CB3B4B5-A1DC-490A-9859-817381DC41B1}"/>
+                <a16:creationId xmlns:a16="http://schemas.microsoft.com/office/drawing/2014/main" id="{5738A373-6CD4-4E3F-A361-72E4424F04B4}"/>
               </a:ext>
             </a:extLst>
           </p:cNvPr>
@@ -11188,7 +9178,7 @@
           <p:cNvPr id="7" name="">
             <a:extLst xmlns:a="http://schemas.openxmlformats.org/drawingml/2006/main">
               <a:ext uri="{FF2B5EF4-FFF2-40B4-BE49-F238E27FC236}">
-                <a16:creationId xmlns:a16="http://schemas.microsoft.com/office/drawing/2014/main" id="{283E6D0F-76C6-4468-887D-9C1F0C0E23E4}"/>
+                <a16:creationId xmlns:a16="http://schemas.microsoft.com/office/drawing/2014/main" id="{C4540351-2EDD-4FA3-8C66-FEC7D7E0AFB0}"/>
               </a:ext>
             </a:extLst>
           </p:cNvPr>
@@ -11245,7 +9235,7 @@
           <p:cNvPr id="8" name="">
             <a:extLst xmlns:a="http://schemas.openxmlformats.org/drawingml/2006/main">
               <a:ext uri="{FF2B5EF4-FFF2-40B4-BE49-F238E27FC236}">
-                <a16:creationId xmlns:a16="http://schemas.microsoft.com/office/drawing/2014/main" id="{94F37BD6-C16D-4E32-9BB0-EA832FA8FA60}"/>
+                <a16:creationId xmlns:a16="http://schemas.microsoft.com/office/drawing/2014/main" id="{94828FF8-790F-43E4-A6D9-94DB1CF6D714}"/>
               </a:ext>
             </a:extLst>
           </p:cNvPr>
@@ -11302,7 +9292,7 @@
           <p:cNvPr id="9" name="">
             <a:extLst xmlns:a="http://schemas.openxmlformats.org/drawingml/2006/main">
               <a:ext uri="{FF2B5EF4-FFF2-40B4-BE49-F238E27FC236}">
-                <a16:creationId xmlns:a16="http://schemas.microsoft.com/office/drawing/2014/main" id="{6B018E8F-2108-45A0-8C6F-873D1BE68262}"/>
+                <a16:creationId xmlns:a16="http://schemas.microsoft.com/office/drawing/2014/main" id="{6EAB533A-5F94-4065-A1A4-405D3B70406A}"/>
               </a:ext>
             </a:extLst>
           </p:cNvPr>
@@ -11359,7 +9349,7 @@
           <p:cNvPr id="10" name="">
             <a:extLst xmlns:a="http://schemas.openxmlformats.org/drawingml/2006/main">
               <a:ext uri="{FF2B5EF4-FFF2-40B4-BE49-F238E27FC236}">
-                <a16:creationId xmlns:a16="http://schemas.microsoft.com/office/drawing/2014/main" id="{8E052D89-7BF3-4D46-BE9A-4CB1D5F8A020}"/>
+                <a16:creationId xmlns:a16="http://schemas.microsoft.com/office/drawing/2014/main" id="{9CC7202C-1668-44C6-9912-9E934BF17D4D}"/>
               </a:ext>
             </a:extLst>
           </p:cNvPr>
@@ -11416,7 +9406,7 @@
           <p:cNvPr id="11" name="">
             <a:extLst xmlns:a="http://schemas.openxmlformats.org/drawingml/2006/main">
               <a:ext uri="{FF2B5EF4-FFF2-40B4-BE49-F238E27FC236}">
-                <a16:creationId xmlns:a16="http://schemas.microsoft.com/office/drawing/2014/main" id="{C99B222A-FDAC-4816-BF99-6349CC477E09}"/>
+                <a16:creationId xmlns:a16="http://schemas.microsoft.com/office/drawing/2014/main" id="{01BE9656-A6AB-4B93-A287-6223FAE97660}"/>
               </a:ext>
             </a:extLst>
           </p:cNvPr>
@@ -11473,7 +9463,7 @@
           <p:cNvPr id="12" name="">
             <a:extLst xmlns:a="http://schemas.openxmlformats.org/drawingml/2006/main">
               <a:ext uri="{FF2B5EF4-FFF2-40B4-BE49-F238E27FC236}">
-                <a16:creationId xmlns:a16="http://schemas.microsoft.com/office/drawing/2014/main" id="{D0269F9D-ECDB-4571-B89A-E2691A72FC4C}"/>
+                <a16:creationId xmlns:a16="http://schemas.microsoft.com/office/drawing/2014/main" id="{529723CE-85D8-4167-86BD-80CB152032E3}"/>
               </a:ext>
             </a:extLst>
           </p:cNvPr>
@@ -11528,7 +9518,7 @@
     </p:spTree>
     <p:extLst>
       <p:ext uri="{BB962C8B-B14F-4D97-AF65-F5344CB8AC3E}">
-        <p14:creationId xmlns:p14="http://schemas.microsoft.com/office/powerpoint/2010/main" val="534242193"/>
+        <p14:creationId xmlns:p14="http://schemas.microsoft.com/office/powerpoint/2010/main" val="622294762"/>
       </p:ext>
     </p:extLst>
   </p:cSld>
@@ -11559,7 +9549,7 @@
           <p:cNvPr id="13" name="">
             <a:extLst xmlns:a="http://schemas.openxmlformats.org/drawingml/2006/main">
               <a:ext uri="{FF2B5EF4-FFF2-40B4-BE49-F238E27FC236}">
-                <a16:creationId xmlns:a16="http://schemas.microsoft.com/office/drawing/2014/main" id="{6B67965F-59E2-4815-8BBF-251350D697B8}"/>
+                <a16:creationId xmlns:a16="http://schemas.microsoft.com/office/drawing/2014/main" id="{59E00FE3-71B7-4269-89D2-E965350593C5}"/>
               </a:ext>
             </a:extLst>
           </p:cNvPr>
@@ -11589,7 +9579,7 @@
           <p:cNvPr id="2" name="">
             <a:extLst xmlns:a="http://schemas.openxmlformats.org/drawingml/2006/main">
               <a:ext uri="{FF2B5EF4-FFF2-40B4-BE49-F238E27FC236}">
-                <a16:creationId xmlns:a16="http://schemas.microsoft.com/office/drawing/2014/main" id="{8A17BBD4-042F-4D46-8483-3CC3F000D29B}"/>
+                <a16:creationId xmlns:a16="http://schemas.microsoft.com/office/drawing/2014/main" id="{86B327B1-9392-48A2-81A6-9164C88D29FF}"/>
               </a:ext>
             </a:extLst>
           </p:cNvPr>
@@ -11646,7 +9636,7 @@
           <p:cNvPr id="3" name="">
             <a:extLst xmlns:a="http://schemas.openxmlformats.org/drawingml/2006/main">
               <a:ext uri="{FF2B5EF4-FFF2-40B4-BE49-F238E27FC236}">
-                <a16:creationId xmlns:a16="http://schemas.microsoft.com/office/drawing/2014/main" id="{AC586FA3-1DA9-4974-8341-82A017B58A68}"/>
+                <a16:creationId xmlns:a16="http://schemas.microsoft.com/office/drawing/2014/main" id="{A3B57F21-6209-4895-A5EC-ED81EEB81D32}"/>
               </a:ext>
             </a:extLst>
           </p:cNvPr>
@@ -11703,7 +9693,7 @@
           <p:cNvPr id="4" name="">
             <a:extLst xmlns:a="http://schemas.openxmlformats.org/drawingml/2006/main">
               <a:ext uri="{FF2B5EF4-FFF2-40B4-BE49-F238E27FC236}">
-                <a16:creationId xmlns:a16="http://schemas.microsoft.com/office/drawing/2014/main" id="{10B955FE-3490-41A8-8CF3-7C40081536A9}"/>
+                <a16:creationId xmlns:a16="http://schemas.microsoft.com/office/drawing/2014/main" id="{0D9A6D86-3856-4E23-8181-3512E66693EB}"/>
               </a:ext>
             </a:extLst>
           </p:cNvPr>
@@ -11760,7 +9750,7 @@
           <p:cNvPr id="5" name="">
             <a:extLst xmlns:a="http://schemas.openxmlformats.org/drawingml/2006/main">
               <a:ext uri="{FF2B5EF4-FFF2-40B4-BE49-F238E27FC236}">
-                <a16:creationId xmlns:a16="http://schemas.microsoft.com/office/drawing/2014/main" id="{1B721427-D48E-408A-8C89-E0BF1A33BE76}"/>
+                <a16:creationId xmlns:a16="http://schemas.microsoft.com/office/drawing/2014/main" id="{1B5CFF43-9FDC-4E50-B369-A0F306AB8B06}"/>
               </a:ext>
             </a:extLst>
           </p:cNvPr>
@@ -11817,7 +9807,7 @@
           <p:cNvPr id="6" name="">
             <a:extLst xmlns:a="http://schemas.openxmlformats.org/drawingml/2006/main">
               <a:ext uri="{FF2B5EF4-FFF2-40B4-BE49-F238E27FC236}">
-                <a16:creationId xmlns:a16="http://schemas.microsoft.com/office/drawing/2014/main" id="{9CCF078A-0FBD-42F3-92EC-AAD2C8FE16E6}"/>
+                <a16:creationId xmlns:a16="http://schemas.microsoft.com/office/drawing/2014/main" id="{98B7491F-B45E-48FE-9CBD-AA9F588E142E}"/>
               </a:ext>
             </a:extLst>
           </p:cNvPr>
@@ -11874,7 +9864,7 @@
           <p:cNvPr id="7" name="">
             <a:extLst xmlns:a="http://schemas.openxmlformats.org/drawingml/2006/main">
               <a:ext uri="{FF2B5EF4-FFF2-40B4-BE49-F238E27FC236}">
-                <a16:creationId xmlns:a16="http://schemas.microsoft.com/office/drawing/2014/main" id="{3934578D-B636-40B1-9E21-066246C4E74D}"/>
+                <a16:creationId xmlns:a16="http://schemas.microsoft.com/office/drawing/2014/main" id="{50172E1C-36F7-4A27-8ECA-D769A17956A1}"/>
               </a:ext>
             </a:extLst>
           </p:cNvPr>
@@ -11931,7 +9921,7 @@
           <p:cNvPr id="8" name="">
             <a:extLst xmlns:a="http://schemas.openxmlformats.org/drawingml/2006/main">
               <a:ext uri="{FF2B5EF4-FFF2-40B4-BE49-F238E27FC236}">
-                <a16:creationId xmlns:a16="http://schemas.microsoft.com/office/drawing/2014/main" id="{E61664ED-BE02-4C04-9D01-B4F3F6804EF3}"/>
+                <a16:creationId xmlns:a16="http://schemas.microsoft.com/office/drawing/2014/main" id="{5ECF4D34-4D0C-4CBF-BDFB-AE74E759DC46}"/>
               </a:ext>
             </a:extLst>
           </p:cNvPr>
@@ -11988,7 +9978,7 @@
           <p:cNvPr id="9" name="">
             <a:extLst xmlns:a="http://schemas.openxmlformats.org/drawingml/2006/main">
               <a:ext uri="{FF2B5EF4-FFF2-40B4-BE49-F238E27FC236}">
-                <a16:creationId xmlns:a16="http://schemas.microsoft.com/office/drawing/2014/main" id="{505C6CDB-91D5-49C4-ABB4-5B22D2360FCC}"/>
+                <a16:creationId xmlns:a16="http://schemas.microsoft.com/office/drawing/2014/main" id="{A82A647A-E8C7-4EFE-B107-0ED8D4273246}"/>
               </a:ext>
             </a:extLst>
           </p:cNvPr>
@@ -12045,7 +10035,7 @@
           <p:cNvPr id="10" name="">
             <a:extLst xmlns:a="http://schemas.openxmlformats.org/drawingml/2006/main">
               <a:ext uri="{FF2B5EF4-FFF2-40B4-BE49-F238E27FC236}">
-                <a16:creationId xmlns:a16="http://schemas.microsoft.com/office/drawing/2014/main" id="{BE2AE424-F1C6-41FC-B823-B0F2750BDFD3}"/>
+                <a16:creationId xmlns:a16="http://schemas.microsoft.com/office/drawing/2014/main" id="{8183E64E-B525-4315-80A0-2C7683C0DF7D}"/>
               </a:ext>
             </a:extLst>
           </p:cNvPr>
@@ -12102,7 +10092,7 @@
           <p:cNvPr id="11" name="">
             <a:extLst xmlns:a="http://schemas.openxmlformats.org/drawingml/2006/main">
               <a:ext uri="{FF2B5EF4-FFF2-40B4-BE49-F238E27FC236}">
-                <a16:creationId xmlns:a16="http://schemas.microsoft.com/office/drawing/2014/main" id="{2BF27100-9282-4A4F-96D6-BAFD980C6998}"/>
+                <a16:creationId xmlns:a16="http://schemas.microsoft.com/office/drawing/2014/main" id="{FD044F04-B66E-46EB-A592-B1AEAF7AC3AD}"/>
               </a:ext>
             </a:extLst>
           </p:cNvPr>
@@ -12159,7 +10149,7 @@
           <p:cNvPr id="12" name="">
             <a:extLst xmlns:a="http://schemas.openxmlformats.org/drawingml/2006/main">
               <a:ext uri="{FF2B5EF4-FFF2-40B4-BE49-F238E27FC236}">
-                <a16:creationId xmlns:a16="http://schemas.microsoft.com/office/drawing/2014/main" id="{D8FB8604-7158-4342-9B45-7793C90514DB}"/>
+                <a16:creationId xmlns:a16="http://schemas.microsoft.com/office/drawing/2014/main" id="{CB684B4E-22B1-4E7F-95F2-1569F3AC441D}"/>
               </a:ext>
             </a:extLst>
           </p:cNvPr>
@@ -12214,7 +10204,7 @@
     </p:spTree>
     <p:extLst>
       <p:ext uri="{BB962C8B-B14F-4D97-AF65-F5344CB8AC3E}">
-        <p14:creationId xmlns:p14="http://schemas.microsoft.com/office/powerpoint/2010/main" val="31853373"/>
+        <p14:creationId xmlns:p14="http://schemas.microsoft.com/office/powerpoint/2010/main" val="690611903"/>
       </p:ext>
     </p:extLst>
   </p:cSld>
@@ -12245,7 +10235,7 @@
           <p:cNvPr id="13" name="">
             <a:extLst xmlns:a="http://schemas.openxmlformats.org/drawingml/2006/main">
               <a:ext uri="{FF2B5EF4-FFF2-40B4-BE49-F238E27FC236}">
-                <a16:creationId xmlns:a16="http://schemas.microsoft.com/office/drawing/2014/main" id="{C9EF6C1C-C901-4B76-8AB8-DF904D3CD17D}"/>
+                <a16:creationId xmlns:a16="http://schemas.microsoft.com/office/drawing/2014/main" id="{5C3857CE-B8BA-4B43-B196-EBC745C76F55}"/>
               </a:ext>
             </a:extLst>
           </p:cNvPr>
@@ -12275,7 +10265,7 @@
           <p:cNvPr id="2" name="">
             <a:extLst xmlns:a="http://schemas.openxmlformats.org/drawingml/2006/main">
               <a:ext uri="{FF2B5EF4-FFF2-40B4-BE49-F238E27FC236}">
-                <a16:creationId xmlns:a16="http://schemas.microsoft.com/office/drawing/2014/main" id="{D113A34E-533A-40E8-9E8C-EAD8070D8FB9}"/>
+                <a16:creationId xmlns:a16="http://schemas.microsoft.com/office/drawing/2014/main" id="{997A5A60-C0FA-417A-9FF1-8ACAB53CD7F3}"/>
               </a:ext>
             </a:extLst>
           </p:cNvPr>
@@ -12332,7 +10322,7 @@
           <p:cNvPr id="3" name="">
             <a:extLst xmlns:a="http://schemas.openxmlformats.org/drawingml/2006/main">
               <a:ext uri="{FF2B5EF4-FFF2-40B4-BE49-F238E27FC236}">
-                <a16:creationId xmlns:a16="http://schemas.microsoft.com/office/drawing/2014/main" id="{B0FA7FB5-495F-4BE9-AB7A-182FE8498BDE}"/>
+                <a16:creationId xmlns:a16="http://schemas.microsoft.com/office/drawing/2014/main" id="{C60F20CE-726D-4F4C-B08C-80BA420F5827}"/>
               </a:ext>
             </a:extLst>
           </p:cNvPr>
@@ -12389,7 +10379,7 @@
           <p:cNvPr id="4" name="">
             <a:extLst xmlns:a="http://schemas.openxmlformats.org/drawingml/2006/main">
               <a:ext uri="{FF2B5EF4-FFF2-40B4-BE49-F238E27FC236}">
-                <a16:creationId xmlns:a16="http://schemas.microsoft.com/office/drawing/2014/main" id="{5BD12F44-2DF8-4FEA-8454-C170DD7DD17E}"/>
+                <a16:creationId xmlns:a16="http://schemas.microsoft.com/office/drawing/2014/main" id="{3FA2000C-B298-47DF-BEEC-886C4BC85B80}"/>
               </a:ext>
             </a:extLst>
           </p:cNvPr>
@@ -12446,7 +10436,7 @@
           <p:cNvPr id="5" name="">
             <a:extLst xmlns:a="http://schemas.openxmlformats.org/drawingml/2006/main">
               <a:ext uri="{FF2B5EF4-FFF2-40B4-BE49-F238E27FC236}">
-                <a16:creationId xmlns:a16="http://schemas.microsoft.com/office/drawing/2014/main" id="{386D4921-A549-43B0-833B-E0F581FC9063}"/>
+                <a16:creationId xmlns:a16="http://schemas.microsoft.com/office/drawing/2014/main" id="{5F799EED-2765-4C37-9DBE-415A6DEB492F}"/>
               </a:ext>
             </a:extLst>
           </p:cNvPr>
@@ -12503,7 +10493,7 @@
           <p:cNvPr id="6" name="">
             <a:extLst xmlns:a="http://schemas.openxmlformats.org/drawingml/2006/main">
               <a:ext uri="{FF2B5EF4-FFF2-40B4-BE49-F238E27FC236}">
-                <a16:creationId xmlns:a16="http://schemas.microsoft.com/office/drawing/2014/main" id="{E9CA5251-BAF0-474D-A11A-36F924A4FAA6}"/>
+                <a16:creationId xmlns:a16="http://schemas.microsoft.com/office/drawing/2014/main" id="{B125500A-1268-490E-B18A-6333DBC97E23}"/>
               </a:ext>
             </a:extLst>
           </p:cNvPr>
@@ -12560,7 +10550,7 @@
           <p:cNvPr id="7" name="">
             <a:extLst xmlns:a="http://schemas.openxmlformats.org/drawingml/2006/main">
               <a:ext uri="{FF2B5EF4-FFF2-40B4-BE49-F238E27FC236}">
-                <a16:creationId xmlns:a16="http://schemas.microsoft.com/office/drawing/2014/main" id="{5B760FC5-1254-4CD8-9553-200EC293BB25}"/>
+                <a16:creationId xmlns:a16="http://schemas.microsoft.com/office/drawing/2014/main" id="{9DDA909A-5922-4641-A62D-6A98A1011AC9}"/>
               </a:ext>
             </a:extLst>
           </p:cNvPr>
@@ -12617,7 +10607,7 @@
           <p:cNvPr id="8" name="">
             <a:extLst xmlns:a="http://schemas.openxmlformats.org/drawingml/2006/main">
               <a:ext uri="{FF2B5EF4-FFF2-40B4-BE49-F238E27FC236}">
-                <a16:creationId xmlns:a16="http://schemas.microsoft.com/office/drawing/2014/main" id="{9E460F6F-846E-4416-9899-265F0A37AD34}"/>
+                <a16:creationId xmlns:a16="http://schemas.microsoft.com/office/drawing/2014/main" id="{7E42FF19-AD20-4FF1-9E67-AB68D38BD2F7}"/>
               </a:ext>
             </a:extLst>
           </p:cNvPr>
@@ -12674,7 +10664,7 @@
           <p:cNvPr id="9" name="">
             <a:extLst xmlns:a="http://schemas.openxmlformats.org/drawingml/2006/main">
               <a:ext uri="{FF2B5EF4-FFF2-40B4-BE49-F238E27FC236}">
-                <a16:creationId xmlns:a16="http://schemas.microsoft.com/office/drawing/2014/main" id="{2689AE66-52F4-408C-9A34-E96F15F1ABF8}"/>
+                <a16:creationId xmlns:a16="http://schemas.microsoft.com/office/drawing/2014/main" id="{967EA12B-26C0-49EA-A75B-23EC9841BFD0}"/>
               </a:ext>
             </a:extLst>
           </p:cNvPr>
@@ -12731,7 +10721,7 @@
           <p:cNvPr id="10" name="">
             <a:extLst xmlns:a="http://schemas.openxmlformats.org/drawingml/2006/main">
               <a:ext uri="{FF2B5EF4-FFF2-40B4-BE49-F238E27FC236}">
-                <a16:creationId xmlns:a16="http://schemas.microsoft.com/office/drawing/2014/main" id="{5873B832-0D3A-4626-9F6F-E9A9A80C4150}"/>
+                <a16:creationId xmlns:a16="http://schemas.microsoft.com/office/drawing/2014/main" id="{4571F6A5-0399-47D7-BA3F-313F37812572}"/>
               </a:ext>
             </a:extLst>
           </p:cNvPr>
@@ -12788,7 +10778,7 @@
           <p:cNvPr id="11" name="">
             <a:extLst xmlns:a="http://schemas.openxmlformats.org/drawingml/2006/main">
               <a:ext uri="{FF2B5EF4-FFF2-40B4-BE49-F238E27FC236}">
-                <a16:creationId xmlns:a16="http://schemas.microsoft.com/office/drawing/2014/main" id="{E581E83F-746F-42B5-A202-49C0A23A827F}"/>
+                <a16:creationId xmlns:a16="http://schemas.microsoft.com/office/drawing/2014/main" id="{57DF24C4-9FA1-4537-8E75-A2E08052B6CB}"/>
               </a:ext>
             </a:extLst>
           </p:cNvPr>
@@ -12845,7 +10835,7 @@
           <p:cNvPr id="12" name="">
             <a:extLst xmlns:a="http://schemas.openxmlformats.org/drawingml/2006/main">
               <a:ext uri="{FF2B5EF4-FFF2-40B4-BE49-F238E27FC236}">
-                <a16:creationId xmlns:a16="http://schemas.microsoft.com/office/drawing/2014/main" id="{AA4A47A9-4F7C-45EA-8580-47B2F0F07B5E}"/>
+                <a16:creationId xmlns:a16="http://schemas.microsoft.com/office/drawing/2014/main" id="{8264EFBA-AC6D-4F34-A6D0-50064CC5F798}"/>
               </a:ext>
             </a:extLst>
           </p:cNvPr>
@@ -12900,7 +10890,7 @@
     </p:spTree>
     <p:extLst>
       <p:ext uri="{BB962C8B-B14F-4D97-AF65-F5344CB8AC3E}">
-        <p14:creationId xmlns:p14="http://schemas.microsoft.com/office/powerpoint/2010/main" val="2144018114"/>
+        <p14:creationId xmlns:p14="http://schemas.microsoft.com/office/powerpoint/2010/main" val="1150907792"/>
       </p:ext>
     </p:extLst>
   </p:cSld>
@@ -12931,7 +10921,7 @@
           <p:cNvPr id="11" name="">
             <a:extLst xmlns:a="http://schemas.openxmlformats.org/drawingml/2006/main">
               <a:ext uri="{FF2B5EF4-FFF2-40B4-BE49-F238E27FC236}">
-                <a16:creationId xmlns:a16="http://schemas.microsoft.com/office/drawing/2014/main" id="{25338892-5BAF-4E82-A7FB-F6D40EA480F8}"/>
+                <a16:creationId xmlns:a16="http://schemas.microsoft.com/office/drawing/2014/main" id="{2CC21DB8-F681-4B0F-9667-C86D5D16A358}"/>
               </a:ext>
             </a:extLst>
           </p:cNvPr>
@@ -12961,7 +10951,7 @@
           <p:cNvPr id="2" name="">
             <a:extLst xmlns:a="http://schemas.openxmlformats.org/drawingml/2006/main">
               <a:ext uri="{FF2B5EF4-FFF2-40B4-BE49-F238E27FC236}">
-                <a16:creationId xmlns:a16="http://schemas.microsoft.com/office/drawing/2014/main" id="{ACB22FEF-D54A-4981-A334-8BBF64B72AC0}"/>
+                <a16:creationId xmlns:a16="http://schemas.microsoft.com/office/drawing/2014/main" id="{8F860604-0EE4-47D2-ACA4-D248438F3CB8}"/>
               </a:ext>
             </a:extLst>
           </p:cNvPr>
@@ -13018,7 +11008,7 @@
           <p:cNvPr id="3" name="">
             <a:extLst xmlns:a="http://schemas.openxmlformats.org/drawingml/2006/main">
               <a:ext uri="{FF2B5EF4-FFF2-40B4-BE49-F238E27FC236}">
-                <a16:creationId xmlns:a16="http://schemas.microsoft.com/office/drawing/2014/main" id="{5D296469-4682-4D16-92EC-AB48E25761CF}"/>
+                <a16:creationId xmlns:a16="http://schemas.microsoft.com/office/drawing/2014/main" id="{A40A2D4B-8443-448A-820E-8A16058D9FD9}"/>
               </a:ext>
             </a:extLst>
           </p:cNvPr>
@@ -13075,7 +11065,7 @@
           <p:cNvPr id="4" name="">
             <a:extLst xmlns:a="http://schemas.openxmlformats.org/drawingml/2006/main">
               <a:ext uri="{FF2B5EF4-FFF2-40B4-BE49-F238E27FC236}">
-                <a16:creationId xmlns:a16="http://schemas.microsoft.com/office/drawing/2014/main" id="{07826D1C-9DD9-4DF6-929B-579D60570C5F}"/>
+                <a16:creationId xmlns:a16="http://schemas.microsoft.com/office/drawing/2014/main" id="{A46C8E8C-0B9A-427B-A08C-B69CA22BE416}"/>
               </a:ext>
             </a:extLst>
           </p:cNvPr>
@@ -13132,7 +11122,7 @@
           <p:cNvPr id="5" name="">
             <a:extLst xmlns:a="http://schemas.openxmlformats.org/drawingml/2006/main">
               <a:ext uri="{FF2B5EF4-FFF2-40B4-BE49-F238E27FC236}">
-                <a16:creationId xmlns:a16="http://schemas.microsoft.com/office/drawing/2014/main" id="{8D0A1668-D5C4-42A4-BB5E-56F09CC29FFB}"/>
+                <a16:creationId xmlns:a16="http://schemas.microsoft.com/office/drawing/2014/main" id="{08D94E37-2016-4187-A1E7-125D0926381B}"/>
               </a:ext>
             </a:extLst>
           </p:cNvPr>
@@ -13189,7 +11179,7 @@
           <p:cNvPr id="6" name="">
             <a:extLst xmlns:a="http://schemas.openxmlformats.org/drawingml/2006/main">
               <a:ext uri="{FF2B5EF4-FFF2-40B4-BE49-F238E27FC236}">
-                <a16:creationId xmlns:a16="http://schemas.microsoft.com/office/drawing/2014/main" id="{7BC85980-D08A-4A85-90B0-F832DBE46159}"/>
+                <a16:creationId xmlns:a16="http://schemas.microsoft.com/office/drawing/2014/main" id="{EF434162-C2C6-4DCE-87E2-D394BA377EF3}"/>
               </a:ext>
             </a:extLst>
           </p:cNvPr>
@@ -13246,7 +11236,7 @@
           <p:cNvPr id="7" name="">
             <a:extLst xmlns:a="http://schemas.openxmlformats.org/drawingml/2006/main">
               <a:ext uri="{FF2B5EF4-FFF2-40B4-BE49-F238E27FC236}">
-                <a16:creationId xmlns:a16="http://schemas.microsoft.com/office/drawing/2014/main" id="{AE9972E5-F731-49B1-A7B4-4BD75EBAAFF6}"/>
+                <a16:creationId xmlns:a16="http://schemas.microsoft.com/office/drawing/2014/main" id="{A3AD84F2-C3EF-4D95-B48F-051390A40F96}"/>
               </a:ext>
             </a:extLst>
           </p:cNvPr>
@@ -13303,7 +11293,7 @@
           <p:cNvPr id="8" name="">
             <a:extLst xmlns:a="http://schemas.openxmlformats.org/drawingml/2006/main">
               <a:ext uri="{FF2B5EF4-FFF2-40B4-BE49-F238E27FC236}">
-                <a16:creationId xmlns:a16="http://schemas.microsoft.com/office/drawing/2014/main" id="{D8324C30-F4F4-4938-AFC1-8856A9E95F00}"/>
+                <a16:creationId xmlns:a16="http://schemas.microsoft.com/office/drawing/2014/main" id="{22AE63EA-23F0-4260-9E01-A7DBAB8026DB}"/>
               </a:ext>
             </a:extLst>
           </p:cNvPr>
@@ -13360,7 +11350,7 @@
           <p:cNvPr id="9" name="">
             <a:extLst xmlns:a="http://schemas.openxmlformats.org/drawingml/2006/main">
               <a:ext uri="{FF2B5EF4-FFF2-40B4-BE49-F238E27FC236}">
-                <a16:creationId xmlns:a16="http://schemas.microsoft.com/office/drawing/2014/main" id="{7740165F-664D-4483-9E6E-2392DE4C7E18}"/>
+                <a16:creationId xmlns:a16="http://schemas.microsoft.com/office/drawing/2014/main" id="{283F3D17-CF8D-4E31-8298-D5F61ED79360}"/>
               </a:ext>
             </a:extLst>
           </p:cNvPr>
@@ -13417,7 +11407,7 @@
           <p:cNvPr id="10" name="">
             <a:extLst xmlns:a="http://schemas.openxmlformats.org/drawingml/2006/main">
               <a:ext uri="{FF2B5EF4-FFF2-40B4-BE49-F238E27FC236}">
-                <a16:creationId xmlns:a16="http://schemas.microsoft.com/office/drawing/2014/main" id="{9E38B343-A75E-454F-B7FF-16EB3FA68C58}"/>
+                <a16:creationId xmlns:a16="http://schemas.microsoft.com/office/drawing/2014/main" id="{6C2CF3CD-5C3E-48A3-9D9E-211D7B2DEACE}"/>
               </a:ext>
             </a:extLst>
           </p:cNvPr>
@@ -13472,7 +11462,7 @@
     </p:spTree>
     <p:extLst>
       <p:ext uri="{BB962C8B-B14F-4D97-AF65-F5344CB8AC3E}">
-        <p14:creationId xmlns:p14="http://schemas.microsoft.com/office/powerpoint/2010/main" val="1848387103"/>
+        <p14:creationId xmlns:p14="http://schemas.microsoft.com/office/powerpoint/2010/main" val="90455761"/>
       </p:ext>
     </p:extLst>
   </p:cSld>
@@ -13503,7 +11493,7 @@
           <p:cNvPr id="13" name="">
             <a:extLst xmlns:a="http://schemas.openxmlformats.org/drawingml/2006/main">
               <a:ext uri="{FF2B5EF4-FFF2-40B4-BE49-F238E27FC236}">
-                <a16:creationId xmlns:a16="http://schemas.microsoft.com/office/drawing/2014/main" id="{C0A01177-D44F-47B9-8AF0-0F06D6CA5C83}"/>
+                <a16:creationId xmlns:a16="http://schemas.microsoft.com/office/drawing/2014/main" id="{A4DEC4C1-B706-41C4-9B4C-31CD4723AC27}"/>
               </a:ext>
             </a:extLst>
           </p:cNvPr>
@@ -13533,7 +11523,7 @@
           <p:cNvPr id="2" name="">
             <a:extLst xmlns:a="http://schemas.openxmlformats.org/drawingml/2006/main">
               <a:ext uri="{FF2B5EF4-FFF2-40B4-BE49-F238E27FC236}">
-                <a16:creationId xmlns:a16="http://schemas.microsoft.com/office/drawing/2014/main" id="{B9CA45F3-9D40-4778-9ADC-36C3771FE4A7}"/>
+                <a16:creationId xmlns:a16="http://schemas.microsoft.com/office/drawing/2014/main" id="{5DA44707-1A5E-4AC7-A751-84DABFBD07D3}"/>
               </a:ext>
             </a:extLst>
           </p:cNvPr>
@@ -13590,7 +11580,7 @@
           <p:cNvPr id="3" name="">
             <a:extLst xmlns:a="http://schemas.openxmlformats.org/drawingml/2006/main">
               <a:ext uri="{FF2B5EF4-FFF2-40B4-BE49-F238E27FC236}">
-                <a16:creationId xmlns:a16="http://schemas.microsoft.com/office/drawing/2014/main" id="{5C8EDB05-CE16-4DFE-AC01-D7C91B413AF3}"/>
+                <a16:creationId xmlns:a16="http://schemas.microsoft.com/office/drawing/2014/main" id="{1E4BD0A0-4916-4EDD-9E38-B456126CF91A}"/>
               </a:ext>
             </a:extLst>
           </p:cNvPr>
@@ -13647,7 +11637,7 @@
           <p:cNvPr id="4" name="">
             <a:extLst xmlns:a="http://schemas.openxmlformats.org/drawingml/2006/main">
               <a:ext uri="{FF2B5EF4-FFF2-40B4-BE49-F238E27FC236}">
-                <a16:creationId xmlns:a16="http://schemas.microsoft.com/office/drawing/2014/main" id="{79585DE1-5153-4C53-8B6A-C6AAD6991C8C}"/>
+                <a16:creationId xmlns:a16="http://schemas.microsoft.com/office/drawing/2014/main" id="{D6E21EB8-DFA6-4425-BE8D-C2C9EC88DA08}"/>
               </a:ext>
             </a:extLst>
           </p:cNvPr>
@@ -13704,7 +11694,7 @@
           <p:cNvPr id="5" name="">
             <a:extLst xmlns:a="http://schemas.openxmlformats.org/drawingml/2006/main">
               <a:ext uri="{FF2B5EF4-FFF2-40B4-BE49-F238E27FC236}">
-                <a16:creationId xmlns:a16="http://schemas.microsoft.com/office/drawing/2014/main" id="{4E528672-3295-4C8F-BFA1-0BA1A4454766}"/>
+                <a16:creationId xmlns:a16="http://schemas.microsoft.com/office/drawing/2014/main" id="{3D754A03-C0C5-4138-9D75-66ABD4623F52}"/>
               </a:ext>
             </a:extLst>
           </p:cNvPr>
@@ -13761,7 +11751,7 @@
           <p:cNvPr id="6" name="">
             <a:extLst xmlns:a="http://schemas.openxmlformats.org/drawingml/2006/main">
               <a:ext uri="{FF2B5EF4-FFF2-40B4-BE49-F238E27FC236}">
-                <a16:creationId xmlns:a16="http://schemas.microsoft.com/office/drawing/2014/main" id="{D45EFD90-8A34-4E26-8C2F-9B441594FF71}"/>
+                <a16:creationId xmlns:a16="http://schemas.microsoft.com/office/drawing/2014/main" id="{D6D2146D-B5DC-4015-B0CF-BB979223C740}"/>
               </a:ext>
             </a:extLst>
           </p:cNvPr>
@@ -13818,7 +11808,7 @@
           <p:cNvPr id="7" name="">
             <a:extLst xmlns:a="http://schemas.openxmlformats.org/drawingml/2006/main">
               <a:ext uri="{FF2B5EF4-FFF2-40B4-BE49-F238E27FC236}">
-                <a16:creationId xmlns:a16="http://schemas.microsoft.com/office/drawing/2014/main" id="{CC730C74-6209-4313-B4B3-132E7DCA30A3}"/>
+                <a16:creationId xmlns:a16="http://schemas.microsoft.com/office/drawing/2014/main" id="{7AE95B90-A8AF-4000-B81E-3873DBD7DA26}"/>
               </a:ext>
             </a:extLst>
           </p:cNvPr>
@@ -13875,7 +11865,7 @@
           <p:cNvPr id="8" name="">
             <a:extLst xmlns:a="http://schemas.openxmlformats.org/drawingml/2006/main">
               <a:ext uri="{FF2B5EF4-FFF2-40B4-BE49-F238E27FC236}">
-                <a16:creationId xmlns:a16="http://schemas.microsoft.com/office/drawing/2014/main" id="{84823F6A-A918-436B-9805-5E63DB78ADF6}"/>
+                <a16:creationId xmlns:a16="http://schemas.microsoft.com/office/drawing/2014/main" id="{8D96CE17-D3C5-451B-86C2-FA6DFCCC13F7}"/>
               </a:ext>
             </a:extLst>
           </p:cNvPr>
@@ -13932,7 +11922,7 @@
           <p:cNvPr id="9" name="">
             <a:extLst xmlns:a="http://schemas.openxmlformats.org/drawingml/2006/main">
               <a:ext uri="{FF2B5EF4-FFF2-40B4-BE49-F238E27FC236}">
-                <a16:creationId xmlns:a16="http://schemas.microsoft.com/office/drawing/2014/main" id="{715AF2A9-829A-4E73-A87E-C6A60AB8FD60}"/>
+                <a16:creationId xmlns:a16="http://schemas.microsoft.com/office/drawing/2014/main" id="{9B8F7B41-7E14-49C7-8A8D-582124049EEE}"/>
               </a:ext>
             </a:extLst>
           </p:cNvPr>
@@ -13989,7 +11979,7 @@
           <p:cNvPr id="10" name="">
             <a:extLst xmlns:a="http://schemas.openxmlformats.org/drawingml/2006/main">
               <a:ext uri="{FF2B5EF4-FFF2-40B4-BE49-F238E27FC236}">
-                <a16:creationId xmlns:a16="http://schemas.microsoft.com/office/drawing/2014/main" id="{E9FAE01B-28AB-42F3-AA57-2FE286725D38}"/>
+                <a16:creationId xmlns:a16="http://schemas.microsoft.com/office/drawing/2014/main" id="{93FEEB13-6A36-4F59-9784-122DA87C8E54}"/>
               </a:ext>
             </a:extLst>
           </p:cNvPr>
@@ -14046,7 +12036,7 @@
           <p:cNvPr id="11" name="">
             <a:extLst xmlns:a="http://schemas.openxmlformats.org/drawingml/2006/main">
               <a:ext uri="{FF2B5EF4-FFF2-40B4-BE49-F238E27FC236}">
-                <a16:creationId xmlns:a16="http://schemas.microsoft.com/office/drawing/2014/main" id="{6825102C-CE25-48F8-9C5C-C1F0C5990E39}"/>
+                <a16:creationId xmlns:a16="http://schemas.microsoft.com/office/drawing/2014/main" id="{3D23BDC2-BEC1-42DF-9E3E-FB61123C18FB}"/>
               </a:ext>
             </a:extLst>
           </p:cNvPr>
@@ -14103,7 +12093,7 @@
           <p:cNvPr id="12" name="">
             <a:extLst xmlns:a="http://schemas.openxmlformats.org/drawingml/2006/main">
               <a:ext uri="{FF2B5EF4-FFF2-40B4-BE49-F238E27FC236}">
-                <a16:creationId xmlns:a16="http://schemas.microsoft.com/office/drawing/2014/main" id="{630B9E93-9186-4CF8-BEAF-1558EA137B03}"/>
+                <a16:creationId xmlns:a16="http://schemas.microsoft.com/office/drawing/2014/main" id="{8F846BFE-B68F-4EDB-9AA0-731FEA6ACF85}"/>
               </a:ext>
             </a:extLst>
           </p:cNvPr>
@@ -14158,7 +12148,7 @@
     </p:spTree>
     <p:extLst>
       <p:ext uri="{BB962C8B-B14F-4D97-AF65-F5344CB8AC3E}">
-        <p14:creationId xmlns:p14="http://schemas.microsoft.com/office/powerpoint/2010/main" val="1534682004"/>
+        <p14:creationId xmlns:p14="http://schemas.microsoft.com/office/powerpoint/2010/main" val="1643223871"/>
       </p:ext>
     </p:extLst>
   </p:cSld>
@@ -14189,7 +12179,7 @@
           <p:cNvPr id="11" name="">
             <a:extLst xmlns:a="http://schemas.openxmlformats.org/drawingml/2006/main">
               <a:ext uri="{FF2B5EF4-FFF2-40B4-BE49-F238E27FC236}">
-                <a16:creationId xmlns:a16="http://schemas.microsoft.com/office/drawing/2014/main" id="{DF782B00-064D-405A-A9F7-47491D9DCFEB}"/>
+                <a16:creationId xmlns:a16="http://schemas.microsoft.com/office/drawing/2014/main" id="{47D4178B-49D9-47CD-B899-2BDD03A1E1B1}"/>
               </a:ext>
             </a:extLst>
           </p:cNvPr>
@@ -14219,7 +12209,7 @@
           <p:cNvPr id="2" name="">
             <a:extLst xmlns:a="http://schemas.openxmlformats.org/drawingml/2006/main">
               <a:ext uri="{FF2B5EF4-FFF2-40B4-BE49-F238E27FC236}">
-                <a16:creationId xmlns:a16="http://schemas.microsoft.com/office/drawing/2014/main" id="{0C399EF1-CD74-4215-ABFB-331099F3B16A}"/>
+                <a16:creationId xmlns:a16="http://schemas.microsoft.com/office/drawing/2014/main" id="{DCC90C2C-E071-4559-9CCE-7A829369945B}"/>
               </a:ext>
             </a:extLst>
           </p:cNvPr>
@@ -14276,7 +12266,7 @@
           <p:cNvPr id="3" name="">
             <a:extLst xmlns:a="http://schemas.openxmlformats.org/drawingml/2006/main">
               <a:ext uri="{FF2B5EF4-FFF2-40B4-BE49-F238E27FC236}">
-                <a16:creationId xmlns:a16="http://schemas.microsoft.com/office/drawing/2014/main" id="{E2E43997-4B51-478B-9B0F-7A437C9E738F}"/>
+                <a16:creationId xmlns:a16="http://schemas.microsoft.com/office/drawing/2014/main" id="{D70D4913-B300-4402-883A-32EF9E3374FD}"/>
               </a:ext>
             </a:extLst>
           </p:cNvPr>
@@ -14333,7 +12323,7 @@
           <p:cNvPr id="4" name="">
             <a:extLst xmlns:a="http://schemas.openxmlformats.org/drawingml/2006/main">
               <a:ext uri="{FF2B5EF4-FFF2-40B4-BE49-F238E27FC236}">
-                <a16:creationId xmlns:a16="http://schemas.microsoft.com/office/drawing/2014/main" id="{84AB6689-F0BD-4EBB-BF2D-C2762F49A626}"/>
+                <a16:creationId xmlns:a16="http://schemas.microsoft.com/office/drawing/2014/main" id="{DB7D8395-7429-4B47-96D9-FBA24ECFD069}"/>
               </a:ext>
             </a:extLst>
           </p:cNvPr>
@@ -14390,7 +12380,7 @@
           <p:cNvPr id="5" name="">
             <a:extLst xmlns:a="http://schemas.openxmlformats.org/drawingml/2006/main">
               <a:ext uri="{FF2B5EF4-FFF2-40B4-BE49-F238E27FC236}">
-                <a16:creationId xmlns:a16="http://schemas.microsoft.com/office/drawing/2014/main" id="{E7CF3F52-1E35-46F7-8779-03997180E15D}"/>
+                <a16:creationId xmlns:a16="http://schemas.microsoft.com/office/drawing/2014/main" id="{C886F19D-9194-4208-8030-1D519C3D1F28}"/>
               </a:ext>
             </a:extLst>
           </p:cNvPr>
@@ -14447,7 +12437,7 @@
           <p:cNvPr id="6" name="">
             <a:extLst xmlns:a="http://schemas.openxmlformats.org/drawingml/2006/main">
               <a:ext uri="{FF2B5EF4-FFF2-40B4-BE49-F238E27FC236}">
-                <a16:creationId xmlns:a16="http://schemas.microsoft.com/office/drawing/2014/main" id="{9BD7640A-E39E-4F98-A1FB-90591439D165}"/>
+                <a16:creationId xmlns:a16="http://schemas.microsoft.com/office/drawing/2014/main" id="{24587901-1BE6-4DCD-B51F-6FE1DB8CC63D}"/>
               </a:ext>
             </a:extLst>
           </p:cNvPr>
@@ -14504,7 +12494,7 @@
           <p:cNvPr id="7" name="">
             <a:extLst xmlns:a="http://schemas.openxmlformats.org/drawingml/2006/main">
               <a:ext uri="{FF2B5EF4-FFF2-40B4-BE49-F238E27FC236}">
-                <a16:creationId xmlns:a16="http://schemas.microsoft.com/office/drawing/2014/main" id="{5C750DBA-6AF9-45B7-BC0D-9D706A787C2B}"/>
+                <a16:creationId xmlns:a16="http://schemas.microsoft.com/office/drawing/2014/main" id="{2F07B5A9-99F1-43F2-854F-CDD473712715}"/>
               </a:ext>
             </a:extLst>
           </p:cNvPr>
@@ -14561,7 +12551,7 @@
           <p:cNvPr id="8" name="">
             <a:extLst xmlns:a="http://schemas.openxmlformats.org/drawingml/2006/main">
               <a:ext uri="{FF2B5EF4-FFF2-40B4-BE49-F238E27FC236}">
-                <a16:creationId xmlns:a16="http://schemas.microsoft.com/office/drawing/2014/main" id="{527C615D-CAAF-44DD-BE7B-1946DB1C6A35}"/>
+                <a16:creationId xmlns:a16="http://schemas.microsoft.com/office/drawing/2014/main" id="{DF7939C9-F2B8-4EED-9F3B-7561A61017C4}"/>
               </a:ext>
             </a:extLst>
           </p:cNvPr>
@@ -14618,7 +12608,7 @@
           <p:cNvPr id="9" name="">
             <a:extLst xmlns:a="http://schemas.openxmlformats.org/drawingml/2006/main">
               <a:ext uri="{FF2B5EF4-FFF2-40B4-BE49-F238E27FC236}">
-                <a16:creationId xmlns:a16="http://schemas.microsoft.com/office/drawing/2014/main" id="{BB39E2C9-0F4E-407B-841F-59979F07F97E}"/>
+                <a16:creationId xmlns:a16="http://schemas.microsoft.com/office/drawing/2014/main" id="{78CE347A-9BB5-4B2A-94D8-1E83A7ECD386}"/>
               </a:ext>
             </a:extLst>
           </p:cNvPr>
@@ -14675,7 +12665,7 @@
           <p:cNvPr id="10" name="">
             <a:extLst xmlns:a="http://schemas.openxmlformats.org/drawingml/2006/main">
               <a:ext uri="{FF2B5EF4-FFF2-40B4-BE49-F238E27FC236}">
-                <a16:creationId xmlns:a16="http://schemas.microsoft.com/office/drawing/2014/main" id="{91E5551B-0634-4EE4-BA08-5CDF81AB1CCA}"/>
+                <a16:creationId xmlns:a16="http://schemas.microsoft.com/office/drawing/2014/main" id="{A6AFB6BE-49CD-400F-B01A-56F95CF54E97}"/>
               </a:ext>
             </a:extLst>
           </p:cNvPr>
@@ -14730,7 +12720,7 @@
     </p:spTree>
     <p:extLst>
       <p:ext uri="{BB962C8B-B14F-4D97-AF65-F5344CB8AC3E}">
-        <p14:creationId xmlns:p14="http://schemas.microsoft.com/office/powerpoint/2010/main" val="94375521"/>
+        <p14:creationId xmlns:p14="http://schemas.microsoft.com/office/powerpoint/2010/main" val="893919139"/>
       </p:ext>
     </p:extLst>
   </p:cSld>
@@ -14761,7 +12751,7 @@
           <p:cNvPr id="16" name="">
             <a:extLst xmlns:a="http://schemas.openxmlformats.org/drawingml/2006/main">
               <a:ext uri="{FF2B5EF4-FFF2-40B4-BE49-F238E27FC236}">
-                <a16:creationId xmlns:a16="http://schemas.microsoft.com/office/drawing/2014/main" id="{15831AC5-1384-4901-9A4C-5BAA6149F09F}"/>
+                <a16:creationId xmlns:a16="http://schemas.microsoft.com/office/drawing/2014/main" id="{DFD1A2D2-9D99-44FF-909A-378C9D1115AB}"/>
               </a:ext>
             </a:extLst>
           </p:cNvPr>
@@ -14791,7 +12781,7 @@
           <p:cNvPr id="2" name="">
             <a:extLst xmlns:a="http://schemas.openxmlformats.org/drawingml/2006/main">
               <a:ext uri="{FF2B5EF4-FFF2-40B4-BE49-F238E27FC236}">
-                <a16:creationId xmlns:a16="http://schemas.microsoft.com/office/drawing/2014/main" id="{2E5286E4-37EE-4E90-923C-EF386A600574}"/>
+                <a16:creationId xmlns:a16="http://schemas.microsoft.com/office/drawing/2014/main" id="{B59E9AF9-B357-4007-843A-B6DD0A9DAA1D}"/>
               </a:ext>
             </a:extLst>
           </p:cNvPr>
@@ -14848,7 +12838,7 @@
           <p:cNvPr id="3" name="">
             <a:extLst xmlns:a="http://schemas.openxmlformats.org/drawingml/2006/main">
               <a:ext uri="{FF2B5EF4-FFF2-40B4-BE49-F238E27FC236}">
-                <a16:creationId xmlns:a16="http://schemas.microsoft.com/office/drawing/2014/main" id="{4531C529-73D5-4D85-96E6-CC6CCBDE8657}"/>
+                <a16:creationId xmlns:a16="http://schemas.microsoft.com/office/drawing/2014/main" id="{277C2B9A-172C-40FC-991C-041B8157FF83}"/>
               </a:ext>
             </a:extLst>
           </p:cNvPr>
@@ -14905,7 +12895,7 @@
           <p:cNvPr id="4" name="">
             <a:extLst xmlns:a="http://schemas.openxmlformats.org/drawingml/2006/main">
               <a:ext uri="{FF2B5EF4-FFF2-40B4-BE49-F238E27FC236}">
-                <a16:creationId xmlns:a16="http://schemas.microsoft.com/office/drawing/2014/main" id="{5DC8E93A-4EAD-42DB-9ED2-599645FA9388}"/>
+                <a16:creationId xmlns:a16="http://schemas.microsoft.com/office/drawing/2014/main" id="{5980509A-E0CA-4479-9E4F-DCC8AB0C8083}"/>
               </a:ext>
             </a:extLst>
           </p:cNvPr>
@@ -14962,7 +12952,7 @@
           <p:cNvPr id="5" name="">
             <a:extLst xmlns:a="http://schemas.openxmlformats.org/drawingml/2006/main">
               <a:ext uri="{FF2B5EF4-FFF2-40B4-BE49-F238E27FC236}">
-                <a16:creationId xmlns:a16="http://schemas.microsoft.com/office/drawing/2014/main" id="{670F33B2-09CD-4D61-80C0-7AC971132BB5}"/>
+                <a16:creationId xmlns:a16="http://schemas.microsoft.com/office/drawing/2014/main" id="{2319E153-A1EB-4E45-B3CB-D9251CB5180F}"/>
               </a:ext>
             </a:extLst>
           </p:cNvPr>
@@ -15019,7 +13009,7 @@
           <p:cNvPr id="6" name="">
             <a:extLst xmlns:a="http://schemas.openxmlformats.org/drawingml/2006/main">
               <a:ext uri="{FF2B5EF4-FFF2-40B4-BE49-F238E27FC236}">
-                <a16:creationId xmlns:a16="http://schemas.microsoft.com/office/drawing/2014/main" id="{58B20ACE-D3A2-4DDB-A690-852F0B66E492}"/>
+                <a16:creationId xmlns:a16="http://schemas.microsoft.com/office/drawing/2014/main" id="{98E44483-3872-4337-A55C-9F6B7B6CA612}"/>
               </a:ext>
             </a:extLst>
           </p:cNvPr>
@@ -15076,7 +13066,7 @@
           <p:cNvPr id="7" name="">
             <a:extLst xmlns:a="http://schemas.openxmlformats.org/drawingml/2006/main">
               <a:ext uri="{FF2B5EF4-FFF2-40B4-BE49-F238E27FC236}">
-                <a16:creationId xmlns:a16="http://schemas.microsoft.com/office/drawing/2014/main" id="{C242AB3B-556A-48D8-A492-B510D0199983}"/>
+                <a16:creationId xmlns:a16="http://schemas.microsoft.com/office/drawing/2014/main" id="{7790C0D7-8E7D-47E5-BA88-91E00EF0F8CF}"/>
               </a:ext>
             </a:extLst>
           </p:cNvPr>
@@ -15133,7 +13123,7 @@
           <p:cNvPr id="8" name="">
             <a:extLst xmlns:a="http://schemas.openxmlformats.org/drawingml/2006/main">
               <a:ext uri="{FF2B5EF4-FFF2-40B4-BE49-F238E27FC236}">
-                <a16:creationId xmlns:a16="http://schemas.microsoft.com/office/drawing/2014/main" id="{04D8C3A1-D48E-450F-9C7F-4920683BF4AA}"/>
+                <a16:creationId xmlns:a16="http://schemas.microsoft.com/office/drawing/2014/main" id="{59614F6A-216D-4AB0-A729-7C2A4AD29160}"/>
               </a:ext>
             </a:extLst>
           </p:cNvPr>
@@ -15190,7 +13180,7 @@
           <p:cNvPr id="9" name="">
             <a:extLst xmlns:a="http://schemas.openxmlformats.org/drawingml/2006/main">
               <a:ext uri="{FF2B5EF4-FFF2-40B4-BE49-F238E27FC236}">
-                <a16:creationId xmlns:a16="http://schemas.microsoft.com/office/drawing/2014/main" id="{162FF194-1AC1-49F4-A938-0C96D49A24E2}"/>
+                <a16:creationId xmlns:a16="http://schemas.microsoft.com/office/drawing/2014/main" id="{1D15D7D5-2108-456C-B49F-126CEFA9C5DE}"/>
               </a:ext>
             </a:extLst>
           </p:cNvPr>
@@ -15247,7 +13237,7 @@
           <p:cNvPr id="10" name="">
             <a:extLst xmlns:a="http://schemas.openxmlformats.org/drawingml/2006/main">
               <a:ext uri="{FF2B5EF4-FFF2-40B4-BE49-F238E27FC236}">
-                <a16:creationId xmlns:a16="http://schemas.microsoft.com/office/drawing/2014/main" id="{26AB445F-7E96-4D2B-8F72-53DEB17CAFCC}"/>
+                <a16:creationId xmlns:a16="http://schemas.microsoft.com/office/drawing/2014/main" id="{986C5765-ECBC-4B9F-89AC-87EDE947D27F}"/>
               </a:ext>
             </a:extLst>
           </p:cNvPr>
@@ -15304,7 +13294,7 @@
           <p:cNvPr id="11" name="">
             <a:extLst xmlns:a="http://schemas.openxmlformats.org/drawingml/2006/main">
               <a:ext uri="{FF2B5EF4-FFF2-40B4-BE49-F238E27FC236}">
-                <a16:creationId xmlns:a16="http://schemas.microsoft.com/office/drawing/2014/main" id="{B7DB14B7-0D90-49CA-AD26-9CA118D85FC9}"/>
+                <a16:creationId xmlns:a16="http://schemas.microsoft.com/office/drawing/2014/main" id="{61C80DBF-0E95-449D-B777-109F87D40BE6}"/>
               </a:ext>
             </a:extLst>
           </p:cNvPr>
@@ -15361,7 +13351,7 @@
           <p:cNvPr id="12" name="">
             <a:extLst xmlns:a="http://schemas.openxmlformats.org/drawingml/2006/main">
               <a:ext uri="{FF2B5EF4-FFF2-40B4-BE49-F238E27FC236}">
-                <a16:creationId xmlns:a16="http://schemas.microsoft.com/office/drawing/2014/main" id="{0E74E7B5-9EC2-476A-8BBE-7E114D1A0392}"/>
+                <a16:creationId xmlns:a16="http://schemas.microsoft.com/office/drawing/2014/main" id="{B662EE06-F19B-4666-8B35-A40DF06E2C85}"/>
               </a:ext>
             </a:extLst>
           </p:cNvPr>
@@ -15391,7 +13381,7 @@
           <p:cNvPr id="13" name="">
             <a:extLst xmlns:a="http://schemas.openxmlformats.org/drawingml/2006/main">
               <a:ext uri="{FF2B5EF4-FFF2-40B4-BE49-F238E27FC236}">
-                <a16:creationId xmlns:a16="http://schemas.microsoft.com/office/drawing/2014/main" id="{A981D402-644F-4102-9FA4-03A64D0761F3}"/>
+                <a16:creationId xmlns:a16="http://schemas.microsoft.com/office/drawing/2014/main" id="{63AAC255-46EC-4AE6-8737-D9CC3423FCC6}"/>
               </a:ext>
             </a:extLst>
           </p:cNvPr>
@@ -15437,7 +13427,7 @@
                 <a:latin typeface="Calibri"/>
                 <a:ea typeface="Calibri"/>
                 <a:cs typeface="Calibri"/>
-                <a:hlinkClick xmlns:r="http://schemas.openxmlformats.org/officeDocument/2006/relationships" r:id="R503b4b8b03524355"/>
+                <a:hlinkClick xmlns:r="http://schemas.openxmlformats.org/officeDocument/2006/relationships" r:id="R04f174fb5cc34af6"/>
               </a:rPr>
               <a:t>Open ML_PROJECT assignment form</a:t>
             </a:r>
@@ -15449,7 +13439,7 @@
           <p:cNvPr id="14" name="">
             <a:extLst xmlns:a="http://schemas.openxmlformats.org/drawingml/2006/main">
               <a:ext uri="{FF2B5EF4-FFF2-40B4-BE49-F238E27FC236}">
-                <a16:creationId xmlns:a16="http://schemas.microsoft.com/office/drawing/2014/main" id="{6F9089C4-8B81-4792-A87C-FA49787D37F3}"/>
+                <a16:creationId xmlns:a16="http://schemas.microsoft.com/office/drawing/2014/main" id="{12CCCCA5-E238-462E-986C-184F3DD45CF3}"/>
               </a:ext>
             </a:extLst>
           </p:cNvPr>
@@ -15506,7 +13496,7 @@
           <p:cNvPr id="15" name="">
             <a:extLst xmlns:a="http://schemas.openxmlformats.org/drawingml/2006/main">
               <a:ext uri="{FF2B5EF4-FFF2-40B4-BE49-F238E27FC236}">
-                <a16:creationId xmlns:a16="http://schemas.microsoft.com/office/drawing/2014/main" id="{C3AA89F2-33A4-41B1-BC91-DCEAC00EFADD}"/>
+                <a16:creationId xmlns:a16="http://schemas.microsoft.com/office/drawing/2014/main" id="{4A1CFFAC-4892-4E07-BCA8-453DE2D95D29}"/>
               </a:ext>
             </a:extLst>
           </p:cNvPr>
@@ -15561,7 +13551,7 @@
     </p:spTree>
     <p:extLst>
       <p:ext uri="{BB962C8B-B14F-4D97-AF65-F5344CB8AC3E}">
-        <p14:creationId xmlns:p14="http://schemas.microsoft.com/office/powerpoint/2010/main" val="748668900"/>
+        <p14:creationId xmlns:p14="http://schemas.microsoft.com/office/powerpoint/2010/main" val="2092169551"/>
       </p:ext>
     </p:extLst>
   </p:cSld>
@@ -15592,7 +13582,7 @@
           <p:cNvPr id="9" name="">
             <a:extLst xmlns:a="http://schemas.openxmlformats.org/drawingml/2006/main">
               <a:ext uri="{FF2B5EF4-FFF2-40B4-BE49-F238E27FC236}">
-                <a16:creationId xmlns:a16="http://schemas.microsoft.com/office/drawing/2014/main" id="{0066E921-E673-4D00-A441-915A3D976869}"/>
+                <a16:creationId xmlns:a16="http://schemas.microsoft.com/office/drawing/2014/main" id="{FF90D211-A961-4F25-8177-190EDA2346EA}"/>
               </a:ext>
             </a:extLst>
           </p:cNvPr>
@@ -15622,7 +13612,7 @@
           <p:cNvPr id="2" name="">
             <a:extLst xmlns:a="http://schemas.openxmlformats.org/drawingml/2006/main">
               <a:ext uri="{FF2B5EF4-FFF2-40B4-BE49-F238E27FC236}">
-                <a16:creationId xmlns:a16="http://schemas.microsoft.com/office/drawing/2014/main" id="{9CD856E2-307F-4C99-9FA3-8B765BB66ED0}"/>
+                <a16:creationId xmlns:a16="http://schemas.microsoft.com/office/drawing/2014/main" id="{6F545173-E654-44FA-A470-0A9396FE50E9}"/>
               </a:ext>
             </a:extLst>
           </p:cNvPr>
@@ -15679,7 +13669,7 @@
           <p:cNvPr id="3" name="">
             <a:extLst xmlns:a="http://schemas.openxmlformats.org/drawingml/2006/main">
               <a:ext uri="{FF2B5EF4-FFF2-40B4-BE49-F238E27FC236}">
-                <a16:creationId xmlns:a16="http://schemas.microsoft.com/office/drawing/2014/main" id="{06099E75-F6A5-42A6-B1DE-BB2F3F502AC4}"/>
+                <a16:creationId xmlns:a16="http://schemas.microsoft.com/office/drawing/2014/main" id="{19A0DA6B-2BEC-4337-99E0-F73EB1FB9BA2}"/>
               </a:ext>
             </a:extLst>
           </p:cNvPr>
@@ -15736,7 +13726,7 @@
           <p:cNvPr id="4" name="">
             <a:extLst xmlns:a="http://schemas.openxmlformats.org/drawingml/2006/main">
               <a:ext uri="{FF2B5EF4-FFF2-40B4-BE49-F238E27FC236}">
-                <a16:creationId xmlns:a16="http://schemas.microsoft.com/office/drawing/2014/main" id="{CC9518E9-8E52-4A51-BA0C-DEF7FD7FB014}"/>
+                <a16:creationId xmlns:a16="http://schemas.microsoft.com/office/drawing/2014/main" id="{258D1A2B-B638-4EA8-B763-FE431E0709AB}"/>
               </a:ext>
             </a:extLst>
           </p:cNvPr>
@@ -15793,7 +13783,7 @@
           <p:cNvPr id="5" name="">
             <a:extLst xmlns:a="http://schemas.openxmlformats.org/drawingml/2006/main">
               <a:ext uri="{FF2B5EF4-FFF2-40B4-BE49-F238E27FC236}">
-                <a16:creationId xmlns:a16="http://schemas.microsoft.com/office/drawing/2014/main" id="{6FC9A711-976F-4374-AE88-EE8B3CA0460D}"/>
+                <a16:creationId xmlns:a16="http://schemas.microsoft.com/office/drawing/2014/main" id="{59BC1BAB-F6C2-4617-8347-DF6D27BBDBD8}"/>
               </a:ext>
             </a:extLst>
           </p:cNvPr>
@@ -15850,7 +13840,7 @@
           <p:cNvPr id="6" name="">
             <a:extLst xmlns:a="http://schemas.openxmlformats.org/drawingml/2006/main">
               <a:ext uri="{FF2B5EF4-FFF2-40B4-BE49-F238E27FC236}">
-                <a16:creationId xmlns:a16="http://schemas.microsoft.com/office/drawing/2014/main" id="{D003BC72-9F01-464D-B07B-D922C8561A33}"/>
+                <a16:creationId xmlns:a16="http://schemas.microsoft.com/office/drawing/2014/main" id="{8C95E955-AACF-460F-B463-02F28E9D38CB}"/>
               </a:ext>
             </a:extLst>
           </p:cNvPr>
@@ -15907,7 +13897,7 @@
           <p:cNvPr id="7" name="">
             <a:extLst xmlns:a="http://schemas.openxmlformats.org/drawingml/2006/main">
               <a:ext uri="{FF2B5EF4-FFF2-40B4-BE49-F238E27FC236}">
-                <a16:creationId xmlns:a16="http://schemas.microsoft.com/office/drawing/2014/main" id="{2C045565-BF4A-4834-9376-85F9E09FB76B}"/>
+                <a16:creationId xmlns:a16="http://schemas.microsoft.com/office/drawing/2014/main" id="{A3DC8725-46F7-4A78-853F-16DA5D70240B}"/>
               </a:ext>
             </a:extLst>
           </p:cNvPr>
@@ -15964,7 +13954,7 @@
           <p:cNvPr id="8" name="">
             <a:extLst xmlns:a="http://schemas.openxmlformats.org/drawingml/2006/main">
               <a:ext uri="{FF2B5EF4-FFF2-40B4-BE49-F238E27FC236}">
-                <a16:creationId xmlns:a16="http://schemas.microsoft.com/office/drawing/2014/main" id="{DAA12034-269E-4EF1-B1A3-467A6EDF1134}"/>
+                <a16:creationId xmlns:a16="http://schemas.microsoft.com/office/drawing/2014/main" id="{AD32FE21-D47E-46CA-83A1-6FF36022B12C}"/>
               </a:ext>
             </a:extLst>
           </p:cNvPr>
@@ -16019,7 +14009,7 @@
     </p:spTree>
     <p:extLst>
       <p:ext uri="{BB962C8B-B14F-4D97-AF65-F5344CB8AC3E}">
-        <p14:creationId xmlns:p14="http://schemas.microsoft.com/office/powerpoint/2010/main" val="1625396626"/>
+        <p14:creationId xmlns:p14="http://schemas.microsoft.com/office/powerpoint/2010/main" val="960833249"/>
       </p:ext>
     </p:extLst>
   </p:cSld>
@@ -16050,7 +14040,7 @@
           <p:cNvPr id="10" name="">
             <a:extLst xmlns:a="http://schemas.openxmlformats.org/drawingml/2006/main">
               <a:ext uri="{FF2B5EF4-FFF2-40B4-BE49-F238E27FC236}">
-                <a16:creationId xmlns:a16="http://schemas.microsoft.com/office/drawing/2014/main" id="{5F74C842-A8E4-4ACD-9E57-3A181A51895F}"/>
+                <a16:creationId xmlns:a16="http://schemas.microsoft.com/office/drawing/2014/main" id="{5115BB0D-D5D6-411E-8105-8E3A9C119D35}"/>
               </a:ext>
             </a:extLst>
           </p:cNvPr>
@@ -16080,7 +14070,7 @@
           <p:cNvPr id="2" name="">
             <a:extLst xmlns:a="http://schemas.openxmlformats.org/drawingml/2006/main">
               <a:ext uri="{FF2B5EF4-FFF2-40B4-BE49-F238E27FC236}">
-                <a16:creationId xmlns:a16="http://schemas.microsoft.com/office/drawing/2014/main" id="{A237834A-E787-4A69-96DD-4E96C1F1C17B}"/>
+                <a16:creationId xmlns:a16="http://schemas.microsoft.com/office/drawing/2014/main" id="{5B62C406-CE0A-4CAF-9D88-AFCE1ADA31E7}"/>
               </a:ext>
             </a:extLst>
           </p:cNvPr>
@@ -16137,7 +14127,7 @@
           <p:cNvPr id="3" name="">
             <a:extLst xmlns:a="http://schemas.openxmlformats.org/drawingml/2006/main">
               <a:ext uri="{FF2B5EF4-FFF2-40B4-BE49-F238E27FC236}">
-                <a16:creationId xmlns:a16="http://schemas.microsoft.com/office/drawing/2014/main" id="{FB6DD4AF-A526-45E4-A0C6-A8AAD878DE6C}"/>
+                <a16:creationId xmlns:a16="http://schemas.microsoft.com/office/drawing/2014/main" id="{127C500A-29CB-4F6A-A593-9E11EFB3545D}"/>
               </a:ext>
             </a:extLst>
           </p:cNvPr>
@@ -16194,7 +14184,7 @@
           <p:cNvPr id="4" name="">
             <a:extLst xmlns:a="http://schemas.openxmlformats.org/drawingml/2006/main">
               <a:ext uri="{FF2B5EF4-FFF2-40B4-BE49-F238E27FC236}">
-                <a16:creationId xmlns:a16="http://schemas.microsoft.com/office/drawing/2014/main" id="{452FBCE5-9D11-4E5C-A33F-A79757514971}"/>
+                <a16:creationId xmlns:a16="http://schemas.microsoft.com/office/drawing/2014/main" id="{03BD3A26-41B5-42FA-BEA4-D4AA5DB9EF83}"/>
               </a:ext>
             </a:extLst>
           </p:cNvPr>
@@ -16224,7 +14214,7 @@
           <p:cNvPr id="5" name="">
             <a:extLst xmlns:a="http://schemas.openxmlformats.org/drawingml/2006/main">
               <a:ext uri="{FF2B5EF4-FFF2-40B4-BE49-F238E27FC236}">
-                <a16:creationId xmlns:a16="http://schemas.microsoft.com/office/drawing/2014/main" id="{664DC6B8-52C2-4B7A-99F5-E51D5543812E}"/>
+                <a16:creationId xmlns:a16="http://schemas.microsoft.com/office/drawing/2014/main" id="{7543B4A5-EBF2-41AD-8FD3-24BAEAEDCC4C}"/>
               </a:ext>
             </a:extLst>
           </p:cNvPr>
@@ -16281,7 +14271,7 @@
           <p:cNvPr id="6" name="">
             <a:extLst xmlns:a="http://schemas.openxmlformats.org/drawingml/2006/main">
               <a:ext uri="{FF2B5EF4-FFF2-40B4-BE49-F238E27FC236}">
-                <a16:creationId xmlns:a16="http://schemas.microsoft.com/office/drawing/2014/main" id="{A1A4AF13-AA96-460D-B775-C077B940E080}"/>
+                <a16:creationId xmlns:a16="http://schemas.microsoft.com/office/drawing/2014/main" id="{176FBEC1-B647-44AB-AABD-630536651354}"/>
               </a:ext>
             </a:extLst>
           </p:cNvPr>
@@ -16366,7 +14356,7 @@
           <p:cNvPr id="7" name="">
             <a:extLst xmlns:a="http://schemas.openxmlformats.org/drawingml/2006/main">
               <a:ext uri="{FF2B5EF4-FFF2-40B4-BE49-F238E27FC236}">
-                <a16:creationId xmlns:a16="http://schemas.microsoft.com/office/drawing/2014/main" id="{C0B6F092-9046-415E-B631-C29A2CF48E5E}"/>
+                <a16:creationId xmlns:a16="http://schemas.microsoft.com/office/drawing/2014/main" id="{6A553715-E5B2-49AB-B8F4-F19ECB7CC8A0}"/>
               </a:ext>
             </a:extLst>
           </p:cNvPr>
@@ -16423,7 +14413,7 @@
           <p:cNvPr id="8" name="">
             <a:extLst xmlns:a="http://schemas.openxmlformats.org/drawingml/2006/main">
               <a:ext uri="{FF2B5EF4-FFF2-40B4-BE49-F238E27FC236}">
-                <a16:creationId xmlns:a16="http://schemas.microsoft.com/office/drawing/2014/main" id="{3B64CC21-374A-4C6D-A259-1A13EE6C7F50}"/>
+                <a16:creationId xmlns:a16="http://schemas.microsoft.com/office/drawing/2014/main" id="{87DC4960-6F7E-489C-83D9-52E66D3F382B}"/>
               </a:ext>
             </a:extLst>
           </p:cNvPr>
@@ -16480,7 +14470,7 @@
           <p:cNvPr id="9" name="">
             <a:extLst xmlns:a="http://schemas.openxmlformats.org/drawingml/2006/main">
               <a:ext uri="{FF2B5EF4-FFF2-40B4-BE49-F238E27FC236}">
-                <a16:creationId xmlns:a16="http://schemas.microsoft.com/office/drawing/2014/main" id="{BFF8BADB-7E29-4678-A731-7308BAC7311F}"/>
+                <a16:creationId xmlns:a16="http://schemas.microsoft.com/office/drawing/2014/main" id="{632133D0-B9DA-49AB-9986-B6D03D1B95FA}"/>
               </a:ext>
             </a:extLst>
           </p:cNvPr>
@@ -16535,7 +14525,7 @@
     </p:spTree>
     <p:extLst>
       <p:ext uri="{BB962C8B-B14F-4D97-AF65-F5344CB8AC3E}">
-        <p14:creationId xmlns:p14="http://schemas.microsoft.com/office/powerpoint/2010/main" val="1993267228"/>
+        <p14:creationId xmlns:p14="http://schemas.microsoft.com/office/powerpoint/2010/main" val="1697104551"/>
       </p:ext>
     </p:extLst>
   </p:cSld>
@@ -16566,7 +14556,7 @@
           <p:cNvPr id="9" name="">
             <a:extLst xmlns:a="http://schemas.openxmlformats.org/drawingml/2006/main">
               <a:ext uri="{FF2B5EF4-FFF2-40B4-BE49-F238E27FC236}">
-                <a16:creationId xmlns:a16="http://schemas.microsoft.com/office/drawing/2014/main" id="{8CD2786F-DCA1-4ADD-BBFD-C00059BB8BDC}"/>
+                <a16:creationId xmlns:a16="http://schemas.microsoft.com/office/drawing/2014/main" id="{303F0080-6519-49D9-96DC-22B782F62DE0}"/>
               </a:ext>
             </a:extLst>
           </p:cNvPr>
@@ -16596,7 +14586,7 @@
           <p:cNvPr id="2" name="">
             <a:extLst xmlns:a="http://schemas.openxmlformats.org/drawingml/2006/main">
               <a:ext uri="{FF2B5EF4-FFF2-40B4-BE49-F238E27FC236}">
-                <a16:creationId xmlns:a16="http://schemas.microsoft.com/office/drawing/2014/main" id="{8F013CD7-41BE-41C4-8ABA-AF4933287929}"/>
+                <a16:creationId xmlns:a16="http://schemas.microsoft.com/office/drawing/2014/main" id="{A7BED7A5-5591-4FBC-8202-DD99AAA6EE51}"/>
               </a:ext>
             </a:extLst>
           </p:cNvPr>
@@ -16653,7 +14643,7 @@
           <p:cNvPr id="3" name="">
             <a:extLst xmlns:a="http://schemas.openxmlformats.org/drawingml/2006/main">
               <a:ext uri="{FF2B5EF4-FFF2-40B4-BE49-F238E27FC236}">
-                <a16:creationId xmlns:a16="http://schemas.microsoft.com/office/drawing/2014/main" id="{06DDF56F-AFD1-483B-B893-5760544B01EA}"/>
+                <a16:creationId xmlns:a16="http://schemas.microsoft.com/office/drawing/2014/main" id="{B555901C-1AD2-4CCD-ADF4-E84A440577AB}"/>
               </a:ext>
             </a:extLst>
           </p:cNvPr>
@@ -16710,7 +14700,7 @@
           <p:cNvPr id="4" name="">
             <a:extLst xmlns:a="http://schemas.openxmlformats.org/drawingml/2006/main">
               <a:ext uri="{FF2B5EF4-FFF2-40B4-BE49-F238E27FC236}">
-                <a16:creationId xmlns:a16="http://schemas.microsoft.com/office/drawing/2014/main" id="{6343D9AB-2544-436B-A5B2-458BBFE2E569}"/>
+                <a16:creationId xmlns:a16="http://schemas.microsoft.com/office/drawing/2014/main" id="{495FF253-EFD3-4942-8519-7620400E8BBD}"/>
               </a:ext>
             </a:extLst>
           </p:cNvPr>
@@ -16740,7 +14730,7 @@
           <p:cNvPr id="5" name="">
             <a:extLst xmlns:a="http://schemas.openxmlformats.org/drawingml/2006/main">
               <a:ext uri="{FF2B5EF4-FFF2-40B4-BE49-F238E27FC236}">
-                <a16:creationId xmlns:a16="http://schemas.microsoft.com/office/drawing/2014/main" id="{9F62E101-852F-4AE2-B1A8-355D47B4656B}"/>
+                <a16:creationId xmlns:a16="http://schemas.microsoft.com/office/drawing/2014/main" id="{9DB98FF3-E2FE-44F8-A681-1CB629F265E1}"/>
               </a:ext>
             </a:extLst>
           </p:cNvPr>
@@ -16770,7 +14760,7 @@
           <p:cNvPr id="6" name="">
             <a:extLst xmlns:a="http://schemas.openxmlformats.org/drawingml/2006/main">
               <a:ext uri="{FF2B5EF4-FFF2-40B4-BE49-F238E27FC236}">
-                <a16:creationId xmlns:a16="http://schemas.microsoft.com/office/drawing/2014/main" id="{56B90C4C-C092-44EA-B153-49699F51EF20}"/>
+                <a16:creationId xmlns:a16="http://schemas.microsoft.com/office/drawing/2014/main" id="{604E3710-4285-4DB6-BE37-257CF8F24D51}"/>
               </a:ext>
             </a:extLst>
           </p:cNvPr>
@@ -16827,7 +14817,7 @@
           <p:cNvPr id="7" name="">
             <a:extLst xmlns:a="http://schemas.openxmlformats.org/drawingml/2006/main">
               <a:ext uri="{FF2B5EF4-FFF2-40B4-BE49-F238E27FC236}">
-                <a16:creationId xmlns:a16="http://schemas.microsoft.com/office/drawing/2014/main" id="{B155A191-DD08-4CC6-9435-B4BD426D64AB}"/>
+                <a16:creationId xmlns:a16="http://schemas.microsoft.com/office/drawing/2014/main" id="{E66E4AD4-706B-4DF8-8C47-92245EB2B6FD}"/>
               </a:ext>
             </a:extLst>
           </p:cNvPr>
@@ -16884,7 +14874,7 @@
           <p:cNvPr id="8" name="">
             <a:extLst xmlns:a="http://schemas.openxmlformats.org/drawingml/2006/main">
               <a:ext uri="{FF2B5EF4-FFF2-40B4-BE49-F238E27FC236}">
-                <a16:creationId xmlns:a16="http://schemas.microsoft.com/office/drawing/2014/main" id="{B4773AF2-706E-4D8E-B7FD-7BC3C0F3BEDC}"/>
+                <a16:creationId xmlns:a16="http://schemas.microsoft.com/office/drawing/2014/main" id="{8747DB73-6B6D-4CFF-9483-3792F93950F1}"/>
               </a:ext>
             </a:extLst>
           </p:cNvPr>
@@ -16939,7 +14929,7 @@
     </p:spTree>
     <p:extLst>
       <p:ext uri="{BB962C8B-B14F-4D97-AF65-F5344CB8AC3E}">
-        <p14:creationId xmlns:p14="http://schemas.microsoft.com/office/powerpoint/2010/main" val="1155964688"/>
+        <p14:creationId xmlns:p14="http://schemas.microsoft.com/office/powerpoint/2010/main" val="134585243"/>
       </p:ext>
     </p:extLst>
   </p:cSld>
@@ -16970,7 +14960,7 @@
           <p:cNvPr id="11" name="">
             <a:extLst xmlns:a="http://schemas.openxmlformats.org/drawingml/2006/main">
               <a:ext uri="{FF2B5EF4-FFF2-40B4-BE49-F238E27FC236}">
-                <a16:creationId xmlns:a16="http://schemas.microsoft.com/office/drawing/2014/main" id="{064A83DD-D30A-4316-953C-64F7FDCFA213}"/>
+                <a16:creationId xmlns:a16="http://schemas.microsoft.com/office/drawing/2014/main" id="{B42EF42F-8B81-47E6-AF64-F67C5A5481EA}"/>
               </a:ext>
             </a:extLst>
           </p:cNvPr>
@@ -17000,7 +14990,7 @@
           <p:cNvPr id="2" name="">
             <a:extLst xmlns:a="http://schemas.openxmlformats.org/drawingml/2006/main">
               <a:ext uri="{FF2B5EF4-FFF2-40B4-BE49-F238E27FC236}">
-                <a16:creationId xmlns:a16="http://schemas.microsoft.com/office/drawing/2014/main" id="{11790AC9-B732-4ACB-8B5A-94D556B13B65}"/>
+                <a16:creationId xmlns:a16="http://schemas.microsoft.com/office/drawing/2014/main" id="{82D45837-1859-4774-8D09-DFF9D7953DA5}"/>
               </a:ext>
             </a:extLst>
           </p:cNvPr>
@@ -17057,7 +15047,7 @@
           <p:cNvPr id="3" name="">
             <a:extLst xmlns:a="http://schemas.openxmlformats.org/drawingml/2006/main">
               <a:ext uri="{FF2B5EF4-FFF2-40B4-BE49-F238E27FC236}">
-                <a16:creationId xmlns:a16="http://schemas.microsoft.com/office/drawing/2014/main" id="{A1FB802C-94A9-466A-A506-5E992A0F782D}"/>
+                <a16:creationId xmlns:a16="http://schemas.microsoft.com/office/drawing/2014/main" id="{B6FB1F12-C866-46A7-8AA3-5CB3A7FB2293}"/>
               </a:ext>
             </a:extLst>
           </p:cNvPr>
@@ -17114,7 +15104,7 @@
           <p:cNvPr id="4" name="">
             <a:extLst xmlns:a="http://schemas.openxmlformats.org/drawingml/2006/main">
               <a:ext uri="{FF2B5EF4-FFF2-40B4-BE49-F238E27FC236}">
-                <a16:creationId xmlns:a16="http://schemas.microsoft.com/office/drawing/2014/main" id="{4779C8E7-38CC-44A4-88C0-0455EBAA027C}"/>
+                <a16:creationId xmlns:a16="http://schemas.microsoft.com/office/drawing/2014/main" id="{04C84193-FF43-40D8-96C7-D66DAC89E257}"/>
               </a:ext>
             </a:extLst>
           </p:cNvPr>
@@ -17171,7 +15161,7 @@
           <p:cNvPr id="5" name="">
             <a:extLst xmlns:a="http://schemas.openxmlformats.org/drawingml/2006/main">
               <a:ext uri="{FF2B5EF4-FFF2-40B4-BE49-F238E27FC236}">
-                <a16:creationId xmlns:a16="http://schemas.microsoft.com/office/drawing/2014/main" id="{808F4AE9-F7FF-4257-B6D9-44944AC6A008}"/>
+                <a16:creationId xmlns:a16="http://schemas.microsoft.com/office/drawing/2014/main" id="{02A8C837-F250-4F89-B3B8-91237AD022ED}"/>
               </a:ext>
             </a:extLst>
           </p:cNvPr>
@@ -17228,7 +15218,7 @@
           <p:cNvPr id="6" name="">
             <a:extLst xmlns:a="http://schemas.openxmlformats.org/drawingml/2006/main">
               <a:ext uri="{FF2B5EF4-FFF2-40B4-BE49-F238E27FC236}">
-                <a16:creationId xmlns:a16="http://schemas.microsoft.com/office/drawing/2014/main" id="{46236F5E-854D-4D52-9E6C-D09A8542EBBA}"/>
+                <a16:creationId xmlns:a16="http://schemas.microsoft.com/office/drawing/2014/main" id="{746C8193-F7BC-4BDB-85E4-4E3B2CB555A1}"/>
               </a:ext>
             </a:extLst>
           </p:cNvPr>
@@ -17285,7 +15275,7 @@
           <p:cNvPr id="7" name="">
             <a:extLst xmlns:a="http://schemas.openxmlformats.org/drawingml/2006/main">
               <a:ext uri="{FF2B5EF4-FFF2-40B4-BE49-F238E27FC236}">
-                <a16:creationId xmlns:a16="http://schemas.microsoft.com/office/drawing/2014/main" id="{44338176-5630-4354-A58C-A77BCF44E0BF}"/>
+                <a16:creationId xmlns:a16="http://schemas.microsoft.com/office/drawing/2014/main" id="{4E0D466D-C7BB-46BE-87F9-15AA119DD7FF}"/>
               </a:ext>
             </a:extLst>
           </p:cNvPr>
@@ -17342,7 +15332,7 @@
           <p:cNvPr id="8" name="">
             <a:extLst xmlns:a="http://schemas.openxmlformats.org/drawingml/2006/main">
               <a:ext uri="{FF2B5EF4-FFF2-40B4-BE49-F238E27FC236}">
-                <a16:creationId xmlns:a16="http://schemas.microsoft.com/office/drawing/2014/main" id="{1594A596-252C-4226-BB75-E98FDDC52065}"/>
+                <a16:creationId xmlns:a16="http://schemas.microsoft.com/office/drawing/2014/main" id="{AD90C629-6262-4C39-AFD1-E5E28BF4D4AD}"/>
               </a:ext>
             </a:extLst>
           </p:cNvPr>
@@ -17399,7 +15389,7 @@
           <p:cNvPr id="9" name="">
             <a:extLst xmlns:a="http://schemas.openxmlformats.org/drawingml/2006/main">
               <a:ext uri="{FF2B5EF4-FFF2-40B4-BE49-F238E27FC236}">
-                <a16:creationId xmlns:a16="http://schemas.microsoft.com/office/drawing/2014/main" id="{34B798AE-3260-406F-8A29-7F7AC4D93DC4}"/>
+                <a16:creationId xmlns:a16="http://schemas.microsoft.com/office/drawing/2014/main" id="{4D9B6C72-4FB4-4A6D-A87B-09B9C09D2C07}"/>
               </a:ext>
             </a:extLst>
           </p:cNvPr>
@@ -17456,7 +15446,7 @@
           <p:cNvPr id="10" name="">
             <a:extLst xmlns:a="http://schemas.openxmlformats.org/drawingml/2006/main">
               <a:ext uri="{FF2B5EF4-FFF2-40B4-BE49-F238E27FC236}">
-                <a16:creationId xmlns:a16="http://schemas.microsoft.com/office/drawing/2014/main" id="{4BE2384A-B503-40C3-9F1E-4FC011EAB5B2}"/>
+                <a16:creationId xmlns:a16="http://schemas.microsoft.com/office/drawing/2014/main" id="{EEDF8F01-934C-4B91-8C9C-AACE988F2D4E}"/>
               </a:ext>
             </a:extLst>
           </p:cNvPr>
@@ -17511,7 +15501,7 @@
     </p:spTree>
     <p:extLst>
       <p:ext uri="{BB962C8B-B14F-4D97-AF65-F5344CB8AC3E}">
-        <p14:creationId xmlns:p14="http://schemas.microsoft.com/office/powerpoint/2010/main" val="2073390270"/>
+        <p14:creationId xmlns:p14="http://schemas.microsoft.com/office/powerpoint/2010/main" val="1783931573"/>
       </p:ext>
     </p:extLst>
   </p:cSld>
@@ -17542,7 +15532,7 @@
           <p:cNvPr id="7" name="">
             <a:extLst xmlns:a="http://schemas.openxmlformats.org/drawingml/2006/main">
               <a:ext uri="{FF2B5EF4-FFF2-40B4-BE49-F238E27FC236}">
-                <a16:creationId xmlns:a16="http://schemas.microsoft.com/office/drawing/2014/main" id="{A514A23F-5149-4398-B085-94FA066F5E8E}"/>
+                <a16:creationId xmlns:a16="http://schemas.microsoft.com/office/drawing/2014/main" id="{75621074-305F-48D7-A15A-03947D3215D5}"/>
               </a:ext>
             </a:extLst>
           </p:cNvPr>
@@ -17572,7 +15562,7 @@
           <p:cNvPr id="2" name="">
             <a:extLst xmlns:a="http://schemas.openxmlformats.org/drawingml/2006/main">
               <a:ext uri="{FF2B5EF4-FFF2-40B4-BE49-F238E27FC236}">
-                <a16:creationId xmlns:a16="http://schemas.microsoft.com/office/drawing/2014/main" id="{79651341-0899-4D75-AE04-44B51B8A73E2}"/>
+                <a16:creationId xmlns:a16="http://schemas.microsoft.com/office/drawing/2014/main" id="{82B7A92E-D732-43CF-8F65-5F7BE748790B}"/>
               </a:ext>
             </a:extLst>
           </p:cNvPr>
@@ -17629,7 +15619,7 @@
           <p:cNvPr id="3" name="">
             <a:extLst xmlns:a="http://schemas.openxmlformats.org/drawingml/2006/main">
               <a:ext uri="{FF2B5EF4-FFF2-40B4-BE49-F238E27FC236}">
-                <a16:creationId xmlns:a16="http://schemas.microsoft.com/office/drawing/2014/main" id="{900385B8-BE47-4507-AF56-4308E297E65A}"/>
+                <a16:creationId xmlns:a16="http://schemas.microsoft.com/office/drawing/2014/main" id="{130CD0A6-B3A6-4F0A-BB08-A537ED622B83}"/>
               </a:ext>
             </a:extLst>
           </p:cNvPr>
@@ -17686,7 +15676,7 @@
           <p:cNvPr id="4" name="">
             <a:extLst xmlns:a="http://schemas.openxmlformats.org/drawingml/2006/main">
               <a:ext uri="{FF2B5EF4-FFF2-40B4-BE49-F238E27FC236}">
-                <a16:creationId xmlns:a16="http://schemas.microsoft.com/office/drawing/2014/main" id="{3A828A05-C901-47BA-A500-C4D44AB4BE38}"/>
+                <a16:creationId xmlns:a16="http://schemas.microsoft.com/office/drawing/2014/main" id="{F29C3D59-61B6-41E3-851C-4AB463BF4E65}"/>
               </a:ext>
             </a:extLst>
           </p:cNvPr>
@@ -17716,7 +15706,7 @@
           <p:cNvPr id="5" name="">
             <a:extLst xmlns:a="http://schemas.openxmlformats.org/drawingml/2006/main">
               <a:ext uri="{FF2B5EF4-FFF2-40B4-BE49-F238E27FC236}">
-                <a16:creationId xmlns:a16="http://schemas.microsoft.com/office/drawing/2014/main" id="{F91523DA-330B-4F16-97CA-A28715ADFCE4}"/>
+                <a16:creationId xmlns:a16="http://schemas.microsoft.com/office/drawing/2014/main" id="{65171BFE-A966-4D7D-B2D7-52C911FB9CEA}"/>
               </a:ext>
             </a:extLst>
           </p:cNvPr>
@@ -17773,7 +15763,7 @@
           <p:cNvPr id="6" name="">
             <a:extLst xmlns:a="http://schemas.openxmlformats.org/drawingml/2006/main">
               <a:ext uri="{FF2B5EF4-FFF2-40B4-BE49-F238E27FC236}">
-                <a16:creationId xmlns:a16="http://schemas.microsoft.com/office/drawing/2014/main" id="{955A33A3-9811-48D4-AFE1-39D495B6F0F9}"/>
+                <a16:creationId xmlns:a16="http://schemas.microsoft.com/office/drawing/2014/main" id="{7219FF1B-C1B2-4754-A4D1-A3B4DF61639F}"/>
               </a:ext>
             </a:extLst>
           </p:cNvPr>
@@ -17828,7 +15818,7 @@
     </p:spTree>
     <p:extLst>
       <p:ext uri="{BB962C8B-B14F-4D97-AF65-F5344CB8AC3E}">
-        <p14:creationId xmlns:p14="http://schemas.microsoft.com/office/powerpoint/2010/main" val="1740741808"/>
+        <p14:creationId xmlns:p14="http://schemas.microsoft.com/office/powerpoint/2010/main" val="1702926862"/>
       </p:ext>
     </p:extLst>
   </p:cSld>
@@ -17859,7 +15849,7 @@
           <p:cNvPr id="16" name="">
             <a:extLst xmlns:a="http://schemas.openxmlformats.org/drawingml/2006/main">
               <a:ext uri="{FF2B5EF4-FFF2-40B4-BE49-F238E27FC236}">
-                <a16:creationId xmlns:a16="http://schemas.microsoft.com/office/drawing/2014/main" id="{4C6BE4DE-797E-4DF2-B144-1BC869FA3A1E}"/>
+                <a16:creationId xmlns:a16="http://schemas.microsoft.com/office/drawing/2014/main" id="{A1B82447-059B-416C-AB55-0C93AACC034E}"/>
               </a:ext>
             </a:extLst>
           </p:cNvPr>
@@ -17889,7 +15879,7 @@
           <p:cNvPr id="2" name="">
             <a:extLst xmlns:a="http://schemas.openxmlformats.org/drawingml/2006/main">
               <a:ext uri="{FF2B5EF4-FFF2-40B4-BE49-F238E27FC236}">
-                <a16:creationId xmlns:a16="http://schemas.microsoft.com/office/drawing/2014/main" id="{56B591CD-581C-457D-87A2-BA799C417B16}"/>
+                <a16:creationId xmlns:a16="http://schemas.microsoft.com/office/drawing/2014/main" id="{E580F0AF-ECCD-4991-8A83-357E942A3DAF}"/>
               </a:ext>
             </a:extLst>
           </p:cNvPr>
@@ -17946,7 +15936,7 @@
           <p:cNvPr id="3" name="">
             <a:extLst xmlns:a="http://schemas.openxmlformats.org/drawingml/2006/main">
               <a:ext uri="{FF2B5EF4-FFF2-40B4-BE49-F238E27FC236}">
-                <a16:creationId xmlns:a16="http://schemas.microsoft.com/office/drawing/2014/main" id="{517BE922-C111-454F-B669-1749330522A2}"/>
+                <a16:creationId xmlns:a16="http://schemas.microsoft.com/office/drawing/2014/main" id="{CC2D05A5-A57B-46A6-9168-3A631A46B13D}"/>
               </a:ext>
             </a:extLst>
           </p:cNvPr>
@@ -18003,7 +15993,7 @@
           <p:cNvPr id="4" name="">
             <a:extLst xmlns:a="http://schemas.openxmlformats.org/drawingml/2006/main">
               <a:ext uri="{FF2B5EF4-FFF2-40B4-BE49-F238E27FC236}">
-                <a16:creationId xmlns:a16="http://schemas.microsoft.com/office/drawing/2014/main" id="{17304841-F13A-4627-9D68-56B1FD01A86B}"/>
+                <a16:creationId xmlns:a16="http://schemas.microsoft.com/office/drawing/2014/main" id="{F33F935D-C1B5-4FCC-8609-FF9E1D8EE18A}"/>
               </a:ext>
             </a:extLst>
           </p:cNvPr>
@@ -18060,7 +16050,7 @@
           <p:cNvPr id="5" name="">
             <a:extLst xmlns:a="http://schemas.openxmlformats.org/drawingml/2006/main">
               <a:ext uri="{FF2B5EF4-FFF2-40B4-BE49-F238E27FC236}">
-                <a16:creationId xmlns:a16="http://schemas.microsoft.com/office/drawing/2014/main" id="{119CC3A1-88A9-4D1A-B562-9808A299D662}"/>
+                <a16:creationId xmlns:a16="http://schemas.microsoft.com/office/drawing/2014/main" id="{79C908BF-3F53-4A9A-8CE2-4065467DEF9B}"/>
               </a:ext>
             </a:extLst>
           </p:cNvPr>
@@ -18117,7 +16107,7 @@
           <p:cNvPr id="6" name="">
             <a:extLst xmlns:a="http://schemas.openxmlformats.org/drawingml/2006/main">
               <a:ext uri="{FF2B5EF4-FFF2-40B4-BE49-F238E27FC236}">
-                <a16:creationId xmlns:a16="http://schemas.microsoft.com/office/drawing/2014/main" id="{40DB0214-D302-43A0-9AAF-841C021F0390}"/>
+                <a16:creationId xmlns:a16="http://schemas.microsoft.com/office/drawing/2014/main" id="{0BB7C53C-4E62-4E85-AAE0-91E61F99FEA0}"/>
               </a:ext>
             </a:extLst>
           </p:cNvPr>
@@ -18174,7 +16164,7 @@
           <p:cNvPr id="7" name="">
             <a:extLst xmlns:a="http://schemas.openxmlformats.org/drawingml/2006/main">
               <a:ext uri="{FF2B5EF4-FFF2-40B4-BE49-F238E27FC236}">
-                <a16:creationId xmlns:a16="http://schemas.microsoft.com/office/drawing/2014/main" id="{0E0198EE-A64B-4919-8048-D99787A595FB}"/>
+                <a16:creationId xmlns:a16="http://schemas.microsoft.com/office/drawing/2014/main" id="{85B2FAAE-D4BA-4E93-94B5-4D83813DA091}"/>
               </a:ext>
             </a:extLst>
           </p:cNvPr>
@@ -18231,7 +16221,7 @@
           <p:cNvPr id="8" name="">
             <a:extLst xmlns:a="http://schemas.openxmlformats.org/drawingml/2006/main">
               <a:ext uri="{FF2B5EF4-FFF2-40B4-BE49-F238E27FC236}">
-                <a16:creationId xmlns:a16="http://schemas.microsoft.com/office/drawing/2014/main" id="{1DFA2A82-33EC-45B5-A219-25860A5B6B8D}"/>
+                <a16:creationId xmlns:a16="http://schemas.microsoft.com/office/drawing/2014/main" id="{A37BA12A-BD5F-4B5D-A837-B8A41AA1F9C5}"/>
               </a:ext>
             </a:extLst>
           </p:cNvPr>
@@ -18288,7 +16278,7 @@
           <p:cNvPr id="9" name="">
             <a:extLst xmlns:a="http://schemas.openxmlformats.org/drawingml/2006/main">
               <a:ext uri="{FF2B5EF4-FFF2-40B4-BE49-F238E27FC236}">
-                <a16:creationId xmlns:a16="http://schemas.microsoft.com/office/drawing/2014/main" id="{D3BCAE41-E816-4EA8-BD44-B6CF96C4F3D9}"/>
+                <a16:creationId xmlns:a16="http://schemas.microsoft.com/office/drawing/2014/main" id="{4A56B238-C938-4C72-BD88-AA7E379E32A1}"/>
               </a:ext>
             </a:extLst>
           </p:cNvPr>
@@ -18345,7 +16335,7 @@
           <p:cNvPr id="10" name="">
             <a:extLst xmlns:a="http://schemas.openxmlformats.org/drawingml/2006/main">
               <a:ext uri="{FF2B5EF4-FFF2-40B4-BE49-F238E27FC236}">
-                <a16:creationId xmlns:a16="http://schemas.microsoft.com/office/drawing/2014/main" id="{AA0E77EF-49E6-4992-BBB4-5A275A2BE34D}"/>
+                <a16:creationId xmlns:a16="http://schemas.microsoft.com/office/drawing/2014/main" id="{9675EEE6-D7B2-45A1-84A5-931023DFC235}"/>
               </a:ext>
             </a:extLst>
           </p:cNvPr>
@@ -18402,7 +16392,7 @@
           <p:cNvPr id="11" name="">
             <a:extLst xmlns:a="http://schemas.openxmlformats.org/drawingml/2006/main">
               <a:ext uri="{FF2B5EF4-FFF2-40B4-BE49-F238E27FC236}">
-                <a16:creationId xmlns:a16="http://schemas.microsoft.com/office/drawing/2014/main" id="{6F968FE7-F60C-436D-BD9C-958693E63828}"/>
+                <a16:creationId xmlns:a16="http://schemas.microsoft.com/office/drawing/2014/main" id="{7D25BE3F-32B8-471E-9D40-8C3AD8353D70}"/>
               </a:ext>
             </a:extLst>
           </p:cNvPr>
@@ -18459,7 +16449,7 @@
           <p:cNvPr id="12" name="">
             <a:extLst xmlns:a="http://schemas.openxmlformats.org/drawingml/2006/main">
               <a:ext uri="{FF2B5EF4-FFF2-40B4-BE49-F238E27FC236}">
-                <a16:creationId xmlns:a16="http://schemas.microsoft.com/office/drawing/2014/main" id="{E49E4CED-35AA-41A5-83BE-344E52028FD7}"/>
+                <a16:creationId xmlns:a16="http://schemas.microsoft.com/office/drawing/2014/main" id="{98572F9D-9F21-48DD-8F6A-2B8E773FC497}"/>
               </a:ext>
             </a:extLst>
           </p:cNvPr>
@@ -18489,7 +16479,7 @@
           <p:cNvPr id="13" name="">
             <a:extLst xmlns:a="http://schemas.openxmlformats.org/drawingml/2006/main">
               <a:ext uri="{FF2B5EF4-FFF2-40B4-BE49-F238E27FC236}">
-                <a16:creationId xmlns:a16="http://schemas.microsoft.com/office/drawing/2014/main" id="{74E4DE23-9DBC-490F-A1F3-048C08C3624B}"/>
+                <a16:creationId xmlns:a16="http://schemas.microsoft.com/office/drawing/2014/main" id="{AB75CB98-8257-4A3D-B9FB-F19BECAB4260}"/>
               </a:ext>
             </a:extLst>
           </p:cNvPr>
@@ -18535,7 +16525,7 @@
                 <a:latin typeface="Calibri"/>
                 <a:ea typeface="Calibri"/>
                 <a:cs typeface="Calibri"/>
-                <a:hlinkClick xmlns:r="http://schemas.openxmlformats.org/officeDocument/2006/relationships" r:id="R0a2ba765392347bb"/>
+                <a:hlinkClick xmlns:r="http://schemas.openxmlformats.org/officeDocument/2006/relationships" r:id="R8c38f180802d4ac2"/>
               </a:rPr>
               <a:t>Open DEMO assignment form</a:t>
             </a:r>
@@ -18547,7 +16537,7 @@
           <p:cNvPr id="14" name="">
             <a:extLst xmlns:a="http://schemas.openxmlformats.org/drawingml/2006/main">
               <a:ext uri="{FF2B5EF4-FFF2-40B4-BE49-F238E27FC236}">
-                <a16:creationId xmlns:a16="http://schemas.microsoft.com/office/drawing/2014/main" id="{BAA2B0ED-F754-4CE5-8A4C-E83D6DFE44C4}"/>
+                <a16:creationId xmlns:a16="http://schemas.microsoft.com/office/drawing/2014/main" id="{7C947D75-0349-4671-BC0A-3824822C7878}"/>
               </a:ext>
             </a:extLst>
           </p:cNvPr>
@@ -18604,7 +16594,7 @@
           <p:cNvPr id="15" name="">
             <a:extLst xmlns:a="http://schemas.openxmlformats.org/drawingml/2006/main">
               <a:ext uri="{FF2B5EF4-FFF2-40B4-BE49-F238E27FC236}">
-                <a16:creationId xmlns:a16="http://schemas.microsoft.com/office/drawing/2014/main" id="{C2735801-7908-4F43-B412-3587E61B9BA4}"/>
+                <a16:creationId xmlns:a16="http://schemas.microsoft.com/office/drawing/2014/main" id="{986B2033-FE18-4BF5-99DB-AF7A9751789F}"/>
               </a:ext>
             </a:extLst>
           </p:cNvPr>
@@ -18659,7 +16649,7 @@
     </p:spTree>
     <p:extLst>
       <p:ext uri="{BB962C8B-B14F-4D97-AF65-F5344CB8AC3E}">
-        <p14:creationId xmlns:p14="http://schemas.microsoft.com/office/powerpoint/2010/main" val="1005872718"/>
+        <p14:creationId xmlns:p14="http://schemas.microsoft.com/office/powerpoint/2010/main" val="1804553159"/>
       </p:ext>
     </p:extLst>
   </p:cSld>
@@ -18690,7 +16680,7 @@
           <p:cNvPr id="7" name="">
             <a:extLst xmlns:a="http://schemas.openxmlformats.org/drawingml/2006/main">
               <a:ext uri="{FF2B5EF4-FFF2-40B4-BE49-F238E27FC236}">
-                <a16:creationId xmlns:a16="http://schemas.microsoft.com/office/drawing/2014/main" id="{770BE781-1226-4DDE-9885-60B37D9B1C0A}"/>
+                <a16:creationId xmlns:a16="http://schemas.microsoft.com/office/drawing/2014/main" id="{23051577-E41C-4773-A803-45E4A12BEF1D}"/>
               </a:ext>
             </a:extLst>
           </p:cNvPr>
@@ -18747,7 +16737,7 @@
           <p:cNvPr id="2" name="">
             <a:extLst xmlns:a="http://schemas.openxmlformats.org/drawingml/2006/main">
               <a:ext uri="{FF2B5EF4-FFF2-40B4-BE49-F238E27FC236}">
-                <a16:creationId xmlns:a16="http://schemas.microsoft.com/office/drawing/2014/main" id="{C4FEF1BD-7CBD-43EA-B30D-5896959280C4}"/>
+                <a16:creationId xmlns:a16="http://schemas.microsoft.com/office/drawing/2014/main" id="{94E2D9B8-B9BD-41EF-A942-8ECA7FC3989F}"/>
               </a:ext>
             </a:extLst>
           </p:cNvPr>
@@ -18804,7 +16794,7 @@
           <p:cNvPr id="3" name="">
             <a:extLst xmlns:a="http://schemas.openxmlformats.org/drawingml/2006/main">
               <a:ext uri="{FF2B5EF4-FFF2-40B4-BE49-F238E27FC236}">
-                <a16:creationId xmlns:a16="http://schemas.microsoft.com/office/drawing/2014/main" id="{0BDD6E9B-ECAD-4A6B-BCA6-9BC4E9E61D7A}"/>
+                <a16:creationId xmlns:a16="http://schemas.microsoft.com/office/drawing/2014/main" id="{31B47013-EA88-4636-9959-1A3F7962D714}"/>
               </a:ext>
             </a:extLst>
           </p:cNvPr>
@@ -18861,7 +16851,7 @@
           <p:cNvPr id="4" name="">
             <a:extLst xmlns:a="http://schemas.openxmlformats.org/drawingml/2006/main">
               <a:ext uri="{FF2B5EF4-FFF2-40B4-BE49-F238E27FC236}">
-                <a16:creationId xmlns:a16="http://schemas.microsoft.com/office/drawing/2014/main" id="{105AF7B9-9B0C-47BD-99FC-562C1017401E}"/>
+                <a16:creationId xmlns:a16="http://schemas.microsoft.com/office/drawing/2014/main" id="{CE5A2E39-9943-4DFC-B48E-B13957BB070F}"/>
               </a:ext>
             </a:extLst>
           </p:cNvPr>
@@ -18946,7 +16936,7 @@
           <p:cNvPr id="5" name="">
             <a:extLst xmlns:a="http://schemas.openxmlformats.org/drawingml/2006/main">
               <a:ext uri="{FF2B5EF4-FFF2-40B4-BE49-F238E27FC236}">
-                <a16:creationId xmlns:a16="http://schemas.microsoft.com/office/drawing/2014/main" id="{D674BF65-D078-471C-9CAA-4C9BC4CBE824}"/>
+                <a16:creationId xmlns:a16="http://schemas.microsoft.com/office/drawing/2014/main" id="{A38D264B-A402-40ED-9302-F2349D569F26}"/>
               </a:ext>
             </a:extLst>
           </p:cNvPr>
@@ -19003,7 +16993,7 @@
           <p:cNvPr id="6" name="">
             <a:extLst xmlns:a="http://schemas.openxmlformats.org/drawingml/2006/main">
               <a:ext uri="{FF2B5EF4-FFF2-40B4-BE49-F238E27FC236}">
-                <a16:creationId xmlns:a16="http://schemas.microsoft.com/office/drawing/2014/main" id="{A6F5B57E-7859-4922-8A4A-B75E5679F673}"/>
+                <a16:creationId xmlns:a16="http://schemas.microsoft.com/office/drawing/2014/main" id="{39193EFF-9D3F-42C8-9685-E608330EB639}"/>
               </a:ext>
             </a:extLst>
           </p:cNvPr>
@@ -19058,7 +17048,7 @@
     </p:spTree>
     <p:extLst>
       <p:ext uri="{BB962C8B-B14F-4D97-AF65-F5344CB8AC3E}">
-        <p14:creationId xmlns:p14="http://schemas.microsoft.com/office/powerpoint/2010/main" val="1861831268"/>
+        <p14:creationId xmlns:p14="http://schemas.microsoft.com/office/powerpoint/2010/main" val="1429934005"/>
       </p:ext>
     </p:extLst>
   </p:cSld>
@@ -19089,7 +17079,7 @@
           <p:cNvPr id="7" name="">
             <a:extLst xmlns:a="http://schemas.openxmlformats.org/drawingml/2006/main">
               <a:ext uri="{FF2B5EF4-FFF2-40B4-BE49-F238E27FC236}">
-                <a16:creationId xmlns:a16="http://schemas.microsoft.com/office/drawing/2014/main" id="{70AF4AE5-AFE6-4E7C-9BBB-EE339AEF09F6}"/>
+                <a16:creationId xmlns:a16="http://schemas.microsoft.com/office/drawing/2014/main" id="{3C6EA7CF-2011-445A-86C3-BB77A993B2F9}"/>
               </a:ext>
             </a:extLst>
           </p:cNvPr>
@@ -19119,7 +17109,7 @@
           <p:cNvPr id="2" name="">
             <a:extLst xmlns:a="http://schemas.openxmlformats.org/drawingml/2006/main">
               <a:ext uri="{FF2B5EF4-FFF2-40B4-BE49-F238E27FC236}">
-                <a16:creationId xmlns:a16="http://schemas.microsoft.com/office/drawing/2014/main" id="{A58CB5F7-11D4-4B1B-AA4B-EF8C700B60B3}"/>
+                <a16:creationId xmlns:a16="http://schemas.microsoft.com/office/drawing/2014/main" id="{CA5F2EC2-40DA-4327-950B-CAC92C7E6DCD}"/>
               </a:ext>
             </a:extLst>
           </p:cNvPr>
@@ -19176,7 +17166,7 @@
           <p:cNvPr id="3" name="">
             <a:extLst xmlns:a="http://schemas.openxmlformats.org/drawingml/2006/main">
               <a:ext uri="{FF2B5EF4-FFF2-40B4-BE49-F238E27FC236}">
-                <a16:creationId xmlns:a16="http://schemas.microsoft.com/office/drawing/2014/main" id="{2658E6CA-CE32-4B77-A02C-F9B371BFAB72}"/>
+                <a16:creationId xmlns:a16="http://schemas.microsoft.com/office/drawing/2014/main" id="{485ABF26-503A-4D2D-A591-0C0B205CA39E}"/>
               </a:ext>
             </a:extLst>
           </p:cNvPr>
@@ -19233,7 +17223,7 @@
           <p:cNvPr id="4" name="">
             <a:extLst xmlns:a="http://schemas.openxmlformats.org/drawingml/2006/main">
               <a:ext uri="{FF2B5EF4-FFF2-40B4-BE49-F238E27FC236}">
-                <a16:creationId xmlns:a16="http://schemas.microsoft.com/office/drawing/2014/main" id="{88D78788-4A86-4405-900A-965007211BC9}"/>
+                <a16:creationId xmlns:a16="http://schemas.microsoft.com/office/drawing/2014/main" id="{0AE64100-AF16-48CD-9CA1-05137DC55E67}"/>
               </a:ext>
             </a:extLst>
           </p:cNvPr>
@@ -19263,7 +17253,7 @@
           <p:cNvPr id="5" name="">
             <a:extLst xmlns:a="http://schemas.openxmlformats.org/drawingml/2006/main">
               <a:ext uri="{FF2B5EF4-FFF2-40B4-BE49-F238E27FC236}">
-                <a16:creationId xmlns:a16="http://schemas.microsoft.com/office/drawing/2014/main" id="{C3F733A0-93C1-42CC-BB4E-640F405EF7AF}"/>
+                <a16:creationId xmlns:a16="http://schemas.microsoft.com/office/drawing/2014/main" id="{AB1445A3-7DE8-4FE1-83DD-2EC3004D68C7}"/>
               </a:ext>
             </a:extLst>
           </p:cNvPr>
@@ -19320,7 +17310,7 @@
           <p:cNvPr id="6" name="">
             <a:extLst xmlns:a="http://schemas.openxmlformats.org/drawingml/2006/main">
               <a:ext uri="{FF2B5EF4-FFF2-40B4-BE49-F238E27FC236}">
-                <a16:creationId xmlns:a16="http://schemas.microsoft.com/office/drawing/2014/main" id="{DF92A53C-909E-4166-BCC7-F5B2453C719E}"/>
+                <a16:creationId xmlns:a16="http://schemas.microsoft.com/office/drawing/2014/main" id="{B8565C0E-F779-431B-A8A1-8096E4910A3A}"/>
               </a:ext>
             </a:extLst>
           </p:cNvPr>
@@ -19375,7 +17365,7 @@
     </p:spTree>
     <p:extLst>
       <p:ext uri="{BB962C8B-B14F-4D97-AF65-F5344CB8AC3E}">
-        <p14:creationId xmlns:p14="http://schemas.microsoft.com/office/powerpoint/2010/main" val="134570645"/>
+        <p14:creationId xmlns:p14="http://schemas.microsoft.com/office/powerpoint/2010/main" val="640016262"/>
       </p:ext>
     </p:extLst>
   </p:cSld>
@@ -19406,7 +17396,7 @@
           <p:cNvPr id="11" name="">
             <a:extLst xmlns:a="http://schemas.openxmlformats.org/drawingml/2006/main">
               <a:ext uri="{FF2B5EF4-FFF2-40B4-BE49-F238E27FC236}">
-                <a16:creationId xmlns:a16="http://schemas.microsoft.com/office/drawing/2014/main" id="{8D2016F0-68D7-4FE1-9D6D-9E12ED4C79A8}"/>
+                <a16:creationId xmlns:a16="http://schemas.microsoft.com/office/drawing/2014/main" id="{9E9EB3F8-E7D0-4875-918E-AA5B6224D18C}"/>
               </a:ext>
             </a:extLst>
           </p:cNvPr>
@@ -19436,7 +17426,7 @@
           <p:cNvPr id="2" name="">
             <a:extLst xmlns:a="http://schemas.openxmlformats.org/drawingml/2006/main">
               <a:ext uri="{FF2B5EF4-FFF2-40B4-BE49-F238E27FC236}">
-                <a16:creationId xmlns:a16="http://schemas.microsoft.com/office/drawing/2014/main" id="{2D0572CF-9D4C-45BC-BBDC-B064E70D6BF8}"/>
+                <a16:creationId xmlns:a16="http://schemas.microsoft.com/office/drawing/2014/main" id="{79D046F8-D3F1-4DC8-AD7F-D0CE42874367}"/>
               </a:ext>
             </a:extLst>
           </p:cNvPr>
@@ -19493,7 +17483,7 @@
           <p:cNvPr id="3" name="">
             <a:extLst xmlns:a="http://schemas.openxmlformats.org/drawingml/2006/main">
               <a:ext uri="{FF2B5EF4-FFF2-40B4-BE49-F238E27FC236}">
-                <a16:creationId xmlns:a16="http://schemas.microsoft.com/office/drawing/2014/main" id="{5A36694B-1663-46C6-901C-9BF60ED6200D}"/>
+                <a16:creationId xmlns:a16="http://schemas.microsoft.com/office/drawing/2014/main" id="{9E5D7814-36F6-483F-BD68-6C69F0B57E40}"/>
               </a:ext>
             </a:extLst>
           </p:cNvPr>
@@ -19550,7 +17540,7 @@
           <p:cNvPr id="4" name="">
             <a:extLst xmlns:a="http://schemas.openxmlformats.org/drawingml/2006/main">
               <a:ext uri="{FF2B5EF4-FFF2-40B4-BE49-F238E27FC236}">
-                <a16:creationId xmlns:a16="http://schemas.microsoft.com/office/drawing/2014/main" id="{DBE7B75B-1ACC-4E79-A295-A78DDD20AC66}"/>
+                <a16:creationId xmlns:a16="http://schemas.microsoft.com/office/drawing/2014/main" id="{FECC91B2-13D6-408B-A78A-A4608ED22761}"/>
               </a:ext>
             </a:extLst>
           </p:cNvPr>
@@ -19580,7 +17570,7 @@
           <p:cNvPr id="5" name="">
             <a:extLst xmlns:a="http://schemas.openxmlformats.org/drawingml/2006/main">
               <a:ext uri="{FF2B5EF4-FFF2-40B4-BE49-F238E27FC236}">
-                <a16:creationId xmlns:a16="http://schemas.microsoft.com/office/drawing/2014/main" id="{F8892DFF-8A9A-46DF-91E6-4EBA18B55B28}"/>
+                <a16:creationId xmlns:a16="http://schemas.microsoft.com/office/drawing/2014/main" id="{7831DAAD-1E74-462D-824D-700C73312B8A}"/>
               </a:ext>
             </a:extLst>
           </p:cNvPr>
@@ -19637,7 +17627,7 @@
           <p:cNvPr id="6" name="">
             <a:extLst xmlns:a="http://schemas.openxmlformats.org/drawingml/2006/main">
               <a:ext uri="{FF2B5EF4-FFF2-40B4-BE49-F238E27FC236}">
-                <a16:creationId xmlns:a16="http://schemas.microsoft.com/office/drawing/2014/main" id="{49A8CB21-4BE5-4A12-AF64-1850C0FD058B}"/>
+                <a16:creationId xmlns:a16="http://schemas.microsoft.com/office/drawing/2014/main" id="{AD87A0F1-A386-4E7C-9F0C-B06B991E6320}"/>
               </a:ext>
             </a:extLst>
           </p:cNvPr>
@@ -19694,7 +17684,7 @@
           <p:cNvPr id="7" name="">
             <a:extLst xmlns:a="http://schemas.openxmlformats.org/drawingml/2006/main">
               <a:ext uri="{FF2B5EF4-FFF2-40B4-BE49-F238E27FC236}">
-                <a16:creationId xmlns:a16="http://schemas.microsoft.com/office/drawing/2014/main" id="{F7DB71EA-0FB7-42E1-8231-1694AA0ECE23}"/>
+                <a16:creationId xmlns:a16="http://schemas.microsoft.com/office/drawing/2014/main" id="{8375031A-352A-4BE0-B113-DD4D6BAD619A}"/>
               </a:ext>
             </a:extLst>
           </p:cNvPr>
@@ -19724,7 +17714,7 @@
           <p:cNvPr id="8" name="">
             <a:extLst xmlns:a="http://schemas.openxmlformats.org/drawingml/2006/main">
               <a:ext uri="{FF2B5EF4-FFF2-40B4-BE49-F238E27FC236}">
-                <a16:creationId xmlns:a16="http://schemas.microsoft.com/office/drawing/2014/main" id="{C3962CA1-B102-41C5-B365-33F973316A01}"/>
+                <a16:creationId xmlns:a16="http://schemas.microsoft.com/office/drawing/2014/main" id="{458051DA-2FB2-411E-9353-24CC5F3650A2}"/>
               </a:ext>
             </a:extLst>
           </p:cNvPr>
@@ -19781,7 +17771,7 @@
           <p:cNvPr id="9" name="">
             <a:extLst xmlns:a="http://schemas.openxmlformats.org/drawingml/2006/main">
               <a:ext uri="{FF2B5EF4-FFF2-40B4-BE49-F238E27FC236}">
-                <a16:creationId xmlns:a16="http://schemas.microsoft.com/office/drawing/2014/main" id="{ADEF39E7-C101-4C18-859D-F34038FB1042}"/>
+                <a16:creationId xmlns:a16="http://schemas.microsoft.com/office/drawing/2014/main" id="{E317016B-42E3-4952-A8BD-7D3CA54A85C1}"/>
               </a:ext>
             </a:extLst>
           </p:cNvPr>
@@ -19838,7 +17828,7 @@
           <p:cNvPr id="10" name="">
             <a:extLst xmlns:a="http://schemas.openxmlformats.org/drawingml/2006/main">
               <a:ext uri="{FF2B5EF4-FFF2-40B4-BE49-F238E27FC236}">
-                <a16:creationId xmlns:a16="http://schemas.microsoft.com/office/drawing/2014/main" id="{8EB763F2-B8A3-4996-8D74-BEA47302CE20}"/>
+                <a16:creationId xmlns:a16="http://schemas.microsoft.com/office/drawing/2014/main" id="{F960AC89-0E44-468D-BA99-BB55070088DD}"/>
               </a:ext>
             </a:extLst>
           </p:cNvPr>
@@ -19893,7 +17883,7 @@
     </p:spTree>
     <p:extLst>
       <p:ext uri="{BB962C8B-B14F-4D97-AF65-F5344CB8AC3E}">
-        <p14:creationId xmlns:p14="http://schemas.microsoft.com/office/powerpoint/2010/main" val="77011956"/>
+        <p14:creationId xmlns:p14="http://schemas.microsoft.com/office/powerpoint/2010/main" val="1672853312"/>
       </p:ext>
     </p:extLst>
   </p:cSld>
@@ -19924,7 +17914,7 @@
           <p:cNvPr id="11" name="">
             <a:extLst xmlns:a="http://schemas.openxmlformats.org/drawingml/2006/main">
               <a:ext uri="{FF2B5EF4-FFF2-40B4-BE49-F238E27FC236}">
-                <a16:creationId xmlns:a16="http://schemas.microsoft.com/office/drawing/2014/main" id="{FCEB83E6-C03A-4DD4-867E-52B4FC414F67}"/>
+                <a16:creationId xmlns:a16="http://schemas.microsoft.com/office/drawing/2014/main" id="{29696FAD-0E9C-40C6-9BCD-2A61B45910B8}"/>
               </a:ext>
             </a:extLst>
           </p:cNvPr>
@@ -19954,7 +17944,7 @@
           <p:cNvPr id="2" name="">
             <a:extLst xmlns:a="http://schemas.openxmlformats.org/drawingml/2006/main">
               <a:ext uri="{FF2B5EF4-FFF2-40B4-BE49-F238E27FC236}">
-                <a16:creationId xmlns:a16="http://schemas.microsoft.com/office/drawing/2014/main" id="{B108E08D-1669-458C-8784-3099B5D01D85}"/>
+                <a16:creationId xmlns:a16="http://schemas.microsoft.com/office/drawing/2014/main" id="{67F0646B-9E4D-4595-8B36-31B3D1E56800}"/>
               </a:ext>
             </a:extLst>
           </p:cNvPr>
@@ -20011,7 +18001,7 @@
           <p:cNvPr id="3" name="">
             <a:extLst xmlns:a="http://schemas.openxmlformats.org/drawingml/2006/main">
               <a:ext uri="{FF2B5EF4-FFF2-40B4-BE49-F238E27FC236}">
-                <a16:creationId xmlns:a16="http://schemas.microsoft.com/office/drawing/2014/main" id="{A87F5B4C-319D-4EBF-987A-719EF26DA79C}"/>
+                <a16:creationId xmlns:a16="http://schemas.microsoft.com/office/drawing/2014/main" id="{4BC296E5-C422-47A8-9077-D64012DBC9B0}"/>
               </a:ext>
             </a:extLst>
           </p:cNvPr>
@@ -20068,7 +18058,7 @@
           <p:cNvPr id="4" name="">
             <a:extLst xmlns:a="http://schemas.openxmlformats.org/drawingml/2006/main">
               <a:ext uri="{FF2B5EF4-FFF2-40B4-BE49-F238E27FC236}">
-                <a16:creationId xmlns:a16="http://schemas.microsoft.com/office/drawing/2014/main" id="{7A326429-FEEF-4EF3-A0A9-7A17E9EE604C}"/>
+                <a16:creationId xmlns:a16="http://schemas.microsoft.com/office/drawing/2014/main" id="{F3F674DC-9FB2-4BA5-8592-DA8FEEE9B7A6}"/>
               </a:ext>
             </a:extLst>
           </p:cNvPr>
@@ -20125,7 +18115,7 @@
           <p:cNvPr id="5" name="">
             <a:extLst xmlns:a="http://schemas.openxmlformats.org/drawingml/2006/main">
               <a:ext uri="{FF2B5EF4-FFF2-40B4-BE49-F238E27FC236}">
-                <a16:creationId xmlns:a16="http://schemas.microsoft.com/office/drawing/2014/main" id="{B388E84D-0790-48B9-A4A0-62217E6CCDC7}"/>
+                <a16:creationId xmlns:a16="http://schemas.microsoft.com/office/drawing/2014/main" id="{8DF11AA2-2EFA-48B2-8B3D-49BCE88C8FC0}"/>
               </a:ext>
             </a:extLst>
           </p:cNvPr>
@@ -20182,7 +18172,7 @@
           <p:cNvPr id="6" name="">
             <a:extLst xmlns:a="http://schemas.openxmlformats.org/drawingml/2006/main">
               <a:ext uri="{FF2B5EF4-FFF2-40B4-BE49-F238E27FC236}">
-                <a16:creationId xmlns:a16="http://schemas.microsoft.com/office/drawing/2014/main" id="{D5896F79-B015-4B0C-A382-8DF4032D28DB}"/>
+                <a16:creationId xmlns:a16="http://schemas.microsoft.com/office/drawing/2014/main" id="{EE187EFB-4C54-4ED3-8535-212FFA5EC5F1}"/>
               </a:ext>
             </a:extLst>
           </p:cNvPr>
@@ -20239,7 +18229,7 @@
           <p:cNvPr id="7" name="">
             <a:extLst xmlns:a="http://schemas.openxmlformats.org/drawingml/2006/main">
               <a:ext uri="{FF2B5EF4-FFF2-40B4-BE49-F238E27FC236}">
-                <a16:creationId xmlns:a16="http://schemas.microsoft.com/office/drawing/2014/main" id="{281E38E0-9BDA-4444-864C-6A5FE366096F}"/>
+                <a16:creationId xmlns:a16="http://schemas.microsoft.com/office/drawing/2014/main" id="{931C6B5E-1DCA-4973-B840-8B5527CEAF98}"/>
               </a:ext>
             </a:extLst>
           </p:cNvPr>
@@ -20296,7 +18286,7 @@
           <p:cNvPr id="8" name="">
             <a:extLst xmlns:a="http://schemas.openxmlformats.org/drawingml/2006/main">
               <a:ext uri="{FF2B5EF4-FFF2-40B4-BE49-F238E27FC236}">
-                <a16:creationId xmlns:a16="http://schemas.microsoft.com/office/drawing/2014/main" id="{D59CA6AE-F627-4A86-A6A1-76AEDEE1C77E}"/>
+                <a16:creationId xmlns:a16="http://schemas.microsoft.com/office/drawing/2014/main" id="{F4964C72-DBE2-46F6-A397-1BCE0F1C1066}"/>
               </a:ext>
             </a:extLst>
           </p:cNvPr>
@@ -20353,7 +18343,7 @@
           <p:cNvPr id="9" name="">
             <a:extLst xmlns:a="http://schemas.openxmlformats.org/drawingml/2006/main">
               <a:ext uri="{FF2B5EF4-FFF2-40B4-BE49-F238E27FC236}">
-                <a16:creationId xmlns:a16="http://schemas.microsoft.com/office/drawing/2014/main" id="{D7D0D5FE-36EB-4F8B-9E65-45DA298B9078}"/>
+                <a16:creationId xmlns:a16="http://schemas.microsoft.com/office/drawing/2014/main" id="{30164D5D-28A8-48CD-8C8A-FFC851C0041B}"/>
               </a:ext>
             </a:extLst>
           </p:cNvPr>
@@ -20410,7 +18400,7 @@
           <p:cNvPr id="10" name="">
             <a:extLst xmlns:a="http://schemas.openxmlformats.org/drawingml/2006/main">
               <a:ext uri="{FF2B5EF4-FFF2-40B4-BE49-F238E27FC236}">
-                <a16:creationId xmlns:a16="http://schemas.microsoft.com/office/drawing/2014/main" id="{EF1BD63D-EBA2-47E7-9518-258B4627C8DF}"/>
+                <a16:creationId xmlns:a16="http://schemas.microsoft.com/office/drawing/2014/main" id="{1C687AB5-6600-4F7E-A922-9C36C3D6E7E9}"/>
               </a:ext>
             </a:extLst>
           </p:cNvPr>
@@ -20465,7 +18455,7 @@
     </p:spTree>
     <p:extLst>
       <p:ext uri="{BB962C8B-B14F-4D97-AF65-F5344CB8AC3E}">
-        <p14:creationId xmlns:p14="http://schemas.microsoft.com/office/powerpoint/2010/main" val="2124618979"/>
+        <p14:creationId xmlns:p14="http://schemas.microsoft.com/office/powerpoint/2010/main" val="279471786"/>
       </p:ext>
     </p:extLst>
   </p:cSld>
@@ -20496,7 +18486,7 @@
           <p:cNvPr id="11" name="">
             <a:extLst xmlns:a="http://schemas.openxmlformats.org/drawingml/2006/main">
               <a:ext uri="{FF2B5EF4-FFF2-40B4-BE49-F238E27FC236}">
-                <a16:creationId xmlns:a16="http://schemas.microsoft.com/office/drawing/2014/main" id="{A4D23C7B-BB18-4F6C-8673-B955171D0D4A}"/>
+                <a16:creationId xmlns:a16="http://schemas.microsoft.com/office/drawing/2014/main" id="{B07D70A7-7157-4BF5-B3E3-CE0E5C59E983}"/>
               </a:ext>
             </a:extLst>
           </p:cNvPr>
@@ -20526,7 +18516,7 @@
           <p:cNvPr id="2" name="">
             <a:extLst xmlns:a="http://schemas.openxmlformats.org/drawingml/2006/main">
               <a:ext uri="{FF2B5EF4-FFF2-40B4-BE49-F238E27FC236}">
-                <a16:creationId xmlns:a16="http://schemas.microsoft.com/office/drawing/2014/main" id="{5068CC1C-98C9-4886-9AE2-A5C3254A84CD}"/>
+                <a16:creationId xmlns:a16="http://schemas.microsoft.com/office/drawing/2014/main" id="{5AE5A790-EF61-4FEA-A05F-5AB45F3EC1B0}"/>
               </a:ext>
             </a:extLst>
           </p:cNvPr>
@@ -20583,7 +18573,7 @@
           <p:cNvPr id="3" name="">
             <a:extLst xmlns:a="http://schemas.openxmlformats.org/drawingml/2006/main">
               <a:ext uri="{FF2B5EF4-FFF2-40B4-BE49-F238E27FC236}">
-                <a16:creationId xmlns:a16="http://schemas.microsoft.com/office/drawing/2014/main" id="{5466D203-F8D3-4642-AC02-DAA02A539EDB}"/>
+                <a16:creationId xmlns:a16="http://schemas.microsoft.com/office/drawing/2014/main" id="{5FD868E0-B68E-4747-BF27-B6A0FE3BDA52}"/>
               </a:ext>
             </a:extLst>
           </p:cNvPr>
@@ -20640,7 +18630,7 @@
           <p:cNvPr id="4" name="">
             <a:extLst xmlns:a="http://schemas.openxmlformats.org/drawingml/2006/main">
               <a:ext uri="{FF2B5EF4-FFF2-40B4-BE49-F238E27FC236}">
-                <a16:creationId xmlns:a16="http://schemas.microsoft.com/office/drawing/2014/main" id="{51F3520F-01DB-40AC-B95D-ACC3C3C22B80}"/>
+                <a16:creationId xmlns:a16="http://schemas.microsoft.com/office/drawing/2014/main" id="{A88B96D0-7D70-4122-8D4F-97216A0C687F}"/>
               </a:ext>
             </a:extLst>
           </p:cNvPr>
@@ -20697,7 +18687,7 @@
           <p:cNvPr id="5" name="">
             <a:extLst xmlns:a="http://schemas.openxmlformats.org/drawingml/2006/main">
               <a:ext uri="{FF2B5EF4-FFF2-40B4-BE49-F238E27FC236}">
-                <a16:creationId xmlns:a16="http://schemas.microsoft.com/office/drawing/2014/main" id="{97349B52-0EEF-4396-BDB0-3E733FF96012}"/>
+                <a16:creationId xmlns:a16="http://schemas.microsoft.com/office/drawing/2014/main" id="{D1604084-686E-4EB5-AEC5-B93F09668467}"/>
               </a:ext>
             </a:extLst>
           </p:cNvPr>
@@ -20754,7 +18744,7 @@
           <p:cNvPr id="6" name="">
             <a:extLst xmlns:a="http://schemas.openxmlformats.org/drawingml/2006/main">
               <a:ext uri="{FF2B5EF4-FFF2-40B4-BE49-F238E27FC236}">
-                <a16:creationId xmlns:a16="http://schemas.microsoft.com/office/drawing/2014/main" id="{C286C12E-F187-4425-BBF5-C0323EF95218}"/>
+                <a16:creationId xmlns:a16="http://schemas.microsoft.com/office/drawing/2014/main" id="{224AA6BC-788C-448F-BDAF-EC43D60D3C04}"/>
               </a:ext>
             </a:extLst>
           </p:cNvPr>
@@ -20811,7 +18801,7 @@
           <p:cNvPr id="7" name="">
             <a:extLst xmlns:a="http://schemas.openxmlformats.org/drawingml/2006/main">
               <a:ext uri="{FF2B5EF4-FFF2-40B4-BE49-F238E27FC236}">
-                <a16:creationId xmlns:a16="http://schemas.microsoft.com/office/drawing/2014/main" id="{0D7807B4-F0B5-4385-80DA-0060A184DA93}"/>
+                <a16:creationId xmlns:a16="http://schemas.microsoft.com/office/drawing/2014/main" id="{A069EE46-9ED5-4215-A103-5AC6CB8250DD}"/>
               </a:ext>
             </a:extLst>
           </p:cNvPr>
@@ -20868,7 +18858,7 @@
           <p:cNvPr id="8" name="">
             <a:extLst xmlns:a="http://schemas.openxmlformats.org/drawingml/2006/main">
               <a:ext uri="{FF2B5EF4-FFF2-40B4-BE49-F238E27FC236}">
-                <a16:creationId xmlns:a16="http://schemas.microsoft.com/office/drawing/2014/main" id="{4E1784B9-6637-4ED6-B896-7610B9F0BEC6}"/>
+                <a16:creationId xmlns:a16="http://schemas.microsoft.com/office/drawing/2014/main" id="{DC5F597A-B14B-4B7B-B245-AE0B6E9D6079}"/>
               </a:ext>
             </a:extLst>
           </p:cNvPr>
@@ -20925,7 +18915,7 @@
           <p:cNvPr id="9" name="">
             <a:extLst xmlns:a="http://schemas.openxmlformats.org/drawingml/2006/main">
               <a:ext uri="{FF2B5EF4-FFF2-40B4-BE49-F238E27FC236}">
-                <a16:creationId xmlns:a16="http://schemas.microsoft.com/office/drawing/2014/main" id="{58BDF655-15FA-45BC-87AC-F4F0C277B2AD}"/>
+                <a16:creationId xmlns:a16="http://schemas.microsoft.com/office/drawing/2014/main" id="{ABC5020D-360C-48D7-AC4F-2337CF495512}"/>
               </a:ext>
             </a:extLst>
           </p:cNvPr>
@@ -20982,7 +18972,7 @@
           <p:cNvPr id="10" name="">
             <a:extLst xmlns:a="http://schemas.openxmlformats.org/drawingml/2006/main">
               <a:ext uri="{FF2B5EF4-FFF2-40B4-BE49-F238E27FC236}">
-                <a16:creationId xmlns:a16="http://schemas.microsoft.com/office/drawing/2014/main" id="{1DB405CD-FF97-474C-A49E-4DE51AB22916}"/>
+                <a16:creationId xmlns:a16="http://schemas.microsoft.com/office/drawing/2014/main" id="{19A3476D-A87B-4B38-BEF2-2AE1AD210D92}"/>
               </a:ext>
             </a:extLst>
           </p:cNvPr>
@@ -21037,7 +19027,7 @@
     </p:spTree>
     <p:extLst>
       <p:ext uri="{BB962C8B-B14F-4D97-AF65-F5344CB8AC3E}">
-        <p14:creationId xmlns:p14="http://schemas.microsoft.com/office/powerpoint/2010/main" val="2014200067"/>
+        <p14:creationId xmlns:p14="http://schemas.microsoft.com/office/powerpoint/2010/main" val="1010858910"/>
       </p:ext>
     </p:extLst>
   </p:cSld>
@@ -21068,7 +19058,7 @@
           <p:cNvPr id="11" name="">
             <a:extLst xmlns:a="http://schemas.openxmlformats.org/drawingml/2006/main">
               <a:ext uri="{FF2B5EF4-FFF2-40B4-BE49-F238E27FC236}">
-                <a16:creationId xmlns:a16="http://schemas.microsoft.com/office/drawing/2014/main" id="{EA655A97-6C85-4799-8CB5-4A031E054E6E}"/>
+                <a16:creationId xmlns:a16="http://schemas.microsoft.com/office/drawing/2014/main" id="{4EE38D61-6B28-4CF6-BF57-C2F84DDA2295}"/>
               </a:ext>
             </a:extLst>
           </p:cNvPr>
@@ -21098,7 +19088,7 @@
           <p:cNvPr id="2" name="">
             <a:extLst xmlns:a="http://schemas.openxmlformats.org/drawingml/2006/main">
               <a:ext uri="{FF2B5EF4-FFF2-40B4-BE49-F238E27FC236}">
-                <a16:creationId xmlns:a16="http://schemas.microsoft.com/office/drawing/2014/main" id="{937EAF77-7ECC-4E9E-90E0-A03E062EADFE}"/>
+                <a16:creationId xmlns:a16="http://schemas.microsoft.com/office/drawing/2014/main" id="{3725826C-F9D3-4190-8F6A-457223D48C23}"/>
               </a:ext>
             </a:extLst>
           </p:cNvPr>
@@ -21155,7 +19145,7 @@
           <p:cNvPr id="3" name="">
             <a:extLst xmlns:a="http://schemas.openxmlformats.org/drawingml/2006/main">
               <a:ext uri="{FF2B5EF4-FFF2-40B4-BE49-F238E27FC236}">
-                <a16:creationId xmlns:a16="http://schemas.microsoft.com/office/drawing/2014/main" id="{B7188714-54BF-40FC-B77E-CBE83DB25637}"/>
+                <a16:creationId xmlns:a16="http://schemas.microsoft.com/office/drawing/2014/main" id="{4CE5765A-5580-49A5-953B-793F47E55D75}"/>
               </a:ext>
             </a:extLst>
           </p:cNvPr>
@@ -21212,7 +19202,7 @@
           <p:cNvPr id="4" name="">
             <a:extLst xmlns:a="http://schemas.openxmlformats.org/drawingml/2006/main">
               <a:ext uri="{FF2B5EF4-FFF2-40B4-BE49-F238E27FC236}">
-                <a16:creationId xmlns:a16="http://schemas.microsoft.com/office/drawing/2014/main" id="{B7054B7E-BA22-4042-BAB2-78F49382633F}"/>
+                <a16:creationId xmlns:a16="http://schemas.microsoft.com/office/drawing/2014/main" id="{4B7CADB2-BC4E-4CB1-B23A-CE974CABCC6D}"/>
               </a:ext>
             </a:extLst>
           </p:cNvPr>
@@ -21269,7 +19259,7 @@
           <p:cNvPr id="5" name="">
             <a:extLst xmlns:a="http://schemas.openxmlformats.org/drawingml/2006/main">
               <a:ext uri="{FF2B5EF4-FFF2-40B4-BE49-F238E27FC236}">
-                <a16:creationId xmlns:a16="http://schemas.microsoft.com/office/drawing/2014/main" id="{2610477A-4128-4000-833A-69FA37C018C0}"/>
+                <a16:creationId xmlns:a16="http://schemas.microsoft.com/office/drawing/2014/main" id="{7AC1A8FD-D123-4F08-91C3-302D1ADE5EA9}"/>
               </a:ext>
             </a:extLst>
           </p:cNvPr>
@@ -21326,7 +19316,7 @@
           <p:cNvPr id="6" name="">
             <a:extLst xmlns:a="http://schemas.openxmlformats.org/drawingml/2006/main">
               <a:ext uri="{FF2B5EF4-FFF2-40B4-BE49-F238E27FC236}">
-                <a16:creationId xmlns:a16="http://schemas.microsoft.com/office/drawing/2014/main" id="{C08CC121-B061-4937-A12F-58A294733233}"/>
+                <a16:creationId xmlns:a16="http://schemas.microsoft.com/office/drawing/2014/main" id="{E9B84C5E-9080-4257-89E6-494DCB879687}"/>
               </a:ext>
             </a:extLst>
           </p:cNvPr>
@@ -21383,7 +19373,7 @@
           <p:cNvPr id="7" name="">
             <a:extLst xmlns:a="http://schemas.openxmlformats.org/drawingml/2006/main">
               <a:ext uri="{FF2B5EF4-FFF2-40B4-BE49-F238E27FC236}">
-                <a16:creationId xmlns:a16="http://schemas.microsoft.com/office/drawing/2014/main" id="{313B3376-A342-412C-818B-4A7B9B3474FA}"/>
+                <a16:creationId xmlns:a16="http://schemas.microsoft.com/office/drawing/2014/main" id="{E2D33E01-AA42-495F-9EA5-892C62F7023E}"/>
               </a:ext>
             </a:extLst>
           </p:cNvPr>
@@ -21440,7 +19430,7 @@
           <p:cNvPr id="8" name="">
             <a:extLst xmlns:a="http://schemas.openxmlformats.org/drawingml/2006/main">
               <a:ext uri="{FF2B5EF4-FFF2-40B4-BE49-F238E27FC236}">
-                <a16:creationId xmlns:a16="http://schemas.microsoft.com/office/drawing/2014/main" id="{3D4D69E7-E2F3-4F2B-B7D6-FAE8C5705E4C}"/>
+                <a16:creationId xmlns:a16="http://schemas.microsoft.com/office/drawing/2014/main" id="{5A99F6D5-67B2-45DA-9A62-1E7FE0507C31}"/>
               </a:ext>
             </a:extLst>
           </p:cNvPr>
@@ -21497,7 +19487,7 @@
           <p:cNvPr id="9" name="">
             <a:extLst xmlns:a="http://schemas.openxmlformats.org/drawingml/2006/main">
               <a:ext uri="{FF2B5EF4-FFF2-40B4-BE49-F238E27FC236}">
-                <a16:creationId xmlns:a16="http://schemas.microsoft.com/office/drawing/2014/main" id="{B581E03E-51E4-4E97-80C7-89875BA19F13}"/>
+                <a16:creationId xmlns:a16="http://schemas.microsoft.com/office/drawing/2014/main" id="{6AA0DF54-9AB7-4D74-84A5-ED6A83A2DBD7}"/>
               </a:ext>
             </a:extLst>
           </p:cNvPr>
@@ -21554,7 +19544,7 @@
           <p:cNvPr id="10" name="">
             <a:extLst xmlns:a="http://schemas.openxmlformats.org/drawingml/2006/main">
               <a:ext uri="{FF2B5EF4-FFF2-40B4-BE49-F238E27FC236}">
-                <a16:creationId xmlns:a16="http://schemas.microsoft.com/office/drawing/2014/main" id="{FD0FB6F0-0216-42AB-A02C-5244B45CB529}"/>
+                <a16:creationId xmlns:a16="http://schemas.microsoft.com/office/drawing/2014/main" id="{18C1EE0C-9C64-4817-8139-75CE6F3FCDAF}"/>
               </a:ext>
             </a:extLst>
           </p:cNvPr>
@@ -21609,7 +19599,7 @@
     </p:spTree>
     <p:extLst>
       <p:ext uri="{BB962C8B-B14F-4D97-AF65-F5344CB8AC3E}">
-        <p14:creationId xmlns:p14="http://schemas.microsoft.com/office/powerpoint/2010/main" val="1003521146"/>
+        <p14:creationId xmlns:p14="http://schemas.microsoft.com/office/powerpoint/2010/main" val="1748600968"/>
       </p:ext>
     </p:extLst>
   </p:cSld>
@@ -21640,7 +19630,7 @@
           <p:cNvPr id="7" name="">
             <a:extLst xmlns:a="http://schemas.openxmlformats.org/drawingml/2006/main">
               <a:ext uri="{FF2B5EF4-FFF2-40B4-BE49-F238E27FC236}">
-                <a16:creationId xmlns:a16="http://schemas.microsoft.com/office/drawing/2014/main" id="{0A495294-86A5-498E-B9CA-A77E45438D0B}"/>
+                <a16:creationId xmlns:a16="http://schemas.microsoft.com/office/drawing/2014/main" id="{90929542-B630-46FC-A0A9-F4CCA2A32CA0}"/>
               </a:ext>
             </a:extLst>
           </p:cNvPr>
@@ -21670,7 +19660,7 @@
           <p:cNvPr id="2" name="">
             <a:extLst xmlns:a="http://schemas.openxmlformats.org/drawingml/2006/main">
               <a:ext uri="{FF2B5EF4-FFF2-40B4-BE49-F238E27FC236}">
-                <a16:creationId xmlns:a16="http://schemas.microsoft.com/office/drawing/2014/main" id="{5F542315-EB3F-457D-82C1-17F48155A2A7}"/>
+                <a16:creationId xmlns:a16="http://schemas.microsoft.com/office/drawing/2014/main" id="{4E122D14-9860-4B0B-AB82-60A38F0E1CB4}"/>
               </a:ext>
             </a:extLst>
           </p:cNvPr>
@@ -21727,7 +19717,7 @@
           <p:cNvPr id="3" name="">
             <a:extLst xmlns:a="http://schemas.openxmlformats.org/drawingml/2006/main">
               <a:ext uri="{FF2B5EF4-FFF2-40B4-BE49-F238E27FC236}">
-                <a16:creationId xmlns:a16="http://schemas.microsoft.com/office/drawing/2014/main" id="{97AFEB2F-AE04-4C6B-8B4E-8B56B9677F0A}"/>
+                <a16:creationId xmlns:a16="http://schemas.microsoft.com/office/drawing/2014/main" id="{F29C563A-465B-4178-AC04-8D9F67B37FAF}"/>
               </a:ext>
             </a:extLst>
           </p:cNvPr>
@@ -21784,7 +19774,7 @@
           <p:cNvPr id="4" name="">
             <a:extLst xmlns:a="http://schemas.openxmlformats.org/drawingml/2006/main">
               <a:ext uri="{FF2B5EF4-FFF2-40B4-BE49-F238E27FC236}">
-                <a16:creationId xmlns:a16="http://schemas.microsoft.com/office/drawing/2014/main" id="{4A059E4E-EF2F-48D0-B659-AC0F1836D30B}"/>
+                <a16:creationId xmlns:a16="http://schemas.microsoft.com/office/drawing/2014/main" id="{43E17371-BB62-40DF-9060-C246E3EBB18A}"/>
               </a:ext>
             </a:extLst>
           </p:cNvPr>
@@ -21814,7 +19804,7 @@
           <p:cNvPr id="5" name="">
             <a:extLst xmlns:a="http://schemas.openxmlformats.org/drawingml/2006/main">
               <a:ext uri="{FF2B5EF4-FFF2-40B4-BE49-F238E27FC236}">
-                <a16:creationId xmlns:a16="http://schemas.microsoft.com/office/drawing/2014/main" id="{3C5B19CD-2475-4EC0-9E86-ABC079BCAE5C}"/>
+                <a16:creationId xmlns:a16="http://schemas.microsoft.com/office/drawing/2014/main" id="{50417F6B-417C-4FB0-8D54-6C478417BBC2}"/>
               </a:ext>
             </a:extLst>
           </p:cNvPr>
@@ -21871,7 +19861,7 @@
           <p:cNvPr id="6" name="">
             <a:extLst xmlns:a="http://schemas.openxmlformats.org/drawingml/2006/main">
               <a:ext uri="{FF2B5EF4-FFF2-40B4-BE49-F238E27FC236}">
-                <a16:creationId xmlns:a16="http://schemas.microsoft.com/office/drawing/2014/main" id="{BE465E97-3D73-4729-83B0-AD5644DE7437}"/>
+                <a16:creationId xmlns:a16="http://schemas.microsoft.com/office/drawing/2014/main" id="{702D4E34-4F9C-466F-A9A2-D4EF0E65F3BB}"/>
               </a:ext>
             </a:extLst>
           </p:cNvPr>
@@ -21926,7 +19916,7 @@
     </p:spTree>
     <p:extLst>
       <p:ext uri="{BB962C8B-B14F-4D97-AF65-F5344CB8AC3E}">
-        <p14:creationId xmlns:p14="http://schemas.microsoft.com/office/powerpoint/2010/main" val="1266528784"/>
+        <p14:creationId xmlns:p14="http://schemas.microsoft.com/office/powerpoint/2010/main" val="1741034598"/>
       </p:ext>
     </p:extLst>
   </p:cSld>
@@ -21957,7 +19947,7 @@
           <p:cNvPr id="11" name="">
             <a:extLst xmlns:a="http://schemas.openxmlformats.org/drawingml/2006/main">
               <a:ext uri="{FF2B5EF4-FFF2-40B4-BE49-F238E27FC236}">
-                <a16:creationId xmlns:a16="http://schemas.microsoft.com/office/drawing/2014/main" id="{C599E988-08D1-4012-BFA2-C21775052F0C}"/>
+                <a16:creationId xmlns:a16="http://schemas.microsoft.com/office/drawing/2014/main" id="{737D3B2F-1ADD-4615-AAAC-405C5C82690A}"/>
               </a:ext>
             </a:extLst>
           </p:cNvPr>
@@ -21987,7 +19977,7 @@
           <p:cNvPr id="2" name="">
             <a:extLst xmlns:a="http://schemas.openxmlformats.org/drawingml/2006/main">
               <a:ext uri="{FF2B5EF4-FFF2-40B4-BE49-F238E27FC236}">
-                <a16:creationId xmlns:a16="http://schemas.microsoft.com/office/drawing/2014/main" id="{114EC75E-3076-464C-9553-27F2EFBCBE5E}"/>
+                <a16:creationId xmlns:a16="http://schemas.microsoft.com/office/drawing/2014/main" id="{B8814E82-2942-44E2-A7F6-A276DCE80987}"/>
               </a:ext>
             </a:extLst>
           </p:cNvPr>
@@ -22044,7 +20034,7 @@
           <p:cNvPr id="3" name="">
             <a:extLst xmlns:a="http://schemas.openxmlformats.org/drawingml/2006/main">
               <a:ext uri="{FF2B5EF4-FFF2-40B4-BE49-F238E27FC236}">
-                <a16:creationId xmlns:a16="http://schemas.microsoft.com/office/drawing/2014/main" id="{4511B66A-F276-4CB7-B0D5-EC8C348CDBF3}"/>
+                <a16:creationId xmlns:a16="http://schemas.microsoft.com/office/drawing/2014/main" id="{1BFD72CD-A704-4314-B3EC-09179EF5DF3C}"/>
               </a:ext>
             </a:extLst>
           </p:cNvPr>
@@ -22101,7 +20091,7 @@
           <p:cNvPr id="4" name="">
             <a:extLst xmlns:a="http://schemas.openxmlformats.org/drawingml/2006/main">
               <a:ext uri="{FF2B5EF4-FFF2-40B4-BE49-F238E27FC236}">
-                <a16:creationId xmlns:a16="http://schemas.microsoft.com/office/drawing/2014/main" id="{B3B5120F-4243-489E-8DD2-DE0C2BFC1764}"/>
+                <a16:creationId xmlns:a16="http://schemas.microsoft.com/office/drawing/2014/main" id="{DDFC9732-BA26-4682-952F-5B8EEEEECE12}"/>
               </a:ext>
             </a:extLst>
           </p:cNvPr>
@@ -22158,7 +20148,7 @@
           <p:cNvPr id="5" name="">
             <a:extLst xmlns:a="http://schemas.openxmlformats.org/drawingml/2006/main">
               <a:ext uri="{FF2B5EF4-FFF2-40B4-BE49-F238E27FC236}">
-                <a16:creationId xmlns:a16="http://schemas.microsoft.com/office/drawing/2014/main" id="{96E95D54-57DF-49C4-AA54-5A78AC6937EC}"/>
+                <a16:creationId xmlns:a16="http://schemas.microsoft.com/office/drawing/2014/main" id="{1D36F7DE-DED7-486D-91C7-46A67121B4BE}"/>
               </a:ext>
             </a:extLst>
           </p:cNvPr>
@@ -22215,7 +20205,7 @@
           <p:cNvPr id="6" name="">
             <a:extLst xmlns:a="http://schemas.openxmlformats.org/drawingml/2006/main">
               <a:ext uri="{FF2B5EF4-FFF2-40B4-BE49-F238E27FC236}">
-                <a16:creationId xmlns:a16="http://schemas.microsoft.com/office/drawing/2014/main" id="{CB1F4CD9-2C03-478F-9B86-78EE57C86BA3}"/>
+                <a16:creationId xmlns:a16="http://schemas.microsoft.com/office/drawing/2014/main" id="{4F5C3EFB-425E-4834-BF56-F072030B9651}"/>
               </a:ext>
             </a:extLst>
           </p:cNvPr>
@@ -22272,7 +20262,7 @@
           <p:cNvPr id="7" name="">
             <a:extLst xmlns:a="http://schemas.openxmlformats.org/drawingml/2006/main">
               <a:ext uri="{FF2B5EF4-FFF2-40B4-BE49-F238E27FC236}">
-                <a16:creationId xmlns:a16="http://schemas.microsoft.com/office/drawing/2014/main" id="{478DB911-5FCD-40D4-9558-A6970BCCCFF5}"/>
+                <a16:creationId xmlns:a16="http://schemas.microsoft.com/office/drawing/2014/main" id="{5085FDB9-14EA-4722-9333-EC55528451E8}"/>
               </a:ext>
             </a:extLst>
           </p:cNvPr>
@@ -22329,7 +20319,7 @@
           <p:cNvPr id="8" name="">
             <a:extLst xmlns:a="http://schemas.openxmlformats.org/drawingml/2006/main">
               <a:ext uri="{FF2B5EF4-FFF2-40B4-BE49-F238E27FC236}">
-                <a16:creationId xmlns:a16="http://schemas.microsoft.com/office/drawing/2014/main" id="{9404A063-38A5-4DDE-8031-43805573D508}"/>
+                <a16:creationId xmlns:a16="http://schemas.microsoft.com/office/drawing/2014/main" id="{C4810A4B-5668-450A-9DF5-CB42260D2281}"/>
               </a:ext>
             </a:extLst>
           </p:cNvPr>
@@ -22386,7 +20376,7 @@
           <p:cNvPr id="9" name="">
             <a:extLst xmlns:a="http://schemas.openxmlformats.org/drawingml/2006/main">
               <a:ext uri="{FF2B5EF4-FFF2-40B4-BE49-F238E27FC236}">
-                <a16:creationId xmlns:a16="http://schemas.microsoft.com/office/drawing/2014/main" id="{31E43F19-3BC1-4C85-AFFF-C0A43BD8BDD3}"/>
+                <a16:creationId xmlns:a16="http://schemas.microsoft.com/office/drawing/2014/main" id="{120E6BAC-747B-427E-BEEC-A62A4CF3082B}"/>
               </a:ext>
             </a:extLst>
           </p:cNvPr>
@@ -22443,7 +20433,7 @@
           <p:cNvPr id="10" name="">
             <a:extLst xmlns:a="http://schemas.openxmlformats.org/drawingml/2006/main">
               <a:ext uri="{FF2B5EF4-FFF2-40B4-BE49-F238E27FC236}">
-                <a16:creationId xmlns:a16="http://schemas.microsoft.com/office/drawing/2014/main" id="{39B1DAB7-80DB-458F-9F8A-4122E68DE764}"/>
+                <a16:creationId xmlns:a16="http://schemas.microsoft.com/office/drawing/2014/main" id="{FD569F1B-3599-4200-9507-64A164389859}"/>
               </a:ext>
             </a:extLst>
           </p:cNvPr>
@@ -22498,7 +20488,7 @@
     </p:spTree>
     <p:extLst>
       <p:ext uri="{BB962C8B-B14F-4D97-AF65-F5344CB8AC3E}">
-        <p14:creationId xmlns:p14="http://schemas.microsoft.com/office/powerpoint/2010/main" val="350281672"/>
+        <p14:creationId xmlns:p14="http://schemas.microsoft.com/office/powerpoint/2010/main" val="429389100"/>
       </p:ext>
     </p:extLst>
   </p:cSld>

--- a/IUEA_Teaching_Plan/decks/CML3112_Week15_Design_Infrastructure.pptx
+++ b/IUEA_Teaching_Plan/decks/CML3112_Week15_Design_Infrastructure.pptx
@@ -426,7 +426,7 @@
 </file>
 
 <file path=ppt/notesSlides/notesSlide1.xml><?xml version="1.0" encoding="utf-8"?>
-<p:notes xmlns:p="http://schemas.openxmlformats.org/presentationml/2006/main">
+<p:notes xmlns:a="http://schemas.openxmlformats.org/drawingml/2006/main" xmlns:p="http://schemas.openxmlformats.org/presentationml/2006/main">
   <p:cSld>
     <p:spTree>
       <p:nvGrpSpPr>
@@ -435,13 +435,13 @@
         <p:nvPr/>
       </p:nvGrpSpPr>
       <p:grpSpPr>
-        <a:xfrm xmlns:a="http://schemas.openxmlformats.org/drawingml/2006/main"/>
+        <a:xfrm/>
       </p:grpSpPr>
       <p:sp>
         <p:nvSpPr>
           <p:cNvPr id="2" name="Slide Image Placeholder 1"/>
           <p:cNvSpPr>
-            <a:spLocks xmlns:a="http://schemas.openxmlformats.org/drawingml/2006/main" noGrp="1"/>
+            <a:spLocks noGrp="1"/>
           </p:cNvSpPr>
           <p:nvPr>
             <p:ph type="sldImg" idx="0"/>
@@ -453,7 +453,7 @@
         <p:nvSpPr>
           <p:cNvPr id="3" name="Notes Placeholder 2"/>
           <p:cNvSpPr>
-            <a:spLocks xmlns:a="http://schemas.openxmlformats.org/drawingml/2006/main" noGrp="1"/>
+            <a:spLocks noGrp="1"/>
           </p:cNvSpPr>
           <p:nvPr>
             <p:ph type="body" idx="1"/>
@@ -461,106 +461,91 @@
         </p:nvSpPr>
         <p:spPr/>
         <p:txBody>
-          <a:bodyPr xmlns:a="http://schemas.openxmlformats.org/drawingml/2006/main"/>
-          <a:lstStyle xmlns:a="http://schemas.openxmlformats.org/drawingml/2006/main"/>
-          <a:p xmlns:a="http://schemas.openxmlformats.org/drawingml/2006/main">
-            <a:r>
-              <a:t>PURPOSE</a:t>
-            </a:r>
-          </a:p>
-          <a:p xmlns:a="http://schemas.openxmlformats.org/drawingml/2006/main">
+          <a:bodyPr/>
+          <a:lstStyle/>
+          <a:p>
             <a:r>
               <a:t>Presenting the project and individual contribution</a:t>
             </a:r>
           </a:p>
-          <a:p xmlns:a="http://schemas.openxmlformats.org/drawingml/2006/main">
+          <a:p>
+            <a:r>
+              <a:t>CML3112, Week 15, slide 1</a:t>
+            </a:r>
+          </a:p>
+          <a:p>
             <a:r>
               <a:t/>
             </a:r>
           </a:p>
-          <a:p xmlns:a="http://schemas.openxmlformats.org/drawingml/2006/main">
-            <a:r>
-              <a:t>CONNECT</a:t>
-            </a:r>
-          </a:p>
-          <a:p xmlns:a="http://schemas.openxmlformats.org/drawingml/2006/main">
-            <a:r>
-              <a:t>Previous slide: the preceding week.</a:t>
-            </a:r>
-          </a:p>
-          <a:p xmlns:a="http://schemas.openxmlformats.org/drawingml/2006/main">
+          <a:p>
+            <a:r>
+              <a:t>Explanation to give</a:t>
+            </a:r>
+          </a:p>
+          <a:p>
+            <a:r>
+              <a:t>Explain a supported finding, its limitation and the individual work behind it. The team project and each learner’s defence are distinct evidence.</a:t>
+            </a:r>
+          </a:p>
+          <a:p>
             <a:r>
               <a:t/>
             </a:r>
           </a:p>
-          <a:p xmlns:a="http://schemas.openxmlformats.org/drawingml/2006/main">
-            <a:r>
-              <a:t>EXPLAIN</a:t>
-            </a:r>
-          </a:p>
-          <a:p xmlns:a="http://schemas.openxmlformats.org/drawingml/2006/main">
+          <a:p>
+            <a:r>
+              <a:t>Worked illustration / lecturer answer</a:t>
+            </a:r>
+          </a:p>
+          <a:p>
+            <a:r>
+              <a:t>A claim should point to a named plot or result, its target unit, the evaluated sample and the decision it supports. “Our model is good” supplies none of these.</a:t>
+            </a:r>
+          </a:p>
+          <a:p>
+            <a:r>
+              <a:t/>
+            </a:r>
+          </a:p>
+          <a:p>
+            <a:r>
+              <a:t>Misconception to address</a:t>
+            </a:r>
+          </a:p>
+          <a:p>
+            <a:r>
+              <a:t>Use this as an orientation to the lesson. Terms and syntax will be unpacked on their own slides; students do not need to know them in advance.</a:t>
+            </a:r>
+          </a:p>
+          <a:p>
+            <a:r>
+              <a:t/>
+            </a:r>
+          </a:p>
+          <a:p>
+            <a:r>
+              <a:t>On this slide</a:t>
+            </a:r>
+          </a:p>
+          <a:p>
             <a:r>
               <a:t>Civil Engineering and Architecture</a:t>
             </a:r>
           </a:p>
-          <a:p xmlns:a="http://schemas.openxmlformats.org/drawingml/2006/main">
+          <a:p>
             <a:r>
               <a:t/>
             </a:r>
           </a:p>
-          <a:p xmlns:a="http://schemas.openxmlformats.org/drawingml/2006/main">
-            <a:r>
-              <a:t>LECTURER CUE</a:t>
-            </a:r>
-          </a:p>
-          <a:p xmlns:a="http://schemas.openxmlformats.org/drawingml/2006/main">
-            <a:r>
-              <a:t>Use PowerPoint Presenter View for these notes. Teach one example, pause for every learner to predict, then work an analogous example together. The practice notebook is a learning aid, not an extra graded upload.</a:t>
-            </a:r>
-          </a:p>
-          <a:p xmlns:a="http://schemas.openxmlformats.org/drawingml/2006/main">
-            <a:r>
-              <a:t/>
-            </a:r>
-          </a:p>
-          <a:p xmlns:a="http://schemas.openxmlformats.org/drawingml/2006/main">
-            <a:r>
-              <a:t>TEACHING MODE</a:t>
-            </a:r>
-          </a:p>
-          <a:p xmlns:a="http://schemas.openxmlformats.org/drawingml/2006/main">
-            <a:r>
-              <a:t>Demonstrate first. Read each new symbol aloud, trace the values and compare the shown output. Learners repeat worked examples individually after class.</a:t>
-            </a:r>
-          </a:p>
-          <a:p xmlns:a="http://schemas.openxmlformats.org/drawingml/2006/main">
-            <a:r>
-              <a:t/>
-            </a:r>
-          </a:p>
-          <a:p xmlns:a="http://schemas.openxmlformats.org/drawingml/2006/main">
-            <a:r>
-              <a:t>NEXT</a:t>
-            </a:r>
-          </a:p>
-          <a:p xmlns:a="http://schemas.openxmlformats.org/drawingml/2006/main">
-            <a:r>
-              <a:t>Today’s learning.</a:t>
-            </a:r>
-          </a:p>
-          <a:p xmlns:a="http://schemas.openxmlformats.org/drawingml/2006/main">
-            <a:r>
-              <a:t/>
-            </a:r>
-          </a:p>
-          <a:p xmlns:a="http://schemas.openxmlformats.org/drawingml/2006/main">
-            <a:r>
-              <a:t>REFERENCES</a:t>
-            </a:r>
-          </a:p>
-          <a:p xmlns:a="http://schemas.openxmlformats.org/drawingml/2006/main">
-            <a:r>
-              <a:t/>
+          <a:p>
+            <a:r>
+              <a:t>Continue to</a:t>
+            </a:r>
+          </a:p>
+          <a:p>
+            <a:r>
+              <a:t>Today’s learning</a:t>
             </a:r>
           </a:p>
         </p:txBody>
@@ -569,7 +554,7 @@
         <p:nvSpPr>
           <p:cNvPr id="4" name="Slide Number Placeholder 3"/>
           <p:cNvSpPr>
-            <a:spLocks xmlns:a="http://schemas.openxmlformats.org/drawingml/2006/main" noGrp="1"/>
+            <a:spLocks noGrp="1"/>
           </p:cNvSpPr>
           <p:nvPr>
             <p:ph type="sldNum" idx="5"/>
@@ -577,21 +562,21 @@
         </p:nvSpPr>
         <p:spPr/>
         <p:txBody>
-          <a:bodyPr xmlns:a="http://schemas.openxmlformats.org/drawingml/2006/main"/>
-          <a:lstStyle xmlns:a="http://schemas.openxmlformats.org/drawingml/2006/main"/>
-          <a:p xmlns:a="http://schemas.openxmlformats.org/drawingml/2006/main"/>
+          <a:bodyPr/>
+          <a:lstStyle/>
+          <a:p/>
         </p:txBody>
       </p:sp>
     </p:spTree>
   </p:cSld>
   <p:clrMapOvr>
-    <a:masterClrMapping xmlns:a="http://schemas.openxmlformats.org/drawingml/2006/main"/>
+    <a:masterClrMapping/>
   </p:clrMapOvr>
 </p:notes>
 </file>
 
 <file path=ppt/notesSlides/notesSlide10.xml><?xml version="1.0" encoding="utf-8"?>
-<p:notes xmlns:p="http://schemas.openxmlformats.org/presentationml/2006/main">
+<p:notes xmlns:a="http://schemas.openxmlformats.org/drawingml/2006/main" xmlns:p="http://schemas.openxmlformats.org/presentationml/2006/main">
   <p:cSld>
     <p:spTree>
       <p:nvGrpSpPr>
@@ -600,13 +585,13 @@
         <p:nvPr/>
       </p:nvGrpSpPr>
       <p:grpSpPr>
-        <a:xfrm xmlns:a="http://schemas.openxmlformats.org/drawingml/2006/main"/>
+        <a:xfrm/>
       </p:grpSpPr>
       <p:sp>
         <p:nvSpPr>
           <p:cNvPr id="2" name="Slide Image Placeholder 1"/>
           <p:cNvSpPr>
-            <a:spLocks xmlns:a="http://schemas.openxmlformats.org/drawingml/2006/main" noGrp="1"/>
+            <a:spLocks noGrp="1"/>
           </p:cNvSpPr>
           <p:nvPr>
             <p:ph type="sldImg" idx="0"/>
@@ -618,7 +603,7 @@
         <p:nvSpPr>
           <p:cNvPr id="3" name="Notes Placeholder 2"/>
           <p:cNvSpPr>
-            <a:spLocks xmlns:a="http://schemas.openxmlformats.org/drawingml/2006/main" noGrp="1"/>
+            <a:spLocks noGrp="1"/>
           </p:cNvSpPr>
           <p:nvPr>
             <p:ph type="body" idx="1"/>
@@ -626,141 +611,121 @@
         </p:nvSpPr>
         <p:spPr/>
         <p:txBody>
-          <a:bodyPr xmlns:a="http://schemas.openxmlformats.org/drawingml/2006/main"/>
-          <a:lstStyle xmlns:a="http://schemas.openxmlformats.org/drawingml/2006/main"/>
-          <a:p xmlns:a="http://schemas.openxmlformats.org/drawingml/2006/main">
-            <a:r>
-              <a:t>PURPOSE</a:t>
-            </a:r>
-          </a:p>
-          <a:p xmlns:a="http://schemas.openxmlformats.org/drawingml/2006/main">
+          <a:bodyPr/>
+          <a:lstStyle/>
+          <a:p>
             <a:r>
               <a:t>Engineering ML project</a:t>
             </a:r>
           </a:p>
-          <a:p xmlns:a="http://schemas.openxmlformats.org/drawingml/2006/main">
+          <a:p>
+            <a:r>
+              <a:t>CML3112, Week 15, slide 10</a:t>
+            </a:r>
+          </a:p>
+          <a:p>
             <a:r>
               <a:t/>
             </a:r>
           </a:p>
-          <a:p xmlns:a="http://schemas.openxmlformats.org/drawingml/2006/main">
-            <a:r>
-              <a:t>CONNECT</a:t>
-            </a:r>
-          </a:p>
-          <a:p xmlns:a="http://schemas.openxmlformats.org/drawingml/2006/main">
-            <a:r>
-              <a:t>Previous slide: Your evidence.</a:t>
-            </a:r>
-          </a:p>
-          <a:p xmlns:a="http://schemas.openxmlformats.org/drawingml/2006/main">
+          <a:p>
+            <a:r>
+              <a:t>Explanation to give</a:t>
+            </a:r>
+          </a:p>
+          <a:p>
+            <a:r>
+              <a:t>Show the actual markdown answer cell headed My written evidence. This is where the learner explains the choices and the supplied scenario in their own words.</a:t>
+            </a:r>
+          </a:p>
+          <a:p>
             <a:r>
               <a:t/>
             </a:r>
           </a:p>
-          <a:p xmlns:a="http://schemas.openxmlformats.org/drawingml/2006/main">
-            <a:r>
-              <a:t>EXPLAIN</a:t>
-            </a:r>
-          </a:p>
-          <a:p xmlns:a="http://schemas.openxmlformats.org/drawingml/2006/main">
+          <a:p>
+            <a:r>
+              <a:t>Worked illustration / lecturer answer</a:t>
+            </a:r>
+          </a:p>
+          <a:p>
+            <a:r>
+              <a:t>A useful explanation connects a decision to a named result and its limitation: for example, why a training-only median avoids using evaluation information. Describe supplied scenario figures as supplied, not as measurements the learner produced.</a:t>
+            </a:r>
+          </a:p>
+          <a:p>
+            <a:r>
+              <a:t/>
+            </a:r>
+          </a:p>
+          <a:p>
+            <a:r>
+              <a:t>Misconception to address</a:t>
+            </a:r>
+          </a:p>
+          <a:p>
+            <a:r>
+              <a:t>Prompts and copied code comments do not substitute for the learner’s reasoning. Weekly work and tests use the notebook; projects also require their separate readable report.</a:t>
+            </a:r>
+          </a:p>
+          <a:p>
+            <a:r>
+              <a:t/>
+            </a:r>
+          </a:p>
+          <a:p>
+            <a:r>
+              <a:t>On this slide</a:t>
+            </a:r>
+          </a:p>
+          <a:p>
             <a:r>
               <a:t>Write your own explanation in the markdown cell headed `## My written evidence`.</a:t>
             </a:r>
           </a:p>
-          <a:p xmlns:a="http://schemas.openxmlformats.org/drawingml/2006/main">
+          <a:p>
             <a:r>
               <a:t/>
             </a:r>
           </a:p>
-          <a:p xmlns:a="http://schemas.openxmlformats.org/drawingml/2006/main">
+          <a:p>
             <a:r>
               <a:t>Keep that heading.</a:t>
             </a:r>
           </a:p>
-          <a:p xmlns:a="http://schemas.openxmlformats.org/drawingml/2006/main">
+          <a:p>
             <a:r>
               <a:t/>
             </a:r>
           </a:p>
-          <a:p xmlns:a="http://schemas.openxmlformats.org/drawingml/2006/main">
+          <a:p>
             <a:r>
               <a:t>Task prompts and code comments are excluded from reasoning marks.</a:t>
             </a:r>
           </a:p>
-          <a:p xmlns:a="http://schemas.openxmlformats.org/drawingml/2006/main">
+          <a:p>
             <a:r>
               <a:t/>
             </a:r>
           </a:p>
-          <a:p xmlns:a="http://schemas.openxmlformats.org/drawingml/2006/main">
+          <a:p>
             <a:r>
               <a:t>Complete every original rubric criterion below, not just the checked functions.</a:t>
             </a:r>
           </a:p>
-          <a:p xmlns:a="http://schemas.openxmlformats.org/drawingml/2006/main">
+          <a:p>
             <a:r>
               <a:t/>
             </a:r>
           </a:p>
-          <a:p xmlns:a="http://schemas.openxmlformats.org/drawingml/2006/main">
-            <a:r>
-              <a:t>LECTURER CUE</a:t>
-            </a:r>
-          </a:p>
-          <a:p xmlns:a="http://schemas.openxmlformats.org/drawingml/2006/main">
-            <a:r>
-              <a:t># CML3112 ML_PROJECT: Engineering ML project — variant A</a:t>
-            </a:r>
-          </a:p>
-          <a:p xmlns:a="http://schemas.openxmlformats.org/drawingml/2006/main">
-            <a:r>
-              <a:t>Full assessment requirements belong in the current public task guide; explain only the criterion or task shown on this slide.</a:t>
-            </a:r>
-          </a:p>
-          <a:p xmlns:a="http://schemas.openxmlformats.org/drawingml/2006/main">
-            <a:r>
-              <a:t/>
-            </a:r>
-          </a:p>
-          <a:p xmlns:a="http://schemas.openxmlformats.org/drawingml/2006/main">
-            <a:r>
-              <a:t>TEACHING MODE</a:t>
-            </a:r>
-          </a:p>
-          <a:p xmlns:a="http://schemas.openxmlformats.org/drawingml/2006/main">
-            <a:r>
-              <a:t>Demonstrate first. Read each new symbol aloud, trace the values and compare the shown output. Learners repeat worked examples individually after class.</a:t>
-            </a:r>
-          </a:p>
-          <a:p xmlns:a="http://schemas.openxmlformats.org/drawingml/2006/main">
-            <a:r>
-              <a:t/>
-            </a:r>
-          </a:p>
-          <a:p xmlns:a="http://schemas.openxmlformats.org/drawingml/2006/main">
-            <a:r>
-              <a:t>NEXT</a:t>
-            </a:r>
-          </a:p>
-          <a:p xmlns:a="http://schemas.openxmlformats.org/drawingml/2006/main">
-            <a:r>
-              <a:t>Engineering ML project continued.</a:t>
-            </a:r>
-          </a:p>
-          <a:p xmlns:a="http://schemas.openxmlformats.org/drawingml/2006/main">
-            <a:r>
-              <a:t/>
-            </a:r>
-          </a:p>
-          <a:p xmlns:a="http://schemas.openxmlformats.org/drawingml/2006/main">
-            <a:r>
-              <a:t>REFERENCES</a:t>
-            </a:r>
-          </a:p>
-          <a:p xmlns:a="http://schemas.openxmlformats.org/drawingml/2006/main">
-            <a:r>
-              <a:t/>
+          <a:p>
+            <a:r>
+              <a:t>Continue to</a:t>
+            </a:r>
+          </a:p>
+          <a:p>
+            <a:r>
+              <a:t>Engineering ML project continued</a:t>
             </a:r>
           </a:p>
         </p:txBody>
@@ -769,7 +734,7 @@
         <p:nvSpPr>
           <p:cNvPr id="4" name="Slide Number Placeholder 3"/>
           <p:cNvSpPr>
-            <a:spLocks xmlns:a="http://schemas.openxmlformats.org/drawingml/2006/main" noGrp="1"/>
+            <a:spLocks noGrp="1"/>
           </p:cNvSpPr>
           <p:nvPr>
             <p:ph type="sldNum" idx="5"/>
@@ -777,21 +742,21 @@
         </p:nvSpPr>
         <p:spPr/>
         <p:txBody>
-          <a:bodyPr xmlns:a="http://schemas.openxmlformats.org/drawingml/2006/main"/>
-          <a:lstStyle xmlns:a="http://schemas.openxmlformats.org/drawingml/2006/main"/>
-          <a:p xmlns:a="http://schemas.openxmlformats.org/drawingml/2006/main"/>
+          <a:bodyPr/>
+          <a:lstStyle/>
+          <a:p/>
         </p:txBody>
       </p:sp>
     </p:spTree>
   </p:cSld>
   <p:clrMapOvr>
-    <a:masterClrMapping xmlns:a="http://schemas.openxmlformats.org/drawingml/2006/main"/>
+    <a:masterClrMapping/>
   </p:clrMapOvr>
 </p:notes>
 </file>
 
 <file path=ppt/notesSlides/notesSlide11.xml><?xml version="1.0" encoding="utf-8"?>
-<p:notes xmlns:p="http://schemas.openxmlformats.org/presentationml/2006/main">
+<p:notes xmlns:a="http://schemas.openxmlformats.org/drawingml/2006/main" xmlns:p="http://schemas.openxmlformats.org/presentationml/2006/main">
   <p:cSld>
     <p:spTree>
       <p:nvGrpSpPr>
@@ -800,13 +765,13 @@
         <p:nvPr/>
       </p:nvGrpSpPr>
       <p:grpSpPr>
-        <a:xfrm xmlns:a="http://schemas.openxmlformats.org/drawingml/2006/main"/>
+        <a:xfrm/>
       </p:grpSpPr>
       <p:sp>
         <p:nvSpPr>
           <p:cNvPr id="2" name="Slide Image Placeholder 1"/>
           <p:cNvSpPr>
-            <a:spLocks xmlns:a="http://schemas.openxmlformats.org/drawingml/2006/main" noGrp="1"/>
+            <a:spLocks noGrp="1"/>
           </p:cNvSpPr>
           <p:nvPr>
             <p:ph type="sldImg" idx="0"/>
@@ -818,7 +783,7 @@
         <p:nvSpPr>
           <p:cNvPr id="3" name="Notes Placeholder 2"/>
           <p:cNvSpPr>
-            <a:spLocks xmlns:a="http://schemas.openxmlformats.org/drawingml/2006/main" noGrp="1"/>
+            <a:spLocks noGrp="1"/>
           </p:cNvSpPr>
           <p:nvPr>
             <p:ph type="body" idx="1"/>
@@ -826,141 +791,121 @@
         </p:nvSpPr>
         <p:spPr/>
         <p:txBody>
-          <a:bodyPr xmlns:a="http://schemas.openxmlformats.org/drawingml/2006/main"/>
-          <a:lstStyle xmlns:a="http://schemas.openxmlformats.org/drawingml/2006/main"/>
-          <a:p xmlns:a="http://schemas.openxmlformats.org/drawingml/2006/main">
-            <a:r>
-              <a:t>PURPOSE</a:t>
-            </a:r>
-          </a:p>
-          <a:p xmlns:a="http://schemas.openxmlformats.org/drawingml/2006/main">
+          <a:bodyPr/>
+          <a:lstStyle/>
+          <a:p>
             <a:r>
               <a:t>Engineering ML project continued</a:t>
             </a:r>
           </a:p>
-          <a:p xmlns:a="http://schemas.openxmlformats.org/drawingml/2006/main">
+          <a:p>
+            <a:r>
+              <a:t>CML3112, Week 15, slide 11</a:t>
+            </a:r>
+          </a:p>
+          <a:p>
             <a:r>
               <a:t/>
             </a:r>
           </a:p>
-          <a:p xmlns:a="http://schemas.openxmlformats.org/drawingml/2006/main">
-            <a:r>
-              <a:t>CONNECT</a:t>
-            </a:r>
-          </a:p>
-          <a:p xmlns:a="http://schemas.openxmlformats.org/drawingml/2006/main">
-            <a:r>
-              <a:t>Previous slide: Engineering ML project.</a:t>
-            </a:r>
-          </a:p>
-          <a:p xmlns:a="http://schemas.openxmlformats.org/drawingml/2006/main">
+          <a:p>
+            <a:r>
+              <a:t>Explanation to give</a:t>
+            </a:r>
+          </a:p>
+          <a:p>
+            <a:r>
+              <a:t>A chart must answer a stated question and show the actual data result. Explain what one mark represents and label both the quantity and unit before stating the finding.</a:t>
+            </a:r>
+          </a:p>
+          <a:p>
             <a:r>
               <a:t/>
             </a:r>
           </a:p>
-          <a:p xmlns:a="http://schemas.openxmlformats.org/drawingml/2006/main">
-            <a:r>
-              <a:t>EXPLAIN</a:t>
-            </a:r>
-          </a:p>
-          <a:p xmlns:a="http://schemas.openxmlformats.org/drawingml/2006/main">
+          <a:p>
+            <a:r>
+              <a:t>Worked illustration / lecturer answer</a:t>
+            </a:r>
+          </a:p>
+          <a:p>
+            <a:r>
+              <a:t>A useful caption names the group or sample, the observed difference and the relevant unit. A limitation states what the plotted observations cannot establish, such as causation or performance at a new site.</a:t>
+            </a:r>
+          </a:p>
+          <a:p>
+            <a:r>
+              <a:t/>
+            </a:r>
+          </a:p>
+          <a:p>
+            <a:r>
+              <a:t>Misconception to address</a:t>
+            </a:r>
+          </a:p>
+          <a:p>
+            <a:r>
+              <a:t>Text claiming “a chart was made” is not the required chart. Check the exact number and kinds required on this slide and in the assessment guide.</a:t>
+            </a:r>
+          </a:p>
+          <a:p>
+            <a:r>
+              <a:t/>
+            </a:r>
+          </a:p>
+          <a:p>
+            <a:r>
+              <a:t>On this slide</a:t>
+            </a:r>
+          </a:p>
+          <a:p>
             <a:r>
               <a:t>Include profiling, justified cleaning, question-led charts and your engineering recommendation where required.</a:t>
             </a:r>
           </a:p>
-          <a:p xmlns:a="http://schemas.openxmlformats.org/drawingml/2006/main">
+          <a:p>
             <a:r>
               <a:t/>
             </a:r>
           </a:p>
-          <a:p xmlns:a="http://schemas.openxmlformats.org/drawingml/2006/main">
+          <a:p>
             <a:r>
               <a:t>Keep raw data.</a:t>
             </a:r>
           </a:p>
-          <a:p xmlns:a="http://schemas.openxmlformats.org/drawingml/2006/main">
+          <a:p>
             <a:r>
               <a:t/>
             </a:r>
           </a:p>
-          <a:p xmlns:a="http://schemas.openxmlformats.org/drawingml/2006/main">
+          <a:p>
             <a:r>
               <a:t>State units and distinguish correlation from causation.</a:t>
             </a:r>
           </a:p>
-          <a:p xmlns:a="http://schemas.openxmlformats.org/drawingml/2006/main">
+          <a:p>
             <a:r>
               <a:t/>
             </a:r>
           </a:p>
-          <a:p xmlns:a="http://schemas.openxmlformats.org/drawingml/2006/main">
+          <a:p>
             <a:r>
               <a:t>Charts must be actual labelled figures in the notebook, not claims that charts exist.</a:t>
             </a:r>
           </a:p>
-          <a:p xmlns:a="http://schemas.openxmlformats.org/drawingml/2006/main">
+          <a:p>
             <a:r>
               <a:t/>
             </a:r>
           </a:p>
-          <a:p xmlns:a="http://schemas.openxmlformats.org/drawingml/2006/main">
-            <a:r>
-              <a:t>LECTURER CUE</a:t>
-            </a:r>
-          </a:p>
-          <a:p xmlns:a="http://schemas.openxmlformats.org/drawingml/2006/main">
-            <a:r>
-              <a:t># CML3112 ML_PROJECT: Engineering ML project — variant A</a:t>
-            </a:r>
-          </a:p>
-          <a:p xmlns:a="http://schemas.openxmlformats.org/drawingml/2006/main">
-            <a:r>
-              <a:t>Full assessment requirements belong in the current public task guide; explain only the criterion or task shown on this slide.</a:t>
-            </a:r>
-          </a:p>
-          <a:p xmlns:a="http://schemas.openxmlformats.org/drawingml/2006/main">
-            <a:r>
-              <a:t/>
-            </a:r>
-          </a:p>
-          <a:p xmlns:a="http://schemas.openxmlformats.org/drawingml/2006/main">
-            <a:r>
-              <a:t>TEACHING MODE</a:t>
-            </a:r>
-          </a:p>
-          <a:p xmlns:a="http://schemas.openxmlformats.org/drawingml/2006/main">
-            <a:r>
-              <a:t>Demonstrate first. Read each new symbol aloud, trace the values and compare the shown output. Learners repeat worked examples individually after class.</a:t>
-            </a:r>
-          </a:p>
-          <a:p xmlns:a="http://schemas.openxmlformats.org/drawingml/2006/main">
-            <a:r>
-              <a:t/>
-            </a:r>
-          </a:p>
-          <a:p xmlns:a="http://schemas.openxmlformats.org/drawingml/2006/main">
-            <a:r>
-              <a:t>NEXT</a:t>
-            </a:r>
-          </a:p>
-          <a:p xmlns:a="http://schemas.openxmlformats.org/drawingml/2006/main">
-            <a:r>
-              <a:t>Engineering ML project continued.</a:t>
-            </a:r>
-          </a:p>
-          <a:p xmlns:a="http://schemas.openxmlformats.org/drawingml/2006/main">
-            <a:r>
-              <a:t/>
-            </a:r>
-          </a:p>
-          <a:p xmlns:a="http://schemas.openxmlformats.org/drawingml/2006/main">
-            <a:r>
-              <a:t>REFERENCES</a:t>
-            </a:r>
-          </a:p>
-          <a:p xmlns:a="http://schemas.openxmlformats.org/drawingml/2006/main">
-            <a:r>
-              <a:t/>
+          <a:p>
+            <a:r>
+              <a:t>Continue to</a:t>
+            </a:r>
+          </a:p>
+          <a:p>
+            <a:r>
+              <a:t>Engineering ML project continued</a:t>
             </a:r>
           </a:p>
         </p:txBody>
@@ -969,7 +914,7 @@
         <p:nvSpPr>
           <p:cNvPr id="4" name="Slide Number Placeholder 3"/>
           <p:cNvSpPr>
-            <a:spLocks xmlns:a="http://schemas.openxmlformats.org/drawingml/2006/main" noGrp="1"/>
+            <a:spLocks noGrp="1"/>
           </p:cNvSpPr>
           <p:nvPr>
             <p:ph type="sldNum" idx="5"/>
@@ -977,21 +922,21 @@
         </p:nvSpPr>
         <p:spPr/>
         <p:txBody>
-          <a:bodyPr xmlns:a="http://schemas.openxmlformats.org/drawingml/2006/main"/>
-          <a:lstStyle xmlns:a="http://schemas.openxmlformats.org/drawingml/2006/main"/>
-          <a:p xmlns:a="http://schemas.openxmlformats.org/drawingml/2006/main"/>
+          <a:bodyPr/>
+          <a:lstStyle/>
+          <a:p/>
         </p:txBody>
       </p:sp>
     </p:spTree>
   </p:cSld>
   <p:clrMapOvr>
-    <a:masterClrMapping xmlns:a="http://schemas.openxmlformats.org/drawingml/2006/main"/>
+    <a:masterClrMapping/>
   </p:clrMapOvr>
 </p:notes>
 </file>
 
 <file path=ppt/notesSlides/notesSlide12.xml><?xml version="1.0" encoding="utf-8"?>
-<p:notes xmlns:p="http://schemas.openxmlformats.org/presentationml/2006/main">
+<p:notes xmlns:a="http://schemas.openxmlformats.org/drawingml/2006/main" xmlns:p="http://schemas.openxmlformats.org/presentationml/2006/main">
   <p:cSld>
     <p:spTree>
       <p:nvGrpSpPr>
@@ -1000,13 +945,13 @@
         <p:nvPr/>
       </p:nvGrpSpPr>
       <p:grpSpPr>
-        <a:xfrm xmlns:a="http://schemas.openxmlformats.org/drawingml/2006/main"/>
+        <a:xfrm/>
       </p:grpSpPr>
       <p:sp>
         <p:nvSpPr>
           <p:cNvPr id="2" name="Slide Image Placeholder 1"/>
           <p:cNvSpPr>
-            <a:spLocks xmlns:a="http://schemas.openxmlformats.org/drawingml/2006/main" noGrp="1"/>
+            <a:spLocks noGrp="1"/>
           </p:cNvSpPr>
           <p:nvPr>
             <p:ph type="sldImg" idx="0"/>
@@ -1018,7 +963,7 @@
         <p:nvSpPr>
           <p:cNvPr id="3" name="Notes Placeholder 2"/>
           <p:cNvSpPr>
-            <a:spLocks xmlns:a="http://schemas.openxmlformats.org/drawingml/2006/main" noGrp="1"/>
+            <a:spLocks noGrp="1"/>
           </p:cNvSpPr>
           <p:nvPr>
             <p:ph type="body" idx="1"/>
@@ -1026,141 +971,121 @@
         </p:nvSpPr>
         <p:spPr/>
         <p:txBody>
-          <a:bodyPr xmlns:a="http://schemas.openxmlformats.org/drawingml/2006/main"/>
-          <a:lstStyle xmlns:a="http://schemas.openxmlformats.org/drawingml/2006/main"/>
-          <a:p xmlns:a="http://schemas.openxmlformats.org/drawingml/2006/main">
-            <a:r>
-              <a:t>PURPOSE</a:t>
-            </a:r>
-          </a:p>
-          <a:p xmlns:a="http://schemas.openxmlformats.org/drawingml/2006/main">
+          <a:bodyPr/>
+          <a:lstStyle/>
+          <a:p>
             <a:r>
               <a:t>Engineering ML project continued</a:t>
             </a:r>
           </a:p>
-          <a:p xmlns:a="http://schemas.openxmlformats.org/drawingml/2006/main">
+          <a:p>
+            <a:r>
+              <a:t>CML3112, Week 15, slide 12</a:t>
+            </a:r>
+          </a:p>
+          <a:p>
             <a:r>
               <a:t/>
             </a:r>
           </a:p>
-          <a:p xmlns:a="http://schemas.openxmlformats.org/drawingml/2006/main">
-            <a:r>
-              <a:t>CONNECT</a:t>
-            </a:r>
-          </a:p>
-          <a:p xmlns:a="http://schemas.openxmlformats.org/drawingml/2006/main">
-            <a:r>
-              <a:t>Previous slide: Engineering ML project continued.</a:t>
-            </a:r>
-          </a:p>
-          <a:p xmlns:a="http://schemas.openxmlformats.org/drawingml/2006/main">
+          <a:p>
+            <a:r>
+              <a:t>Explanation to give</a:t>
+            </a:r>
+          </a:p>
+          <a:p>
+            <a:r>
+              <a:t>Bound the proposed engineering problem: identify the decision, intended users, operating setting and quantity or class to predict. Explain why the target supports that decision.</a:t>
+            </a:r>
+          </a:p>
+          <a:p>
             <a:r>
               <a:t/>
             </a:r>
           </a:p>
-          <a:p xmlns:a="http://schemas.openxmlformats.org/drawingml/2006/main">
-            <a:r>
-              <a:t>EXPLAIN</a:t>
-            </a:r>
-          </a:p>
-          <a:p xmlns:a="http://schemas.openxmlformats.org/drawingml/2006/main">
+          <a:p>
+            <a:r>
+              <a:t>Worked illustration / lecturer answer</a:t>
+            </a:r>
+          </a:p>
+          <a:p>
+            <a:r>
+              <a:t>A target should be chosen because knowing it helps the decision, not merely because it is a convenient numeric column in the file.</a:t>
+            </a:r>
+          </a:p>
+          <a:p>
+            <a:r>
+              <a:t/>
+            </a:r>
+          </a:p>
+          <a:p>
+            <a:r>
+              <a:t>Misconception to address</a:t>
+            </a:r>
+          </a:p>
+          <a:p>
+            <a:r>
+              <a:t>A broad theme such as “AI for buildings” does not yet specify a model task. The project report must make the target and intended use explicit.</a:t>
+            </a:r>
+          </a:p>
+          <a:p>
+            <a:r>
+              <a:t/>
+            </a:r>
+          </a:p>
+          <a:p>
+            <a:r>
+              <a:t>On this slide</a:t>
+            </a:r>
+          </a:p>
+          <a:p>
             <a:r>
               <a:t>Include captions and a separate readable DOCX/PDF report.</a:t>
             </a:r>
           </a:p>
-          <a:p xmlns:a="http://schemas.openxmlformats.org/drawingml/2006/main">
+          <a:p>
             <a:r>
               <a:t/>
             </a:r>
           </a:p>
-          <a:p xmlns:a="http://schemas.openxmlformats.org/drawingml/2006/main">
+          <a:p>
             <a:r>
               <a:t>Problem definition (15.0 total): The engineering problem is real, specific and bounded.</a:t>
             </a:r>
           </a:p>
-          <a:p xmlns:a="http://schemas.openxmlformats.org/drawingml/2006/main">
+          <a:p>
             <a:r>
               <a:t/>
             </a:r>
           </a:p>
-          <a:p xmlns:a="http://schemas.openxmlformats.org/drawingml/2006/main">
+          <a:p>
             <a:r>
               <a:t>The ML task is correctly derived from it.</a:t>
             </a:r>
           </a:p>
-          <a:p xmlns:a="http://schemas.openxmlformats.org/drawingml/2006/main">
+          <a:p>
             <a:r>
               <a:t/>
             </a:r>
           </a:p>
-          <a:p xmlns:a="http://schemas.openxmlformats.org/drawingml/2006/main">
+          <a:p>
             <a:r>
               <a:t>The target variable is justified, not merely available.</a:t>
             </a:r>
           </a:p>
-          <a:p xmlns:a="http://schemas.openxmlformats.org/drawingml/2006/main">
+          <a:p>
             <a:r>
               <a:t/>
             </a:r>
           </a:p>
-          <a:p xmlns:a="http://schemas.openxmlformats.org/drawingml/2006/main">
-            <a:r>
-              <a:t>LECTURER CUE</a:t>
-            </a:r>
-          </a:p>
-          <a:p xmlns:a="http://schemas.openxmlformats.org/drawingml/2006/main">
-            <a:r>
-              <a:t># CML3112 ML_PROJECT: Engineering ML project — variant A</a:t>
-            </a:r>
-          </a:p>
-          <a:p xmlns:a="http://schemas.openxmlformats.org/drawingml/2006/main">
-            <a:r>
-              <a:t>Full assessment requirements belong in the current public task guide; explain only the criterion or task shown on this slide.</a:t>
-            </a:r>
-          </a:p>
-          <a:p xmlns:a="http://schemas.openxmlformats.org/drawingml/2006/main">
-            <a:r>
-              <a:t/>
-            </a:r>
-          </a:p>
-          <a:p xmlns:a="http://schemas.openxmlformats.org/drawingml/2006/main">
-            <a:r>
-              <a:t>TEACHING MODE</a:t>
-            </a:r>
-          </a:p>
-          <a:p xmlns:a="http://schemas.openxmlformats.org/drawingml/2006/main">
-            <a:r>
-              <a:t>Demonstrate first. Read each new symbol aloud, trace the values and compare the shown output. Learners repeat worked examples individually after class.</a:t>
-            </a:r>
-          </a:p>
-          <a:p xmlns:a="http://schemas.openxmlformats.org/drawingml/2006/main">
-            <a:r>
-              <a:t/>
-            </a:r>
-          </a:p>
-          <a:p xmlns:a="http://schemas.openxmlformats.org/drawingml/2006/main">
-            <a:r>
-              <a:t>NEXT</a:t>
-            </a:r>
-          </a:p>
-          <a:p xmlns:a="http://schemas.openxmlformats.org/drawingml/2006/main">
-            <a:r>
-              <a:t>Engineering ML project continued.</a:t>
-            </a:r>
-          </a:p>
-          <a:p xmlns:a="http://schemas.openxmlformats.org/drawingml/2006/main">
-            <a:r>
-              <a:t/>
-            </a:r>
-          </a:p>
-          <a:p xmlns:a="http://schemas.openxmlformats.org/drawingml/2006/main">
-            <a:r>
-              <a:t>REFERENCES</a:t>
-            </a:r>
-          </a:p>
-          <a:p xmlns:a="http://schemas.openxmlformats.org/drawingml/2006/main">
-            <a:r>
-              <a:t/>
+          <a:p>
+            <a:r>
+              <a:t>Continue to</a:t>
+            </a:r>
+          </a:p>
+          <a:p>
+            <a:r>
+              <a:t>Engineering ML project continued</a:t>
             </a:r>
           </a:p>
         </p:txBody>
@@ -1169,7 +1094,7 @@
         <p:nvSpPr>
           <p:cNvPr id="4" name="Slide Number Placeholder 3"/>
           <p:cNvSpPr>
-            <a:spLocks xmlns:a="http://schemas.openxmlformats.org/drawingml/2006/main" noGrp="1"/>
+            <a:spLocks noGrp="1"/>
           </p:cNvSpPr>
           <p:nvPr>
             <p:ph type="sldNum" idx="5"/>
@@ -1177,21 +1102,21 @@
         </p:nvSpPr>
         <p:spPr/>
         <p:txBody>
-          <a:bodyPr xmlns:a="http://schemas.openxmlformats.org/drawingml/2006/main"/>
-          <a:lstStyle xmlns:a="http://schemas.openxmlformats.org/drawingml/2006/main"/>
-          <a:p xmlns:a="http://schemas.openxmlformats.org/drawingml/2006/main"/>
+          <a:bodyPr/>
+          <a:lstStyle/>
+          <a:p/>
         </p:txBody>
       </p:sp>
     </p:spTree>
   </p:cSld>
   <p:clrMapOvr>
-    <a:masterClrMapping xmlns:a="http://schemas.openxmlformats.org/drawingml/2006/main"/>
+    <a:masterClrMapping/>
   </p:clrMapOvr>
 </p:notes>
 </file>
 
 <file path=ppt/notesSlides/notesSlide13.xml><?xml version="1.0" encoding="utf-8"?>
-<p:notes xmlns:p="http://schemas.openxmlformats.org/presentationml/2006/main">
+<p:notes xmlns:a="http://schemas.openxmlformats.org/drawingml/2006/main" xmlns:p="http://schemas.openxmlformats.org/presentationml/2006/main">
   <p:cSld>
     <p:spTree>
       <p:nvGrpSpPr>
@@ -1200,13 +1125,13 @@
         <p:nvPr/>
       </p:nvGrpSpPr>
       <p:grpSpPr>
-        <a:xfrm xmlns:a="http://schemas.openxmlformats.org/drawingml/2006/main"/>
+        <a:xfrm/>
       </p:grpSpPr>
       <p:sp>
         <p:nvSpPr>
           <p:cNvPr id="2" name="Slide Image Placeholder 1"/>
           <p:cNvSpPr>
-            <a:spLocks xmlns:a="http://schemas.openxmlformats.org/drawingml/2006/main" noGrp="1"/>
+            <a:spLocks noGrp="1"/>
           </p:cNvSpPr>
           <p:nvPr>
             <p:ph type="sldImg" idx="0"/>
@@ -1218,7 +1143,7 @@
         <p:nvSpPr>
           <p:cNvPr id="3" name="Notes Placeholder 2"/>
           <p:cNvSpPr>
-            <a:spLocks xmlns:a="http://schemas.openxmlformats.org/drawingml/2006/main" noGrp="1"/>
+            <a:spLocks noGrp="1"/>
           </p:cNvSpPr>
           <p:nvPr>
             <p:ph type="body" idx="1"/>
@@ -1226,141 +1151,121 @@
         </p:nvSpPr>
         <p:spPr/>
         <p:txBody>
-          <a:bodyPr xmlns:a="http://schemas.openxmlformats.org/drawingml/2006/main"/>
-          <a:lstStyle xmlns:a="http://schemas.openxmlformats.org/drawingml/2006/main"/>
-          <a:p xmlns:a="http://schemas.openxmlformats.org/drawingml/2006/main">
-            <a:r>
-              <a:t>PURPOSE</a:t>
-            </a:r>
-          </a:p>
-          <a:p xmlns:a="http://schemas.openxmlformats.org/drawingml/2006/main">
+          <a:bodyPr/>
+          <a:lstStyle/>
+          <a:p>
             <a:r>
               <a:t>Engineering ML project continued</a:t>
             </a:r>
           </a:p>
-          <a:p xmlns:a="http://schemas.openxmlformats.org/drawingml/2006/main">
+          <a:p>
+            <a:r>
+              <a:t>CML3112, Week 15, slide 13</a:t>
+            </a:r>
+          </a:p>
+          <a:p>
             <a:r>
               <a:t/>
             </a:r>
           </a:p>
-          <a:p xmlns:a="http://schemas.openxmlformats.org/drawingml/2006/main">
-            <a:r>
-              <a:t>CONNECT</a:t>
-            </a:r>
-          </a:p>
-          <a:p xmlns:a="http://schemas.openxmlformats.org/drawingml/2006/main">
-            <a:r>
-              <a:t>Previous slide: Engineering ML project continued.</a:t>
-            </a:r>
-          </a:p>
-          <a:p xmlns:a="http://schemas.openxmlformats.org/drawingml/2006/main">
+          <a:p>
+            <a:r>
+              <a:t>Explanation to give</a:t>
+            </a:r>
+          </a:p>
+          <a:p>
+            <a:r>
+              <a:t>Problem framing begins with a bounded engineering decision and a defined target. Provenance explains where observations came from; a licence states what reuse is allowed.</a:t>
+            </a:r>
+          </a:p>
+          <a:p>
             <a:r>
               <a:t/>
             </a:r>
           </a:p>
-          <a:p xmlns:a="http://schemas.openxmlformats.org/drawingml/2006/main">
-            <a:r>
-              <a:t>EXPLAIN</a:t>
-            </a:r>
-          </a:p>
-          <a:p xmlns:a="http://schemas.openxmlformats.org/drawingml/2006/main">
+          <a:p>
+            <a:r>
+              <a:t>Worked illustration / lecturer answer</a:t>
+            </a:r>
+          </a:p>
+          <a:p>
+            <a:r>
+              <a:t>State the population, measurement period, units and who collected the data. Explain how those observations could answer the chosen question rather than merely describing an interesting file.</a:t>
+            </a:r>
+          </a:p>
+          <a:p>
+            <a:r>
+              <a:t/>
+            </a:r>
+          </a:p>
+          <a:p>
+            <a:r>
+              <a:t>Misconception to address</a:t>
+            </a:r>
+          </a:p>
+          <a:p>
+            <a:r>
+              <a:t>Synthetic teaching data must be labelled as synthetic. A plausible story does not establish that a dataset contains the information or permissions the proposed project needs.</a:t>
+            </a:r>
+          </a:p>
+          <a:p>
+            <a:r>
+              <a:t/>
+            </a:r>
+          </a:p>
+          <a:p>
+            <a:r>
+              <a:t>On this slide</a:t>
+            </a:r>
+          </a:p>
+          <a:p>
             <a:r>
               <a:t>Data understanding (15.0 total): Provenance, licence and collection method stated.</a:t>
             </a:r>
           </a:p>
-          <a:p xmlns:a="http://schemas.openxmlformats.org/drawingml/2006/main">
+          <a:p>
             <a:r>
               <a:t/>
             </a:r>
           </a:p>
-          <a:p xmlns:a="http://schemas.openxmlformats.org/drawingml/2006/main">
+          <a:p>
             <a:r>
               <a:t>Defects found and handled with justification.</a:t>
             </a:r>
           </a:p>
-          <a:p xmlns:a="http://schemas.openxmlformats.org/drawingml/2006/main">
+          <a:p>
             <a:r>
               <a:t/>
             </a:r>
           </a:p>
-          <a:p xmlns:a="http://schemas.openxmlformats.org/drawingml/2006/main">
+          <a:p>
             <a:r>
               <a:t>Limitations of the data acknowledged before any modelling.</a:t>
             </a:r>
           </a:p>
-          <a:p xmlns:a="http://schemas.openxmlformats.org/drawingml/2006/main">
+          <a:p>
             <a:r>
               <a:t/>
             </a:r>
           </a:p>
-          <a:p xmlns:a="http://schemas.openxmlformats.org/drawingml/2006/main">
+          <a:p>
             <a:r>
               <a:t>Methodology (20.0 total): Appropriate models chosen and compared under one protocol.</a:t>
             </a:r>
           </a:p>
-          <a:p xmlns:a="http://schemas.openxmlformats.org/drawingml/2006/main">
+          <a:p>
             <a:r>
               <a:t/>
             </a:r>
           </a:p>
-          <a:p xmlns:a="http://schemas.openxmlformats.org/drawingml/2006/main">
-            <a:r>
-              <a:t>LECTURER CUE</a:t>
-            </a:r>
-          </a:p>
-          <a:p xmlns:a="http://schemas.openxmlformats.org/drawingml/2006/main">
-            <a:r>
-              <a:t># CML3112 ML_PROJECT: Engineering ML project — variant A</a:t>
-            </a:r>
-          </a:p>
-          <a:p xmlns:a="http://schemas.openxmlformats.org/drawingml/2006/main">
-            <a:r>
-              <a:t>Full assessment requirements belong in the current public task guide; explain only the criterion or task shown on this slide.</a:t>
-            </a:r>
-          </a:p>
-          <a:p xmlns:a="http://schemas.openxmlformats.org/drawingml/2006/main">
-            <a:r>
-              <a:t/>
-            </a:r>
-          </a:p>
-          <a:p xmlns:a="http://schemas.openxmlformats.org/drawingml/2006/main">
-            <a:r>
-              <a:t>TEACHING MODE</a:t>
-            </a:r>
-          </a:p>
-          <a:p xmlns:a="http://schemas.openxmlformats.org/drawingml/2006/main">
-            <a:r>
-              <a:t>Demonstrate first. Read each new symbol aloud, trace the values and compare the shown output. Learners repeat worked examples individually after class.</a:t>
-            </a:r>
-          </a:p>
-          <a:p xmlns:a="http://schemas.openxmlformats.org/drawingml/2006/main">
-            <a:r>
-              <a:t/>
-            </a:r>
-          </a:p>
-          <a:p xmlns:a="http://schemas.openxmlformats.org/drawingml/2006/main">
-            <a:r>
-              <a:t>NEXT</a:t>
-            </a:r>
-          </a:p>
-          <a:p xmlns:a="http://schemas.openxmlformats.org/drawingml/2006/main">
-            <a:r>
-              <a:t>Engineering ML project continued.</a:t>
-            </a:r>
-          </a:p>
-          <a:p xmlns:a="http://schemas.openxmlformats.org/drawingml/2006/main">
-            <a:r>
-              <a:t/>
-            </a:r>
-          </a:p>
-          <a:p xmlns:a="http://schemas.openxmlformats.org/drawingml/2006/main">
-            <a:r>
-              <a:t>REFERENCES</a:t>
-            </a:r>
-          </a:p>
-          <a:p xmlns:a="http://schemas.openxmlformats.org/drawingml/2006/main">
-            <a:r>
-              <a:t/>
+          <a:p>
+            <a:r>
+              <a:t>Continue to</a:t>
+            </a:r>
+          </a:p>
+          <a:p>
+            <a:r>
+              <a:t>Engineering ML project continued</a:t>
             </a:r>
           </a:p>
         </p:txBody>
@@ -1369,7 +1274,7 @@
         <p:nvSpPr>
           <p:cNvPr id="4" name="Slide Number Placeholder 3"/>
           <p:cNvSpPr>
-            <a:spLocks xmlns:a="http://schemas.openxmlformats.org/drawingml/2006/main" noGrp="1"/>
+            <a:spLocks noGrp="1"/>
           </p:cNvSpPr>
           <p:nvPr>
             <p:ph type="sldNum" idx="5"/>
@@ -1377,21 +1282,21 @@
         </p:nvSpPr>
         <p:spPr/>
         <p:txBody>
-          <a:bodyPr xmlns:a="http://schemas.openxmlformats.org/drawingml/2006/main"/>
-          <a:lstStyle xmlns:a="http://schemas.openxmlformats.org/drawingml/2006/main"/>
-          <a:p xmlns:a="http://schemas.openxmlformats.org/drawingml/2006/main"/>
+          <a:bodyPr/>
+          <a:lstStyle/>
+          <a:p/>
         </p:txBody>
       </p:sp>
     </p:spTree>
   </p:cSld>
   <p:clrMapOvr>
-    <a:masterClrMapping xmlns:a="http://schemas.openxmlformats.org/drawingml/2006/main"/>
+    <a:masterClrMapping/>
   </p:clrMapOvr>
 </p:notes>
 </file>
 
 <file path=ppt/notesSlides/notesSlide14.xml><?xml version="1.0" encoding="utf-8"?>
-<p:notes xmlns:p="http://schemas.openxmlformats.org/presentationml/2006/main">
+<p:notes xmlns:a="http://schemas.openxmlformats.org/drawingml/2006/main" xmlns:p="http://schemas.openxmlformats.org/presentationml/2006/main">
   <p:cSld>
     <p:spTree>
       <p:nvGrpSpPr>
@@ -1400,13 +1305,13 @@
         <p:nvPr/>
       </p:nvGrpSpPr>
       <p:grpSpPr>
-        <a:xfrm xmlns:a="http://schemas.openxmlformats.org/drawingml/2006/main"/>
+        <a:xfrm/>
       </p:grpSpPr>
       <p:sp>
         <p:nvSpPr>
           <p:cNvPr id="2" name="Slide Image Placeholder 1"/>
           <p:cNvSpPr>
-            <a:spLocks xmlns:a="http://schemas.openxmlformats.org/drawingml/2006/main" noGrp="1"/>
+            <a:spLocks noGrp="1"/>
           </p:cNvSpPr>
           <p:nvPr>
             <p:ph type="sldImg" idx="0"/>
@@ -1418,7 +1323,7 @@
         <p:nvSpPr>
           <p:cNvPr id="3" name="Notes Placeholder 2"/>
           <p:cNvSpPr>
-            <a:spLocks xmlns:a="http://schemas.openxmlformats.org/drawingml/2006/main" noGrp="1"/>
+            <a:spLocks noGrp="1"/>
           </p:cNvSpPr>
           <p:nvPr>
             <p:ph type="body" idx="1"/>
@@ -1426,141 +1331,121 @@
         </p:nvSpPr>
         <p:spPr/>
         <p:txBody>
-          <a:bodyPr xmlns:a="http://schemas.openxmlformats.org/drawingml/2006/main"/>
-          <a:lstStyle xmlns:a="http://schemas.openxmlformats.org/drawingml/2006/main"/>
-          <a:p xmlns:a="http://schemas.openxmlformats.org/drawingml/2006/main">
-            <a:r>
-              <a:t>PURPOSE</a:t>
-            </a:r>
-          </a:p>
-          <a:p xmlns:a="http://schemas.openxmlformats.org/drawingml/2006/main">
+          <a:bodyPr/>
+          <a:lstStyle/>
+          <a:p>
             <a:r>
               <a:t>Engineering ML project continued</a:t>
             </a:r>
           </a:p>
-          <a:p xmlns:a="http://schemas.openxmlformats.org/drawingml/2006/main">
+          <a:p>
+            <a:r>
+              <a:t>CML3112, Week 15, slide 14</a:t>
+            </a:r>
+          </a:p>
+          <a:p>
             <a:r>
               <a:t/>
             </a:r>
           </a:p>
-          <a:p xmlns:a="http://schemas.openxmlformats.org/drawingml/2006/main">
-            <a:r>
-              <a:t>CONNECT</a:t>
-            </a:r>
-          </a:p>
-          <a:p xmlns:a="http://schemas.openxmlformats.org/drawingml/2006/main">
-            <a:r>
-              <a:t>Previous slide: Engineering ML project continued.</a:t>
-            </a:r>
-          </a:p>
-          <a:p xmlns:a="http://schemas.openxmlformats.org/drawingml/2006/main">
+          <a:p>
+            <a:r>
+              <a:t>Explanation to give</a:t>
+            </a:r>
+          </a:p>
+          <a:p>
+            <a:r>
+              <a:t>Explain the order: partition data using the stated protocol, fit preparation on training data, fit models, compare on validation data and leave final test data untouched until choices are fixed.</a:t>
+            </a:r>
+          </a:p>
+          <a:p>
             <a:r>
               <a:t/>
             </a:r>
           </a:p>
-          <a:p xmlns:a="http://schemas.openxmlformats.org/drawingml/2006/main">
-            <a:r>
-              <a:t>EXPLAIN</a:t>
-            </a:r>
-          </a:p>
-          <a:p xmlns:a="http://schemas.openxmlformats.org/drawingml/2006/main">
+          <a:p>
+            <a:r>
+              <a:t>Worked illustration / lecturer answer</a:t>
+            </a:r>
+          </a:p>
+          <a:p>
+            <a:r>
+              <a:t>Compare models on identical held-out observations with the same metric and preprocessing rules. Each cross-validation training fold learns its own preparation values.</a:t>
+            </a:r>
+          </a:p>
+          <a:p>
+            <a:r>
+              <a:t/>
+            </a:r>
+          </a:p>
+          <a:p>
+            <a:r>
+              <a:t>Misconception to address</a:t>
+            </a:r>
+          </a:p>
+          <a:p>
+            <a:r>
+              <a:t>A written claim of no leakage must agree with the executable split and fitting code. Follow the published execution requirement for any criterion linked to the split check.</a:t>
+            </a:r>
+          </a:p>
+          <a:p>
+            <a:r>
+              <a:t/>
+            </a:r>
+          </a:p>
+          <a:p>
+            <a:r>
+              <a:t>On this slide</a:t>
+            </a:r>
+          </a:p>
+          <a:p>
             <a:r>
               <a:t>Pipeline used.</a:t>
             </a:r>
           </a:p>
-          <a:p xmlns:a="http://schemas.openxmlformats.org/drawingml/2006/main">
+          <a:p>
             <a:r>
               <a:t/>
             </a:r>
           </a:p>
-          <a:p xmlns:a="http://schemas.openxmlformats.org/drawingml/2006/main">
+          <a:p>
             <a:r>
               <a:t>Hyperparameters handled sensibly.</a:t>
             </a:r>
           </a:p>
-          <a:p xmlns:a="http://schemas.openxmlformats.org/drawingml/2006/main">
+          <a:p>
             <a:r>
               <a:t/>
             </a:r>
           </a:p>
-          <a:p xmlns:a="http://schemas.openxmlformats.org/drawingml/2006/main">
+          <a:p>
             <a:r>
               <a:t>Choices explained rather than defaulted to.</a:t>
             </a:r>
           </a:p>
-          <a:p xmlns:a="http://schemas.openxmlformats.org/drawingml/2006/main">
+          <a:p>
             <a:r>
               <a:t/>
             </a:r>
           </a:p>
-          <a:p xmlns:a="http://schemas.openxmlformats.org/drawingml/2006/main">
+          <a:p>
             <a:r>
               <a:t>Engineering reasoning (20.0 total): Domain knowledge visibly enters the work through features, banding, metric choice or interpretation.</a:t>
             </a:r>
           </a:p>
-          <a:p xmlns:a="http://schemas.openxmlformats.org/drawingml/2006/main">
+          <a:p>
             <a:r>
               <a:t/>
             </a:r>
           </a:p>
-          <a:p xmlns:a="http://schemas.openxmlformats.org/drawingml/2006/main">
-            <a:r>
-              <a:t>LECTURER CUE</a:t>
-            </a:r>
-          </a:p>
-          <a:p xmlns:a="http://schemas.openxmlformats.org/drawingml/2006/main">
-            <a:r>
-              <a:t># CML3112 ML_PROJECT: Engineering ML project — variant A</a:t>
-            </a:r>
-          </a:p>
-          <a:p xmlns:a="http://schemas.openxmlformats.org/drawingml/2006/main">
-            <a:r>
-              <a:t>Full assessment requirements belong in the current public task guide; explain only the criterion or task shown on this slide.</a:t>
-            </a:r>
-          </a:p>
-          <a:p xmlns:a="http://schemas.openxmlformats.org/drawingml/2006/main">
-            <a:r>
-              <a:t/>
-            </a:r>
-          </a:p>
-          <a:p xmlns:a="http://schemas.openxmlformats.org/drawingml/2006/main">
-            <a:r>
-              <a:t>TEACHING MODE</a:t>
-            </a:r>
-          </a:p>
-          <a:p xmlns:a="http://schemas.openxmlformats.org/drawingml/2006/main">
-            <a:r>
-              <a:t>Demonstrate first. Read each new symbol aloud, trace the values and compare the shown output. Learners repeat worked examples individually after class.</a:t>
-            </a:r>
-          </a:p>
-          <a:p xmlns:a="http://schemas.openxmlformats.org/drawingml/2006/main">
-            <a:r>
-              <a:t/>
-            </a:r>
-          </a:p>
-          <a:p xmlns:a="http://schemas.openxmlformats.org/drawingml/2006/main">
-            <a:r>
-              <a:t>NEXT</a:t>
-            </a:r>
-          </a:p>
-          <a:p xmlns:a="http://schemas.openxmlformats.org/drawingml/2006/main">
-            <a:r>
-              <a:t>Engineering ML project continued.</a:t>
-            </a:r>
-          </a:p>
-          <a:p xmlns:a="http://schemas.openxmlformats.org/drawingml/2006/main">
-            <a:r>
-              <a:t/>
-            </a:r>
-          </a:p>
-          <a:p xmlns:a="http://schemas.openxmlformats.org/drawingml/2006/main">
-            <a:r>
-              <a:t>REFERENCES</a:t>
-            </a:r>
-          </a:p>
-          <a:p xmlns:a="http://schemas.openxmlformats.org/drawingml/2006/main">
-            <a:r>
-              <a:t/>
+          <a:p>
+            <a:r>
+              <a:t>Continue to</a:t>
+            </a:r>
+          </a:p>
+          <a:p>
+            <a:r>
+              <a:t>Engineering ML project continued</a:t>
             </a:r>
           </a:p>
         </p:txBody>
@@ -1569,7 +1454,7 @@
         <p:nvSpPr>
           <p:cNvPr id="4" name="Slide Number Placeholder 3"/>
           <p:cNvSpPr>
-            <a:spLocks xmlns:a="http://schemas.openxmlformats.org/drawingml/2006/main" noGrp="1"/>
+            <a:spLocks noGrp="1"/>
           </p:cNvSpPr>
           <p:nvPr>
             <p:ph type="sldNum" idx="5"/>
@@ -1577,21 +1462,21 @@
         </p:nvSpPr>
         <p:spPr/>
         <p:txBody>
-          <a:bodyPr xmlns:a="http://schemas.openxmlformats.org/drawingml/2006/main"/>
-          <a:lstStyle xmlns:a="http://schemas.openxmlformats.org/drawingml/2006/main"/>
-          <a:p xmlns:a="http://schemas.openxmlformats.org/drawingml/2006/main"/>
+          <a:bodyPr/>
+          <a:lstStyle/>
+          <a:p/>
         </p:txBody>
       </p:sp>
     </p:spTree>
   </p:cSld>
   <p:clrMapOvr>
-    <a:masterClrMapping xmlns:a="http://schemas.openxmlformats.org/drawingml/2006/main"/>
+    <a:masterClrMapping/>
   </p:clrMapOvr>
 </p:notes>
 </file>
 
 <file path=ppt/notesSlides/notesSlide15.xml><?xml version="1.0" encoding="utf-8"?>
-<p:notes xmlns:p="http://schemas.openxmlformats.org/presentationml/2006/main">
+<p:notes xmlns:a="http://schemas.openxmlformats.org/drawingml/2006/main" xmlns:p="http://schemas.openxmlformats.org/presentationml/2006/main">
   <p:cSld>
     <p:spTree>
       <p:nvGrpSpPr>
@@ -1600,13 +1485,13 @@
         <p:nvPr/>
       </p:nvGrpSpPr>
       <p:grpSpPr>
-        <a:xfrm xmlns:a="http://schemas.openxmlformats.org/drawingml/2006/main"/>
+        <a:xfrm/>
       </p:grpSpPr>
       <p:sp>
         <p:nvSpPr>
           <p:cNvPr id="2" name="Slide Image Placeholder 1"/>
           <p:cNvSpPr>
-            <a:spLocks xmlns:a="http://schemas.openxmlformats.org/drawingml/2006/main" noGrp="1"/>
+            <a:spLocks noGrp="1"/>
           </p:cNvSpPr>
           <p:nvPr>
             <p:ph type="sldImg" idx="0"/>
@@ -1618,7 +1503,7 @@
         <p:nvSpPr>
           <p:cNvPr id="3" name="Notes Placeholder 2"/>
           <p:cNvSpPr>
-            <a:spLocks xmlns:a="http://schemas.openxmlformats.org/drawingml/2006/main" noGrp="1"/>
+            <a:spLocks noGrp="1"/>
           </p:cNvSpPr>
           <p:nvPr>
             <p:ph type="body" idx="1"/>
@@ -1626,131 +1511,111 @@
         </p:nvSpPr>
         <p:spPr/>
         <p:txBody>
-          <a:bodyPr xmlns:a="http://schemas.openxmlformats.org/drawingml/2006/main"/>
-          <a:lstStyle xmlns:a="http://schemas.openxmlformats.org/drawingml/2006/main"/>
-          <a:p xmlns:a="http://schemas.openxmlformats.org/drawingml/2006/main">
-            <a:r>
-              <a:t>PURPOSE</a:t>
-            </a:r>
-          </a:p>
-          <a:p xmlns:a="http://schemas.openxmlformats.org/drawingml/2006/main">
+          <a:bodyPr/>
+          <a:lstStyle/>
+          <a:p>
             <a:r>
               <a:t>Engineering ML project continued</a:t>
             </a:r>
           </a:p>
-          <a:p xmlns:a="http://schemas.openxmlformats.org/drawingml/2006/main">
+          <a:p>
+            <a:r>
+              <a:t>CML3112, Week 15, slide 15</a:t>
+            </a:r>
+          </a:p>
+          <a:p>
             <a:r>
               <a:t/>
             </a:r>
           </a:p>
-          <a:p xmlns:a="http://schemas.openxmlformats.org/drawingml/2006/main">
-            <a:r>
-              <a:t>CONNECT</a:t>
-            </a:r>
-          </a:p>
-          <a:p xmlns:a="http://schemas.openxmlformats.org/drawingml/2006/main">
-            <a:r>
-              <a:t>Previous slide: Engineering ML project continued.</a:t>
-            </a:r>
-          </a:p>
-          <a:p xmlns:a="http://schemas.openxmlformats.org/drawingml/2006/main">
+          <a:p>
+            <a:r>
+              <a:t>Explanation to give</a:t>
+            </a:r>
+          </a:p>
+          <a:p>
+            <a:r>
+              <a:t>Explain the order: partition data using the stated protocol, fit preparation on training data, fit models, compare on validation data and leave final test data untouched until choices are fixed.</a:t>
+            </a:r>
+          </a:p>
+          <a:p>
             <a:r>
               <a:t/>
             </a:r>
           </a:p>
-          <a:p xmlns:a="http://schemas.openxmlformats.org/drawingml/2006/main">
-            <a:r>
-              <a:t>EXPLAIN</a:t>
-            </a:r>
-          </a:p>
-          <a:p xmlns:a="http://schemas.openxmlformats.org/drawingml/2006/main">
+          <a:p>
+            <a:r>
+              <a:t>Worked illustration / lecturer answer</a:t>
+            </a:r>
+          </a:p>
+          <a:p>
+            <a:r>
+              <a:t>Compare models on identical held-out observations with the same metric and preprocessing rules. Each cross-validation training fold learns its own preparation values.</a:t>
+            </a:r>
+          </a:p>
+          <a:p>
+            <a:r>
+              <a:t/>
+            </a:r>
+          </a:p>
+          <a:p>
+            <a:r>
+              <a:t>Misconception to address</a:t>
+            </a:r>
+          </a:p>
+          <a:p>
+            <a:r>
+              <a:t>A written claim of no leakage must agree with the executable split and fitting code. Follow the published execution requirement for any criterion linked to the split check.</a:t>
+            </a:r>
+          </a:p>
+          <a:p>
+            <a:r>
+              <a:t/>
+            </a:r>
+          </a:p>
+          <a:p>
+            <a:r>
+              <a:t>On this slide</a:t>
+            </a:r>
+          </a:p>
+          <a:p>
             <a:r>
               <a:t>The result is discussed as engineering, not as a score.</a:t>
             </a:r>
           </a:p>
-          <a:p xmlns:a="http://schemas.openxmlformats.org/drawingml/2006/main">
+          <a:p>
             <a:r>
               <a:t/>
             </a:r>
           </a:p>
-          <a:p xmlns:a="http://schemas.openxmlformats.org/drawingml/2006/main">
+          <a:p>
             <a:r>
               <a:t>Validation (15.0 total): Correct train/test discipline, cross-validation with a reported spread, leakage explicitly checked and ruled out, metric justified against the cost of error.</a:t>
             </a:r>
           </a:p>
-          <a:p xmlns:a="http://schemas.openxmlformats.org/drawingml/2006/main">
+          <a:p>
             <a:r>
               <a:t/>
             </a:r>
           </a:p>
-          <a:p xmlns:a="http://schemas.openxmlformats.org/drawingml/2006/main">
+          <a:p>
             <a:r>
               <a:t>Communication (10.0 total): The 2-page brief is readable by a non-specialist engineer.</a:t>
             </a:r>
           </a:p>
-          <a:p xmlns:a="http://schemas.openxmlformats.org/drawingml/2006/main">
+          <a:p>
             <a:r>
               <a:t/>
             </a:r>
           </a:p>
-          <a:p xmlns:a="http://schemas.openxmlformats.org/drawingml/2006/main">
-            <a:r>
-              <a:t>LECTURER CUE</a:t>
-            </a:r>
-          </a:p>
-          <a:p xmlns:a="http://schemas.openxmlformats.org/drawingml/2006/main">
-            <a:r>
-              <a:t># CML3112 ML_PROJECT: Engineering ML project — variant A</a:t>
-            </a:r>
-          </a:p>
-          <a:p xmlns:a="http://schemas.openxmlformats.org/drawingml/2006/main">
-            <a:r>
-              <a:t>Full assessment requirements belong in the current public task guide; explain only the criterion or task shown on this slide.</a:t>
-            </a:r>
-          </a:p>
-          <a:p xmlns:a="http://schemas.openxmlformats.org/drawingml/2006/main">
-            <a:r>
-              <a:t/>
-            </a:r>
-          </a:p>
-          <a:p xmlns:a="http://schemas.openxmlformats.org/drawingml/2006/main">
-            <a:r>
-              <a:t>TEACHING MODE</a:t>
-            </a:r>
-          </a:p>
-          <a:p xmlns:a="http://schemas.openxmlformats.org/drawingml/2006/main">
-            <a:r>
-              <a:t>Demonstrate first. Read each new symbol aloud, trace the values and compare the shown output. Learners repeat worked examples individually after class.</a:t>
-            </a:r>
-          </a:p>
-          <a:p xmlns:a="http://schemas.openxmlformats.org/drawingml/2006/main">
-            <a:r>
-              <a:t/>
-            </a:r>
-          </a:p>
-          <a:p xmlns:a="http://schemas.openxmlformats.org/drawingml/2006/main">
-            <a:r>
-              <a:t>NEXT</a:t>
-            </a:r>
-          </a:p>
-          <a:p xmlns:a="http://schemas.openxmlformats.org/drawingml/2006/main">
-            <a:r>
-              <a:t>Engineering ML project continued.</a:t>
-            </a:r>
-          </a:p>
-          <a:p xmlns:a="http://schemas.openxmlformats.org/drawingml/2006/main">
-            <a:r>
-              <a:t/>
-            </a:r>
-          </a:p>
-          <a:p xmlns:a="http://schemas.openxmlformats.org/drawingml/2006/main">
-            <a:r>
-              <a:t>REFERENCES</a:t>
-            </a:r>
-          </a:p>
-          <a:p xmlns:a="http://schemas.openxmlformats.org/drawingml/2006/main">
-            <a:r>
-              <a:t/>
+          <a:p>
+            <a:r>
+              <a:t>Continue to</a:t>
+            </a:r>
+          </a:p>
+          <a:p>
+            <a:r>
+              <a:t>Engineering ML project continued</a:t>
             </a:r>
           </a:p>
         </p:txBody>
@@ -1759,7 +1624,7 @@
         <p:nvSpPr>
           <p:cNvPr id="4" name="Slide Number Placeholder 3"/>
           <p:cNvSpPr>
-            <a:spLocks xmlns:a="http://schemas.openxmlformats.org/drawingml/2006/main" noGrp="1"/>
+            <a:spLocks noGrp="1"/>
           </p:cNvSpPr>
           <p:nvPr>
             <p:ph type="sldNum" idx="5"/>
@@ -1767,21 +1632,21 @@
         </p:nvSpPr>
         <p:spPr/>
         <p:txBody>
-          <a:bodyPr xmlns:a="http://schemas.openxmlformats.org/drawingml/2006/main"/>
-          <a:lstStyle xmlns:a="http://schemas.openxmlformats.org/drawingml/2006/main"/>
-          <a:p xmlns:a="http://schemas.openxmlformats.org/drawingml/2006/main"/>
+          <a:bodyPr/>
+          <a:lstStyle/>
+          <a:p/>
         </p:txBody>
       </p:sp>
     </p:spTree>
   </p:cSld>
   <p:clrMapOvr>
-    <a:masterClrMapping xmlns:a="http://schemas.openxmlformats.org/drawingml/2006/main"/>
+    <a:masterClrMapping/>
   </p:clrMapOvr>
 </p:notes>
 </file>
 
 <file path=ppt/notesSlides/notesSlide16.xml><?xml version="1.0" encoding="utf-8"?>
-<p:notes xmlns:p="http://schemas.openxmlformats.org/presentationml/2006/main">
+<p:notes xmlns:a="http://schemas.openxmlformats.org/drawingml/2006/main" xmlns:p="http://schemas.openxmlformats.org/presentationml/2006/main">
   <p:cSld>
     <p:spTree>
       <p:nvGrpSpPr>
@@ -1790,13 +1655,13 @@
         <p:nvPr/>
       </p:nvGrpSpPr>
       <p:grpSpPr>
-        <a:xfrm xmlns:a="http://schemas.openxmlformats.org/drawingml/2006/main"/>
+        <a:xfrm/>
       </p:grpSpPr>
       <p:sp>
         <p:nvSpPr>
           <p:cNvPr id="2" name="Slide Image Placeholder 1"/>
           <p:cNvSpPr>
-            <a:spLocks xmlns:a="http://schemas.openxmlformats.org/drawingml/2006/main" noGrp="1"/>
+            <a:spLocks noGrp="1"/>
           </p:cNvSpPr>
           <p:nvPr>
             <p:ph type="sldImg" idx="0"/>
@@ -1808,7 +1673,7 @@
         <p:nvSpPr>
           <p:cNvPr id="3" name="Notes Placeholder 2"/>
           <p:cNvSpPr>
-            <a:spLocks xmlns:a="http://schemas.openxmlformats.org/drawingml/2006/main" noGrp="1"/>
+            <a:spLocks noGrp="1"/>
           </p:cNvSpPr>
           <p:nvPr>
             <p:ph type="body" idx="1"/>
@@ -1816,141 +1681,121 @@
         </p:nvSpPr>
         <p:spPr/>
         <p:txBody>
-          <a:bodyPr xmlns:a="http://schemas.openxmlformats.org/drawingml/2006/main"/>
-          <a:lstStyle xmlns:a="http://schemas.openxmlformats.org/drawingml/2006/main"/>
-          <a:p xmlns:a="http://schemas.openxmlformats.org/drawingml/2006/main">
-            <a:r>
-              <a:t>PURPOSE</a:t>
-            </a:r>
-          </a:p>
-          <a:p xmlns:a="http://schemas.openxmlformats.org/drawingml/2006/main">
+          <a:bodyPr/>
+          <a:lstStyle/>
+          <a:p>
             <a:r>
               <a:t>Engineering ML project continued</a:t>
             </a:r>
           </a:p>
-          <a:p xmlns:a="http://schemas.openxmlformats.org/drawingml/2006/main">
+          <a:p>
+            <a:r>
+              <a:t>CML3112, Week 15, slide 16</a:t>
+            </a:r>
+          </a:p>
+          <a:p>
             <a:r>
               <a:t/>
             </a:r>
           </a:p>
-          <a:p xmlns:a="http://schemas.openxmlformats.org/drawingml/2006/main">
-            <a:r>
-              <a:t>CONNECT</a:t>
-            </a:r>
-          </a:p>
-          <a:p xmlns:a="http://schemas.openxmlformats.org/drawingml/2006/main">
-            <a:r>
-              <a:t>Previous slide: Engineering ML project continued.</a:t>
-            </a:r>
-          </a:p>
-          <a:p xmlns:a="http://schemas.openxmlformats.org/drawingml/2006/main">
+          <a:p>
+            <a:r>
+              <a:t>Explanation to give</a:t>
+            </a:r>
+          </a:p>
+          <a:p>
+            <a:r>
+              <a:t>A chart must answer a stated question and show the actual data result. Explain what one mark represents and label both the quantity and unit before stating the finding.</a:t>
+            </a:r>
+          </a:p>
+          <a:p>
             <a:r>
               <a:t/>
             </a:r>
           </a:p>
-          <a:p xmlns:a="http://schemas.openxmlformats.org/drawingml/2006/main">
-            <a:r>
-              <a:t>EXPLAIN</a:t>
-            </a:r>
-          </a:p>
-          <a:p xmlns:a="http://schemas.openxmlformats.org/drawingml/2006/main">
+          <a:p>
+            <a:r>
+              <a:t>Worked illustration / lecturer answer</a:t>
+            </a:r>
+          </a:p>
+          <a:p>
+            <a:r>
+              <a:t>A useful caption names the group or sample, the observed difference and the relevant unit. A limitation states what the plotted observations cannot establish, such as causation or performance at a new site.</a:t>
+            </a:r>
+          </a:p>
+          <a:p>
+            <a:r>
+              <a:t/>
+            </a:r>
+          </a:p>
+          <a:p>
+            <a:r>
+              <a:t>Misconception to address</a:t>
+            </a:r>
+          </a:p>
+          <a:p>
+            <a:r>
+              <a:t>Text claiming “a chart was made” is not the required chart. Check the exact number and kinds required on this slide and in the assessment guide.</a:t>
+            </a:r>
+          </a:p>
+          <a:p>
+            <a:r>
+              <a:t/>
+            </a:r>
+          </a:p>
+          <a:p>
+            <a:r>
+              <a:t>On this slide</a:t>
+            </a:r>
+          </a:p>
+          <a:p>
             <a:r>
               <a:t>Charts answer questions and are captioned with findings.</a:t>
             </a:r>
           </a:p>
-          <a:p xmlns:a="http://schemas.openxmlformats.org/drawingml/2006/main">
+          <a:p>
             <a:r>
               <a:t/>
             </a:r>
           </a:p>
-          <a:p xmlns:a="http://schemas.openxmlformats.org/drawingml/2006/main">
-            <a:r>
-              <a:t>Uncertainty and limitations stated honestly.</a:t>
-            </a:r>
-          </a:p>
-          <a:p xmlns:a="http://schemas.openxmlformats.org/drawingml/2006/main">
+          <a:p>
+            <a:r>
+              <a:t>State uncertainty and limitations.</a:t>
+            </a:r>
+          </a:p>
+          <a:p>
             <a:r>
               <a:t/>
             </a:r>
           </a:p>
-          <a:p xmlns:a="http://schemas.openxmlformats.org/drawingml/2006/main">
+          <a:p>
             <a:r>
               <a:t>Reproducibility &amp; documentation (5.0 total): Repository runs from a clean clone.</a:t>
             </a:r>
           </a:p>
-          <a:p xmlns:a="http://schemas.openxmlformats.org/drawingml/2006/main">
+          <a:p>
             <a:r>
               <a:t/>
             </a:r>
           </a:p>
-          <a:p xmlns:a="http://schemas.openxmlformats.org/drawingml/2006/main">
+          <a:p>
             <a:r>
               <a:t>README complete. requirements.txt present.</a:t>
             </a:r>
           </a:p>
-          <a:p xmlns:a="http://schemas.openxmlformats.org/drawingml/2006/main">
+          <a:p>
             <a:r>
               <a:t/>
             </a:r>
           </a:p>
-          <a:p xmlns:a="http://schemas.openxmlformats.org/drawingml/2006/main">
-            <a:r>
-              <a:t>LECTURER CUE</a:t>
-            </a:r>
-          </a:p>
-          <a:p xmlns:a="http://schemas.openxmlformats.org/drawingml/2006/main">
-            <a:r>
-              <a:t># CML3112 ML_PROJECT: Engineering ML project — variant A</a:t>
-            </a:r>
-          </a:p>
-          <a:p xmlns:a="http://schemas.openxmlformats.org/drawingml/2006/main">
-            <a:r>
-              <a:t>Full assessment requirements belong in the current public task guide; explain only the criterion or task shown on this slide.</a:t>
-            </a:r>
-          </a:p>
-          <a:p xmlns:a="http://schemas.openxmlformats.org/drawingml/2006/main">
-            <a:r>
-              <a:t/>
-            </a:r>
-          </a:p>
-          <a:p xmlns:a="http://schemas.openxmlformats.org/drawingml/2006/main">
-            <a:r>
-              <a:t>TEACHING MODE</a:t>
-            </a:r>
-          </a:p>
-          <a:p xmlns:a="http://schemas.openxmlformats.org/drawingml/2006/main">
-            <a:r>
-              <a:t>Demonstrate first. Read each new symbol aloud, trace the values and compare the shown output. Learners repeat worked examples individually after class.</a:t>
-            </a:r>
-          </a:p>
-          <a:p xmlns:a="http://schemas.openxmlformats.org/drawingml/2006/main">
-            <a:r>
-              <a:t/>
-            </a:r>
-          </a:p>
-          <a:p xmlns:a="http://schemas.openxmlformats.org/drawingml/2006/main">
-            <a:r>
-              <a:t>NEXT</a:t>
-            </a:r>
-          </a:p>
-          <a:p xmlns:a="http://schemas.openxmlformats.org/drawingml/2006/main">
-            <a:r>
-              <a:t>Engineering ML project continued.</a:t>
-            </a:r>
-          </a:p>
-          <a:p xmlns:a="http://schemas.openxmlformats.org/drawingml/2006/main">
-            <a:r>
-              <a:t/>
-            </a:r>
-          </a:p>
-          <a:p xmlns:a="http://schemas.openxmlformats.org/drawingml/2006/main">
-            <a:r>
-              <a:t>REFERENCES</a:t>
-            </a:r>
-          </a:p>
-          <a:p xmlns:a="http://schemas.openxmlformats.org/drawingml/2006/main">
-            <a:r>
-              <a:t/>
+          <a:p>
+            <a:r>
+              <a:t>Continue to</a:t>
+            </a:r>
+          </a:p>
+          <a:p>
+            <a:r>
+              <a:t>Engineering ML project continued</a:t>
             </a:r>
           </a:p>
         </p:txBody>
@@ -1959,7 +1804,7 @@
         <p:nvSpPr>
           <p:cNvPr id="4" name="Slide Number Placeholder 3"/>
           <p:cNvSpPr>
-            <a:spLocks xmlns:a="http://schemas.openxmlformats.org/drawingml/2006/main" noGrp="1"/>
+            <a:spLocks noGrp="1"/>
           </p:cNvSpPr>
           <p:nvPr>
             <p:ph type="sldNum" idx="5"/>
@@ -1967,21 +1812,21 @@
         </p:nvSpPr>
         <p:spPr/>
         <p:txBody>
-          <a:bodyPr xmlns:a="http://schemas.openxmlformats.org/drawingml/2006/main"/>
-          <a:lstStyle xmlns:a="http://schemas.openxmlformats.org/drawingml/2006/main"/>
-          <a:p xmlns:a="http://schemas.openxmlformats.org/drawingml/2006/main"/>
+          <a:bodyPr/>
+          <a:lstStyle/>
+          <a:p/>
         </p:txBody>
       </p:sp>
     </p:spTree>
   </p:cSld>
   <p:clrMapOvr>
-    <a:masterClrMapping xmlns:a="http://schemas.openxmlformats.org/drawingml/2006/main"/>
+    <a:masterClrMapping/>
   </p:clrMapOvr>
 </p:notes>
 </file>
 
 <file path=ppt/notesSlides/notesSlide17.xml><?xml version="1.0" encoding="utf-8"?>
-<p:notes xmlns:p="http://schemas.openxmlformats.org/presentationml/2006/main">
+<p:notes xmlns:a="http://schemas.openxmlformats.org/drawingml/2006/main" xmlns:p="http://schemas.openxmlformats.org/presentationml/2006/main">
   <p:cSld>
     <p:spTree>
       <p:nvGrpSpPr>
@@ -1990,13 +1835,13 @@
         <p:nvPr/>
       </p:nvGrpSpPr>
       <p:grpSpPr>
-        <a:xfrm xmlns:a="http://schemas.openxmlformats.org/drawingml/2006/main"/>
+        <a:xfrm/>
       </p:grpSpPr>
       <p:sp>
         <p:nvSpPr>
           <p:cNvPr id="2" name="Slide Image Placeholder 1"/>
           <p:cNvSpPr>
-            <a:spLocks xmlns:a="http://schemas.openxmlformats.org/drawingml/2006/main" noGrp="1"/>
+            <a:spLocks noGrp="1"/>
           </p:cNvSpPr>
           <p:nvPr>
             <p:ph type="sldImg" idx="0"/>
@@ -2008,7 +1853,7 @@
         <p:nvSpPr>
           <p:cNvPr id="3" name="Notes Placeholder 2"/>
           <p:cNvSpPr>
-            <a:spLocks xmlns:a="http://schemas.openxmlformats.org/drawingml/2006/main" noGrp="1"/>
+            <a:spLocks noGrp="1"/>
           </p:cNvSpPr>
           <p:nvPr>
             <p:ph type="body" idx="1"/>
@@ -2016,131 +1861,111 @@
         </p:nvSpPr>
         <p:spPr/>
         <p:txBody>
-          <a:bodyPr xmlns:a="http://schemas.openxmlformats.org/drawingml/2006/main"/>
-          <a:lstStyle xmlns:a="http://schemas.openxmlformats.org/drawingml/2006/main"/>
-          <a:p xmlns:a="http://schemas.openxmlformats.org/drawingml/2006/main">
-            <a:r>
-              <a:t>PURPOSE</a:t>
-            </a:r>
-          </a:p>
-          <a:p xmlns:a="http://schemas.openxmlformats.org/drawingml/2006/main">
+          <a:bodyPr/>
+          <a:lstStyle/>
+          <a:p>
             <a:r>
               <a:t>Engineering ML project continued</a:t>
             </a:r>
           </a:p>
-          <a:p xmlns:a="http://schemas.openxmlformats.org/drawingml/2006/main">
+          <a:p>
+            <a:r>
+              <a:t>CML3112, Week 15, slide 17</a:t>
+            </a:r>
+          </a:p>
+          <a:p>
             <a:r>
               <a:t/>
             </a:r>
           </a:p>
-          <a:p xmlns:a="http://schemas.openxmlformats.org/drawingml/2006/main">
-            <a:r>
-              <a:t>CONNECT</a:t>
-            </a:r>
-          </a:p>
-          <a:p xmlns:a="http://schemas.openxmlformats.org/drawingml/2006/main">
-            <a:r>
-              <a:t>Previous slide: Engineering ML project continued.</a:t>
-            </a:r>
-          </a:p>
-          <a:p xmlns:a="http://schemas.openxmlformats.org/drawingml/2006/main">
+          <a:p>
+            <a:r>
+              <a:t>Explanation to give</a:t>
+            </a:r>
+          </a:p>
+          <a:p>
+            <a:r>
+              <a:t>Make contribution evidence specific enough to check. A seed records the starting state of random choices; a contribution log records who produced and explained which work.</a:t>
+            </a:r>
+          </a:p>
+          <a:p>
             <a:r>
               <a:t/>
             </a:r>
           </a:p>
-          <a:p xmlns:a="http://schemas.openxmlformats.org/drawingml/2006/main">
-            <a:r>
-              <a:t>EXPLAIN</a:t>
-            </a:r>
-          </a:p>
-          <a:p xmlns:a="http://schemas.openxmlformats.org/drawingml/2006/main">
+          <a:p>
+            <a:r>
+              <a:t>Worked illustration / lecturer answer</a:t>
+            </a:r>
+          </a:p>
+          <a:p>
+            <a:r>
+              <a:t>Name a file, function or chart and the decision behind it. Match that entry to meaningful repository history. Disclose AI assistance according to the assessment policy.</a:t>
+            </a:r>
+          </a:p>
+          <a:p>
+            <a:r>
+              <a:t/>
+            </a:r>
+          </a:p>
+          <a:p>
+            <a:r>
+              <a:t>Misconception to address</a:t>
+            </a:r>
+          </a:p>
+          <a:p>
+            <a:r>
+              <a:t>Many commits do not necessarily mean substantial work, and a seed does not establish accuracy. Both are supporting evidence, not replacements for the analysis.</a:t>
+            </a:r>
+          </a:p>
+          <a:p>
+            <a:r>
+              <a:t/>
+            </a:r>
+          </a:p>
+          <a:p>
+            <a:r>
+              <a:t>On this slide</a:t>
+            </a:r>
+          </a:p>
+          <a:p>
             <a:r>
               <a:t>Seeds set.</a:t>
             </a:r>
           </a:p>
-          <a:p xmlns:a="http://schemas.openxmlformats.org/drawingml/2006/main">
+          <a:p>
             <a:r>
               <a:t/>
             </a:r>
           </a:p>
-          <a:p xmlns:a="http://schemas.openxmlformats.org/drawingml/2006/main">
+          <a:p>
             <a:r>
               <a:t>AI use declared.</a:t>
             </a:r>
           </a:p>
-          <a:p xmlns:a="http://schemas.openxmlformats.org/drawingml/2006/main">
+          <a:p>
             <a:r>
               <a:t/>
             </a:r>
           </a:p>
-          <a:p xmlns:a="http://schemas.openxmlformats.org/drawingml/2006/main">
+          <a:p>
             <a:r>
               <a:t>Contribution log present.</a:t>
             </a:r>
           </a:p>
-          <a:p xmlns:a="http://schemas.openxmlformats.org/drawingml/2006/main">
+          <a:p>
             <a:r>
               <a:t/>
             </a:r>
           </a:p>
-          <a:p xmlns:a="http://schemas.openxmlformats.org/drawingml/2006/main">
-            <a:r>
-              <a:t>LECTURER CUE</a:t>
-            </a:r>
-          </a:p>
-          <a:p xmlns:a="http://schemas.openxmlformats.org/drawingml/2006/main">
-            <a:r>
-              <a:t># CML3112 ML_PROJECT: Engineering ML project — variant A</a:t>
-            </a:r>
-          </a:p>
-          <a:p xmlns:a="http://schemas.openxmlformats.org/drawingml/2006/main">
-            <a:r>
-              <a:t>Full assessment requirements belong in the current public task guide; explain only the criterion or task shown on this slide.</a:t>
-            </a:r>
-          </a:p>
-          <a:p xmlns:a="http://schemas.openxmlformats.org/drawingml/2006/main">
-            <a:r>
-              <a:t/>
-            </a:r>
-          </a:p>
-          <a:p xmlns:a="http://schemas.openxmlformats.org/drawingml/2006/main">
-            <a:r>
-              <a:t>TEACHING MODE</a:t>
-            </a:r>
-          </a:p>
-          <a:p xmlns:a="http://schemas.openxmlformats.org/drawingml/2006/main">
-            <a:r>
-              <a:t>Demonstrate first. Read each new symbol aloud, trace the values and compare the shown output. Learners repeat worked examples individually after class.</a:t>
-            </a:r>
-          </a:p>
-          <a:p xmlns:a="http://schemas.openxmlformats.org/drawingml/2006/main">
-            <a:r>
-              <a:t/>
-            </a:r>
-          </a:p>
-          <a:p xmlns:a="http://schemas.openxmlformats.org/drawingml/2006/main">
-            <a:r>
-              <a:t>NEXT</a:t>
-            </a:r>
-          </a:p>
-          <a:p xmlns:a="http://schemas.openxmlformats.org/drawingml/2006/main">
-            <a:r>
-              <a:t>Engineering ML project submission.</a:t>
-            </a:r>
-          </a:p>
-          <a:p xmlns:a="http://schemas.openxmlformats.org/drawingml/2006/main">
-            <a:r>
-              <a:t/>
-            </a:r>
-          </a:p>
-          <a:p xmlns:a="http://schemas.openxmlformats.org/drawingml/2006/main">
-            <a:r>
-              <a:t>REFERENCES</a:t>
-            </a:r>
-          </a:p>
-          <a:p xmlns:a="http://schemas.openxmlformats.org/drawingml/2006/main">
-            <a:r>
-              <a:t/>
+          <a:p>
+            <a:r>
+              <a:t>Continue to</a:t>
+            </a:r>
+          </a:p>
+          <a:p>
+            <a:r>
+              <a:t>Engineering ML project submission</a:t>
             </a:r>
           </a:p>
         </p:txBody>
@@ -2149,7 +1974,7 @@
         <p:nvSpPr>
           <p:cNvPr id="4" name="Slide Number Placeholder 3"/>
           <p:cNvSpPr>
-            <a:spLocks xmlns:a="http://schemas.openxmlformats.org/drawingml/2006/main" noGrp="1"/>
+            <a:spLocks noGrp="1"/>
           </p:cNvSpPr>
           <p:nvPr>
             <p:ph type="sldNum" idx="5"/>
@@ -2157,21 +1982,21 @@
         </p:nvSpPr>
         <p:spPr/>
         <p:txBody>
-          <a:bodyPr xmlns:a="http://schemas.openxmlformats.org/drawingml/2006/main"/>
-          <a:lstStyle xmlns:a="http://schemas.openxmlformats.org/drawingml/2006/main"/>
-          <a:p xmlns:a="http://schemas.openxmlformats.org/drawingml/2006/main"/>
+          <a:bodyPr/>
+          <a:lstStyle/>
+          <a:p/>
         </p:txBody>
       </p:sp>
     </p:spTree>
   </p:cSld>
   <p:clrMapOvr>
-    <a:masterClrMapping xmlns:a="http://schemas.openxmlformats.org/drawingml/2006/main"/>
+    <a:masterClrMapping/>
   </p:clrMapOvr>
 </p:notes>
 </file>
 
 <file path=ppt/notesSlides/notesSlide18.xml><?xml version="1.0" encoding="utf-8"?>
-<p:notes xmlns:p="http://schemas.openxmlformats.org/presentationml/2006/main">
+<p:notes xmlns:a="http://schemas.openxmlformats.org/drawingml/2006/main" xmlns:p="http://schemas.openxmlformats.org/presentationml/2006/main">
   <p:cSld>
     <p:spTree>
       <p:nvGrpSpPr>
@@ -2180,13 +2005,13 @@
         <p:nvPr/>
       </p:nvGrpSpPr>
       <p:grpSpPr>
-        <a:xfrm xmlns:a="http://schemas.openxmlformats.org/drawingml/2006/main"/>
+        <a:xfrm/>
       </p:grpSpPr>
       <p:sp>
         <p:nvSpPr>
           <p:cNvPr id="2" name="Slide Image Placeholder 1"/>
           <p:cNvSpPr>
-            <a:spLocks xmlns:a="http://schemas.openxmlformats.org/drawingml/2006/main" noGrp="1"/>
+            <a:spLocks noGrp="1"/>
           </p:cNvSpPr>
           <p:nvPr>
             <p:ph type="sldImg" idx="0"/>
@@ -2198,7 +2023,7 @@
         <p:nvSpPr>
           <p:cNvPr id="3" name="Notes Placeholder 2"/>
           <p:cNvSpPr>
-            <a:spLocks xmlns:a="http://schemas.openxmlformats.org/drawingml/2006/main" noGrp="1"/>
+            <a:spLocks noGrp="1"/>
           </p:cNvSpPr>
           <p:nvPr>
             <p:ph type="body" idx="1"/>
@@ -2206,136 +2031,121 @@
         </p:nvSpPr>
         <p:spPr/>
         <p:txBody>
-          <a:bodyPr xmlns:a="http://schemas.openxmlformats.org/drawingml/2006/main"/>
-          <a:lstStyle xmlns:a="http://schemas.openxmlformats.org/drawingml/2006/main"/>
-          <a:p xmlns:a="http://schemas.openxmlformats.org/drawingml/2006/main">
-            <a:r>
-              <a:t>PURPOSE</a:t>
-            </a:r>
-          </a:p>
-          <a:p xmlns:a="http://schemas.openxmlformats.org/drawingml/2006/main">
+          <a:bodyPr/>
+          <a:lstStyle/>
+          <a:p>
             <a:r>
               <a:t>Engineering ML project submission</a:t>
             </a:r>
           </a:p>
-          <a:p xmlns:a="http://schemas.openxmlformats.org/drawingml/2006/main">
+          <a:p>
+            <a:r>
+              <a:t>CML3112, Week 15, slide 18</a:t>
+            </a:r>
+          </a:p>
+          <a:p>
             <a:r>
               <a:t/>
             </a:r>
           </a:p>
-          <a:p xmlns:a="http://schemas.openxmlformats.org/drawingml/2006/main">
-            <a:r>
-              <a:t>CONNECT</a:t>
-            </a:r>
-          </a:p>
-          <a:p xmlns:a="http://schemas.openxmlformats.org/drawingml/2006/main">
-            <a:r>
-              <a:t>Previous slide: Engineering ML project continued.</a:t>
-            </a:r>
-          </a:p>
-          <a:p xmlns:a="http://schemas.openxmlformats.org/drawingml/2006/main">
+          <a:p>
+            <a:r>
+              <a:t>Explanation to give</a:t>
+            </a:r>
+          </a:p>
+          <a:p>
+            <a:r>
+              <a:t>This slide hands over CML3112 ML_PROJECT. Show the exact form title before uploading. The required packet is the completed project notebook together with one readable DOCX or selectable-text PDF report.</a:t>
+            </a:r>
+          </a:p>
+          <a:p>
             <a:r>
               <a:t/>
             </a:r>
           </a:p>
-          <a:p xmlns:a="http://schemas.openxmlformats.org/drawingml/2006/main">
-            <a:r>
-              <a:t>EXPLAIN</a:t>
-            </a:r>
-          </a:p>
-          <a:p xmlns:a="http://schemas.openxmlformats.org/drawingml/2006/main">
+          <a:p>
+            <a:r>
+              <a:t>Worked illustration / lecturer answer</a:t>
+            </a:r>
+          </a:p>
+          <a:p>
+            <a:r>
+              <a:t>The recorded cutoff for this form is 2026-12-15T11:00:00+03:00. Check the live form for later changes. A replacement must contain the complete required file set, not just the changed file.</a:t>
+            </a:r>
+          </a:p>
+          <a:p>
+            <a:r>
+              <a:t/>
+            </a:r>
+          </a:p>
+          <a:p>
+            <a:r>
+              <a:t>Misconception to address</a:t>
+            </a:r>
+          </a:p>
+          <a:p>
+            <a:r>
+              <a:t>Students enter their own Student Registration Number as required freeform text. They wait for filenames to appear, press Submit and keep the confirmation. A file saved in Drive or GitHub is not itself a form submission.</a:t>
+            </a:r>
+          </a:p>
+          <a:p>
+            <a:r>
+              <a:t/>
+            </a:r>
+          </a:p>
+          <a:p>
+            <a:r>
+              <a:t>On this slide</a:t>
+            </a:r>
+          </a:p>
+          <a:p>
             <a:r>
               <a:t>Opens: 24 Nov 2026, 11:00 Kampala</a:t>
             </a:r>
           </a:p>
-          <a:p xmlns:a="http://schemas.openxmlformats.org/drawingml/2006/main">
+          <a:p>
             <a:r>
               <a:t/>
             </a:r>
           </a:p>
-          <a:p xmlns:a="http://schemas.openxmlformats.org/drawingml/2006/main">
+          <a:p>
             <a:r>
               <a:t>Deadline: 15 Dec 2026, 11:00 Kampala</a:t>
             </a:r>
           </a:p>
-          <a:p xmlns:a="http://schemas.openxmlformats.org/drawingml/2006/main">
+          <a:p>
             <a:r>
               <a:t/>
             </a:r>
           </a:p>
-          <a:p xmlns:a="http://schemas.openxmlformats.org/drawingml/2006/main">
+          <a:p>
             <a:r>
               <a:t>Use your full Student Registration Number in the form.</a:t>
             </a:r>
           </a:p>
-          <a:p xmlns:a="http://schemas.openxmlformats.org/drawingml/2006/main">
+          <a:p>
             <a:r>
               <a:t/>
             </a:r>
           </a:p>
-          <a:p xmlns:a="http://schemas.openxmlformats.org/drawingml/2006/main">
+          <a:p>
             <a:r>
               <a:t>Keep the submitted files and confirmation.</a:t>
             </a:r>
           </a:p>
-          <a:p xmlns:a="http://schemas.openxmlformats.org/drawingml/2006/main">
+          <a:p>
             <a:r>
               <a:t/>
             </a:r>
           </a:p>
-          <a:p xmlns:a="http://schemas.openxmlformats.org/drawingml/2006/main">
-            <a:r>
-              <a:t>LECTURER CUE</a:t>
-            </a:r>
-          </a:p>
-          <a:p xmlns:a="http://schemas.openxmlformats.org/drawingml/2006/main">
-            <a:r>
-              <a:t>The form link is cohort-specific. Recheck the live form and release status before class. These scheduled assignment dates are separate from the quiz activation window. The issued brief defines the required files, even if the form accepts additional formats. Source: data/submission_links.json</a:t>
-            </a:r>
-          </a:p>
-          <a:p xmlns:a="http://schemas.openxmlformats.org/drawingml/2006/main">
-            <a:r>
-              <a:t/>
-            </a:r>
-          </a:p>
-          <a:p xmlns:a="http://schemas.openxmlformats.org/drawingml/2006/main">
-            <a:r>
-              <a:t>TEACHING MODE</a:t>
-            </a:r>
-          </a:p>
-          <a:p xmlns:a="http://schemas.openxmlformats.org/drawingml/2006/main">
-            <a:r>
-              <a:t>Demonstrate first. Read each new symbol aloud, trace the values and compare the shown output. Learners repeat worked examples individually after class.</a:t>
-            </a:r>
-          </a:p>
-          <a:p xmlns:a="http://schemas.openxmlformats.org/drawingml/2006/main">
-            <a:r>
-              <a:t/>
-            </a:r>
-          </a:p>
-          <a:p xmlns:a="http://schemas.openxmlformats.org/drawingml/2006/main">
-            <a:r>
-              <a:t>NEXT</a:t>
-            </a:r>
-          </a:p>
-          <a:p xmlns:a="http://schemas.openxmlformats.org/drawingml/2006/main">
-            <a:r>
-              <a:t>Presentation evidence (35 marks).</a:t>
-            </a:r>
-          </a:p>
-          <a:p xmlns:a="http://schemas.openxmlformats.org/drawingml/2006/main">
-            <a:r>
-              <a:t/>
-            </a:r>
-          </a:p>
-          <a:p xmlns:a="http://schemas.openxmlformats.org/drawingml/2006/main">
-            <a:r>
-              <a:t>REFERENCES</a:t>
-            </a:r>
-          </a:p>
-          <a:p xmlns:a="http://schemas.openxmlformats.org/drawingml/2006/main">
-            <a:r>
-              <a:t/>
+          <a:p>
+            <a:r>
+              <a:t>Continue to</a:t>
+            </a:r>
+          </a:p>
+          <a:p>
+            <a:r>
+              <a:t>Presentation evidence (35 marks)</a:t>
             </a:r>
           </a:p>
         </p:txBody>
@@ -2344,7 +2154,7 @@
         <p:nvSpPr>
           <p:cNvPr id="4" name="Slide Number Placeholder 3"/>
           <p:cNvSpPr>
-            <a:spLocks xmlns:a="http://schemas.openxmlformats.org/drawingml/2006/main" noGrp="1"/>
+            <a:spLocks noGrp="1"/>
           </p:cNvSpPr>
           <p:nvPr>
             <p:ph type="sldNum" idx="5"/>
@@ -2352,21 +2162,21 @@
         </p:nvSpPr>
         <p:spPr/>
         <p:txBody>
-          <a:bodyPr xmlns:a="http://schemas.openxmlformats.org/drawingml/2006/main"/>
-          <a:lstStyle xmlns:a="http://schemas.openxmlformats.org/drawingml/2006/main"/>
-          <a:p xmlns:a="http://schemas.openxmlformats.org/drawingml/2006/main"/>
+          <a:bodyPr/>
+          <a:lstStyle/>
+          <a:p/>
         </p:txBody>
       </p:sp>
     </p:spTree>
   </p:cSld>
   <p:clrMapOvr>
-    <a:masterClrMapping xmlns:a="http://schemas.openxmlformats.org/drawingml/2006/main"/>
+    <a:masterClrMapping/>
   </p:clrMapOvr>
 </p:notes>
 </file>
 
 <file path=ppt/notesSlides/notesSlide19.xml><?xml version="1.0" encoding="utf-8"?>
-<p:notes xmlns:p="http://schemas.openxmlformats.org/presentationml/2006/main">
+<p:notes xmlns:a="http://schemas.openxmlformats.org/drawingml/2006/main" xmlns:p="http://schemas.openxmlformats.org/presentationml/2006/main">
   <p:cSld>
     <p:spTree>
       <p:nvGrpSpPr>
@@ -2375,13 +2185,13 @@
         <p:nvPr/>
       </p:nvGrpSpPr>
       <p:grpSpPr>
-        <a:xfrm xmlns:a="http://schemas.openxmlformats.org/drawingml/2006/main"/>
+        <a:xfrm/>
       </p:grpSpPr>
       <p:sp>
         <p:nvSpPr>
           <p:cNvPr id="2" name="Slide Image Placeholder 1"/>
           <p:cNvSpPr>
-            <a:spLocks xmlns:a="http://schemas.openxmlformats.org/drawingml/2006/main" noGrp="1"/>
+            <a:spLocks noGrp="1"/>
           </p:cNvSpPr>
           <p:nvPr>
             <p:ph type="sldImg" idx="0"/>
@@ -2393,7 +2203,7 @@
         <p:nvSpPr>
           <p:cNvPr id="3" name="Notes Placeholder 2"/>
           <p:cNvSpPr>
-            <a:spLocks xmlns:a="http://schemas.openxmlformats.org/drawingml/2006/main" noGrp="1"/>
+            <a:spLocks noGrp="1"/>
           </p:cNvSpPr>
           <p:nvPr>
             <p:ph type="body" idx="1"/>
@@ -2401,116 +2211,101 @@
         </p:nvSpPr>
         <p:spPr/>
         <p:txBody>
-          <a:bodyPr xmlns:a="http://schemas.openxmlformats.org/drawingml/2006/main"/>
-          <a:lstStyle xmlns:a="http://schemas.openxmlformats.org/drawingml/2006/main"/>
-          <a:p xmlns:a="http://schemas.openxmlformats.org/drawingml/2006/main">
-            <a:r>
-              <a:t>PURPOSE</a:t>
-            </a:r>
-          </a:p>
-          <a:p xmlns:a="http://schemas.openxmlformats.org/drawingml/2006/main">
+          <a:bodyPr/>
+          <a:lstStyle/>
+          <a:p>
             <a:r>
               <a:t>Presentation evidence (35 marks)</a:t>
             </a:r>
           </a:p>
-          <a:p xmlns:a="http://schemas.openxmlformats.org/drawingml/2006/main">
+          <a:p>
+            <a:r>
+              <a:t>CML3112, Week 15, slide 19</a:t>
+            </a:r>
+          </a:p>
+          <a:p>
             <a:r>
               <a:t/>
             </a:r>
           </a:p>
-          <a:p xmlns:a="http://schemas.openxmlformats.org/drawingml/2006/main">
-            <a:r>
-              <a:t>CONNECT</a:t>
-            </a:r>
-          </a:p>
-          <a:p xmlns:a="http://schemas.openxmlformats.org/drawingml/2006/main">
-            <a:r>
-              <a:t>Previous slide: Engineering ML project submission.</a:t>
-            </a:r>
-          </a:p>
-          <a:p xmlns:a="http://schemas.openxmlformats.org/drawingml/2006/main">
+          <a:p>
+            <a:r>
+              <a:t>Explanation to give</a:t>
+            </a:r>
+          </a:p>
+          <a:p>
+            <a:r>
+              <a:t>Speaker notes contain the explanation behind each presentation slide. They should connect the question, method, evidence and limitations so the submitted file remains understandable without a live talk.</a:t>
+            </a:r>
+          </a:p>
+          <a:p>
             <a:r>
               <a:t/>
             </a:r>
           </a:p>
-          <a:p xmlns:a="http://schemas.openxmlformats.org/drawingml/2006/main">
-            <a:r>
-              <a:t>EXPLAIN</a:t>
-            </a:r>
-          </a:p>
-          <a:p xmlns:a="http://schemas.openxmlformats.org/drawingml/2006/main">
+          <a:p>
+            <a:r>
+              <a:t>Worked illustration / lecturer answer</a:t>
+            </a:r>
+          </a:p>
+          <a:p>
+            <a:r>
+              <a:t>For a results chart, notes identify the sample, target unit, metric and interpretation. The written evidence can then be assessed even when the speaker is absent.</a:t>
+            </a:r>
+          </a:p>
+          <a:p>
+            <a:r>
+              <a:t/>
+            </a:r>
+          </a:p>
+          <a:p>
+            <a:r>
+              <a:t>Misconception to address</a:t>
+            </a:r>
+          </a:p>
+          <a:p>
+            <a:r>
+              <a:t>The local text-based grader does not assess visual polish or spoken delivery. Make required reasoning accessible as actual text rather than only screenshots.</a:t>
+            </a:r>
+          </a:p>
+          <a:p>
+            <a:r>
+              <a:t/>
+            </a:r>
+          </a:p>
+          <a:p>
+            <a:r>
+              <a:t>On this slide</a:t>
+            </a:r>
+          </a:p>
+          <a:p>
             <a:r>
               <a:t>Slides and narration notes explain the question, method, evidence and limitations for an engineering audience.</a:t>
             </a:r>
           </a:p>
-          <a:p xmlns:a="http://schemas.openxmlformats.org/drawingml/2006/main">
+          <a:p>
             <a:r>
               <a:t/>
             </a:r>
           </a:p>
-          <a:p xmlns:a="http://schemas.openxmlformats.org/drawingml/2006/main">
+          <a:p>
             <a:r>
               <a:t>The local text grader does not assess visual styling or spoken delivery.</a:t>
             </a:r>
           </a:p>
-          <a:p xmlns:a="http://schemas.openxmlformats.org/drawingml/2006/main">
+          <a:p>
             <a:r>
               <a:t/>
             </a:r>
           </a:p>
-          <a:p xmlns:a="http://schemas.openxmlformats.org/drawingml/2006/main">
-            <a:r>
-              <a:t>LECTURER CUE</a:t>
-            </a:r>
-          </a:p>
-          <a:p xmlns:a="http://schemas.openxmlformats.org/drawingml/2006/main">
-            <a:r>
-              <a:t>Published DEMO criterion. Check the assessment grading-release status before issuing. Live questioning is formative. Source: /Users/jothamwambi/Projects/IUEA-Teaching-Resources/IUEA_Teaching_Plan/grader/rubrics/DEMO.json</a:t>
-            </a:r>
-          </a:p>
-          <a:p xmlns:a="http://schemas.openxmlformats.org/drawingml/2006/main">
-            <a:r>
-              <a:t/>
-            </a:r>
-          </a:p>
-          <a:p xmlns:a="http://schemas.openxmlformats.org/drawingml/2006/main">
-            <a:r>
-              <a:t>TEACHING MODE</a:t>
-            </a:r>
-          </a:p>
-          <a:p xmlns:a="http://schemas.openxmlformats.org/drawingml/2006/main">
-            <a:r>
-              <a:t>Demonstrate first. Read each new symbol aloud, trace the values and compare the shown output. Learners repeat worked examples individually after class.</a:t>
-            </a:r>
-          </a:p>
-          <a:p xmlns:a="http://schemas.openxmlformats.org/drawingml/2006/main">
-            <a:r>
-              <a:t/>
-            </a:r>
-          </a:p>
-          <a:p xmlns:a="http://schemas.openxmlformats.org/drawingml/2006/main">
-            <a:r>
-              <a:t>NEXT</a:t>
-            </a:r>
-          </a:p>
-          <a:p xmlns:a="http://schemas.openxmlformats.org/drawingml/2006/main">
-            <a:r>
-              <a:t>Individual written defence (40 marks).</a:t>
-            </a:r>
-          </a:p>
-          <a:p xmlns:a="http://schemas.openxmlformats.org/drawingml/2006/main">
-            <a:r>
-              <a:t/>
-            </a:r>
-          </a:p>
-          <a:p xmlns:a="http://schemas.openxmlformats.org/drawingml/2006/main">
-            <a:r>
-              <a:t>REFERENCES</a:t>
-            </a:r>
-          </a:p>
-          <a:p xmlns:a="http://schemas.openxmlformats.org/drawingml/2006/main">
-            <a:r>
-              <a:t/>
+          <a:p>
+            <a:r>
+              <a:t>Continue to</a:t>
+            </a:r>
+          </a:p>
+          <a:p>
+            <a:r>
+              <a:t>Individual written defence (40 marks)</a:t>
             </a:r>
           </a:p>
         </p:txBody>
@@ -2519,7 +2314,7 @@
         <p:nvSpPr>
           <p:cNvPr id="4" name="Slide Number Placeholder 3"/>
           <p:cNvSpPr>
-            <a:spLocks xmlns:a="http://schemas.openxmlformats.org/drawingml/2006/main" noGrp="1"/>
+            <a:spLocks noGrp="1"/>
           </p:cNvSpPr>
           <p:nvPr>
             <p:ph type="sldNum" idx="5"/>
@@ -2527,21 +2322,21 @@
         </p:nvSpPr>
         <p:spPr/>
         <p:txBody>
-          <a:bodyPr xmlns:a="http://schemas.openxmlformats.org/drawingml/2006/main"/>
-          <a:lstStyle xmlns:a="http://schemas.openxmlformats.org/drawingml/2006/main"/>
-          <a:p xmlns:a="http://schemas.openxmlformats.org/drawingml/2006/main"/>
+          <a:bodyPr/>
+          <a:lstStyle/>
+          <a:p/>
         </p:txBody>
       </p:sp>
     </p:spTree>
   </p:cSld>
   <p:clrMapOvr>
-    <a:masterClrMapping xmlns:a="http://schemas.openxmlformats.org/drawingml/2006/main"/>
+    <a:masterClrMapping/>
   </p:clrMapOvr>
 </p:notes>
 </file>
 
 <file path=ppt/notesSlides/notesSlide2.xml><?xml version="1.0" encoding="utf-8"?>
-<p:notes xmlns:p="http://schemas.openxmlformats.org/presentationml/2006/main">
+<p:notes xmlns:a="http://schemas.openxmlformats.org/drawingml/2006/main" xmlns:p="http://schemas.openxmlformats.org/presentationml/2006/main">
   <p:cSld>
     <p:spTree>
       <p:nvGrpSpPr>
@@ -2550,13 +2345,13 @@
         <p:nvPr/>
       </p:nvGrpSpPr>
       <p:grpSpPr>
-        <a:xfrm xmlns:a="http://schemas.openxmlformats.org/drawingml/2006/main"/>
+        <a:xfrm/>
       </p:grpSpPr>
       <p:sp>
         <p:nvSpPr>
           <p:cNvPr id="2" name="Slide Image Placeholder 1"/>
           <p:cNvSpPr>
-            <a:spLocks xmlns:a="http://schemas.openxmlformats.org/drawingml/2006/main" noGrp="1"/>
+            <a:spLocks noGrp="1"/>
           </p:cNvSpPr>
           <p:nvPr>
             <p:ph type="sldImg" idx="0"/>
@@ -2568,7 +2363,7 @@
         <p:nvSpPr>
           <p:cNvPr id="3" name="Notes Placeholder 2"/>
           <p:cNvSpPr>
-            <a:spLocks xmlns:a="http://schemas.openxmlformats.org/drawingml/2006/main" noGrp="1"/>
+            <a:spLocks noGrp="1"/>
           </p:cNvSpPr>
           <p:nvPr>
             <p:ph type="body" idx="1"/>
@@ -2576,116 +2371,101 @@
         </p:nvSpPr>
         <p:spPr/>
         <p:txBody>
-          <a:bodyPr xmlns:a="http://schemas.openxmlformats.org/drawingml/2006/main"/>
-          <a:lstStyle xmlns:a="http://schemas.openxmlformats.org/drawingml/2006/main"/>
-          <a:p xmlns:a="http://schemas.openxmlformats.org/drawingml/2006/main">
-            <a:r>
-              <a:t>PURPOSE</a:t>
-            </a:r>
-          </a:p>
-          <a:p xmlns:a="http://schemas.openxmlformats.org/drawingml/2006/main">
+          <a:bodyPr/>
+          <a:lstStyle/>
+          <a:p>
             <a:r>
               <a:t>Today’s learning</a:t>
             </a:r>
           </a:p>
-          <a:p xmlns:a="http://schemas.openxmlformats.org/drawingml/2006/main">
+          <a:p>
+            <a:r>
+              <a:t>CML3112, Week 15, slide 2</a:t>
+            </a:r>
+          </a:p>
+          <a:p>
             <a:r>
               <a:t/>
             </a:r>
           </a:p>
-          <a:p xmlns:a="http://schemas.openxmlformats.org/drawingml/2006/main">
-            <a:r>
-              <a:t>CONNECT</a:t>
-            </a:r>
-          </a:p>
-          <a:p xmlns:a="http://schemas.openxmlformats.org/drawingml/2006/main">
-            <a:r>
-              <a:t>Previous slide: Presenting the project and individual contribution.</a:t>
-            </a:r>
-          </a:p>
-          <a:p xmlns:a="http://schemas.openxmlformats.org/drawingml/2006/main">
+          <a:p>
+            <a:r>
+              <a:t>Explanation to give</a:t>
+            </a:r>
+          </a:p>
+          <a:p>
+            <a:r>
+              <a:t>Explain a supported finding, its limitation and the individual work behind it. The team project and each learner’s defence are distinct evidence.</a:t>
+            </a:r>
+          </a:p>
+          <a:p>
             <a:r>
               <a:t/>
             </a:r>
           </a:p>
-          <a:p xmlns:a="http://schemas.openxmlformats.org/drawingml/2006/main">
-            <a:r>
-              <a:t>EXPLAIN</a:t>
-            </a:r>
-          </a:p>
-          <a:p xmlns:a="http://schemas.openxmlformats.org/drawingml/2006/main">
+          <a:p>
+            <a:r>
+              <a:t>Worked illustration / lecturer answer</a:t>
+            </a:r>
+          </a:p>
+          <a:p>
+            <a:r>
+              <a:t>A claim should point to a named plot or result, its target unit, the evaluated sample and the decision it supports. “Our model is good” supplies none of these.</a:t>
+            </a:r>
+          </a:p>
+          <a:p>
+            <a:r>
+              <a:t/>
+            </a:r>
+          </a:p>
+          <a:p>
+            <a:r>
+              <a:t>Misconception to address</a:t>
+            </a:r>
+          </a:p>
+          <a:p>
+            <a:r>
+              <a:t>At the end, check the specific outcome shown here using a small previously demonstrated example. A completed file without an explanation is not evidence of understanding.</a:t>
+            </a:r>
+          </a:p>
+          <a:p>
+            <a:r>
+              <a:t/>
+            </a:r>
+          </a:p>
+          <a:p>
+            <a:r>
+              <a:t>On this slide</a:t>
+            </a:r>
+          </a:p>
+          <a:p>
             <a:r>
               <a:t>Explain your question and one supported finding.</a:t>
             </a:r>
           </a:p>
-          <a:p xmlns:a="http://schemas.openxmlformats.org/drawingml/2006/main">
+          <a:p>
             <a:r>
               <a:t/>
             </a:r>
           </a:p>
-          <a:p xmlns:a="http://schemas.openxmlformats.org/drawingml/2006/main">
+          <a:p>
             <a:r>
               <a:t>State a limitation and your individual contribution.</a:t>
             </a:r>
           </a:p>
-          <a:p xmlns:a="http://schemas.openxmlformats.org/drawingml/2006/main">
+          <a:p>
             <a:r>
               <a:t/>
             </a:r>
           </a:p>
-          <a:p xmlns:a="http://schemas.openxmlformats.org/drawingml/2006/main">
-            <a:r>
-              <a:t>LECTURER CUE</a:t>
-            </a:r>
-          </a:p>
-          <a:p xmlns:a="http://schemas.openxmlformats.org/drawingml/2006/main">
-            <a:r>
-              <a:t>Ask learners to explain this goal in ordinary language. The first successful attempt matters more than covering optional extensions. Defer: New models and a last-minute redesign are unnecessary. Fix broken run instructions first.</a:t>
-            </a:r>
-          </a:p>
-          <a:p xmlns:a="http://schemas.openxmlformats.org/drawingml/2006/main">
-            <a:r>
-              <a:t/>
-            </a:r>
-          </a:p>
-          <a:p xmlns:a="http://schemas.openxmlformats.org/drawingml/2006/main">
-            <a:r>
-              <a:t>TEACHING MODE</a:t>
-            </a:r>
-          </a:p>
-          <a:p xmlns:a="http://schemas.openxmlformats.org/drawingml/2006/main">
-            <a:r>
-              <a:t>Demonstrate first. Read each new symbol aloud, trace the values and compare the shown output. Learners repeat worked examples individually after class.</a:t>
-            </a:r>
-          </a:p>
-          <a:p xmlns:a="http://schemas.openxmlformats.org/drawingml/2006/main">
-            <a:r>
-              <a:t/>
-            </a:r>
-          </a:p>
-          <a:p xmlns:a="http://schemas.openxmlformats.org/drawingml/2006/main">
-            <a:r>
-              <a:t>NEXT</a:t>
-            </a:r>
-          </a:p>
-          <a:p xmlns:a="http://schemas.openxmlformats.org/drawingml/2006/main">
-            <a:r>
-              <a:t>Connection to the previous lesson.</a:t>
-            </a:r>
-          </a:p>
-          <a:p xmlns:a="http://schemas.openxmlformats.org/drawingml/2006/main">
-            <a:r>
-              <a:t/>
-            </a:r>
-          </a:p>
-          <a:p xmlns:a="http://schemas.openxmlformats.org/drawingml/2006/main">
-            <a:r>
-              <a:t>REFERENCES</a:t>
-            </a:r>
-          </a:p>
-          <a:p xmlns:a="http://schemas.openxmlformats.org/drawingml/2006/main">
-            <a:r>
-              <a:t/>
+          <a:p>
+            <a:r>
+              <a:t>Continue to</a:t>
+            </a:r>
+          </a:p>
+          <a:p>
+            <a:r>
+              <a:t>Connection to the previous lesson</a:t>
             </a:r>
           </a:p>
         </p:txBody>
@@ -2694,7 +2474,7 @@
         <p:nvSpPr>
           <p:cNvPr id="4" name="Slide Number Placeholder 3"/>
           <p:cNvSpPr>
-            <a:spLocks xmlns:a="http://schemas.openxmlformats.org/drawingml/2006/main" noGrp="1"/>
+            <a:spLocks noGrp="1"/>
           </p:cNvSpPr>
           <p:nvPr>
             <p:ph type="sldNum" idx="5"/>
@@ -2702,21 +2482,21 @@
         </p:nvSpPr>
         <p:spPr/>
         <p:txBody>
-          <a:bodyPr xmlns:a="http://schemas.openxmlformats.org/drawingml/2006/main"/>
-          <a:lstStyle xmlns:a="http://schemas.openxmlformats.org/drawingml/2006/main"/>
-          <a:p xmlns:a="http://schemas.openxmlformats.org/drawingml/2006/main"/>
+          <a:bodyPr/>
+          <a:lstStyle/>
+          <a:p/>
         </p:txBody>
       </p:sp>
     </p:spTree>
   </p:cSld>
   <p:clrMapOvr>
-    <a:masterClrMapping xmlns:a="http://schemas.openxmlformats.org/drawingml/2006/main"/>
+    <a:masterClrMapping/>
   </p:clrMapOvr>
 </p:notes>
 </file>
 
 <file path=ppt/notesSlides/notesSlide20.xml><?xml version="1.0" encoding="utf-8"?>
-<p:notes xmlns:p="http://schemas.openxmlformats.org/presentationml/2006/main">
+<p:notes xmlns:a="http://schemas.openxmlformats.org/drawingml/2006/main" xmlns:p="http://schemas.openxmlformats.org/presentationml/2006/main">
   <p:cSld>
     <p:spTree>
       <p:nvGrpSpPr>
@@ -2725,13 +2505,13 @@
         <p:nvPr/>
       </p:nvGrpSpPr>
       <p:grpSpPr>
-        <a:xfrm xmlns:a="http://schemas.openxmlformats.org/drawingml/2006/main"/>
+        <a:xfrm/>
       </p:grpSpPr>
       <p:sp>
         <p:nvSpPr>
           <p:cNvPr id="2" name="Slide Image Placeholder 1"/>
           <p:cNvSpPr>
-            <a:spLocks xmlns:a="http://schemas.openxmlformats.org/drawingml/2006/main" noGrp="1"/>
+            <a:spLocks noGrp="1"/>
           </p:cNvSpPr>
           <p:nvPr>
             <p:ph type="sldImg" idx="0"/>
@@ -2743,7 +2523,7 @@
         <p:nvSpPr>
           <p:cNvPr id="3" name="Notes Placeholder 2"/>
           <p:cNvSpPr>
-            <a:spLocks xmlns:a="http://schemas.openxmlformats.org/drawingml/2006/main" noGrp="1"/>
+            <a:spLocks noGrp="1"/>
           </p:cNvSpPr>
           <p:nvPr>
             <p:ph type="body" idx="1"/>
@@ -2751,116 +2531,101 @@
         </p:nvSpPr>
         <p:spPr/>
         <p:txBody>
-          <a:bodyPr xmlns:a="http://schemas.openxmlformats.org/drawingml/2006/main"/>
-          <a:lstStyle xmlns:a="http://schemas.openxmlformats.org/drawingml/2006/main"/>
-          <a:p xmlns:a="http://schemas.openxmlformats.org/drawingml/2006/main">
-            <a:r>
-              <a:t>PURPOSE</a:t>
-            </a:r>
-          </a:p>
-          <a:p xmlns:a="http://schemas.openxmlformats.org/drawingml/2006/main">
+          <a:bodyPr/>
+          <a:lstStyle/>
+          <a:p>
             <a:r>
               <a:t>Individual written defence (40 marks)</a:t>
             </a:r>
           </a:p>
-          <a:p xmlns:a="http://schemas.openxmlformats.org/drawingml/2006/main">
+          <a:p>
+            <a:r>
+              <a:t>CML3112, Week 15, slide 20</a:t>
+            </a:r>
+          </a:p>
+          <a:p>
             <a:r>
               <a:t/>
             </a:r>
           </a:p>
-          <a:p xmlns:a="http://schemas.openxmlformats.org/drawingml/2006/main">
-            <a:r>
-              <a:t>CONNECT</a:t>
-            </a:r>
-          </a:p>
-          <a:p xmlns:a="http://schemas.openxmlformats.org/drawingml/2006/main">
-            <a:r>
-              <a:t>Previous slide: Presentation evidence (35 marks).</a:t>
-            </a:r>
-          </a:p>
-          <a:p xmlns:a="http://schemas.openxmlformats.org/drawingml/2006/main">
+          <a:p>
+            <a:r>
+              <a:t>Explanation to give</a:t>
+            </a:r>
+          </a:p>
+          <a:p>
+            <a:r>
+              <a:t>A defence explains the reasoning behind a decision the learner actually made. Ask for a named cell, result or chart so the explanation can be checked against the project.</a:t>
+            </a:r>
+          </a:p>
+          <a:p>
             <a:r>
               <a:t/>
             </a:r>
           </a:p>
-          <a:p xmlns:a="http://schemas.openxmlformats.org/drawingml/2006/main">
-            <a:r>
-              <a:t>EXPLAIN</a:t>
-            </a:r>
-          </a:p>
-          <a:p xmlns:a="http://schemas.openxmlformats.org/drawingml/2006/main">
+          <a:p>
+            <a:r>
+              <a:t>Worked illustration / lecturer answer</a:t>
+            </a:r>
+          </a:p>
+          <a:p>
+            <a:r>
+              <a:t>“I used a group split because the same equipment appears repeatedly; this cell lists disjoint equipment IDs” links a choice, reason and evidence.</a:t>
+            </a:r>
+          </a:p>
+          <a:p>
+            <a:r>
+              <a:t/>
+            </a:r>
+          </a:p>
+          <a:p>
+            <a:r>
+              <a:t>Misconception to address</a:t>
+            </a:r>
+          </a:p>
+          <a:p>
+            <a:r>
+              <a:t>A general definition of group splitting is not evidence that this project used it. Each student's explanation must match their own contribution.</a:t>
+            </a:r>
+          </a:p>
+          <a:p>
+            <a:r>
+              <a:t/>
+            </a:r>
+          </a:p>
+          <a:p>
+            <a:r>
+              <a:t>On this slide</a:t>
+            </a:r>
+          </a:p>
+          <a:p>
             <a:r>
               <a:t>Two typed answers about the student's own repository identify specific cells/results and explain the decisions.</a:t>
             </a:r>
           </a:p>
-          <a:p xmlns:a="http://schemas.openxmlformats.org/drawingml/2006/main">
+          <a:p>
             <a:r>
               <a:t/>
             </a:r>
           </a:p>
-          <a:p xmlns:a="http://schemas.openxmlformats.org/drawingml/2006/main">
+          <a:p>
             <a:r>
               <a:t>Credit is based on the submitted evidence; live questioning is formative.</a:t>
             </a:r>
           </a:p>
-          <a:p xmlns:a="http://schemas.openxmlformats.org/drawingml/2006/main">
+          <a:p>
             <a:r>
               <a:t/>
             </a:r>
           </a:p>
-          <a:p xmlns:a="http://schemas.openxmlformats.org/drawingml/2006/main">
-            <a:r>
-              <a:t>LECTURER CUE</a:t>
-            </a:r>
-          </a:p>
-          <a:p xmlns:a="http://schemas.openxmlformats.org/drawingml/2006/main">
-            <a:r>
-              <a:t>Published DEMO criterion. Check the assessment grading-release status before issuing. Live questioning is formative. Source: /Users/jothamwambi/Projects/IUEA-Teaching-Resources/IUEA_Teaching_Plan/grader/rubrics/DEMO.json</a:t>
-            </a:r>
-          </a:p>
-          <a:p xmlns:a="http://schemas.openxmlformats.org/drawingml/2006/main">
-            <a:r>
-              <a:t/>
-            </a:r>
-          </a:p>
-          <a:p xmlns:a="http://schemas.openxmlformats.org/drawingml/2006/main">
-            <a:r>
-              <a:t>TEACHING MODE</a:t>
-            </a:r>
-          </a:p>
-          <a:p xmlns:a="http://schemas.openxmlformats.org/drawingml/2006/main">
-            <a:r>
-              <a:t>Demonstrate first. Read each new symbol aloud, trace the values and compare the shown output. Learners repeat worked examples individually after class.</a:t>
-            </a:r>
-          </a:p>
-          <a:p xmlns:a="http://schemas.openxmlformats.org/drawingml/2006/main">
-            <a:r>
-              <a:t/>
-            </a:r>
-          </a:p>
-          <a:p xmlns:a="http://schemas.openxmlformats.org/drawingml/2006/main">
-            <a:r>
-              <a:t>NEXT</a:t>
-            </a:r>
-          </a:p>
-          <a:p xmlns:a="http://schemas.openxmlformats.org/drawingml/2006/main">
-            <a:r>
-              <a:t>Reflection (20 marks).</a:t>
-            </a:r>
-          </a:p>
-          <a:p xmlns:a="http://schemas.openxmlformats.org/drawingml/2006/main">
-            <a:r>
-              <a:t/>
-            </a:r>
-          </a:p>
-          <a:p xmlns:a="http://schemas.openxmlformats.org/drawingml/2006/main">
-            <a:r>
-              <a:t>REFERENCES</a:t>
-            </a:r>
-          </a:p>
-          <a:p xmlns:a="http://schemas.openxmlformats.org/drawingml/2006/main">
-            <a:r>
-              <a:t/>
+          <a:p>
+            <a:r>
+              <a:t>Continue to</a:t>
+            </a:r>
+          </a:p>
+          <a:p>
+            <a:r>
+              <a:t>Reflection (20 marks)</a:t>
             </a:r>
           </a:p>
         </p:txBody>
@@ -2869,7 +2634,7 @@
         <p:nvSpPr>
           <p:cNvPr id="4" name="Slide Number Placeholder 3"/>
           <p:cNvSpPr>
-            <a:spLocks xmlns:a="http://schemas.openxmlformats.org/drawingml/2006/main" noGrp="1"/>
+            <a:spLocks noGrp="1"/>
           </p:cNvSpPr>
           <p:nvPr>
             <p:ph type="sldNum" idx="5"/>
@@ -2877,21 +2642,21 @@
         </p:nvSpPr>
         <p:spPr/>
         <p:txBody>
-          <a:bodyPr xmlns:a="http://schemas.openxmlformats.org/drawingml/2006/main"/>
-          <a:lstStyle xmlns:a="http://schemas.openxmlformats.org/drawingml/2006/main"/>
-          <a:p xmlns:a="http://schemas.openxmlformats.org/drawingml/2006/main"/>
+          <a:bodyPr/>
+          <a:lstStyle/>
+          <a:p/>
         </p:txBody>
       </p:sp>
     </p:spTree>
   </p:cSld>
   <p:clrMapOvr>
-    <a:masterClrMapping xmlns:a="http://schemas.openxmlformats.org/drawingml/2006/main"/>
+    <a:masterClrMapping/>
   </p:clrMapOvr>
 </p:notes>
 </file>
 
 <file path=ppt/notesSlides/notesSlide21.xml><?xml version="1.0" encoding="utf-8"?>
-<p:notes xmlns:p="http://schemas.openxmlformats.org/presentationml/2006/main">
+<p:notes xmlns:a="http://schemas.openxmlformats.org/drawingml/2006/main" xmlns:p="http://schemas.openxmlformats.org/presentationml/2006/main">
   <p:cSld>
     <p:spTree>
       <p:nvGrpSpPr>
@@ -2900,13 +2665,13 @@
         <p:nvPr/>
       </p:nvGrpSpPr>
       <p:grpSpPr>
-        <a:xfrm xmlns:a="http://schemas.openxmlformats.org/drawingml/2006/main"/>
+        <a:xfrm/>
       </p:grpSpPr>
       <p:sp>
         <p:nvSpPr>
           <p:cNvPr id="2" name="Slide Image Placeholder 1"/>
           <p:cNvSpPr>
-            <a:spLocks xmlns:a="http://schemas.openxmlformats.org/drawingml/2006/main" noGrp="1"/>
+            <a:spLocks noGrp="1"/>
           </p:cNvSpPr>
           <p:nvPr>
             <p:ph type="sldImg" idx="0"/>
@@ -2918,7 +2683,7 @@
         <p:nvSpPr>
           <p:cNvPr id="3" name="Notes Placeholder 2"/>
           <p:cNvSpPr>
-            <a:spLocks xmlns:a="http://schemas.openxmlformats.org/drawingml/2006/main" noGrp="1"/>
+            <a:spLocks noGrp="1"/>
           </p:cNvSpPr>
           <p:nvPr>
             <p:ph type="body" idx="1"/>
@@ -2926,126 +2691,111 @@
         </p:nvSpPr>
         <p:spPr/>
         <p:txBody>
-          <a:bodyPr xmlns:a="http://schemas.openxmlformats.org/drawingml/2006/main"/>
-          <a:lstStyle xmlns:a="http://schemas.openxmlformats.org/drawingml/2006/main"/>
-          <a:p xmlns:a="http://schemas.openxmlformats.org/drawingml/2006/main">
-            <a:r>
-              <a:t>PURPOSE</a:t>
-            </a:r>
-          </a:p>
-          <a:p xmlns:a="http://schemas.openxmlformats.org/drawingml/2006/main">
+          <a:bodyPr/>
+          <a:lstStyle/>
+          <a:p>
             <a:r>
               <a:t>Reflection (20 marks)</a:t>
             </a:r>
           </a:p>
-          <a:p xmlns:a="http://schemas.openxmlformats.org/drawingml/2006/main">
+          <a:p>
+            <a:r>
+              <a:t>CML3112, Week 15, slide 21</a:t>
+            </a:r>
+          </a:p>
+          <a:p>
             <a:r>
               <a:t/>
             </a:r>
           </a:p>
-          <a:p xmlns:a="http://schemas.openxmlformats.org/drawingml/2006/main">
-            <a:r>
-              <a:t>CONNECT</a:t>
-            </a:r>
-          </a:p>
-          <a:p xmlns:a="http://schemas.openxmlformats.org/drawingml/2006/main">
-            <a:r>
-              <a:t>Previous slide: Individual written defence (40 marks).</a:t>
-            </a:r>
-          </a:p>
-          <a:p xmlns:a="http://schemas.openxmlformats.org/drawingml/2006/main">
+          <a:p>
+            <a:r>
+              <a:t>Explanation to give</a:t>
+            </a:r>
+          </a:p>
+          <a:p>
+            <a:r>
+              <a:t>Reflection should compare the learner's earlier understanding with what they can now demonstrate, then specify an achievable next step.</a:t>
+            </a:r>
+          </a:p>
+          <a:p>
             <a:r>
               <a:t/>
             </a:r>
           </a:p>
-          <a:p xmlns:a="http://schemas.openxmlformats.org/drawingml/2006/main">
-            <a:r>
-              <a:t>EXPLAIN</a:t>
-            </a:r>
-          </a:p>
-          <a:p xmlns:a="http://schemas.openxmlformats.org/drawingml/2006/main">
+          <a:p>
+            <a:r>
+              <a:t>Worked illustration / lecturer answer</a:t>
+            </a:r>
+          </a:p>
+          <a:p>
+            <a:r>
+              <a:t>A concrete reflection describes an execution-order mistake, how a clean run revealed it, and how the learner now checks notebooks. A goal might be to practise grouped validation on a second dataset.</a:t>
+            </a:r>
+          </a:p>
+          <a:p>
+            <a:r>
+              <a:t/>
+            </a:r>
+          </a:p>
+          <a:p>
+            <a:r>
+              <a:t>Misconception to address</a:t>
+            </a:r>
+          </a:p>
+          <a:p>
+            <a:r>
+              <a:t>“I learned a lot about AI” provides little evidence. Keep the published 500-word requirement and the two Semester 2 goals.</a:t>
+            </a:r>
+          </a:p>
+          <a:p>
+            <a:r>
+              <a:t/>
+            </a:r>
+          </a:p>
+          <a:p>
+            <a:r>
+              <a:t>On this slide</a:t>
+            </a:r>
+          </a:p>
+          <a:p>
             <a:r>
               <a:t>500 words.</a:t>
             </a:r>
           </a:p>
-          <a:p xmlns:a="http://schemas.openxmlformats.org/drawingml/2006/main">
+          <a:p>
             <a:r>
               <a:t/>
             </a:r>
           </a:p>
-          <a:p xmlns:a="http://schemas.openxmlformats.org/drawingml/2006/main">
+          <a:p>
             <a:r>
               <a:t>Specific about what changed since Week 1, what remains difficult, and two concrete Semester 2 goals.</a:t>
             </a:r>
           </a:p>
-          <a:p xmlns:a="http://schemas.openxmlformats.org/drawingml/2006/main">
+          <a:p>
             <a:r>
               <a:t/>
             </a:r>
           </a:p>
-          <a:p xmlns:a="http://schemas.openxmlformats.org/drawingml/2006/main">
+          <a:p>
             <a:r>
               <a:t>Generic reflection scores low.</a:t>
             </a:r>
           </a:p>
-          <a:p xmlns:a="http://schemas.openxmlformats.org/drawingml/2006/main">
+          <a:p>
             <a:r>
               <a:t/>
             </a:r>
           </a:p>
-          <a:p xmlns:a="http://schemas.openxmlformats.org/drawingml/2006/main">
-            <a:r>
-              <a:t>LECTURER CUE</a:t>
-            </a:r>
-          </a:p>
-          <a:p xmlns:a="http://schemas.openxmlformats.org/drawingml/2006/main">
-            <a:r>
-              <a:t>Published DEMO criterion. Check the assessment grading-release status before issuing. Live questioning is formative. Source: /Users/jothamwambi/Projects/IUEA-Teaching-Resources/IUEA_Teaching_Plan/grader/rubrics/DEMO.json</a:t>
-            </a:r>
-          </a:p>
-          <a:p xmlns:a="http://schemas.openxmlformats.org/drawingml/2006/main">
-            <a:r>
-              <a:t/>
-            </a:r>
-          </a:p>
-          <a:p xmlns:a="http://schemas.openxmlformats.org/drawingml/2006/main">
-            <a:r>
-              <a:t>TEACHING MODE</a:t>
-            </a:r>
-          </a:p>
-          <a:p xmlns:a="http://schemas.openxmlformats.org/drawingml/2006/main">
-            <a:r>
-              <a:t>Demonstrate first. Read each new symbol aloud, trace the values and compare the shown output. Learners repeat worked examples individually after class.</a:t>
-            </a:r>
-          </a:p>
-          <a:p xmlns:a="http://schemas.openxmlformats.org/drawingml/2006/main">
-            <a:r>
-              <a:t/>
-            </a:r>
-          </a:p>
-          <a:p xmlns:a="http://schemas.openxmlformats.org/drawingml/2006/main">
-            <a:r>
-              <a:t>NEXT</a:t>
-            </a:r>
-          </a:p>
-          <a:p xmlns:a="http://schemas.openxmlformats.org/drawingml/2006/main">
-            <a:r>
-              <a:t>AI-use declaration (5 marks).</a:t>
-            </a:r>
-          </a:p>
-          <a:p xmlns:a="http://schemas.openxmlformats.org/drawingml/2006/main">
-            <a:r>
-              <a:t/>
-            </a:r>
-          </a:p>
-          <a:p xmlns:a="http://schemas.openxmlformats.org/drawingml/2006/main">
-            <a:r>
-              <a:t>REFERENCES</a:t>
-            </a:r>
-          </a:p>
-          <a:p xmlns:a="http://schemas.openxmlformats.org/drawingml/2006/main">
-            <a:r>
-              <a:t/>
+          <a:p>
+            <a:r>
+              <a:t>Continue to</a:t>
+            </a:r>
+          </a:p>
+          <a:p>
+            <a:r>
+              <a:t>AI-use declaration (5 marks)</a:t>
             </a:r>
           </a:p>
         </p:txBody>
@@ -3054,7 +2804,7 @@
         <p:nvSpPr>
           <p:cNvPr id="4" name="Slide Number Placeholder 3"/>
           <p:cNvSpPr>
-            <a:spLocks xmlns:a="http://schemas.openxmlformats.org/drawingml/2006/main" noGrp="1"/>
+            <a:spLocks noGrp="1"/>
           </p:cNvSpPr>
           <p:nvPr>
             <p:ph type="sldNum" idx="5"/>
@@ -3062,21 +2812,21 @@
         </p:nvSpPr>
         <p:spPr/>
         <p:txBody>
-          <a:bodyPr xmlns:a="http://schemas.openxmlformats.org/drawingml/2006/main"/>
-          <a:lstStyle xmlns:a="http://schemas.openxmlformats.org/drawingml/2006/main"/>
-          <a:p xmlns:a="http://schemas.openxmlformats.org/drawingml/2006/main"/>
+          <a:bodyPr/>
+          <a:lstStyle/>
+          <a:p/>
         </p:txBody>
       </p:sp>
     </p:spTree>
   </p:cSld>
   <p:clrMapOvr>
-    <a:masterClrMapping xmlns:a="http://schemas.openxmlformats.org/drawingml/2006/main"/>
+    <a:masterClrMapping/>
   </p:clrMapOvr>
 </p:notes>
 </file>
 
 <file path=ppt/notesSlides/notesSlide22.xml><?xml version="1.0" encoding="utf-8"?>
-<p:notes xmlns:p="http://schemas.openxmlformats.org/presentationml/2006/main">
+<p:notes xmlns:a="http://schemas.openxmlformats.org/drawingml/2006/main" xmlns:p="http://schemas.openxmlformats.org/presentationml/2006/main">
   <p:cSld>
     <p:spTree>
       <p:nvGrpSpPr>
@@ -3085,13 +2835,13 @@
         <p:nvPr/>
       </p:nvGrpSpPr>
       <p:grpSpPr>
-        <a:xfrm xmlns:a="http://schemas.openxmlformats.org/drawingml/2006/main"/>
+        <a:xfrm/>
       </p:grpSpPr>
       <p:sp>
         <p:nvSpPr>
           <p:cNvPr id="2" name="Slide Image Placeholder 1"/>
           <p:cNvSpPr>
-            <a:spLocks xmlns:a="http://schemas.openxmlformats.org/drawingml/2006/main" noGrp="1"/>
+            <a:spLocks noGrp="1"/>
           </p:cNvSpPr>
           <p:nvPr>
             <p:ph type="sldImg" idx="0"/>
@@ -3103,7 +2853,7 @@
         <p:nvSpPr>
           <p:cNvPr id="3" name="Notes Placeholder 2"/>
           <p:cNvSpPr>
-            <a:spLocks xmlns:a="http://schemas.openxmlformats.org/drawingml/2006/main" noGrp="1"/>
+            <a:spLocks noGrp="1"/>
           </p:cNvSpPr>
           <p:nvPr>
             <p:ph type="body" idx="1"/>
@@ -3111,106 +2861,91 @@
         </p:nvSpPr>
         <p:spPr/>
         <p:txBody>
-          <a:bodyPr xmlns:a="http://schemas.openxmlformats.org/drawingml/2006/main"/>
-          <a:lstStyle xmlns:a="http://schemas.openxmlformats.org/drawingml/2006/main"/>
-          <a:p xmlns:a="http://schemas.openxmlformats.org/drawingml/2006/main">
-            <a:r>
-              <a:t>PURPOSE</a:t>
-            </a:r>
-          </a:p>
-          <a:p xmlns:a="http://schemas.openxmlformats.org/drawingml/2006/main">
+          <a:bodyPr/>
+          <a:lstStyle/>
+          <a:p>
             <a:r>
               <a:t>AI-use declaration (5 marks)</a:t>
             </a:r>
           </a:p>
-          <a:p xmlns:a="http://schemas.openxmlformats.org/drawingml/2006/main">
+          <a:p>
+            <a:r>
+              <a:t>CML3112, Week 15, slide 22</a:t>
+            </a:r>
+          </a:p>
+          <a:p>
             <a:r>
               <a:t/>
             </a:r>
           </a:p>
-          <a:p xmlns:a="http://schemas.openxmlformats.org/drawingml/2006/main">
-            <a:r>
-              <a:t>CONNECT</a:t>
-            </a:r>
-          </a:p>
-          <a:p xmlns:a="http://schemas.openxmlformats.org/drawingml/2006/main">
-            <a:r>
-              <a:t>Previous slide: Reflection (20 marks).</a:t>
-            </a:r>
-          </a:p>
-          <a:p xmlns:a="http://schemas.openxmlformats.org/drawingml/2006/main">
+          <a:p>
+            <a:r>
+              <a:t>Explanation to give</a:t>
+            </a:r>
+          </a:p>
+          <a:p>
+            <a:r>
+              <a:t>Explain that disclosure records what help was used, where and how the learner checked it. It does not remove responsibility for the submitted work or override an assessment's restrictions.</a:t>
+            </a:r>
+          </a:p>
+          <a:p>
             <a:r>
               <a:t/>
             </a:r>
           </a:p>
-          <a:p xmlns:a="http://schemas.openxmlformats.org/drawingml/2006/main">
-            <a:r>
-              <a:t>EXPLAIN</a:t>
-            </a:r>
-          </a:p>
-          <a:p xmlns:a="http://schemas.openxmlformats.org/drawingml/2006/main">
+          <a:p>
+            <a:r>
+              <a:t>Worked illustration / lecturer answer</a:t>
+            </a:r>
+          </a:p>
+          <a:p>
+            <a:r>
+              <a:t>An informative declaration names the tool, the task for which it helped, the affected file or section and the verification performed. If no AI was used, state that directly.</a:t>
+            </a:r>
+          </a:p>
+          <a:p>
+            <a:r>
+              <a:t/>
+            </a:r>
+          </a:p>
+          <a:p>
+            <a:r>
+              <a:t>Misconception to address</a:t>
+            </a:r>
+          </a:p>
+          <a:p>
+            <a:r>
+              <a:t>Do not imply AI is permitted in an offline test. Follow the policy for the particular assessment, and require the learner to explain their own work.</a:t>
+            </a:r>
+          </a:p>
+          <a:p>
+            <a:r>
+              <a:t/>
+            </a:r>
+          </a:p>
+          <a:p>
+            <a:r>
+              <a:t>On this slide</a:t>
+            </a:r>
+          </a:p>
+          <a:p>
             <a:r>
               <a:t>Present, complete and plausible against the repository history.</a:t>
             </a:r>
           </a:p>
-          <a:p xmlns:a="http://schemas.openxmlformats.org/drawingml/2006/main">
+          <a:p>
             <a:r>
               <a:t/>
             </a:r>
           </a:p>
-          <a:p xmlns:a="http://schemas.openxmlformats.org/drawingml/2006/main">
-            <a:r>
-              <a:t>LECTURER CUE</a:t>
-            </a:r>
-          </a:p>
-          <a:p xmlns:a="http://schemas.openxmlformats.org/drawingml/2006/main">
-            <a:r>
-              <a:t>Published DEMO criterion. Check the assessment grading-release status before issuing. Live questioning is formative. Source: /Users/jothamwambi/Projects/IUEA-Teaching-Resources/IUEA_Teaching_Plan/grader/rubrics/DEMO.json</a:t>
-            </a:r>
-          </a:p>
-          <a:p xmlns:a="http://schemas.openxmlformats.org/drawingml/2006/main">
-            <a:r>
-              <a:t/>
-            </a:r>
-          </a:p>
-          <a:p xmlns:a="http://schemas.openxmlformats.org/drawingml/2006/main">
-            <a:r>
-              <a:t>TEACHING MODE</a:t>
-            </a:r>
-          </a:p>
-          <a:p xmlns:a="http://schemas.openxmlformats.org/drawingml/2006/main">
-            <a:r>
-              <a:t>Demonstrate first. Read each new symbol aloud, trace the values and compare the shown output. Learners repeat worked examples individually after class.</a:t>
-            </a:r>
-          </a:p>
-          <a:p xmlns:a="http://schemas.openxmlformats.org/drawingml/2006/main">
-            <a:r>
-              <a:t/>
-            </a:r>
-          </a:p>
-          <a:p xmlns:a="http://schemas.openxmlformats.org/drawingml/2006/main">
-            <a:r>
-              <a:t>NEXT</a:t>
-            </a:r>
-          </a:p>
-          <a:p xmlns:a="http://schemas.openxmlformats.org/drawingml/2006/main">
-            <a:r>
-              <a:t>Presentation and individual reflection submission.</a:t>
-            </a:r>
-          </a:p>
-          <a:p xmlns:a="http://schemas.openxmlformats.org/drawingml/2006/main">
-            <a:r>
-              <a:t/>
-            </a:r>
-          </a:p>
-          <a:p xmlns:a="http://schemas.openxmlformats.org/drawingml/2006/main">
-            <a:r>
-              <a:t>REFERENCES</a:t>
-            </a:r>
-          </a:p>
-          <a:p xmlns:a="http://schemas.openxmlformats.org/drawingml/2006/main">
-            <a:r>
-              <a:t/>
+          <a:p>
+            <a:r>
+              <a:t>Continue to</a:t>
+            </a:r>
+          </a:p>
+          <a:p>
+            <a:r>
+              <a:t>Presentation and individual reflection submission</a:t>
             </a:r>
           </a:p>
         </p:txBody>
@@ -3219,7 +2954,7 @@
         <p:nvSpPr>
           <p:cNvPr id="4" name="Slide Number Placeholder 3"/>
           <p:cNvSpPr>
-            <a:spLocks xmlns:a="http://schemas.openxmlformats.org/drawingml/2006/main" noGrp="1"/>
+            <a:spLocks noGrp="1"/>
           </p:cNvSpPr>
           <p:nvPr>
             <p:ph type="sldNum" idx="5"/>
@@ -3227,21 +2962,21 @@
         </p:nvSpPr>
         <p:spPr/>
         <p:txBody>
-          <a:bodyPr xmlns:a="http://schemas.openxmlformats.org/drawingml/2006/main"/>
-          <a:lstStyle xmlns:a="http://schemas.openxmlformats.org/drawingml/2006/main"/>
-          <a:p xmlns:a="http://schemas.openxmlformats.org/drawingml/2006/main"/>
+          <a:bodyPr/>
+          <a:lstStyle/>
+          <a:p/>
         </p:txBody>
       </p:sp>
     </p:spTree>
   </p:cSld>
   <p:clrMapOvr>
-    <a:masterClrMapping xmlns:a="http://schemas.openxmlformats.org/drawingml/2006/main"/>
+    <a:masterClrMapping/>
   </p:clrMapOvr>
 </p:notes>
 </file>
 
 <file path=ppt/notesSlides/notesSlide23.xml><?xml version="1.0" encoding="utf-8"?>
-<p:notes xmlns:p="http://schemas.openxmlformats.org/presentationml/2006/main">
+<p:notes xmlns:a="http://schemas.openxmlformats.org/drawingml/2006/main" xmlns:p="http://schemas.openxmlformats.org/presentationml/2006/main">
   <p:cSld>
     <p:spTree>
       <p:nvGrpSpPr>
@@ -3250,13 +2985,13 @@
         <p:nvPr/>
       </p:nvGrpSpPr>
       <p:grpSpPr>
-        <a:xfrm xmlns:a="http://schemas.openxmlformats.org/drawingml/2006/main"/>
+        <a:xfrm/>
       </p:grpSpPr>
       <p:sp>
         <p:nvSpPr>
           <p:cNvPr id="2" name="Slide Image Placeholder 1"/>
           <p:cNvSpPr>
-            <a:spLocks xmlns:a="http://schemas.openxmlformats.org/drawingml/2006/main" noGrp="1"/>
+            <a:spLocks noGrp="1"/>
           </p:cNvSpPr>
           <p:nvPr>
             <p:ph type="sldImg" idx="0"/>
@@ -3268,7 +3003,7 @@
         <p:nvSpPr>
           <p:cNvPr id="3" name="Notes Placeholder 2"/>
           <p:cNvSpPr>
-            <a:spLocks xmlns:a="http://schemas.openxmlformats.org/drawingml/2006/main" noGrp="1"/>
+            <a:spLocks noGrp="1"/>
           </p:cNvSpPr>
           <p:nvPr>
             <p:ph type="body" idx="1"/>
@@ -3276,136 +3011,121 @@
         </p:nvSpPr>
         <p:spPr/>
         <p:txBody>
-          <a:bodyPr xmlns:a="http://schemas.openxmlformats.org/drawingml/2006/main"/>
-          <a:lstStyle xmlns:a="http://schemas.openxmlformats.org/drawingml/2006/main"/>
-          <a:p xmlns:a="http://schemas.openxmlformats.org/drawingml/2006/main">
-            <a:r>
-              <a:t>PURPOSE</a:t>
-            </a:r>
-          </a:p>
-          <a:p xmlns:a="http://schemas.openxmlformats.org/drawingml/2006/main">
+          <a:bodyPr/>
+          <a:lstStyle/>
+          <a:p>
             <a:r>
               <a:t>Presentation and individual reflection submission</a:t>
             </a:r>
           </a:p>
-          <a:p xmlns:a="http://schemas.openxmlformats.org/drawingml/2006/main">
+          <a:p>
+            <a:r>
+              <a:t>CML3112, Week 15, slide 23</a:t>
+            </a:r>
+          </a:p>
+          <a:p>
             <a:r>
               <a:t/>
             </a:r>
           </a:p>
-          <a:p xmlns:a="http://schemas.openxmlformats.org/drawingml/2006/main">
-            <a:r>
-              <a:t>CONNECT</a:t>
-            </a:r>
-          </a:p>
-          <a:p xmlns:a="http://schemas.openxmlformats.org/drawingml/2006/main">
-            <a:r>
-              <a:t>Previous slide: AI-use declaration (5 marks).</a:t>
-            </a:r>
-          </a:p>
-          <a:p xmlns:a="http://schemas.openxmlformats.org/drawingml/2006/main">
+          <a:p>
+            <a:r>
+              <a:t>Explanation to give</a:t>
+            </a:r>
+          </a:p>
+          <a:p>
+            <a:r>
+              <a:t>This slide hands over CML3112 DEMO. Show the exact form title before uploading. The required packet is the presentation with narration notes and the required written defence/reflection document, as listed in the DEMO guide.</a:t>
+            </a:r>
+          </a:p>
+          <a:p>
             <a:r>
               <a:t/>
             </a:r>
           </a:p>
-          <a:p xmlns:a="http://schemas.openxmlformats.org/drawingml/2006/main">
-            <a:r>
-              <a:t>EXPLAIN</a:t>
-            </a:r>
-          </a:p>
-          <a:p xmlns:a="http://schemas.openxmlformats.org/drawingml/2006/main">
+          <a:p>
+            <a:r>
+              <a:t>Worked illustration / lecturer answer</a:t>
+            </a:r>
+          </a:p>
+          <a:p>
+            <a:r>
+              <a:t>The recorded cutoff for this form is 2026-12-15T14:00:00+03:00. Check the live form for later changes. A replacement must contain the complete required file set, not just the changed file.</a:t>
+            </a:r>
+          </a:p>
+          <a:p>
+            <a:r>
+              <a:t/>
+            </a:r>
+          </a:p>
+          <a:p>
+            <a:r>
+              <a:t>Misconception to address</a:t>
+            </a:r>
+          </a:p>
+          <a:p>
+            <a:r>
+              <a:t>Students enter their own Student Registration Number as required freeform text. They wait for filenames to appear, press Submit and keep the confirmation. A file saved in Drive or GitHub is not itself a form submission.</a:t>
+            </a:r>
+          </a:p>
+          <a:p>
+            <a:r>
+              <a:t/>
+            </a:r>
+          </a:p>
+          <a:p>
+            <a:r>
+              <a:t>On this slide</a:t>
+            </a:r>
+          </a:p>
+          <a:p>
             <a:r>
               <a:t>Opens: 24 Nov 2026, 11:00 Kampala</a:t>
             </a:r>
           </a:p>
-          <a:p xmlns:a="http://schemas.openxmlformats.org/drawingml/2006/main">
+          <a:p>
             <a:r>
               <a:t/>
             </a:r>
           </a:p>
-          <a:p xmlns:a="http://schemas.openxmlformats.org/drawingml/2006/main">
+          <a:p>
             <a:r>
               <a:t>Deadline: 15 Dec 2026, 14:00 Kampala</a:t>
             </a:r>
           </a:p>
-          <a:p xmlns:a="http://schemas.openxmlformats.org/drawingml/2006/main">
+          <a:p>
             <a:r>
               <a:t/>
             </a:r>
           </a:p>
-          <a:p xmlns:a="http://schemas.openxmlformats.org/drawingml/2006/main">
+          <a:p>
             <a:r>
               <a:t>Use your full Student Registration Number in the form.</a:t>
             </a:r>
           </a:p>
-          <a:p xmlns:a="http://schemas.openxmlformats.org/drawingml/2006/main">
+          <a:p>
             <a:r>
               <a:t/>
             </a:r>
           </a:p>
-          <a:p xmlns:a="http://schemas.openxmlformats.org/drawingml/2006/main">
+          <a:p>
             <a:r>
               <a:t>Keep the submitted files and confirmation.</a:t>
             </a:r>
           </a:p>
-          <a:p xmlns:a="http://schemas.openxmlformats.org/drawingml/2006/main">
+          <a:p>
             <a:r>
               <a:t/>
             </a:r>
           </a:p>
-          <a:p xmlns:a="http://schemas.openxmlformats.org/drawingml/2006/main">
-            <a:r>
-              <a:t>LECTURER CUE</a:t>
-            </a:r>
-          </a:p>
-          <a:p xmlns:a="http://schemas.openxmlformats.org/drawingml/2006/main">
-            <a:r>
-              <a:t>The form link is cohort-specific. Recheck the live form and release status before class. These scheduled assignment dates are separate from the quiz activation window. The issued brief defines the required files, even if the form accepts additional formats. Source: data/submission_links.json</a:t>
-            </a:r>
-          </a:p>
-          <a:p xmlns:a="http://schemas.openxmlformats.org/drawingml/2006/main">
-            <a:r>
-              <a:t/>
-            </a:r>
-          </a:p>
-          <a:p xmlns:a="http://schemas.openxmlformats.org/drawingml/2006/main">
-            <a:r>
-              <a:t>TEACHING MODE</a:t>
-            </a:r>
-          </a:p>
-          <a:p xmlns:a="http://schemas.openxmlformats.org/drawingml/2006/main">
-            <a:r>
-              <a:t>Demonstrate first. Read each new symbol aloud, trace the values and compare the shown output. Learners repeat worked examples individually after class.</a:t>
-            </a:r>
-          </a:p>
-          <a:p xmlns:a="http://schemas.openxmlformats.org/drawingml/2006/main">
-            <a:r>
-              <a:t/>
-            </a:r>
-          </a:p>
-          <a:p xmlns:a="http://schemas.openxmlformats.org/drawingml/2006/main">
-            <a:r>
-              <a:t>NEXT</a:t>
-            </a:r>
-          </a:p>
-          <a:p xmlns:a="http://schemas.openxmlformats.org/drawingml/2006/main">
-            <a:r>
-              <a:t>Before you leave.</a:t>
-            </a:r>
-          </a:p>
-          <a:p xmlns:a="http://schemas.openxmlformats.org/drawingml/2006/main">
-            <a:r>
-              <a:t/>
-            </a:r>
-          </a:p>
-          <a:p xmlns:a="http://schemas.openxmlformats.org/drawingml/2006/main">
-            <a:r>
-              <a:t>REFERENCES</a:t>
-            </a:r>
-          </a:p>
-          <a:p xmlns:a="http://schemas.openxmlformats.org/drawingml/2006/main">
-            <a:r>
-              <a:t/>
+          <a:p>
+            <a:r>
+              <a:t>Continue to</a:t>
+            </a:r>
+          </a:p>
+          <a:p>
+            <a:r>
+              <a:t>Revision and submission checklist</a:t>
             </a:r>
           </a:p>
         </p:txBody>
@@ -3414,7 +3134,7 @@
         <p:nvSpPr>
           <p:cNvPr id="4" name="Slide Number Placeholder 3"/>
           <p:cNvSpPr>
-            <a:spLocks xmlns:a="http://schemas.openxmlformats.org/drawingml/2006/main" noGrp="1"/>
+            <a:spLocks noGrp="1"/>
           </p:cNvSpPr>
           <p:nvPr>
             <p:ph type="sldNum" idx="5"/>
@@ -3422,21 +3142,21 @@
         </p:nvSpPr>
         <p:spPr/>
         <p:txBody>
-          <a:bodyPr xmlns:a="http://schemas.openxmlformats.org/drawingml/2006/main"/>
-          <a:lstStyle xmlns:a="http://schemas.openxmlformats.org/drawingml/2006/main"/>
-          <a:p xmlns:a="http://schemas.openxmlformats.org/drawingml/2006/main"/>
+          <a:bodyPr/>
+          <a:lstStyle/>
+          <a:p/>
         </p:txBody>
       </p:sp>
     </p:spTree>
   </p:cSld>
   <p:clrMapOvr>
-    <a:masterClrMapping xmlns:a="http://schemas.openxmlformats.org/drawingml/2006/main"/>
+    <a:masterClrMapping/>
   </p:clrMapOvr>
 </p:notes>
 </file>
 
 <file path=ppt/notesSlides/notesSlide24.xml><?xml version="1.0" encoding="utf-8"?>
-<p:notes xmlns:p="http://schemas.openxmlformats.org/presentationml/2006/main">
+<p:notes xmlns:a="http://schemas.openxmlformats.org/drawingml/2006/main" xmlns:p="http://schemas.openxmlformats.org/presentationml/2006/main">
   <p:cSld>
     <p:spTree>
       <p:nvGrpSpPr>
@@ -3445,13 +3165,13 @@
         <p:nvPr/>
       </p:nvGrpSpPr>
       <p:grpSpPr>
-        <a:xfrm xmlns:a="http://schemas.openxmlformats.org/drawingml/2006/main"/>
+        <a:xfrm/>
       </p:grpSpPr>
       <p:sp>
         <p:nvSpPr>
           <p:cNvPr id="2" name="Slide Image Placeholder 1"/>
           <p:cNvSpPr>
-            <a:spLocks xmlns:a="http://schemas.openxmlformats.org/drawingml/2006/main" noGrp="1"/>
+            <a:spLocks noGrp="1"/>
           </p:cNvSpPr>
           <p:nvPr>
             <p:ph type="sldImg" idx="0"/>
@@ -3463,7 +3183,7 @@
         <p:nvSpPr>
           <p:cNvPr id="3" name="Notes Placeholder 2"/>
           <p:cNvSpPr>
-            <a:spLocks xmlns:a="http://schemas.openxmlformats.org/drawingml/2006/main" noGrp="1"/>
+            <a:spLocks noGrp="1"/>
           </p:cNvSpPr>
           <p:nvPr>
             <p:ph type="body" idx="1"/>
@@ -3471,125 +3191,95 @@
         </p:nvSpPr>
         <p:spPr/>
         <p:txBody>
-          <a:bodyPr xmlns:a="http://schemas.openxmlformats.org/drawingml/2006/main"/>
-          <a:lstStyle xmlns:a="http://schemas.openxmlformats.org/drawingml/2006/main"/>
-          <a:p xmlns:a="http://schemas.openxmlformats.org/drawingml/2006/main">
-            <a:r>
-              <a:t>PURPOSE</a:t>
-            </a:r>
-          </a:p>
-          <a:p xmlns:a="http://schemas.openxmlformats.org/drawingml/2006/main">
+          <a:bodyPr/>
+          <a:lstStyle/>
+          <a:p>
             <a:r>
               <a:t>Revision and submission checklist</a:t>
             </a:r>
           </a:p>
-          <a:p xmlns:a="http://schemas.openxmlformats.org/drawingml/2006/main">
+          <a:p>
+            <a:r>
+              <a:t>CML3112, Week 15, slide 24</a:t>
+            </a:r>
+          </a:p>
+          <a:p>
             <a:r>
               <a:t/>
             </a:r>
           </a:p>
-          <a:p xmlns:a="http://schemas.openxmlformats.org/drawingml/2006/main">
-            <a:r>
-              <a:t>CONNECT</a:t>
-            </a:r>
-          </a:p>
-          <a:p xmlns:a="http://schemas.openxmlformats.org/drawingml/2006/main">
-            <a:r>
-              <a:t>Previous slide: Presentation and individual reflection submission.</a:t>
-            </a:r>
-          </a:p>
-          <a:p xmlns:a="http://schemas.openxmlformats.org/drawingml/2006/main">
+          <a:p>
+            <a:r>
+              <a:t>Explanation to give</a:t>
+            </a:r>
+          </a:p>
+          <a:p>
+            <a:r>
+              <a:t>Explain a supported finding, its limitation and the individual work behind it. The team project and each learner’s defence are distinct evidence.</a:t>
+            </a:r>
+          </a:p>
+          <a:p>
             <a:r>
               <a:t/>
             </a:r>
           </a:p>
-          <a:p xmlns:a="http://schemas.openxmlformats.org/drawingml/2006/main">
-            <a:r>
-              <a:t>EXPLAIN</a:t>
-            </a:r>
-          </a:p>
-          <a:p xmlns:a="http://schemas.openxmlformats.org/drawingml/2006/main">
+          <a:p>
+            <a:r>
+              <a:t>Worked illustration / lecturer answer</a:t>
+            </a:r>
+          </a:p>
+          <a:p>
+            <a:r>
+              <a:t>A claim should point to a named plot or result, its target unit, the evaluated sample and the decision it supports. “Our model is good” supplies none of these.</a:t>
+            </a:r>
+          </a:p>
+          <a:p>
+            <a:r>
+              <a:t/>
+            </a:r>
+          </a:p>
+          <a:p>
+            <a:r>
+              <a:t>Misconception to address</a:t>
+            </a:r>
+          </a:p>
+          <a:p>
+            <a:r>
+              <a:t>Close by identifying the actual saved file and its correct submission route. Read the live deadline. For current weekly notebook tasks, students upload their own work, not the practice notebook, ZIP or grading files.</a:t>
+            </a:r>
+          </a:p>
+          <a:p>
+            <a:r>
+              <a:t/>
+            </a:r>
+          </a:p>
+          <a:p>
+            <a:r>
+              <a:t>On this slide</a:t>
+            </a:r>
+          </a:p>
+          <a:p>
             <a:r>
               <a:t>You can point to the evidence behind one decision you personally worked on.</a:t>
             </a:r>
           </a:p>
-          <a:p xmlns:a="http://schemas.openxmlformats.org/drawingml/2006/main">
+          <a:p>
             <a:r>
               <a:t/>
             </a:r>
           </a:p>
-          <a:p xmlns:a="http://schemas.openxmlformats.org/drawingml/2006/main">
+          <a:p>
             <a:r>
               <a:t>Save your work and check the required submission files.</a:t>
             </a:r>
           </a:p>
-          <a:p xmlns:a="http://schemas.openxmlformats.org/drawingml/2006/main">
-            <a:r>
-              <a:t/>
-            </a:r>
-          </a:p>
-          <a:p xmlns:a="http://schemas.openxmlformats.org/drawingml/2006/main">
-            <a:r>
-              <a:t>LECTURER CUE</a:t>
-            </a:r>
-          </a:p>
-          <a:p xmlns:a="http://schemas.openxmlformats.org/drawingml/2006/main">
-            <a:r>
-              <a:t>Ask every learner for an individual response. Record one misconception to revisit at the start of the next class. If a deadline changed, announce the exact Kampala date and update the source registry before rebuilding slides.</a:t>
-            </a:r>
-          </a:p>
-          <a:p xmlns:a="http://schemas.openxmlformats.org/drawingml/2006/main">
-            <a:r>
-              <a:t/>
-            </a:r>
-          </a:p>
-          <a:p xmlns:a="http://schemas.openxmlformats.org/drawingml/2006/main">
-            <a:r>
-              <a:t>TEACHING MODE</a:t>
-            </a:r>
-          </a:p>
-          <a:p xmlns:a="http://schemas.openxmlformats.org/drawingml/2006/main">
-            <a:r>
-              <a:t>Demonstrate first. Read each new symbol aloud, trace the values and compare the shown output. Learners repeat worked examples individually after class.</a:t>
-            </a:r>
-          </a:p>
-          <a:p xmlns:a="http://schemas.openxmlformats.org/drawingml/2006/main">
-            <a:r>
-              <a:t/>
-            </a:r>
-          </a:p>
-          <a:p xmlns:a="http://schemas.openxmlformats.org/drawingml/2006/main">
-            <a:r>
-              <a:t>NEXT</a:t>
-            </a:r>
-          </a:p>
-          <a:p xmlns:a="http://schemas.openxmlformats.org/drawingml/2006/main">
-            <a:r>
-              <a:t>independent revision and the issued task.</a:t>
-            </a:r>
-          </a:p>
-          <a:p xmlns:a="http://schemas.openxmlformats.org/drawingml/2006/main">
-            <a:r>
-              <a:t/>
-            </a:r>
-          </a:p>
-          <a:p xmlns:a="http://schemas.openxmlformats.org/drawingml/2006/main">
-            <a:r>
-              <a:t>REFERENCES</a:t>
-            </a:r>
-          </a:p>
-          <a:p xmlns:a="http://schemas.openxmlformats.org/drawingml/2006/main">
-            <a:r>
-              <a:t/>
-            </a:r>
-          </a:p>
         </p:txBody>
       </p:sp>
       <p:sp>
         <p:nvSpPr>
           <p:cNvPr id="4" name="Slide Number Placeholder 3"/>
           <p:cNvSpPr>
-            <a:spLocks xmlns:a="http://schemas.openxmlformats.org/drawingml/2006/main" noGrp="1"/>
+            <a:spLocks noGrp="1"/>
           </p:cNvSpPr>
           <p:nvPr>
             <p:ph type="sldNum" idx="5"/>
@@ -3597,21 +3287,21 @@
         </p:nvSpPr>
         <p:spPr/>
         <p:txBody>
-          <a:bodyPr xmlns:a="http://schemas.openxmlformats.org/drawingml/2006/main"/>
-          <a:lstStyle xmlns:a="http://schemas.openxmlformats.org/drawingml/2006/main"/>
-          <a:p xmlns:a="http://schemas.openxmlformats.org/drawingml/2006/main"/>
+          <a:bodyPr/>
+          <a:lstStyle/>
+          <a:p/>
         </p:txBody>
       </p:sp>
     </p:spTree>
   </p:cSld>
   <p:clrMapOvr>
-    <a:masterClrMapping xmlns:a="http://schemas.openxmlformats.org/drawingml/2006/main"/>
+    <a:masterClrMapping/>
   </p:clrMapOvr>
 </p:notes>
 </file>
 
 <file path=ppt/notesSlides/notesSlide3.xml><?xml version="1.0" encoding="utf-8"?>
-<p:notes xmlns:p="http://schemas.openxmlformats.org/presentationml/2006/main">
+<p:notes xmlns:a="http://schemas.openxmlformats.org/drawingml/2006/main" xmlns:p="http://schemas.openxmlformats.org/presentationml/2006/main">
   <p:cSld>
     <p:spTree>
       <p:nvGrpSpPr>
@@ -3620,13 +3310,13 @@
         <p:nvPr/>
       </p:nvGrpSpPr>
       <p:grpSpPr>
-        <a:xfrm xmlns:a="http://schemas.openxmlformats.org/drawingml/2006/main"/>
+        <a:xfrm/>
       </p:grpSpPr>
       <p:sp>
         <p:nvSpPr>
           <p:cNvPr id="2" name="Slide Image Placeholder 1"/>
           <p:cNvSpPr>
-            <a:spLocks xmlns:a="http://schemas.openxmlformats.org/drawingml/2006/main" noGrp="1"/>
+            <a:spLocks noGrp="1"/>
           </p:cNvSpPr>
           <p:nvPr>
             <p:ph type="sldImg" idx="0"/>
@@ -3638,7 +3328,7 @@
         <p:nvSpPr>
           <p:cNvPr id="3" name="Notes Placeholder 2"/>
           <p:cNvSpPr>
-            <a:spLocks xmlns:a="http://schemas.openxmlformats.org/drawingml/2006/main" noGrp="1"/>
+            <a:spLocks noGrp="1"/>
           </p:cNvSpPr>
           <p:nvPr>
             <p:ph type="body" idx="1"/>
@@ -3646,106 +3336,91 @@
         </p:nvSpPr>
         <p:spPr/>
         <p:txBody>
-          <a:bodyPr xmlns:a="http://schemas.openxmlformats.org/drawingml/2006/main"/>
-          <a:lstStyle xmlns:a="http://schemas.openxmlformats.org/drawingml/2006/main"/>
-          <a:p xmlns:a="http://schemas.openxmlformats.org/drawingml/2006/main">
-            <a:r>
-              <a:t>PURPOSE</a:t>
-            </a:r>
-          </a:p>
-          <a:p xmlns:a="http://schemas.openxmlformats.org/drawingml/2006/main">
+          <a:bodyPr/>
+          <a:lstStyle/>
+          <a:p>
             <a:r>
               <a:t>Connection to the previous lesson</a:t>
             </a:r>
           </a:p>
-          <a:p xmlns:a="http://schemas.openxmlformats.org/drawingml/2006/main">
+          <a:p>
+            <a:r>
+              <a:t>CML3112, Week 15, slide 3</a:t>
+            </a:r>
+          </a:p>
+          <a:p>
             <a:r>
               <a:t/>
             </a:r>
           </a:p>
-          <a:p xmlns:a="http://schemas.openxmlformats.org/drawingml/2006/main">
-            <a:r>
-              <a:t>CONNECT</a:t>
-            </a:r>
-          </a:p>
-          <a:p xmlns:a="http://schemas.openxmlformats.org/drawingml/2006/main">
-            <a:r>
-              <a:t>Previous slide: Today’s learning.</a:t>
-            </a:r>
-          </a:p>
-          <a:p xmlns:a="http://schemas.openxmlformats.org/drawingml/2006/main">
+          <a:p>
+            <a:r>
+              <a:t>Explanation to give</a:t>
+            </a:r>
+          </a:p>
+          <a:p>
+            <a:r>
+              <a:t>Explain a supported finding, its limitation and the individual work behind it. The team project and each learner’s defence are distinct evidence.</a:t>
+            </a:r>
+          </a:p>
+          <a:p>
             <a:r>
               <a:t/>
             </a:r>
           </a:p>
-          <a:p xmlns:a="http://schemas.openxmlformats.org/drawingml/2006/main">
-            <a:r>
-              <a:t>EXPLAIN</a:t>
-            </a:r>
-          </a:p>
-          <a:p xmlns:a="http://schemas.openxmlformats.org/drawingml/2006/main">
+          <a:p>
+            <a:r>
+              <a:t>Worked illustration / lecturer answer</a:t>
+            </a:r>
+          </a:p>
+          <a:p>
+            <a:r>
+              <a:t>A claim should point to a named plot or result, its target unit, the evaluated sample and the decision it supports. “Our model is good” supplies none of these.</a:t>
+            </a:r>
+          </a:p>
+          <a:p>
+            <a:r>
+              <a:t/>
+            </a:r>
+          </a:p>
+          <a:p>
+            <a:r>
+              <a:t>Misconception to address</a:t>
+            </a:r>
+          </a:p>
+          <a:p>
+            <a:r>
+              <a:t>Connect this to the previous result named on this slide. Demonstrate the first step again if necessary; there is no requirement for partner work before the explanation.</a:t>
+            </a:r>
+          </a:p>
+          <a:p>
+            <a:r>
+              <a:t/>
+            </a:r>
+          </a:p>
+          <a:p>
+            <a:r>
+              <a:t>On this slide</a:t>
+            </a:r>
+          </a:p>
+          <a:p>
             <a:r>
               <a:t>What question did your team investigate, and what result can you support with evidence?</a:t>
             </a:r>
           </a:p>
-          <a:p xmlns:a="http://schemas.openxmlformats.org/drawingml/2006/main">
+          <a:p>
             <a:r>
               <a:t/>
             </a:r>
           </a:p>
-          <a:p xmlns:a="http://schemas.openxmlformats.org/drawingml/2006/main">
-            <a:r>
-              <a:t>LECTURER CUE</a:t>
-            </a:r>
-          </a:p>
-          <a:p xmlns:a="http://schemas.openxmlformats.org/drawingml/2006/main">
-            <a:r>
-              <a:t>Explain the definitions before running or tracing the example. Point to the line or table row that produces each result.</a:t>
-            </a:r>
-          </a:p>
-          <a:p xmlns:a="http://schemas.openxmlformats.org/drawingml/2006/main">
-            <a:r>
-              <a:t/>
-            </a:r>
-          </a:p>
-          <a:p xmlns:a="http://schemas.openxmlformats.org/drawingml/2006/main">
-            <a:r>
-              <a:t>TEACHING MODE</a:t>
-            </a:r>
-          </a:p>
-          <a:p xmlns:a="http://schemas.openxmlformats.org/drawingml/2006/main">
-            <a:r>
-              <a:t>Demonstrate first. Read each new symbol aloud, trace the values and compare the shown output. Learners repeat worked examples individually after class.</a:t>
-            </a:r>
-          </a:p>
-          <a:p xmlns:a="http://schemas.openxmlformats.org/drawingml/2006/main">
-            <a:r>
-              <a:t/>
-            </a:r>
-          </a:p>
-          <a:p xmlns:a="http://schemas.openxmlformats.org/drawingml/2006/main">
-            <a:r>
-              <a:t>NEXT</a:t>
-            </a:r>
-          </a:p>
-          <a:p xmlns:a="http://schemas.openxmlformats.org/drawingml/2006/main">
-            <a:r>
-              <a:t>A presentation connects a claim to evidence.</a:t>
-            </a:r>
-          </a:p>
-          <a:p xmlns:a="http://schemas.openxmlformats.org/drawingml/2006/main">
-            <a:r>
-              <a:t/>
-            </a:r>
-          </a:p>
-          <a:p xmlns:a="http://schemas.openxmlformats.org/drawingml/2006/main">
-            <a:r>
-              <a:t>REFERENCES</a:t>
-            </a:r>
-          </a:p>
-          <a:p xmlns:a="http://schemas.openxmlformats.org/drawingml/2006/main">
-            <a:r>
-              <a:t/>
+          <a:p>
+            <a:r>
+              <a:t>Continue to</a:t>
+            </a:r>
+          </a:p>
+          <a:p>
+            <a:r>
+              <a:t>A presentation connects a claim to evidence</a:t>
             </a:r>
           </a:p>
         </p:txBody>
@@ -3754,7 +3429,7 @@
         <p:nvSpPr>
           <p:cNvPr id="4" name="Slide Number Placeholder 3"/>
           <p:cNvSpPr>
-            <a:spLocks xmlns:a="http://schemas.openxmlformats.org/drawingml/2006/main" noGrp="1"/>
+            <a:spLocks noGrp="1"/>
           </p:cNvSpPr>
           <p:nvPr>
             <p:ph type="sldNum" idx="5"/>
@@ -3762,21 +3437,21 @@
         </p:nvSpPr>
         <p:spPr/>
         <p:txBody>
-          <a:bodyPr xmlns:a="http://schemas.openxmlformats.org/drawingml/2006/main"/>
-          <a:lstStyle xmlns:a="http://schemas.openxmlformats.org/drawingml/2006/main"/>
-          <a:p xmlns:a="http://schemas.openxmlformats.org/drawingml/2006/main"/>
+          <a:bodyPr/>
+          <a:lstStyle/>
+          <a:p/>
         </p:txBody>
       </p:sp>
     </p:spTree>
   </p:cSld>
   <p:clrMapOvr>
-    <a:masterClrMapping xmlns:a="http://schemas.openxmlformats.org/drawingml/2006/main"/>
+    <a:masterClrMapping/>
   </p:clrMapOvr>
 </p:notes>
 </file>
 
 <file path=ppt/notesSlides/notesSlide4.xml><?xml version="1.0" encoding="utf-8"?>
-<p:notes xmlns:p="http://schemas.openxmlformats.org/presentationml/2006/main">
+<p:notes xmlns:a="http://schemas.openxmlformats.org/drawingml/2006/main" xmlns:p="http://schemas.openxmlformats.org/presentationml/2006/main">
   <p:cSld>
     <p:spTree>
       <p:nvGrpSpPr>
@@ -3785,13 +3460,13 @@
         <p:nvPr/>
       </p:nvGrpSpPr>
       <p:grpSpPr>
-        <a:xfrm xmlns:a="http://schemas.openxmlformats.org/drawingml/2006/main"/>
+        <a:xfrm/>
       </p:grpSpPr>
       <p:sp>
         <p:nvSpPr>
           <p:cNvPr id="2" name="Slide Image Placeholder 1"/>
           <p:cNvSpPr>
-            <a:spLocks xmlns:a="http://schemas.openxmlformats.org/drawingml/2006/main" noGrp="1"/>
+            <a:spLocks noGrp="1"/>
           </p:cNvSpPr>
           <p:nvPr>
             <p:ph type="sldImg" idx="0"/>
@@ -3803,7 +3478,7 @@
         <p:nvSpPr>
           <p:cNvPr id="3" name="Notes Placeholder 2"/>
           <p:cNvSpPr>
-            <a:spLocks xmlns:a="http://schemas.openxmlformats.org/drawingml/2006/main" noGrp="1"/>
+            <a:spLocks noGrp="1"/>
           </p:cNvSpPr>
           <p:nvPr>
             <p:ph type="body" idx="1"/>
@@ -3811,116 +3486,96 @@
         </p:nvSpPr>
         <p:spPr/>
         <p:txBody>
-          <a:bodyPr xmlns:a="http://schemas.openxmlformats.org/drawingml/2006/main"/>
-          <a:lstStyle xmlns:a="http://schemas.openxmlformats.org/drawingml/2006/main"/>
-          <a:p xmlns:a="http://schemas.openxmlformats.org/drawingml/2006/main">
-            <a:r>
-              <a:t>PURPOSE</a:t>
-            </a:r>
-          </a:p>
-          <a:p xmlns:a="http://schemas.openxmlformats.org/drawingml/2006/main">
+          <a:bodyPr/>
+          <a:lstStyle/>
+          <a:p>
             <a:r>
               <a:t>A presentation connects a claim to evidence</a:t>
             </a:r>
           </a:p>
-          <a:p xmlns:a="http://schemas.openxmlformats.org/drawingml/2006/main">
+          <a:p>
+            <a:r>
+              <a:t>CML3112, Week 15, slide 4</a:t>
+            </a:r>
+          </a:p>
+          <a:p>
             <a:r>
               <a:t/>
             </a:r>
           </a:p>
-          <a:p xmlns:a="http://schemas.openxmlformats.org/drawingml/2006/main">
-            <a:r>
-              <a:t>CONNECT</a:t>
-            </a:r>
-          </a:p>
-          <a:p xmlns:a="http://schemas.openxmlformats.org/drawingml/2006/main">
-            <a:r>
-              <a:t>Previous slide: Connection to the previous lesson.</a:t>
-            </a:r>
-          </a:p>
-          <a:p xmlns:a="http://schemas.openxmlformats.org/drawingml/2006/main">
+          <a:p>
+            <a:r>
+              <a:t>Explanation to give</a:t>
+            </a:r>
+          </a:p>
+          <a:p>
+            <a:r>
+              <a:t>Explain the chain from engineering question to measured evidence to a bounded recommendation. A finding states what was observed; a limitation identifies where that evidence may not apply.</a:t>
+            </a:r>
+          </a:p>
+          <a:p>
             <a:r>
               <a:t/>
             </a:r>
           </a:p>
-          <a:p xmlns:a="http://schemas.openxmlformats.org/drawingml/2006/main">
-            <a:r>
-              <a:t>EXPLAIN</a:t>
-            </a:r>
-          </a:p>
-          <a:p xmlns:a="http://schemas.openxmlformats.org/drawingml/2006/main">
+          <a:p>
+            <a:r>
+              <a:t>Worked illustration / lecturer answer</a:t>
+            </a:r>
+          </a:p>
+          <a:p>
+            <a:r>
+              <a:t>“On this held-out sample, MAE was 3 kW” states a result. “The sample contains only one site” limits the claim. Neither statement alone justifies deployment at every site.</a:t>
+            </a:r>
+          </a:p>
+          <a:p>
+            <a:r>
+              <a:t/>
+            </a:r>
+          </a:p>
+          <a:p>
+            <a:r>
+              <a:t>Misconception to address</a:t>
+            </a:r>
+          </a:p>
+          <a:p>
+            <a:r>
+              <a:t>A polished chart cannot replace a defined target, correct units or an honest description of the evaluation sample.</a:t>
+            </a:r>
+          </a:p>
+          <a:p>
+            <a:r>
+              <a:t/>
+            </a:r>
+          </a:p>
+          <a:p>
+            <a:r>
+              <a:t>On this slide</a:t>
+            </a:r>
+          </a:p>
+          <a:p>
             <a:r>
               <a:t>Finding and limitation: A finding states what the evidence shows. A limitation states where that evidence is incomplete or may not apply. Point to the relevant chart, metric or record.</a:t>
             </a:r>
           </a:p>
-          <a:p xmlns:a="http://schemas.openxmlformats.org/drawingml/2006/main">
+          <a:p>
+            <a:r>
+              <a:t>Defence and reflection: A defence explains why you made a choice. A reflection explains what you learned and would improve. Describe your own contribution with specific evidence.</a:t>
+            </a:r>
+          </a:p>
+          <a:p>
             <a:r>
               <a:t/>
             </a:r>
           </a:p>
-          <a:p xmlns:a="http://schemas.openxmlformats.org/drawingml/2006/main">
-            <a:r>
-              <a:t>Defence and reflection: A defence explains why you made a choice. A reflection explains what you learned and would improve. Describe your own contribution with specific evidence.</a:t>
-            </a:r>
-          </a:p>
-          <a:p xmlns:a="http://schemas.openxmlformats.org/drawingml/2006/main">
-            <a:r>
-              <a:t/>
-            </a:r>
-          </a:p>
-          <a:p xmlns:a="http://schemas.openxmlformats.org/drawingml/2006/main">
-            <a:r>
-              <a:t>LECTURER CUE</a:t>
-            </a:r>
-          </a:p>
-          <a:p xmlns:a="http://schemas.openxmlformats.org/drawingml/2006/main">
-            <a:r>
-              <a:t>Explain the definitions before running or tracing the example. Point to the line or table row that produces each result.</a:t>
-            </a:r>
-          </a:p>
-          <a:p xmlns:a="http://schemas.openxmlformats.org/drawingml/2006/main">
-            <a:r>
-              <a:t/>
-            </a:r>
-          </a:p>
-          <a:p xmlns:a="http://schemas.openxmlformats.org/drawingml/2006/main">
-            <a:r>
-              <a:t>TEACHING MODE</a:t>
-            </a:r>
-          </a:p>
-          <a:p xmlns:a="http://schemas.openxmlformats.org/drawingml/2006/main">
-            <a:r>
-              <a:t>Demonstrate first. Read each new symbol aloud, trace the values and compare the shown output. Learners repeat worked examples individually after class.</a:t>
-            </a:r>
-          </a:p>
-          <a:p xmlns:a="http://schemas.openxmlformats.org/drawingml/2006/main">
-            <a:r>
-              <a:t/>
-            </a:r>
-          </a:p>
-          <a:p xmlns:a="http://schemas.openxmlformats.org/drawingml/2006/main">
-            <a:r>
-              <a:t>NEXT</a:t>
-            </a:r>
-          </a:p>
-          <a:p xmlns:a="http://schemas.openxmlformats.org/drawingml/2006/main">
-            <a:r>
-              <a:t>A six-minute presentation.</a:t>
-            </a:r>
-          </a:p>
-          <a:p xmlns:a="http://schemas.openxmlformats.org/drawingml/2006/main">
-            <a:r>
-              <a:t/>
-            </a:r>
-          </a:p>
-          <a:p xmlns:a="http://schemas.openxmlformats.org/drawingml/2006/main">
-            <a:r>
-              <a:t>REFERENCES</a:t>
-            </a:r>
-          </a:p>
-          <a:p xmlns:a="http://schemas.openxmlformats.org/drawingml/2006/main">
-            <a:r>
-              <a:t/>
+          <a:p>
+            <a:r>
+              <a:t>Continue to</a:t>
+            </a:r>
+          </a:p>
+          <a:p>
+            <a:r>
+              <a:t>A six-minute presentation</a:t>
             </a:r>
           </a:p>
         </p:txBody>
@@ -3929,7 +3584,7 @@
         <p:nvSpPr>
           <p:cNvPr id="4" name="Slide Number Placeholder 3"/>
           <p:cNvSpPr>
-            <a:spLocks xmlns:a="http://schemas.openxmlformats.org/drawingml/2006/main" noGrp="1"/>
+            <a:spLocks noGrp="1"/>
           </p:cNvSpPr>
           <p:nvPr>
             <p:ph type="sldNum" idx="5"/>
@@ -3937,21 +3592,21 @@
         </p:nvSpPr>
         <p:spPr/>
         <p:txBody>
-          <a:bodyPr xmlns:a="http://schemas.openxmlformats.org/drawingml/2006/main"/>
-          <a:lstStyle xmlns:a="http://schemas.openxmlformats.org/drawingml/2006/main"/>
-          <a:p xmlns:a="http://schemas.openxmlformats.org/drawingml/2006/main"/>
+          <a:bodyPr/>
+          <a:lstStyle/>
+          <a:p/>
         </p:txBody>
       </p:sp>
     </p:spTree>
   </p:cSld>
   <p:clrMapOvr>
-    <a:masterClrMapping xmlns:a="http://schemas.openxmlformats.org/drawingml/2006/main"/>
+    <a:masterClrMapping/>
   </p:clrMapOvr>
 </p:notes>
 </file>
 
 <file path=ppt/notesSlides/notesSlide5.xml><?xml version="1.0" encoding="utf-8"?>
-<p:notes xmlns:p="http://schemas.openxmlformats.org/presentationml/2006/main">
+<p:notes xmlns:a="http://schemas.openxmlformats.org/drawingml/2006/main" xmlns:p="http://schemas.openxmlformats.org/presentationml/2006/main">
   <p:cSld>
     <p:spTree>
       <p:nvGrpSpPr>
@@ -3960,13 +3615,13 @@
         <p:nvPr/>
       </p:nvGrpSpPr>
       <p:grpSpPr>
-        <a:xfrm xmlns:a="http://schemas.openxmlformats.org/drawingml/2006/main"/>
+        <a:xfrm/>
       </p:grpSpPr>
       <p:sp>
         <p:nvSpPr>
           <p:cNvPr id="2" name="Slide Image Placeholder 1"/>
           <p:cNvSpPr>
-            <a:spLocks xmlns:a="http://schemas.openxmlformats.org/drawingml/2006/main" noGrp="1"/>
+            <a:spLocks noGrp="1"/>
           </p:cNvSpPr>
           <p:nvPr>
             <p:ph type="sldImg" idx="0"/>
@@ -3978,7 +3633,7 @@
         <p:nvSpPr>
           <p:cNvPr id="3" name="Notes Placeholder 2"/>
           <p:cNvSpPr>
-            <a:spLocks xmlns:a="http://schemas.openxmlformats.org/drawingml/2006/main" noGrp="1"/>
+            <a:spLocks noGrp="1"/>
           </p:cNvSpPr>
           <p:nvPr>
             <p:ph type="body" idx="1"/>
@@ -3986,126 +3641,111 @@
         </p:nvSpPr>
         <p:spPr/>
         <p:txBody>
-          <a:bodyPr xmlns:a="http://schemas.openxmlformats.org/drawingml/2006/main"/>
-          <a:lstStyle xmlns:a="http://schemas.openxmlformats.org/drawingml/2006/main"/>
-          <a:p xmlns:a="http://schemas.openxmlformats.org/drawingml/2006/main">
-            <a:r>
-              <a:t>PURPOSE</a:t>
-            </a:r>
-          </a:p>
-          <a:p xmlns:a="http://schemas.openxmlformats.org/drawingml/2006/main">
+          <a:bodyPr/>
+          <a:lstStyle/>
+          <a:p>
             <a:r>
               <a:t>A six-minute presentation</a:t>
             </a:r>
           </a:p>
-          <a:p xmlns:a="http://schemas.openxmlformats.org/drawingml/2006/main">
+          <a:p>
+            <a:r>
+              <a:t>CML3112, Week 15, slide 5</a:t>
+            </a:r>
+          </a:p>
+          <a:p>
             <a:r>
               <a:t/>
             </a:r>
           </a:p>
-          <a:p xmlns:a="http://schemas.openxmlformats.org/drawingml/2006/main">
-            <a:r>
-              <a:t>CONNECT</a:t>
-            </a:r>
-          </a:p>
-          <a:p xmlns:a="http://schemas.openxmlformats.org/drawingml/2006/main">
-            <a:r>
-              <a:t>Previous slide: A presentation connects a claim to evidence.</a:t>
-            </a:r>
-          </a:p>
-          <a:p xmlns:a="http://schemas.openxmlformats.org/drawingml/2006/main">
+          <a:p>
+            <a:r>
+              <a:t>Explanation to give</a:t>
+            </a:r>
+          </a:p>
+          <a:p>
+            <a:r>
+              <a:t>Explain the chain from engineering question to measured evidence to a bounded recommendation. A finding states what was observed; a limitation identifies where that evidence may not apply.</a:t>
+            </a:r>
+          </a:p>
+          <a:p>
             <a:r>
               <a:t/>
             </a:r>
           </a:p>
-          <a:p xmlns:a="http://schemas.openxmlformats.org/drawingml/2006/main">
-            <a:r>
-              <a:t>EXPLAIN</a:t>
-            </a:r>
-          </a:p>
-          <a:p xmlns:a="http://schemas.openxmlformats.org/drawingml/2006/main">
+          <a:p>
+            <a:r>
+              <a:t>Worked illustration / lecturer answer</a:t>
+            </a:r>
+          </a:p>
+          <a:p>
+            <a:r>
+              <a:t>“On this held-out sample, MAE was 3 kW” states a result. “The sample contains only one site” limits the claim. Neither statement alone justifies deployment at every site.</a:t>
+            </a:r>
+          </a:p>
+          <a:p>
+            <a:r>
+              <a:t/>
+            </a:r>
+          </a:p>
+          <a:p>
+            <a:r>
+              <a:t>Misconception to address</a:t>
+            </a:r>
+          </a:p>
+          <a:p>
+            <a:r>
+              <a:t>A polished chart cannot replace a defined target, correct units or an honest description of the evaluation sample.</a:t>
+            </a:r>
+          </a:p>
+          <a:p>
+            <a:r>
+              <a:t/>
+            </a:r>
+          </a:p>
+          <a:p>
+            <a:r>
+              <a:t>On this slide</a:t>
+            </a:r>
+          </a:p>
+          <a:p>
             <a:r>
               <a:t>Minutes 1–2: explain the question and data.</a:t>
             </a:r>
           </a:p>
-          <a:p xmlns:a="http://schemas.openxmlformats.org/drawingml/2006/main">
+          <a:p>
             <a:r>
               <a:t/>
             </a:r>
           </a:p>
-          <a:p xmlns:a="http://schemas.openxmlformats.org/drawingml/2006/main">
+          <a:p>
             <a:r>
               <a:t>Minutes 3–4: show the method and one supported result.</a:t>
             </a:r>
           </a:p>
-          <a:p xmlns:a="http://schemas.openxmlformats.org/drawingml/2006/main">
+          <a:p>
             <a:r>
               <a:t/>
             </a:r>
           </a:p>
-          <a:p xmlns:a="http://schemas.openxmlformats.org/drawingml/2006/main">
+          <a:p>
             <a:r>
               <a:t>Minutes 5–6: explain limitations, contributions and a next step.</a:t>
             </a:r>
           </a:p>
-          <a:p xmlns:a="http://schemas.openxmlformats.org/drawingml/2006/main">
+          <a:p>
             <a:r>
               <a:t/>
             </a:r>
           </a:p>
-          <a:p xmlns:a="http://schemas.openxmlformats.org/drawingml/2006/main">
-            <a:r>
-              <a:t>LECTURER CUE</a:t>
-            </a:r>
-          </a:p>
-          <a:p xmlns:a="http://schemas.openxmlformats.org/drawingml/2006/main">
-            <a:r>
-              <a:t>Model a six-minute presentation: one minute for the problem, one for the data, two for the method and result, one for limitations and one for contribution and next step.</a:t>
-            </a:r>
-          </a:p>
-          <a:p xmlns:a="http://schemas.openxmlformats.org/drawingml/2006/main">
-            <a:r>
-              <a:t/>
-            </a:r>
-          </a:p>
-          <a:p xmlns:a="http://schemas.openxmlformats.org/drawingml/2006/main">
-            <a:r>
-              <a:t>TEACHING MODE</a:t>
-            </a:r>
-          </a:p>
-          <a:p xmlns:a="http://schemas.openxmlformats.org/drawingml/2006/main">
-            <a:r>
-              <a:t>Demonstrate first. Read each new symbol aloud, trace the values and compare the shown output. Learners repeat worked examples individually after class.</a:t>
-            </a:r>
-          </a:p>
-          <a:p xmlns:a="http://schemas.openxmlformats.org/drawingml/2006/main">
-            <a:r>
-              <a:t/>
-            </a:r>
-          </a:p>
-          <a:p xmlns:a="http://schemas.openxmlformats.org/drawingml/2006/main">
-            <a:r>
-              <a:t>NEXT</a:t>
-            </a:r>
-          </a:p>
-          <a:p xmlns:a="http://schemas.openxmlformats.org/drawingml/2006/main">
-            <a:r>
-              <a:t>Make the evidence readable.</a:t>
-            </a:r>
-          </a:p>
-          <a:p xmlns:a="http://schemas.openxmlformats.org/drawingml/2006/main">
-            <a:r>
-              <a:t/>
-            </a:r>
-          </a:p>
-          <a:p xmlns:a="http://schemas.openxmlformats.org/drawingml/2006/main">
-            <a:r>
-              <a:t>REFERENCES</a:t>
-            </a:r>
-          </a:p>
-          <a:p xmlns:a="http://schemas.openxmlformats.org/drawingml/2006/main">
-            <a:r>
-              <a:t/>
+          <a:p>
+            <a:r>
+              <a:t>Continue to</a:t>
+            </a:r>
+          </a:p>
+          <a:p>
+            <a:r>
+              <a:t>Make the evidence readable</a:t>
             </a:r>
           </a:p>
         </p:txBody>
@@ -4114,7 +3754,7 @@
         <p:nvSpPr>
           <p:cNvPr id="4" name="Slide Number Placeholder 3"/>
           <p:cNvSpPr>
-            <a:spLocks xmlns:a="http://schemas.openxmlformats.org/drawingml/2006/main" noGrp="1"/>
+            <a:spLocks noGrp="1"/>
           </p:cNvSpPr>
           <p:nvPr>
             <p:ph type="sldNum" idx="5"/>
@@ -4122,21 +3762,21 @@
         </p:nvSpPr>
         <p:spPr/>
         <p:txBody>
-          <a:bodyPr xmlns:a="http://schemas.openxmlformats.org/drawingml/2006/main"/>
-          <a:lstStyle xmlns:a="http://schemas.openxmlformats.org/drawingml/2006/main"/>
-          <a:p xmlns:a="http://schemas.openxmlformats.org/drawingml/2006/main"/>
+          <a:bodyPr/>
+          <a:lstStyle/>
+          <a:p/>
         </p:txBody>
       </p:sp>
     </p:spTree>
   </p:cSld>
   <p:clrMapOvr>
-    <a:masterClrMapping xmlns:a="http://schemas.openxmlformats.org/drawingml/2006/main"/>
+    <a:masterClrMapping/>
   </p:clrMapOvr>
 </p:notes>
 </file>
 
 <file path=ppt/notesSlides/notesSlide6.xml><?xml version="1.0" encoding="utf-8"?>
-<p:notes xmlns:p="http://schemas.openxmlformats.org/presentationml/2006/main">
+<p:notes xmlns:a="http://schemas.openxmlformats.org/drawingml/2006/main" xmlns:p="http://schemas.openxmlformats.org/presentationml/2006/main">
   <p:cSld>
     <p:spTree>
       <p:nvGrpSpPr>
@@ -4145,13 +3785,13 @@
         <p:nvPr/>
       </p:nvGrpSpPr>
       <p:grpSpPr>
-        <a:xfrm xmlns:a="http://schemas.openxmlformats.org/drawingml/2006/main"/>
+        <a:xfrm/>
       </p:grpSpPr>
       <p:sp>
         <p:nvSpPr>
           <p:cNvPr id="2" name="Slide Image Placeholder 1"/>
           <p:cNvSpPr>
-            <a:spLocks xmlns:a="http://schemas.openxmlformats.org/drawingml/2006/main" noGrp="1"/>
+            <a:spLocks noGrp="1"/>
           </p:cNvSpPr>
           <p:nvPr>
             <p:ph type="sldImg" idx="0"/>
@@ -4163,7 +3803,7 @@
         <p:nvSpPr>
           <p:cNvPr id="3" name="Notes Placeholder 2"/>
           <p:cNvSpPr>
-            <a:spLocks xmlns:a="http://schemas.openxmlformats.org/drawingml/2006/main" noGrp="1"/>
+            <a:spLocks noGrp="1"/>
           </p:cNvSpPr>
           <p:nvPr>
             <p:ph type="body" idx="1"/>
@@ -4171,126 +3811,111 @@
         </p:nvSpPr>
         <p:spPr/>
         <p:txBody>
-          <a:bodyPr xmlns:a="http://schemas.openxmlformats.org/drawingml/2006/main"/>
-          <a:lstStyle xmlns:a="http://schemas.openxmlformats.org/drawingml/2006/main"/>
-          <a:p xmlns:a="http://schemas.openxmlformats.org/drawingml/2006/main">
-            <a:r>
-              <a:t>PURPOSE</a:t>
-            </a:r>
-          </a:p>
-          <a:p xmlns:a="http://schemas.openxmlformats.org/drawingml/2006/main">
+          <a:bodyPr/>
+          <a:lstStyle/>
+          <a:p>
             <a:r>
               <a:t>Make the evidence readable</a:t>
             </a:r>
           </a:p>
-          <a:p xmlns:a="http://schemas.openxmlformats.org/drawingml/2006/main">
+          <a:p>
+            <a:r>
+              <a:t>CML3112, Week 15, slide 6</a:t>
+            </a:r>
+          </a:p>
+          <a:p>
             <a:r>
               <a:t/>
             </a:r>
           </a:p>
-          <a:p xmlns:a="http://schemas.openxmlformats.org/drawingml/2006/main">
-            <a:r>
-              <a:t>CONNECT</a:t>
-            </a:r>
-          </a:p>
-          <a:p xmlns:a="http://schemas.openxmlformats.org/drawingml/2006/main">
-            <a:r>
-              <a:t>Previous slide: A six-minute presentation.</a:t>
-            </a:r>
-          </a:p>
-          <a:p xmlns:a="http://schemas.openxmlformats.org/drawingml/2006/main">
+          <a:p>
+            <a:r>
+              <a:t>Explanation to give</a:t>
+            </a:r>
+          </a:p>
+          <a:p>
+            <a:r>
+              <a:t>Explain the chain from engineering question to measured evidence to a bounded recommendation. A finding states what was observed; a limitation identifies where that evidence may not apply.</a:t>
+            </a:r>
+          </a:p>
+          <a:p>
             <a:r>
               <a:t/>
             </a:r>
           </a:p>
-          <a:p xmlns:a="http://schemas.openxmlformats.org/drawingml/2006/main">
-            <a:r>
-              <a:t>EXPLAIN</a:t>
-            </a:r>
-          </a:p>
-          <a:p xmlns:a="http://schemas.openxmlformats.org/drawingml/2006/main">
+          <a:p>
+            <a:r>
+              <a:t>Worked illustration / lecturer answer</a:t>
+            </a:r>
+          </a:p>
+          <a:p>
+            <a:r>
+              <a:t>“On this held-out sample, MAE was 3 kW” states a result. “The sample contains only one site” limits the claim. Neither statement alone justifies deployment at every site.</a:t>
+            </a:r>
+          </a:p>
+          <a:p>
+            <a:r>
+              <a:t/>
+            </a:r>
+          </a:p>
+          <a:p>
+            <a:r>
+              <a:t>Misconception to address</a:t>
+            </a:r>
+          </a:p>
+          <a:p>
+            <a:r>
+              <a:t>A polished chart cannot replace a defined target, correct units or an honest description of the evaluation sample.</a:t>
+            </a:r>
+          </a:p>
+          <a:p>
+            <a:r>
+              <a:t/>
+            </a:r>
+          </a:p>
+          <a:p>
+            <a:r>
+              <a:t>On this slide</a:t>
+            </a:r>
+          </a:p>
+          <a:p>
             <a:r>
               <a:t>Name the chart axes and their units.</a:t>
             </a:r>
           </a:p>
-          <a:p xmlns:a="http://schemas.openxmlformats.org/drawingml/2006/main">
+          <a:p>
             <a:r>
               <a:t/>
             </a:r>
           </a:p>
-          <a:p xmlns:a="http://schemas.openxmlformats.org/drawingml/2006/main">
+          <a:p>
             <a:r>
               <a:t>State the measured evaluation result and how you obtained it.</a:t>
             </a:r>
           </a:p>
-          <a:p xmlns:a="http://schemas.openxmlformats.org/drawingml/2006/main">
+          <a:p>
             <a:r>
               <a:t/>
             </a:r>
           </a:p>
-          <a:p xmlns:a="http://schemas.openxmlformats.org/drawingml/2006/main">
+          <a:p>
             <a:r>
               <a:t>Point to the particular table, plot or calculation that supports your claim.</a:t>
             </a:r>
           </a:p>
-          <a:p xmlns:a="http://schemas.openxmlformats.org/drawingml/2006/main">
+          <a:p>
             <a:r>
               <a:t/>
             </a:r>
           </a:p>
-          <a:p xmlns:a="http://schemas.openxmlformats.org/drawingml/2006/main">
-            <a:r>
-              <a:t>LECTURER CUE</a:t>
-            </a:r>
-          </a:p>
-          <a:p xmlns:a="http://schemas.openxmlformats.org/drawingml/2006/main">
-            <a:r>
-              <a:t>Explain each chart’s axes and unit before stating its finding. Use the actual measured validation results and state how they were obtained.</a:t>
-            </a:r>
-          </a:p>
-          <a:p xmlns:a="http://schemas.openxmlformats.org/drawingml/2006/main">
-            <a:r>
-              <a:t/>
-            </a:r>
-          </a:p>
-          <a:p xmlns:a="http://schemas.openxmlformats.org/drawingml/2006/main">
-            <a:r>
-              <a:t>TEACHING MODE</a:t>
-            </a:r>
-          </a:p>
-          <a:p xmlns:a="http://schemas.openxmlformats.org/drawingml/2006/main">
-            <a:r>
-              <a:t>Demonstrate first. Read each new symbol aloud, trace the values and compare the shown output. Learners repeat worked examples individually after class.</a:t>
-            </a:r>
-          </a:p>
-          <a:p xmlns:a="http://schemas.openxmlformats.org/drawingml/2006/main">
-            <a:r>
-              <a:t/>
-            </a:r>
-          </a:p>
-          <a:p xmlns:a="http://schemas.openxmlformats.org/drawingml/2006/main">
-            <a:r>
-              <a:t>NEXT</a:t>
-            </a:r>
-          </a:p>
-          <a:p xmlns:a="http://schemas.openxmlformats.org/drawingml/2006/main">
-            <a:r>
-              <a:t>Explain the limits honestly.</a:t>
-            </a:r>
-          </a:p>
-          <a:p xmlns:a="http://schemas.openxmlformats.org/drawingml/2006/main">
-            <a:r>
-              <a:t/>
-            </a:r>
-          </a:p>
-          <a:p xmlns:a="http://schemas.openxmlformats.org/drawingml/2006/main">
-            <a:r>
-              <a:t>REFERENCES</a:t>
-            </a:r>
-          </a:p>
-          <a:p xmlns:a="http://schemas.openxmlformats.org/drawingml/2006/main">
-            <a:r>
-              <a:t/>
+          <a:p>
+            <a:r>
+              <a:t>Continue to</a:t>
+            </a:r>
+          </a:p>
+          <a:p>
+            <a:r>
+              <a:t>Limitations of the results</a:t>
             </a:r>
           </a:p>
         </p:txBody>
@@ -4299,7 +3924,7 @@
         <p:nvSpPr>
           <p:cNvPr id="4" name="Slide Number Placeholder 3"/>
           <p:cNvSpPr>
-            <a:spLocks xmlns:a="http://schemas.openxmlformats.org/drawingml/2006/main" noGrp="1"/>
+            <a:spLocks noGrp="1"/>
           </p:cNvSpPr>
           <p:nvPr>
             <p:ph type="sldNum" idx="5"/>
@@ -4307,21 +3932,21 @@
         </p:nvSpPr>
         <p:spPr/>
         <p:txBody>
-          <a:bodyPr xmlns:a="http://schemas.openxmlformats.org/drawingml/2006/main"/>
-          <a:lstStyle xmlns:a="http://schemas.openxmlformats.org/drawingml/2006/main"/>
-          <a:p xmlns:a="http://schemas.openxmlformats.org/drawingml/2006/main"/>
+          <a:bodyPr/>
+          <a:lstStyle/>
+          <a:p/>
         </p:txBody>
       </p:sp>
     </p:spTree>
   </p:cSld>
   <p:clrMapOvr>
-    <a:masterClrMapping xmlns:a="http://schemas.openxmlformats.org/drawingml/2006/main"/>
+    <a:masterClrMapping/>
   </p:clrMapOvr>
 </p:notes>
 </file>
 
 <file path=ppt/notesSlides/notesSlide7.xml><?xml version="1.0" encoding="utf-8"?>
-<p:notes xmlns:p="http://schemas.openxmlformats.org/presentationml/2006/main">
+<p:notes xmlns:a="http://schemas.openxmlformats.org/drawingml/2006/main" xmlns:p="http://schemas.openxmlformats.org/presentationml/2006/main">
   <p:cSld>
     <p:spTree>
       <p:nvGrpSpPr>
@@ -4330,13 +3955,13 @@
         <p:nvPr/>
       </p:nvGrpSpPr>
       <p:grpSpPr>
-        <a:xfrm xmlns:a="http://schemas.openxmlformats.org/drawingml/2006/main"/>
+        <a:xfrm/>
       </p:grpSpPr>
       <p:sp>
         <p:nvSpPr>
           <p:cNvPr id="2" name="Slide Image Placeholder 1"/>
           <p:cNvSpPr>
-            <a:spLocks xmlns:a="http://schemas.openxmlformats.org/drawingml/2006/main" noGrp="1"/>
+            <a:spLocks noGrp="1"/>
           </p:cNvSpPr>
           <p:nvPr>
             <p:ph type="sldImg" idx="0"/>
@@ -4348,7 +3973,7 @@
         <p:nvSpPr>
           <p:cNvPr id="3" name="Notes Placeholder 2"/>
           <p:cNvSpPr>
-            <a:spLocks xmlns:a="http://schemas.openxmlformats.org/drawingml/2006/main" noGrp="1"/>
+            <a:spLocks noGrp="1"/>
           </p:cNvSpPr>
           <p:nvPr>
             <p:ph type="body" idx="1"/>
@@ -4356,126 +3981,111 @@
         </p:nvSpPr>
         <p:spPr/>
         <p:txBody>
-          <a:bodyPr xmlns:a="http://schemas.openxmlformats.org/drawingml/2006/main"/>
-          <a:lstStyle xmlns:a="http://schemas.openxmlformats.org/drawingml/2006/main"/>
-          <a:p xmlns:a="http://schemas.openxmlformats.org/drawingml/2006/main">
-            <a:r>
-              <a:t>PURPOSE</a:t>
-            </a:r>
-          </a:p>
-          <a:p xmlns:a="http://schemas.openxmlformats.org/drawingml/2006/main">
-            <a:r>
-              <a:t>Explain the limits honestly</a:t>
-            </a:r>
-          </a:p>
-          <a:p xmlns:a="http://schemas.openxmlformats.org/drawingml/2006/main">
+          <a:bodyPr/>
+          <a:lstStyle/>
+          <a:p>
+            <a:r>
+              <a:t>Limitations of the results</a:t>
+            </a:r>
+          </a:p>
+          <a:p>
+            <a:r>
+              <a:t>CML3112, Week 15, slide 7</a:t>
+            </a:r>
+          </a:p>
+          <a:p>
             <a:r>
               <a:t/>
             </a:r>
           </a:p>
-          <a:p xmlns:a="http://schemas.openxmlformats.org/drawingml/2006/main">
-            <a:r>
-              <a:t>CONNECT</a:t>
-            </a:r>
-          </a:p>
-          <a:p xmlns:a="http://schemas.openxmlformats.org/drawingml/2006/main">
-            <a:r>
-              <a:t>Previous slide: Make the evidence readable.</a:t>
-            </a:r>
-          </a:p>
-          <a:p xmlns:a="http://schemas.openxmlformats.org/drawingml/2006/main">
+          <a:p>
+            <a:r>
+              <a:t>Explanation to give</a:t>
+            </a:r>
+          </a:p>
+          <a:p>
+            <a:r>
+              <a:t>Explain the chain from engineering question to measured evidence to a bounded recommendation. A finding states what was observed; a limitation identifies where that evidence may not apply.</a:t>
+            </a:r>
+          </a:p>
+          <a:p>
             <a:r>
               <a:t/>
             </a:r>
           </a:p>
-          <a:p xmlns:a="http://schemas.openxmlformats.org/drawingml/2006/main">
-            <a:r>
-              <a:t>EXPLAIN</a:t>
-            </a:r>
-          </a:p>
-          <a:p xmlns:a="http://schemas.openxmlformats.org/drawingml/2006/main">
+          <a:p>
+            <a:r>
+              <a:t>Worked illustration / lecturer answer</a:t>
+            </a:r>
+          </a:p>
+          <a:p>
+            <a:r>
+              <a:t>“On this held-out sample, MAE was 3 kW” states a result. “The sample contains only one site” limits the claim. Neither statement alone justifies deployment at every site.</a:t>
+            </a:r>
+          </a:p>
+          <a:p>
+            <a:r>
+              <a:t/>
+            </a:r>
+          </a:p>
+          <a:p>
+            <a:r>
+              <a:t>Misconception to address</a:t>
+            </a:r>
+          </a:p>
+          <a:p>
+            <a:r>
+              <a:t>A polished chart cannot replace a defined target, correct units or an honest description of the evaluation sample.</a:t>
+            </a:r>
+          </a:p>
+          <a:p>
+            <a:r>
+              <a:t/>
+            </a:r>
+          </a:p>
+          <a:p>
+            <a:r>
+              <a:t>On this slide</a:t>
+            </a:r>
+          </a:p>
+          <a:p>
             <a:r>
               <a:t>State what your investigation can support.</a:t>
             </a:r>
           </a:p>
-          <a:p xmlns:a="http://schemas.openxmlformats.org/drawingml/2006/main">
+          <a:p>
             <a:r>
               <a:t/>
             </a:r>
           </a:p>
-          <a:p xmlns:a="http://schemas.openxmlformats.org/drawingml/2006/main">
+          <a:p>
             <a:r>
               <a:t>If an answer is unknown, say what evidence would resolve it.</a:t>
             </a:r>
           </a:p>
-          <a:p xmlns:a="http://schemas.openxmlformats.org/drawingml/2006/main">
+          <a:p>
             <a:r>
               <a:t/>
             </a:r>
           </a:p>
-          <a:p xmlns:a="http://schemas.openxmlformats.org/drawingml/2006/main">
+          <a:p>
             <a:r>
               <a:t>Teaching data alone do not establish readiness for real operation.</a:t>
             </a:r>
           </a:p>
-          <a:p xmlns:a="http://schemas.openxmlformats.org/drawingml/2006/main">
+          <a:p>
             <a:r>
               <a:t/>
             </a:r>
           </a:p>
-          <a:p xmlns:a="http://schemas.openxmlformats.org/drawingml/2006/main">
-            <a:r>
-              <a:t>LECTURER CUE</a:t>
-            </a:r>
-          </a:p>
-          <a:p xmlns:a="http://schemas.openxmlformats.org/drawingml/2006/main">
-            <a:r>
-              <a:t>Practise saying “I do not know yet” followed by the evidence needed to resolve the question. Do not claim deployment readiness from a teaching dataset.</a:t>
-            </a:r>
-          </a:p>
-          <a:p xmlns:a="http://schemas.openxmlformats.org/drawingml/2006/main">
-            <a:r>
-              <a:t/>
-            </a:r>
-          </a:p>
-          <a:p xmlns:a="http://schemas.openxmlformats.org/drawingml/2006/main">
-            <a:r>
-              <a:t>TEACHING MODE</a:t>
-            </a:r>
-          </a:p>
-          <a:p xmlns:a="http://schemas.openxmlformats.org/drawingml/2006/main">
-            <a:r>
-              <a:t>Demonstrate first. Read each new symbol aloud, trace the values and compare the shown output. Learners repeat worked examples individually after class.</a:t>
-            </a:r>
-          </a:p>
-          <a:p xmlns:a="http://schemas.openxmlformats.org/drawingml/2006/main">
-            <a:r>
-              <a:t/>
-            </a:r>
-          </a:p>
-          <a:p xmlns:a="http://schemas.openxmlformats.org/drawingml/2006/main">
-            <a:r>
-              <a:t>NEXT</a:t>
-            </a:r>
-          </a:p>
-          <a:p xmlns:a="http://schemas.openxmlformats.org/drawingml/2006/main">
-            <a:r>
-              <a:t>Preparation checkpoint.</a:t>
-            </a:r>
-          </a:p>
-          <a:p xmlns:a="http://schemas.openxmlformats.org/drawingml/2006/main">
-            <a:r>
-              <a:t/>
-            </a:r>
-          </a:p>
-          <a:p xmlns:a="http://schemas.openxmlformats.org/drawingml/2006/main">
-            <a:r>
-              <a:t>REFERENCES</a:t>
-            </a:r>
-          </a:p>
-          <a:p xmlns:a="http://schemas.openxmlformats.org/drawingml/2006/main">
-            <a:r>
-              <a:t/>
+          <a:p>
+            <a:r>
+              <a:t>Continue to</a:t>
+            </a:r>
+          </a:p>
+          <a:p>
+            <a:r>
+              <a:t>Preparation checkpoint</a:t>
             </a:r>
           </a:p>
         </p:txBody>
@@ -4484,7 +4094,7 @@
         <p:nvSpPr>
           <p:cNvPr id="4" name="Slide Number Placeholder 3"/>
           <p:cNvSpPr>
-            <a:spLocks xmlns:a="http://schemas.openxmlformats.org/drawingml/2006/main" noGrp="1"/>
+            <a:spLocks noGrp="1"/>
           </p:cNvSpPr>
           <p:nvPr>
             <p:ph type="sldNum" idx="5"/>
@@ -4492,21 +4102,21 @@
         </p:nvSpPr>
         <p:spPr/>
         <p:txBody>
-          <a:bodyPr xmlns:a="http://schemas.openxmlformats.org/drawingml/2006/main"/>
-          <a:lstStyle xmlns:a="http://schemas.openxmlformats.org/drawingml/2006/main"/>
-          <a:p xmlns:a="http://schemas.openxmlformats.org/drawingml/2006/main"/>
+          <a:bodyPr/>
+          <a:lstStyle/>
+          <a:p/>
         </p:txBody>
       </p:sp>
     </p:spTree>
   </p:cSld>
   <p:clrMapOvr>
-    <a:masterClrMapping xmlns:a="http://schemas.openxmlformats.org/drawingml/2006/main"/>
+    <a:masterClrMapping/>
   </p:clrMapOvr>
 </p:notes>
 </file>
 
 <file path=ppt/notesSlides/notesSlide8.xml><?xml version="1.0" encoding="utf-8"?>
-<p:notes xmlns:p="http://schemas.openxmlformats.org/presentationml/2006/main">
+<p:notes xmlns:a="http://schemas.openxmlformats.org/drawingml/2006/main" xmlns:p="http://schemas.openxmlformats.org/presentationml/2006/main">
   <p:cSld>
     <p:spTree>
       <p:nvGrpSpPr>
@@ -4515,13 +4125,13 @@
         <p:nvPr/>
       </p:nvGrpSpPr>
       <p:grpSpPr>
-        <a:xfrm xmlns:a="http://schemas.openxmlformats.org/drawingml/2006/main"/>
+        <a:xfrm/>
       </p:grpSpPr>
       <p:sp>
         <p:nvSpPr>
           <p:cNvPr id="2" name="Slide Image Placeholder 1"/>
           <p:cNvSpPr>
-            <a:spLocks xmlns:a="http://schemas.openxmlformats.org/drawingml/2006/main" noGrp="1"/>
+            <a:spLocks noGrp="1"/>
           </p:cNvSpPr>
           <p:nvPr>
             <p:ph type="sldImg" idx="0"/>
@@ -4533,7 +4143,7 @@
         <p:nvSpPr>
           <p:cNvPr id="3" name="Notes Placeholder 2"/>
           <p:cNvSpPr>
-            <a:spLocks xmlns:a="http://schemas.openxmlformats.org/drawingml/2006/main" noGrp="1"/>
+            <a:spLocks noGrp="1"/>
           </p:cNvSpPr>
           <p:nvPr>
             <p:ph type="body" idx="1"/>
@@ -4541,106 +4151,91 @@
         </p:nvSpPr>
         <p:spPr/>
         <p:txBody>
-          <a:bodyPr xmlns:a="http://schemas.openxmlformats.org/drawingml/2006/main"/>
-          <a:lstStyle xmlns:a="http://schemas.openxmlformats.org/drawingml/2006/main"/>
-          <a:p xmlns:a="http://schemas.openxmlformats.org/drawingml/2006/main">
-            <a:r>
-              <a:t>PURPOSE</a:t>
-            </a:r>
-          </a:p>
-          <a:p xmlns:a="http://schemas.openxmlformats.org/drawingml/2006/main">
+          <a:bodyPr/>
+          <a:lstStyle/>
+          <a:p>
             <a:r>
               <a:t>Preparation checkpoint</a:t>
             </a:r>
           </a:p>
-          <a:p xmlns:a="http://schemas.openxmlformats.org/drawingml/2006/main">
+          <a:p>
+            <a:r>
+              <a:t>CML3112, Week 15, slide 8</a:t>
+            </a:r>
+          </a:p>
+          <a:p>
             <a:r>
               <a:t/>
             </a:r>
           </a:p>
-          <a:p xmlns:a="http://schemas.openxmlformats.org/drawingml/2006/main">
-            <a:r>
-              <a:t>CONNECT</a:t>
-            </a:r>
-          </a:p>
-          <a:p xmlns:a="http://schemas.openxmlformats.org/drawingml/2006/main">
-            <a:r>
-              <a:t>Previous slide: Explain the limits honestly.</a:t>
-            </a:r>
-          </a:p>
-          <a:p xmlns:a="http://schemas.openxmlformats.org/drawingml/2006/main">
+          <a:p>
+            <a:r>
+              <a:t>Explanation to give</a:t>
+            </a:r>
+          </a:p>
+          <a:p>
+            <a:r>
+              <a:t>Each learner should be able to explain one decision they personally worked on and point to its evidence in the project.</a:t>
+            </a:r>
+          </a:p>
+          <a:p>
             <a:r>
               <a:t/>
             </a:r>
           </a:p>
-          <a:p xmlns:a="http://schemas.openxmlformats.org/drawingml/2006/main">
-            <a:r>
-              <a:t>EXPLAIN</a:t>
-            </a:r>
-          </a:p>
-          <a:p xmlns:a="http://schemas.openxmlformats.org/drawingml/2006/main">
+          <a:p>
+            <a:r>
+              <a:t>Worked illustration / lecturer answer</a:t>
+            </a:r>
+          </a:p>
+          <a:p>
+            <a:r>
+              <a:t>Ask for the relevant cell, chart or contribution entry, then a reason for that choice and a limitation. This connects authorship to understanding.</a:t>
+            </a:r>
+          </a:p>
+          <a:p>
+            <a:r>
+              <a:t/>
+            </a:r>
+          </a:p>
+          <a:p>
+            <a:r>
+              <a:t>Misconception to address</a:t>
+            </a:r>
+          </a:p>
+          <a:p>
+            <a:r>
+              <a:t>Live discussion is formative. Collect the individual written evidence required by DEMO so the automatic assessment has the explanation in an accessible form.</a:t>
+            </a:r>
+          </a:p>
+          <a:p>
+            <a:r>
+              <a:t/>
+            </a:r>
+          </a:p>
+          <a:p>
+            <a:r>
+              <a:t>On this slide</a:t>
+            </a:r>
+          </a:p>
+          <a:p>
             <a:r>
               <a:t>Each student can explain one decision they personally worked on and point to its evidence.</a:t>
             </a:r>
           </a:p>
-          <a:p xmlns:a="http://schemas.openxmlformats.org/drawingml/2006/main">
+          <a:p>
             <a:r>
               <a:t/>
             </a:r>
           </a:p>
-          <a:p xmlns:a="http://schemas.openxmlformats.org/drawingml/2006/main">
-            <a:r>
-              <a:t>LECTURER CUE</a:t>
-            </a:r>
-          </a:p>
-          <a:p xmlns:a="http://schemas.openxmlformats.org/drawingml/2006/main">
-            <a:r>
-              <a:t>Each student can explain one decision they personally worked on and point to its evidence.</a:t>
-            </a:r>
-          </a:p>
-          <a:p xmlns:a="http://schemas.openxmlformats.org/drawingml/2006/main">
-            <a:r>
-              <a:t/>
-            </a:r>
-          </a:p>
-          <a:p xmlns:a="http://schemas.openxmlformats.org/drawingml/2006/main">
-            <a:r>
-              <a:t>TEACHING MODE</a:t>
-            </a:r>
-          </a:p>
-          <a:p xmlns:a="http://schemas.openxmlformats.org/drawingml/2006/main">
-            <a:r>
-              <a:t>Demonstrate first. Read each new symbol aloud, trace the values and compare the shown output. Learners repeat worked examples individually after class.</a:t>
-            </a:r>
-          </a:p>
-          <a:p xmlns:a="http://schemas.openxmlformats.org/drawingml/2006/main">
-            <a:r>
-              <a:t/>
-            </a:r>
-          </a:p>
-          <a:p xmlns:a="http://schemas.openxmlformats.org/drawingml/2006/main">
-            <a:r>
-              <a:t>NEXT</a:t>
-            </a:r>
-          </a:p>
-          <a:p xmlns:a="http://schemas.openxmlformats.org/drawingml/2006/main">
-            <a:r>
-              <a:t>Your evidence.</a:t>
-            </a:r>
-          </a:p>
-          <a:p xmlns:a="http://schemas.openxmlformats.org/drawingml/2006/main">
-            <a:r>
-              <a:t/>
-            </a:r>
-          </a:p>
-          <a:p xmlns:a="http://schemas.openxmlformats.org/drawingml/2006/main">
-            <a:r>
-              <a:t>REFERENCES</a:t>
-            </a:r>
-          </a:p>
-          <a:p xmlns:a="http://schemas.openxmlformats.org/drawingml/2006/main">
-            <a:r>
-              <a:t/>
+          <a:p>
+            <a:r>
+              <a:t>Continue to</a:t>
+            </a:r>
+          </a:p>
+          <a:p>
+            <a:r>
+              <a:t>Your evidence</a:t>
             </a:r>
           </a:p>
         </p:txBody>
@@ -4649,7 +4244,7 @@
         <p:nvSpPr>
           <p:cNvPr id="4" name="Slide Number Placeholder 3"/>
           <p:cNvSpPr>
-            <a:spLocks xmlns:a="http://schemas.openxmlformats.org/drawingml/2006/main" noGrp="1"/>
+            <a:spLocks noGrp="1"/>
           </p:cNvSpPr>
           <p:nvPr>
             <p:ph type="sldNum" idx="5"/>
@@ -4657,21 +4252,21 @@
         </p:nvSpPr>
         <p:spPr/>
         <p:txBody>
-          <a:bodyPr xmlns:a="http://schemas.openxmlformats.org/drawingml/2006/main"/>
-          <a:lstStyle xmlns:a="http://schemas.openxmlformats.org/drawingml/2006/main"/>
-          <a:p xmlns:a="http://schemas.openxmlformats.org/drawingml/2006/main"/>
+          <a:bodyPr/>
+          <a:lstStyle/>
+          <a:p/>
         </p:txBody>
       </p:sp>
     </p:spTree>
   </p:cSld>
   <p:clrMapOvr>
-    <a:masterClrMapping xmlns:a="http://schemas.openxmlformats.org/drawingml/2006/main"/>
+    <a:masterClrMapping/>
   </p:clrMapOvr>
 </p:notes>
 </file>
 
 <file path=ppt/notesSlides/notesSlide9.xml><?xml version="1.0" encoding="utf-8"?>
-<p:notes xmlns:p="http://schemas.openxmlformats.org/presentationml/2006/main">
+<p:notes xmlns:a="http://schemas.openxmlformats.org/drawingml/2006/main" xmlns:p="http://schemas.openxmlformats.org/presentationml/2006/main">
   <p:cSld>
     <p:spTree>
       <p:nvGrpSpPr>
@@ -4680,13 +4275,13 @@
         <p:nvPr/>
       </p:nvGrpSpPr>
       <p:grpSpPr>
-        <a:xfrm xmlns:a="http://schemas.openxmlformats.org/drawingml/2006/main"/>
+        <a:xfrm/>
       </p:grpSpPr>
       <p:sp>
         <p:nvSpPr>
           <p:cNvPr id="2" name="Slide Image Placeholder 1"/>
           <p:cNvSpPr>
-            <a:spLocks xmlns:a="http://schemas.openxmlformats.org/drawingml/2006/main" noGrp="1"/>
+            <a:spLocks noGrp="1"/>
           </p:cNvSpPr>
           <p:nvPr>
             <p:ph type="sldImg" idx="0"/>
@@ -4698,7 +4293,7 @@
         <p:nvSpPr>
           <p:cNvPr id="3" name="Notes Placeholder 2"/>
           <p:cNvSpPr>
-            <a:spLocks xmlns:a="http://schemas.openxmlformats.org/drawingml/2006/main" noGrp="1"/>
+            <a:spLocks noGrp="1"/>
           </p:cNvSpPr>
           <p:nvPr>
             <p:ph type="body" idx="1"/>
@@ -4706,126 +4301,111 @@
         </p:nvSpPr>
         <p:spPr/>
         <p:txBody>
-          <a:bodyPr xmlns:a="http://schemas.openxmlformats.org/drawingml/2006/main"/>
-          <a:lstStyle xmlns:a="http://schemas.openxmlformats.org/drawingml/2006/main"/>
-          <a:p xmlns:a="http://schemas.openxmlformats.org/drawingml/2006/main">
-            <a:r>
-              <a:t>PURPOSE</a:t>
-            </a:r>
-          </a:p>
-          <a:p xmlns:a="http://schemas.openxmlformats.org/drawingml/2006/main">
+          <a:bodyPr/>
+          <a:lstStyle/>
+          <a:p>
             <a:r>
               <a:t>Your evidence</a:t>
             </a:r>
           </a:p>
-          <a:p xmlns:a="http://schemas.openxmlformats.org/drawingml/2006/main">
+          <a:p>
+            <a:r>
+              <a:t>CML3112, Week 15, slide 9</a:t>
+            </a:r>
+          </a:p>
+          <a:p>
             <a:r>
               <a:t/>
             </a:r>
           </a:p>
-          <a:p xmlns:a="http://schemas.openxmlformats.org/drawingml/2006/main">
-            <a:r>
-              <a:t>CONNECT</a:t>
-            </a:r>
-          </a:p>
-          <a:p xmlns:a="http://schemas.openxmlformats.org/drawingml/2006/main">
-            <a:r>
-              <a:t>Previous slide: Preparation checkpoint.</a:t>
-            </a:r>
-          </a:p>
-          <a:p xmlns:a="http://schemas.openxmlformats.org/drawingml/2006/main">
+          <a:p>
+            <a:r>
+              <a:t>Explanation to give</a:t>
+            </a:r>
+          </a:p>
+          <a:p>
+            <a:r>
+              <a:t>The team project and the individual DEMO evidence have separate purposes. Each learner submits their own explanation of decisions and reflection on learning.</a:t>
+            </a:r>
+          </a:p>
+          <a:p>
             <a:r>
               <a:t/>
             </a:r>
           </a:p>
-          <a:p xmlns:a="http://schemas.openxmlformats.org/drawingml/2006/main">
-            <a:r>
-              <a:t>EXPLAIN</a:t>
-            </a:r>
-          </a:p>
-          <a:p xmlns:a="http://schemas.openxmlformats.org/drawingml/2006/main">
+          <a:p>
+            <a:r>
+              <a:t>Worked illustration / lecturer answer</a:t>
+            </a:r>
+          </a:p>
+          <a:p>
+            <a:r>
+              <a:t>A defence points to specific cells or results in the project. A reflection describes changed understanding, remaining difficulties and the required Semester 2 goals.</a:t>
+            </a:r>
+          </a:p>
+          <a:p>
+            <a:r>
+              <a:t/>
+            </a:r>
+          </a:p>
+          <a:p>
+            <a:r>
+              <a:t>Misconception to address</a:t>
+            </a:r>
+          </a:p>
+          <a:p>
+            <a:r>
+              <a:t>Do not submit one generic team reflection for everybody. Follow the DEMO guide’s presentation and written-document requirements.</a:t>
+            </a:r>
+          </a:p>
+          <a:p>
+            <a:r>
+              <a:t/>
+            </a:r>
+          </a:p>
+          <a:p>
+            <a:r>
+              <a:t>On this slide</a:t>
+            </a:r>
+          </a:p>
+          <a:p>
             <a:r>
               <a:t>Use the published project and DEMO requirements.</a:t>
             </a:r>
           </a:p>
-          <a:p xmlns:a="http://schemas.openxmlformats.org/drawingml/2006/main">
+          <a:p>
             <a:r>
               <a:t/>
             </a:r>
           </a:p>
-          <a:p xmlns:a="http://schemas.openxmlformats.org/drawingml/2006/main">
+          <a:p>
             <a:r>
               <a:t>Each individual submits their own typed defence and reflection through the designated route.</a:t>
             </a:r>
           </a:p>
-          <a:p xmlns:a="http://schemas.openxmlformats.org/drawingml/2006/main">
+          <a:p>
             <a:r>
               <a:t/>
             </a:r>
           </a:p>
-          <a:p xmlns:a="http://schemas.openxmlformats.org/drawingml/2006/main">
+          <a:p>
             <a:r>
               <a:t>Submit your own written defence and reflection as instructed.</a:t>
             </a:r>
           </a:p>
-          <a:p xmlns:a="http://schemas.openxmlformats.org/drawingml/2006/main">
+          <a:p>
             <a:r>
               <a:t/>
             </a:r>
           </a:p>
-          <a:p xmlns:a="http://schemas.openxmlformats.org/drawingml/2006/main">
-            <a:r>
-              <a:t>LECTURER CUE</a:t>
-            </a:r>
-          </a:p>
-          <a:p xmlns:a="http://schemas.openxmlformats.org/drawingml/2006/main">
-            <a:r>
-              <a:t>Use the published project and DEMO requirements. Each individual submits their own typed defence and reflection through the designated route. Live questioning and peer comments support learning; they are not a new manual marking workload.</a:t>
-            </a:r>
-          </a:p>
-          <a:p xmlns:a="http://schemas.openxmlformats.org/drawingml/2006/main">
-            <a:r>
-              <a:t/>
-            </a:r>
-          </a:p>
-          <a:p xmlns:a="http://schemas.openxmlformats.org/drawingml/2006/main">
-            <a:r>
-              <a:t>TEACHING MODE</a:t>
-            </a:r>
-          </a:p>
-          <a:p xmlns:a="http://schemas.openxmlformats.org/drawingml/2006/main">
-            <a:r>
-              <a:t>Demonstrate first. Read each new symbol aloud, trace the values and compare the shown output. Learners repeat worked examples individually after class.</a:t>
-            </a:r>
-          </a:p>
-          <a:p xmlns:a="http://schemas.openxmlformats.org/drawingml/2006/main">
-            <a:r>
-              <a:t/>
-            </a:r>
-          </a:p>
-          <a:p xmlns:a="http://schemas.openxmlformats.org/drawingml/2006/main">
-            <a:r>
-              <a:t>NEXT</a:t>
-            </a:r>
-          </a:p>
-          <a:p xmlns:a="http://schemas.openxmlformats.org/drawingml/2006/main">
-            <a:r>
-              <a:t>Engineering ML project.</a:t>
-            </a:r>
-          </a:p>
-          <a:p xmlns:a="http://schemas.openxmlformats.org/drawingml/2006/main">
-            <a:r>
-              <a:t/>
-            </a:r>
-          </a:p>
-          <a:p xmlns:a="http://schemas.openxmlformats.org/drawingml/2006/main">
-            <a:r>
-              <a:t>REFERENCES</a:t>
-            </a:r>
-          </a:p>
-          <a:p xmlns:a="http://schemas.openxmlformats.org/drawingml/2006/main">
-            <a:r>
-              <a:t/>
+          <a:p>
+            <a:r>
+              <a:t>Continue to</a:t>
+            </a:r>
+          </a:p>
+          <a:p>
+            <a:r>
+              <a:t>Engineering ML project</a:t>
             </a:r>
           </a:p>
         </p:txBody>
@@ -4834,7 +4414,7 @@
         <p:nvSpPr>
           <p:cNvPr id="4" name="Slide Number Placeholder 3"/>
           <p:cNvSpPr>
-            <a:spLocks xmlns:a="http://schemas.openxmlformats.org/drawingml/2006/main" noGrp="1"/>
+            <a:spLocks noGrp="1"/>
           </p:cNvSpPr>
           <p:nvPr>
             <p:ph type="sldNum" idx="5"/>
@@ -4842,15 +4422,15 @@
         </p:nvSpPr>
         <p:spPr/>
         <p:txBody>
-          <a:bodyPr xmlns:a="http://schemas.openxmlformats.org/drawingml/2006/main"/>
-          <a:lstStyle xmlns:a="http://schemas.openxmlformats.org/drawingml/2006/main"/>
-          <a:p xmlns:a="http://schemas.openxmlformats.org/drawingml/2006/main"/>
+          <a:bodyPr/>
+          <a:lstStyle/>
+          <a:p/>
         </p:txBody>
       </p:sp>
     </p:spTree>
   </p:cSld>
   <p:clrMapOvr>
-    <a:masterClrMapping xmlns:a="http://schemas.openxmlformats.org/drawingml/2006/main"/>
+    <a:masterClrMapping/>
   </p:clrMapOvr>
 </p:notes>
 </file>
@@ -11470,11 +11050,11 @@
 </file>
 
 <file path=ppt/slides/slide16.xml><?xml version="1.0" encoding="utf-8"?>
-<p:sld xmlns:p="http://schemas.openxmlformats.org/presentationml/2006/main">
+<p:sld xmlns:a="http://schemas.openxmlformats.org/drawingml/2006/main" xmlns:ns2="http://schemas.microsoft.com/office/drawing/2014/main" xmlns:ns3="http://schemas.microsoft.com/office/powerpoint/2010/main" xmlns:p="http://schemas.openxmlformats.org/presentationml/2006/main">
   <p:cSld>
     <p:bg>
       <p:bgPr>
-        <a:solidFill xmlns:a="http://schemas.openxmlformats.org/drawingml/2006/main">
+        <a:solidFill>
           <a:srgbClr val="FFFFFF"/>
         </a:solidFill>
       </p:bgPr>
@@ -11486,34 +11066,34 @@
         <p:nvPr/>
       </p:nvGrpSpPr>
       <p:grpSpPr>
-        <a:xfrm xmlns:a="http://schemas.openxmlformats.org/drawingml/2006/main"/>
+        <a:xfrm/>
       </p:grpSpPr>
       <p:sp>
         <p:nvSpPr>
           <p:cNvPr id="13" name="">
-            <a:extLst xmlns:a="http://schemas.openxmlformats.org/drawingml/2006/main">
-              <a:ext uri="{FF2B5EF4-FFF2-40B4-BE49-F238E27FC236}">
-                <a16:creationId xmlns:a16="http://schemas.microsoft.com/office/drawing/2014/main" id="{A4DEC4C1-B706-41C4-9B4C-31CD4723AC27}"/>
-              </a:ext>
-            </a:extLst>
-          </p:cNvPr>
-          <p:cNvSpPr>
-            <a:spLocks xmlns:a="http://schemas.openxmlformats.org/drawingml/2006/main" noGrp="1"/>
-          </p:cNvSpPr>
-          <p:nvPr/>
-        </p:nvSpPr>
-        <p:spPr>
-          <a:xfrm xmlns:a="http://schemas.openxmlformats.org/drawingml/2006/main">
+            <a:extLst>
+              <a:ext uri="{FF2B5EF4-FFF2-40B4-BE49-F238E27FC236}">
+                <ns2:creationId id="{A4DEC4C1-B706-41C4-9B4C-31CD4723AC27}"/>
+              </a:ext>
+            </a:extLst>
+          </p:cNvPr>
+          <p:cNvSpPr>
+            <a:spLocks noGrp="1"/>
+          </p:cNvSpPr>
+          <p:nvPr/>
+        </p:nvSpPr>
+        <p:spPr>
+          <a:xfrm>
             <a:off x="0" y="0"/>
             <a:ext cx="12191695" cy="1390650"/>
           </a:xfrm>
-          <a:prstGeom xmlns:a="http://schemas.openxmlformats.org/drawingml/2006/main" prst="rect">
-            <a:avLst/>
-          </a:prstGeom>
-          <a:solidFill xmlns:a="http://schemas.openxmlformats.org/drawingml/2006/main">
+          <a:prstGeom prst="rect">
+            <a:avLst/>
+          </a:prstGeom>
+          <a:solidFill>
             <a:srgbClr val="1C3144"/>
           </a:solidFill>
-          <a:ln xmlns:a="http://schemas.openxmlformats.org/drawingml/2006/main" w="0">
+          <a:ln w="0">
             <a:noFill/>
           </a:ln>
         </p:spPr>
@@ -11521,36 +11101,36 @@
       <p:sp>
         <p:nvSpPr>
           <p:cNvPr id="2" name="">
-            <a:extLst xmlns:a="http://schemas.openxmlformats.org/drawingml/2006/main">
-              <a:ext uri="{FF2B5EF4-FFF2-40B4-BE49-F238E27FC236}">
-                <a16:creationId xmlns:a16="http://schemas.microsoft.com/office/drawing/2014/main" id="{5DA44707-1A5E-4AC7-A751-84DABFBD07D3}"/>
-              </a:ext>
-            </a:extLst>
-          </p:cNvPr>
-          <p:cNvSpPr>
-            <a:spLocks xmlns:a="http://schemas.openxmlformats.org/drawingml/2006/main" noGrp="1"/>
-          </p:cNvSpPr>
-          <p:nvPr/>
-        </p:nvSpPr>
-        <p:spPr>
-          <a:xfrm xmlns:a="http://schemas.openxmlformats.org/drawingml/2006/main">
+            <a:extLst>
+              <a:ext uri="{FF2B5EF4-FFF2-40B4-BE49-F238E27FC236}">
+                <ns2:creationId id="{5DA44707-1A5E-4AC7-A751-84DABFBD07D3}"/>
+              </a:ext>
+            </a:extLst>
+          </p:cNvPr>
+          <p:cNvSpPr>
+            <a:spLocks noGrp="1"/>
+          </p:cNvSpPr>
+          <p:nvPr/>
+        </p:nvSpPr>
+        <p:spPr>
+          <a:xfrm>
             <a:off x="590550" y="180975"/>
             <a:ext cx="11049000" cy="285750"/>
           </a:xfrm>
-          <a:prstGeom xmlns:a="http://schemas.openxmlformats.org/drawingml/2006/main" prst="rect">
-            <a:avLst/>
-          </a:prstGeom>
-          <a:noFill xmlns:a="http://schemas.openxmlformats.org/drawingml/2006/main"/>
-          <a:ln xmlns:a="http://schemas.openxmlformats.org/drawingml/2006/main" w="0">
-            <a:noFill/>
-          </a:ln>
-        </p:spPr>
-        <p:txBody>
-          <a:bodyPr xmlns:a="http://schemas.openxmlformats.org/drawingml/2006/main">
+          <a:prstGeom prst="rect">
+            <a:avLst/>
+          </a:prstGeom>
+          <a:noFill/>
+          <a:ln w="0">
+            <a:noFill/>
+          </a:ln>
+        </p:spPr>
+        <p:txBody>
+          <a:bodyPr>
             <a:noAutofit/>
           </a:bodyPr>
-          <a:lstStyle xmlns:a="http://schemas.openxmlformats.org/drawingml/2006/main"/>
-          <a:p xmlns:a="http://schemas.openxmlformats.org/drawingml/2006/main">
+          <a:lstStyle/>
+          <a:p>
             <a:pPr>
               <a:defRPr sz="1500" b="1">
                 <a:solidFill>
@@ -11578,36 +11158,36 @@
       <p:sp>
         <p:nvSpPr>
           <p:cNvPr id="3" name="">
-            <a:extLst xmlns:a="http://schemas.openxmlformats.org/drawingml/2006/main">
-              <a:ext uri="{FF2B5EF4-FFF2-40B4-BE49-F238E27FC236}">
-                <a16:creationId xmlns:a16="http://schemas.microsoft.com/office/drawing/2014/main" id="{1E4BD0A0-4916-4EDD-9E38-B456126CF91A}"/>
-              </a:ext>
-            </a:extLst>
-          </p:cNvPr>
-          <p:cNvSpPr>
-            <a:spLocks xmlns:a="http://schemas.openxmlformats.org/drawingml/2006/main" noGrp="1"/>
-          </p:cNvSpPr>
-          <p:nvPr/>
-        </p:nvSpPr>
-        <p:spPr>
-          <a:xfrm xmlns:a="http://schemas.openxmlformats.org/drawingml/2006/main">
+            <a:extLst>
+              <a:ext uri="{FF2B5EF4-FFF2-40B4-BE49-F238E27FC236}">
+                <ns2:creationId id="{1E4BD0A0-4916-4EDD-9E38-B456126CF91A}"/>
+              </a:ext>
+            </a:extLst>
+          </p:cNvPr>
+          <p:cNvSpPr>
+            <a:spLocks noGrp="1"/>
+          </p:cNvSpPr>
+          <p:nvPr/>
+        </p:nvSpPr>
+        <p:spPr>
+          <a:xfrm>
             <a:off x="590550" y="523875"/>
             <a:ext cx="11049000" cy="809625"/>
           </a:xfrm>
-          <a:prstGeom xmlns:a="http://schemas.openxmlformats.org/drawingml/2006/main" prst="rect">
-            <a:avLst/>
-          </a:prstGeom>
-          <a:noFill xmlns:a="http://schemas.openxmlformats.org/drawingml/2006/main"/>
-          <a:ln xmlns:a="http://schemas.openxmlformats.org/drawingml/2006/main" w="0">
-            <a:noFill/>
-          </a:ln>
-        </p:spPr>
-        <p:txBody>
-          <a:bodyPr xmlns:a="http://schemas.openxmlformats.org/drawingml/2006/main">
+          <a:prstGeom prst="rect">
+            <a:avLst/>
+          </a:prstGeom>
+          <a:noFill/>
+          <a:ln w="0">
+            <a:noFill/>
+          </a:ln>
+        </p:spPr>
+        <p:txBody>
+          <a:bodyPr>
             <a:noAutofit/>
           </a:bodyPr>
-          <a:lstStyle xmlns:a="http://schemas.openxmlformats.org/drawingml/2006/main"/>
-          <a:p xmlns:a="http://schemas.openxmlformats.org/drawingml/2006/main">
+          <a:lstStyle/>
+          <a:p>
             <a:pPr>
               <a:defRPr sz="3150" b="1">
                 <a:solidFill>
@@ -11635,36 +11215,36 @@
       <p:sp>
         <p:nvSpPr>
           <p:cNvPr id="4" name="">
-            <a:extLst xmlns:a="http://schemas.openxmlformats.org/drawingml/2006/main">
-              <a:ext uri="{FF2B5EF4-FFF2-40B4-BE49-F238E27FC236}">
-                <a16:creationId xmlns:a16="http://schemas.microsoft.com/office/drawing/2014/main" id="{D6E21EB8-DFA6-4425-BE8D-C2C9EC88DA08}"/>
-              </a:ext>
-            </a:extLst>
-          </p:cNvPr>
-          <p:cNvSpPr>
-            <a:spLocks xmlns:a="http://schemas.openxmlformats.org/drawingml/2006/main" noGrp="1"/>
-          </p:cNvSpPr>
-          <p:nvPr/>
-        </p:nvSpPr>
-        <p:spPr>
-          <a:xfrm xmlns:a="http://schemas.openxmlformats.org/drawingml/2006/main">
+            <a:extLst>
+              <a:ext uri="{FF2B5EF4-FFF2-40B4-BE49-F238E27FC236}">
+                <ns2:creationId id="{D6E21EB8-DFA6-4425-BE8D-C2C9EC88DA08}"/>
+              </a:ext>
+            </a:extLst>
+          </p:cNvPr>
+          <p:cNvSpPr>
+            <a:spLocks noGrp="1"/>
+          </p:cNvSpPr>
+          <p:nvPr/>
+        </p:nvSpPr>
+        <p:spPr>
+          <a:xfrm>
             <a:off x="590550" y="1781175"/>
             <a:ext cx="619125" cy="571500"/>
           </a:xfrm>
-          <a:prstGeom xmlns:a="http://schemas.openxmlformats.org/drawingml/2006/main" prst="rect">
-            <a:avLst/>
-          </a:prstGeom>
-          <a:noFill xmlns:a="http://schemas.openxmlformats.org/drawingml/2006/main"/>
-          <a:ln xmlns:a="http://schemas.openxmlformats.org/drawingml/2006/main" w="0">
-            <a:noFill/>
-          </a:ln>
-        </p:spPr>
-        <p:txBody>
-          <a:bodyPr xmlns:a="http://schemas.openxmlformats.org/drawingml/2006/main">
+          <a:prstGeom prst="rect">
+            <a:avLst/>
+          </a:prstGeom>
+          <a:noFill/>
+          <a:ln w="0">
+            <a:noFill/>
+          </a:ln>
+        </p:spPr>
+        <p:txBody>
+          <a:bodyPr>
             <a:noAutofit/>
           </a:bodyPr>
-          <a:lstStyle xmlns:a="http://schemas.openxmlformats.org/drawingml/2006/main"/>
-          <a:p xmlns:a="http://schemas.openxmlformats.org/drawingml/2006/main">
+          <a:lstStyle/>
+          <a:p>
             <a:pPr>
               <a:defRPr sz="2550" b="1">
                 <a:solidFill>
@@ -11692,36 +11272,36 @@
       <p:sp>
         <p:nvSpPr>
           <p:cNvPr id="5" name="">
-            <a:extLst xmlns:a="http://schemas.openxmlformats.org/drawingml/2006/main">
-              <a:ext uri="{FF2B5EF4-FFF2-40B4-BE49-F238E27FC236}">
-                <a16:creationId xmlns:a16="http://schemas.microsoft.com/office/drawing/2014/main" id="{3D754A03-C0C5-4138-9D75-66ABD4623F52}"/>
-              </a:ext>
-            </a:extLst>
-          </p:cNvPr>
-          <p:cNvSpPr>
-            <a:spLocks xmlns:a="http://schemas.openxmlformats.org/drawingml/2006/main" noGrp="1"/>
-          </p:cNvSpPr>
-          <p:nvPr/>
-        </p:nvSpPr>
-        <p:spPr>
-          <a:xfrm xmlns:a="http://schemas.openxmlformats.org/drawingml/2006/main">
+            <a:extLst>
+              <a:ext uri="{FF2B5EF4-FFF2-40B4-BE49-F238E27FC236}">
+                <ns2:creationId id="{3D754A03-C0C5-4138-9D75-66ABD4623F52}"/>
+              </a:ext>
+            </a:extLst>
+          </p:cNvPr>
+          <p:cNvSpPr>
+            <a:spLocks noGrp="1"/>
+          </p:cNvSpPr>
+          <p:nvPr/>
+        </p:nvSpPr>
+        <p:spPr>
+          <a:xfrm>
             <a:off x="1381125" y="1781175"/>
             <a:ext cx="10096500" cy="992981"/>
           </a:xfrm>
-          <a:prstGeom xmlns:a="http://schemas.openxmlformats.org/drawingml/2006/main" prst="rect">
-            <a:avLst/>
-          </a:prstGeom>
-          <a:noFill xmlns:a="http://schemas.openxmlformats.org/drawingml/2006/main"/>
-          <a:ln xmlns:a="http://schemas.openxmlformats.org/drawingml/2006/main" w="0">
-            <a:noFill/>
-          </a:ln>
-        </p:spPr>
-        <p:txBody>
-          <a:bodyPr xmlns:a="http://schemas.openxmlformats.org/drawingml/2006/main">
+          <a:prstGeom prst="rect">
+            <a:avLst/>
+          </a:prstGeom>
+          <a:noFill/>
+          <a:ln w="0">
+            <a:noFill/>
+          </a:ln>
+        </p:spPr>
+        <p:txBody>
+          <a:bodyPr>
             <a:noAutofit/>
           </a:bodyPr>
-          <a:lstStyle xmlns:a="http://schemas.openxmlformats.org/drawingml/2006/main"/>
-          <a:p xmlns:a="http://schemas.openxmlformats.org/drawingml/2006/main">
+          <a:lstStyle/>
+          <a:p>
             <a:pPr>
               <a:defRPr sz="2250" b="0">
                 <a:solidFill>
@@ -11749,36 +11329,36 @@
       <p:sp>
         <p:nvSpPr>
           <p:cNvPr id="6" name="">
-            <a:extLst xmlns:a="http://schemas.openxmlformats.org/drawingml/2006/main">
-              <a:ext uri="{FF2B5EF4-FFF2-40B4-BE49-F238E27FC236}">
-                <a16:creationId xmlns:a16="http://schemas.microsoft.com/office/drawing/2014/main" id="{D6D2146D-B5DC-4015-B0CF-BB979223C740}"/>
-              </a:ext>
-            </a:extLst>
-          </p:cNvPr>
-          <p:cNvSpPr>
-            <a:spLocks xmlns:a="http://schemas.openxmlformats.org/drawingml/2006/main" noGrp="1"/>
-          </p:cNvSpPr>
-          <p:nvPr/>
-        </p:nvSpPr>
-        <p:spPr>
-          <a:xfrm xmlns:a="http://schemas.openxmlformats.org/drawingml/2006/main">
+            <a:extLst>
+              <a:ext uri="{FF2B5EF4-FFF2-40B4-BE49-F238E27FC236}">
+                <ns2:creationId id="{D6D2146D-B5DC-4015-B0CF-BB979223C740}"/>
+              </a:ext>
+            </a:extLst>
+          </p:cNvPr>
+          <p:cNvSpPr>
+            <a:spLocks noGrp="1"/>
+          </p:cNvSpPr>
+          <p:nvPr/>
+        </p:nvSpPr>
+        <p:spPr>
+          <a:xfrm>
             <a:off x="590550" y="2850356"/>
             <a:ext cx="619125" cy="571500"/>
           </a:xfrm>
-          <a:prstGeom xmlns:a="http://schemas.openxmlformats.org/drawingml/2006/main" prst="rect">
-            <a:avLst/>
-          </a:prstGeom>
-          <a:noFill xmlns:a="http://schemas.openxmlformats.org/drawingml/2006/main"/>
-          <a:ln xmlns:a="http://schemas.openxmlformats.org/drawingml/2006/main" w="0">
-            <a:noFill/>
-          </a:ln>
-        </p:spPr>
-        <p:txBody>
-          <a:bodyPr xmlns:a="http://schemas.openxmlformats.org/drawingml/2006/main">
+          <a:prstGeom prst="rect">
+            <a:avLst/>
+          </a:prstGeom>
+          <a:noFill/>
+          <a:ln w="0">
+            <a:noFill/>
+          </a:ln>
+        </p:spPr>
+        <p:txBody>
+          <a:bodyPr>
             <a:noAutofit/>
           </a:bodyPr>
-          <a:lstStyle xmlns:a="http://schemas.openxmlformats.org/drawingml/2006/main"/>
-          <a:p xmlns:a="http://schemas.openxmlformats.org/drawingml/2006/main">
+          <a:lstStyle/>
+          <a:p>
             <a:pPr>
               <a:defRPr sz="2550" b="1">
                 <a:solidFill>
@@ -11806,36 +11386,36 @@
       <p:sp>
         <p:nvSpPr>
           <p:cNvPr id="7" name="">
-            <a:extLst xmlns:a="http://schemas.openxmlformats.org/drawingml/2006/main">
-              <a:ext uri="{FF2B5EF4-FFF2-40B4-BE49-F238E27FC236}">
-                <a16:creationId xmlns:a16="http://schemas.microsoft.com/office/drawing/2014/main" id="{7AE95B90-A8AF-4000-B81E-3873DBD7DA26}"/>
-              </a:ext>
-            </a:extLst>
-          </p:cNvPr>
-          <p:cNvSpPr>
-            <a:spLocks xmlns:a="http://schemas.openxmlformats.org/drawingml/2006/main" noGrp="1"/>
-          </p:cNvSpPr>
-          <p:nvPr/>
-        </p:nvSpPr>
-        <p:spPr>
-          <a:xfrm xmlns:a="http://schemas.openxmlformats.org/drawingml/2006/main">
+            <a:extLst>
+              <a:ext uri="{FF2B5EF4-FFF2-40B4-BE49-F238E27FC236}">
+                <ns2:creationId id="{7AE95B90-A8AF-4000-B81E-3873DBD7DA26}"/>
+              </a:ext>
+            </a:extLst>
+          </p:cNvPr>
+          <p:cNvSpPr>
+            <a:spLocks noGrp="1"/>
+          </p:cNvSpPr>
+          <p:nvPr/>
+        </p:nvSpPr>
+        <p:spPr>
+          <a:xfrm>
             <a:off x="1381125" y="2850356"/>
             <a:ext cx="10096500" cy="992981"/>
           </a:xfrm>
-          <a:prstGeom xmlns:a="http://schemas.openxmlformats.org/drawingml/2006/main" prst="rect">
-            <a:avLst/>
-          </a:prstGeom>
-          <a:noFill xmlns:a="http://schemas.openxmlformats.org/drawingml/2006/main"/>
-          <a:ln xmlns:a="http://schemas.openxmlformats.org/drawingml/2006/main" w="0">
-            <a:noFill/>
-          </a:ln>
-        </p:spPr>
-        <p:txBody>
-          <a:bodyPr xmlns:a="http://schemas.openxmlformats.org/drawingml/2006/main">
+          <a:prstGeom prst="rect">
+            <a:avLst/>
+          </a:prstGeom>
+          <a:noFill/>
+          <a:ln w="0">
+            <a:noFill/>
+          </a:ln>
+        </p:spPr>
+        <p:txBody>
+          <a:bodyPr>
             <a:noAutofit/>
           </a:bodyPr>
-          <a:lstStyle xmlns:a="http://schemas.openxmlformats.org/drawingml/2006/main"/>
-          <a:p xmlns:a="http://schemas.openxmlformats.org/drawingml/2006/main">
+          <a:lstStyle/>
+          <a:p>
             <a:pPr>
               <a:defRPr sz="2250" b="0">
                 <a:solidFill>
@@ -11855,7 +11435,7 @@
                 <a:ea typeface="Calibri"/>
                 <a:cs typeface="Calibri"/>
               </a:rPr>
-              <a:t>Uncertainty and limitations stated honestly.</a:t>
+              <a:t>State uncertainty and limitations.</a:t>
             </a:r>
           </a:p>
         </p:txBody>
@@ -11863,36 +11443,36 @@
       <p:sp>
         <p:nvSpPr>
           <p:cNvPr id="8" name="">
-            <a:extLst xmlns:a="http://schemas.openxmlformats.org/drawingml/2006/main">
-              <a:ext uri="{FF2B5EF4-FFF2-40B4-BE49-F238E27FC236}">
-                <a16:creationId xmlns:a16="http://schemas.microsoft.com/office/drawing/2014/main" id="{8D96CE17-D3C5-451B-86C2-FA6DFCCC13F7}"/>
-              </a:ext>
-            </a:extLst>
-          </p:cNvPr>
-          <p:cNvSpPr>
-            <a:spLocks xmlns:a="http://schemas.openxmlformats.org/drawingml/2006/main" noGrp="1"/>
-          </p:cNvSpPr>
-          <p:nvPr/>
-        </p:nvSpPr>
-        <p:spPr>
-          <a:xfrm xmlns:a="http://schemas.openxmlformats.org/drawingml/2006/main">
+            <a:extLst>
+              <a:ext uri="{FF2B5EF4-FFF2-40B4-BE49-F238E27FC236}">
+                <ns2:creationId id="{8D96CE17-D3C5-451B-86C2-FA6DFCCC13F7}"/>
+              </a:ext>
+            </a:extLst>
+          </p:cNvPr>
+          <p:cNvSpPr>
+            <a:spLocks noGrp="1"/>
+          </p:cNvSpPr>
+          <p:nvPr/>
+        </p:nvSpPr>
+        <p:spPr>
+          <a:xfrm>
             <a:off x="590550" y="3919538"/>
             <a:ext cx="619125" cy="571500"/>
           </a:xfrm>
-          <a:prstGeom xmlns:a="http://schemas.openxmlformats.org/drawingml/2006/main" prst="rect">
-            <a:avLst/>
-          </a:prstGeom>
-          <a:noFill xmlns:a="http://schemas.openxmlformats.org/drawingml/2006/main"/>
-          <a:ln xmlns:a="http://schemas.openxmlformats.org/drawingml/2006/main" w="0">
-            <a:noFill/>
-          </a:ln>
-        </p:spPr>
-        <p:txBody>
-          <a:bodyPr xmlns:a="http://schemas.openxmlformats.org/drawingml/2006/main">
+          <a:prstGeom prst="rect">
+            <a:avLst/>
+          </a:prstGeom>
+          <a:noFill/>
+          <a:ln w="0">
+            <a:noFill/>
+          </a:ln>
+        </p:spPr>
+        <p:txBody>
+          <a:bodyPr>
             <a:noAutofit/>
           </a:bodyPr>
-          <a:lstStyle xmlns:a="http://schemas.openxmlformats.org/drawingml/2006/main"/>
-          <a:p xmlns:a="http://schemas.openxmlformats.org/drawingml/2006/main">
+          <a:lstStyle/>
+          <a:p>
             <a:pPr>
               <a:defRPr sz="2550" b="1">
                 <a:solidFill>
@@ -11920,36 +11500,36 @@
       <p:sp>
         <p:nvSpPr>
           <p:cNvPr id="9" name="">
-            <a:extLst xmlns:a="http://schemas.openxmlformats.org/drawingml/2006/main">
-              <a:ext uri="{FF2B5EF4-FFF2-40B4-BE49-F238E27FC236}">
-                <a16:creationId xmlns:a16="http://schemas.microsoft.com/office/drawing/2014/main" id="{9B8F7B41-7E14-49C7-8A8D-582124049EEE}"/>
-              </a:ext>
-            </a:extLst>
-          </p:cNvPr>
-          <p:cNvSpPr>
-            <a:spLocks xmlns:a="http://schemas.openxmlformats.org/drawingml/2006/main" noGrp="1"/>
-          </p:cNvSpPr>
-          <p:nvPr/>
-        </p:nvSpPr>
-        <p:spPr>
-          <a:xfrm xmlns:a="http://schemas.openxmlformats.org/drawingml/2006/main">
+            <a:extLst>
+              <a:ext uri="{FF2B5EF4-FFF2-40B4-BE49-F238E27FC236}">
+                <ns2:creationId id="{9B8F7B41-7E14-49C7-8A8D-582124049EEE}"/>
+              </a:ext>
+            </a:extLst>
+          </p:cNvPr>
+          <p:cNvSpPr>
+            <a:spLocks noGrp="1"/>
+          </p:cNvSpPr>
+          <p:nvPr/>
+        </p:nvSpPr>
+        <p:spPr>
+          <a:xfrm>
             <a:off x="1381125" y="3919538"/>
             <a:ext cx="10096500" cy="992981"/>
           </a:xfrm>
-          <a:prstGeom xmlns:a="http://schemas.openxmlformats.org/drawingml/2006/main" prst="rect">
-            <a:avLst/>
-          </a:prstGeom>
-          <a:noFill xmlns:a="http://schemas.openxmlformats.org/drawingml/2006/main"/>
-          <a:ln xmlns:a="http://schemas.openxmlformats.org/drawingml/2006/main" w="0">
-            <a:noFill/>
-          </a:ln>
-        </p:spPr>
-        <p:txBody>
-          <a:bodyPr xmlns:a="http://schemas.openxmlformats.org/drawingml/2006/main">
+          <a:prstGeom prst="rect">
+            <a:avLst/>
+          </a:prstGeom>
+          <a:noFill/>
+          <a:ln w="0">
+            <a:noFill/>
+          </a:ln>
+        </p:spPr>
+        <p:txBody>
+          <a:bodyPr>
             <a:noAutofit/>
           </a:bodyPr>
-          <a:lstStyle xmlns:a="http://schemas.openxmlformats.org/drawingml/2006/main"/>
-          <a:p xmlns:a="http://schemas.openxmlformats.org/drawingml/2006/main">
+          <a:lstStyle/>
+          <a:p>
             <a:pPr>
               <a:defRPr sz="2250" b="0">
                 <a:solidFill>
@@ -11977,36 +11557,36 @@
       <p:sp>
         <p:nvSpPr>
           <p:cNvPr id="10" name="">
-            <a:extLst xmlns:a="http://schemas.openxmlformats.org/drawingml/2006/main">
-              <a:ext uri="{FF2B5EF4-FFF2-40B4-BE49-F238E27FC236}">
-                <a16:creationId xmlns:a16="http://schemas.microsoft.com/office/drawing/2014/main" id="{93FEEB13-6A36-4F59-9784-122DA87C8E54}"/>
-              </a:ext>
-            </a:extLst>
-          </p:cNvPr>
-          <p:cNvSpPr>
-            <a:spLocks xmlns:a="http://schemas.openxmlformats.org/drawingml/2006/main" noGrp="1"/>
-          </p:cNvSpPr>
-          <p:nvPr/>
-        </p:nvSpPr>
-        <p:spPr>
-          <a:xfrm xmlns:a="http://schemas.openxmlformats.org/drawingml/2006/main">
+            <a:extLst>
+              <a:ext uri="{FF2B5EF4-FFF2-40B4-BE49-F238E27FC236}">
+                <ns2:creationId id="{93FEEB13-6A36-4F59-9784-122DA87C8E54}"/>
+              </a:ext>
+            </a:extLst>
+          </p:cNvPr>
+          <p:cNvSpPr>
+            <a:spLocks noGrp="1"/>
+          </p:cNvSpPr>
+          <p:nvPr/>
+        </p:nvSpPr>
+        <p:spPr>
+          <a:xfrm>
             <a:off x="590550" y="4988719"/>
             <a:ext cx="619125" cy="571500"/>
           </a:xfrm>
-          <a:prstGeom xmlns:a="http://schemas.openxmlformats.org/drawingml/2006/main" prst="rect">
-            <a:avLst/>
-          </a:prstGeom>
-          <a:noFill xmlns:a="http://schemas.openxmlformats.org/drawingml/2006/main"/>
-          <a:ln xmlns:a="http://schemas.openxmlformats.org/drawingml/2006/main" w="0">
-            <a:noFill/>
-          </a:ln>
-        </p:spPr>
-        <p:txBody>
-          <a:bodyPr xmlns:a="http://schemas.openxmlformats.org/drawingml/2006/main">
+          <a:prstGeom prst="rect">
+            <a:avLst/>
+          </a:prstGeom>
+          <a:noFill/>
+          <a:ln w="0">
+            <a:noFill/>
+          </a:ln>
+        </p:spPr>
+        <p:txBody>
+          <a:bodyPr>
             <a:noAutofit/>
           </a:bodyPr>
-          <a:lstStyle xmlns:a="http://schemas.openxmlformats.org/drawingml/2006/main"/>
-          <a:p xmlns:a="http://schemas.openxmlformats.org/drawingml/2006/main">
+          <a:lstStyle/>
+          <a:p>
             <a:pPr>
               <a:defRPr sz="2550" b="1">
                 <a:solidFill>
@@ -12034,36 +11614,36 @@
       <p:sp>
         <p:nvSpPr>
           <p:cNvPr id="11" name="">
-            <a:extLst xmlns:a="http://schemas.openxmlformats.org/drawingml/2006/main">
-              <a:ext uri="{FF2B5EF4-FFF2-40B4-BE49-F238E27FC236}">
-                <a16:creationId xmlns:a16="http://schemas.microsoft.com/office/drawing/2014/main" id="{3D23BDC2-BEC1-42DF-9E3E-FB61123C18FB}"/>
-              </a:ext>
-            </a:extLst>
-          </p:cNvPr>
-          <p:cNvSpPr>
-            <a:spLocks xmlns:a="http://schemas.openxmlformats.org/drawingml/2006/main" noGrp="1"/>
-          </p:cNvSpPr>
-          <p:nvPr/>
-        </p:nvSpPr>
-        <p:spPr>
-          <a:xfrm xmlns:a="http://schemas.openxmlformats.org/drawingml/2006/main">
+            <a:extLst>
+              <a:ext uri="{FF2B5EF4-FFF2-40B4-BE49-F238E27FC236}">
+                <ns2:creationId id="{3D23BDC2-BEC1-42DF-9E3E-FB61123C18FB}"/>
+              </a:ext>
+            </a:extLst>
+          </p:cNvPr>
+          <p:cNvSpPr>
+            <a:spLocks noGrp="1"/>
+          </p:cNvSpPr>
+          <p:nvPr/>
+        </p:nvSpPr>
+        <p:spPr>
+          <a:xfrm>
             <a:off x="1381125" y="4988719"/>
             <a:ext cx="10096500" cy="992981"/>
           </a:xfrm>
-          <a:prstGeom xmlns:a="http://schemas.openxmlformats.org/drawingml/2006/main" prst="rect">
-            <a:avLst/>
-          </a:prstGeom>
-          <a:noFill xmlns:a="http://schemas.openxmlformats.org/drawingml/2006/main"/>
-          <a:ln xmlns:a="http://schemas.openxmlformats.org/drawingml/2006/main" w="0">
-            <a:noFill/>
-          </a:ln>
-        </p:spPr>
-        <p:txBody>
-          <a:bodyPr xmlns:a="http://schemas.openxmlformats.org/drawingml/2006/main">
+          <a:prstGeom prst="rect">
+            <a:avLst/>
+          </a:prstGeom>
+          <a:noFill/>
+          <a:ln w="0">
+            <a:noFill/>
+          </a:ln>
+        </p:spPr>
+        <p:txBody>
+          <a:bodyPr>
             <a:noAutofit/>
           </a:bodyPr>
-          <a:lstStyle xmlns:a="http://schemas.openxmlformats.org/drawingml/2006/main"/>
-          <a:p xmlns:a="http://schemas.openxmlformats.org/drawingml/2006/main">
+          <a:lstStyle/>
+          <a:p>
             <a:pPr>
               <a:defRPr sz="2250" b="0">
                 <a:solidFill>
@@ -12091,36 +11671,36 @@
       <p:sp>
         <p:nvSpPr>
           <p:cNvPr id="12" name="">
-            <a:extLst xmlns:a="http://schemas.openxmlformats.org/drawingml/2006/main">
-              <a:ext uri="{FF2B5EF4-FFF2-40B4-BE49-F238E27FC236}">
-                <a16:creationId xmlns:a16="http://schemas.microsoft.com/office/drawing/2014/main" id="{8F846BFE-B68F-4EDB-9AA0-731FEA6ACF85}"/>
-              </a:ext>
-            </a:extLst>
-          </p:cNvPr>
-          <p:cNvSpPr>
-            <a:spLocks xmlns:a="http://schemas.openxmlformats.org/drawingml/2006/main" noGrp="1"/>
-          </p:cNvSpPr>
-          <p:nvPr/>
-        </p:nvSpPr>
-        <p:spPr>
-          <a:xfrm xmlns:a="http://schemas.openxmlformats.org/drawingml/2006/main">
+            <a:extLst>
+              <a:ext uri="{FF2B5EF4-FFF2-40B4-BE49-F238E27FC236}">
+                <ns2:creationId id="{8F846BFE-B68F-4EDB-9AA0-731FEA6ACF85}"/>
+              </a:ext>
+            </a:extLst>
+          </p:cNvPr>
+          <p:cNvSpPr>
+            <a:spLocks noGrp="1"/>
+          </p:cNvSpPr>
+          <p:nvPr/>
+        </p:nvSpPr>
+        <p:spPr>
+          <a:xfrm>
             <a:off x="590550" y="6524625"/>
             <a:ext cx="10810875" cy="219075"/>
           </a:xfrm>
-          <a:prstGeom xmlns:a="http://schemas.openxmlformats.org/drawingml/2006/main" prst="rect">
-            <a:avLst/>
-          </a:prstGeom>
-          <a:noFill xmlns:a="http://schemas.openxmlformats.org/drawingml/2006/main"/>
-          <a:ln xmlns:a="http://schemas.openxmlformats.org/drawingml/2006/main" w="0">
-            <a:noFill/>
-          </a:ln>
-        </p:spPr>
-        <p:txBody>
-          <a:bodyPr xmlns:a="http://schemas.openxmlformats.org/drawingml/2006/main">
+          <a:prstGeom prst="rect">
+            <a:avLst/>
+          </a:prstGeom>
+          <a:noFill/>
+          <a:ln w="0">
+            <a:noFill/>
+          </a:ln>
+        </p:spPr>
+        <p:txBody>
+          <a:bodyPr>
             <a:noAutofit/>
           </a:bodyPr>
-          <a:lstStyle xmlns:a="http://schemas.openxmlformats.org/drawingml/2006/main"/>
-          <a:p xmlns:a="http://schemas.openxmlformats.org/drawingml/2006/main">
+          <a:lstStyle/>
+          <a:p>
             <a:pPr>
               <a:defRPr sz="1200" b="0">
                 <a:solidFill>
@@ -12148,7 +11728,7 @@
     </p:spTree>
     <p:extLst>
       <p:ext uri="{BB962C8B-B14F-4D97-AF65-F5344CB8AC3E}">
-        <p14:creationId xmlns:p14="http://schemas.microsoft.com/office/powerpoint/2010/main" val="1643223871"/>
+        <ns3:creationId val="1643223871"/>
       </p:ext>
     </p:extLst>
   </p:cSld>
@@ -16657,11 +16237,11 @@
 </file>
 
 <file path=ppt/slides/slide24.xml><?xml version="1.0" encoding="utf-8"?>
-<p:sld xmlns:p="http://schemas.openxmlformats.org/presentationml/2006/main">
+<p:sld xmlns:a="http://schemas.openxmlformats.org/drawingml/2006/main" xmlns:ns2="http://schemas.microsoft.com/office/drawing/2014/main" xmlns:ns3="http://schemas.microsoft.com/office/powerpoint/2010/main" xmlns:p="http://schemas.openxmlformats.org/presentationml/2006/main">
   <p:cSld>
     <p:bg>
       <p:bgPr>
-        <a:solidFill xmlns:a="http://schemas.openxmlformats.org/drawingml/2006/main">
+        <a:solidFill>
           <a:srgbClr val="1C3144"/>
         </a:solidFill>
       </p:bgPr>
@@ -16673,41 +16253,41 @@
         <p:nvPr/>
       </p:nvGrpSpPr>
       <p:grpSpPr>
-        <a:xfrm xmlns:a="http://schemas.openxmlformats.org/drawingml/2006/main"/>
+        <a:xfrm/>
       </p:grpSpPr>
       <p:sp>
         <p:nvSpPr>
           <p:cNvPr id="7" name="">
-            <a:extLst xmlns:a="http://schemas.openxmlformats.org/drawingml/2006/main">
-              <a:ext uri="{FF2B5EF4-FFF2-40B4-BE49-F238E27FC236}">
-                <a16:creationId xmlns:a16="http://schemas.microsoft.com/office/drawing/2014/main" id="{23051577-E41C-4773-A803-45E4A12BEF1D}"/>
-              </a:ext>
-            </a:extLst>
-          </p:cNvPr>
-          <p:cNvSpPr>
-            <a:spLocks xmlns:a="http://schemas.openxmlformats.org/drawingml/2006/main" noGrp="1"/>
-          </p:cNvSpPr>
-          <p:nvPr/>
-        </p:nvSpPr>
-        <p:spPr>
-          <a:xfrm xmlns:a="http://schemas.openxmlformats.org/drawingml/2006/main">
+            <a:extLst>
+              <a:ext uri="{FF2B5EF4-FFF2-40B4-BE49-F238E27FC236}">
+                <ns2:creationId id="{23051577-E41C-4773-A803-45E4A12BEF1D}"/>
+              </a:ext>
+            </a:extLst>
+          </p:cNvPr>
+          <p:cNvSpPr>
+            <a:spLocks noGrp="1"/>
+          </p:cNvSpPr>
+          <p:nvPr/>
+        </p:nvSpPr>
+        <p:spPr>
+          <a:xfrm>
             <a:off x="590550" y="180975"/>
             <a:ext cx="11049000" cy="285750"/>
           </a:xfrm>
-          <a:prstGeom xmlns:a="http://schemas.openxmlformats.org/drawingml/2006/main" prst="rect">
-            <a:avLst/>
-          </a:prstGeom>
-          <a:noFill xmlns:a="http://schemas.openxmlformats.org/drawingml/2006/main"/>
-          <a:ln xmlns:a="http://schemas.openxmlformats.org/drawingml/2006/main" w="0">
-            <a:noFill/>
-          </a:ln>
-        </p:spPr>
-        <p:txBody>
-          <a:bodyPr xmlns:a="http://schemas.openxmlformats.org/drawingml/2006/main">
+          <a:prstGeom prst="rect">
+            <a:avLst/>
+          </a:prstGeom>
+          <a:noFill/>
+          <a:ln w="0">
+            <a:noFill/>
+          </a:ln>
+        </p:spPr>
+        <p:txBody>
+          <a:bodyPr>
             <a:noAutofit/>
           </a:bodyPr>
-          <a:lstStyle xmlns:a="http://schemas.openxmlformats.org/drawingml/2006/main"/>
-          <a:p xmlns:a="http://schemas.openxmlformats.org/drawingml/2006/main">
+          <a:lstStyle/>
+          <a:p>
             <a:pPr>
               <a:defRPr sz="1500" b="1">
                 <a:solidFill>
@@ -16735,36 +16315,36 @@
       <p:sp>
         <p:nvSpPr>
           <p:cNvPr id="2" name="">
-            <a:extLst xmlns:a="http://schemas.openxmlformats.org/drawingml/2006/main">
-              <a:ext uri="{FF2B5EF4-FFF2-40B4-BE49-F238E27FC236}">
-                <a16:creationId xmlns:a16="http://schemas.microsoft.com/office/drawing/2014/main" id="{94E2D9B8-B9BD-41EF-A942-8ECA7FC3989F}"/>
-              </a:ext>
-            </a:extLst>
-          </p:cNvPr>
-          <p:cNvSpPr>
-            <a:spLocks xmlns:a="http://schemas.openxmlformats.org/drawingml/2006/main" noGrp="1"/>
-          </p:cNvSpPr>
-          <p:nvPr/>
-        </p:nvSpPr>
-        <p:spPr>
-          <a:xfrm xmlns:a="http://schemas.openxmlformats.org/drawingml/2006/main">
+            <a:extLst>
+              <a:ext uri="{FF2B5EF4-FFF2-40B4-BE49-F238E27FC236}">
+                <ns2:creationId id="{94E2D9B8-B9BD-41EF-A942-8ECA7FC3989F}"/>
+              </a:ext>
+            </a:extLst>
+          </p:cNvPr>
+          <p:cNvSpPr>
+            <a:spLocks noGrp="1"/>
+          </p:cNvSpPr>
+          <p:nvPr/>
+        </p:nvSpPr>
+        <p:spPr>
+          <a:xfrm>
             <a:off x="590550" y="523875"/>
             <a:ext cx="11049000" cy="809625"/>
           </a:xfrm>
-          <a:prstGeom xmlns:a="http://schemas.openxmlformats.org/drawingml/2006/main" prst="rect">
-            <a:avLst/>
-          </a:prstGeom>
-          <a:noFill xmlns:a="http://schemas.openxmlformats.org/drawingml/2006/main"/>
-          <a:ln xmlns:a="http://schemas.openxmlformats.org/drawingml/2006/main" w="0">
-            <a:noFill/>
-          </a:ln>
-        </p:spPr>
-        <p:txBody>
-          <a:bodyPr xmlns:a="http://schemas.openxmlformats.org/drawingml/2006/main">
+          <a:prstGeom prst="rect">
+            <a:avLst/>
+          </a:prstGeom>
+          <a:noFill/>
+          <a:ln w="0">
+            <a:noFill/>
+          </a:ln>
+        </p:spPr>
+        <p:txBody>
+          <a:bodyPr>
             <a:noAutofit/>
           </a:bodyPr>
-          <a:lstStyle xmlns:a="http://schemas.openxmlformats.org/drawingml/2006/main"/>
-          <a:p xmlns:a="http://schemas.openxmlformats.org/drawingml/2006/main">
+          <a:lstStyle/>
+          <a:p>
             <a:pPr>
               <a:defRPr sz="3150" b="1">
                 <a:solidFill>
@@ -16792,36 +16372,36 @@
       <p:sp>
         <p:nvSpPr>
           <p:cNvPr id="3" name="">
-            <a:extLst xmlns:a="http://schemas.openxmlformats.org/drawingml/2006/main">
-              <a:ext uri="{FF2B5EF4-FFF2-40B4-BE49-F238E27FC236}">
-                <a16:creationId xmlns:a16="http://schemas.microsoft.com/office/drawing/2014/main" id="{31B47013-EA88-4636-9959-1A3F7962D714}"/>
-              </a:ext>
-            </a:extLst>
-          </p:cNvPr>
-          <p:cNvSpPr>
-            <a:spLocks xmlns:a="http://schemas.openxmlformats.org/drawingml/2006/main" noGrp="1"/>
-          </p:cNvSpPr>
-          <p:nvPr/>
-        </p:nvSpPr>
-        <p:spPr>
-          <a:xfrm xmlns:a="http://schemas.openxmlformats.org/drawingml/2006/main">
+            <a:extLst>
+              <a:ext uri="{FF2B5EF4-FFF2-40B4-BE49-F238E27FC236}">
+                <ns2:creationId id="{31B47013-EA88-4636-9959-1A3F7962D714}"/>
+              </a:ext>
+            </a:extLst>
+          </p:cNvPr>
+          <p:cNvSpPr>
+            <a:spLocks noGrp="1"/>
+          </p:cNvSpPr>
+          <p:nvPr/>
+        </p:nvSpPr>
+        <p:spPr>
+          <a:xfrm>
             <a:off x="619125" y="1619250"/>
             <a:ext cx="2857500" cy="495300"/>
           </a:xfrm>
-          <a:prstGeom xmlns:a="http://schemas.openxmlformats.org/drawingml/2006/main" prst="rect">
-            <a:avLst/>
-          </a:prstGeom>
-          <a:noFill xmlns:a="http://schemas.openxmlformats.org/drawingml/2006/main"/>
-          <a:ln xmlns:a="http://schemas.openxmlformats.org/drawingml/2006/main" w="0">
-            <a:noFill/>
-          </a:ln>
-        </p:spPr>
-        <p:txBody>
-          <a:bodyPr xmlns:a="http://schemas.openxmlformats.org/drawingml/2006/main">
+          <a:prstGeom prst="rect">
+            <a:avLst/>
+          </a:prstGeom>
+          <a:noFill/>
+          <a:ln w="0">
+            <a:noFill/>
+          </a:ln>
+        </p:spPr>
+        <p:txBody>
+          <a:bodyPr>
             <a:noAutofit/>
           </a:bodyPr>
-          <a:lstStyle xmlns:a="http://schemas.openxmlformats.org/drawingml/2006/main"/>
-          <a:p xmlns:a="http://schemas.openxmlformats.org/drawingml/2006/main">
+          <a:lstStyle/>
+          <a:p>
             <a:pPr>
               <a:defRPr sz="1950" b="1">
                 <a:solidFill>
@@ -16849,36 +16429,36 @@
       <p:sp>
         <p:nvSpPr>
           <p:cNvPr id="4" name="">
-            <a:extLst xmlns:a="http://schemas.openxmlformats.org/drawingml/2006/main">
-              <a:ext uri="{FF2B5EF4-FFF2-40B4-BE49-F238E27FC236}">
-                <a16:creationId xmlns:a16="http://schemas.microsoft.com/office/drawing/2014/main" id="{CE5A2E39-9943-4DFC-B48E-B13957BB070F}"/>
-              </a:ext>
-            </a:extLst>
-          </p:cNvPr>
-          <p:cNvSpPr>
-            <a:spLocks xmlns:a="http://schemas.openxmlformats.org/drawingml/2006/main" noGrp="1"/>
-          </p:cNvSpPr>
-          <p:nvPr/>
-        </p:nvSpPr>
-        <p:spPr>
-          <a:xfrm xmlns:a="http://schemas.openxmlformats.org/drawingml/2006/main">
+            <a:extLst>
+              <a:ext uri="{FF2B5EF4-FFF2-40B4-BE49-F238E27FC236}">
+                <ns2:creationId id="{CE5A2E39-9943-4DFC-B48E-B13957BB070F}"/>
+              </a:ext>
+            </a:extLst>
+          </p:cNvPr>
+          <p:cNvSpPr>
+            <a:spLocks noGrp="1"/>
+          </p:cNvSpPr>
+          <p:nvPr/>
+        </p:nvSpPr>
+        <p:spPr>
+          <a:xfrm>
             <a:off x="619125" y="2295525"/>
             <a:ext cx="10810875" cy="3095625"/>
           </a:xfrm>
-          <a:prstGeom xmlns:a="http://schemas.openxmlformats.org/drawingml/2006/main" prst="rect">
-            <a:avLst/>
-          </a:prstGeom>
-          <a:noFill xmlns:a="http://schemas.openxmlformats.org/drawingml/2006/main"/>
-          <a:ln xmlns:a="http://schemas.openxmlformats.org/drawingml/2006/main" w="0">
-            <a:noFill/>
-          </a:ln>
-        </p:spPr>
-        <p:txBody>
-          <a:bodyPr xmlns:a="http://schemas.openxmlformats.org/drawingml/2006/main">
+          <a:prstGeom prst="rect">
+            <a:avLst/>
+          </a:prstGeom>
+          <a:noFill/>
+          <a:ln w="0">
+            <a:noFill/>
+          </a:ln>
+        </p:spPr>
+        <p:txBody>
+          <a:bodyPr>
             <a:noAutofit/>
           </a:bodyPr>
-          <a:lstStyle xmlns:a="http://schemas.openxmlformats.org/drawingml/2006/main"/>
-          <a:p xmlns:a="http://schemas.openxmlformats.org/drawingml/2006/main">
+          <a:lstStyle/>
+          <a:p>
             <a:pPr>
               <a:defRPr sz="2850" b="0">
                 <a:solidFill>
@@ -16901,12 +16481,12 @@
               <a:t>You can point to the evidence behind one decision you personally worked on.</a:t>
             </a:r>
           </a:p>
-          <a:p xmlns:a="http://schemas.openxmlformats.org/drawingml/2006/main">
+          <a:p>
             <a:r>
               <a:t/>
             </a:r>
           </a:p>
-          <a:p xmlns:a="http://schemas.openxmlformats.org/drawingml/2006/main">
+          <a:p>
             <a:pPr>
               <a:defRPr sz="2850" b="0">
                 <a:solidFill>
@@ -16934,36 +16514,36 @@
       <p:sp>
         <p:nvSpPr>
           <p:cNvPr id="5" name="">
-            <a:extLst xmlns:a="http://schemas.openxmlformats.org/drawingml/2006/main">
-              <a:ext uri="{FF2B5EF4-FFF2-40B4-BE49-F238E27FC236}">
-                <a16:creationId xmlns:a16="http://schemas.microsoft.com/office/drawing/2014/main" id="{A38D264B-A402-40ED-9302-F2349D569F26}"/>
-              </a:ext>
-            </a:extLst>
-          </p:cNvPr>
-          <p:cNvSpPr>
-            <a:spLocks xmlns:a="http://schemas.openxmlformats.org/drawingml/2006/main" noGrp="1"/>
-          </p:cNvSpPr>
-          <p:nvPr/>
-        </p:nvSpPr>
-        <p:spPr>
-          <a:xfrm xmlns:a="http://schemas.openxmlformats.org/drawingml/2006/main">
+            <a:extLst>
+              <a:ext uri="{FF2B5EF4-FFF2-40B4-BE49-F238E27FC236}">
+                <ns2:creationId id="{A38D264B-A402-40ED-9302-F2349D569F26}"/>
+              </a:ext>
+            </a:extLst>
+          </p:cNvPr>
+          <p:cNvSpPr>
+            <a:spLocks noGrp="1"/>
+          </p:cNvSpPr>
+          <p:nvPr/>
+        </p:nvSpPr>
+        <p:spPr>
+          <a:xfrm>
             <a:off x="619125" y="5791200"/>
             <a:ext cx="10810875" cy="542925"/>
           </a:xfrm>
-          <a:prstGeom xmlns:a="http://schemas.openxmlformats.org/drawingml/2006/main" prst="rect">
-            <a:avLst/>
-          </a:prstGeom>
-          <a:noFill xmlns:a="http://schemas.openxmlformats.org/drawingml/2006/main"/>
-          <a:ln xmlns:a="http://schemas.openxmlformats.org/drawingml/2006/main" w="0">
-            <a:noFill/>
-          </a:ln>
-        </p:spPr>
-        <p:txBody>
-          <a:bodyPr xmlns:a="http://schemas.openxmlformats.org/drawingml/2006/main">
+          <a:prstGeom prst="rect">
+            <a:avLst/>
+          </a:prstGeom>
+          <a:noFill/>
+          <a:ln w="0">
+            <a:noFill/>
+          </a:ln>
+        </p:spPr>
+        <p:txBody>
+          <a:bodyPr>
             <a:noAutofit/>
           </a:bodyPr>
-          <a:lstStyle xmlns:a="http://schemas.openxmlformats.org/drawingml/2006/main"/>
-          <a:p xmlns:a="http://schemas.openxmlformats.org/drawingml/2006/main">
+          <a:lstStyle/>
+          <a:p>
             <a:pPr>
               <a:defRPr sz="1800" b="0">
                 <a:solidFill>
@@ -16983,7 +16563,7 @@
                 <a:ea typeface="Calibri"/>
                 <a:cs typeface="Calibri"/>
               </a:rPr>
-              <a:t>Point to your evidence. Save your work.</a:t>
+              <a:t>Check your answers against the example, then save your work.</a:t>
             </a:r>
           </a:p>
         </p:txBody>
@@ -16991,36 +16571,36 @@
       <p:sp>
         <p:nvSpPr>
           <p:cNvPr id="6" name="">
-            <a:extLst xmlns:a="http://schemas.openxmlformats.org/drawingml/2006/main">
-              <a:ext uri="{FF2B5EF4-FFF2-40B4-BE49-F238E27FC236}">
-                <a16:creationId xmlns:a16="http://schemas.microsoft.com/office/drawing/2014/main" id="{39193EFF-9D3F-42C8-9685-E608330EB639}"/>
-              </a:ext>
-            </a:extLst>
-          </p:cNvPr>
-          <p:cNvSpPr>
-            <a:spLocks xmlns:a="http://schemas.openxmlformats.org/drawingml/2006/main" noGrp="1"/>
-          </p:cNvSpPr>
-          <p:nvPr/>
-        </p:nvSpPr>
-        <p:spPr>
-          <a:xfrm xmlns:a="http://schemas.openxmlformats.org/drawingml/2006/main">
+            <a:extLst>
+              <a:ext uri="{FF2B5EF4-FFF2-40B4-BE49-F238E27FC236}">
+                <ns2:creationId id="{39193EFF-9D3F-42C8-9685-E608330EB639}"/>
+              </a:ext>
+            </a:extLst>
+          </p:cNvPr>
+          <p:cNvSpPr>
+            <a:spLocks noGrp="1"/>
+          </p:cNvSpPr>
+          <p:nvPr/>
+        </p:nvSpPr>
+        <p:spPr>
+          <a:xfrm>
             <a:off x="590550" y="6524625"/>
             <a:ext cx="10810875" cy="219075"/>
           </a:xfrm>
-          <a:prstGeom xmlns:a="http://schemas.openxmlformats.org/drawingml/2006/main" prst="rect">
-            <a:avLst/>
-          </a:prstGeom>
-          <a:noFill xmlns:a="http://schemas.openxmlformats.org/drawingml/2006/main"/>
-          <a:ln xmlns:a="http://schemas.openxmlformats.org/drawingml/2006/main" w="0">
-            <a:noFill/>
-          </a:ln>
-        </p:spPr>
-        <p:txBody>
-          <a:bodyPr xmlns:a="http://schemas.openxmlformats.org/drawingml/2006/main">
+          <a:prstGeom prst="rect">
+            <a:avLst/>
+          </a:prstGeom>
+          <a:noFill/>
+          <a:ln w="0">
+            <a:noFill/>
+          </a:ln>
+        </p:spPr>
+        <p:txBody>
+          <a:bodyPr>
             <a:noAutofit/>
           </a:bodyPr>
-          <a:lstStyle xmlns:a="http://schemas.openxmlformats.org/drawingml/2006/main"/>
-          <a:p xmlns:a="http://schemas.openxmlformats.org/drawingml/2006/main">
+          <a:lstStyle/>
+          <a:p>
             <a:pPr>
               <a:defRPr sz="1200" b="0">
                 <a:solidFill>
@@ -17048,7 +16628,7 @@
     </p:spTree>
     <p:extLst>
       <p:ext uri="{BB962C8B-B14F-4D97-AF65-F5344CB8AC3E}">
-        <p14:creationId xmlns:p14="http://schemas.microsoft.com/office/powerpoint/2010/main" val="1429934005"/>
+        <ns3:creationId val="1429934005"/>
       </p:ext>
     </p:extLst>
   </p:cSld>
@@ -19035,11 +18615,11 @@
 </file>
 
 <file path=ppt/slides/slide7.xml><?xml version="1.0" encoding="utf-8"?>
-<p:sld xmlns:p="http://schemas.openxmlformats.org/presentationml/2006/main">
+<p:sld xmlns:a="http://schemas.openxmlformats.org/drawingml/2006/main" xmlns:ns2="http://schemas.microsoft.com/office/drawing/2014/main" xmlns:ns3="http://schemas.microsoft.com/office/powerpoint/2010/main" xmlns:p="http://schemas.openxmlformats.org/presentationml/2006/main">
   <p:cSld>
     <p:bg>
       <p:bgPr>
-        <a:solidFill xmlns:a="http://schemas.openxmlformats.org/drawingml/2006/main">
+        <a:solidFill>
           <a:srgbClr val="FFFFFF"/>
         </a:solidFill>
       </p:bgPr>
@@ -19051,34 +18631,34 @@
         <p:nvPr/>
       </p:nvGrpSpPr>
       <p:grpSpPr>
-        <a:xfrm xmlns:a="http://schemas.openxmlformats.org/drawingml/2006/main"/>
+        <a:xfrm/>
       </p:grpSpPr>
       <p:sp>
         <p:nvSpPr>
           <p:cNvPr id="11" name="">
-            <a:extLst xmlns:a="http://schemas.openxmlformats.org/drawingml/2006/main">
-              <a:ext uri="{FF2B5EF4-FFF2-40B4-BE49-F238E27FC236}">
-                <a16:creationId xmlns:a16="http://schemas.microsoft.com/office/drawing/2014/main" id="{4EE38D61-6B28-4CF6-BF57-C2F84DDA2295}"/>
-              </a:ext>
-            </a:extLst>
-          </p:cNvPr>
-          <p:cNvSpPr>
-            <a:spLocks xmlns:a="http://schemas.openxmlformats.org/drawingml/2006/main" noGrp="1"/>
-          </p:cNvSpPr>
-          <p:nvPr/>
-        </p:nvSpPr>
-        <p:spPr>
-          <a:xfrm xmlns:a="http://schemas.openxmlformats.org/drawingml/2006/main">
+            <a:extLst>
+              <a:ext uri="{FF2B5EF4-FFF2-40B4-BE49-F238E27FC236}">
+                <ns2:creationId id="{4EE38D61-6B28-4CF6-BF57-C2F84DDA2295}"/>
+              </a:ext>
+            </a:extLst>
+          </p:cNvPr>
+          <p:cNvSpPr>
+            <a:spLocks noGrp="1"/>
+          </p:cNvSpPr>
+          <p:nvPr/>
+        </p:nvSpPr>
+        <p:spPr>
+          <a:xfrm>
             <a:off x="0" y="0"/>
             <a:ext cx="12191695" cy="1390650"/>
           </a:xfrm>
-          <a:prstGeom xmlns:a="http://schemas.openxmlformats.org/drawingml/2006/main" prst="rect">
-            <a:avLst/>
-          </a:prstGeom>
-          <a:solidFill xmlns:a="http://schemas.openxmlformats.org/drawingml/2006/main">
+          <a:prstGeom prst="rect">
+            <a:avLst/>
+          </a:prstGeom>
+          <a:solidFill>
             <a:srgbClr val="1C3144"/>
           </a:solidFill>
-          <a:ln xmlns:a="http://schemas.openxmlformats.org/drawingml/2006/main" w="0">
+          <a:ln w="0">
             <a:noFill/>
           </a:ln>
         </p:spPr>
@@ -19086,36 +18666,36 @@
       <p:sp>
         <p:nvSpPr>
           <p:cNvPr id="2" name="">
-            <a:extLst xmlns:a="http://schemas.openxmlformats.org/drawingml/2006/main">
-              <a:ext uri="{FF2B5EF4-FFF2-40B4-BE49-F238E27FC236}">
-                <a16:creationId xmlns:a16="http://schemas.microsoft.com/office/drawing/2014/main" id="{3725826C-F9D3-4190-8F6A-457223D48C23}"/>
-              </a:ext>
-            </a:extLst>
-          </p:cNvPr>
-          <p:cNvSpPr>
-            <a:spLocks xmlns:a="http://schemas.openxmlformats.org/drawingml/2006/main" noGrp="1"/>
-          </p:cNvSpPr>
-          <p:nvPr/>
-        </p:nvSpPr>
-        <p:spPr>
-          <a:xfrm xmlns:a="http://schemas.openxmlformats.org/drawingml/2006/main">
+            <a:extLst>
+              <a:ext uri="{FF2B5EF4-FFF2-40B4-BE49-F238E27FC236}">
+                <ns2:creationId id="{3725826C-F9D3-4190-8F6A-457223D48C23}"/>
+              </a:ext>
+            </a:extLst>
+          </p:cNvPr>
+          <p:cNvSpPr>
+            <a:spLocks noGrp="1"/>
+          </p:cNvSpPr>
+          <p:nvPr/>
+        </p:nvSpPr>
+        <p:spPr>
+          <a:xfrm>
             <a:off x="590550" y="180975"/>
             <a:ext cx="11049000" cy="285750"/>
           </a:xfrm>
-          <a:prstGeom xmlns:a="http://schemas.openxmlformats.org/drawingml/2006/main" prst="rect">
-            <a:avLst/>
-          </a:prstGeom>
-          <a:noFill xmlns:a="http://schemas.openxmlformats.org/drawingml/2006/main"/>
-          <a:ln xmlns:a="http://schemas.openxmlformats.org/drawingml/2006/main" w="0">
-            <a:noFill/>
-          </a:ln>
-        </p:spPr>
-        <p:txBody>
-          <a:bodyPr xmlns:a="http://schemas.openxmlformats.org/drawingml/2006/main">
+          <a:prstGeom prst="rect">
+            <a:avLst/>
+          </a:prstGeom>
+          <a:noFill/>
+          <a:ln w="0">
+            <a:noFill/>
+          </a:ln>
+        </p:spPr>
+        <p:txBody>
+          <a:bodyPr>
             <a:noAutofit/>
           </a:bodyPr>
-          <a:lstStyle xmlns:a="http://schemas.openxmlformats.org/drawingml/2006/main"/>
-          <a:p xmlns:a="http://schemas.openxmlformats.org/drawingml/2006/main">
+          <a:lstStyle/>
+          <a:p>
             <a:pPr>
               <a:defRPr sz="1500" b="1">
                 <a:solidFill>
@@ -19143,36 +18723,36 @@
       <p:sp>
         <p:nvSpPr>
           <p:cNvPr id="3" name="">
-            <a:extLst xmlns:a="http://schemas.openxmlformats.org/drawingml/2006/main">
-              <a:ext uri="{FF2B5EF4-FFF2-40B4-BE49-F238E27FC236}">
-                <a16:creationId xmlns:a16="http://schemas.microsoft.com/office/drawing/2014/main" id="{4CE5765A-5580-49A5-953B-793F47E55D75}"/>
-              </a:ext>
-            </a:extLst>
-          </p:cNvPr>
-          <p:cNvSpPr>
-            <a:spLocks xmlns:a="http://schemas.openxmlformats.org/drawingml/2006/main" noGrp="1"/>
-          </p:cNvSpPr>
-          <p:nvPr/>
-        </p:nvSpPr>
-        <p:spPr>
-          <a:xfrm xmlns:a="http://schemas.openxmlformats.org/drawingml/2006/main">
+            <a:extLst>
+              <a:ext uri="{FF2B5EF4-FFF2-40B4-BE49-F238E27FC236}">
+                <ns2:creationId id="{4CE5765A-5580-49A5-953B-793F47E55D75}"/>
+              </a:ext>
+            </a:extLst>
+          </p:cNvPr>
+          <p:cNvSpPr>
+            <a:spLocks noGrp="1"/>
+          </p:cNvSpPr>
+          <p:nvPr/>
+        </p:nvSpPr>
+        <p:spPr>
+          <a:xfrm>
             <a:off x="590550" y="523875"/>
             <a:ext cx="11049000" cy="809625"/>
           </a:xfrm>
-          <a:prstGeom xmlns:a="http://schemas.openxmlformats.org/drawingml/2006/main" prst="rect">
-            <a:avLst/>
-          </a:prstGeom>
-          <a:noFill xmlns:a="http://schemas.openxmlformats.org/drawingml/2006/main"/>
-          <a:ln xmlns:a="http://schemas.openxmlformats.org/drawingml/2006/main" w="0">
-            <a:noFill/>
-          </a:ln>
-        </p:spPr>
-        <p:txBody>
-          <a:bodyPr xmlns:a="http://schemas.openxmlformats.org/drawingml/2006/main">
+          <a:prstGeom prst="rect">
+            <a:avLst/>
+          </a:prstGeom>
+          <a:noFill/>
+          <a:ln w="0">
+            <a:noFill/>
+          </a:ln>
+        </p:spPr>
+        <p:txBody>
+          <a:bodyPr>
             <a:noAutofit/>
           </a:bodyPr>
-          <a:lstStyle xmlns:a="http://schemas.openxmlformats.org/drawingml/2006/main"/>
-          <a:p xmlns:a="http://schemas.openxmlformats.org/drawingml/2006/main">
+          <a:lstStyle/>
+          <a:p>
             <a:pPr>
               <a:defRPr sz="3150" b="1">
                 <a:solidFill>
@@ -19192,7 +18772,7 @@
                 <a:ea typeface="Calibri"/>
                 <a:cs typeface="Calibri"/>
               </a:rPr>
-              <a:t>Explain the limits honestly</a:t>
+              <a:t>Limitations of the results</a:t>
             </a:r>
           </a:p>
         </p:txBody>
@@ -19200,36 +18780,36 @@
       <p:sp>
         <p:nvSpPr>
           <p:cNvPr id="4" name="">
-            <a:extLst xmlns:a="http://schemas.openxmlformats.org/drawingml/2006/main">
-              <a:ext uri="{FF2B5EF4-FFF2-40B4-BE49-F238E27FC236}">
-                <a16:creationId xmlns:a16="http://schemas.microsoft.com/office/drawing/2014/main" id="{4B7CADB2-BC4E-4CB1-B23A-CE974CABCC6D}"/>
-              </a:ext>
-            </a:extLst>
-          </p:cNvPr>
-          <p:cNvSpPr>
-            <a:spLocks xmlns:a="http://schemas.openxmlformats.org/drawingml/2006/main" noGrp="1"/>
-          </p:cNvSpPr>
-          <p:nvPr/>
-        </p:nvSpPr>
-        <p:spPr>
-          <a:xfrm xmlns:a="http://schemas.openxmlformats.org/drawingml/2006/main">
+            <a:extLst>
+              <a:ext uri="{FF2B5EF4-FFF2-40B4-BE49-F238E27FC236}">
+                <ns2:creationId id="{4B7CADB2-BC4E-4CB1-B23A-CE974CABCC6D}"/>
+              </a:ext>
+            </a:extLst>
+          </p:cNvPr>
+          <p:cNvSpPr>
+            <a:spLocks noGrp="1"/>
+          </p:cNvSpPr>
+          <p:nvPr/>
+        </p:nvSpPr>
+        <p:spPr>
+          <a:xfrm>
             <a:off x="590550" y="1781175"/>
             <a:ext cx="619125" cy="571500"/>
           </a:xfrm>
-          <a:prstGeom xmlns:a="http://schemas.openxmlformats.org/drawingml/2006/main" prst="rect">
-            <a:avLst/>
-          </a:prstGeom>
-          <a:noFill xmlns:a="http://schemas.openxmlformats.org/drawingml/2006/main"/>
-          <a:ln xmlns:a="http://schemas.openxmlformats.org/drawingml/2006/main" w="0">
-            <a:noFill/>
-          </a:ln>
-        </p:spPr>
-        <p:txBody>
-          <a:bodyPr xmlns:a="http://schemas.openxmlformats.org/drawingml/2006/main">
+          <a:prstGeom prst="rect">
+            <a:avLst/>
+          </a:prstGeom>
+          <a:noFill/>
+          <a:ln w="0">
+            <a:noFill/>
+          </a:ln>
+        </p:spPr>
+        <p:txBody>
+          <a:bodyPr>
             <a:noAutofit/>
           </a:bodyPr>
-          <a:lstStyle xmlns:a="http://schemas.openxmlformats.org/drawingml/2006/main"/>
-          <a:p xmlns:a="http://schemas.openxmlformats.org/drawingml/2006/main">
+          <a:lstStyle/>
+          <a:p>
             <a:pPr>
               <a:defRPr sz="2550" b="1">
                 <a:solidFill>
@@ -19257,36 +18837,36 @@
       <p:sp>
         <p:nvSpPr>
           <p:cNvPr id="5" name="">
-            <a:extLst xmlns:a="http://schemas.openxmlformats.org/drawingml/2006/main">
-              <a:ext uri="{FF2B5EF4-FFF2-40B4-BE49-F238E27FC236}">
-                <a16:creationId xmlns:a16="http://schemas.microsoft.com/office/drawing/2014/main" id="{7AC1A8FD-D123-4F08-91C3-302D1ADE5EA9}"/>
-              </a:ext>
-            </a:extLst>
-          </p:cNvPr>
-          <p:cNvSpPr>
-            <a:spLocks xmlns:a="http://schemas.openxmlformats.org/drawingml/2006/main" noGrp="1"/>
-          </p:cNvSpPr>
-          <p:nvPr/>
-        </p:nvSpPr>
-        <p:spPr>
-          <a:xfrm xmlns:a="http://schemas.openxmlformats.org/drawingml/2006/main">
+            <a:extLst>
+              <a:ext uri="{FF2B5EF4-FFF2-40B4-BE49-F238E27FC236}">
+                <ns2:creationId id="{7AC1A8FD-D123-4F08-91C3-302D1ADE5EA9}"/>
+              </a:ext>
+            </a:extLst>
+          </p:cNvPr>
+          <p:cNvSpPr>
+            <a:spLocks noGrp="1"/>
+          </p:cNvSpPr>
+          <p:nvPr/>
+        </p:nvSpPr>
+        <p:spPr>
+          <a:xfrm>
             <a:off x="1381125" y="1781175"/>
             <a:ext cx="10096500" cy="1352550"/>
           </a:xfrm>
-          <a:prstGeom xmlns:a="http://schemas.openxmlformats.org/drawingml/2006/main" prst="rect">
-            <a:avLst/>
-          </a:prstGeom>
-          <a:noFill xmlns:a="http://schemas.openxmlformats.org/drawingml/2006/main"/>
-          <a:ln xmlns:a="http://schemas.openxmlformats.org/drawingml/2006/main" w="0">
-            <a:noFill/>
-          </a:ln>
-        </p:spPr>
-        <p:txBody>
-          <a:bodyPr xmlns:a="http://schemas.openxmlformats.org/drawingml/2006/main">
+          <a:prstGeom prst="rect">
+            <a:avLst/>
+          </a:prstGeom>
+          <a:noFill/>
+          <a:ln w="0">
+            <a:noFill/>
+          </a:ln>
+        </p:spPr>
+        <p:txBody>
+          <a:bodyPr>
             <a:noAutofit/>
           </a:bodyPr>
-          <a:lstStyle xmlns:a="http://schemas.openxmlformats.org/drawingml/2006/main"/>
-          <a:p xmlns:a="http://schemas.openxmlformats.org/drawingml/2006/main">
+          <a:lstStyle/>
+          <a:p>
             <a:pPr>
               <a:defRPr sz="2250" b="0">
                 <a:solidFill>
@@ -19314,36 +18894,36 @@
       <p:sp>
         <p:nvSpPr>
           <p:cNvPr id="6" name="">
-            <a:extLst xmlns:a="http://schemas.openxmlformats.org/drawingml/2006/main">
-              <a:ext uri="{FF2B5EF4-FFF2-40B4-BE49-F238E27FC236}">
-                <a16:creationId xmlns:a16="http://schemas.microsoft.com/office/drawing/2014/main" id="{E9B84C5E-9080-4257-89E6-494DCB879687}"/>
-              </a:ext>
-            </a:extLst>
-          </p:cNvPr>
-          <p:cNvSpPr>
-            <a:spLocks xmlns:a="http://schemas.openxmlformats.org/drawingml/2006/main" noGrp="1"/>
-          </p:cNvSpPr>
-          <p:nvPr/>
-        </p:nvSpPr>
-        <p:spPr>
-          <a:xfrm xmlns:a="http://schemas.openxmlformats.org/drawingml/2006/main">
+            <a:extLst>
+              <a:ext uri="{FF2B5EF4-FFF2-40B4-BE49-F238E27FC236}">
+                <ns2:creationId id="{E9B84C5E-9080-4257-89E6-494DCB879687}"/>
+              </a:ext>
+            </a:extLst>
+          </p:cNvPr>
+          <p:cNvSpPr>
+            <a:spLocks noGrp="1"/>
+          </p:cNvSpPr>
+          <p:nvPr/>
+        </p:nvSpPr>
+        <p:spPr>
+          <a:xfrm>
             <a:off x="590550" y="3209925"/>
             <a:ext cx="619125" cy="571500"/>
           </a:xfrm>
-          <a:prstGeom xmlns:a="http://schemas.openxmlformats.org/drawingml/2006/main" prst="rect">
-            <a:avLst/>
-          </a:prstGeom>
-          <a:noFill xmlns:a="http://schemas.openxmlformats.org/drawingml/2006/main"/>
-          <a:ln xmlns:a="http://schemas.openxmlformats.org/drawingml/2006/main" w="0">
-            <a:noFill/>
-          </a:ln>
-        </p:spPr>
-        <p:txBody>
-          <a:bodyPr xmlns:a="http://schemas.openxmlformats.org/drawingml/2006/main">
+          <a:prstGeom prst="rect">
+            <a:avLst/>
+          </a:prstGeom>
+          <a:noFill/>
+          <a:ln w="0">
+            <a:noFill/>
+          </a:ln>
+        </p:spPr>
+        <p:txBody>
+          <a:bodyPr>
             <a:noAutofit/>
           </a:bodyPr>
-          <a:lstStyle xmlns:a="http://schemas.openxmlformats.org/drawingml/2006/main"/>
-          <a:p xmlns:a="http://schemas.openxmlformats.org/drawingml/2006/main">
+          <a:lstStyle/>
+          <a:p>
             <a:pPr>
               <a:defRPr sz="2550" b="1">
                 <a:solidFill>
@@ -19371,36 +18951,36 @@
       <p:sp>
         <p:nvSpPr>
           <p:cNvPr id="7" name="">
-            <a:extLst xmlns:a="http://schemas.openxmlformats.org/drawingml/2006/main">
-              <a:ext uri="{FF2B5EF4-FFF2-40B4-BE49-F238E27FC236}">
-                <a16:creationId xmlns:a16="http://schemas.microsoft.com/office/drawing/2014/main" id="{E2D33E01-AA42-495F-9EA5-892C62F7023E}"/>
-              </a:ext>
-            </a:extLst>
-          </p:cNvPr>
-          <p:cNvSpPr>
-            <a:spLocks xmlns:a="http://schemas.openxmlformats.org/drawingml/2006/main" noGrp="1"/>
-          </p:cNvSpPr>
-          <p:nvPr/>
-        </p:nvSpPr>
-        <p:spPr>
-          <a:xfrm xmlns:a="http://schemas.openxmlformats.org/drawingml/2006/main">
+            <a:extLst>
+              <a:ext uri="{FF2B5EF4-FFF2-40B4-BE49-F238E27FC236}">
+                <ns2:creationId id="{E2D33E01-AA42-495F-9EA5-892C62F7023E}"/>
+              </a:ext>
+            </a:extLst>
+          </p:cNvPr>
+          <p:cNvSpPr>
+            <a:spLocks noGrp="1"/>
+          </p:cNvSpPr>
+          <p:nvPr/>
+        </p:nvSpPr>
+        <p:spPr>
+          <a:xfrm>
             <a:off x="1381125" y="3209925"/>
             <a:ext cx="10096500" cy="1352550"/>
           </a:xfrm>
-          <a:prstGeom xmlns:a="http://schemas.openxmlformats.org/drawingml/2006/main" prst="rect">
-            <a:avLst/>
-          </a:prstGeom>
-          <a:noFill xmlns:a="http://schemas.openxmlformats.org/drawingml/2006/main"/>
-          <a:ln xmlns:a="http://schemas.openxmlformats.org/drawingml/2006/main" w="0">
-            <a:noFill/>
-          </a:ln>
-        </p:spPr>
-        <p:txBody>
-          <a:bodyPr xmlns:a="http://schemas.openxmlformats.org/drawingml/2006/main">
+          <a:prstGeom prst="rect">
+            <a:avLst/>
+          </a:prstGeom>
+          <a:noFill/>
+          <a:ln w="0">
+            <a:noFill/>
+          </a:ln>
+        </p:spPr>
+        <p:txBody>
+          <a:bodyPr>
             <a:noAutofit/>
           </a:bodyPr>
-          <a:lstStyle xmlns:a="http://schemas.openxmlformats.org/drawingml/2006/main"/>
-          <a:p xmlns:a="http://schemas.openxmlformats.org/drawingml/2006/main">
+          <a:lstStyle/>
+          <a:p>
             <a:pPr>
               <a:defRPr sz="2250" b="0">
                 <a:solidFill>
@@ -19428,36 +19008,36 @@
       <p:sp>
         <p:nvSpPr>
           <p:cNvPr id="8" name="">
-            <a:extLst xmlns:a="http://schemas.openxmlformats.org/drawingml/2006/main">
-              <a:ext uri="{FF2B5EF4-FFF2-40B4-BE49-F238E27FC236}">
-                <a16:creationId xmlns:a16="http://schemas.microsoft.com/office/drawing/2014/main" id="{5A99F6D5-67B2-45DA-9A62-1E7FE0507C31}"/>
-              </a:ext>
-            </a:extLst>
-          </p:cNvPr>
-          <p:cNvSpPr>
-            <a:spLocks xmlns:a="http://schemas.openxmlformats.org/drawingml/2006/main" noGrp="1"/>
-          </p:cNvSpPr>
-          <p:nvPr/>
-        </p:nvSpPr>
-        <p:spPr>
-          <a:xfrm xmlns:a="http://schemas.openxmlformats.org/drawingml/2006/main">
+            <a:extLst>
+              <a:ext uri="{FF2B5EF4-FFF2-40B4-BE49-F238E27FC236}">
+                <ns2:creationId id="{5A99F6D5-67B2-45DA-9A62-1E7FE0507C31}"/>
+              </a:ext>
+            </a:extLst>
+          </p:cNvPr>
+          <p:cNvSpPr>
+            <a:spLocks noGrp="1"/>
+          </p:cNvSpPr>
+          <p:nvPr/>
+        </p:nvSpPr>
+        <p:spPr>
+          <a:xfrm>
             <a:off x="590550" y="4638675"/>
             <a:ext cx="619125" cy="571500"/>
           </a:xfrm>
-          <a:prstGeom xmlns:a="http://schemas.openxmlformats.org/drawingml/2006/main" prst="rect">
-            <a:avLst/>
-          </a:prstGeom>
-          <a:noFill xmlns:a="http://schemas.openxmlformats.org/drawingml/2006/main"/>
-          <a:ln xmlns:a="http://schemas.openxmlformats.org/drawingml/2006/main" w="0">
-            <a:noFill/>
-          </a:ln>
-        </p:spPr>
-        <p:txBody>
-          <a:bodyPr xmlns:a="http://schemas.openxmlformats.org/drawingml/2006/main">
+          <a:prstGeom prst="rect">
+            <a:avLst/>
+          </a:prstGeom>
+          <a:noFill/>
+          <a:ln w="0">
+            <a:noFill/>
+          </a:ln>
+        </p:spPr>
+        <p:txBody>
+          <a:bodyPr>
             <a:noAutofit/>
           </a:bodyPr>
-          <a:lstStyle xmlns:a="http://schemas.openxmlformats.org/drawingml/2006/main"/>
-          <a:p xmlns:a="http://schemas.openxmlformats.org/drawingml/2006/main">
+          <a:lstStyle/>
+          <a:p>
             <a:pPr>
               <a:defRPr sz="2550" b="1">
                 <a:solidFill>
@@ -19485,36 +19065,36 @@
       <p:sp>
         <p:nvSpPr>
           <p:cNvPr id="9" name="">
-            <a:extLst xmlns:a="http://schemas.openxmlformats.org/drawingml/2006/main">
-              <a:ext uri="{FF2B5EF4-FFF2-40B4-BE49-F238E27FC236}">
-                <a16:creationId xmlns:a16="http://schemas.microsoft.com/office/drawing/2014/main" id="{6AA0DF54-9AB7-4D74-84A5-ED6A83A2DBD7}"/>
-              </a:ext>
-            </a:extLst>
-          </p:cNvPr>
-          <p:cNvSpPr>
-            <a:spLocks xmlns:a="http://schemas.openxmlformats.org/drawingml/2006/main" noGrp="1"/>
-          </p:cNvSpPr>
-          <p:nvPr/>
-        </p:nvSpPr>
-        <p:spPr>
-          <a:xfrm xmlns:a="http://schemas.openxmlformats.org/drawingml/2006/main">
+            <a:extLst>
+              <a:ext uri="{FF2B5EF4-FFF2-40B4-BE49-F238E27FC236}">
+                <ns2:creationId id="{6AA0DF54-9AB7-4D74-84A5-ED6A83A2DBD7}"/>
+              </a:ext>
+            </a:extLst>
+          </p:cNvPr>
+          <p:cNvSpPr>
+            <a:spLocks noGrp="1"/>
+          </p:cNvSpPr>
+          <p:nvPr/>
+        </p:nvSpPr>
+        <p:spPr>
+          <a:xfrm>
             <a:off x="1381125" y="4638675"/>
             <a:ext cx="10096500" cy="1352550"/>
           </a:xfrm>
-          <a:prstGeom xmlns:a="http://schemas.openxmlformats.org/drawingml/2006/main" prst="rect">
-            <a:avLst/>
-          </a:prstGeom>
-          <a:noFill xmlns:a="http://schemas.openxmlformats.org/drawingml/2006/main"/>
-          <a:ln xmlns:a="http://schemas.openxmlformats.org/drawingml/2006/main" w="0">
-            <a:noFill/>
-          </a:ln>
-        </p:spPr>
-        <p:txBody>
-          <a:bodyPr xmlns:a="http://schemas.openxmlformats.org/drawingml/2006/main">
+          <a:prstGeom prst="rect">
+            <a:avLst/>
+          </a:prstGeom>
+          <a:noFill/>
+          <a:ln w="0">
+            <a:noFill/>
+          </a:ln>
+        </p:spPr>
+        <p:txBody>
+          <a:bodyPr>
             <a:noAutofit/>
           </a:bodyPr>
-          <a:lstStyle xmlns:a="http://schemas.openxmlformats.org/drawingml/2006/main"/>
-          <a:p xmlns:a="http://schemas.openxmlformats.org/drawingml/2006/main">
+          <a:lstStyle/>
+          <a:p>
             <a:pPr>
               <a:defRPr sz="2250" b="0">
                 <a:solidFill>
@@ -19542,36 +19122,36 @@
       <p:sp>
         <p:nvSpPr>
           <p:cNvPr id="10" name="">
-            <a:extLst xmlns:a="http://schemas.openxmlformats.org/drawingml/2006/main">
-              <a:ext uri="{FF2B5EF4-FFF2-40B4-BE49-F238E27FC236}">
-                <a16:creationId xmlns:a16="http://schemas.microsoft.com/office/drawing/2014/main" id="{18C1EE0C-9C64-4817-8139-75CE6F3FCDAF}"/>
-              </a:ext>
-            </a:extLst>
-          </p:cNvPr>
-          <p:cNvSpPr>
-            <a:spLocks xmlns:a="http://schemas.openxmlformats.org/drawingml/2006/main" noGrp="1"/>
-          </p:cNvSpPr>
-          <p:nvPr/>
-        </p:nvSpPr>
-        <p:spPr>
-          <a:xfrm xmlns:a="http://schemas.openxmlformats.org/drawingml/2006/main">
+            <a:extLst>
+              <a:ext uri="{FF2B5EF4-FFF2-40B4-BE49-F238E27FC236}">
+                <ns2:creationId id="{18C1EE0C-9C64-4817-8139-75CE6F3FCDAF}"/>
+              </a:ext>
+            </a:extLst>
+          </p:cNvPr>
+          <p:cNvSpPr>
+            <a:spLocks noGrp="1"/>
+          </p:cNvSpPr>
+          <p:nvPr/>
+        </p:nvSpPr>
+        <p:spPr>
+          <a:xfrm>
             <a:off x="590550" y="6524625"/>
             <a:ext cx="10810875" cy="219075"/>
           </a:xfrm>
-          <a:prstGeom xmlns:a="http://schemas.openxmlformats.org/drawingml/2006/main" prst="rect">
-            <a:avLst/>
-          </a:prstGeom>
-          <a:noFill xmlns:a="http://schemas.openxmlformats.org/drawingml/2006/main"/>
-          <a:ln xmlns:a="http://schemas.openxmlformats.org/drawingml/2006/main" w="0">
-            <a:noFill/>
-          </a:ln>
-        </p:spPr>
-        <p:txBody>
-          <a:bodyPr xmlns:a="http://schemas.openxmlformats.org/drawingml/2006/main">
+          <a:prstGeom prst="rect">
+            <a:avLst/>
+          </a:prstGeom>
+          <a:noFill/>
+          <a:ln w="0">
+            <a:noFill/>
+          </a:ln>
+        </p:spPr>
+        <p:txBody>
+          <a:bodyPr>
             <a:noAutofit/>
           </a:bodyPr>
-          <a:lstStyle xmlns:a="http://schemas.openxmlformats.org/drawingml/2006/main"/>
-          <a:p xmlns:a="http://schemas.openxmlformats.org/drawingml/2006/main">
+          <a:lstStyle/>
+          <a:p>
             <a:pPr>
               <a:defRPr sz="1200" b="0">
                 <a:solidFill>
@@ -19599,7 +19179,7 @@
     </p:spTree>
     <p:extLst>
       <p:ext uri="{BB962C8B-B14F-4D97-AF65-F5344CB8AC3E}">
-        <p14:creationId xmlns:p14="http://schemas.microsoft.com/office/powerpoint/2010/main" val="1748600968"/>
+        <ns3:creationId val="1748600968"/>
       </p:ext>
     </p:extLst>
   </p:cSld>

--- a/IUEA_Teaching_Plan/decks/CML3112_Week15_Design_Infrastructure.pptx
+++ b/IUEA_Teaching_Plan/decks/CML3112_Week15_Design_Infrastructure.pptx
@@ -466,62 +466,13 @@
           <a:lstStyle xmlns:a="http://schemas.openxmlformats.org/drawingml/2006/main"/>
           <a:p xmlns:a="http://schemas.openxmlformats.org/drawingml/2006/main">
             <a:r>
-              <a:t>Presenting the project and individual contribution</a:t>
+              <a:t>Welcome to Week 15, the final week of the course for Civil Engineering and Architecture. Today we present our projects and explain our own contribution to them.</a:t>
             </a:r>
           </a:p>
+          <a:p xmlns:a="http://schemas.openxmlformats.org/drawingml/2006/main"/>
           <a:p xmlns:a="http://schemas.openxmlformats.org/drawingml/2006/main">
             <a:r>
-              <a:t>Explanation to give</a:t>
-            </a:r>
-          </a:p>
-          <a:p xmlns:a="http://schemas.openxmlformats.org/drawingml/2006/main">
-            <a:r>
-              <a:t>Explain a supported finding, its limitation and the individual work behind it. The team project and each learner’s defence are distinct evidence.</a:t>
-            </a:r>
-          </a:p>
-          <a:p xmlns:a="http://schemas.openxmlformats.org/drawingml/2006/main">
-            <a:r>
-              <a:t/>
-            </a:r>
-          </a:p>
-          <a:p xmlns:a="http://schemas.openxmlformats.org/drawingml/2006/main">
-            <a:r>
-              <a:t>Worked illustration / lecturer answer</a:t>
-            </a:r>
-          </a:p>
-          <a:p xmlns:a="http://schemas.openxmlformats.org/drawingml/2006/main">
-            <a:r>
-              <a:t>A claim should point to a named plot or result, its target unit, the evaluated sample and the decision it supports. “Our model is good” supplies none of these.</a:t>
-            </a:r>
-          </a:p>
-          <a:p xmlns:a="http://schemas.openxmlformats.org/drawingml/2006/main">
-            <a:r>
-              <a:t/>
-            </a:r>
-          </a:p>
-          <a:p xmlns:a="http://schemas.openxmlformats.org/drawingml/2006/main">
-            <a:r>
-              <a:t>Misconception to address</a:t>
-            </a:r>
-          </a:p>
-          <a:p xmlns:a="http://schemas.openxmlformats.org/drawingml/2006/main">
-            <a:r>
-              <a:t>Use this as an orientation to the lesson. Terms and syntax will be unpacked on their own slides; students do not need to know them in advance.</a:t>
-            </a:r>
-          </a:p>
-          <a:p xmlns:a="http://schemas.openxmlformats.org/drawingml/2006/main">
-            <a:r>
-              <a:t/>
-            </a:r>
-          </a:p>
-          <a:p xmlns:a="http://schemas.openxmlformats.org/drawingml/2006/main">
-            <a:r>
-              <a:t>On this slide</a:t>
-            </a:r>
-          </a:p>
-          <a:p xmlns:a="http://schemas.openxmlformats.org/drawingml/2006/main">
-            <a:r>
-              <a:t>Civil Engineering and Architecture</a:t>
+              <a:t>You have spent seven weeks learning to build models and check them honestly. Today is the day to show that work with confidence. Check the slide for your day, time and room.</a:t>
             </a:r>
           </a:p>
         </p:txBody>
@@ -591,82 +542,25 @@
           <a:lstStyle xmlns:a="http://schemas.openxmlformats.org/drawingml/2006/main"/>
           <a:p xmlns:a="http://schemas.openxmlformats.org/drawingml/2006/main">
             <a:r>
-              <a:t>Your evidence</a:t>
+              <a:t>There are two kinds of evidence in this final stage. The team project is one. Your own individual defence and reflection is the other, and they have separate purposes.</a:t>
             </a:r>
           </a:p>
+          <a:p xmlns:a="http://schemas.openxmlformats.org/drawingml/2006/main"/>
           <a:p xmlns:a="http://schemas.openxmlformats.org/drawingml/2006/main">
             <a:r>
-              <a:t>Explanation to give</a:t>
+              <a:t>First, use the published project and DEMO requirements. These list exactly what is needed, so read them before you finish.</a:t>
             </a:r>
           </a:p>
+          <a:p xmlns:a="http://schemas.openxmlformats.org/drawingml/2006/main"/>
           <a:p xmlns:a="http://schemas.openxmlformats.org/drawingml/2006/main">
             <a:r>
-              <a:t>The team project and the individual DEMO evidence have separate purposes. Each learner submits their own explanation of decisions and reflection on learning.</a:t>
+              <a:t>Second, each of us submits our own typed defence and reflection through the designated route. A defence points to specific cells or results in the project. A reflection describes how our understanding changed.</a:t>
             </a:r>
           </a:p>
+          <a:p xmlns:a="http://schemas.openxmlformats.org/drawingml/2006/main"/>
           <a:p xmlns:a="http://schemas.openxmlformats.org/drawingml/2006/main">
             <a:r>
-              <a:t/>
-            </a:r>
-          </a:p>
-          <a:p xmlns:a="http://schemas.openxmlformats.org/drawingml/2006/main">
-            <a:r>
-              <a:t>Worked illustration / lecturer answer</a:t>
-            </a:r>
-          </a:p>
-          <a:p xmlns:a="http://schemas.openxmlformats.org/drawingml/2006/main">
-            <a:r>
-              <a:t>A defence points to specific cells or results in the project. A reflection describes changed understanding, remaining difficulties and the required Semester 2 goals.</a:t>
-            </a:r>
-          </a:p>
-          <a:p xmlns:a="http://schemas.openxmlformats.org/drawingml/2006/main">
-            <a:r>
-              <a:t/>
-            </a:r>
-          </a:p>
-          <a:p xmlns:a="http://schemas.openxmlformats.org/drawingml/2006/main">
-            <a:r>
-              <a:t>Misconception to address</a:t>
-            </a:r>
-          </a:p>
-          <a:p xmlns:a="http://schemas.openxmlformats.org/drawingml/2006/main">
-            <a:r>
-              <a:t>Do not submit one generic team reflection for everybody. Follow the DEMO guide’s presentation and written-document requirements.</a:t>
-            </a:r>
-          </a:p>
-          <a:p xmlns:a="http://schemas.openxmlformats.org/drawingml/2006/main">
-            <a:r>
-              <a:t/>
-            </a:r>
-          </a:p>
-          <a:p xmlns:a="http://schemas.openxmlformats.org/drawingml/2006/main">
-            <a:r>
-              <a:t>On this slide</a:t>
-            </a:r>
-          </a:p>
-          <a:p xmlns:a="http://schemas.openxmlformats.org/drawingml/2006/main">
-            <a:r>
-              <a:t>Use the published project and DEMO requirements.</a:t>
-            </a:r>
-          </a:p>
-          <a:p xmlns:a="http://schemas.openxmlformats.org/drawingml/2006/main">
-            <a:r>
-              <a:t/>
-            </a:r>
-          </a:p>
-          <a:p xmlns:a="http://schemas.openxmlformats.org/drawingml/2006/main">
-            <a:r>
-              <a:t>Each individual submits their own typed defence and reflection through the designated route.</a:t>
-            </a:r>
-          </a:p>
-          <a:p xmlns:a="http://schemas.openxmlformats.org/drawingml/2006/main">
-            <a:r>
-              <a:t/>
-            </a:r>
-          </a:p>
-          <a:p xmlns:a="http://schemas.openxmlformats.org/drawingml/2006/main">
-            <a:r>
-              <a:t>Submit your own written defence and reflection as instructed.</a:t>
+              <a:t>Third, we write these ourselves and submit them as instructed. A single team reflection copied for everyone does not show what you personally learned, so please write your own.</a:t>
             </a:r>
           </a:p>
         </p:txBody>
@@ -736,92 +630,25 @@
           <a:lstStyle xmlns:a="http://schemas.openxmlformats.org/drawingml/2006/main"/>
           <a:p xmlns:a="http://schemas.openxmlformats.org/drawingml/2006/main">
             <a:r>
-              <a:t>Engineering ML project</a:t>
+              <a:t>Now we look at what the project marking expects in the notebook.</a:t>
             </a:r>
           </a:p>
+          <a:p xmlns:a="http://schemas.openxmlformats.org/drawingml/2006/main"/>
           <a:p xmlns:a="http://schemas.openxmlformats.org/drawingml/2006/main">
             <a:r>
-              <a:t>Explanation to give</a:t>
+              <a:t>First, write your own explanation in the markdown cell headed hash hash My written evidence. A markdown cell is a notebook cell that holds ordinary text.</a:t>
             </a:r>
           </a:p>
+          <a:p xmlns:a="http://schemas.openxmlformats.org/drawingml/2006/main"/>
           <a:p xmlns:a="http://schemas.openxmlformats.org/drawingml/2006/main">
             <a:r>
-              <a:t>Show the actual markdown answer cell headed My written evidence. This is where the learner explains the choices and the supplied scenario in their own words.</a:t>
+              <a:t>Task prompts and code comments are excluded from the reasoning marks. This means the marks for reasoning come from your own sentences. Explain your choices in your own words, and connect each one to a result and its limitation.</a:t>
             </a:r>
           </a:p>
+          <a:p xmlns:a="http://schemas.openxmlformats.org/drawingml/2006/main"/>
           <a:p xmlns:a="http://schemas.openxmlformats.org/drawingml/2006/main">
             <a:r>
-              <a:t/>
-            </a:r>
-          </a:p>
-          <a:p xmlns:a="http://schemas.openxmlformats.org/drawingml/2006/main">
-            <a:r>
-              <a:t>Worked illustration / lecturer answer</a:t>
-            </a:r>
-          </a:p>
-          <a:p xmlns:a="http://schemas.openxmlformats.org/drawingml/2006/main">
-            <a:r>
-              <a:t>A useful explanation connects a decision to a named result and its limitation: for example, why a training-only median avoids using evaluation information. Describe supplied scenario figures as supplied, not as measurements the learner produced.</a:t>
-            </a:r>
-          </a:p>
-          <a:p xmlns:a="http://schemas.openxmlformats.org/drawingml/2006/main">
-            <a:r>
-              <a:t/>
-            </a:r>
-          </a:p>
-          <a:p xmlns:a="http://schemas.openxmlformats.org/drawingml/2006/main">
-            <a:r>
-              <a:t>Misconception to address</a:t>
-            </a:r>
-          </a:p>
-          <a:p xmlns:a="http://schemas.openxmlformats.org/drawingml/2006/main">
-            <a:r>
-              <a:t>Prompts and copied code comments do not substitute for the learner’s reasoning. Weekly work and tests use the notebook; projects also require their separate readable report.</a:t>
-            </a:r>
-          </a:p>
-          <a:p xmlns:a="http://schemas.openxmlformats.org/drawingml/2006/main">
-            <a:r>
-              <a:t/>
-            </a:r>
-          </a:p>
-          <a:p xmlns:a="http://schemas.openxmlformats.org/drawingml/2006/main">
-            <a:r>
-              <a:t>On this slide</a:t>
-            </a:r>
-          </a:p>
-          <a:p xmlns:a="http://schemas.openxmlformats.org/drawingml/2006/main">
-            <a:r>
-              <a:t>Write your own explanation in the markdown cell headed `## My written evidence`.</a:t>
-            </a:r>
-          </a:p>
-          <a:p xmlns:a="http://schemas.openxmlformats.org/drawingml/2006/main">
-            <a:r>
-              <a:t/>
-            </a:r>
-          </a:p>
-          <a:p xmlns:a="http://schemas.openxmlformats.org/drawingml/2006/main">
-            <a:r>
-              <a:t>Keep that heading.</a:t>
-            </a:r>
-          </a:p>
-          <a:p xmlns:a="http://schemas.openxmlformats.org/drawingml/2006/main">
-            <a:r>
-              <a:t/>
-            </a:r>
-          </a:p>
-          <a:p xmlns:a="http://schemas.openxmlformats.org/drawingml/2006/main">
-            <a:r>
-              <a:t>Task prompts and code comments are excluded from reasoning marks.</a:t>
-            </a:r>
-          </a:p>
-          <a:p xmlns:a="http://schemas.openxmlformats.org/drawingml/2006/main">
-            <a:r>
-              <a:t/>
-            </a:r>
-          </a:p>
-          <a:p xmlns:a="http://schemas.openxmlformats.org/drawingml/2006/main">
-            <a:r>
-              <a:t>Complete every original rubric criterion below, not just the checked functions.</a:t>
+              <a:t>Finally, complete every original rubric criterion shown on the next slides. Do not stop after the functions that are automatically checked, because the rubric covers the whole project.</a:t>
             </a:r>
           </a:p>
         </p:txBody>
@@ -891,92 +718,25 @@
           <a:lstStyle xmlns:a="http://schemas.openxmlformats.org/drawingml/2006/main"/>
           <a:p xmlns:a="http://schemas.openxmlformats.org/drawingml/2006/main">
             <a:r>
-              <a:t>Engineering ML project continued</a:t>
+              <a:t>Here is the next group of project requirements.</a:t>
             </a:r>
           </a:p>
+          <a:p xmlns:a="http://schemas.openxmlformats.org/drawingml/2006/main"/>
           <a:p xmlns:a="http://schemas.openxmlformats.org/drawingml/2006/main">
             <a:r>
-              <a:t>Explanation to give</a:t>
+              <a:t>Include profiling, which means a first careful look at the data to see its columns, types and gaps. Include cleaning that you can justify, charts that answer a stated question, and your engineering recommendation, where the rubric asks for them.</a:t>
             </a:r>
           </a:p>
+          <a:p xmlns:a="http://schemas.openxmlformats.org/drawingml/2006/main"/>
           <a:p xmlns:a="http://schemas.openxmlformats.org/drawingml/2006/main">
             <a:r>
-              <a:t>A chart must answer a stated question and show the actual data result. Explain what one mark represents and label both the quantity and unit before stating the finding.</a:t>
+              <a:t>Keep the raw data untouched. State units wherever you give a number. And take care to separate correlation from causation. Two things moving together does not show that one causes the other.</a:t>
             </a:r>
           </a:p>
+          <a:p xmlns:a="http://schemas.openxmlformats.org/drawingml/2006/main"/>
           <a:p xmlns:a="http://schemas.openxmlformats.org/drawingml/2006/main">
             <a:r>
-              <a:t/>
-            </a:r>
-          </a:p>
-          <a:p xmlns:a="http://schemas.openxmlformats.org/drawingml/2006/main">
-            <a:r>
-              <a:t>Worked illustration / lecturer answer</a:t>
-            </a:r>
-          </a:p>
-          <a:p xmlns:a="http://schemas.openxmlformats.org/drawingml/2006/main">
-            <a:r>
-              <a:t>A useful caption names the group or sample, the observed difference and the relevant unit. A limitation states what the plotted observations cannot establish, such as causation or performance at a new site.</a:t>
-            </a:r>
-          </a:p>
-          <a:p xmlns:a="http://schemas.openxmlformats.org/drawingml/2006/main">
-            <a:r>
-              <a:t/>
-            </a:r>
-          </a:p>
-          <a:p xmlns:a="http://schemas.openxmlformats.org/drawingml/2006/main">
-            <a:r>
-              <a:t>Misconception to address</a:t>
-            </a:r>
-          </a:p>
-          <a:p xmlns:a="http://schemas.openxmlformats.org/drawingml/2006/main">
-            <a:r>
-              <a:t>Text claiming “a chart was made” is not the required chart. Check the exact number and kinds required on this slide and in the assessment guide.</a:t>
-            </a:r>
-          </a:p>
-          <a:p xmlns:a="http://schemas.openxmlformats.org/drawingml/2006/main">
-            <a:r>
-              <a:t/>
-            </a:r>
-          </a:p>
-          <a:p xmlns:a="http://schemas.openxmlformats.org/drawingml/2006/main">
-            <a:r>
-              <a:t>On this slide</a:t>
-            </a:r>
-          </a:p>
-          <a:p xmlns:a="http://schemas.openxmlformats.org/drawingml/2006/main">
-            <a:r>
-              <a:t>Include profiling, justified cleaning, question-led charts and your engineering recommendation where required.</a:t>
-            </a:r>
-          </a:p>
-          <a:p xmlns:a="http://schemas.openxmlformats.org/drawingml/2006/main">
-            <a:r>
-              <a:t/>
-            </a:r>
-          </a:p>
-          <a:p xmlns:a="http://schemas.openxmlformats.org/drawingml/2006/main">
-            <a:r>
-              <a:t>Keep raw data.</a:t>
-            </a:r>
-          </a:p>
-          <a:p xmlns:a="http://schemas.openxmlformats.org/drawingml/2006/main">
-            <a:r>
-              <a:t/>
-            </a:r>
-          </a:p>
-          <a:p xmlns:a="http://schemas.openxmlformats.org/drawingml/2006/main">
-            <a:r>
-              <a:t>State units and distinguish correlation from causation.</a:t>
-            </a:r>
-          </a:p>
-          <a:p xmlns:a="http://schemas.openxmlformats.org/drawingml/2006/main">
-            <a:r>
-              <a:t/>
-            </a:r>
-          </a:p>
-          <a:p xmlns:a="http://schemas.openxmlformats.org/drawingml/2006/main">
-            <a:r>
-              <a:t>Charts must be actual labelled figures in the notebook, not claims that charts exist.</a:t>
+              <a:t>Finally, charts must be real, labelled figures in the notebook. Writing a sentence that says a chart exists will not earn the marks. The chart itself must appear, with labelled axes.</a:t>
             </a:r>
           </a:p>
         </p:txBody>
@@ -1046,92 +806,31 @@
           <a:lstStyle xmlns:a="http://schemas.openxmlformats.org/drawingml/2006/main"/>
           <a:p xmlns:a="http://schemas.openxmlformats.org/drawingml/2006/main">
             <a:r>
-              <a:t>Engineering ML project continued</a:t>
+              <a:t>Next we look at the first marking criterion, and a few related requirements.</a:t>
             </a:r>
           </a:p>
+          <a:p xmlns:a="http://schemas.openxmlformats.org/drawingml/2006/main"/>
           <a:p xmlns:a="http://schemas.openxmlformats.org/drawingml/2006/main">
             <a:r>
-              <a:t>Explanation to give</a:t>
+              <a:t>Include captions on your charts, and a separate readable report as a DOCX or PDF file.</a:t>
             </a:r>
           </a:p>
+          <a:p xmlns:a="http://schemas.openxmlformats.org/drawingml/2006/main"/>
           <a:p xmlns:a="http://schemas.openxmlformats.org/drawingml/2006/main">
             <a:r>
-              <a:t>Bound the proposed engineering problem: identify the decision, intended users, operating setting and quantity or class to predict. Explain why the target supports that decision.</a:t>
+              <a:t>Problem definition carries fifteen marks in total. The engineering problem should be real, specific and bounded. A broad theme such as AI for buildings is too wide. Name the decision, the users and the setting.</a:t>
             </a:r>
           </a:p>
+          <a:p xmlns:a="http://schemas.openxmlformats.org/drawingml/2006/main"/>
           <a:p xmlns:a="http://schemas.openxmlformats.org/drawingml/2006/main">
             <a:r>
-              <a:t/>
+              <a:t>The machine-learning task should follow correctly from that problem. If the decision needs a number, the task is regression. If it needs a category, the task is classification.</a:t>
             </a:r>
           </a:p>
+          <a:p xmlns:a="http://schemas.openxmlformats.org/drawingml/2006/main"/>
           <a:p xmlns:a="http://schemas.openxmlformats.org/drawingml/2006/main">
             <a:r>
-              <a:t>Worked illustration / lecturer answer</a:t>
-            </a:r>
-          </a:p>
-          <a:p xmlns:a="http://schemas.openxmlformats.org/drawingml/2006/main">
-            <a:r>
-              <a:t>A target should be chosen because knowing it helps the decision, not merely because it is a convenient numeric column in the file.</a:t>
-            </a:r>
-          </a:p>
-          <a:p xmlns:a="http://schemas.openxmlformats.org/drawingml/2006/main">
-            <a:r>
-              <a:t/>
-            </a:r>
-          </a:p>
-          <a:p xmlns:a="http://schemas.openxmlformats.org/drawingml/2006/main">
-            <a:r>
-              <a:t>Misconception to address</a:t>
-            </a:r>
-          </a:p>
-          <a:p xmlns:a="http://schemas.openxmlformats.org/drawingml/2006/main">
-            <a:r>
-              <a:t>A broad theme such as “AI for buildings” does not yet specify a model task. The project report must make the target and intended use explicit.</a:t>
-            </a:r>
-          </a:p>
-          <a:p xmlns:a="http://schemas.openxmlformats.org/drawingml/2006/main">
-            <a:r>
-              <a:t/>
-            </a:r>
-          </a:p>
-          <a:p xmlns:a="http://schemas.openxmlformats.org/drawingml/2006/main">
-            <a:r>
-              <a:t>On this slide</a:t>
-            </a:r>
-          </a:p>
-          <a:p xmlns:a="http://schemas.openxmlformats.org/drawingml/2006/main">
-            <a:r>
-              <a:t>Include captions and a separate readable DOCX/PDF report.</a:t>
-            </a:r>
-          </a:p>
-          <a:p xmlns:a="http://schemas.openxmlformats.org/drawingml/2006/main">
-            <a:r>
-              <a:t/>
-            </a:r>
-          </a:p>
-          <a:p xmlns:a="http://schemas.openxmlformats.org/drawingml/2006/main">
-            <a:r>
-              <a:t>Problem definition (15.0 total): The engineering problem is real, specific and bounded.</a:t>
-            </a:r>
-          </a:p>
-          <a:p xmlns:a="http://schemas.openxmlformats.org/drawingml/2006/main">
-            <a:r>
-              <a:t/>
-            </a:r>
-          </a:p>
-          <a:p xmlns:a="http://schemas.openxmlformats.org/drawingml/2006/main">
-            <a:r>
-              <a:t>The ML task is correctly derived from it.</a:t>
-            </a:r>
-          </a:p>
-          <a:p xmlns:a="http://schemas.openxmlformats.org/drawingml/2006/main">
-            <a:r>
-              <a:t/>
-            </a:r>
-          </a:p>
-          <a:p xmlns:a="http://schemas.openxmlformats.org/drawingml/2006/main">
-            <a:r>
-              <a:t>The target variable is justified, not merely available.</a:t>
+              <a:t>And the target variable, which is the thing we predict, should be justified. We choose it because knowing it helps the decision, and its mere presence in the file is not a good enough reason.</a:t>
             </a:r>
           </a:p>
         </p:txBody>
@@ -1201,92 +900,25 @@
           <a:lstStyle xmlns:a="http://schemas.openxmlformats.org/drawingml/2006/main"/>
           <a:p xmlns:a="http://schemas.openxmlformats.org/drawingml/2006/main">
             <a:r>
-              <a:t>Engineering ML project continued</a:t>
+              <a:t>This slide covers two criteria.</a:t>
             </a:r>
           </a:p>
+          <a:p xmlns:a="http://schemas.openxmlformats.org/drawingml/2006/main"/>
           <a:p xmlns:a="http://schemas.openxmlformats.org/drawingml/2006/main">
             <a:r>
-              <a:t>Explanation to give</a:t>
+              <a:t>Data understanding carries fifteen marks in total. State where the data came from, which is its provenance, what licence allows you to use it, and how it was collected. If the data are synthetic, say so.</a:t>
             </a:r>
           </a:p>
+          <a:p xmlns:a="http://schemas.openxmlformats.org/drawingml/2006/main"/>
           <a:p xmlns:a="http://schemas.openxmlformats.org/drawingml/2006/main">
             <a:r>
-              <a:t>Problem framing begins with a bounded engineering decision and a defined target. Provenance explains where observations came from; a licence states what reuse is allowed.</a:t>
+              <a:t>Then show the defects you found, such as missing values or impossible readings, and handle each one with a reason. Acknowledge the limitations of the data before any modelling begins, so the reader knows what to be careful about.</a:t>
             </a:r>
           </a:p>
+          <a:p xmlns:a="http://schemas.openxmlformats.org/drawingml/2006/main"/>
           <a:p xmlns:a="http://schemas.openxmlformats.org/drawingml/2006/main">
             <a:r>
-              <a:t/>
-            </a:r>
-          </a:p>
-          <a:p xmlns:a="http://schemas.openxmlformats.org/drawingml/2006/main">
-            <a:r>
-              <a:t>Worked illustration / lecturer answer</a:t>
-            </a:r>
-          </a:p>
-          <a:p xmlns:a="http://schemas.openxmlformats.org/drawingml/2006/main">
-            <a:r>
-              <a:t>State the population, measurement period, units and who collected the data. Explain how those observations could answer the chosen question rather than merely describing an interesting file.</a:t>
-            </a:r>
-          </a:p>
-          <a:p xmlns:a="http://schemas.openxmlformats.org/drawingml/2006/main">
-            <a:r>
-              <a:t/>
-            </a:r>
-          </a:p>
-          <a:p xmlns:a="http://schemas.openxmlformats.org/drawingml/2006/main">
-            <a:r>
-              <a:t>Misconception to address</a:t>
-            </a:r>
-          </a:p>
-          <a:p xmlns:a="http://schemas.openxmlformats.org/drawingml/2006/main">
-            <a:r>
-              <a:t>Synthetic teaching data must be labelled as synthetic. A plausible story does not establish that a dataset contains the information or permissions the proposed project needs.</a:t>
-            </a:r>
-          </a:p>
-          <a:p xmlns:a="http://schemas.openxmlformats.org/drawingml/2006/main">
-            <a:r>
-              <a:t/>
-            </a:r>
-          </a:p>
-          <a:p xmlns:a="http://schemas.openxmlformats.org/drawingml/2006/main">
-            <a:r>
-              <a:t>On this slide</a:t>
-            </a:r>
-          </a:p>
-          <a:p xmlns:a="http://schemas.openxmlformats.org/drawingml/2006/main">
-            <a:r>
-              <a:t>Data understanding (15.0 total): Provenance, licence and collection method stated.</a:t>
-            </a:r>
-          </a:p>
-          <a:p xmlns:a="http://schemas.openxmlformats.org/drawingml/2006/main">
-            <a:r>
-              <a:t/>
-            </a:r>
-          </a:p>
-          <a:p xmlns:a="http://schemas.openxmlformats.org/drawingml/2006/main">
-            <a:r>
-              <a:t>Defects found and handled with justification.</a:t>
-            </a:r>
-          </a:p>
-          <a:p xmlns:a="http://schemas.openxmlformats.org/drawingml/2006/main">
-            <a:r>
-              <a:t/>
-            </a:r>
-          </a:p>
-          <a:p xmlns:a="http://schemas.openxmlformats.org/drawingml/2006/main">
-            <a:r>
-              <a:t>Limitations of the data acknowledged before any modelling.</a:t>
-            </a:r>
-          </a:p>
-          <a:p xmlns:a="http://schemas.openxmlformats.org/drawingml/2006/main">
-            <a:r>
-              <a:t/>
-            </a:r>
-          </a:p>
-          <a:p xmlns:a="http://schemas.openxmlformats.org/drawingml/2006/main">
-            <a:r>
-              <a:t>Methodology (20.0 total): Appropriate models chosen and compared under one protocol.</a:t>
+              <a:t>Methodology carries twenty marks in total. Choose appropriate models and compare them under one protocol. That means the same split, the same metric and the same preparation rules for every model. A fair comparison lets the reader trust which model is better.</a:t>
             </a:r>
           </a:p>
         </p:txBody>
@@ -1356,92 +988,19 @@
           <a:lstStyle xmlns:a="http://schemas.openxmlformats.org/drawingml/2006/main"/>
           <a:p xmlns:a="http://schemas.openxmlformats.org/drawingml/2006/main">
             <a:r>
-              <a:t>Engineering ML project continued</a:t>
+              <a:t>Let us finish the methodology criterion and then move to engineering reasoning.</a:t>
             </a:r>
           </a:p>
+          <a:p xmlns:a="http://schemas.openxmlformats.org/drawingml/2006/main"/>
           <a:p xmlns:a="http://schemas.openxmlformats.org/drawingml/2006/main">
             <a:r>
-              <a:t>Explanation to give</a:t>
+              <a:t>Show the pipeline you used. A pipeline chains preparation steps and the model into one ordered process, so the steps run the same way every time. Handle hyperparameters sensibly. Those are settings, such as tree depth, which we choose before training. And explain your choices. Each default you accepted or setting you changed should have a short reason.</a:t>
             </a:r>
           </a:p>
+          <a:p xmlns:a="http://schemas.openxmlformats.org/drawingml/2006/main"/>
           <a:p xmlns:a="http://schemas.openxmlformats.org/drawingml/2006/main">
             <a:r>
-              <a:t>Explain the order: partition data using the stated protocol, fit preparation on training data, fit models, compare on validation data and leave final test data untouched until choices are fixed.</a:t>
-            </a:r>
-          </a:p>
-          <a:p xmlns:a="http://schemas.openxmlformats.org/drawingml/2006/main">
-            <a:r>
-              <a:t/>
-            </a:r>
-          </a:p>
-          <a:p xmlns:a="http://schemas.openxmlformats.org/drawingml/2006/main">
-            <a:r>
-              <a:t>Worked illustration / lecturer answer</a:t>
-            </a:r>
-          </a:p>
-          <a:p xmlns:a="http://schemas.openxmlformats.org/drawingml/2006/main">
-            <a:r>
-              <a:t>Compare models on identical held-out observations with the same metric and preprocessing rules. Each cross-validation training fold learns its own preparation values.</a:t>
-            </a:r>
-          </a:p>
-          <a:p xmlns:a="http://schemas.openxmlformats.org/drawingml/2006/main">
-            <a:r>
-              <a:t/>
-            </a:r>
-          </a:p>
-          <a:p xmlns:a="http://schemas.openxmlformats.org/drawingml/2006/main">
-            <a:r>
-              <a:t>Misconception to address</a:t>
-            </a:r>
-          </a:p>
-          <a:p xmlns:a="http://schemas.openxmlformats.org/drawingml/2006/main">
-            <a:r>
-              <a:t>A written claim of no leakage must agree with the executable split and fitting code. Follow the published execution requirement for any criterion linked to the split check.</a:t>
-            </a:r>
-          </a:p>
-          <a:p xmlns:a="http://schemas.openxmlformats.org/drawingml/2006/main">
-            <a:r>
-              <a:t/>
-            </a:r>
-          </a:p>
-          <a:p xmlns:a="http://schemas.openxmlformats.org/drawingml/2006/main">
-            <a:r>
-              <a:t>On this slide</a:t>
-            </a:r>
-          </a:p>
-          <a:p xmlns:a="http://schemas.openxmlformats.org/drawingml/2006/main">
-            <a:r>
-              <a:t>Pipeline used.</a:t>
-            </a:r>
-          </a:p>
-          <a:p xmlns:a="http://schemas.openxmlformats.org/drawingml/2006/main">
-            <a:r>
-              <a:t/>
-            </a:r>
-          </a:p>
-          <a:p xmlns:a="http://schemas.openxmlformats.org/drawingml/2006/main">
-            <a:r>
-              <a:t>Hyperparameters handled sensibly.</a:t>
-            </a:r>
-          </a:p>
-          <a:p xmlns:a="http://schemas.openxmlformats.org/drawingml/2006/main">
-            <a:r>
-              <a:t/>
-            </a:r>
-          </a:p>
-          <a:p xmlns:a="http://schemas.openxmlformats.org/drawingml/2006/main">
-            <a:r>
-              <a:t>Choices explained rather than defaulted to.</a:t>
-            </a:r>
-          </a:p>
-          <a:p xmlns:a="http://schemas.openxmlformats.org/drawingml/2006/main">
-            <a:r>
-              <a:t/>
-            </a:r>
-          </a:p>
-          <a:p xmlns:a="http://schemas.openxmlformats.org/drawingml/2006/main">
-            <a:r>
-              <a:t>Engineering reasoning (20.0 total): Domain knowledge visibly enters the work through features, banding, metric choice or interpretation.</a:t>
+              <a:t>Engineering reasoning carries twenty marks in total. Here the marker looks for domain knowledge visibly entering the work. It can enter through the features you built, through how you grouped values into bands, through the metric you picked, or through how you interpret the result. Your engineering training is exactly what makes your project stronger than a generic one.</a:t>
             </a:r>
           </a:p>
         </p:txBody>
@@ -1511,82 +1070,25 @@
           <a:lstStyle xmlns:a="http://schemas.openxmlformats.org/drawingml/2006/main"/>
           <a:p xmlns:a="http://schemas.openxmlformats.org/drawingml/2006/main">
             <a:r>
-              <a:t>Engineering ML project continued</a:t>
+              <a:t>Now two more criteria.</a:t>
             </a:r>
           </a:p>
+          <a:p xmlns:a="http://schemas.openxmlformats.org/drawingml/2006/main"/>
           <a:p xmlns:a="http://schemas.openxmlformats.org/drawingml/2006/main">
             <a:r>
-              <a:t>Explanation to give</a:t>
+              <a:t>First, we discuss the result as an engineering finding. We say what it means for the decision it supports, and we go beyond quoting a score.</a:t>
             </a:r>
           </a:p>
+          <a:p xmlns:a="http://schemas.openxmlformats.org/drawingml/2006/main"/>
           <a:p xmlns:a="http://schemas.openxmlformats.org/drawingml/2006/main">
             <a:r>
-              <a:t>Explain the order: partition data using the stated protocol, fit preparation on training data, fit models, compare on validation data and leave final test data untouched until choices are fixed.</a:t>
+              <a:t>Validation carries fifteen marks in total. Keep correct train and test discipline, so the test data stay untouched until choices are fixed. Use cross-validation, which repeats the train and test process on different parts of the data, and report the spread of the results across those repeats. Check for leakage explicitly and show that you ruled it out. Leakage means information from outside the training data slipped into the model. And justify the metric against the cost of error.</a:t>
             </a:r>
           </a:p>
+          <a:p xmlns:a="http://schemas.openxmlformats.org/drawingml/2006/main"/>
           <a:p xmlns:a="http://schemas.openxmlformats.org/drawingml/2006/main">
             <a:r>
-              <a:t/>
-            </a:r>
-          </a:p>
-          <a:p xmlns:a="http://schemas.openxmlformats.org/drawingml/2006/main">
-            <a:r>
-              <a:t>Worked illustration / lecturer answer</a:t>
-            </a:r>
-          </a:p>
-          <a:p xmlns:a="http://schemas.openxmlformats.org/drawingml/2006/main">
-            <a:r>
-              <a:t>Compare models on identical held-out observations with the same metric and preprocessing rules. Each cross-validation training fold learns its own preparation values.</a:t>
-            </a:r>
-          </a:p>
-          <a:p xmlns:a="http://schemas.openxmlformats.org/drawingml/2006/main">
-            <a:r>
-              <a:t/>
-            </a:r>
-          </a:p>
-          <a:p xmlns:a="http://schemas.openxmlformats.org/drawingml/2006/main">
-            <a:r>
-              <a:t>Misconception to address</a:t>
-            </a:r>
-          </a:p>
-          <a:p xmlns:a="http://schemas.openxmlformats.org/drawingml/2006/main">
-            <a:r>
-              <a:t>A written claim of no leakage must agree with the executable split and fitting code. Follow the published execution requirement for any criterion linked to the split check.</a:t>
-            </a:r>
-          </a:p>
-          <a:p xmlns:a="http://schemas.openxmlformats.org/drawingml/2006/main">
-            <a:r>
-              <a:t/>
-            </a:r>
-          </a:p>
-          <a:p xmlns:a="http://schemas.openxmlformats.org/drawingml/2006/main">
-            <a:r>
-              <a:t>On this slide</a:t>
-            </a:r>
-          </a:p>
-          <a:p xmlns:a="http://schemas.openxmlformats.org/drawingml/2006/main">
-            <a:r>
-              <a:t>The result is discussed as engineering, not as a score.</a:t>
-            </a:r>
-          </a:p>
-          <a:p xmlns:a="http://schemas.openxmlformats.org/drawingml/2006/main">
-            <a:r>
-              <a:t/>
-            </a:r>
-          </a:p>
-          <a:p xmlns:a="http://schemas.openxmlformats.org/drawingml/2006/main">
-            <a:r>
-              <a:t>Validation (15.0 total): Correct train/test discipline, cross-validation with a reported spread, leakage explicitly checked and ruled out, metric justified against the cost of error.</a:t>
-            </a:r>
-          </a:p>
-          <a:p xmlns:a="http://schemas.openxmlformats.org/drawingml/2006/main">
-            <a:r>
-              <a:t/>
-            </a:r>
-          </a:p>
-          <a:p xmlns:a="http://schemas.openxmlformats.org/drawingml/2006/main">
-            <a:r>
-              <a:t>Communication (10.0 total): The 2-page brief is readable by a non-specialist engineer.</a:t>
+              <a:t>Communication carries ten marks in total. Your two-page brief must be readable by a non-specialist engineer, so keep the language plain.</a:t>
             </a:r>
           </a:p>
         </p:txBody>
@@ -1656,92 +1158,25 @@
           <a:lstStyle xmlns:a="http://schemas.openxmlformats.org/drawingml/2006/main"/>
           <a:p xmlns:a="http://schemas.openxmlformats.org/drawingml/2006/main">
             <a:r>
-              <a:t>Engineering ML project continued</a:t>
+              <a:t>Here are the last few requirements, which cover charts, honesty and reproducibility.</a:t>
             </a:r>
           </a:p>
+          <a:p xmlns:a="http://schemas.openxmlformats.org/drawingml/2006/main"/>
           <a:p xmlns:a="http://schemas.openxmlformats.org/drawingml/2006/main">
             <a:r>
-              <a:t>Explanation to give</a:t>
+              <a:t>Charts should answer questions, and each should have a caption that states the finding. Also state your uncertainty and your limitations plainly.</a:t>
             </a:r>
           </a:p>
+          <a:p xmlns:a="http://schemas.openxmlformats.org/drawingml/2006/main"/>
           <a:p xmlns:a="http://schemas.openxmlformats.org/drawingml/2006/main">
             <a:r>
-              <a:t>A chart must answer a stated question and show the actual data result. Explain what one mark represents and label both the quantity and unit before stating the finding.</a:t>
+              <a:t>Reproducibility and documentation carries five marks in total. Your repository should run from a clean clone. That means someone who downloads a fresh copy of the project should be able to run it and get the same results. The README, which is the project's instruction page, should be complete. And a requirements dot txt file should be present, listing the libraries the project needs.</a:t>
             </a:r>
           </a:p>
+          <a:p xmlns:a="http://schemas.openxmlformats.org/drawingml/2006/main"/>
           <a:p xmlns:a="http://schemas.openxmlformats.org/drawingml/2006/main">
             <a:r>
-              <a:t/>
-            </a:r>
-          </a:p>
-          <a:p xmlns:a="http://schemas.openxmlformats.org/drawingml/2006/main">
-            <a:r>
-              <a:t>Worked illustration / lecturer answer</a:t>
-            </a:r>
-          </a:p>
-          <a:p xmlns:a="http://schemas.openxmlformats.org/drawingml/2006/main">
-            <a:r>
-              <a:t>A useful caption names the group or sample, the observed difference and the relevant unit. A limitation states what the plotted observations cannot establish, such as causation or performance at a new site.</a:t>
-            </a:r>
-          </a:p>
-          <a:p xmlns:a="http://schemas.openxmlformats.org/drawingml/2006/main">
-            <a:r>
-              <a:t/>
-            </a:r>
-          </a:p>
-          <a:p xmlns:a="http://schemas.openxmlformats.org/drawingml/2006/main">
-            <a:r>
-              <a:t>Misconception to address</a:t>
-            </a:r>
-          </a:p>
-          <a:p xmlns:a="http://schemas.openxmlformats.org/drawingml/2006/main">
-            <a:r>
-              <a:t>Text claiming “a chart was made” is not the required chart. Check the exact number and kinds required on this slide and in the assessment guide.</a:t>
-            </a:r>
-          </a:p>
-          <a:p xmlns:a="http://schemas.openxmlformats.org/drawingml/2006/main">
-            <a:r>
-              <a:t/>
-            </a:r>
-          </a:p>
-          <a:p xmlns:a="http://schemas.openxmlformats.org/drawingml/2006/main">
-            <a:r>
-              <a:t>On this slide</a:t>
-            </a:r>
-          </a:p>
-          <a:p xmlns:a="http://schemas.openxmlformats.org/drawingml/2006/main">
-            <a:r>
-              <a:t>Charts answer questions and are captioned with findings.</a:t>
-            </a:r>
-          </a:p>
-          <a:p xmlns:a="http://schemas.openxmlformats.org/drawingml/2006/main">
-            <a:r>
-              <a:t/>
-            </a:r>
-          </a:p>
-          <a:p xmlns:a="http://schemas.openxmlformats.org/drawingml/2006/main">
-            <a:r>
-              <a:t>State uncertainty and limitations.</a:t>
-            </a:r>
-          </a:p>
-          <a:p xmlns:a="http://schemas.openxmlformats.org/drawingml/2006/main">
-            <a:r>
-              <a:t/>
-            </a:r>
-          </a:p>
-          <a:p xmlns:a="http://schemas.openxmlformats.org/drawingml/2006/main">
-            <a:r>
-              <a:t>Reproducibility &amp; documentation (5.0 total): Repository runs from a clean clone.</a:t>
-            </a:r>
-          </a:p>
-          <a:p xmlns:a="http://schemas.openxmlformats.org/drawingml/2006/main">
-            <a:r>
-              <a:t/>
-            </a:r>
-          </a:p>
-          <a:p xmlns:a="http://schemas.openxmlformats.org/drawingml/2006/main">
-            <a:r>
-              <a:t>README complete. requirements.txt present.</a:t>
+              <a:t>These five marks reward careful housekeeping, and you can secure them with a final check before you submit.</a:t>
             </a:r>
           </a:p>
         </p:txBody>
@@ -1811,82 +1246,31 @@
           <a:lstStyle xmlns:a="http://schemas.openxmlformats.org/drawingml/2006/main"/>
           <a:p xmlns:a="http://schemas.openxmlformats.org/drawingml/2006/main">
             <a:r>
-              <a:t>Engineering ML project continued</a:t>
+              <a:t>Three last items complete the rubric.</a:t>
             </a:r>
           </a:p>
+          <a:p xmlns:a="http://schemas.openxmlformats.org/drawingml/2006/main"/>
           <a:p xmlns:a="http://schemas.openxmlformats.org/drawingml/2006/main">
             <a:r>
-              <a:t>Explanation to give</a:t>
+              <a:t>First, seeds should be set. A seed fixes the starting point of the random choices in our code, so a rerun gives the same results as the first run.</a:t>
             </a:r>
           </a:p>
+          <a:p xmlns:a="http://schemas.openxmlformats.org/drawingml/2006/main"/>
           <a:p xmlns:a="http://schemas.openxmlformats.org/drawingml/2006/main">
             <a:r>
-              <a:t>Make contribution evidence specific enough to check. A seed records the starting state of random choices; a contribution log records who produced and explained which work.</a:t>
+              <a:t>Second, declare your AI use. We will look at what a good declaration says in a moment.</a:t>
             </a:r>
           </a:p>
+          <a:p xmlns:a="http://schemas.openxmlformats.org/drawingml/2006/main"/>
           <a:p xmlns:a="http://schemas.openxmlformats.org/drawingml/2006/main">
             <a:r>
-              <a:t/>
+              <a:t>Third, include a contribution log. This records who produced and explained which work. Make the entries specific. Name a file, a function or a chart, and the decision behind it, and make sure it matches the history in the repository.</a:t>
             </a:r>
           </a:p>
+          <a:p xmlns:a="http://schemas.openxmlformats.org/drawingml/2006/main"/>
           <a:p xmlns:a="http://schemas.openxmlformats.org/drawingml/2006/main">
             <a:r>
-              <a:t>Worked illustration / lecturer answer</a:t>
-            </a:r>
-          </a:p>
-          <a:p xmlns:a="http://schemas.openxmlformats.org/drawingml/2006/main">
-            <a:r>
-              <a:t>Name a file, function or chart and the decision behind it. Match that entry to meaningful repository history. Disclose AI assistance according to the assessment policy.</a:t>
-            </a:r>
-          </a:p>
-          <a:p xmlns:a="http://schemas.openxmlformats.org/drawingml/2006/main">
-            <a:r>
-              <a:t/>
-            </a:r>
-          </a:p>
-          <a:p xmlns:a="http://schemas.openxmlformats.org/drawingml/2006/main">
-            <a:r>
-              <a:t>Misconception to address</a:t>
-            </a:r>
-          </a:p>
-          <a:p xmlns:a="http://schemas.openxmlformats.org/drawingml/2006/main">
-            <a:r>
-              <a:t>Many commits do not necessarily mean substantial work, and a seed does not establish accuracy. Both are supporting evidence, not replacements for the analysis.</a:t>
-            </a:r>
-          </a:p>
-          <a:p xmlns:a="http://schemas.openxmlformats.org/drawingml/2006/main">
-            <a:r>
-              <a:t/>
-            </a:r>
-          </a:p>
-          <a:p xmlns:a="http://schemas.openxmlformats.org/drawingml/2006/main">
-            <a:r>
-              <a:t>On this slide</a:t>
-            </a:r>
-          </a:p>
-          <a:p xmlns:a="http://schemas.openxmlformats.org/drawingml/2006/main">
-            <a:r>
-              <a:t>Seeds set.</a:t>
-            </a:r>
-          </a:p>
-          <a:p xmlns:a="http://schemas.openxmlformats.org/drawingml/2006/main">
-            <a:r>
-              <a:t/>
-            </a:r>
-          </a:p>
-          <a:p xmlns:a="http://schemas.openxmlformats.org/drawingml/2006/main">
-            <a:r>
-              <a:t>AI use declared.</a:t>
-            </a:r>
-          </a:p>
-          <a:p xmlns:a="http://schemas.openxmlformats.org/drawingml/2006/main">
-            <a:r>
-              <a:t/>
-            </a:r>
-          </a:p>
-          <a:p xmlns:a="http://schemas.openxmlformats.org/drawingml/2006/main">
-            <a:r>
-              <a:t>Contribution log present.</a:t>
+              <a:t>These items support your analysis and sit alongside it.</a:t>
             </a:r>
           </a:p>
         </p:txBody>
@@ -1956,92 +1340,19 @@
           <a:lstStyle xmlns:a="http://schemas.openxmlformats.org/drawingml/2006/main"/>
           <a:p xmlns:a="http://schemas.openxmlformats.org/drawingml/2006/main">
             <a:r>
-              <a:t>Engineering ML project submission</a:t>
+              <a:t>This slide is where you hand in the Engineering ML project. Check the slide for the opening time and the deadline, and use the form link on the slide.</a:t>
             </a:r>
           </a:p>
+          <a:p xmlns:a="http://schemas.openxmlformats.org/drawingml/2006/main"/>
           <a:p xmlns:a="http://schemas.openxmlformats.org/drawingml/2006/main">
             <a:r>
-              <a:t>Explanation to give</a:t>
+              <a:t>Enter your full Student Registration Number in the form. Upload the completed project notebook together with your readable report.</a:t>
             </a:r>
           </a:p>
+          <a:p xmlns:a="http://schemas.openxmlformats.org/drawingml/2006/main"/>
           <a:p xmlns:a="http://schemas.openxmlformats.org/drawingml/2006/main">
             <a:r>
-              <a:t>This slide hands over CML3112 ML_PROJECT. Show the exact form title before uploading. The required packet is the completed project notebook together with one readable DOCX or selectable-text PDF report.</a:t>
-            </a:r>
-          </a:p>
-          <a:p xmlns:a="http://schemas.openxmlformats.org/drawingml/2006/main">
-            <a:r>
-              <a:t/>
-            </a:r>
-          </a:p>
-          <a:p xmlns:a="http://schemas.openxmlformats.org/drawingml/2006/main">
-            <a:r>
-              <a:t>Worked illustration / lecturer answer</a:t>
-            </a:r>
-          </a:p>
-          <a:p xmlns:a="http://schemas.openxmlformats.org/drawingml/2006/main">
-            <a:r>
-              <a:t>The recorded cutoff for this form is 2026-12-15T11:00:00+03:00. Check the live form for later changes. A replacement must contain the complete required file set, not just the changed file.</a:t>
-            </a:r>
-          </a:p>
-          <a:p xmlns:a="http://schemas.openxmlformats.org/drawingml/2006/main">
-            <a:r>
-              <a:t/>
-            </a:r>
-          </a:p>
-          <a:p xmlns:a="http://schemas.openxmlformats.org/drawingml/2006/main">
-            <a:r>
-              <a:t>Misconception to address</a:t>
-            </a:r>
-          </a:p>
-          <a:p xmlns:a="http://schemas.openxmlformats.org/drawingml/2006/main">
-            <a:r>
-              <a:t>Students enter their own Student Registration Number as required freeform text. They wait for filenames to appear, press Submit and keep the confirmation. A file saved in Drive or GitHub is not itself a form submission.</a:t>
-            </a:r>
-          </a:p>
-          <a:p xmlns:a="http://schemas.openxmlformats.org/drawingml/2006/main">
-            <a:r>
-              <a:t/>
-            </a:r>
-          </a:p>
-          <a:p xmlns:a="http://schemas.openxmlformats.org/drawingml/2006/main">
-            <a:r>
-              <a:t>On this slide</a:t>
-            </a:r>
-          </a:p>
-          <a:p xmlns:a="http://schemas.openxmlformats.org/drawingml/2006/main">
-            <a:r>
-              <a:t>Opens: 24 Nov 2026, 11:00 Kampala</a:t>
-            </a:r>
-          </a:p>
-          <a:p xmlns:a="http://schemas.openxmlformats.org/drawingml/2006/main">
-            <a:r>
-              <a:t/>
-            </a:r>
-          </a:p>
-          <a:p xmlns:a="http://schemas.openxmlformats.org/drawingml/2006/main">
-            <a:r>
-              <a:t>Deadline: 15 Dec 2026, 11:00 Kampala</a:t>
-            </a:r>
-          </a:p>
-          <a:p xmlns:a="http://schemas.openxmlformats.org/drawingml/2006/main">
-            <a:r>
-              <a:t/>
-            </a:r>
-          </a:p>
-          <a:p xmlns:a="http://schemas.openxmlformats.org/drawingml/2006/main">
-            <a:r>
-              <a:t>Use your full Student Registration Number in the form.</a:t>
-            </a:r>
-          </a:p>
-          <a:p xmlns:a="http://schemas.openxmlformats.org/drawingml/2006/main">
-            <a:r>
-              <a:t/>
-            </a:r>
-          </a:p>
-          <a:p xmlns:a="http://schemas.openxmlformats.org/drawingml/2006/main">
-            <a:r>
-              <a:t>Keep the submitted files and confirmation.</a:t>
+              <a:t>Keep a copy of the submitted files and your confirmation. A file saved in Drive or GitHub is not a submission until it has gone through the form.</a:t>
             </a:r>
           </a:p>
         </p:txBody>
@@ -2111,72 +1422,19 @@
           <a:lstStyle xmlns:a="http://schemas.openxmlformats.org/drawingml/2006/main"/>
           <a:p xmlns:a="http://schemas.openxmlformats.org/drawingml/2006/main">
             <a:r>
-              <a:t>Today’s learning</a:t>
+              <a:t>Here is what we will do today. We will explain the question our team investigated and one finding that our evidence supports. Then we will state one limitation, which is a place where our evidence is weak or may not apply, and we will say what we personally contributed.</a:t>
             </a:r>
           </a:p>
+          <a:p xmlns:a="http://schemas.openxmlformats.org/drawingml/2006/main"/>
           <a:p xmlns:a="http://schemas.openxmlformats.org/drawingml/2006/main">
             <a:r>
-              <a:t>Explanation to give</a:t>
+              <a:t>Here is how we will show it. We will be able to point to the evidence behind one decision that we worked on ourselves. That might be a cell in the notebook, a chart, or a result. If you can point to it and explain why you made that choice, you have met today's goal.</a:t>
             </a:r>
           </a:p>
+          <a:p xmlns:a="http://schemas.openxmlformats.org/drawingml/2006/main"/>
           <a:p xmlns:a="http://schemas.openxmlformats.org/drawingml/2006/main">
             <a:r>
-              <a:t>Explain a supported finding, its limitation and the individual work behind it. The team project and each learner’s defence are distinct evidence.</a:t>
-            </a:r>
-          </a:p>
-          <a:p xmlns:a="http://schemas.openxmlformats.org/drawingml/2006/main">
-            <a:r>
-              <a:t/>
-            </a:r>
-          </a:p>
-          <a:p xmlns:a="http://schemas.openxmlformats.org/drawingml/2006/main">
-            <a:r>
-              <a:t>Worked illustration / lecturer answer</a:t>
-            </a:r>
-          </a:p>
-          <a:p xmlns:a="http://schemas.openxmlformats.org/drawingml/2006/main">
-            <a:r>
-              <a:t>A claim should point to a named plot or result, its target unit, the evaluated sample and the decision it supports. “Our model is good” supplies none of these.</a:t>
-            </a:r>
-          </a:p>
-          <a:p xmlns:a="http://schemas.openxmlformats.org/drawingml/2006/main">
-            <a:r>
-              <a:t/>
-            </a:r>
-          </a:p>
-          <a:p xmlns:a="http://schemas.openxmlformats.org/drawingml/2006/main">
-            <a:r>
-              <a:t>Misconception to address</a:t>
-            </a:r>
-          </a:p>
-          <a:p xmlns:a="http://schemas.openxmlformats.org/drawingml/2006/main">
-            <a:r>
-              <a:t>At the end, check the specific outcome shown here using a small previously demonstrated example. A completed file without an explanation is not evidence of understanding.</a:t>
-            </a:r>
-          </a:p>
-          <a:p xmlns:a="http://schemas.openxmlformats.org/drawingml/2006/main">
-            <a:r>
-              <a:t/>
-            </a:r>
-          </a:p>
-          <a:p xmlns:a="http://schemas.openxmlformats.org/drawingml/2006/main">
-            <a:r>
-              <a:t>On this slide</a:t>
-            </a:r>
-          </a:p>
-          <a:p xmlns:a="http://schemas.openxmlformats.org/drawingml/2006/main">
-            <a:r>
-              <a:t>Explain your question and one supported finding.</a:t>
-            </a:r>
-          </a:p>
-          <a:p xmlns:a="http://schemas.openxmlformats.org/drawingml/2006/main">
-            <a:r>
-              <a:t/>
-            </a:r>
-          </a:p>
-          <a:p xmlns:a="http://schemas.openxmlformats.org/drawingml/2006/main">
-            <a:r>
-              <a:t>State a limitation and your individual contribution.</a:t>
+              <a:t>This is well within your reach, because you already did the work.</a:t>
             </a:r>
           </a:p>
         </p:txBody>
@@ -2246,72 +1504,19 @@
           <a:lstStyle xmlns:a="http://schemas.openxmlformats.org/drawingml/2006/main"/>
           <a:p xmlns:a="http://schemas.openxmlformats.org/drawingml/2006/main">
             <a:r>
-              <a:t>Presentation evidence (35 marks)</a:t>
+              <a:t>The presentation evidence carries thirty-five marks. Your slides and your narration notes should explain the question, the method, the evidence and the limitations, written for an engineering audience.</a:t>
             </a:r>
           </a:p>
+          <a:p xmlns:a="http://schemas.openxmlformats.org/drawingml/2006/main"/>
           <a:p xmlns:a="http://schemas.openxmlformats.org/drawingml/2006/main">
             <a:r>
-              <a:t>Explanation to give</a:t>
+              <a:t>Narration notes are the words you would say with each slide. Write them so that someone reading the file alone, without hearing you speak, can follow the whole story from the question to the limits.</a:t>
             </a:r>
           </a:p>
+          <a:p xmlns:a="http://schemas.openxmlformats.org/drawingml/2006/main"/>
           <a:p xmlns:a="http://schemas.openxmlformats.org/drawingml/2006/main">
             <a:r>
-              <a:t>Speaker notes contain the explanation behind each presentation slide. They should connect the question, method, evidence and limitations so the submitted file remains understandable without a live talk.</a:t>
-            </a:r>
-          </a:p>
-          <a:p xmlns:a="http://schemas.openxmlformats.org/drawingml/2006/main">
-            <a:r>
-              <a:t/>
-            </a:r>
-          </a:p>
-          <a:p xmlns:a="http://schemas.openxmlformats.org/drawingml/2006/main">
-            <a:r>
-              <a:t>Worked illustration / lecturer answer</a:t>
-            </a:r>
-          </a:p>
-          <a:p xmlns:a="http://schemas.openxmlformats.org/drawingml/2006/main">
-            <a:r>
-              <a:t>For a results chart, notes identify the sample, target unit, metric and interpretation. The written evidence can then be assessed even when the speaker is absent.</a:t>
-            </a:r>
-          </a:p>
-          <a:p xmlns:a="http://schemas.openxmlformats.org/drawingml/2006/main">
-            <a:r>
-              <a:t/>
-            </a:r>
-          </a:p>
-          <a:p xmlns:a="http://schemas.openxmlformats.org/drawingml/2006/main">
-            <a:r>
-              <a:t>Misconception to address</a:t>
-            </a:r>
-          </a:p>
-          <a:p xmlns:a="http://schemas.openxmlformats.org/drawingml/2006/main">
-            <a:r>
-              <a:t>The local text-based grader does not assess visual polish or spoken delivery. Make required reasoning accessible as actual text rather than only screenshots.</a:t>
-            </a:r>
-          </a:p>
-          <a:p xmlns:a="http://schemas.openxmlformats.org/drawingml/2006/main">
-            <a:r>
-              <a:t/>
-            </a:r>
-          </a:p>
-          <a:p xmlns:a="http://schemas.openxmlformats.org/drawingml/2006/main">
-            <a:r>
-              <a:t>On this slide</a:t>
-            </a:r>
-          </a:p>
-          <a:p xmlns:a="http://schemas.openxmlformats.org/drawingml/2006/main">
-            <a:r>
-              <a:t>Slides and narration notes explain the question, method, evidence and limitations for an engineering audience.</a:t>
-            </a:r>
-          </a:p>
-          <a:p xmlns:a="http://schemas.openxmlformats.org/drawingml/2006/main">
-            <a:r>
-              <a:t/>
-            </a:r>
-          </a:p>
-          <a:p xmlns:a="http://schemas.openxmlformats.org/drawingml/2006/main">
-            <a:r>
-              <a:t>The local text grader does not assess visual styling or spoken delivery.</a:t>
+              <a:t>The local text grader reads text only. It does not assess visual styling or how you deliver the talk. So put the reasoning in actual text, and avoid leaving it only inside screenshots. For a results chart, the notes should name the sample, the target unit, the metric and what the result means.</a:t>
             </a:r>
           </a:p>
         </p:txBody>
@@ -2381,72 +1586,25 @@
           <a:lstStyle xmlns:a="http://schemas.openxmlformats.org/drawingml/2006/main"/>
           <a:p xmlns:a="http://schemas.openxmlformats.org/drawingml/2006/main">
             <a:r>
-              <a:t>Individual written defence (40 marks)</a:t>
+              <a:t>The individual written defence carries forty marks, the largest part of the individual evidence.</a:t>
             </a:r>
           </a:p>
+          <a:p xmlns:a="http://schemas.openxmlformats.org/drawingml/2006/main"/>
           <a:p xmlns:a="http://schemas.openxmlformats.org/drawingml/2006/main">
             <a:r>
-              <a:t>Explanation to give</a:t>
+              <a:t>You write two typed answers about your own repository. In each answer, you identify specific cells or results and explain the decisions you made.</a:t>
             </a:r>
           </a:p>
+          <a:p xmlns:a="http://schemas.openxmlformats.org/drawingml/2006/main"/>
           <a:p xmlns:a="http://schemas.openxmlformats.org/drawingml/2006/main">
             <a:r>
-              <a:t>A defence explains the reasoning behind a decision the learner actually made. Ask for a named cell, result or chart so the explanation can be checked against the project.</a:t>
+              <a:t>A strong answer links a choice, a reason and a piece of evidence. For example, we might write that we used a group split because the same equipment appears repeatedly, and that a particular cell lists equipment identifiers with no overlap between the groups. A general definition of group splitting does not show that your project used it, so always point to your own work.</a:t>
             </a:r>
           </a:p>
+          <a:p xmlns:a="http://schemas.openxmlformats.org/drawingml/2006/main"/>
           <a:p xmlns:a="http://schemas.openxmlformats.org/drawingml/2006/main">
             <a:r>
-              <a:t/>
-            </a:r>
-          </a:p>
-          <a:p xmlns:a="http://schemas.openxmlformats.org/drawingml/2006/main">
-            <a:r>
-              <a:t>Worked illustration / lecturer answer</a:t>
-            </a:r>
-          </a:p>
-          <a:p xmlns:a="http://schemas.openxmlformats.org/drawingml/2006/main">
-            <a:r>
-              <a:t>“I used a group split because the same equipment appears repeatedly; this cell lists disjoint equipment IDs” links a choice, reason and evidence.</a:t>
-            </a:r>
-          </a:p>
-          <a:p xmlns:a="http://schemas.openxmlformats.org/drawingml/2006/main">
-            <a:r>
-              <a:t/>
-            </a:r>
-          </a:p>
-          <a:p xmlns:a="http://schemas.openxmlformats.org/drawingml/2006/main">
-            <a:r>
-              <a:t>Misconception to address</a:t>
-            </a:r>
-          </a:p>
-          <a:p xmlns:a="http://schemas.openxmlformats.org/drawingml/2006/main">
-            <a:r>
-              <a:t>A general definition of group splitting is not evidence that this project used it. Each student's explanation must match their own contribution.</a:t>
-            </a:r>
-          </a:p>
-          <a:p xmlns:a="http://schemas.openxmlformats.org/drawingml/2006/main">
-            <a:r>
-              <a:t/>
-            </a:r>
-          </a:p>
-          <a:p xmlns:a="http://schemas.openxmlformats.org/drawingml/2006/main">
-            <a:r>
-              <a:t>On this slide</a:t>
-            </a:r>
-          </a:p>
-          <a:p xmlns:a="http://schemas.openxmlformats.org/drawingml/2006/main">
-            <a:r>
-              <a:t>Two typed answers about the student's own repository identify specific cells/results and explain the decisions.</a:t>
-            </a:r>
-          </a:p>
-          <a:p xmlns:a="http://schemas.openxmlformats.org/drawingml/2006/main">
-            <a:r>
-              <a:t/>
-            </a:r>
-          </a:p>
-          <a:p xmlns:a="http://schemas.openxmlformats.org/drawingml/2006/main">
-            <a:r>
-              <a:t>Credit is based on the submitted evidence; live questioning is formative.</a:t>
+              <a:t>Credit comes from the evidence you submit. Live questioning is formative, which means it is there to help you learn and is not marked.</a:t>
             </a:r>
           </a:p>
         </p:txBody>
@@ -2516,82 +1674,25 @@
           <a:lstStyle xmlns:a="http://schemas.openxmlformats.org/drawingml/2006/main"/>
           <a:p xmlns:a="http://schemas.openxmlformats.org/drawingml/2006/main">
             <a:r>
-              <a:t>Reflection (20 marks)</a:t>
+              <a:t>The reflection carries twenty marks. It is 500 words, and it is a chance to look back on how far you have come.</a:t>
             </a:r>
           </a:p>
+          <a:p xmlns:a="http://schemas.openxmlformats.org/drawingml/2006/main"/>
           <a:p xmlns:a="http://schemas.openxmlformats.org/drawingml/2006/main">
             <a:r>
-              <a:t>Explanation to give</a:t>
+              <a:t>Make it specific in three ways. Describe what changed in your understanding since Week 1. Say what remains difficult for you. And give two concrete goals for Semester 2.</a:t>
             </a:r>
           </a:p>
+          <a:p xmlns:a="http://schemas.openxmlformats.org/drawingml/2006/main"/>
           <a:p xmlns:a="http://schemas.openxmlformats.org/drawingml/2006/main">
             <a:r>
-              <a:t>Reflection should compare the learner's earlier understanding with what they can now demonstrate, then specify an achievable next step.</a:t>
+              <a:t>For example, you might describe a mistake in the order you ran notebook cells, how running the whole notebook from the top revealed it, and how you now check for it. A goal could be to practise grouped validation on a second dataset.</a:t>
             </a:r>
           </a:p>
+          <a:p xmlns:a="http://schemas.openxmlformats.org/drawingml/2006/main"/>
           <a:p xmlns:a="http://schemas.openxmlformats.org/drawingml/2006/main">
             <a:r>
-              <a:t/>
-            </a:r>
-          </a:p>
-          <a:p xmlns:a="http://schemas.openxmlformats.org/drawingml/2006/main">
-            <a:r>
-              <a:t>Worked illustration / lecturer answer</a:t>
-            </a:r>
-          </a:p>
-          <a:p xmlns:a="http://schemas.openxmlformats.org/drawingml/2006/main">
-            <a:r>
-              <a:t>A concrete reflection describes an execution-order mistake, how a clean run revealed it, and how the learner now checks notebooks. A goal might be to practise grouped validation on a second dataset.</a:t>
-            </a:r>
-          </a:p>
-          <a:p xmlns:a="http://schemas.openxmlformats.org/drawingml/2006/main">
-            <a:r>
-              <a:t/>
-            </a:r>
-          </a:p>
-          <a:p xmlns:a="http://schemas.openxmlformats.org/drawingml/2006/main">
-            <a:r>
-              <a:t>Misconception to address</a:t>
-            </a:r>
-          </a:p>
-          <a:p xmlns:a="http://schemas.openxmlformats.org/drawingml/2006/main">
-            <a:r>
-              <a:t>“I learned a lot about AI” provides little evidence. Keep the published 500-word requirement and the two Semester 2 goals.</a:t>
-            </a:r>
-          </a:p>
-          <a:p xmlns:a="http://schemas.openxmlformats.org/drawingml/2006/main">
-            <a:r>
-              <a:t/>
-            </a:r>
-          </a:p>
-          <a:p xmlns:a="http://schemas.openxmlformats.org/drawingml/2006/main">
-            <a:r>
-              <a:t>On this slide</a:t>
-            </a:r>
-          </a:p>
-          <a:p xmlns:a="http://schemas.openxmlformats.org/drawingml/2006/main">
-            <a:r>
-              <a:t>500 words.</a:t>
-            </a:r>
-          </a:p>
-          <a:p xmlns:a="http://schemas.openxmlformats.org/drawingml/2006/main">
-            <a:r>
-              <a:t/>
-            </a:r>
-          </a:p>
-          <a:p xmlns:a="http://schemas.openxmlformats.org/drawingml/2006/main">
-            <a:r>
-              <a:t>Specific about what changed since Week 1, what remains difficult, and two concrete Semester 2 goals.</a:t>
-            </a:r>
-          </a:p>
-          <a:p xmlns:a="http://schemas.openxmlformats.org/drawingml/2006/main">
-            <a:r>
-              <a:t/>
-            </a:r>
-          </a:p>
-          <a:p xmlns:a="http://schemas.openxmlformats.org/drawingml/2006/main">
-            <a:r>
-              <a:t>Generic reflection scores low.</a:t>
+              <a:t>A sentence such as I learned a lot about AI gives the marker little to work with, and generic reflections score low. Your honest, particular story will score well.</a:t>
             </a:r>
           </a:p>
         </p:txBody>
@@ -2661,62 +1762,19 @@
           <a:lstStyle xmlns:a="http://schemas.openxmlformats.org/drawingml/2006/main"/>
           <a:p xmlns:a="http://schemas.openxmlformats.org/drawingml/2006/main">
             <a:r>
-              <a:t>AI-use declaration (5 marks)</a:t>
+              <a:t>The AI-use declaration carries five marks. It must be present, complete, and plausible when compared with your repository history.</a:t>
             </a:r>
           </a:p>
+          <a:p xmlns:a="http://schemas.openxmlformats.org/drawingml/2006/main"/>
           <a:p xmlns:a="http://schemas.openxmlformats.org/drawingml/2006/main">
             <a:r>
-              <a:t>Explanation to give</a:t>
+              <a:t>A good declaration is informative. It names the tool, the task it helped with, the file or section affected, and how you checked the output. If you used no AI at all, say that directly.</a:t>
             </a:r>
           </a:p>
+          <a:p xmlns:a="http://schemas.openxmlformats.org/drawingml/2006/main"/>
           <a:p xmlns:a="http://schemas.openxmlformats.org/drawingml/2006/main">
             <a:r>
-              <a:t>Explain that disclosure records what help was used, where and how the learner checked it. It does not remove responsibility for the submitted work or override an assessment's restrictions.</a:t>
-            </a:r>
-          </a:p>
-          <a:p xmlns:a="http://schemas.openxmlformats.org/drawingml/2006/main">
-            <a:r>
-              <a:t/>
-            </a:r>
-          </a:p>
-          <a:p xmlns:a="http://schemas.openxmlformats.org/drawingml/2006/main">
-            <a:r>
-              <a:t>Worked illustration / lecturer answer</a:t>
-            </a:r>
-          </a:p>
-          <a:p xmlns:a="http://schemas.openxmlformats.org/drawingml/2006/main">
-            <a:r>
-              <a:t>An informative declaration names the tool, the task for which it helped, the affected file or section and the verification performed. If no AI was used, state that directly.</a:t>
-            </a:r>
-          </a:p>
-          <a:p xmlns:a="http://schemas.openxmlformats.org/drawingml/2006/main">
-            <a:r>
-              <a:t/>
-            </a:r>
-          </a:p>
-          <a:p xmlns:a="http://schemas.openxmlformats.org/drawingml/2006/main">
-            <a:r>
-              <a:t>Misconception to address</a:t>
-            </a:r>
-          </a:p>
-          <a:p xmlns:a="http://schemas.openxmlformats.org/drawingml/2006/main">
-            <a:r>
-              <a:t>Do not imply AI is permitted in an independent test_data. Follow the policy for the particular assessment, and require the learner to explain their own work.</a:t>
-            </a:r>
-          </a:p>
-          <a:p xmlns:a="http://schemas.openxmlformats.org/drawingml/2006/main">
-            <a:r>
-              <a:t/>
-            </a:r>
-          </a:p>
-          <a:p xmlns:a="http://schemas.openxmlformats.org/drawingml/2006/main">
-            <a:r>
-              <a:t>On this slide</a:t>
-            </a:r>
-          </a:p>
-          <a:p xmlns:a="http://schemas.openxmlformats.org/drawingml/2006/main">
-            <a:r>
-              <a:t>Present, complete and plausible against the repository history.</a:t>
+              <a:t>Disclosure records the help you received. You remain responsible for everything you submit, and you must be able to explain your own work. Always follow the policy for the particular assessment you are completing.</a:t>
             </a:r>
           </a:p>
         </p:txBody>
@@ -2786,92 +1844,19 @@
           <a:lstStyle xmlns:a="http://schemas.openxmlformats.org/drawingml/2006/main"/>
           <a:p xmlns:a="http://schemas.openxmlformats.org/drawingml/2006/main">
             <a:r>
-              <a:t>Presentation and individual reflection submission</a:t>
+              <a:t>This slide is where you hand in the presentation and your individual reflection. Check the slide for the opening time and the deadline, and use the DEMO form link shown.</a:t>
             </a:r>
           </a:p>
+          <a:p xmlns:a="http://schemas.openxmlformats.org/drawingml/2006/main"/>
           <a:p xmlns:a="http://schemas.openxmlformats.org/drawingml/2006/main">
             <a:r>
-              <a:t>Explanation to give</a:t>
+              <a:t>Enter your full Student Registration Number. Upload your presentation with its narration notes, and your written defence and reflection document, as in the published project and DEMO requirements. Wait for the file names to appear, then press Submit.</a:t>
             </a:r>
           </a:p>
+          <a:p xmlns:a="http://schemas.openxmlformats.org/drawingml/2006/main"/>
           <a:p xmlns:a="http://schemas.openxmlformats.org/drawingml/2006/main">
             <a:r>
-              <a:t>This slide hands over CML3112 DEMO. Show the exact form title before uploading. The required packet is the presentation with narration notes and the required written defence/reflection document, as listed in the DEMO guide.</a:t>
-            </a:r>
-          </a:p>
-          <a:p xmlns:a="http://schemas.openxmlformats.org/drawingml/2006/main">
-            <a:r>
-              <a:t/>
-            </a:r>
-          </a:p>
-          <a:p xmlns:a="http://schemas.openxmlformats.org/drawingml/2006/main">
-            <a:r>
-              <a:t>Worked illustration / lecturer answer</a:t>
-            </a:r>
-          </a:p>
-          <a:p xmlns:a="http://schemas.openxmlformats.org/drawingml/2006/main">
-            <a:r>
-              <a:t>The recorded cutoff for this form is 2026-12-15T14:00:00+03:00. Check the live form for later changes. A replacement must contain the complete required file set, not just the changed file.</a:t>
-            </a:r>
-          </a:p>
-          <a:p xmlns:a="http://schemas.openxmlformats.org/drawingml/2006/main">
-            <a:r>
-              <a:t/>
-            </a:r>
-          </a:p>
-          <a:p xmlns:a="http://schemas.openxmlformats.org/drawingml/2006/main">
-            <a:r>
-              <a:t>Misconception to address</a:t>
-            </a:r>
-          </a:p>
-          <a:p xmlns:a="http://schemas.openxmlformats.org/drawingml/2006/main">
-            <a:r>
-              <a:t>Students enter their own Student Registration Number as required freeform text. They wait for filenames to appear, press Submit and keep the confirmation. A file saved in Drive or GitHub is not itself a form submission.</a:t>
-            </a:r>
-          </a:p>
-          <a:p xmlns:a="http://schemas.openxmlformats.org/drawingml/2006/main">
-            <a:r>
-              <a:t/>
-            </a:r>
-          </a:p>
-          <a:p xmlns:a="http://schemas.openxmlformats.org/drawingml/2006/main">
-            <a:r>
-              <a:t>On this slide</a:t>
-            </a:r>
-          </a:p>
-          <a:p xmlns:a="http://schemas.openxmlformats.org/drawingml/2006/main">
-            <a:r>
-              <a:t>Opens: 24 Nov 2026, 11:00 Kampala</a:t>
-            </a:r>
-          </a:p>
-          <a:p xmlns:a="http://schemas.openxmlformats.org/drawingml/2006/main">
-            <a:r>
-              <a:t/>
-            </a:r>
-          </a:p>
-          <a:p xmlns:a="http://schemas.openxmlformats.org/drawingml/2006/main">
-            <a:r>
-              <a:t>Deadline: 15 Dec 2026, 14:00 Kampala</a:t>
-            </a:r>
-          </a:p>
-          <a:p xmlns:a="http://schemas.openxmlformats.org/drawingml/2006/main">
-            <a:r>
-              <a:t/>
-            </a:r>
-          </a:p>
-          <a:p xmlns:a="http://schemas.openxmlformats.org/drawingml/2006/main">
-            <a:r>
-              <a:t>Use your full Student Registration Number in the form.</a:t>
-            </a:r>
-          </a:p>
-          <a:p xmlns:a="http://schemas.openxmlformats.org/drawingml/2006/main">
-            <a:r>
-              <a:t/>
-            </a:r>
-          </a:p>
-          <a:p xmlns:a="http://schemas.openxmlformats.org/drawingml/2006/main">
-            <a:r>
-              <a:t>Keep the submitted files and confirmation.</a:t>
+              <a:t>Keep the submitted files and the confirmation. A file saved in Drive or GitHub is not a submission until it has gone through the form.</a:t>
             </a:r>
           </a:p>
         </p:txBody>
@@ -2941,72 +1926,19 @@
           <a:lstStyle xmlns:a="http://schemas.openxmlformats.org/drawingml/2006/main"/>
           <a:p xmlns:a="http://schemas.openxmlformats.org/drawingml/2006/main">
             <a:r>
-              <a:t>Revision and submission checklist</a:t>
+              <a:t>Let us finish with a short exit check. Ask yourself whether you can point to the evidence behind one decision you personally worked on. If you can name the cell or chart, say why you chose it, and give one limitation, you are ready.</a:t>
             </a:r>
           </a:p>
+          <a:p xmlns:a="http://schemas.openxmlformats.org/drawingml/2006/main"/>
           <a:p xmlns:a="http://schemas.openxmlformats.org/drawingml/2006/main">
             <a:r>
-              <a:t>Explanation to give</a:t>
+              <a:t>Then save your work and check the required submission files. Make sure you are uploading your own saved project files, and read the live form for the current requirements.</a:t>
             </a:r>
           </a:p>
+          <a:p xmlns:a="http://schemas.openxmlformats.org/drawingml/2006/main"/>
           <a:p xmlns:a="http://schemas.openxmlformats.org/drawingml/2006/main">
             <a:r>
-              <a:t>Explain a supported finding, its limitation and the individual work behind it. The team project and each learner’s defence are distinct evidence.</a:t>
-            </a:r>
-          </a:p>
-          <a:p xmlns:a="http://schemas.openxmlformats.org/drawingml/2006/main">
-            <a:r>
-              <a:t/>
-            </a:r>
-          </a:p>
-          <a:p xmlns:a="http://schemas.openxmlformats.org/drawingml/2006/main">
-            <a:r>
-              <a:t>Worked illustration / lecturer answer</a:t>
-            </a:r>
-          </a:p>
-          <a:p xmlns:a="http://schemas.openxmlformats.org/drawingml/2006/main">
-            <a:r>
-              <a:t>A claim should point to a named plot or result, its target unit, the evaluated sample and the decision it supports. “Our model is good” supplies none of these.</a:t>
-            </a:r>
-          </a:p>
-          <a:p xmlns:a="http://schemas.openxmlformats.org/drawingml/2006/main">
-            <a:r>
-              <a:t/>
-            </a:r>
-          </a:p>
-          <a:p xmlns:a="http://schemas.openxmlformats.org/drawingml/2006/main">
-            <a:r>
-              <a:t>Misconception to address</a:t>
-            </a:r>
-          </a:p>
-          <a:p xmlns:a="http://schemas.openxmlformats.org/drawingml/2006/main">
-            <a:r>
-              <a:t>Close by identifying the actual saved file and its correct submission route. Read the live deadline. For current weekly notebook tasks, students upload their own work, not the practice notebook, ZIP or grading files.</a:t>
-            </a:r>
-          </a:p>
-          <a:p xmlns:a="http://schemas.openxmlformats.org/drawingml/2006/main">
-            <a:r>
-              <a:t/>
-            </a:r>
-          </a:p>
-          <a:p xmlns:a="http://schemas.openxmlformats.org/drawingml/2006/main">
-            <a:r>
-              <a:t>On this slide</a:t>
-            </a:r>
-          </a:p>
-          <a:p xmlns:a="http://schemas.openxmlformats.org/drawingml/2006/main">
-            <a:r>
-              <a:t>You can point to the evidence behind one decision you personally worked on.</a:t>
-            </a:r>
-          </a:p>
-          <a:p xmlns:a="http://schemas.openxmlformats.org/drawingml/2006/main">
-            <a:r>
-              <a:t/>
-            </a:r>
-          </a:p>
-          <a:p xmlns:a="http://schemas.openxmlformats.org/drawingml/2006/main">
-            <a:r>
-              <a:t>Save your work and check the required submission files.</a:t>
+              <a:t>You have learned a great deal this semester, and this is your chance to show it. Well done, and good luck.</a:t>
             </a:r>
           </a:p>
         </p:txBody>
@@ -3076,62 +2008,19 @@
           <a:lstStyle xmlns:a="http://schemas.openxmlformats.org/drawingml/2006/main"/>
           <a:p xmlns:a="http://schemas.openxmlformats.org/drawingml/2006/main">
             <a:r>
-              <a:t>Connection to the previous lesson</a:t>
+              <a:t>Let us connect to the work of the last few weeks. Every week we asked a question of some data, built a model, and checked it carefully.</a:t>
             </a:r>
           </a:p>
+          <a:p xmlns:a="http://schemas.openxmlformats.org/drawingml/2006/main"/>
           <a:p xmlns:a="http://schemas.openxmlformats.org/drawingml/2006/main">
             <a:r>
-              <a:t>Explanation to give</a:t>
+              <a:t>Now we put that into one story. What question did your team investigate? And what result can you support with evidence?</a:t>
             </a:r>
           </a:p>
+          <a:p xmlns:a="http://schemas.openxmlformats.org/drawingml/2006/main"/>
           <a:p xmlns:a="http://schemas.openxmlformats.org/drawingml/2006/main">
             <a:r>
-              <a:t>Explain a supported finding, its limitation and the individual work behind it. The team project and each learner’s defence are distinct evidence.</a:t>
-            </a:r>
-          </a:p>
-          <a:p xmlns:a="http://schemas.openxmlformats.org/drawingml/2006/main">
-            <a:r>
-              <a:t/>
-            </a:r>
-          </a:p>
-          <a:p xmlns:a="http://schemas.openxmlformats.org/drawingml/2006/main">
-            <a:r>
-              <a:t>Worked illustration / lecturer answer</a:t>
-            </a:r>
-          </a:p>
-          <a:p xmlns:a="http://schemas.openxmlformats.org/drawingml/2006/main">
-            <a:r>
-              <a:t>A claim should point to a named plot or result, its target unit, the evaluated sample and the decision it supports. “Our model is good” supplies none of these.</a:t>
-            </a:r>
-          </a:p>
-          <a:p xmlns:a="http://schemas.openxmlformats.org/drawingml/2006/main">
-            <a:r>
-              <a:t/>
-            </a:r>
-          </a:p>
-          <a:p xmlns:a="http://schemas.openxmlformats.org/drawingml/2006/main">
-            <a:r>
-              <a:t>Misconception to address</a:t>
-            </a:r>
-          </a:p>
-          <a:p xmlns:a="http://schemas.openxmlformats.org/drawingml/2006/main">
-            <a:r>
-              <a:t>Connect this to the previous result named on this slide. Demonstrate the first step again if necessary; there is no requirement for partner work before the explanation.</a:t>
-            </a:r>
-          </a:p>
-          <a:p xmlns:a="http://schemas.openxmlformats.org/drawingml/2006/main">
-            <a:r>
-              <a:t/>
-            </a:r>
-          </a:p>
-          <a:p xmlns:a="http://schemas.openxmlformats.org/drawingml/2006/main">
-            <a:r>
-              <a:t>On this slide</a:t>
-            </a:r>
-          </a:p>
-          <a:p xmlns:a="http://schemas.openxmlformats.org/drawingml/2006/main">
-            <a:r>
-              <a:t>What question did your team investigate, and what result can you support with evidence?</a:t>
+              <a:t>Take a moment to think about your own project. Try to say the question in one sentence, and then name one result that you could show on the screen. If you can do both, you are already most of the way to a good presentation.</a:t>
             </a:r>
           </a:p>
         </p:txBody>
@@ -3201,17 +2090,19 @@
           <a:lstStyle xmlns:a="http://schemas.openxmlformats.org/drawingml/2006/main"/>
           <a:p xmlns:a="http://schemas.openxmlformats.org/drawingml/2006/main">
             <a:r>
-              <a:t>This is revision, not a new test requirement. Lists can name columns or hold returned predictions, but students do not need to rebuild table operations with manual CSV loops. Existing function signatures, marks and allowed-resource rules stay unchanged.</a:t>
+              <a:t>Pandas is the Python library we have used all course to work with tables of data. We keep using it for the project.</a:t>
             </a:r>
           </a:p>
+          <a:p xmlns:a="http://schemas.openxmlformats.org/drawingml/2006/main"/>
           <a:p xmlns:a="http://schemas.openxmlformats.org/drawingml/2006/main">
             <a:r>
-              <a:t/>
+              <a:t>To load a CSV file, which is a plain table saved as text, we write pd dot read underscore csv and give it the file name. We keep the raw data exactly as it arrived. Any cleaning happens on a copy, so we can always go back to the original. We also refer to columns by their names, so that anyone reading our work can follow it.</a:t>
             </a:r>
           </a:p>
+          <a:p xmlns:a="http://schemas.openxmlformats.org/drawingml/2006/main"/>
           <a:p xmlns:a="http://schemas.openxmlformats.org/drawingml/2006/main">
             <a:r>
-              <a:t>Reference: https://pandas.pydata.org/docs/getting_started/intro_tutorials/index.html</a:t>
+              <a:t>We use pandas for cleaning, for summaries, and for preparing the inputs to our models. Where the assessment functions have a published return type, such as a float or a list, we return exactly that type. This is revision of what you already know, and it adds no new requirement.</a:t>
             </a:r>
           </a:p>
         </p:txBody>
@@ -3281,67 +2172,25 @@
           <a:lstStyle xmlns:a="http://schemas.openxmlformats.org/drawingml/2006/main"/>
           <a:p xmlns:a="http://schemas.openxmlformats.org/drawingml/2006/main">
             <a:r>
-              <a:t>A presentation connects a claim to evidence</a:t>
+              <a:t>A good presentation links what we claim to what we can show.</a:t>
             </a:r>
           </a:p>
+          <a:p xmlns:a="http://schemas.openxmlformats.org/drawingml/2006/main"/>
           <a:p xmlns:a="http://schemas.openxmlformats.org/drawingml/2006/main">
             <a:r>
-              <a:t>Explanation to give</a:t>
+              <a:t>A finding states what the evidence shows. Suppose the average error on held-out data was 2 deg C. That is an invented example. A limitation states where that evidence is incomplete or may not apply. For example, our sample came from only one site. When we give a finding or a limitation, we point to the chart, the metric or the record that backs it up.</a:t>
             </a:r>
           </a:p>
+          <a:p xmlns:a="http://schemas.openxmlformats.org/drawingml/2006/main"/>
           <a:p xmlns:a="http://schemas.openxmlformats.org/drawingml/2006/main">
             <a:r>
-              <a:t>Explain the chain from engineering question to measured evidence to a bounded recommendation. A finding states what was observed; a limitation identifies where that evidence may not apply.</a:t>
+              <a:t>A defence explains why we made a choice. A reflection explains what we learned and what we would improve. In both, we describe our own contribution and give specific evidence for it, such as a named cell or a named chart.</a:t>
             </a:r>
           </a:p>
+          <a:p xmlns:a="http://schemas.openxmlformats.org/drawingml/2006/main"/>
           <a:p xmlns:a="http://schemas.openxmlformats.org/drawingml/2006/main">
             <a:r>
-              <a:t/>
-            </a:r>
-          </a:p>
-          <a:p xmlns:a="http://schemas.openxmlformats.org/drawingml/2006/main">
-            <a:r>
-              <a:t>Worked illustration / lecturer answer</a:t>
-            </a:r>
-          </a:p>
-          <a:p xmlns:a="http://schemas.openxmlformats.org/drawingml/2006/main">
-            <a:r>
-              <a:t>“On this held-out sample, MAE was 3 kW” states a result. “The sample contains only one site” limits the claim. Neither statement alone justifies deployment at every site.</a:t>
-            </a:r>
-          </a:p>
-          <a:p xmlns:a="http://schemas.openxmlformats.org/drawingml/2006/main">
-            <a:r>
-              <a:t/>
-            </a:r>
-          </a:p>
-          <a:p xmlns:a="http://schemas.openxmlformats.org/drawingml/2006/main">
-            <a:r>
-              <a:t>Misconception to address</a:t>
-            </a:r>
-          </a:p>
-          <a:p xmlns:a="http://schemas.openxmlformats.org/drawingml/2006/main">
-            <a:r>
-              <a:t>A polished chart cannot replace a defined target, correct units or an honest description of the evaluation sample.</a:t>
-            </a:r>
-          </a:p>
-          <a:p xmlns:a="http://schemas.openxmlformats.org/drawingml/2006/main">
-            <a:r>
-              <a:t/>
-            </a:r>
-          </a:p>
-          <a:p xmlns:a="http://schemas.openxmlformats.org/drawingml/2006/main">
-            <a:r>
-              <a:t>On this slide</a:t>
-            </a:r>
-          </a:p>
-          <a:p xmlns:a="http://schemas.openxmlformats.org/drawingml/2006/main">
-            <a:r>
-              <a:t>Finding and limitation: A finding states what the evidence shows. A limitation states where that evidence is incomplete or may not apply. Point to the relevant chart, metric or record.</a:t>
-            </a:r>
-          </a:p>
-          <a:p xmlns:a="http://schemas.openxmlformats.org/drawingml/2006/main">
-            <a:r>
-              <a:t>Defence and reflection: A defence explains why you made a choice. A reflection explains what you learned and would improve. Describe your own contribution with specific evidence.</a:t>
+              <a:t>A polished chart helps only when its target, its units and its evaluation sample are clear.</a:t>
             </a:r>
           </a:p>
         </p:txBody>
@@ -3411,82 +2260,25 @@
           <a:lstStyle xmlns:a="http://schemas.openxmlformats.org/drawingml/2006/main"/>
           <a:p xmlns:a="http://schemas.openxmlformats.org/drawingml/2006/main">
             <a:r>
-              <a:t>A six-minute presentation</a:t>
+              <a:t>Your presentation lasts six minutes, so we split it into three parts of two minutes each.</a:t>
             </a:r>
           </a:p>
+          <a:p xmlns:a="http://schemas.openxmlformats.org/drawingml/2006/main"/>
           <a:p xmlns:a="http://schemas.openxmlformats.org/drawingml/2006/main">
             <a:r>
-              <a:t>Explanation to give</a:t>
+              <a:t>In the first two minutes, we explain the question and the data. What engineering problem did we look at, and what data did we use?</a:t>
             </a:r>
           </a:p>
+          <a:p xmlns:a="http://schemas.openxmlformats.org/drawingml/2006/main"/>
           <a:p xmlns:a="http://schemas.openxmlformats.org/drawingml/2006/main">
             <a:r>
-              <a:t>Explain the chain from engineering question to measured evidence to a bounded recommendation. A finding states what was observed; a limitation identifies where that evidence may not apply.</a:t>
+              <a:t>In minutes three and four, we show the method and one supported result. We choose one result that we can back with a chart or a number, and we explain how we obtained it.</a:t>
             </a:r>
           </a:p>
+          <a:p xmlns:a="http://schemas.openxmlformats.org/drawingml/2006/main"/>
           <a:p xmlns:a="http://schemas.openxmlformats.org/drawingml/2006/main">
             <a:r>
-              <a:t/>
-            </a:r>
-          </a:p>
-          <a:p xmlns:a="http://schemas.openxmlformats.org/drawingml/2006/main">
-            <a:r>
-              <a:t>Worked illustration / lecturer answer</a:t>
-            </a:r>
-          </a:p>
-          <a:p xmlns:a="http://schemas.openxmlformats.org/drawingml/2006/main">
-            <a:r>
-              <a:t>“On this held-out sample, MAE was 3 kW” states a result. “The sample contains only one site” limits the claim. Neither statement alone justifies deployment at every site.</a:t>
-            </a:r>
-          </a:p>
-          <a:p xmlns:a="http://schemas.openxmlformats.org/drawingml/2006/main">
-            <a:r>
-              <a:t/>
-            </a:r>
-          </a:p>
-          <a:p xmlns:a="http://schemas.openxmlformats.org/drawingml/2006/main">
-            <a:r>
-              <a:t>Misconception to address</a:t>
-            </a:r>
-          </a:p>
-          <a:p xmlns:a="http://schemas.openxmlformats.org/drawingml/2006/main">
-            <a:r>
-              <a:t>A polished chart cannot replace a defined target, correct units or an honest description of the evaluation sample.</a:t>
-            </a:r>
-          </a:p>
-          <a:p xmlns:a="http://schemas.openxmlformats.org/drawingml/2006/main">
-            <a:r>
-              <a:t/>
-            </a:r>
-          </a:p>
-          <a:p xmlns:a="http://schemas.openxmlformats.org/drawingml/2006/main">
-            <a:r>
-              <a:t>On this slide</a:t>
-            </a:r>
-          </a:p>
-          <a:p xmlns:a="http://schemas.openxmlformats.org/drawingml/2006/main">
-            <a:r>
-              <a:t>Minutes 1–2: explain the question and data.</a:t>
-            </a:r>
-          </a:p>
-          <a:p xmlns:a="http://schemas.openxmlformats.org/drawingml/2006/main">
-            <a:r>
-              <a:t/>
-            </a:r>
-          </a:p>
-          <a:p xmlns:a="http://schemas.openxmlformats.org/drawingml/2006/main">
-            <a:r>
-              <a:t>Minutes 3–4: show the method and one supported result.</a:t>
-            </a:r>
-          </a:p>
-          <a:p xmlns:a="http://schemas.openxmlformats.org/drawingml/2006/main">
-            <a:r>
-              <a:t/>
-            </a:r>
-          </a:p>
-          <a:p xmlns:a="http://schemas.openxmlformats.org/drawingml/2006/main">
-            <a:r>
-              <a:t>Minutes 5–6: explain limitations, contributions and a next step.</a:t>
+              <a:t>In the last two minutes, we explain the limitations, who contributed what, and a sensible next step. Planning the time this way keeps us calm, and it means we do not run out of time before reaching the honest part about limitations.</a:t>
             </a:r>
           </a:p>
         </p:txBody>
@@ -3556,82 +2348,25 @@
           <a:lstStyle xmlns:a="http://schemas.openxmlformats.org/drawingml/2006/main"/>
           <a:p xmlns:a="http://schemas.openxmlformats.org/drawingml/2006/main">
             <a:r>
-              <a:t>Make the evidence readable</a:t>
+              <a:t>Evidence only helps if the audience can read it. Three habits make it readable.</a:t>
             </a:r>
           </a:p>
+          <a:p xmlns:a="http://schemas.openxmlformats.org/drawingml/2006/main"/>
           <a:p xmlns:a="http://schemas.openxmlformats.org/drawingml/2006/main">
             <a:r>
-              <a:t>Explanation to give</a:t>
+              <a:t>First, we name the chart axes and their units. If the vertical axis shows error, we say it is error in kilowatts, or whichever unit our target uses.</a:t>
             </a:r>
           </a:p>
+          <a:p xmlns:a="http://schemas.openxmlformats.org/drawingml/2006/main"/>
           <a:p xmlns:a="http://schemas.openxmlformats.org/drawingml/2006/main">
             <a:r>
-              <a:t>Explain the chain from engineering question to measured evidence to a bounded recommendation. A finding states what was observed; a limitation identifies where that evidence may not apply.</a:t>
+              <a:t>Second, we state the measured evaluation result and how we obtained it. For example, we say which metric we used, and that it was measured on data the model had not seen during training.</a:t>
             </a:r>
           </a:p>
+          <a:p xmlns:a="http://schemas.openxmlformats.org/drawingml/2006/main"/>
           <a:p xmlns:a="http://schemas.openxmlformats.org/drawingml/2006/main">
             <a:r>
-              <a:t/>
-            </a:r>
-          </a:p>
-          <a:p xmlns:a="http://schemas.openxmlformats.org/drawingml/2006/main">
-            <a:r>
-              <a:t>Worked illustration / lecturer answer</a:t>
-            </a:r>
-          </a:p>
-          <a:p xmlns:a="http://schemas.openxmlformats.org/drawingml/2006/main">
-            <a:r>
-              <a:t>“On this held-out sample, MAE was 3 kW” states a result. “The sample contains only one site” limits the claim. Neither statement alone justifies deployment at every site.</a:t>
-            </a:r>
-          </a:p>
-          <a:p xmlns:a="http://schemas.openxmlformats.org/drawingml/2006/main">
-            <a:r>
-              <a:t/>
-            </a:r>
-          </a:p>
-          <a:p xmlns:a="http://schemas.openxmlformats.org/drawingml/2006/main">
-            <a:r>
-              <a:t>Misconception to address</a:t>
-            </a:r>
-          </a:p>
-          <a:p xmlns:a="http://schemas.openxmlformats.org/drawingml/2006/main">
-            <a:r>
-              <a:t>A polished chart cannot replace a defined target, correct units or an honest description of the evaluation sample.</a:t>
-            </a:r>
-          </a:p>
-          <a:p xmlns:a="http://schemas.openxmlformats.org/drawingml/2006/main">
-            <a:r>
-              <a:t/>
-            </a:r>
-          </a:p>
-          <a:p xmlns:a="http://schemas.openxmlformats.org/drawingml/2006/main">
-            <a:r>
-              <a:t>On this slide</a:t>
-            </a:r>
-          </a:p>
-          <a:p xmlns:a="http://schemas.openxmlformats.org/drawingml/2006/main">
-            <a:r>
-              <a:t>Name the chart axes and their units.</a:t>
-            </a:r>
-          </a:p>
-          <a:p xmlns:a="http://schemas.openxmlformats.org/drawingml/2006/main">
-            <a:r>
-              <a:t/>
-            </a:r>
-          </a:p>
-          <a:p xmlns:a="http://schemas.openxmlformats.org/drawingml/2006/main">
-            <a:r>
-              <a:t>State the measured evaluation result and how you obtained it.</a:t>
-            </a:r>
-          </a:p>
-          <a:p xmlns:a="http://schemas.openxmlformats.org/drawingml/2006/main">
-            <a:r>
-              <a:t/>
-            </a:r>
-          </a:p>
-          <a:p xmlns:a="http://schemas.openxmlformats.org/drawingml/2006/main">
-            <a:r>
-              <a:t>Point to the particular table, plot or calculation that supports your claim.</a:t>
+              <a:t>Third, we point to the particular table, plot or calculation that supports our claim. We say which one it is and we show it. When the audience can see exactly where a claim comes from, they can trust it.</a:t>
             </a:r>
           </a:p>
         </p:txBody>
@@ -3701,82 +2436,25 @@
           <a:lstStyle xmlns:a="http://schemas.openxmlformats.org/drawingml/2006/main"/>
           <a:p xmlns:a="http://schemas.openxmlformats.org/drawingml/2006/main">
             <a:r>
-              <a:t>Limitations of the results</a:t>
+              <a:t>Every project has limits, and stating them clearly is a strength.</a:t>
             </a:r>
           </a:p>
+          <a:p xmlns:a="http://schemas.openxmlformats.org/drawingml/2006/main"/>
           <a:p xmlns:a="http://schemas.openxmlformats.org/drawingml/2006/main">
             <a:r>
-              <a:t>Explanation to give</a:t>
+              <a:t>First, we state what our investigation can support. Perhaps our model predicts well on the sample we tested, and we say so plainly.</a:t>
             </a:r>
           </a:p>
+          <a:p xmlns:a="http://schemas.openxmlformats.org/drawingml/2006/main"/>
           <a:p xmlns:a="http://schemas.openxmlformats.org/drawingml/2006/main">
             <a:r>
-              <a:t>Explain the chain from engineering question to measured evidence to a bounded recommendation. A finding states what was observed; a limitation identifies where that evidence may not apply.</a:t>
+              <a:t>Second, if there is something we do not know, we say what evidence would answer it. For example, if we do not know whether the model works at a new site, we say that data from that site would tell us.</a:t>
             </a:r>
           </a:p>
+          <a:p xmlns:a="http://schemas.openxmlformats.org/drawingml/2006/main"/>
           <a:p xmlns:a="http://schemas.openxmlformats.org/drawingml/2006/main">
             <a:r>
-              <a:t/>
-            </a:r>
-          </a:p>
-          <a:p xmlns:a="http://schemas.openxmlformats.org/drawingml/2006/main">
-            <a:r>
-              <a:t>Worked illustration / lecturer answer</a:t>
-            </a:r>
-          </a:p>
-          <a:p xmlns:a="http://schemas.openxmlformats.org/drawingml/2006/main">
-            <a:r>
-              <a:t>“On this held-out sample, MAE was 3 kW” states a result. “The sample contains only one site” limits the claim. Neither statement alone justifies deployment at every site.</a:t>
-            </a:r>
-          </a:p>
-          <a:p xmlns:a="http://schemas.openxmlformats.org/drawingml/2006/main">
-            <a:r>
-              <a:t/>
-            </a:r>
-          </a:p>
-          <a:p xmlns:a="http://schemas.openxmlformats.org/drawingml/2006/main">
-            <a:r>
-              <a:t>Misconception to address</a:t>
-            </a:r>
-          </a:p>
-          <a:p xmlns:a="http://schemas.openxmlformats.org/drawingml/2006/main">
-            <a:r>
-              <a:t>A polished chart cannot replace a defined target, correct units or an honest description of the evaluation sample.</a:t>
-            </a:r>
-          </a:p>
-          <a:p xmlns:a="http://schemas.openxmlformats.org/drawingml/2006/main">
-            <a:r>
-              <a:t/>
-            </a:r>
-          </a:p>
-          <a:p xmlns:a="http://schemas.openxmlformats.org/drawingml/2006/main">
-            <a:r>
-              <a:t>On this slide</a:t>
-            </a:r>
-          </a:p>
-          <a:p xmlns:a="http://schemas.openxmlformats.org/drawingml/2006/main">
-            <a:r>
-              <a:t>State what your investigation can support.</a:t>
-            </a:r>
-          </a:p>
-          <a:p xmlns:a="http://schemas.openxmlformats.org/drawingml/2006/main">
-            <a:r>
-              <a:t/>
-            </a:r>
-          </a:p>
-          <a:p xmlns:a="http://schemas.openxmlformats.org/drawingml/2006/main">
-            <a:r>
-              <a:t>If an answer is unknown, say what evidence would resolve it.</a:t>
-            </a:r>
-          </a:p>
-          <a:p xmlns:a="http://schemas.openxmlformats.org/drawingml/2006/main">
-            <a:r>
-              <a:t/>
-            </a:r>
-          </a:p>
-          <a:p xmlns:a="http://schemas.openxmlformats.org/drawingml/2006/main">
-            <a:r>
-              <a:t>Teaching data alone do not establish readiness for real operation.</a:t>
+              <a:t>Third, we remember that teaching data alone do not show that a model is ready for real operation. Real equipment, real weather and real people bring conditions our data may not include. Saying this honestly shows engineering maturity and earns the audience's trust.</a:t>
             </a:r>
           </a:p>
         </p:txBody>
@@ -3846,62 +2524,25 @@
           <a:lstStyle xmlns:a="http://schemas.openxmlformats.org/drawingml/2006/main"/>
           <a:p xmlns:a="http://schemas.openxmlformats.org/drawingml/2006/main">
             <a:r>
-              <a:t>Preparation checkpoint</a:t>
+              <a:t>Here is a checkpoint to prepare with. Each of us should be able to explain one decision we personally worked on and point to its evidence.</a:t>
             </a:r>
           </a:p>
+          <a:p xmlns:a="http://schemas.openxmlformats.org/drawingml/2006/main"/>
           <a:p xmlns:a="http://schemas.openxmlformats.org/drawingml/2006/main">
             <a:r>
-              <a:t>Explanation to give</a:t>
+              <a:t>Choose your decision now. It might be how you handled missing values, how you split the data, or why you chose a particular metric. Find the cell, chart or entry in the contribution log where it appears.</a:t>
             </a:r>
           </a:p>
+          <a:p xmlns:a="http://schemas.openxmlformats.org/drawingml/2006/main"/>
           <a:p xmlns:a="http://schemas.openxmlformats.org/drawingml/2006/main">
             <a:r>
-              <a:t>Each learner should be able to explain one decision they personally worked on and point to its evidence in the project.</a:t>
+              <a:t>Then prepare three short things to say. What did you decide? Why did you decide it? What is one limitation of that choice?</a:t>
             </a:r>
           </a:p>
+          <a:p xmlns:a="http://schemas.openxmlformats.org/drawingml/2006/main"/>
           <a:p xmlns:a="http://schemas.openxmlformats.org/drawingml/2006/main">
             <a:r>
-              <a:t/>
-            </a:r>
-          </a:p>
-          <a:p xmlns:a="http://schemas.openxmlformats.org/drawingml/2006/main">
-            <a:r>
-              <a:t>Worked illustration / lecturer answer</a:t>
-            </a:r>
-          </a:p>
-          <a:p xmlns:a="http://schemas.openxmlformats.org/drawingml/2006/main">
-            <a:r>
-              <a:t>Ask for the relevant cell, chart or contribution entry, then a reason for that choice and a limitation. This connects authorship to understanding.</a:t>
-            </a:r>
-          </a:p>
-          <a:p xmlns:a="http://schemas.openxmlformats.org/drawingml/2006/main">
-            <a:r>
-              <a:t/>
-            </a:r>
-          </a:p>
-          <a:p xmlns:a="http://schemas.openxmlformats.org/drawingml/2006/main">
-            <a:r>
-              <a:t>Misconception to address</a:t>
-            </a:r>
-          </a:p>
-          <a:p xmlns:a="http://schemas.openxmlformats.org/drawingml/2006/main">
-            <a:r>
-              <a:t>Live discussion is formative. Collect the individual written evidence required by DEMO so the automatic assessment has the explanation in an accessible form.</a:t>
-            </a:r>
-          </a:p>
-          <a:p xmlns:a="http://schemas.openxmlformats.org/drawingml/2006/main">
-            <a:r>
-              <a:t/>
-            </a:r>
-          </a:p>
-          <a:p xmlns:a="http://schemas.openxmlformats.org/drawingml/2006/main">
-            <a:r>
-              <a:t>On this slide</a:t>
-            </a:r>
-          </a:p>
-          <a:p xmlns:a="http://schemas.openxmlformats.org/drawingml/2006/main">
-            <a:r>
-              <a:t>Each student can explain one decision they personally worked on and point to its evidence.</a:t>
+              <a:t>Talking about this today is practice, and nobody is being graded on it live. The marks come from the written evidence you submit.</a:t>
             </a:r>
           </a:p>
         </p:txBody>
@@ -6952,6 +5593,10 @@
             <a:noFill/>
           </a:ln>
         </p:spPr>
+        <p:txBody xmlns:a="http://schemas.openxmlformats.org/drawingml/2006/main">
+          <a:bodyPr/>
+          <a:p/>
+        </p:txBody>
       </p:sp>
       <p:sp>
         <p:nvSpPr>
@@ -7666,6 +6311,10 @@
             <a:noFill/>
           </a:ln>
         </p:spPr>
+        <p:txBody xmlns:a="http://schemas.openxmlformats.org/drawingml/2006/main">
+          <a:bodyPr/>
+          <a:p/>
+        </p:txBody>
       </p:sp>
       <p:sp>
         <p:nvSpPr>
@@ -9147,6 +7796,10 @@
             <a:noFill/>
           </a:ln>
         </p:spPr>
+        <p:txBody xmlns:a="http://schemas.openxmlformats.org/drawingml/2006/main">
+          <a:bodyPr/>
+          <a:p/>
+        </p:txBody>
       </p:sp>
       <p:sp>
         <p:nvSpPr>
@@ -10944,6 +9597,10 @@
             <a:noFill/>
           </a:ln>
         </p:spPr>
+        <p:txBody xmlns:a="http://schemas.openxmlformats.org/drawingml/2006/main">
+          <a:bodyPr/>
+          <a:p/>
+        </p:txBody>
       </p:sp>
       <p:sp>
         <p:nvSpPr>
@@ -12741,6 +11398,10 @@
             <a:noFill/>
           </a:ln>
         </p:spPr>
+        <p:txBody xmlns:a="http://schemas.openxmlformats.org/drawingml/2006/main">
+          <a:bodyPr/>
+          <a:p/>
+        </p:txBody>
       </p:sp>
       <p:sp>
         <p:nvSpPr>
@@ -14538,6 +13199,10 @@
             <a:noFill/>
           </a:ln>
         </p:spPr>
+        <p:txBody xmlns:a="http://schemas.openxmlformats.org/drawingml/2006/main">
+          <a:bodyPr/>
+          <a:p/>
+        </p:txBody>
       </p:sp>
       <p:sp>
         <p:nvSpPr>
@@ -16335,6 +15000,10 @@
             <a:noFill/>
           </a:ln>
         </p:spPr>
+        <p:txBody xmlns:a="http://schemas.openxmlformats.org/drawingml/2006/main">
+          <a:bodyPr/>
+          <a:p/>
+        </p:txBody>
       </p:sp>
       <p:sp>
         <p:nvSpPr>
@@ -18132,6 +16801,10 @@
             <a:noFill/>
           </a:ln>
         </p:spPr>
+        <p:txBody xmlns:a="http://schemas.openxmlformats.org/drawingml/2006/main">
+          <a:bodyPr/>
+          <a:p/>
+        </p:txBody>
       </p:sp>
       <p:sp>
         <p:nvSpPr>
@@ -19613,6 +18286,10 @@
             <a:noFill/>
           </a:ln>
         </p:spPr>
+        <p:txBody xmlns:a="http://schemas.openxmlformats.org/drawingml/2006/main">
+          <a:bodyPr/>
+          <a:p/>
+        </p:txBody>
       </p:sp>
       <p:sp>
         <p:nvSpPr>
@@ -21410,6 +20087,10 @@
             <a:noFill/>
           </a:ln>
         </p:spPr>
+        <p:txBody xmlns:a="http://schemas.openxmlformats.org/drawingml/2006/main">
+          <a:bodyPr/>
+          <a:p/>
+        </p:txBody>
       </p:sp>
       <p:sp>
         <p:nvSpPr>
@@ -22891,6 +21572,10 @@
             <a:noFill/>
           </a:ln>
         </p:spPr>
+        <p:txBody xmlns:a="http://schemas.openxmlformats.org/drawingml/2006/main">
+          <a:bodyPr/>
+          <a:p/>
+        </p:txBody>
       </p:sp>
       <p:sp>
         <p:nvSpPr>
@@ -24501,6 +23186,10 @@
             <a:noFill/>
           </a:ln>
         </p:spPr>
+        <p:txBody xmlns:a="http://schemas.openxmlformats.org/drawingml/2006/main">
+          <a:bodyPr/>
+          <a:p/>
+        </p:txBody>
       </p:sp>
       <p:sp>
         <p:nvSpPr>
@@ -25035,6 +23724,10 @@
             <a:noFill/>
           </a:ln>
         </p:spPr>
+        <p:txBody xmlns:a="http://schemas.openxmlformats.org/drawingml/2006/main">
+          <a:bodyPr/>
+          <a:p/>
+        </p:txBody>
       </p:sp>
       <p:sp>
         <p:nvSpPr>
@@ -25381,6 +24074,10 @@
             <a:noFill/>
           </a:ln>
         </p:spPr>
+        <p:txBody xmlns:a="http://schemas.openxmlformats.org/drawingml/2006/main">
+          <a:bodyPr/>
+          <a:p/>
+        </p:txBody>
       </p:sp>
       <p:sp>
         <p:nvSpPr>
@@ -26258,6 +24955,10 @@
             <a:noFill/>
           </a:ln>
         </p:spPr>
+        <p:txBody xmlns:a="http://schemas.openxmlformats.org/drawingml/2006/main">
+          <a:bodyPr/>
+          <a:p/>
+        </p:txBody>
       </p:sp>
       <p:sp>
         <p:nvSpPr>
@@ -27423,6 +26124,10 @@
             <a:noFill/>
           </a:ln>
         </p:spPr>
+        <p:txBody xmlns:a="http://schemas.openxmlformats.org/drawingml/2006/main">
+          <a:bodyPr/>
+          <a:p/>
+        </p:txBody>
       </p:sp>
       <p:sp>
         <p:nvSpPr>
@@ -27769,6 +26474,10 @@
             <a:noFill/>
           </a:ln>
         </p:spPr>
+        <p:txBody xmlns:a="http://schemas.openxmlformats.org/drawingml/2006/main">
+          <a:bodyPr/>
+          <a:p/>
+        </p:txBody>
       </p:sp>
       <p:sp>
         <p:nvSpPr>
@@ -27799,6 +26508,10 @@
             <a:noFill/>
           </a:ln>
         </p:spPr>
+        <p:txBody xmlns:a="http://schemas.openxmlformats.org/drawingml/2006/main">
+          <a:bodyPr/>
+          <a:p/>
+        </p:txBody>
       </p:sp>
       <p:sp>
         <p:nvSpPr>
@@ -28332,6 +27045,10 @@
             <a:noFill/>
           </a:ln>
         </p:spPr>
+        <p:txBody xmlns:a="http://schemas.openxmlformats.org/drawingml/2006/main">
+          <a:bodyPr/>
+          <a:p/>
+        </p:txBody>
       </p:sp>
       <p:sp>
         <p:nvSpPr>
@@ -29813,6 +28530,10 @@
             <a:noFill/>
           </a:ln>
         </p:spPr>
+        <p:txBody xmlns:a="http://schemas.openxmlformats.org/drawingml/2006/main">
+          <a:bodyPr/>
+          <a:p/>
+        </p:txBody>
       </p:sp>
       <p:sp>
         <p:nvSpPr>
@@ -30159,6 +28880,10 @@
             <a:noFill/>
           </a:ln>
         </p:spPr>
+        <p:txBody xmlns:a="http://schemas.openxmlformats.org/drawingml/2006/main">
+          <a:bodyPr/>
+          <a:p/>
+        </p:txBody>
       </p:sp>
       <p:sp>
         <p:nvSpPr>
@@ -30534,6 +29259,10 @@
             <a:noFill/>
           </a:ln>
         </p:spPr>
+        <p:txBody xmlns:a="http://schemas.openxmlformats.org/drawingml/2006/main">
+          <a:bodyPr/>
+          <a:p/>
+        </p:txBody>
       </p:sp>
       <p:sp>
         <p:nvSpPr>
@@ -32144,6 +30873,10 @@
             <a:noFill/>
           </a:ln>
         </p:spPr>
+        <p:txBody xmlns:a="http://schemas.openxmlformats.org/drawingml/2006/main">
+          <a:bodyPr/>
+          <a:p/>
+        </p:txBody>
       </p:sp>
       <p:sp>
         <p:nvSpPr>
@@ -33683,6 +32416,10 @@
             <a:noFill/>
           </a:ln>
         </p:spPr>
+        <p:txBody xmlns:a="http://schemas.openxmlformats.org/drawingml/2006/main">
+          <a:bodyPr/>
+          <a:p/>
+        </p:txBody>
       </p:sp>
       <p:sp>
         <p:nvSpPr>
@@ -34029,6 +32766,10 @@
             <a:noFill/>
           </a:ln>
         </p:spPr>
+        <p:txBody xmlns:a="http://schemas.openxmlformats.org/drawingml/2006/main">
+          <a:bodyPr/>
+          <a:p/>
+        </p:txBody>
       </p:sp>
       <p:sp>
         <p:nvSpPr>
@@ -34404,6 +33145,10 @@
             <a:noFill/>
           </a:ln>
         </p:spPr>
+        <p:txBody xmlns:a="http://schemas.openxmlformats.org/drawingml/2006/main">
+          <a:bodyPr/>
+          <a:p/>
+        </p:txBody>
       </p:sp>
       <p:sp>
         <p:nvSpPr>
@@ -34750,6 +33495,10 @@
             <a:noFill/>
           </a:ln>
         </p:spPr>
+        <p:txBody xmlns:a="http://schemas.openxmlformats.org/drawingml/2006/main">
+          <a:bodyPr/>
+          <a:p/>
+        </p:txBody>
       </p:sp>
       <p:sp>
         <p:nvSpPr>
@@ -34780,6 +33529,10 @@
             <a:noFill/>
           </a:ln>
         </p:spPr>
+        <p:txBody xmlns:a="http://schemas.openxmlformats.org/drawingml/2006/main">
+          <a:bodyPr/>
+          <a:p/>
+        </p:txBody>
       </p:sp>
       <p:sp>
         <p:nvSpPr>
@@ -35313,6 +34066,10 @@
             <a:noFill/>
           </a:ln>
         </p:spPr>
+        <p:txBody xmlns:a="http://schemas.openxmlformats.org/drawingml/2006/main">
+          <a:bodyPr/>
+          <a:p/>
+        </p:txBody>
       </p:sp>
       <p:sp>
         <p:nvSpPr>
@@ -35659,6 +34416,10 @@
             <a:noFill/>
           </a:ln>
         </p:spPr>
+        <p:txBody xmlns:a="http://schemas.openxmlformats.org/drawingml/2006/main">
+          <a:bodyPr/>
+          <a:p/>
+        </p:txBody>
       </p:sp>
       <p:sp>
         <p:nvSpPr>
@@ -36005,6 +34766,10 @@
             <a:noFill/>
           </a:ln>
         </p:spPr>
+        <p:txBody xmlns:a="http://schemas.openxmlformats.org/drawingml/2006/main">
+          <a:bodyPr/>
+          <a:p/>
+        </p:txBody>
       </p:sp>
       <p:sp>
         <p:nvSpPr>
@@ -36538,6 +35303,10 @@
             <a:noFill/>
           </a:ln>
         </p:spPr>
+        <p:txBody xmlns:a="http://schemas.openxmlformats.org/drawingml/2006/main">
+          <a:bodyPr/>
+          <a:p/>
+        </p:txBody>
       </p:sp>
       <p:sp>
         <p:nvSpPr>
@@ -38019,6 +36788,10 @@
             <a:noFill/>
           </a:ln>
         </p:spPr>
+        <p:txBody xmlns:a="http://schemas.openxmlformats.org/drawingml/2006/main">
+          <a:bodyPr/>
+          <a:p/>
+        </p:txBody>
       </p:sp>
       <p:sp>
         <p:nvSpPr>
@@ -39500,6 +38273,10 @@
             <a:noFill/>
           </a:ln>
         </p:spPr>
+        <p:txBody xmlns:a="http://schemas.openxmlformats.org/drawingml/2006/main">
+          <a:bodyPr/>
+          <a:p/>
+        </p:txBody>
       </p:sp>
       <p:sp>
         <p:nvSpPr>
@@ -40981,6 +39758,10 @@
             <a:noFill/>
           </a:ln>
         </p:spPr>
+        <p:txBody xmlns:a="http://schemas.openxmlformats.org/drawingml/2006/main">
+          <a:bodyPr/>
+          <a:p/>
+        </p:txBody>
       </p:sp>
       <p:sp>
         <p:nvSpPr>
@@ -41327,6 +40108,10 @@
             <a:noFill/>
           </a:ln>
         </p:spPr>
+        <p:txBody xmlns:a="http://schemas.openxmlformats.org/drawingml/2006/main">
+          <a:bodyPr/>
+          <a:p/>
+        </p:txBody>
       </p:sp>
       <p:sp>
         <p:nvSpPr>

--- a/IUEA_Teaching_Plan/decks/CML3112_Week15_Design_Infrastructure.pptx
+++ b/IUEA_Teaching_Plan/decks/CML3112_Week15_Design_Infrastructure.pptx
@@ -32037,7 +32037,7 @@
                 <a:ea typeface="Calibri"/>
                 <a:cs typeface="Calibri"/>
               </a:rPr>
-              <a:t>Save your work and check the required submission files.</a:t>
+              <a:t>Check that the required files are in place.</a:t>
             </a:r>
           </a:p>
         </p:txBody>
